--- a/public/deskbrief.pptx
+++ b/public/deskbrief.pptx
@@ -3128,7 +3128,7 @@
                 </a:solidFill>
                 <a:latin typeface="Calibri"/>
               </a:rPr>
-              <a:t>8 names  |  generated 04 Sep 2026 16:30  |  source: Yahoo Finance via yfinance, Indian financial RSS</a:t>
+              <a:t>8 names  |  generated 07 Sep 2026 17:48  |  source: Yahoo Finance via yfinance, Indian financial RSS</a:t>
             </a:r>
           </a:p>
         </p:txBody>
@@ -3428,7 +3428,7 @@
                           </a:solidFill>
                           <a:latin typeface="Calibri"/>
                         </a:rPr>
-                        <a:t>1,840</a:t>
+                        <a:t>1,854</a:t>
                       </a:r>
                     </a:p>
                   </a:txBody>
@@ -3447,11 +3447,57 @@
                       <a:r>
                         <a:rPr sz="1000" b="0">
                           <a:solidFill>
+                            <a:srgbClr val="0B7A3B"/>
+                          </a:solidFill>
+                          <a:latin typeface="Calibri"/>
+                        </a:rPr>
+                        <a:t>+0.76%</a:t>
+                      </a:r>
+                    </a:p>
+                  </a:txBody>
+                  <a:tcPr>
+                    <a:solidFill>
+                      <a:srgbClr val="F3F5F7"/>
+                    </a:solidFill>
+                  </a:tcPr>
+                </a:tc>
+                <a:tc>
+                  <a:txBody>
+                    <a:bodyPr/>
+                    <a:lstStyle/>
+                    <a:p>
+                      <a:pPr algn="r"/>
+                      <a:r>
+                        <a:rPr sz="1000" b="0">
+                          <a:solidFill>
+                            <a:srgbClr val="0B7A3B"/>
+                          </a:solidFill>
+                          <a:latin typeface="Calibri"/>
+                        </a:rPr>
+                        <a:t>+2.32%</a:t>
+                      </a:r>
+                    </a:p>
+                  </a:txBody>
+                  <a:tcPr>
+                    <a:solidFill>
+                      <a:srgbClr val="F3F5F7"/>
+                    </a:solidFill>
+                  </a:tcPr>
+                </a:tc>
+                <a:tc>
+                  <a:txBody>
+                    <a:bodyPr/>
+                    <a:lstStyle/>
+                    <a:p>
+                      <a:pPr algn="r"/>
+                      <a:r>
+                        <a:rPr sz="1000" b="0">
+                          <a:solidFill>
                             <a:srgbClr val="B3261E"/>
                           </a:solidFill>
                           <a:latin typeface="Calibri"/>
                         </a:rPr>
-                        <a:t>-1.55%</a:t>
+                        <a:t>-5.40%</a:t>
                       </a:r>
                     </a:p>
                   </a:txBody>
@@ -3470,11 +3516,11 @@
                       <a:r>
                         <a:rPr sz="1000" b="0">
                           <a:solidFill>
-                            <a:srgbClr val="B3261E"/>
-                          </a:solidFill>
-                          <a:latin typeface="Calibri"/>
-                        </a:rPr>
-                        <a:t>-2.25%</a:t>
+                            <a:srgbClr val="1F2A37"/>
+                          </a:solidFill>
+                          <a:latin typeface="Calibri"/>
+                        </a:rPr>
+                        <a:t>-13.2%</a:t>
                       </a:r>
                     </a:p>
                   </a:txBody>
@@ -3493,11 +3539,11 @@
                       <a:r>
                         <a:rPr sz="1000" b="0">
                           <a:solidFill>
-                            <a:srgbClr val="B3261E"/>
-                          </a:solidFill>
-                          <a:latin typeface="Calibri"/>
-                        </a:rPr>
-                        <a:t>-5.54%</a:t>
+                            <a:srgbClr val="1F2A37"/>
+                          </a:solidFill>
+                          <a:latin typeface="Calibri"/>
+                        </a:rPr>
+                        <a:t>24%</a:t>
                       </a:r>
                     </a:p>
                   </a:txBody>
@@ -3520,53 +3566,7 @@
                           </a:solidFill>
                           <a:latin typeface="Calibri"/>
                         </a:rPr>
-                        <a:t>-13.9%</a:t>
-                      </a:r>
-                    </a:p>
-                  </a:txBody>
-                  <a:tcPr>
-                    <a:solidFill>
-                      <a:srgbClr val="F3F5F7"/>
-                    </a:solidFill>
-                  </a:tcPr>
-                </a:tc>
-                <a:tc>
-                  <a:txBody>
-                    <a:bodyPr/>
-                    <a:lstStyle/>
-                    <a:p>
-                      <a:pPr algn="r"/>
-                      <a:r>
-                        <a:rPr sz="1000" b="0">
-                          <a:solidFill>
-                            <a:srgbClr val="1F2A37"/>
-                          </a:solidFill>
-                          <a:latin typeface="Calibri"/>
-                        </a:rPr>
-                        <a:t>24%</a:t>
-                      </a:r>
-                    </a:p>
-                  </a:txBody>
-                  <a:tcPr>
-                    <a:solidFill>
-                      <a:srgbClr val="F3F5F7"/>
-                    </a:solidFill>
-                  </a:tcPr>
-                </a:tc>
-                <a:tc>
-                  <a:txBody>
-                    <a:bodyPr/>
-                    <a:lstStyle/>
-                    <a:p>
-                      <a:pPr algn="r"/>
-                      <a:r>
-                        <a:rPr sz="1000" b="0">
-                          <a:solidFill>
-                            <a:srgbClr val="1F2A37"/>
-                          </a:solidFill>
-                          <a:latin typeface="Calibri"/>
-                        </a:rPr>
-                        <a:t>38.5</a:t>
+                        <a:t>38.8</a:t>
                       </a:r>
                     </a:p>
                   </a:txBody>
@@ -3614,7 +3614,7 @@
                           </a:solidFill>
                           <a:latin typeface="Calibri"/>
                         </a:rPr>
-                        <a:t>712</a:t>
+                        <a:t>710</a:t>
                       </a:r>
                     </a:p>
                   </a:txBody>
@@ -3633,11 +3633,34 @@
                       <a:r>
                         <a:rPr sz="1000" b="0">
                           <a:solidFill>
+                            <a:srgbClr val="B3261E"/>
+                          </a:solidFill>
+                          <a:latin typeface="Calibri"/>
+                        </a:rPr>
+                        <a:t>-0.22%</a:t>
+                      </a:r>
+                    </a:p>
+                  </a:txBody>
+                  <a:tcPr>
+                    <a:solidFill>
+                      <a:srgbClr val="FFFFFF"/>
+                    </a:solidFill>
+                  </a:tcPr>
+                </a:tc>
+                <a:tc>
+                  <a:txBody>
+                    <a:bodyPr/>
+                    <a:lstStyle/>
+                    <a:p>
+                      <a:pPr algn="r"/>
+                      <a:r>
+                        <a:rPr sz="1000" b="0">
+                          <a:solidFill>
                             <a:srgbClr val="0B7A3B"/>
                           </a:solidFill>
                           <a:latin typeface="Calibri"/>
                         </a:rPr>
-                        <a:t>+0.77%</a:t>
+                        <a:t>+0.21%</a:t>
                       </a:r>
                     </a:p>
                   </a:txBody>
@@ -3660,7 +3683,7 @@
                           </a:solidFill>
                           <a:latin typeface="Calibri"/>
                         </a:rPr>
-                        <a:t>-1.14%</a:t>
+                        <a:t>-2.80%</a:t>
                       </a:r>
                     </a:p>
                   </a:txBody>
@@ -3679,11 +3702,11 @@
                       <a:r>
                         <a:rPr sz="1000" b="0">
                           <a:solidFill>
-                            <a:srgbClr val="B3261E"/>
-                          </a:solidFill>
-                          <a:latin typeface="Calibri"/>
-                        </a:rPr>
-                        <a:t>-3.02%</a:t>
+                            <a:srgbClr val="1F2A37"/>
+                          </a:solidFill>
+                          <a:latin typeface="Calibri"/>
+                        </a:rPr>
+                        <a:t>-28.5%</a:t>
                       </a:r>
                     </a:p>
                   </a:txBody>
@@ -3706,7 +3729,7 @@
                           </a:solidFill>
                           <a:latin typeface="Calibri"/>
                         </a:rPr>
-                        <a:t>-28.3%</a:t>
+                        <a:t>14%</a:t>
                       </a:r>
                     </a:p>
                   </a:txBody>
@@ -3729,30 +3752,7 @@
                           </a:solidFill>
                           <a:latin typeface="Calibri"/>
                         </a:rPr>
-                        <a:t>14%</a:t>
-                      </a:r>
-                    </a:p>
-                  </a:txBody>
-                  <a:tcPr>
-                    <a:solidFill>
-                      <a:srgbClr val="FFFFFF"/>
-                    </a:solidFill>
-                  </a:tcPr>
-                </a:tc>
-                <a:tc>
-                  <a:txBody>
-                    <a:bodyPr/>
-                    <a:lstStyle/>
-                    <a:p>
-                      <a:pPr algn="r"/>
-                      <a:r>
-                        <a:rPr sz="1000" b="0">
-                          <a:solidFill>
-                            <a:srgbClr val="1F2A37"/>
-                          </a:solidFill>
-                          <a:latin typeface="Calibri"/>
-                        </a:rPr>
-                        <a:t>15.6</a:t>
+                        <a:t>15.5</a:t>
                       </a:r>
                     </a:p>
                   </a:txBody>
@@ -3800,7 +3800,7 @@
                           </a:solidFill>
                           <a:latin typeface="Calibri"/>
                         </a:rPr>
-                        <a:t>1,423</a:t>
+                        <a:t>1,428</a:t>
                       </a:r>
                     </a:p>
                   </a:txBody>
@@ -3819,11 +3819,34 @@
                       <a:r>
                         <a:rPr sz="1000" b="0">
                           <a:solidFill>
+                            <a:srgbClr val="0B7A3B"/>
+                          </a:solidFill>
+                          <a:latin typeface="Calibri"/>
+                        </a:rPr>
+                        <a:t>+0.30%</a:t>
+                      </a:r>
+                    </a:p>
+                  </a:txBody>
+                  <a:tcPr>
+                    <a:solidFill>
+                      <a:srgbClr val="F3F5F7"/>
+                    </a:solidFill>
+                  </a:tcPr>
+                </a:tc>
+                <a:tc>
+                  <a:txBody>
+                    <a:bodyPr/>
+                    <a:lstStyle/>
+                    <a:p>
+                      <a:pPr algn="r"/>
+                      <a:r>
+                        <a:rPr sz="1000" b="0">
+                          <a:solidFill>
                             <a:srgbClr val="B3261E"/>
                           </a:solidFill>
                           <a:latin typeface="Calibri"/>
                         </a:rPr>
-                        <a:t>-0.48%</a:t>
+                        <a:t>-1.82%</a:t>
                       </a:r>
                     </a:p>
                   </a:txBody>
@@ -3846,7 +3869,7 @@
                           </a:solidFill>
                           <a:latin typeface="Calibri"/>
                         </a:rPr>
-                        <a:t>+0.03%</a:t>
+                        <a:t>+0.46%</a:t>
                       </a:r>
                     </a:p>
                   </a:txBody>
@@ -3865,11 +3888,11 @@
                       <a:r>
                         <a:rPr sz="1000" b="0">
                           <a:solidFill>
-                            <a:srgbClr val="B3261E"/>
-                          </a:solidFill>
-                          <a:latin typeface="Calibri"/>
-                        </a:rPr>
-                        <a:t>-2.35%</a:t>
+                            <a:srgbClr val="1F2A37"/>
+                          </a:solidFill>
+                          <a:latin typeface="Calibri"/>
+                        </a:rPr>
+                        <a:t>-2.2%</a:t>
                       </a:r>
                     </a:p>
                   </a:txBody>
@@ -3892,7 +3915,7 @@
                           </a:solidFill>
                           <a:latin typeface="Calibri"/>
                         </a:rPr>
-                        <a:t>-2.5%</a:t>
+                        <a:t>16%</a:t>
                       </a:r>
                     </a:p>
                   </a:txBody>
@@ -3915,30 +3938,7 @@
                           </a:solidFill>
                           <a:latin typeface="Calibri"/>
                         </a:rPr>
-                        <a:t>17%</a:t>
-                      </a:r>
-                    </a:p>
-                  </a:txBody>
-                  <a:tcPr>
-                    <a:solidFill>
-                      <a:srgbClr val="F3F5F7"/>
-                    </a:solidFill>
-                  </a:tcPr>
-                </a:tc>
-                <a:tc>
-                  <a:txBody>
-                    <a:bodyPr/>
-                    <a:lstStyle/>
-                    <a:p>
-                      <a:pPr algn="r"/>
-                      <a:r>
-                        <a:rPr sz="1000" b="0">
-                          <a:solidFill>
-                            <a:srgbClr val="1F2A37"/>
-                          </a:solidFill>
-                          <a:latin typeface="Calibri"/>
-                        </a:rPr>
-                        <a:t>18.4</a:t>
+                        <a:t>18.5</a:t>
                       </a:r>
                     </a:p>
                   </a:txBody>
@@ -3986,7 +3986,7 @@
                           </a:solidFill>
                           <a:latin typeface="Calibri"/>
                         </a:rPr>
-                        <a:t>1,130</a:t>
+                        <a:t>1,088</a:t>
                       </a:r>
                     </a:p>
                   </a:txBody>
@@ -4009,7 +4009,7 @@
                           </a:solidFill>
                           <a:latin typeface="Calibri"/>
                         </a:rPr>
-                        <a:t>-0.03%</a:t>
+                        <a:t>-3.76%</a:t>
                       </a:r>
                     </a:p>
                   </a:txBody>
@@ -4032,7 +4032,7 @@
                           </a:solidFill>
                           <a:latin typeface="Calibri"/>
                         </a:rPr>
-                        <a:t>-1.22%</a:t>
+                        <a:t>-4.08%</a:t>
                       </a:r>
                     </a:p>
                   </a:txBody>
@@ -4055,7 +4055,7 @@
                           </a:solidFill>
                           <a:latin typeface="Calibri"/>
                         </a:rPr>
-                        <a:t>-3.00%</a:t>
+                        <a:t>-7.45%</a:t>
                       </a:r>
                     </a:p>
                   </a:txBody>
@@ -4078,7 +4078,7 @@
                           </a:solidFill>
                           <a:latin typeface="Calibri"/>
                         </a:rPr>
-                        <a:t>-31.7%</a:t>
+                        <a:t>-34.3%</a:t>
                       </a:r>
                     </a:p>
                   </a:txBody>
@@ -4124,7 +4124,7 @@
                           </a:solidFill>
                           <a:latin typeface="Calibri"/>
                         </a:rPr>
-                        <a:t>14.8</a:t>
+                        <a:t>14.2</a:t>
                       </a:r>
                     </a:p>
                   </a:txBody>
@@ -4191,11 +4191,34 @@
                       <a:r>
                         <a:rPr sz="1000" b="0">
                           <a:solidFill>
+                            <a:srgbClr val="B3261E"/>
+                          </a:solidFill>
+                          <a:latin typeface="Calibri"/>
+                        </a:rPr>
+                        <a:t>-0.23%</a:t>
+                      </a:r>
+                    </a:p>
+                  </a:txBody>
+                  <a:tcPr>
+                    <a:solidFill>
+                      <a:srgbClr val="F3F5F7"/>
+                    </a:solidFill>
+                  </a:tcPr>
+                </a:tc>
+                <a:tc>
+                  <a:txBody>
+                    <a:bodyPr/>
+                    <a:lstStyle/>
+                    <a:p>
+                      <a:pPr algn="r"/>
+                      <a:r>
+                        <a:rPr sz="1000" b="0">
+                          <a:solidFill>
                             <a:srgbClr val="0B7A3B"/>
                           </a:solidFill>
                           <a:latin typeface="Calibri"/>
                         </a:rPr>
-                        <a:t>+0.42%</a:t>
+                        <a:t>+3.13%</a:t>
                       </a:r>
                     </a:p>
                   </a:txBody>
@@ -4218,7 +4241,7 @@
                           </a:solidFill>
                           <a:latin typeface="Calibri"/>
                         </a:rPr>
-                        <a:t>-0.71%</a:t>
+                        <a:t>-7.90%</a:t>
                       </a:r>
                     </a:p>
                   </a:txBody>
@@ -4237,11 +4260,11 @@
                       <a:r>
                         <a:rPr sz="1000" b="0">
                           <a:solidFill>
-                            <a:srgbClr val="B3261E"/>
-                          </a:solidFill>
-                          <a:latin typeface="Calibri"/>
-                        </a:rPr>
-                        <a:t>-7.63%</a:t>
+                            <a:srgbClr val="1F2A37"/>
+                          </a:solidFill>
+                          <a:latin typeface="Calibri"/>
+                        </a:rPr>
+                        <a:t>-34.5%</a:t>
                       </a:r>
                     </a:p>
                   </a:txBody>
@@ -4264,7 +4287,7 @@
                           </a:solidFill>
                           <a:latin typeface="Calibri"/>
                         </a:rPr>
-                        <a:t>-34.3%</a:t>
+                        <a:t>23%</a:t>
                       </a:r>
                     </a:p>
                   </a:txBody>
@@ -4287,30 +4310,7 @@
                           </a:solidFill>
                           <a:latin typeface="Calibri"/>
                         </a:rPr>
-                        <a:t>23%</a:t>
-                      </a:r>
-                    </a:p>
-                  </a:txBody>
-                  <a:tcPr>
-                    <a:solidFill>
-                      <a:srgbClr val="F3F5F7"/>
-                    </a:solidFill>
-                  </a:tcPr>
-                </a:tc>
-                <a:tc>
-                  <a:txBody>
-                    <a:bodyPr/>
-                    <a:lstStyle/>
-                    <a:p>
-                      <a:pPr algn="r"/>
-                      <a:r>
-                        <a:rPr sz="1000" b="0">
-                          <a:solidFill>
-                            <a:srgbClr val="1F2A37"/>
-                          </a:solidFill>
-                          <a:latin typeface="Calibri"/>
-                        </a:rPr>
-                        <a:t>16.9</a:t>
+                        <a:t>16.6</a:t>
                       </a:r>
                     </a:p>
                   </a:txBody>
@@ -4358,7 +4358,7 @@
                           </a:solidFill>
                           <a:latin typeface="Calibri"/>
                         </a:rPr>
-                        <a:t>3,964</a:t>
+                        <a:t>3,999</a:t>
                       </a:r>
                     </a:p>
                   </a:txBody>
@@ -4377,11 +4377,34 @@
                       <a:r>
                         <a:rPr sz="1000" b="0">
                           <a:solidFill>
+                            <a:srgbClr val="0B7A3B"/>
+                          </a:solidFill>
+                          <a:latin typeface="Calibri"/>
+                        </a:rPr>
+                        <a:t>+0.88%</a:t>
+                      </a:r>
+                    </a:p>
+                  </a:txBody>
+                  <a:tcPr>
+                    <a:solidFill>
+                      <a:srgbClr val="FFFFFF"/>
+                    </a:solidFill>
+                  </a:tcPr>
+                </a:tc>
+                <a:tc>
+                  <a:txBody>
+                    <a:bodyPr/>
+                    <a:lstStyle/>
+                    <a:p>
+                      <a:pPr algn="r"/>
+                      <a:r>
+                        <a:rPr sz="1000" b="0">
+                          <a:solidFill>
                             <a:srgbClr val="B3261E"/>
                           </a:solidFill>
                           <a:latin typeface="Calibri"/>
                         </a:rPr>
-                        <a:t>-0.27%</a:t>
+                        <a:t>-1.13%</a:t>
                       </a:r>
                     </a:p>
                   </a:txBody>
@@ -4404,7 +4427,7 @@
                           </a:solidFill>
                           <a:latin typeface="Calibri"/>
                         </a:rPr>
-                        <a:t>-2.02%</a:t>
+                        <a:t>-1.41%</a:t>
                       </a:r>
                     </a:p>
                   </a:txBody>
@@ -4423,11 +4446,11 @@
                       <a:r>
                         <a:rPr sz="1000" b="0">
                           <a:solidFill>
-                            <a:srgbClr val="B3261E"/>
-                          </a:solidFill>
-                          <a:latin typeface="Calibri"/>
-                        </a:rPr>
-                        <a:t>-2.41%</a:t>
+                            <a:srgbClr val="1F2A37"/>
+                          </a:solidFill>
+                          <a:latin typeface="Calibri"/>
+                        </a:rPr>
+                        <a:t>-8.6%</a:t>
                       </a:r>
                     </a:p>
                   </a:txBody>
@@ -4450,7 +4473,7 @@
                           </a:solidFill>
                           <a:latin typeface="Calibri"/>
                         </a:rPr>
-                        <a:t>-9.4%</a:t>
+                        <a:t>16%</a:t>
                       </a:r>
                     </a:p>
                   </a:txBody>
@@ -4473,30 +4496,7 @@
                           </a:solidFill>
                           <a:latin typeface="Calibri"/>
                         </a:rPr>
-                        <a:t>16%</a:t>
-                      </a:r>
-                    </a:p>
-                  </a:txBody>
-                  <a:tcPr>
-                    <a:solidFill>
-                      <a:srgbClr val="FFFFFF"/>
-                    </a:solidFill>
-                  </a:tcPr>
-                </a:tc>
-                <a:tc>
-                  <a:txBody>
-                    <a:bodyPr/>
-                    <a:lstStyle/>
-                    <a:p>
-                      <a:pPr algn="r"/>
-                      <a:r>
-                        <a:rPr sz="1000" b="0">
-                          <a:solidFill>
-                            <a:srgbClr val="1F2A37"/>
-                          </a:solidFill>
-                          <a:latin typeface="Calibri"/>
-                        </a:rPr>
-                        <a:t>32.9</a:t>
+                        <a:t>33.2</a:t>
                       </a:r>
                     </a:p>
                   </a:txBody>
@@ -4544,7 +4544,7 @@
                           </a:solidFill>
                           <a:latin typeface="Calibri"/>
                         </a:rPr>
-                        <a:t>1,322</a:t>
+                        <a:t>1,310</a:t>
                       </a:r>
                     </a:p>
                   </a:txBody>
@@ -4563,11 +4563,34 @@
                       <a:r>
                         <a:rPr sz="1000" b="0">
                           <a:solidFill>
+                            <a:srgbClr val="B3261E"/>
+                          </a:solidFill>
+                          <a:latin typeface="Calibri"/>
+                        </a:rPr>
+                        <a:t>-0.95%</a:t>
+                      </a:r>
+                    </a:p>
+                  </a:txBody>
+                  <a:tcPr>
+                    <a:solidFill>
+                      <a:srgbClr val="F3F5F7"/>
+                    </a:solidFill>
+                  </a:tcPr>
+                </a:tc>
+                <a:tc>
+                  <a:txBody>
+                    <a:bodyPr/>
+                    <a:lstStyle/>
+                    <a:p>
+                      <a:pPr algn="r"/>
+                      <a:r>
+                        <a:rPr sz="1000" b="0">
+                          <a:solidFill>
                             <a:srgbClr val="0B7A3B"/>
                           </a:solidFill>
                           <a:latin typeface="Calibri"/>
                         </a:rPr>
-                        <a:t>+1.50%</a:t>
+                        <a:t>+2.55%</a:t>
                       </a:r>
                     </a:p>
                   </a:txBody>
@@ -4586,11 +4609,11 @@
                       <a:r>
                         <a:rPr sz="1000" b="0">
                           <a:solidFill>
-                            <a:srgbClr val="0B7A3B"/>
-                          </a:solidFill>
-                          <a:latin typeface="Calibri"/>
-                        </a:rPr>
-                        <a:t>+2.72%</a:t>
+                            <a:srgbClr val="B3261E"/>
+                          </a:solidFill>
+                          <a:latin typeface="Calibri"/>
+                        </a:rPr>
+                        <a:t>-1.90%</a:t>
                       </a:r>
                     </a:p>
                   </a:txBody>
@@ -4609,11 +4632,11 @@
                       <a:r>
                         <a:rPr sz="1000" b="0">
                           <a:solidFill>
-                            <a:srgbClr val="B3261E"/>
-                          </a:solidFill>
-                          <a:latin typeface="Calibri"/>
-                        </a:rPr>
-                        <a:t>-0.23%</a:t>
+                            <a:srgbClr val="1F2A37"/>
+                          </a:solidFill>
+                          <a:latin typeface="Calibri"/>
+                        </a:rPr>
+                        <a:t>-17.4%</a:t>
                       </a:r>
                     </a:p>
                   </a:txBody>
@@ -4636,7 +4659,7 @@
                           </a:solidFill>
                           <a:latin typeface="Calibri"/>
                         </a:rPr>
-                        <a:t>-16.6%</a:t>
+                        <a:t>19%</a:t>
                       </a:r>
                     </a:p>
                   </a:txBody>
@@ -4659,30 +4682,7 @@
                           </a:solidFill>
                           <a:latin typeface="Calibri"/>
                         </a:rPr>
-                        <a:t>19%</a:t>
-                      </a:r>
-                    </a:p>
-                  </a:txBody>
-                  <a:tcPr>
-                    <a:solidFill>
-                      <a:srgbClr val="F3F5F7"/>
-                    </a:solidFill>
-                  </a:tcPr>
-                </a:tc>
-                <a:tc>
-                  <a:txBody>
-                    <a:bodyPr/>
-                    <a:lstStyle/>
-                    <a:p>
-                      <a:pPr algn="r"/>
-                      <a:r>
-                        <a:rPr sz="1000" b="0">
-                          <a:solidFill>
-                            <a:srgbClr val="1F2A37"/>
-                          </a:solidFill>
-                          <a:latin typeface="Calibri"/>
-                        </a:rPr>
-                        <a:t>24.1</a:t>
+                        <a:t>23.7</a:t>
                       </a:r>
                     </a:p>
                   </a:txBody>
@@ -4730,7 +4730,7 @@
                           </a:solidFill>
                           <a:latin typeface="Calibri"/>
                         </a:rPr>
-                        <a:t>2,304</a:t>
+                        <a:t>2,270</a:t>
                       </a:r>
                     </a:p>
                   </a:txBody>
@@ -4753,7 +4753,7 @@
                           </a:solidFill>
                           <a:latin typeface="Calibri"/>
                         </a:rPr>
-                        <a:t>-0.69%</a:t>
+                        <a:t>-1.48%</a:t>
                       </a:r>
                     </a:p>
                   </a:txBody>
@@ -4776,7 +4776,7 @@
                           </a:solidFill>
                           <a:latin typeface="Calibri"/>
                         </a:rPr>
-                        <a:t>-1.62%</a:t>
+                        <a:t>-5.39%</a:t>
                       </a:r>
                     </a:p>
                   </a:txBody>
@@ -4799,7 +4799,7 @@
                           </a:solidFill>
                           <a:latin typeface="Calibri"/>
                         </a:rPr>
-                        <a:t>-2.91%</a:t>
+                        <a:t>-7.45%</a:t>
                       </a:r>
                     </a:p>
                   </a:txBody>
@@ -4822,7 +4822,7 @@
                           </a:solidFill>
                           <a:latin typeface="Calibri"/>
                         </a:rPr>
-                        <a:t>-28.1%</a:t>
+                        <a:t>-29.2%</a:t>
                       </a:r>
                     </a:p>
                   </a:txBody>
@@ -4868,7 +4868,7 @@
                           </a:solidFill>
                           <a:latin typeface="Calibri"/>
                         </a:rPr>
-                        <a:t>16.7</a:t>
+                        <a:t>16.5</a:t>
                       </a:r>
                     </a:p>
                   </a:txBody>
@@ -4968,7 +4968,7 @@
                 </a:solidFill>
                 <a:latin typeface="Calibri"/>
               </a:rPr>
-              <a:t>•  Best performer on the day: RELIANCE.NS at +1.50%.</a:t>
+              <a:t>•  Best performer on the day: LT.NS at +0.88%.</a:t>
             </a:r>
           </a:p>
           <a:p>
@@ -4984,7 +4984,7 @@
                 </a:solidFill>
                 <a:latin typeface="Calibri"/>
               </a:rPr>
-              <a:t>•  Weakest on the day: BHARTIARTL.NS at -1.55%.</a:t>
+              <a:t>•  Weakest on the day: INFY.NS at -3.76%.</a:t>
             </a:r>
           </a:p>
           <a:p>
@@ -5000,7 +5000,7 @@
                 </a:solidFill>
                 <a:latin typeface="Calibri"/>
               </a:rPr>
-              <a:t>•  Median one-day move across the watchlist: -0.15%.</a:t>
+              <a:t>•  Median one-day move across the watchlist: -0.23%.</a:t>
             </a:r>
           </a:p>
           <a:p>
@@ -5016,7 +5016,7 @@
                 </a:solidFill>
                 <a:latin typeface="Calibri"/>
               </a:rPr>
-              <a:t>•  ITC.NS sits furthest below its 52-week high, at -34.3%.</a:t>
+              <a:t>•  ITC.NS sits furthest below its 52-week high, at -34.5%.</a:t>
             </a:r>
           </a:p>
           <a:p>
@@ -5064,7 +5064,7 @@
                 </a:solidFill>
                 <a:latin typeface="Calibri"/>
               </a:rPr>
-              <a:t>•  Highest 30-day realised volatility: TCS.NS at 33.3% annualised.</a:t>
+              <a:t>•  Highest 30-day realised volatility: TCS.NS at 33.2% annualised.</a:t>
             </a:r>
           </a:p>
           <a:p>
@@ -5080,7 +5080,7 @@
                 </a:solidFill>
                 <a:latin typeface="Calibri"/>
               </a:rPr>
-              <a:t>•  60 headlines collected, 3 tagged to a watchlist name by substring match (unverified).</a:t>
+              <a:t>•  60 headlines collected, 6 tagged to a watchlist name by substring match (unverified).</a:t>
             </a:r>
           </a:p>
           <a:p>

--- a/public/deskbrief.pptx
+++ b/public/deskbrief.pptx
@@ -3128,7 +3128,7 @@
                 </a:solidFill>
                 <a:latin typeface="Calibri"/>
               </a:rPr>
-              <a:t>8 names  |  generated 07 Sep 2026 17:48  |  source: Yahoo Finance via yfinance, Indian financial RSS</a:t>
+              <a:t>8 names  |  generated 08 Sep 2026 16:46  |  source: Yahoo Finance via yfinance, Indian financial RSS</a:t>
             </a:r>
           </a:p>
         </p:txBody>
@@ -3428,7 +3428,7 @@
                           </a:solidFill>
                           <a:latin typeface="Calibri"/>
                         </a:rPr>
-                        <a:t>1,854</a:t>
+                        <a:t>1,844</a:t>
                       </a:r>
                     </a:p>
                   </a:txBody>
@@ -3447,11 +3447,11 @@
                       <a:r>
                         <a:rPr sz="1000" b="0">
                           <a:solidFill>
-                            <a:srgbClr val="0B7A3B"/>
-                          </a:solidFill>
-                          <a:latin typeface="Calibri"/>
-                        </a:rPr>
-                        <a:t>+0.76%</a:t>
+                            <a:srgbClr val="B3261E"/>
+                          </a:solidFill>
+                          <a:latin typeface="Calibri"/>
+                        </a:rPr>
+                        <a:t>-0.54%</a:t>
                       </a:r>
                     </a:p>
                   </a:txBody>
@@ -3470,11 +3470,11 @@
                       <a:r>
                         <a:rPr sz="1000" b="0">
                           <a:solidFill>
-                            <a:srgbClr val="0B7A3B"/>
-                          </a:solidFill>
-                          <a:latin typeface="Calibri"/>
-                        </a:rPr>
-                        <a:t>+2.32%</a:t>
+                            <a:srgbClr val="B3261E"/>
+                          </a:solidFill>
+                          <a:latin typeface="Calibri"/>
+                        </a:rPr>
+                        <a:t>-1.77%</a:t>
                       </a:r>
                     </a:p>
                   </a:txBody>
@@ -3497,7 +3497,7 @@
                           </a:solidFill>
                           <a:latin typeface="Calibri"/>
                         </a:rPr>
-                        <a:t>-5.40%</a:t>
+                        <a:t>-5.10%</a:t>
                       </a:r>
                     </a:p>
                   </a:txBody>
@@ -3520,7 +3520,7 @@
                           </a:solidFill>
                           <a:latin typeface="Calibri"/>
                         </a:rPr>
-                        <a:t>-13.2%</a:t>
+                        <a:t>-13.7%</a:t>
                       </a:r>
                     </a:p>
                   </a:txBody>
@@ -3566,7 +3566,7 @@
                           </a:solidFill>
                           <a:latin typeface="Calibri"/>
                         </a:rPr>
-                        <a:t>38.8</a:t>
+                        <a:t>38.6</a:t>
                       </a:r>
                     </a:p>
                   </a:txBody>
@@ -3614,7 +3614,7 @@
                           </a:solidFill>
                           <a:latin typeface="Calibri"/>
                         </a:rPr>
-                        <a:t>710</a:t>
+                        <a:t>703</a:t>
                       </a:r>
                     </a:p>
                   </a:txBody>
@@ -3637,7 +3637,7 @@
                           </a:solidFill>
                           <a:latin typeface="Calibri"/>
                         </a:rPr>
-                        <a:t>-0.22%</a:t>
+                        <a:t>-1.06%</a:t>
                       </a:r>
                     </a:p>
                   </a:txBody>
@@ -3656,11 +3656,11 @@
                       <a:r>
                         <a:rPr sz="1000" b="0">
                           <a:solidFill>
-                            <a:srgbClr val="0B7A3B"/>
-                          </a:solidFill>
-                          <a:latin typeface="Calibri"/>
-                        </a:rPr>
-                        <a:t>+0.21%</a:t>
+                            <a:srgbClr val="B3261E"/>
+                          </a:solidFill>
+                          <a:latin typeface="Calibri"/>
+                        </a:rPr>
+                        <a:t>-1.25%</a:t>
                       </a:r>
                     </a:p>
                   </a:txBody>
@@ -3683,7 +3683,7 @@
                           </a:solidFill>
                           <a:latin typeface="Calibri"/>
                         </a:rPr>
-                        <a:t>-2.80%</a:t>
+                        <a:t>-3.83%</a:t>
                       </a:r>
                     </a:p>
                   </a:txBody>
@@ -3706,7 +3706,7 @@
                           </a:solidFill>
                           <a:latin typeface="Calibri"/>
                         </a:rPr>
-                        <a:t>-28.5%</a:t>
+                        <a:t>-29.2%</a:t>
                       </a:r>
                     </a:p>
                   </a:txBody>
@@ -3752,7 +3752,7 @@
                           </a:solidFill>
                           <a:latin typeface="Calibri"/>
                         </a:rPr>
-                        <a:t>15.5</a:t>
+                        <a:t>15.4</a:t>
                       </a:r>
                     </a:p>
                   </a:txBody>
@@ -3800,7 +3800,7 @@
                           </a:solidFill>
                           <a:latin typeface="Calibri"/>
                         </a:rPr>
-                        <a:t>1,428</a:t>
+                        <a:t>1,399</a:t>
                       </a:r>
                     </a:p>
                   </a:txBody>
@@ -3819,11 +3819,11 @@
                       <a:r>
                         <a:rPr sz="1000" b="0">
                           <a:solidFill>
-                            <a:srgbClr val="0B7A3B"/>
-                          </a:solidFill>
-                          <a:latin typeface="Calibri"/>
-                        </a:rPr>
-                        <a:t>+0.30%</a:t>
+                            <a:srgbClr val="B3261E"/>
+                          </a:solidFill>
+                          <a:latin typeface="Calibri"/>
+                        </a:rPr>
+                        <a:t>-1.97%</a:t>
                       </a:r>
                     </a:p>
                   </a:txBody>
@@ -3846,7 +3846,7 @@
                           </a:solidFill>
                           <a:latin typeface="Calibri"/>
                         </a:rPr>
-                        <a:t>-1.82%</a:t>
+                        <a:t>-2.68%</a:t>
                       </a:r>
                     </a:p>
                   </a:txBody>
@@ -3865,11 +3865,11 @@
                       <a:r>
                         <a:rPr sz="1000" b="0">
                           <a:solidFill>
-                            <a:srgbClr val="0B7A3B"/>
-                          </a:solidFill>
-                          <a:latin typeface="Calibri"/>
-                        </a:rPr>
-                        <a:t>+0.46%</a:t>
+                            <a:srgbClr val="B3261E"/>
+                          </a:solidFill>
+                          <a:latin typeface="Calibri"/>
+                        </a:rPr>
+                        <a:t>-2.26%</a:t>
                       </a:r>
                     </a:p>
                   </a:txBody>
@@ -3892,7 +3892,7 @@
                           </a:solidFill>
                           <a:latin typeface="Calibri"/>
                         </a:rPr>
-                        <a:t>-2.2%</a:t>
+                        <a:t>-4.2%</a:t>
                       </a:r>
                     </a:p>
                   </a:txBody>
@@ -3915,7 +3915,7 @@
                           </a:solidFill>
                           <a:latin typeface="Calibri"/>
                         </a:rPr>
-                        <a:t>16%</a:t>
+                        <a:t>17%</a:t>
                       </a:r>
                     </a:p>
                   </a:txBody>
@@ -3938,7 +3938,7 @@
                           </a:solidFill>
                           <a:latin typeface="Calibri"/>
                         </a:rPr>
-                        <a:t>18.5</a:t>
+                        <a:t>18.1</a:t>
                       </a:r>
                     </a:p>
                   </a:txBody>
@@ -3986,7 +3986,7 @@
                           </a:solidFill>
                           <a:latin typeface="Calibri"/>
                         </a:rPr>
-                        <a:t>1,088</a:t>
+                        <a:t>1,082</a:t>
                       </a:r>
                     </a:p>
                   </a:txBody>
@@ -4009,7 +4009,7 @@
                           </a:solidFill>
                           <a:latin typeface="Calibri"/>
                         </a:rPr>
-                        <a:t>-3.76%</a:t>
+                        <a:t>-0.51%</a:t>
                       </a:r>
                     </a:p>
                   </a:txBody>
@@ -4032,7 +4032,7 @@
                           </a:solidFill>
                           <a:latin typeface="Calibri"/>
                         </a:rPr>
-                        <a:t>-4.08%</a:t>
+                        <a:t>-6.40%</a:t>
                       </a:r>
                     </a:p>
                   </a:txBody>
@@ -4055,7 +4055,7 @@
                           </a:solidFill>
                           <a:latin typeface="Calibri"/>
                         </a:rPr>
-                        <a:t>-7.45%</a:t>
+                        <a:t>-8.54%</a:t>
                       </a:r>
                     </a:p>
                   </a:txBody>
@@ -4078,7 +4078,7 @@
                           </a:solidFill>
                           <a:latin typeface="Calibri"/>
                         </a:rPr>
-                        <a:t>-34.3%</a:t>
+                        <a:t>-34.6%</a:t>
                       </a:r>
                     </a:p>
                   </a:txBody>
@@ -4101,7 +4101,7 @@
                           </a:solidFill>
                           <a:latin typeface="Calibri"/>
                         </a:rPr>
-                        <a:t>30%</a:t>
+                        <a:t>29%</a:t>
                       </a:r>
                     </a:p>
                   </a:txBody>
@@ -4191,11 +4191,34 @@
                       <a:r>
                         <a:rPr sz="1000" b="0">
                           <a:solidFill>
+                            <a:srgbClr val="1F2A37"/>
+                          </a:solidFill>
+                          <a:latin typeface="Calibri"/>
+                        </a:rPr>
+                        <a:t>+0.00%</a:t>
+                      </a:r>
+                    </a:p>
+                  </a:txBody>
+                  <a:tcPr>
+                    <a:solidFill>
+                      <a:srgbClr val="F3F5F7"/>
+                    </a:solidFill>
+                  </a:tcPr>
+                </a:tc>
+                <a:tc>
+                  <a:txBody>
+                    <a:bodyPr/>
+                    <a:lstStyle/>
+                    <a:p>
+                      <a:pPr algn="r"/>
+                      <a:r>
+                        <a:rPr sz="1000" b="0">
+                          <a:solidFill>
                             <a:srgbClr val="B3261E"/>
                           </a:solidFill>
                           <a:latin typeface="Calibri"/>
                         </a:rPr>
-                        <a:t>-0.23%</a:t>
+                        <a:t>-1.16%</a:t>
                       </a:r>
                     </a:p>
                   </a:txBody>
@@ -4214,34 +4237,11 @@
                       <a:r>
                         <a:rPr sz="1000" b="0">
                           <a:solidFill>
-                            <a:srgbClr val="0B7A3B"/>
-                          </a:solidFill>
-                          <a:latin typeface="Calibri"/>
-                        </a:rPr>
-                        <a:t>+3.13%</a:t>
-                      </a:r>
-                    </a:p>
-                  </a:txBody>
-                  <a:tcPr>
-                    <a:solidFill>
-                      <a:srgbClr val="F3F5F7"/>
-                    </a:solidFill>
-                  </a:tcPr>
-                </a:tc>
-                <a:tc>
-                  <a:txBody>
-                    <a:bodyPr/>
-                    <a:lstStyle/>
-                    <a:p>
-                      <a:pPr algn="r"/>
-                      <a:r>
-                        <a:rPr sz="1000" b="0">
-                          <a:solidFill>
                             <a:srgbClr val="B3261E"/>
                           </a:solidFill>
                           <a:latin typeface="Calibri"/>
                         </a:rPr>
-                        <a:t>-7.90%</a:t>
+                        <a:t>-6.78%</a:t>
                       </a:r>
                     </a:p>
                   </a:txBody>
@@ -4358,7 +4358,7 @@
                           </a:solidFill>
                           <a:latin typeface="Calibri"/>
                         </a:rPr>
-                        <a:t>3,999</a:t>
+                        <a:t>3,946</a:t>
                       </a:r>
                     </a:p>
                   </a:txBody>
@@ -4377,11 +4377,11 @@
                       <a:r>
                         <a:rPr sz="1000" b="0">
                           <a:solidFill>
-                            <a:srgbClr val="0B7A3B"/>
-                          </a:solidFill>
-                          <a:latin typeface="Calibri"/>
-                        </a:rPr>
-                        <a:t>+0.88%</a:t>
+                            <a:srgbClr val="B3261E"/>
+                          </a:solidFill>
+                          <a:latin typeface="Calibri"/>
+                        </a:rPr>
+                        <a:t>-1.32%</a:t>
                       </a:r>
                     </a:p>
                   </a:txBody>
@@ -4404,7 +4404,7 @@
                           </a:solidFill>
                           <a:latin typeface="Calibri"/>
                         </a:rPr>
-                        <a:t>-1.13%</a:t>
+                        <a:t>-0.85%</a:t>
                       </a:r>
                     </a:p>
                   </a:txBody>
@@ -4427,7 +4427,7 @@
                           </a:solidFill>
                           <a:latin typeface="Calibri"/>
                         </a:rPr>
-                        <a:t>-1.41%</a:t>
+                        <a:t>-3.28%</a:t>
                       </a:r>
                     </a:p>
                   </a:txBody>
@@ -4450,7 +4450,7 @@
                           </a:solidFill>
                           <a:latin typeface="Calibri"/>
                         </a:rPr>
-                        <a:t>-8.6%</a:t>
+                        <a:t>-9.8%</a:t>
                       </a:r>
                     </a:p>
                   </a:txBody>
@@ -4496,7 +4496,7 @@
                           </a:solidFill>
                           <a:latin typeface="Calibri"/>
                         </a:rPr>
-                        <a:t>33.2</a:t>
+                        <a:t>32.8</a:t>
                       </a:r>
                     </a:p>
                   </a:txBody>
@@ -4544,7 +4544,7 @@
                           </a:solidFill>
                           <a:latin typeface="Calibri"/>
                         </a:rPr>
-                        <a:t>1,310</a:t>
+                        <a:t>1,295</a:t>
                       </a:r>
                     </a:p>
                   </a:txBody>
@@ -4567,7 +4567,7 @@
                           </a:solidFill>
                           <a:latin typeface="Calibri"/>
                         </a:rPr>
-                        <a:t>-0.95%</a:t>
+                        <a:t>-1.11%</a:t>
                       </a:r>
                     </a:p>
                   </a:txBody>
@@ -4586,11 +4586,11 @@
                       <a:r>
                         <a:rPr sz="1000" b="0">
                           <a:solidFill>
-                            <a:srgbClr val="0B7A3B"/>
-                          </a:solidFill>
-                          <a:latin typeface="Calibri"/>
-                        </a:rPr>
-                        <a:t>+2.55%</a:t>
+                            <a:srgbClr val="B3261E"/>
+                          </a:solidFill>
+                          <a:latin typeface="Calibri"/>
+                        </a:rPr>
+                        <a:t>-1.08%</a:t>
                       </a:r>
                     </a:p>
                   </a:txBody>
@@ -4613,7 +4613,7 @@
                           </a:solidFill>
                           <a:latin typeface="Calibri"/>
                         </a:rPr>
-                        <a:t>-1.90%</a:t>
+                        <a:t>-2.44%</a:t>
                       </a:r>
                     </a:p>
                   </a:txBody>
@@ -4636,7 +4636,7 @@
                           </a:solidFill>
                           <a:latin typeface="Calibri"/>
                         </a:rPr>
-                        <a:t>-17.4%</a:t>
+                        <a:t>-18.3%</a:t>
                       </a:r>
                     </a:p>
                   </a:txBody>
@@ -4682,7 +4682,7 @@
                           </a:solidFill>
                           <a:latin typeface="Calibri"/>
                         </a:rPr>
-                        <a:t>23.7</a:t>
+                        <a:t>23.4</a:t>
                       </a:r>
                     </a:p>
                   </a:txBody>
@@ -4730,7 +4730,7 @@
                           </a:solidFill>
                           <a:latin typeface="Calibri"/>
                         </a:rPr>
-                        <a:t>2,270</a:t>
+                        <a:t>2,256</a:t>
                       </a:r>
                     </a:p>
                   </a:txBody>
@@ -4753,7 +4753,7 @@
                           </a:solidFill>
                           <a:latin typeface="Calibri"/>
                         </a:rPr>
-                        <a:t>-1.48%</a:t>
+                        <a:t>-0.64%</a:t>
                       </a:r>
                     </a:p>
                   </a:txBody>
@@ -4776,7 +4776,7 @@
                           </a:solidFill>
                           <a:latin typeface="Calibri"/>
                         </a:rPr>
-                        <a:t>-5.39%</a:t>
+                        <a:t>-4.79%</a:t>
                       </a:r>
                     </a:p>
                   </a:txBody>
@@ -4799,7 +4799,7 @@
                           </a:solidFill>
                           <a:latin typeface="Calibri"/>
                         </a:rPr>
-                        <a:t>-7.45%</a:t>
+                        <a:t>-7.02%</a:t>
                       </a:r>
                     </a:p>
                   </a:txBody>
@@ -4822,7 +4822,7 @@
                           </a:solidFill>
                           <a:latin typeface="Calibri"/>
                         </a:rPr>
-                        <a:t>-29.2%</a:t>
+                        <a:t>-29.6%</a:t>
                       </a:r>
                     </a:p>
                   </a:txBody>
@@ -4845,7 +4845,7 @@
                           </a:solidFill>
                           <a:latin typeface="Calibri"/>
                         </a:rPr>
-                        <a:t>33%</a:t>
+                        <a:t>30%</a:t>
                       </a:r>
                     </a:p>
                   </a:txBody>
@@ -4868,7 +4868,7 @@
                           </a:solidFill>
                           <a:latin typeface="Calibri"/>
                         </a:rPr>
-                        <a:t>16.5</a:t>
+                        <a:t>16.4</a:t>
                       </a:r>
                     </a:p>
                   </a:txBody>
@@ -4952,7 +4952,7 @@
                 </a:solidFill>
                 <a:latin typeface="Calibri"/>
               </a:rPr>
-              <a:t>Breadth was risk-off: 3 of 8 names advanced on the day.</a:t>
+              <a:t>Breadth was risk-off: 0 of 8 names advanced on the day.</a:t>
             </a:r>
           </a:p>
           <a:p>
@@ -4968,7 +4968,7 @@
                 </a:solidFill>
                 <a:latin typeface="Calibri"/>
               </a:rPr>
-              <a:t>•  Best performer on the day: LT.NS at +0.88%.</a:t>
+              <a:t>•  Best performer on the day: ITC.NS at +0.00%.</a:t>
             </a:r>
           </a:p>
           <a:p>
@@ -4984,7 +4984,7 @@
                 </a:solidFill>
                 <a:latin typeface="Calibri"/>
               </a:rPr>
-              <a:t>•  Weakest on the day: INFY.NS at -3.76%.</a:t>
+              <a:t>•  Weakest on the day: ICICIBANK.NS at -1.97%.</a:t>
             </a:r>
           </a:p>
           <a:p>
@@ -5000,7 +5000,7 @@
                 </a:solidFill>
                 <a:latin typeface="Calibri"/>
               </a:rPr>
-              <a:t>•  Median one-day move across the watchlist: -0.23%.</a:t>
+              <a:t>•  Median one-day move across the watchlist: -0.85%.</a:t>
             </a:r>
           </a:p>
           <a:p>
@@ -5016,7 +5016,7 @@
                 </a:solidFill>
                 <a:latin typeface="Calibri"/>
               </a:rPr>
-              <a:t>•  ITC.NS sits furthest below its 52-week high, at -34.5%.</a:t>
+              <a:t>•  INFY.NS sits furthest below its 52-week high, at -34.6%.</a:t>
             </a:r>
           </a:p>
           <a:p>
@@ -5064,7 +5064,7 @@
                 </a:solidFill>
                 <a:latin typeface="Calibri"/>
               </a:rPr>
-              <a:t>•  Highest 30-day realised volatility: TCS.NS at 33.2% annualised.</a:t>
+              <a:t>•  Highest 30-day realised volatility: TCS.NS at 30.5% annualised.</a:t>
             </a:r>
           </a:p>
           <a:p>
@@ -5080,7 +5080,7 @@
                 </a:solidFill>
                 <a:latin typeface="Calibri"/>
               </a:rPr>
-              <a:t>•  60 headlines collected, 6 tagged to a watchlist name by substring match (unverified).</a:t>
+              <a:t>•  60 headlines collected, 4 tagged to a watchlist name by substring match (unverified).</a:t>
             </a:r>
           </a:p>
           <a:p>

--- a/public/deskbrief.pptx
+++ b/public/deskbrief.pptx
@@ -3128,7 +3128,7 @@
                 </a:solidFill>
                 <a:latin typeface="Calibri"/>
               </a:rPr>
-              <a:t>8 names  |  generated 08 Sep 2026 16:46  |  source: Yahoo Finance via yfinance, Indian financial RSS</a:t>
+              <a:t>8 names  |  generated 09 Sep 2026 16:48  |  source: Yahoo Finance via yfinance, Indian financial RSS</a:t>
             </a:r>
           </a:p>
         </p:txBody>
@@ -3428,7 +3428,7 @@
                           </a:solidFill>
                           <a:latin typeface="Calibri"/>
                         </a:rPr>
-                        <a:t>1,844</a:t>
+                        <a:t>1,815</a:t>
                       </a:r>
                     </a:p>
                   </a:txBody>
@@ -3451,7 +3451,7 @@
                           </a:solidFill>
                           <a:latin typeface="Calibri"/>
                         </a:rPr>
-                        <a:t>-0.54%</a:t>
+                        <a:t>-1.59%</a:t>
                       </a:r>
                     </a:p>
                   </a:txBody>
@@ -3474,7 +3474,7 @@
                           </a:solidFill>
                           <a:latin typeface="Calibri"/>
                         </a:rPr>
-                        <a:t>-1.77%</a:t>
+                        <a:t>-2.58%</a:t>
                       </a:r>
                     </a:p>
                   </a:txBody>
@@ -3497,7 +3497,7 @@
                           </a:solidFill>
                           <a:latin typeface="Calibri"/>
                         </a:rPr>
-                        <a:t>-5.10%</a:t>
+                        <a:t>-5.25%</a:t>
                       </a:r>
                     </a:p>
                   </a:txBody>
@@ -3520,7 +3520,7 @@
                           </a:solidFill>
                           <a:latin typeface="Calibri"/>
                         </a:rPr>
-                        <a:t>-13.7%</a:t>
+                        <a:t>-15.0%</a:t>
                       </a:r>
                     </a:p>
                   </a:txBody>
@@ -3543,7 +3543,7 @@
                           </a:solidFill>
                           <a:latin typeface="Calibri"/>
                         </a:rPr>
-                        <a:t>24%</a:t>
+                        <a:t>23%</a:t>
                       </a:r>
                     </a:p>
                   </a:txBody>
@@ -3566,7 +3566,7 @@
                           </a:solidFill>
                           <a:latin typeface="Calibri"/>
                         </a:rPr>
-                        <a:t>38.6</a:t>
+                        <a:t>38.0</a:t>
                       </a:r>
                     </a:p>
                   </a:txBody>
@@ -3614,7 +3614,7 @@
                           </a:solidFill>
                           <a:latin typeface="Calibri"/>
                         </a:rPr>
-                        <a:t>703</a:t>
+                        <a:t>687</a:t>
                       </a:r>
                     </a:p>
                   </a:txBody>
@@ -3637,7 +3637,7 @@
                           </a:solidFill>
                           <a:latin typeface="Calibri"/>
                         </a:rPr>
-                        <a:t>-1.06%</a:t>
+                        <a:t>-2.26%</a:t>
                       </a:r>
                     </a:p>
                   </a:txBody>
@@ -3660,7 +3660,7 @@
                           </a:solidFill>
                           <a:latin typeface="Calibri"/>
                         </a:rPr>
-                        <a:t>-1.25%</a:t>
+                        <a:t>-1.95%</a:t>
                       </a:r>
                     </a:p>
                   </a:txBody>
@@ -3683,7 +3683,7 @@
                           </a:solidFill>
                           <a:latin typeface="Calibri"/>
                         </a:rPr>
-                        <a:t>-3.83%</a:t>
+                        <a:t>-5.75%</a:t>
                       </a:r>
                     </a:p>
                   </a:txBody>
@@ -3706,7 +3706,7 @@
                           </a:solidFill>
                           <a:latin typeface="Calibri"/>
                         </a:rPr>
-                        <a:t>-29.2%</a:t>
+                        <a:t>-30.8%</a:t>
                       </a:r>
                     </a:p>
                   </a:txBody>
@@ -3752,7 +3752,7 @@
                           </a:solidFill>
                           <a:latin typeface="Calibri"/>
                         </a:rPr>
-                        <a:t>15.4</a:t>
+                        <a:t>15.0</a:t>
                       </a:r>
                     </a:p>
                   </a:txBody>
@@ -3800,7 +3800,7 @@
                           </a:solidFill>
                           <a:latin typeface="Calibri"/>
                         </a:rPr>
-                        <a:t>1,399</a:t>
+                        <a:t>1,389</a:t>
                       </a:r>
                     </a:p>
                   </a:txBody>
@@ -3823,7 +3823,7 @@
                           </a:solidFill>
                           <a:latin typeface="Calibri"/>
                         </a:rPr>
-                        <a:t>-1.97%</a:t>
+                        <a:t>-0.74%</a:t>
                       </a:r>
                     </a:p>
                   </a:txBody>
@@ -3846,7 +3846,7 @@
                           </a:solidFill>
                           <a:latin typeface="Calibri"/>
                         </a:rPr>
-                        <a:t>-2.68%</a:t>
+                        <a:t>-2.62%</a:t>
                       </a:r>
                     </a:p>
                   </a:txBody>
@@ -3869,7 +3869,7 @@
                           </a:solidFill>
                           <a:latin typeface="Calibri"/>
                         </a:rPr>
-                        <a:t>-2.26%</a:t>
+                        <a:t>-2.83%</a:t>
                       </a:r>
                     </a:p>
                   </a:txBody>
@@ -3892,7 +3892,7 @@
                           </a:solidFill>
                           <a:latin typeface="Calibri"/>
                         </a:rPr>
-                        <a:t>-4.2%</a:t>
+                        <a:t>-4.9%</a:t>
                       </a:r>
                     </a:p>
                   </a:txBody>
@@ -3938,7 +3938,7 @@
                           </a:solidFill>
                           <a:latin typeface="Calibri"/>
                         </a:rPr>
-                        <a:t>18.1</a:t>
+                        <a:t>17.9</a:t>
                       </a:r>
                     </a:p>
                   </a:txBody>
@@ -3986,7 +3986,7 @@
                           </a:solidFill>
                           <a:latin typeface="Calibri"/>
                         </a:rPr>
-                        <a:t>1,082</a:t>
+                        <a:t>1,035</a:t>
                       </a:r>
                     </a:p>
                   </a:txBody>
@@ -4009,7 +4009,7 @@
                           </a:solidFill>
                           <a:latin typeface="Calibri"/>
                         </a:rPr>
-                        <a:t>-0.51%</a:t>
+                        <a:t>-4.34%</a:t>
                       </a:r>
                     </a:p>
                   </a:txBody>
@@ -4032,7 +4032,7 @@
                           </a:solidFill>
                           <a:latin typeface="Calibri"/>
                         </a:rPr>
-                        <a:t>-6.40%</a:t>
+                        <a:t>-9.21%</a:t>
                       </a:r>
                     </a:p>
                   </a:txBody>
@@ -4055,7 +4055,7 @@
                           </a:solidFill>
                           <a:latin typeface="Calibri"/>
                         </a:rPr>
-                        <a:t>-8.54%</a:t>
+                        <a:t>-13.08%</a:t>
                       </a:r>
                     </a:p>
                   </a:txBody>
@@ -4078,7 +4078,7 @@
                           </a:solidFill>
                           <a:latin typeface="Calibri"/>
                         </a:rPr>
-                        <a:t>-34.6%</a:t>
+                        <a:t>-37.4%</a:t>
                       </a:r>
                     </a:p>
                   </a:txBody>
@@ -4124,7 +4124,7 @@
                           </a:solidFill>
                           <a:latin typeface="Calibri"/>
                         </a:rPr>
-                        <a:t>14.2</a:t>
+                        <a:t>13.5</a:t>
                       </a:r>
                     </a:p>
                   </a:txBody>
@@ -4172,7 +4172,7 @@
                           </a:solidFill>
                           <a:latin typeface="Calibri"/>
                         </a:rPr>
-                        <a:t>264</a:t>
+                        <a:t>261</a:t>
                       </a:r>
                     </a:p>
                   </a:txBody>
@@ -4191,11 +4191,80 @@
                       <a:r>
                         <a:rPr sz="1000" b="0">
                           <a:solidFill>
+                            <a:srgbClr val="B3261E"/>
+                          </a:solidFill>
+                          <a:latin typeface="Calibri"/>
+                        </a:rPr>
+                        <a:t>-1.02%</a:t>
+                      </a:r>
+                    </a:p>
+                  </a:txBody>
+                  <a:tcPr>
+                    <a:solidFill>
+                      <a:srgbClr val="F3F5F7"/>
+                    </a:solidFill>
+                  </a:tcPr>
+                </a:tc>
+                <a:tc>
+                  <a:txBody>
+                    <a:bodyPr/>
+                    <a:lstStyle/>
+                    <a:p>
+                      <a:pPr algn="r"/>
+                      <a:r>
+                        <a:rPr sz="1000" b="0">
+                          <a:solidFill>
+                            <a:srgbClr val="B3261E"/>
+                          </a:solidFill>
+                          <a:latin typeface="Calibri"/>
+                        </a:rPr>
+                        <a:t>-2.07%</a:t>
+                      </a:r>
+                    </a:p>
+                  </a:txBody>
+                  <a:tcPr>
+                    <a:solidFill>
+                      <a:srgbClr val="F3F5F7"/>
+                    </a:solidFill>
+                  </a:tcPr>
+                </a:tc>
+                <a:tc>
+                  <a:txBody>
+                    <a:bodyPr/>
+                    <a:lstStyle/>
+                    <a:p>
+                      <a:pPr algn="r"/>
+                      <a:r>
+                        <a:rPr sz="1000" b="0">
+                          <a:solidFill>
+                            <a:srgbClr val="B3261E"/>
+                          </a:solidFill>
+                          <a:latin typeface="Calibri"/>
+                        </a:rPr>
+                        <a:t>-6.52%</a:t>
+                      </a:r>
+                    </a:p>
+                  </a:txBody>
+                  <a:tcPr>
+                    <a:solidFill>
+                      <a:srgbClr val="F3F5F7"/>
+                    </a:solidFill>
+                  </a:tcPr>
+                </a:tc>
+                <a:tc>
+                  <a:txBody>
+                    <a:bodyPr/>
+                    <a:lstStyle/>
+                    <a:p>
+                      <a:pPr algn="r"/>
+                      <a:r>
+                        <a:rPr sz="1000" b="0">
+                          <a:solidFill>
                             <a:srgbClr val="1F2A37"/>
                           </a:solidFill>
                           <a:latin typeface="Calibri"/>
                         </a:rPr>
-                        <a:t>+0.00%</a:t>
+                        <a:t>-35.1%</a:t>
                       </a:r>
                     </a:p>
                   </a:txBody>
@@ -4214,11 +4283,11 @@
                       <a:r>
                         <a:rPr sz="1000" b="0">
                           <a:solidFill>
-                            <a:srgbClr val="B3261E"/>
-                          </a:solidFill>
-                          <a:latin typeface="Calibri"/>
-                        </a:rPr>
-                        <a:t>-1.16%</a:t>
+                            <a:srgbClr val="1F2A37"/>
+                          </a:solidFill>
+                          <a:latin typeface="Calibri"/>
+                        </a:rPr>
+                        <a:t>23%</a:t>
                       </a:r>
                     </a:p>
                   </a:txBody>
@@ -4237,80 +4306,11 @@
                       <a:r>
                         <a:rPr sz="1000" b="0">
                           <a:solidFill>
-                            <a:srgbClr val="B3261E"/>
-                          </a:solidFill>
-                          <a:latin typeface="Calibri"/>
-                        </a:rPr>
-                        <a:t>-6.78%</a:t>
-                      </a:r>
-                    </a:p>
-                  </a:txBody>
-                  <a:tcPr>
-                    <a:solidFill>
-                      <a:srgbClr val="F3F5F7"/>
-                    </a:solidFill>
-                  </a:tcPr>
-                </a:tc>
-                <a:tc>
-                  <a:txBody>
-                    <a:bodyPr/>
-                    <a:lstStyle/>
-                    <a:p>
-                      <a:pPr algn="r"/>
-                      <a:r>
-                        <a:rPr sz="1000" b="0">
-                          <a:solidFill>
                             <a:srgbClr val="1F2A37"/>
                           </a:solidFill>
                           <a:latin typeface="Calibri"/>
                         </a:rPr>
-                        <a:t>-34.5%</a:t>
-                      </a:r>
-                    </a:p>
-                  </a:txBody>
-                  <a:tcPr>
-                    <a:solidFill>
-                      <a:srgbClr val="F3F5F7"/>
-                    </a:solidFill>
-                  </a:tcPr>
-                </a:tc>
-                <a:tc>
-                  <a:txBody>
-                    <a:bodyPr/>
-                    <a:lstStyle/>
-                    <a:p>
-                      <a:pPr algn="r"/>
-                      <a:r>
-                        <a:rPr sz="1000" b="0">
-                          <a:solidFill>
-                            <a:srgbClr val="1F2A37"/>
-                          </a:solidFill>
-                          <a:latin typeface="Calibri"/>
-                        </a:rPr>
-                        <a:t>23%</a:t>
-                      </a:r>
-                    </a:p>
-                  </a:txBody>
-                  <a:tcPr>
-                    <a:solidFill>
-                      <a:srgbClr val="F3F5F7"/>
-                    </a:solidFill>
-                  </a:tcPr>
-                </a:tc>
-                <a:tc>
-                  <a:txBody>
-                    <a:bodyPr/>
-                    <a:lstStyle/>
-                    <a:p>
-                      <a:pPr algn="r"/>
-                      <a:r>
-                        <a:rPr sz="1000" b="0">
-                          <a:solidFill>
-                            <a:srgbClr val="1F2A37"/>
-                          </a:solidFill>
-                          <a:latin typeface="Calibri"/>
-                        </a:rPr>
-                        <a:t>16.6</a:t>
+                        <a:t>16.5</a:t>
                       </a:r>
                     </a:p>
                   </a:txBody>
@@ -4358,7 +4358,7 @@
                           </a:solidFill>
                           <a:latin typeface="Calibri"/>
                         </a:rPr>
-                        <a:t>3,946</a:t>
+                        <a:t>3,923</a:t>
                       </a:r>
                     </a:p>
                   </a:txBody>
@@ -4381,7 +4381,7 @@
                           </a:solidFill>
                           <a:latin typeface="Calibri"/>
                         </a:rPr>
-                        <a:t>-1.32%</a:t>
+                        <a:t>-0.60%</a:t>
                       </a:r>
                     </a:p>
                   </a:txBody>
@@ -4404,7 +4404,7 @@
                           </a:solidFill>
                           <a:latin typeface="Calibri"/>
                         </a:rPr>
-                        <a:t>-0.85%</a:t>
+                        <a:t>-1.47%</a:t>
                       </a:r>
                     </a:p>
                   </a:txBody>
@@ -4427,7 +4427,7 @@
                           </a:solidFill>
                           <a:latin typeface="Calibri"/>
                         </a:rPr>
-                        <a:t>-3.28%</a:t>
+                        <a:t>-2.84%</a:t>
                       </a:r>
                     </a:p>
                   </a:txBody>
@@ -4450,7 +4450,7 @@
                           </a:solidFill>
                           <a:latin typeface="Calibri"/>
                         </a:rPr>
-                        <a:t>-9.8%</a:t>
+                        <a:t>-10.3%</a:t>
                       </a:r>
                     </a:p>
                   </a:txBody>
@@ -4473,7 +4473,7 @@
                           </a:solidFill>
                           <a:latin typeface="Calibri"/>
                         </a:rPr>
-                        <a:t>16%</a:t>
+                        <a:t>14%</a:t>
                       </a:r>
                     </a:p>
                   </a:txBody>
@@ -4496,7 +4496,7 @@
                           </a:solidFill>
                           <a:latin typeface="Calibri"/>
                         </a:rPr>
-                        <a:t>32.8</a:t>
+                        <a:t>32.6</a:t>
                       </a:r>
                     </a:p>
                   </a:txBody>
@@ -4544,7 +4544,7 @@
                           </a:solidFill>
                           <a:latin typeface="Calibri"/>
                         </a:rPr>
-                        <a:t>1,295</a:t>
+                        <a:t>1,279</a:t>
                       </a:r>
                     </a:p>
                   </a:txBody>
@@ -4567,7 +4567,7 @@
                           </a:solidFill>
                           <a:latin typeface="Calibri"/>
                         </a:rPr>
-                        <a:t>-1.11%</a:t>
+                        <a:t>-1.23%</a:t>
                       </a:r>
                     </a:p>
                   </a:txBody>
@@ -4590,7 +4590,7 @@
                           </a:solidFill>
                           <a:latin typeface="Calibri"/>
                         </a:rPr>
-                        <a:t>-1.08%</a:t>
+                        <a:t>-2.60%</a:t>
                       </a:r>
                     </a:p>
                   </a:txBody>
@@ -4613,7 +4613,7 @@
                           </a:solidFill>
                           <a:latin typeface="Calibri"/>
                         </a:rPr>
-                        <a:t>-2.44%</a:t>
+                        <a:t>-3.39%</a:t>
                       </a:r>
                     </a:p>
                   </a:txBody>
@@ -4636,7 +4636,7 @@
                           </a:solidFill>
                           <a:latin typeface="Calibri"/>
                         </a:rPr>
-                        <a:t>-18.3%</a:t>
+                        <a:t>-19.3%</a:t>
                       </a:r>
                     </a:p>
                   </a:txBody>
@@ -4682,7 +4682,7 @@
                           </a:solidFill>
                           <a:latin typeface="Calibri"/>
                         </a:rPr>
-                        <a:t>23.4</a:t>
+                        <a:t>23.2</a:t>
                       </a:r>
                     </a:p>
                   </a:txBody>
@@ -4730,7 +4730,7 @@
                           </a:solidFill>
                           <a:latin typeface="Calibri"/>
                         </a:rPr>
-                        <a:t>2,256</a:t>
+                        <a:t>2,208</a:t>
                       </a:r>
                     </a:p>
                   </a:txBody>
@@ -4753,7 +4753,7 @@
                           </a:solidFill>
                           <a:latin typeface="Calibri"/>
                         </a:rPr>
-                        <a:t>-0.64%</a:t>
+                        <a:t>-2.11%</a:t>
                       </a:r>
                     </a:p>
                   </a:txBody>
@@ -4776,7 +4776,7 @@
                           </a:solidFill>
                           <a:latin typeface="Calibri"/>
                         </a:rPr>
-                        <a:t>-4.79%</a:t>
+                        <a:t>-5.96%</a:t>
                       </a:r>
                     </a:p>
                   </a:txBody>
@@ -4799,7 +4799,7 @@
                           </a:solidFill>
                           <a:latin typeface="Calibri"/>
                         </a:rPr>
-                        <a:t>-7.02%</a:t>
+                        <a:t>-9.72%</a:t>
                       </a:r>
                     </a:p>
                   </a:txBody>
@@ -4822,7 +4822,7 @@
                           </a:solidFill>
                           <a:latin typeface="Calibri"/>
                         </a:rPr>
-                        <a:t>-29.6%</a:t>
+                        <a:t>-31.1%</a:t>
                       </a:r>
                     </a:p>
                   </a:txBody>
@@ -4868,7 +4868,7 @@
                           </a:solidFill>
                           <a:latin typeface="Calibri"/>
                         </a:rPr>
-                        <a:t>16.4</a:t>
+                        <a:t>16.0</a:t>
                       </a:r>
                     </a:p>
                   </a:txBody>
@@ -4968,7 +4968,7 @@
                 </a:solidFill>
                 <a:latin typeface="Calibri"/>
               </a:rPr>
-              <a:t>•  Best performer on the day: ITC.NS at +0.00%.</a:t>
+              <a:t>•  Best performer on the day: LT.NS at -0.60%.</a:t>
             </a:r>
           </a:p>
           <a:p>
@@ -4984,7 +4984,7 @@
                 </a:solidFill>
                 <a:latin typeface="Calibri"/>
               </a:rPr>
-              <a:t>•  Weakest on the day: ICICIBANK.NS at -1.97%.</a:t>
+              <a:t>•  Weakest on the day: INFY.NS at -4.34%.</a:t>
             </a:r>
           </a:p>
           <a:p>
@@ -5000,7 +5000,7 @@
                 </a:solidFill>
                 <a:latin typeface="Calibri"/>
               </a:rPr>
-              <a:t>•  Median one-day move across the watchlist: -0.85%.</a:t>
+              <a:t>•  Median one-day move across the watchlist: -1.41%.</a:t>
             </a:r>
           </a:p>
           <a:p>
@@ -5016,7 +5016,7 @@
                 </a:solidFill>
                 <a:latin typeface="Calibri"/>
               </a:rPr>
-              <a:t>•  INFY.NS sits furthest below its 52-week high, at -34.6%.</a:t>
+              <a:t>•  INFY.NS sits furthest below its 52-week high, at -37.4%.</a:t>
             </a:r>
           </a:p>
           <a:p>
@@ -5064,7 +5064,7 @@
                 </a:solidFill>
                 <a:latin typeface="Calibri"/>
               </a:rPr>
-              <a:t>•  Highest 30-day realised volatility: TCS.NS at 30.5% annualised.</a:t>
+              <a:t>•  Highest 30-day realised volatility: TCS.NS at 30.2% annualised.</a:t>
             </a:r>
           </a:p>
           <a:p>

--- a/public/deskbrief.pptx
+++ b/public/deskbrief.pptx
@@ -3128,7 +3128,7 @@
                 </a:solidFill>
                 <a:latin typeface="Calibri"/>
               </a:rPr>
-              <a:t>8 names  |  generated 09 Sep 2026 16:48  |  source: Yahoo Finance via yfinance, Indian financial RSS</a:t>
+              <a:t>8 names  |  generated 10 Sep 2026 16:34  |  source: Yahoo Finance via yfinance, Indian financial RSS</a:t>
             </a:r>
           </a:p>
         </p:txBody>
@@ -3428,7 +3428,7 @@
                           </a:solidFill>
                           <a:latin typeface="Calibri"/>
                         </a:rPr>
-                        <a:t>1,815</a:t>
+                        <a:t>1,839</a:t>
                       </a:r>
                     </a:p>
                   </a:txBody>
@@ -3447,11 +3447,34 @@
                       <a:r>
                         <a:rPr sz="1000" b="0">
                           <a:solidFill>
+                            <a:srgbClr val="0B7A3B"/>
+                          </a:solidFill>
+                          <a:latin typeface="Calibri"/>
+                        </a:rPr>
+                        <a:t>+1.34%</a:t>
+                      </a:r>
+                    </a:p>
+                  </a:txBody>
+                  <a:tcPr>
+                    <a:solidFill>
+                      <a:srgbClr val="F3F5F7"/>
+                    </a:solidFill>
+                  </a:tcPr>
+                </a:tc>
+                <a:tc>
+                  <a:txBody>
+                    <a:bodyPr/>
+                    <a:lstStyle/>
+                    <a:p>
+                      <a:pPr algn="r"/>
+                      <a:r>
+                        <a:rPr sz="1000" b="0">
+                          <a:solidFill>
                             <a:srgbClr val="B3261E"/>
                           </a:solidFill>
                           <a:latin typeface="Calibri"/>
                         </a:rPr>
-                        <a:t>-1.59%</a:t>
+                        <a:t>-1.61%</a:t>
                       </a:r>
                     </a:p>
                   </a:txBody>
@@ -3474,7 +3497,7 @@
                           </a:solidFill>
                           <a:latin typeface="Calibri"/>
                         </a:rPr>
-                        <a:t>-2.58%</a:t>
+                        <a:t>-5.45%</a:t>
                       </a:r>
                     </a:p>
                   </a:txBody>
@@ -3493,11 +3516,11 @@
                       <a:r>
                         <a:rPr sz="1000" b="0">
                           <a:solidFill>
-                            <a:srgbClr val="B3261E"/>
-                          </a:solidFill>
-                          <a:latin typeface="Calibri"/>
-                        </a:rPr>
-                        <a:t>-5.25%</a:t>
+                            <a:srgbClr val="1F2A37"/>
+                          </a:solidFill>
+                          <a:latin typeface="Calibri"/>
+                        </a:rPr>
+                        <a:t>-13.9%</a:t>
                       </a:r>
                     </a:p>
                   </a:txBody>
@@ -3520,7 +3543,7 @@
                           </a:solidFill>
                           <a:latin typeface="Calibri"/>
                         </a:rPr>
-                        <a:t>-15.0%</a:t>
+                        <a:t>24%</a:t>
                       </a:r>
                     </a:p>
                   </a:txBody>
@@ -3543,30 +3566,7 @@
                           </a:solidFill>
                           <a:latin typeface="Calibri"/>
                         </a:rPr>
-                        <a:t>23%</a:t>
-                      </a:r>
-                    </a:p>
-                  </a:txBody>
-                  <a:tcPr>
-                    <a:solidFill>
-                      <a:srgbClr val="F3F5F7"/>
-                    </a:solidFill>
-                  </a:tcPr>
-                </a:tc>
-                <a:tc>
-                  <a:txBody>
-                    <a:bodyPr/>
-                    <a:lstStyle/>
-                    <a:p>
-                      <a:pPr algn="r"/>
-                      <a:r>
-                        <a:rPr sz="1000" b="0">
-                          <a:solidFill>
-                            <a:srgbClr val="1F2A37"/>
-                          </a:solidFill>
-                          <a:latin typeface="Calibri"/>
-                        </a:rPr>
-                        <a:t>38.0</a:t>
+                        <a:t>38.4</a:t>
                       </a:r>
                     </a:p>
                   </a:txBody>
@@ -3614,7 +3614,7 @@
                           </a:solidFill>
                           <a:latin typeface="Calibri"/>
                         </a:rPr>
-                        <a:t>687</a:t>
+                        <a:t>694</a:t>
                       </a:r>
                     </a:p>
                   </a:txBody>
@@ -3633,11 +3633,34 @@
                       <a:r>
                         <a:rPr sz="1000" b="0">
                           <a:solidFill>
+                            <a:srgbClr val="0B7A3B"/>
+                          </a:solidFill>
+                          <a:latin typeface="Calibri"/>
+                        </a:rPr>
+                        <a:t>+0.98%</a:t>
+                      </a:r>
+                    </a:p>
+                  </a:txBody>
+                  <a:tcPr>
+                    <a:solidFill>
+                      <a:srgbClr val="FFFFFF"/>
+                    </a:solidFill>
+                  </a:tcPr>
+                </a:tc>
+                <a:tc>
+                  <a:txBody>
+                    <a:bodyPr/>
+                    <a:lstStyle/>
+                    <a:p>
+                      <a:pPr algn="r"/>
+                      <a:r>
+                        <a:rPr sz="1000" b="0">
+                          <a:solidFill>
                             <a:srgbClr val="B3261E"/>
                           </a:solidFill>
                           <a:latin typeface="Calibri"/>
                         </a:rPr>
-                        <a:t>-2.26%</a:t>
+                        <a:t>-1.82%</a:t>
                       </a:r>
                     </a:p>
                   </a:txBody>
@@ -3660,7 +3683,7 @@
                           </a:solidFill>
                           <a:latin typeface="Calibri"/>
                         </a:rPr>
-                        <a:t>-1.95%</a:t>
+                        <a:t>-4.83%</a:t>
                       </a:r>
                     </a:p>
                   </a:txBody>
@@ -3679,11 +3702,11 @@
                       <a:r>
                         <a:rPr sz="1000" b="0">
                           <a:solidFill>
-                            <a:srgbClr val="B3261E"/>
-                          </a:solidFill>
-                          <a:latin typeface="Calibri"/>
-                        </a:rPr>
-                        <a:t>-5.75%</a:t>
+                            <a:srgbClr val="1F2A37"/>
+                          </a:solidFill>
+                          <a:latin typeface="Calibri"/>
+                        </a:rPr>
+                        <a:t>-30.1%</a:t>
                       </a:r>
                     </a:p>
                   </a:txBody>
@@ -3706,7 +3729,7 @@
                           </a:solidFill>
                           <a:latin typeface="Calibri"/>
                         </a:rPr>
-                        <a:t>-30.8%</a:t>
+                        <a:t>15%</a:t>
                       </a:r>
                     </a:p>
                   </a:txBody>
@@ -3729,30 +3752,7 @@
                           </a:solidFill>
                           <a:latin typeface="Calibri"/>
                         </a:rPr>
-                        <a:t>14%</a:t>
-                      </a:r>
-                    </a:p>
-                  </a:txBody>
-                  <a:tcPr>
-                    <a:solidFill>
-                      <a:srgbClr val="FFFFFF"/>
-                    </a:solidFill>
-                  </a:tcPr>
-                </a:tc>
-                <a:tc>
-                  <a:txBody>
-                    <a:bodyPr/>
-                    <a:lstStyle/>
-                    <a:p>
-                      <a:pPr algn="r"/>
-                      <a:r>
-                        <a:rPr sz="1000" b="0">
-                          <a:solidFill>
-                            <a:srgbClr val="1F2A37"/>
-                          </a:solidFill>
-                          <a:latin typeface="Calibri"/>
-                        </a:rPr>
-                        <a:t>15.0</a:t>
+                        <a:t>15.2</a:t>
                       </a:r>
                     </a:p>
                   </a:txBody>
@@ -3800,7 +3800,7 @@
                           </a:solidFill>
                           <a:latin typeface="Calibri"/>
                         </a:rPr>
-                        <a:t>1,389</a:t>
+                        <a:t>1,384</a:t>
                       </a:r>
                     </a:p>
                   </a:txBody>
@@ -3823,7 +3823,7 @@
                           </a:solidFill>
                           <a:latin typeface="Calibri"/>
                         </a:rPr>
-                        <a:t>-0.74%</a:t>
+                        <a:t>-0.33%</a:t>
                       </a:r>
                     </a:p>
                   </a:txBody>
@@ -3846,7 +3846,7 @@
                           </a:solidFill>
                           <a:latin typeface="Calibri"/>
                         </a:rPr>
-                        <a:t>-2.62%</a:t>
+                        <a:t>-3.18%</a:t>
                       </a:r>
                     </a:p>
                   </a:txBody>
@@ -3869,7 +3869,7 @@
                           </a:solidFill>
                           <a:latin typeface="Calibri"/>
                         </a:rPr>
-                        <a:t>-2.83%</a:t>
+                        <a:t>-3.30%</a:t>
                       </a:r>
                     </a:p>
                   </a:txBody>
@@ -3892,7 +3892,7 @@
                           </a:solidFill>
                           <a:latin typeface="Calibri"/>
                         </a:rPr>
-                        <a:t>-4.9%</a:t>
+                        <a:t>-5.2%</a:t>
                       </a:r>
                     </a:p>
                   </a:txBody>
@@ -3986,7 +3986,7 @@
                           </a:solidFill>
                           <a:latin typeface="Calibri"/>
                         </a:rPr>
-                        <a:t>1,035</a:t>
+                        <a:t>1,036</a:t>
                       </a:r>
                     </a:p>
                   </a:txBody>
@@ -4005,11 +4005,34 @@
                       <a:r>
                         <a:rPr sz="1000" b="0">
                           <a:solidFill>
+                            <a:srgbClr val="0B7A3B"/>
+                          </a:solidFill>
+                          <a:latin typeface="Calibri"/>
+                        </a:rPr>
+                        <a:t>+0.14%</a:t>
+                      </a:r>
+                    </a:p>
+                  </a:txBody>
+                  <a:tcPr>
+                    <a:solidFill>
+                      <a:srgbClr val="FFFFFF"/>
+                    </a:solidFill>
+                  </a:tcPr>
+                </a:tc>
+                <a:tc>
+                  <a:txBody>
+                    <a:bodyPr/>
+                    <a:lstStyle/>
+                    <a:p>
+                      <a:pPr algn="r"/>
+                      <a:r>
+                        <a:rPr sz="1000" b="0">
+                          <a:solidFill>
                             <a:srgbClr val="B3261E"/>
                           </a:solidFill>
                           <a:latin typeface="Calibri"/>
                         </a:rPr>
-                        <a:t>-4.34%</a:t>
+                        <a:t>-8.30%</a:t>
                       </a:r>
                     </a:p>
                   </a:txBody>
@@ -4032,7 +4055,7 @@
                           </a:solidFill>
                           <a:latin typeface="Calibri"/>
                         </a:rPr>
-                        <a:t>-9.21%</a:t>
+                        <a:t>-11.87%</a:t>
                       </a:r>
                     </a:p>
                   </a:txBody>
@@ -4051,34 +4074,11 @@
                       <a:r>
                         <a:rPr sz="1000" b="0">
                           <a:solidFill>
-                            <a:srgbClr val="B3261E"/>
-                          </a:solidFill>
-                          <a:latin typeface="Calibri"/>
-                        </a:rPr>
-                        <a:t>-13.08%</a:t>
-                      </a:r>
-                    </a:p>
-                  </a:txBody>
-                  <a:tcPr>
-                    <a:solidFill>
-                      <a:srgbClr val="FFFFFF"/>
-                    </a:solidFill>
-                  </a:tcPr>
-                </a:tc>
-                <a:tc>
-                  <a:txBody>
-                    <a:bodyPr/>
-                    <a:lstStyle/>
-                    <a:p>
-                      <a:pPr algn="r"/>
-                      <a:r>
-                        <a:rPr sz="1000" b="0">
-                          <a:solidFill>
                             <a:srgbClr val="1F2A37"/>
                           </a:solidFill>
                           <a:latin typeface="Calibri"/>
                         </a:rPr>
-                        <a:t>-37.4%</a:t>
+                        <a:t>-37.3%</a:t>
                       </a:r>
                     </a:p>
                   </a:txBody>
@@ -4172,7 +4172,7 @@
                           </a:solidFill>
                           <a:latin typeface="Calibri"/>
                         </a:rPr>
-                        <a:t>261</a:t>
+                        <a:t>259</a:t>
                       </a:r>
                     </a:p>
                   </a:txBody>
@@ -4195,7 +4195,7 @@
                           </a:solidFill>
                           <a:latin typeface="Calibri"/>
                         </a:rPr>
-                        <a:t>-1.02%</a:t>
+                        <a:t>-0.58%</a:t>
                       </a:r>
                     </a:p>
                   </a:txBody>
@@ -4218,7 +4218,7 @@
                           </a:solidFill>
                           <a:latin typeface="Calibri"/>
                         </a:rPr>
-                        <a:t>-2.07%</a:t>
+                        <a:t>-1.41%</a:t>
                       </a:r>
                     </a:p>
                   </a:txBody>
@@ -4241,7 +4241,7 @@
                           </a:solidFill>
                           <a:latin typeface="Calibri"/>
                         </a:rPr>
-                        <a:t>-6.52%</a:t>
+                        <a:t>-6.10%</a:t>
                       </a:r>
                     </a:p>
                   </a:txBody>
@@ -4264,7 +4264,7 @@
                           </a:solidFill>
                           <a:latin typeface="Calibri"/>
                         </a:rPr>
-                        <a:t>-35.1%</a:t>
+                        <a:t>-35.5%</a:t>
                       </a:r>
                     </a:p>
                   </a:txBody>
@@ -4310,7 +4310,7 @@
                           </a:solidFill>
                           <a:latin typeface="Calibri"/>
                         </a:rPr>
-                        <a:t>16.5</a:t>
+                        <a:t>16.4</a:t>
                       </a:r>
                     </a:p>
                   </a:txBody>
@@ -4358,7 +4358,7 @@
                           </a:solidFill>
                           <a:latin typeface="Calibri"/>
                         </a:rPr>
-                        <a:t>3,923</a:t>
+                        <a:t>3,955</a:t>
                       </a:r>
                     </a:p>
                   </a:txBody>
@@ -4377,11 +4377,34 @@
                       <a:r>
                         <a:rPr sz="1000" b="0">
                           <a:solidFill>
+                            <a:srgbClr val="0B7A3B"/>
+                          </a:solidFill>
+                          <a:latin typeface="Calibri"/>
+                        </a:rPr>
+                        <a:t>+0.83%</a:t>
+                      </a:r>
+                    </a:p>
+                  </a:txBody>
+                  <a:tcPr>
+                    <a:solidFill>
+                      <a:srgbClr val="FFFFFF"/>
+                    </a:solidFill>
+                  </a:tcPr>
+                </a:tc>
+                <a:tc>
+                  <a:txBody>
+                    <a:bodyPr/>
+                    <a:lstStyle/>
+                    <a:p>
+                      <a:pPr algn="r"/>
+                      <a:r>
+                        <a:rPr sz="1000" b="0">
+                          <a:solidFill>
                             <a:srgbClr val="B3261E"/>
                           </a:solidFill>
                           <a:latin typeface="Calibri"/>
                         </a:rPr>
-                        <a:t>-0.60%</a:t>
+                        <a:t>-0.50%</a:t>
                       </a:r>
                     </a:p>
                   </a:txBody>
@@ -4404,7 +4427,7 @@
                           </a:solidFill>
                           <a:latin typeface="Calibri"/>
                         </a:rPr>
-                        <a:t>-1.47%</a:t>
+                        <a:t>-1.62%</a:t>
                       </a:r>
                     </a:p>
                   </a:txBody>
@@ -4423,11 +4446,11 @@
                       <a:r>
                         <a:rPr sz="1000" b="0">
                           <a:solidFill>
-                            <a:srgbClr val="B3261E"/>
-                          </a:solidFill>
-                          <a:latin typeface="Calibri"/>
-                        </a:rPr>
-                        <a:t>-2.84%</a:t>
+                            <a:srgbClr val="1F2A37"/>
+                          </a:solidFill>
+                          <a:latin typeface="Calibri"/>
+                        </a:rPr>
+                        <a:t>-9.6%</a:t>
                       </a:r>
                     </a:p>
                   </a:txBody>
@@ -4450,7 +4473,7 @@
                           </a:solidFill>
                           <a:latin typeface="Calibri"/>
                         </a:rPr>
-                        <a:t>-10.3%</a:t>
+                        <a:t>15%</a:t>
                       </a:r>
                     </a:p>
                   </a:txBody>
@@ -4473,30 +4496,7 @@
                           </a:solidFill>
                           <a:latin typeface="Calibri"/>
                         </a:rPr>
-                        <a:t>14%</a:t>
-                      </a:r>
-                    </a:p>
-                  </a:txBody>
-                  <a:tcPr>
-                    <a:solidFill>
-                      <a:srgbClr val="FFFFFF"/>
-                    </a:solidFill>
-                  </a:tcPr>
-                </a:tc>
-                <a:tc>
-                  <a:txBody>
-                    <a:bodyPr/>
-                    <a:lstStyle/>
-                    <a:p>
-                      <a:pPr algn="r"/>
-                      <a:r>
-                        <a:rPr sz="1000" b="0">
-                          <a:solidFill>
-                            <a:srgbClr val="1F2A37"/>
-                          </a:solidFill>
-                          <a:latin typeface="Calibri"/>
-                        </a:rPr>
-                        <a:t>32.6</a:t>
+                        <a:t>33.1</a:t>
                       </a:r>
                     </a:p>
                   </a:txBody>
@@ -4544,7 +4544,7 @@
                           </a:solidFill>
                           <a:latin typeface="Calibri"/>
                         </a:rPr>
-                        <a:t>1,279</a:t>
+                        <a:t>1,274</a:t>
                       </a:r>
                     </a:p>
                   </a:txBody>
@@ -4567,7 +4567,7 @@
                           </a:solidFill>
                           <a:latin typeface="Calibri"/>
                         </a:rPr>
-                        <a:t>-1.23%</a:t>
+                        <a:t>-0.39%</a:t>
                       </a:r>
                     </a:p>
                   </a:txBody>
@@ -4590,7 +4590,7 @@
                           </a:solidFill>
                           <a:latin typeface="Calibri"/>
                         </a:rPr>
-                        <a:t>-2.60%</a:t>
+                        <a:t>-2.19%</a:t>
                       </a:r>
                     </a:p>
                   </a:txBody>
@@ -4613,7 +4613,7 @@
                           </a:solidFill>
                           <a:latin typeface="Calibri"/>
                         </a:rPr>
-                        <a:t>-3.39%</a:t>
+                        <a:t>-4.14%</a:t>
                       </a:r>
                     </a:p>
                   </a:txBody>
@@ -4636,7 +4636,7 @@
                           </a:solidFill>
                           <a:latin typeface="Calibri"/>
                         </a:rPr>
-                        <a:t>-19.3%</a:t>
+                        <a:t>-19.6%</a:t>
                       </a:r>
                     </a:p>
                   </a:txBody>
@@ -4682,7 +4682,7 @@
                           </a:solidFill>
                           <a:latin typeface="Calibri"/>
                         </a:rPr>
-                        <a:t>23.2</a:t>
+                        <a:t>23.1</a:t>
                       </a:r>
                     </a:p>
                   </a:txBody>
@@ -4730,7 +4730,7 @@
                           </a:solidFill>
                           <a:latin typeface="Calibri"/>
                         </a:rPr>
-                        <a:t>2,208</a:t>
+                        <a:t>2,204</a:t>
                       </a:r>
                     </a:p>
                   </a:txBody>
@@ -4753,7 +4753,7 @@
                           </a:solidFill>
                           <a:latin typeface="Calibri"/>
                         </a:rPr>
-                        <a:t>-2.11%</a:t>
+                        <a:t>-0.18%</a:t>
                       </a:r>
                     </a:p>
                   </a:txBody>
@@ -4776,7 +4776,7 @@
                           </a:solidFill>
                           <a:latin typeface="Calibri"/>
                         </a:rPr>
-                        <a:t>-5.96%</a:t>
+                        <a:t>-5.00%</a:t>
                       </a:r>
                     </a:p>
                   </a:txBody>
@@ -4799,7 +4799,7 @@
                           </a:solidFill>
                           <a:latin typeface="Calibri"/>
                         </a:rPr>
-                        <a:t>-9.72%</a:t>
+                        <a:t>-6.20%</a:t>
                       </a:r>
                     </a:p>
                   </a:txBody>
@@ -4822,7 +4822,7 @@
                           </a:solidFill>
                           <a:latin typeface="Calibri"/>
                         </a:rPr>
-                        <a:t>-31.1%</a:t>
+                        <a:t>-31.2%</a:t>
                       </a:r>
                     </a:p>
                   </a:txBody>
@@ -4952,7 +4952,7 @@
                 </a:solidFill>
                 <a:latin typeface="Calibri"/>
               </a:rPr>
-              <a:t>Breadth was risk-off: 0 of 8 names advanced on the day.</a:t>
+              <a:t>Breadth was mixed: 4 of 8 names advanced on the day.</a:t>
             </a:r>
           </a:p>
           <a:p>
@@ -4968,7 +4968,7 @@
                 </a:solidFill>
                 <a:latin typeface="Calibri"/>
               </a:rPr>
-              <a:t>•  Best performer on the day: LT.NS at -0.60%.</a:t>
+              <a:t>•  Best performer on the day: BHARTIARTL.NS at +1.34%.</a:t>
             </a:r>
           </a:p>
           <a:p>
@@ -4984,7 +4984,7 @@
                 </a:solidFill>
                 <a:latin typeface="Calibri"/>
               </a:rPr>
-              <a:t>•  Weakest on the day: INFY.NS at -4.34%.</a:t>
+              <a:t>•  Weakest on the day: ITC.NS at -0.58%.</a:t>
             </a:r>
           </a:p>
           <a:p>
@@ -5000,7 +5000,7 @@
                 </a:solidFill>
                 <a:latin typeface="Calibri"/>
               </a:rPr>
-              <a:t>•  Median one-day move across the watchlist: -1.41%.</a:t>
+              <a:t>•  Median one-day move across the watchlist: -0.02%.</a:t>
             </a:r>
           </a:p>
           <a:p>
@@ -5016,23 +5016,7 @@
                 </a:solidFill>
                 <a:latin typeface="Calibri"/>
               </a:rPr>
-              <a:t>•  INFY.NS sits furthest below its 52-week high, at -37.4%.</a:t>
-            </a:r>
-          </a:p>
-          <a:p>
-            <a:pPr>
-              <a:spcBef>
-                <a:spcPts val="500"/>
-              </a:spcBef>
-            </a:pPr>
-            <a:r>
-              <a:rPr sz="1000" b="0">
-                <a:solidFill>
-                  <a:srgbClr val="1F2A37"/>
-                </a:solidFill>
-                <a:latin typeface="Calibri"/>
-              </a:rPr>
-              <a:t>•  1 name(s) within 5% of the 52-week high: ICICIBANK.NS.</a:t>
+              <a:t>•  INFY.NS sits furthest below its 52-week high, at -37.3%.</a:t>
             </a:r>
           </a:p>
           <a:p>
@@ -5080,7 +5064,7 @@
                 </a:solidFill>
                 <a:latin typeface="Calibri"/>
               </a:rPr>
-              <a:t>•  60 headlines collected, 4 tagged to a watchlist name by substring match (unverified).</a:t>
+              <a:t>•  60 headlines collected, 3 tagged to a watchlist name by substring match (unverified).</a:t>
             </a:r>
           </a:p>
           <a:p>

--- a/public/deskbrief.pptx
+++ b/public/deskbrief.pptx
@@ -3128,7 +3128,7 @@
                 </a:solidFill>
                 <a:latin typeface="Calibri"/>
               </a:rPr>
-              <a:t>8 names  |  generated 10 Sep 2026 16:34  |  source: Yahoo Finance via yfinance, Indian financial RSS</a:t>
+              <a:t>8 names  |  generated 11 Sep 2026 16:39  |  source: Yahoo Finance via yfinance, Indian financial RSS</a:t>
             </a:r>
           </a:p>
         </p:txBody>
@@ -3428,7 +3428,7 @@
                           </a:solidFill>
                           <a:latin typeface="Calibri"/>
                         </a:rPr>
-                        <a:t>1,839</a:t>
+                        <a:t>1,831</a:t>
                       </a:r>
                     </a:p>
                   </a:txBody>
@@ -3447,11 +3447,11 @@
                       <a:r>
                         <a:rPr sz="1000" b="0">
                           <a:solidFill>
-                            <a:srgbClr val="0B7A3B"/>
-                          </a:solidFill>
-                          <a:latin typeface="Calibri"/>
-                        </a:rPr>
-                        <a:t>+1.34%</a:t>
+                            <a:srgbClr val="B3261E"/>
+                          </a:solidFill>
+                          <a:latin typeface="Calibri"/>
+                        </a:rPr>
+                        <a:t>-0.43%</a:t>
                       </a:r>
                     </a:p>
                   </a:txBody>
@@ -3474,7 +3474,7 @@
                           </a:solidFill>
                           <a:latin typeface="Calibri"/>
                         </a:rPr>
-                        <a:t>-1.61%</a:t>
+                        <a:t>-0.48%</a:t>
                       </a:r>
                     </a:p>
                   </a:txBody>
@@ -3497,7 +3497,7 @@
                           </a:solidFill>
                           <a:latin typeface="Calibri"/>
                         </a:rPr>
-                        <a:t>-5.45%</a:t>
+                        <a:t>-5.57%</a:t>
                       </a:r>
                     </a:p>
                   </a:txBody>
@@ -3520,7 +3520,7 @@
                           </a:solidFill>
                           <a:latin typeface="Calibri"/>
                         </a:rPr>
-                        <a:t>-13.9%</a:t>
+                        <a:t>-14.3%</a:t>
                       </a:r>
                     </a:p>
                   </a:txBody>
@@ -3543,7 +3543,7 @@
                           </a:solidFill>
                           <a:latin typeface="Calibri"/>
                         </a:rPr>
-                        <a:t>24%</a:t>
+                        <a:t>23%</a:t>
                       </a:r>
                     </a:p>
                   </a:txBody>
@@ -3566,7 +3566,7 @@
                           </a:solidFill>
                           <a:latin typeface="Calibri"/>
                         </a:rPr>
-                        <a:t>38.4</a:t>
+                        <a:t>38.3</a:t>
                       </a:r>
                     </a:p>
                   </a:txBody>
@@ -3614,7 +3614,7 @@
                           </a:solidFill>
                           <a:latin typeface="Calibri"/>
                         </a:rPr>
-                        <a:t>694</a:t>
+                        <a:t>708</a:t>
                       </a:r>
                     </a:p>
                   </a:txBody>
@@ -3637,7 +3637,7 @@
                           </a:solidFill>
                           <a:latin typeface="Calibri"/>
                         </a:rPr>
-                        <a:t>+0.98%</a:t>
+                        <a:t>+2.08%</a:t>
                       </a:r>
                     </a:p>
                   </a:txBody>
@@ -3660,7 +3660,7 @@
                           </a:solidFill>
                           <a:latin typeface="Calibri"/>
                         </a:rPr>
-                        <a:t>-1.82%</a:t>
+                        <a:t>-0.54%</a:t>
                       </a:r>
                     </a:p>
                   </a:txBody>
@@ -3683,7 +3683,7 @@
                           </a:solidFill>
                           <a:latin typeface="Calibri"/>
                         </a:rPr>
-                        <a:t>-4.83%</a:t>
+                        <a:t>-2.31%</a:t>
                       </a:r>
                     </a:p>
                   </a:txBody>
@@ -3706,7 +3706,7 @@
                           </a:solidFill>
                           <a:latin typeface="Calibri"/>
                         </a:rPr>
-                        <a:t>-30.1%</a:t>
+                        <a:t>-28.7%</a:t>
                       </a:r>
                     </a:p>
                   </a:txBody>
@@ -3729,7 +3729,7 @@
                           </a:solidFill>
                           <a:latin typeface="Calibri"/>
                         </a:rPr>
-                        <a:t>15%</a:t>
+                        <a:t>16%</a:t>
                       </a:r>
                     </a:p>
                   </a:txBody>
@@ -3752,7 +3752,7 @@
                           </a:solidFill>
                           <a:latin typeface="Calibri"/>
                         </a:rPr>
-                        <a:t>15.2</a:t>
+                        <a:t>15.5</a:t>
                       </a:r>
                     </a:p>
                   </a:txBody>
@@ -3800,7 +3800,7 @@
                           </a:solidFill>
                           <a:latin typeface="Calibri"/>
                         </a:rPr>
-                        <a:t>1,384</a:t>
+                        <a:t>1,379</a:t>
                       </a:r>
                     </a:p>
                   </a:txBody>
@@ -3823,7 +3823,7 @@
                           </a:solidFill>
                           <a:latin typeface="Calibri"/>
                         </a:rPr>
-                        <a:t>-0.33%</a:t>
+                        <a:t>-0.38%</a:t>
                       </a:r>
                     </a:p>
                   </a:txBody>
@@ -3846,7 +3846,7 @@
                           </a:solidFill>
                           <a:latin typeface="Calibri"/>
                         </a:rPr>
-                        <a:t>-3.18%</a:t>
+                        <a:t>-3.08%</a:t>
                       </a:r>
                     </a:p>
                   </a:txBody>
@@ -3869,7 +3869,7 @@
                           </a:solidFill>
                           <a:latin typeface="Calibri"/>
                         </a:rPr>
-                        <a:t>-3.30%</a:t>
+                        <a:t>-1.95%</a:t>
                       </a:r>
                     </a:p>
                   </a:txBody>
@@ -3892,7 +3892,7 @@
                           </a:solidFill>
                           <a:latin typeface="Calibri"/>
                         </a:rPr>
-                        <a:t>-5.2%</a:t>
+                        <a:t>-5.5%</a:t>
                       </a:r>
                     </a:p>
                   </a:txBody>
@@ -3938,7 +3938,7 @@
                           </a:solidFill>
                           <a:latin typeface="Calibri"/>
                         </a:rPr>
-                        <a:t>17.9</a:t>
+                        <a:t>17.8</a:t>
                       </a:r>
                     </a:p>
                   </a:txBody>
@@ -3986,7 +3986,7 @@
                           </a:solidFill>
                           <a:latin typeface="Calibri"/>
                         </a:rPr>
-                        <a:t>1,036</a:t>
+                        <a:t>1,038</a:t>
                       </a:r>
                     </a:p>
                   </a:txBody>
@@ -4009,7 +4009,7 @@
                           </a:solidFill>
                           <a:latin typeface="Calibri"/>
                         </a:rPr>
-                        <a:t>+0.14%</a:t>
+                        <a:t>+0.12%</a:t>
                       </a:r>
                     </a:p>
                   </a:txBody>
@@ -4032,7 +4032,7 @@
                           </a:solidFill>
                           <a:latin typeface="Calibri"/>
                         </a:rPr>
-                        <a:t>-8.30%</a:t>
+                        <a:t>-8.17%</a:t>
                       </a:r>
                     </a:p>
                   </a:txBody>
@@ -4055,7 +4055,7 @@
                           </a:solidFill>
                           <a:latin typeface="Calibri"/>
                         </a:rPr>
-                        <a:t>-11.87%</a:t>
+                        <a:t>-11.69%</a:t>
                       </a:r>
                     </a:p>
                   </a:txBody>
@@ -4101,7 +4101,7 @@
                           </a:solidFill>
                           <a:latin typeface="Calibri"/>
                         </a:rPr>
-                        <a:t>29%</a:t>
+                        <a:t>28%</a:t>
                       </a:r>
                     </a:p>
                   </a:txBody>
@@ -4172,7 +4172,7 @@
                           </a:solidFill>
                           <a:latin typeface="Calibri"/>
                         </a:rPr>
-                        <a:t>259</a:t>
+                        <a:t>260</a:t>
                       </a:r>
                     </a:p>
                   </a:txBody>
@@ -4191,11 +4191,34 @@
                       <a:r>
                         <a:rPr sz="1000" b="0">
                           <a:solidFill>
+                            <a:srgbClr val="0B7A3B"/>
+                          </a:solidFill>
+                          <a:latin typeface="Calibri"/>
+                        </a:rPr>
+                        <a:t>+0.21%</a:t>
+                      </a:r>
+                    </a:p>
+                  </a:txBody>
+                  <a:tcPr>
+                    <a:solidFill>
+                      <a:srgbClr val="F3F5F7"/>
+                    </a:solidFill>
+                  </a:tcPr>
+                </a:tc>
+                <a:tc>
+                  <a:txBody>
+                    <a:bodyPr/>
+                    <a:lstStyle/>
+                    <a:p>
+                      <a:pPr algn="r"/>
+                      <a:r>
+                        <a:rPr sz="1000" b="0">
+                          <a:solidFill>
                             <a:srgbClr val="B3261E"/>
                           </a:solidFill>
                           <a:latin typeface="Calibri"/>
                         </a:rPr>
-                        <a:t>-0.58%</a:t>
+                        <a:t>-1.61%</a:t>
                       </a:r>
                     </a:p>
                   </a:txBody>
@@ -4218,7 +4241,7 @@
                           </a:solidFill>
                           <a:latin typeface="Calibri"/>
                         </a:rPr>
-                        <a:t>-1.41%</a:t>
+                        <a:t>-6.70%</a:t>
                       </a:r>
                     </a:p>
                   </a:txBody>
@@ -4237,11 +4260,11 @@
                       <a:r>
                         <a:rPr sz="1000" b="0">
                           <a:solidFill>
-                            <a:srgbClr val="B3261E"/>
-                          </a:solidFill>
-                          <a:latin typeface="Calibri"/>
-                        </a:rPr>
-                        <a:t>-6.10%</a:t>
+                            <a:srgbClr val="1F2A37"/>
+                          </a:solidFill>
+                          <a:latin typeface="Calibri"/>
+                        </a:rPr>
+                        <a:t>-35.4%</a:t>
                       </a:r>
                     </a:p>
                   </a:txBody>
@@ -4264,30 +4287,7 @@
                           </a:solidFill>
                           <a:latin typeface="Calibri"/>
                         </a:rPr>
-                        <a:t>-35.5%</a:t>
-                      </a:r>
-                    </a:p>
-                  </a:txBody>
-                  <a:tcPr>
-                    <a:solidFill>
-                      <a:srgbClr val="F3F5F7"/>
-                    </a:solidFill>
-                  </a:tcPr>
-                </a:tc>
-                <a:tc>
-                  <a:txBody>
-                    <a:bodyPr/>
-                    <a:lstStyle/>
-                    <a:p>
-                      <a:pPr algn="r"/>
-                      <a:r>
-                        <a:rPr sz="1000" b="0">
-                          <a:solidFill>
-                            <a:srgbClr val="1F2A37"/>
-                          </a:solidFill>
-                          <a:latin typeface="Calibri"/>
-                        </a:rPr>
-                        <a:t>23%</a:t>
+                        <a:t>22%</a:t>
                       </a:r>
                     </a:p>
                   </a:txBody>
@@ -4358,7 +4358,7 @@
                           </a:solidFill>
                           <a:latin typeface="Calibri"/>
                         </a:rPr>
-                        <a:t>3,955</a:t>
+                        <a:t>3,931</a:t>
                       </a:r>
                     </a:p>
                   </a:txBody>
@@ -4377,11 +4377,11 @@
                       <a:r>
                         <a:rPr sz="1000" b="0">
                           <a:solidFill>
-                            <a:srgbClr val="0B7A3B"/>
-                          </a:solidFill>
-                          <a:latin typeface="Calibri"/>
-                        </a:rPr>
-                        <a:t>+0.83%</a:t>
+                            <a:srgbClr val="B3261E"/>
+                          </a:solidFill>
+                          <a:latin typeface="Calibri"/>
+                        </a:rPr>
+                        <a:t>-0.61%</a:t>
                       </a:r>
                     </a:p>
                   </a:txBody>
@@ -4404,7 +4404,7 @@
                           </a:solidFill>
                           <a:latin typeface="Calibri"/>
                         </a:rPr>
-                        <a:t>-0.50%</a:t>
+                        <a:t>-0.84%</a:t>
                       </a:r>
                     </a:p>
                   </a:txBody>
@@ -4427,7 +4427,7 @@
                           </a:solidFill>
                           <a:latin typeface="Calibri"/>
                         </a:rPr>
-                        <a:t>-1.62%</a:t>
+                        <a:t>-3.44%</a:t>
                       </a:r>
                     </a:p>
                   </a:txBody>
@@ -4450,7 +4450,7 @@
                           </a:solidFill>
                           <a:latin typeface="Calibri"/>
                         </a:rPr>
-                        <a:t>-9.6%</a:t>
+                        <a:t>-10.2%</a:t>
                       </a:r>
                     </a:p>
                   </a:txBody>
@@ -4496,7 +4496,7 @@
                           </a:solidFill>
                           <a:latin typeface="Calibri"/>
                         </a:rPr>
-                        <a:t>33.1</a:t>
+                        <a:t>32.6</a:t>
                       </a:r>
                     </a:p>
                   </a:txBody>
@@ -4544,7 +4544,7 @@
                           </a:solidFill>
                           <a:latin typeface="Calibri"/>
                         </a:rPr>
-                        <a:t>1,274</a:t>
+                        <a:t>1,258</a:t>
                       </a:r>
                     </a:p>
                   </a:txBody>
@@ -4567,7 +4567,7 @@
                           </a:solidFill>
                           <a:latin typeface="Calibri"/>
                         </a:rPr>
-                        <a:t>-0.39%</a:t>
+                        <a:t>-1.30%</a:t>
                       </a:r>
                     </a:p>
                   </a:txBody>
@@ -4590,7 +4590,7 @@
                           </a:solidFill>
                           <a:latin typeface="Calibri"/>
                         </a:rPr>
-                        <a:t>-2.19%</a:t>
+                        <a:t>-4.88%</a:t>
                       </a:r>
                     </a:p>
                   </a:txBody>
@@ -4613,7 +4613,7 @@
                           </a:solidFill>
                           <a:latin typeface="Calibri"/>
                         </a:rPr>
-                        <a:t>-4.14%</a:t>
+                        <a:t>-4.52%</a:t>
                       </a:r>
                     </a:p>
                   </a:txBody>
@@ -4636,7 +4636,7 @@
                           </a:solidFill>
                           <a:latin typeface="Calibri"/>
                         </a:rPr>
-                        <a:t>-19.6%</a:t>
+                        <a:t>-20.7%</a:t>
                       </a:r>
                     </a:p>
                   </a:txBody>
@@ -4682,7 +4682,7 @@
                           </a:solidFill>
                           <a:latin typeface="Calibri"/>
                         </a:rPr>
-                        <a:t>23.1</a:t>
+                        <a:t>22.8</a:t>
                       </a:r>
                     </a:p>
                   </a:txBody>
@@ -4730,7 +4730,7 @@
                           </a:solidFill>
                           <a:latin typeface="Calibri"/>
                         </a:rPr>
-                        <a:t>2,204</a:t>
+                        <a:t>2,201</a:t>
                       </a:r>
                     </a:p>
                   </a:txBody>
@@ -4753,7 +4753,7 @@
                           </a:solidFill>
                           <a:latin typeface="Calibri"/>
                         </a:rPr>
-                        <a:t>-0.18%</a:t>
+                        <a:t>-0.15%</a:t>
                       </a:r>
                     </a:p>
                   </a:txBody>
@@ -4776,7 +4776,7 @@
                           </a:solidFill>
                           <a:latin typeface="Calibri"/>
                         </a:rPr>
-                        <a:t>-5.00%</a:t>
+                        <a:t>-4.48%</a:t>
                       </a:r>
                     </a:p>
                   </a:txBody>
@@ -4799,7 +4799,7 @@
                           </a:solidFill>
                           <a:latin typeface="Calibri"/>
                         </a:rPr>
-                        <a:t>-6.20%</a:t>
+                        <a:t>-7.33%</a:t>
                       </a:r>
                     </a:p>
                   </a:txBody>
@@ -4822,7 +4822,7 @@
                           </a:solidFill>
                           <a:latin typeface="Calibri"/>
                         </a:rPr>
-                        <a:t>-31.2%</a:t>
+                        <a:t>-31.3%</a:t>
                       </a:r>
                     </a:p>
                   </a:txBody>
@@ -4845,7 +4845,7 @@
                           </a:solidFill>
                           <a:latin typeface="Calibri"/>
                         </a:rPr>
-                        <a:t>30%</a:t>
+                        <a:t>29%</a:t>
                       </a:r>
                     </a:p>
                   </a:txBody>
@@ -4952,7 +4952,7 @@
                 </a:solidFill>
                 <a:latin typeface="Calibri"/>
               </a:rPr>
-              <a:t>Breadth was mixed: 4 of 8 names advanced on the day.</a:t>
+              <a:t>Breadth was risk-off: 3 of 8 names advanced on the day.</a:t>
             </a:r>
           </a:p>
           <a:p>
@@ -4968,7 +4968,7 @@
                 </a:solidFill>
                 <a:latin typeface="Calibri"/>
               </a:rPr>
-              <a:t>•  Best performer on the day: BHARTIARTL.NS at +1.34%.</a:t>
+              <a:t>•  Best performer on the day: HDFCBANK.NS at +2.08%.</a:t>
             </a:r>
           </a:p>
           <a:p>
@@ -4984,7 +4984,7 @@
                 </a:solidFill>
                 <a:latin typeface="Calibri"/>
               </a:rPr>
-              <a:t>•  Weakest on the day: ITC.NS at -0.58%.</a:t>
+              <a:t>•  Weakest on the day: RELIANCE.NS at -1.30%.</a:t>
             </a:r>
           </a:p>
           <a:p>
@@ -5000,7 +5000,7 @@
                 </a:solidFill>
                 <a:latin typeface="Calibri"/>
               </a:rPr>
-              <a:t>•  Median one-day move across the watchlist: -0.02%.</a:t>
+              <a:t>•  Median one-day move across the watchlist: -0.26%.</a:t>
             </a:r>
           </a:p>
           <a:p>
@@ -5048,7 +5048,7 @@
                 </a:solidFill>
                 <a:latin typeface="Calibri"/>
               </a:rPr>
-              <a:t>•  Highest 30-day realised volatility: TCS.NS at 30.2% annualised.</a:t>
+              <a:t>•  Highest 30-day realised volatility: TCS.NS at 29.4% annualised.</a:t>
             </a:r>
           </a:p>
           <a:p>
@@ -5064,7 +5064,7 @@
                 </a:solidFill>
                 <a:latin typeface="Calibri"/>
               </a:rPr>
-              <a:t>•  60 headlines collected, 3 tagged to a watchlist name by substring match (unverified).</a:t>
+              <a:t>•  60 headlines collected, 5 tagged to a watchlist name by substring match (unverified).</a:t>
             </a:r>
           </a:p>
           <a:p>

--- a/public/deskbrief.pptx
+++ b/public/deskbrief.pptx
@@ -3128,7 +3128,7 @@
                 </a:solidFill>
                 <a:latin typeface="Calibri"/>
               </a:rPr>
-              <a:t>8 names  |  generated 11 Sep 2026 16:39  |  source: Yahoo Finance via yfinance, Indian financial RSS</a:t>
+              <a:t>8 names  |  generated 14 Sep 2026 18:07  |  source: Yahoo Finance via yfinance, Indian financial RSS</a:t>
             </a:r>
           </a:p>
         </p:txBody>
@@ -5064,7 +5064,7 @@
                 </a:solidFill>
                 <a:latin typeface="Calibri"/>
               </a:rPr>
-              <a:t>•  60 headlines collected, 5 tagged to a watchlist name by substring match (unverified).</a:t>
+              <a:t>•  60 headlines collected, 1 tagged to a watchlist name by substring match (unverified).</a:t>
             </a:r>
           </a:p>
           <a:p>

--- a/public/deskbrief.pptx
+++ b/public/deskbrief.pptx
@@ -3128,7 +3128,7 @@
                 </a:solidFill>
                 <a:latin typeface="Calibri"/>
               </a:rPr>
-              <a:t>8 names  |  generated 14 Sep 2026 18:07  |  source: Yahoo Finance via yfinance, Indian financial RSS</a:t>
+              <a:t>8 names  |  generated 15 Sep 2026 17:10  |  source: Yahoo Finance via yfinance, Indian financial RSS</a:t>
             </a:r>
           </a:p>
         </p:txBody>
@@ -3428,7 +3428,7 @@
                           </a:solidFill>
                           <a:latin typeface="Calibri"/>
                         </a:rPr>
-                        <a:t>1,831</a:t>
+                        <a:t>1,830</a:t>
                       </a:r>
                     </a:p>
                   </a:txBody>
@@ -3451,7 +3451,7 @@
                           </a:solidFill>
                           <a:latin typeface="Calibri"/>
                         </a:rPr>
-                        <a:t>-0.43%</a:t>
+                        <a:t>-0.04%</a:t>
                       </a:r>
                     </a:p>
                   </a:txBody>
@@ -3474,7 +3474,7 @@
                           </a:solidFill>
                           <a:latin typeface="Calibri"/>
                         </a:rPr>
-                        <a:t>-0.48%</a:t>
+                        <a:t>-1.27%</a:t>
                       </a:r>
                     </a:p>
                   </a:txBody>
@@ -3497,7 +3497,7 @@
                           </a:solidFill>
                           <a:latin typeface="Calibri"/>
                         </a:rPr>
-                        <a:t>-5.57%</a:t>
+                        <a:t>-8.12%</a:t>
                       </a:r>
                     </a:p>
                   </a:txBody>
@@ -3614,7 +3614,7 @@
                           </a:solidFill>
                           <a:latin typeface="Calibri"/>
                         </a:rPr>
-                        <a:t>708</a:t>
+                        <a:t>717</a:t>
                       </a:r>
                     </a:p>
                   </a:txBody>
@@ -3637,7 +3637,7 @@
                           </a:solidFill>
                           <a:latin typeface="Calibri"/>
                         </a:rPr>
-                        <a:t>+2.08%</a:t>
+                        <a:t>+1.17%</a:t>
                       </a:r>
                     </a:p>
                   </a:txBody>
@@ -3656,11 +3656,34 @@
                       <a:r>
                         <a:rPr sz="1000" b="0">
                           <a:solidFill>
+                            <a:srgbClr val="0B7A3B"/>
+                          </a:solidFill>
+                          <a:latin typeface="Calibri"/>
+                        </a:rPr>
+                        <a:t>+0.85%</a:t>
+                      </a:r>
+                    </a:p>
+                  </a:txBody>
+                  <a:tcPr>
+                    <a:solidFill>
+                      <a:srgbClr val="FFFFFF"/>
+                    </a:solidFill>
+                  </a:tcPr>
+                </a:tc>
+                <a:tc>
+                  <a:txBody>
+                    <a:bodyPr/>
+                    <a:lstStyle/>
+                    <a:p>
+                      <a:pPr algn="r"/>
+                      <a:r>
+                        <a:rPr sz="1000" b="0">
+                          <a:solidFill>
                             <a:srgbClr val="B3261E"/>
                           </a:solidFill>
                           <a:latin typeface="Calibri"/>
                         </a:rPr>
-                        <a:t>-0.54%</a:t>
+                        <a:t>-1.44%</a:t>
                       </a:r>
                     </a:p>
                   </a:txBody>
@@ -3679,11 +3702,11 @@
                       <a:r>
                         <a:rPr sz="1000" b="0">
                           <a:solidFill>
-                            <a:srgbClr val="B3261E"/>
-                          </a:solidFill>
-                          <a:latin typeface="Calibri"/>
-                        </a:rPr>
-                        <a:t>-2.31%</a:t>
+                            <a:srgbClr val="1F2A37"/>
+                          </a:solidFill>
+                          <a:latin typeface="Calibri"/>
+                        </a:rPr>
+                        <a:t>-27.8%</a:t>
                       </a:r>
                     </a:p>
                   </a:txBody>
@@ -3706,7 +3729,7 @@
                           </a:solidFill>
                           <a:latin typeface="Calibri"/>
                         </a:rPr>
-                        <a:t>-28.7%</a:t>
+                        <a:t>16%</a:t>
                       </a:r>
                     </a:p>
                   </a:txBody>
@@ -3729,30 +3752,7 @@
                           </a:solidFill>
                           <a:latin typeface="Calibri"/>
                         </a:rPr>
-                        <a:t>16%</a:t>
-                      </a:r>
-                    </a:p>
-                  </a:txBody>
-                  <a:tcPr>
-                    <a:solidFill>
-                      <a:srgbClr val="FFFFFF"/>
-                    </a:solidFill>
-                  </a:tcPr>
-                </a:tc>
-                <a:tc>
-                  <a:txBody>
-                    <a:bodyPr/>
-                    <a:lstStyle/>
-                    <a:p>
-                      <a:pPr algn="r"/>
-                      <a:r>
-                        <a:rPr sz="1000" b="0">
-                          <a:solidFill>
-                            <a:srgbClr val="1F2A37"/>
-                          </a:solidFill>
-                          <a:latin typeface="Calibri"/>
-                        </a:rPr>
-                        <a:t>15.5</a:t>
+                        <a:t>15.7</a:t>
                       </a:r>
                     </a:p>
                   </a:txBody>
@@ -3800,7 +3800,7 @@
                           </a:solidFill>
                           <a:latin typeface="Calibri"/>
                         </a:rPr>
-                        <a:t>1,379</a:t>
+                        <a:t>1,350</a:t>
                       </a:r>
                     </a:p>
                   </a:txBody>
@@ -3823,7 +3823,7 @@
                           </a:solidFill>
                           <a:latin typeface="Calibri"/>
                         </a:rPr>
-                        <a:t>-0.38%</a:t>
+                        <a:t>-2.10%</a:t>
                       </a:r>
                     </a:p>
                   </a:txBody>
@@ -3846,7 +3846,7 @@
                           </a:solidFill>
                           <a:latin typeface="Calibri"/>
                         </a:rPr>
-                        <a:t>-3.08%</a:t>
+                        <a:t>-5.40%</a:t>
                       </a:r>
                     </a:p>
                   </a:txBody>
@@ -3869,7 +3869,7 @@
                           </a:solidFill>
                           <a:latin typeface="Calibri"/>
                         </a:rPr>
-                        <a:t>-1.95%</a:t>
+                        <a:t>-4.70%</a:t>
                       </a:r>
                     </a:p>
                   </a:txBody>
@@ -3892,7 +3892,7 @@
                           </a:solidFill>
                           <a:latin typeface="Calibri"/>
                         </a:rPr>
-                        <a:t>-5.5%</a:t>
+                        <a:t>-7.5%</a:t>
                       </a:r>
                     </a:p>
                   </a:txBody>
@@ -3915,7 +3915,7 @@
                           </a:solidFill>
                           <a:latin typeface="Calibri"/>
                         </a:rPr>
-                        <a:t>17%</a:t>
+                        <a:t>16%</a:t>
                       </a:r>
                     </a:p>
                   </a:txBody>
@@ -3938,7 +3938,7 @@
                           </a:solidFill>
                           <a:latin typeface="Calibri"/>
                         </a:rPr>
-                        <a:t>17.8</a:t>
+                        <a:t>17.5</a:t>
                       </a:r>
                     </a:p>
                   </a:txBody>
@@ -3986,7 +3986,7 @@
                           </a:solidFill>
                           <a:latin typeface="Calibri"/>
                         </a:rPr>
-                        <a:t>1,038</a:t>
+                        <a:t>1,077</a:t>
                       </a:r>
                     </a:p>
                   </a:txBody>
@@ -4009,7 +4009,7 @@
                           </a:solidFill>
                           <a:latin typeface="Calibri"/>
                         </a:rPr>
-                        <a:t>+0.12%</a:t>
+                        <a:t>+3.79%</a:t>
                       </a:r>
                     </a:p>
                   </a:txBody>
@@ -4032,7 +4032,7 @@
                           </a:solidFill>
                           <a:latin typeface="Calibri"/>
                         </a:rPr>
-                        <a:t>-8.17%</a:t>
+                        <a:t>-0.97%</a:t>
                       </a:r>
                     </a:p>
                   </a:txBody>
@@ -4055,7 +4055,7 @@
                           </a:solidFill>
                           <a:latin typeface="Calibri"/>
                         </a:rPr>
-                        <a:t>-11.69%</a:t>
+                        <a:t>-7.89%</a:t>
                       </a:r>
                     </a:p>
                   </a:txBody>
@@ -4078,7 +4078,7 @@
                           </a:solidFill>
                           <a:latin typeface="Calibri"/>
                         </a:rPr>
-                        <a:t>-37.3%</a:t>
+                        <a:t>-34.9%</a:t>
                       </a:r>
                     </a:p>
                   </a:txBody>
@@ -4124,7 +4124,7 @@
                           </a:solidFill>
                           <a:latin typeface="Calibri"/>
                         </a:rPr>
-                        <a:t>13.5</a:t>
+                        <a:t>14.0</a:t>
                       </a:r>
                     </a:p>
                   </a:txBody>
@@ -4172,7 +4172,7 @@
                           </a:solidFill>
                           <a:latin typeface="Calibri"/>
                         </a:rPr>
-                        <a:t>260</a:t>
+                        <a:t>258</a:t>
                       </a:r>
                     </a:p>
                   </a:txBody>
@@ -4191,11 +4191,11 @@
                       <a:r>
                         <a:rPr sz="1000" b="0">
                           <a:solidFill>
-                            <a:srgbClr val="0B7A3B"/>
-                          </a:solidFill>
-                          <a:latin typeface="Calibri"/>
-                        </a:rPr>
-                        <a:t>+0.21%</a:t>
+                            <a:srgbClr val="B3261E"/>
+                          </a:solidFill>
+                          <a:latin typeface="Calibri"/>
+                        </a:rPr>
+                        <a:t>-0.71%</a:t>
                       </a:r>
                     </a:p>
                   </a:txBody>
@@ -4218,7 +4218,7 @@
                           </a:solidFill>
                           <a:latin typeface="Calibri"/>
                         </a:rPr>
-                        <a:t>-1.61%</a:t>
+                        <a:t>-2.09%</a:t>
                       </a:r>
                     </a:p>
                   </a:txBody>
@@ -4241,7 +4241,7 @@
                           </a:solidFill>
                           <a:latin typeface="Calibri"/>
                         </a:rPr>
-                        <a:t>-6.70%</a:t>
+                        <a:t>-7.26%</a:t>
                       </a:r>
                     </a:p>
                   </a:txBody>
@@ -4264,7 +4264,7 @@
                           </a:solidFill>
                           <a:latin typeface="Calibri"/>
                         </a:rPr>
-                        <a:t>-35.4%</a:t>
+                        <a:t>-35.8%</a:t>
                       </a:r>
                     </a:p>
                   </a:txBody>
@@ -4287,7 +4287,7 @@
                           </a:solidFill>
                           <a:latin typeface="Calibri"/>
                         </a:rPr>
-                        <a:t>22%</a:t>
+                        <a:t>21%</a:t>
                       </a:r>
                     </a:p>
                   </a:txBody>
@@ -4310,7 +4310,7 @@
                           </a:solidFill>
                           <a:latin typeface="Calibri"/>
                         </a:rPr>
-                        <a:t>16.4</a:t>
+                        <a:t>16.3</a:t>
                       </a:r>
                     </a:p>
                   </a:txBody>
@@ -4358,7 +4358,7 @@
                           </a:solidFill>
                           <a:latin typeface="Calibri"/>
                         </a:rPr>
-                        <a:t>3,931</a:t>
+                        <a:t>3,851</a:t>
                       </a:r>
                     </a:p>
                   </a:txBody>
@@ -4381,7 +4381,7 @@
                           </a:solidFill>
                           <a:latin typeface="Calibri"/>
                         </a:rPr>
-                        <a:t>-0.61%</a:t>
+                        <a:t>-2.04%</a:t>
                       </a:r>
                     </a:p>
                   </a:txBody>
@@ -4404,7 +4404,7 @@
                           </a:solidFill>
                           <a:latin typeface="Calibri"/>
                         </a:rPr>
-                        <a:t>-0.84%</a:t>
+                        <a:t>-3.71%</a:t>
                       </a:r>
                     </a:p>
                   </a:txBody>
@@ -4427,7 +4427,7 @@
                           </a:solidFill>
                           <a:latin typeface="Calibri"/>
                         </a:rPr>
-                        <a:t>-3.44%</a:t>
+                        <a:t>-5.09%</a:t>
                       </a:r>
                     </a:p>
                   </a:txBody>
@@ -4450,7 +4450,7 @@
                           </a:solidFill>
                           <a:latin typeface="Calibri"/>
                         </a:rPr>
-                        <a:t>-10.2%</a:t>
+                        <a:t>-12.0%</a:t>
                       </a:r>
                     </a:p>
                   </a:txBody>
@@ -4473,7 +4473,7 @@
                           </a:solidFill>
                           <a:latin typeface="Calibri"/>
                         </a:rPr>
-                        <a:t>15%</a:t>
+                        <a:t>14%</a:t>
                       </a:r>
                     </a:p>
                   </a:txBody>
@@ -4496,7 +4496,7 @@
                           </a:solidFill>
                           <a:latin typeface="Calibri"/>
                         </a:rPr>
-                        <a:t>32.6</a:t>
+                        <a:t>31.9</a:t>
                       </a:r>
                     </a:p>
                   </a:txBody>
@@ -4544,7 +4544,7 @@
                           </a:solidFill>
                           <a:latin typeface="Calibri"/>
                         </a:rPr>
-                        <a:t>1,258</a:t>
+                        <a:t>1,235</a:t>
                       </a:r>
                     </a:p>
                   </a:txBody>
@@ -4567,7 +4567,7 @@
                           </a:solidFill>
                           <a:latin typeface="Calibri"/>
                         </a:rPr>
-                        <a:t>-1.30%</a:t>
+                        <a:t>-1.77%</a:t>
                       </a:r>
                     </a:p>
                   </a:txBody>
@@ -4590,7 +4590,7 @@
                           </a:solidFill>
                           <a:latin typeface="Calibri"/>
                         </a:rPr>
-                        <a:t>-4.88%</a:t>
+                        <a:t>-5.67%</a:t>
                       </a:r>
                     </a:p>
                   </a:txBody>
@@ -4613,7 +4613,7 @@
                           </a:solidFill>
                           <a:latin typeface="Calibri"/>
                         </a:rPr>
-                        <a:t>-4.52%</a:t>
+                        <a:t>-5.70%</a:t>
                       </a:r>
                     </a:p>
                   </a:txBody>
@@ -4636,7 +4636,7 @@
                           </a:solidFill>
                           <a:latin typeface="Calibri"/>
                         </a:rPr>
-                        <a:t>-20.7%</a:t>
+                        <a:t>-22.1%</a:t>
                       </a:r>
                     </a:p>
                   </a:txBody>
@@ -4682,7 +4682,7 @@
                           </a:solidFill>
                           <a:latin typeface="Calibri"/>
                         </a:rPr>
-                        <a:t>22.8</a:t>
+                        <a:t>22.4</a:t>
                       </a:r>
                     </a:p>
                   </a:txBody>
@@ -4730,7 +4730,7 @@
                           </a:solidFill>
                           <a:latin typeface="Calibri"/>
                         </a:rPr>
-                        <a:t>2,201</a:t>
+                        <a:t>2,251</a:t>
                       </a:r>
                     </a:p>
                   </a:txBody>
@@ -4749,11 +4749,34 @@
                       <a:r>
                         <a:rPr sz="1000" b="0">
                           <a:solidFill>
+                            <a:srgbClr val="0B7A3B"/>
+                          </a:solidFill>
+                          <a:latin typeface="Calibri"/>
+                        </a:rPr>
+                        <a:t>+2.28%</a:t>
+                      </a:r>
+                    </a:p>
+                  </a:txBody>
+                  <a:tcPr>
+                    <a:solidFill>
+                      <a:srgbClr val="FFFFFF"/>
+                    </a:solidFill>
+                  </a:tcPr>
+                </a:tc>
+                <a:tc>
+                  <a:txBody>
+                    <a:bodyPr/>
+                    <a:lstStyle/>
+                    <a:p>
+                      <a:pPr algn="r"/>
+                      <a:r>
+                        <a:rPr sz="1000" b="0">
+                          <a:solidFill>
                             <a:srgbClr val="B3261E"/>
                           </a:solidFill>
                           <a:latin typeface="Calibri"/>
                         </a:rPr>
-                        <a:t>-0.15%</a:t>
+                        <a:t>-0.84%</a:t>
                       </a:r>
                     </a:p>
                   </a:txBody>
@@ -4776,7 +4799,7 @@
                           </a:solidFill>
                           <a:latin typeface="Calibri"/>
                         </a:rPr>
-                        <a:t>-4.48%</a:t>
+                        <a:t>-4.66%</a:t>
                       </a:r>
                     </a:p>
                   </a:txBody>
@@ -4795,11 +4818,11 @@
                       <a:r>
                         <a:rPr sz="1000" b="0">
                           <a:solidFill>
-                            <a:srgbClr val="B3261E"/>
-                          </a:solidFill>
-                          <a:latin typeface="Calibri"/>
-                        </a:rPr>
-                        <a:t>-7.33%</a:t>
+                            <a:srgbClr val="1F2A37"/>
+                          </a:solidFill>
+                          <a:latin typeface="Calibri"/>
+                        </a:rPr>
+                        <a:t>-29.8%</a:t>
                       </a:r>
                     </a:p>
                   </a:txBody>
@@ -4822,7 +4845,7 @@
                           </a:solidFill>
                           <a:latin typeface="Calibri"/>
                         </a:rPr>
-                        <a:t>-31.3%</a:t>
+                        <a:t>27%</a:t>
                       </a:r>
                     </a:p>
                   </a:txBody>
@@ -4845,30 +4868,7 @@
                           </a:solidFill>
                           <a:latin typeface="Calibri"/>
                         </a:rPr>
-                        <a:t>29%</a:t>
-                      </a:r>
-                    </a:p>
-                  </a:txBody>
-                  <a:tcPr>
-                    <a:solidFill>
-                      <a:srgbClr val="FFFFFF"/>
-                    </a:solidFill>
-                  </a:tcPr>
-                </a:tc>
-                <a:tc>
-                  <a:txBody>
-                    <a:bodyPr/>
-                    <a:lstStyle/>
-                    <a:p>
-                      <a:pPr algn="r"/>
-                      <a:r>
-                        <a:rPr sz="1000" b="0">
-                          <a:solidFill>
-                            <a:srgbClr val="1F2A37"/>
-                          </a:solidFill>
-                          <a:latin typeface="Calibri"/>
-                        </a:rPr>
-                        <a:t>16.0</a:t>
+                        <a:t>16.4</a:t>
                       </a:r>
                     </a:p>
                   </a:txBody>
@@ -4968,7 +4968,7 @@
                 </a:solidFill>
                 <a:latin typeface="Calibri"/>
               </a:rPr>
-              <a:t>•  Best performer on the day: HDFCBANK.NS at +2.08%.</a:t>
+              <a:t>•  Best performer on the day: INFY.NS at +3.79%.</a:t>
             </a:r>
           </a:p>
           <a:p>
@@ -4984,7 +4984,7 @@
                 </a:solidFill>
                 <a:latin typeface="Calibri"/>
               </a:rPr>
-              <a:t>•  Weakest on the day: RELIANCE.NS at -1.30%.</a:t>
+              <a:t>•  Weakest on the day: ICICIBANK.NS at -2.10%.</a:t>
             </a:r>
           </a:p>
           <a:p>
@@ -5000,7 +5000,7 @@
                 </a:solidFill>
                 <a:latin typeface="Calibri"/>
               </a:rPr>
-              <a:t>•  Median one-day move across the watchlist: -0.26%.</a:t>
+              <a:t>•  Median one-day move across the watchlist: -0.38%.</a:t>
             </a:r>
           </a:p>
           <a:p>
@@ -5016,7 +5016,7 @@
                 </a:solidFill>
                 <a:latin typeface="Calibri"/>
               </a:rPr>
-              <a:t>•  INFY.NS sits furthest below its 52-week high, at -37.3%.</a:t>
+              <a:t>•  ITC.NS sits furthest below its 52-week high, at -35.8%.</a:t>
             </a:r>
           </a:p>
           <a:p>
@@ -5048,7 +5048,7 @@
                 </a:solidFill>
                 <a:latin typeface="Calibri"/>
               </a:rPr>
-              <a:t>•  Highest 30-day realised volatility: TCS.NS at 29.4% annualised.</a:t>
+              <a:t>•  Highest 30-day realised volatility: INFY.NS at 27.6% annualised.</a:t>
             </a:r>
           </a:p>
           <a:p>
@@ -5064,7 +5064,7 @@
                 </a:solidFill>
                 <a:latin typeface="Calibri"/>
               </a:rPr>
-              <a:t>•  60 headlines collected, 1 tagged to a watchlist name by substring match (unverified).</a:t>
+              <a:t>•  60 headlines collected, 2 tagged to a watchlist name by substring match (unverified).</a:t>
             </a:r>
           </a:p>
           <a:p>

--- a/public/deskbrief.pptx
+++ b/public/deskbrief.pptx
@@ -3128,7 +3128,7 @@
                 </a:solidFill>
                 <a:latin typeface="Calibri"/>
               </a:rPr>
-              <a:t>8 names  |  generated 15 Sep 2026 17:10  |  source: Yahoo Finance via yfinance, Indian financial RSS</a:t>
+              <a:t>8 names  |  generated 16 Sep 2026 17:11  |  source: Yahoo Finance via yfinance, Indian financial RSS</a:t>
             </a:r>
           </a:p>
         </p:txBody>
@@ -3428,7 +3428,7 @@
                           </a:solidFill>
                           <a:latin typeface="Calibri"/>
                         </a:rPr>
-                        <a:t>1,830</a:t>
+                        <a:t>1,835</a:t>
                       </a:r>
                     </a:p>
                   </a:txBody>
@@ -3447,11 +3447,57 @@
                       <a:r>
                         <a:rPr sz="1000" b="0">
                           <a:solidFill>
+                            <a:srgbClr val="0B7A3B"/>
+                          </a:solidFill>
+                          <a:latin typeface="Calibri"/>
+                        </a:rPr>
+                        <a:t>+0.25%</a:t>
+                      </a:r>
+                    </a:p>
+                  </a:txBody>
+                  <a:tcPr>
+                    <a:solidFill>
+                      <a:srgbClr val="F3F5F7"/>
+                    </a:solidFill>
+                  </a:tcPr>
+                </a:tc>
+                <a:tc>
+                  <a:txBody>
+                    <a:bodyPr/>
+                    <a:lstStyle/>
+                    <a:p>
+                      <a:pPr algn="r"/>
+                      <a:r>
+                        <a:rPr sz="1000" b="0">
+                          <a:solidFill>
+                            <a:srgbClr val="0B7A3B"/>
+                          </a:solidFill>
+                          <a:latin typeface="Calibri"/>
+                        </a:rPr>
+                        <a:t>+1.12%</a:t>
+                      </a:r>
+                    </a:p>
+                  </a:txBody>
+                  <a:tcPr>
+                    <a:solidFill>
+                      <a:srgbClr val="F3F5F7"/>
+                    </a:solidFill>
+                  </a:tcPr>
+                </a:tc>
+                <a:tc>
+                  <a:txBody>
+                    <a:bodyPr/>
+                    <a:lstStyle/>
+                    <a:p>
+                      <a:pPr algn="r"/>
+                      <a:r>
+                        <a:rPr sz="1000" b="0">
+                          <a:solidFill>
                             <a:srgbClr val="B3261E"/>
                           </a:solidFill>
                           <a:latin typeface="Calibri"/>
                         </a:rPr>
-                        <a:t>-0.04%</a:t>
+                        <a:t>-5.13%</a:t>
                       </a:r>
                     </a:p>
                   </a:txBody>
@@ -3470,11 +3516,11 @@
                       <a:r>
                         <a:rPr sz="1000" b="0">
                           <a:solidFill>
-                            <a:srgbClr val="B3261E"/>
-                          </a:solidFill>
-                          <a:latin typeface="Calibri"/>
-                        </a:rPr>
-                        <a:t>-1.27%</a:t>
+                            <a:srgbClr val="1F2A37"/>
+                          </a:solidFill>
+                          <a:latin typeface="Calibri"/>
+                        </a:rPr>
+                        <a:t>-14.1%</a:t>
                       </a:r>
                     </a:p>
                   </a:txBody>
@@ -3493,11 +3539,11 @@
                       <a:r>
                         <a:rPr sz="1000" b="0">
                           <a:solidFill>
-                            <a:srgbClr val="B3261E"/>
-                          </a:solidFill>
-                          <a:latin typeface="Calibri"/>
-                        </a:rPr>
-                        <a:t>-8.12%</a:t>
+                            <a:srgbClr val="1F2A37"/>
+                          </a:solidFill>
+                          <a:latin typeface="Calibri"/>
+                        </a:rPr>
+                        <a:t>23%</a:t>
                       </a:r>
                     </a:p>
                   </a:txBody>
@@ -3520,53 +3566,7 @@
                           </a:solidFill>
                           <a:latin typeface="Calibri"/>
                         </a:rPr>
-                        <a:t>-14.3%</a:t>
-                      </a:r>
-                    </a:p>
-                  </a:txBody>
-                  <a:tcPr>
-                    <a:solidFill>
-                      <a:srgbClr val="F3F5F7"/>
-                    </a:solidFill>
-                  </a:tcPr>
-                </a:tc>
-                <a:tc>
-                  <a:txBody>
-                    <a:bodyPr/>
-                    <a:lstStyle/>
-                    <a:p>
-                      <a:pPr algn="r"/>
-                      <a:r>
-                        <a:rPr sz="1000" b="0">
-                          <a:solidFill>
-                            <a:srgbClr val="1F2A37"/>
-                          </a:solidFill>
-                          <a:latin typeface="Calibri"/>
-                        </a:rPr>
-                        <a:t>23%</a:t>
-                      </a:r>
-                    </a:p>
-                  </a:txBody>
-                  <a:tcPr>
-                    <a:solidFill>
-                      <a:srgbClr val="F3F5F7"/>
-                    </a:solidFill>
-                  </a:tcPr>
-                </a:tc>
-                <a:tc>
-                  <a:txBody>
-                    <a:bodyPr/>
-                    <a:lstStyle/>
-                    <a:p>
-                      <a:pPr algn="r"/>
-                      <a:r>
-                        <a:rPr sz="1000" b="0">
-                          <a:solidFill>
-                            <a:srgbClr val="1F2A37"/>
-                          </a:solidFill>
-                          <a:latin typeface="Calibri"/>
-                        </a:rPr>
-                        <a:t>38.3</a:t>
+                        <a:t>38.4</a:t>
                       </a:r>
                     </a:p>
                   </a:txBody>
@@ -3614,7 +3614,7 @@
                           </a:solidFill>
                           <a:latin typeface="Calibri"/>
                         </a:rPr>
-                        <a:t>717</a:t>
+                        <a:t>722</a:t>
                       </a:r>
                     </a:p>
                   </a:txBody>
@@ -3637,7 +3637,7 @@
                           </a:solidFill>
                           <a:latin typeface="Calibri"/>
                         </a:rPr>
-                        <a:t>+1.17%</a:t>
+                        <a:t>+0.69%</a:t>
                       </a:r>
                     </a:p>
                   </a:txBody>
@@ -3660,7 +3660,7 @@
                           </a:solidFill>
                           <a:latin typeface="Calibri"/>
                         </a:rPr>
-                        <a:t>+0.85%</a:t>
+                        <a:t>+5.01%</a:t>
                       </a:r>
                     </a:p>
                   </a:txBody>
@@ -3683,7 +3683,7 @@
                           </a:solidFill>
                           <a:latin typeface="Calibri"/>
                         </a:rPr>
-                        <a:t>-1.44%</a:t>
+                        <a:t>-0.21%</a:t>
                       </a:r>
                     </a:p>
                   </a:txBody>
@@ -3706,7 +3706,7 @@
                           </a:solidFill>
                           <a:latin typeface="Calibri"/>
                         </a:rPr>
-                        <a:t>-27.8%</a:t>
+                        <a:t>-27.3%</a:t>
                       </a:r>
                     </a:p>
                   </a:txBody>
@@ -3752,7 +3752,7 @@
                           </a:solidFill>
                           <a:latin typeface="Calibri"/>
                         </a:rPr>
-                        <a:t>15.7</a:t>
+                        <a:t>15.8</a:t>
                       </a:r>
                     </a:p>
                   </a:txBody>
@@ -3800,7 +3800,7 @@
                           </a:solidFill>
                           <a:latin typeface="Calibri"/>
                         </a:rPr>
-                        <a:t>1,350</a:t>
+                        <a:t>1,359</a:t>
                       </a:r>
                     </a:p>
                   </a:txBody>
@@ -3819,11 +3819,34 @@
                       <a:r>
                         <a:rPr sz="1000" b="0">
                           <a:solidFill>
+                            <a:srgbClr val="0B7A3B"/>
+                          </a:solidFill>
+                          <a:latin typeface="Calibri"/>
+                        </a:rPr>
+                        <a:t>+0.62%</a:t>
+                      </a:r>
+                    </a:p>
+                  </a:txBody>
+                  <a:tcPr>
+                    <a:solidFill>
+                      <a:srgbClr val="F3F5F7"/>
+                    </a:solidFill>
+                  </a:tcPr>
+                </a:tc>
+                <a:tc>
+                  <a:txBody>
+                    <a:bodyPr/>
+                    <a:lstStyle/>
+                    <a:p>
+                      <a:pPr algn="r"/>
+                      <a:r>
+                        <a:rPr sz="1000" b="0">
+                          <a:solidFill>
                             <a:srgbClr val="B3261E"/>
                           </a:solidFill>
                           <a:latin typeface="Calibri"/>
                         </a:rPr>
-                        <a:t>-2.10%</a:t>
+                        <a:t>-2.18%</a:t>
                       </a:r>
                     </a:p>
                   </a:txBody>
@@ -3846,7 +3869,7 @@
                           </a:solidFill>
                           <a:latin typeface="Calibri"/>
                         </a:rPr>
-                        <a:t>-5.40%</a:t>
+                        <a:t>-3.77%</a:t>
                       </a:r>
                     </a:p>
                   </a:txBody>
@@ -3865,11 +3888,11 @@
                       <a:r>
                         <a:rPr sz="1000" b="0">
                           <a:solidFill>
-                            <a:srgbClr val="B3261E"/>
-                          </a:solidFill>
-                          <a:latin typeface="Calibri"/>
-                        </a:rPr>
-                        <a:t>-4.70%</a:t>
+                            <a:srgbClr val="1F2A37"/>
+                          </a:solidFill>
+                          <a:latin typeface="Calibri"/>
+                        </a:rPr>
+                        <a:t>-6.9%</a:t>
                       </a:r>
                     </a:p>
                   </a:txBody>
@@ -3892,7 +3915,7 @@
                           </a:solidFill>
                           <a:latin typeface="Calibri"/>
                         </a:rPr>
-                        <a:t>-7.5%</a:t>
+                        <a:t>16%</a:t>
                       </a:r>
                     </a:p>
                   </a:txBody>
@@ -3915,30 +3938,7 @@
                           </a:solidFill>
                           <a:latin typeface="Calibri"/>
                         </a:rPr>
-                        <a:t>16%</a:t>
-                      </a:r>
-                    </a:p>
-                  </a:txBody>
-                  <a:tcPr>
-                    <a:solidFill>
-                      <a:srgbClr val="F3F5F7"/>
-                    </a:solidFill>
-                  </a:tcPr>
-                </a:tc>
-                <a:tc>
-                  <a:txBody>
-                    <a:bodyPr/>
-                    <a:lstStyle/>
-                    <a:p>
-                      <a:pPr algn="r"/>
-                      <a:r>
-                        <a:rPr sz="1000" b="0">
-                          <a:solidFill>
-                            <a:srgbClr val="1F2A37"/>
-                          </a:solidFill>
-                          <a:latin typeface="Calibri"/>
-                        </a:rPr>
-                        <a:t>17.5</a:t>
+                        <a:t>17.6</a:t>
                       </a:r>
                     </a:p>
                   </a:txBody>
@@ -3986,7 +3986,7 @@
                           </a:solidFill>
                           <a:latin typeface="Calibri"/>
                         </a:rPr>
-                        <a:t>1,077</a:t>
+                        <a:t>1,060</a:t>
                       </a:r>
                     </a:p>
                   </a:txBody>
@@ -4005,11 +4005,34 @@
                       <a:r>
                         <a:rPr sz="1000" b="0">
                           <a:solidFill>
+                            <a:srgbClr val="B3261E"/>
+                          </a:solidFill>
+                          <a:latin typeface="Calibri"/>
+                        </a:rPr>
+                        <a:t>-1.58%</a:t>
+                      </a:r>
+                    </a:p>
+                  </a:txBody>
+                  <a:tcPr>
+                    <a:solidFill>
+                      <a:srgbClr val="FFFFFF"/>
+                    </a:solidFill>
+                  </a:tcPr>
+                </a:tc>
+                <a:tc>
+                  <a:txBody>
+                    <a:bodyPr/>
+                    <a:lstStyle/>
+                    <a:p>
+                      <a:pPr algn="r"/>
+                      <a:r>
+                        <a:rPr sz="1000" b="0">
+                          <a:solidFill>
                             <a:srgbClr val="0B7A3B"/>
                           </a:solidFill>
                           <a:latin typeface="Calibri"/>
                         </a:rPr>
-                        <a:t>+3.79%</a:t>
+                        <a:t>+2.42%</a:t>
                       </a:r>
                     </a:p>
                   </a:txBody>
@@ -4032,7 +4055,7 @@
                           </a:solidFill>
                           <a:latin typeface="Calibri"/>
                         </a:rPr>
-                        <a:t>-0.97%</a:t>
+                        <a:t>-4.93%</a:t>
                       </a:r>
                     </a:p>
                   </a:txBody>
@@ -4051,11 +4074,11 @@
                       <a:r>
                         <a:rPr sz="1000" b="0">
                           <a:solidFill>
-                            <a:srgbClr val="B3261E"/>
-                          </a:solidFill>
-                          <a:latin typeface="Calibri"/>
-                        </a:rPr>
-                        <a:t>-7.89%</a:t>
+                            <a:srgbClr val="1F2A37"/>
+                          </a:solidFill>
+                          <a:latin typeface="Calibri"/>
+                        </a:rPr>
+                        <a:t>-35.9%</a:t>
                       </a:r>
                     </a:p>
                   </a:txBody>
@@ -4078,7 +4101,7 @@
                           </a:solidFill>
                           <a:latin typeface="Calibri"/>
                         </a:rPr>
-                        <a:t>-34.9%</a:t>
+                        <a:t>28%</a:t>
                       </a:r>
                     </a:p>
                   </a:txBody>
@@ -4101,30 +4124,7 @@
                           </a:solidFill>
                           <a:latin typeface="Calibri"/>
                         </a:rPr>
-                        <a:t>28%</a:t>
-                      </a:r>
-                    </a:p>
-                  </a:txBody>
-                  <a:tcPr>
-                    <a:solidFill>
-                      <a:srgbClr val="FFFFFF"/>
-                    </a:solidFill>
-                  </a:tcPr>
-                </a:tc>
-                <a:tc>
-                  <a:txBody>
-                    <a:bodyPr/>
-                    <a:lstStyle/>
-                    <a:p>
-                      <a:pPr algn="r"/>
-                      <a:r>
-                        <a:rPr sz="1000" b="0">
-                          <a:solidFill>
-                            <a:srgbClr val="1F2A37"/>
-                          </a:solidFill>
-                          <a:latin typeface="Calibri"/>
-                        </a:rPr>
-                        <a:t>14.0</a:t>
+                        <a:t>13.8</a:t>
                       </a:r>
                     </a:p>
                   </a:txBody>
@@ -4172,7 +4172,7 @@
                           </a:solidFill>
                           <a:latin typeface="Calibri"/>
                         </a:rPr>
-                        <a:t>258</a:t>
+                        <a:t>264</a:t>
                       </a:r>
                     </a:p>
                   </a:txBody>
@@ -4191,11 +4191,57 @@
                       <a:r>
                         <a:rPr sz="1000" b="0">
                           <a:solidFill>
+                            <a:srgbClr val="0B7A3B"/>
+                          </a:solidFill>
+                          <a:latin typeface="Calibri"/>
+                        </a:rPr>
+                        <a:t>+2.38%</a:t>
+                      </a:r>
+                    </a:p>
+                  </a:txBody>
+                  <a:tcPr>
+                    <a:solidFill>
+                      <a:srgbClr val="F3F5F7"/>
+                    </a:solidFill>
+                  </a:tcPr>
+                </a:tc>
+                <a:tc>
+                  <a:txBody>
+                    <a:bodyPr/>
+                    <a:lstStyle/>
+                    <a:p>
+                      <a:pPr algn="r"/>
+                      <a:r>
+                        <a:rPr sz="1000" b="0">
+                          <a:solidFill>
+                            <a:srgbClr val="0B7A3B"/>
+                          </a:solidFill>
+                          <a:latin typeface="Calibri"/>
+                        </a:rPr>
+                        <a:t>+1.28%</a:t>
+                      </a:r>
+                    </a:p>
+                  </a:txBody>
+                  <a:tcPr>
+                    <a:solidFill>
+                      <a:srgbClr val="F3F5F7"/>
+                    </a:solidFill>
+                  </a:tcPr>
+                </a:tc>
+                <a:tc>
+                  <a:txBody>
+                    <a:bodyPr/>
+                    <a:lstStyle/>
+                    <a:p>
+                      <a:pPr algn="r"/>
+                      <a:r>
+                        <a:rPr sz="1000" b="0">
+                          <a:solidFill>
                             <a:srgbClr val="B3261E"/>
                           </a:solidFill>
                           <a:latin typeface="Calibri"/>
                         </a:rPr>
-                        <a:t>-0.71%</a:t>
+                        <a:t>-2.17%</a:t>
                       </a:r>
                     </a:p>
                   </a:txBody>
@@ -4214,11 +4260,11 @@
                       <a:r>
                         <a:rPr sz="1000" b="0">
                           <a:solidFill>
-                            <a:srgbClr val="B3261E"/>
-                          </a:solidFill>
-                          <a:latin typeface="Calibri"/>
-                        </a:rPr>
-                        <a:t>-2.09%</a:t>
+                            <a:srgbClr val="1F2A37"/>
+                          </a:solidFill>
+                          <a:latin typeface="Calibri"/>
+                        </a:rPr>
+                        <a:t>-34.3%</a:t>
                       </a:r>
                     </a:p>
                   </a:txBody>
@@ -4237,11 +4283,11 @@
                       <a:r>
                         <a:rPr sz="1000" b="0">
                           <a:solidFill>
-                            <a:srgbClr val="B3261E"/>
-                          </a:solidFill>
-                          <a:latin typeface="Calibri"/>
-                        </a:rPr>
-                        <a:t>-7.26%</a:t>
+                            <a:srgbClr val="1F2A37"/>
+                          </a:solidFill>
+                          <a:latin typeface="Calibri"/>
+                        </a:rPr>
+                        <a:t>22%</a:t>
                       </a:r>
                     </a:p>
                   </a:txBody>
@@ -4264,53 +4310,7 @@
                           </a:solidFill>
                           <a:latin typeface="Calibri"/>
                         </a:rPr>
-                        <a:t>-35.8%</a:t>
-                      </a:r>
-                    </a:p>
-                  </a:txBody>
-                  <a:tcPr>
-                    <a:solidFill>
-                      <a:srgbClr val="F3F5F7"/>
-                    </a:solidFill>
-                  </a:tcPr>
-                </a:tc>
-                <a:tc>
-                  <a:txBody>
-                    <a:bodyPr/>
-                    <a:lstStyle/>
-                    <a:p>
-                      <a:pPr algn="r"/>
-                      <a:r>
-                        <a:rPr sz="1000" b="0">
-                          <a:solidFill>
-                            <a:srgbClr val="1F2A37"/>
-                          </a:solidFill>
-                          <a:latin typeface="Calibri"/>
-                        </a:rPr>
-                        <a:t>21%</a:t>
-                      </a:r>
-                    </a:p>
-                  </a:txBody>
-                  <a:tcPr>
-                    <a:solidFill>
-                      <a:srgbClr val="F3F5F7"/>
-                    </a:solidFill>
-                  </a:tcPr>
-                </a:tc>
-                <a:tc>
-                  <a:txBody>
-                    <a:bodyPr/>
-                    <a:lstStyle/>
-                    <a:p>
-                      <a:pPr algn="r"/>
-                      <a:r>
-                        <a:rPr sz="1000" b="0">
-                          <a:solidFill>
-                            <a:srgbClr val="1F2A37"/>
-                          </a:solidFill>
-                          <a:latin typeface="Calibri"/>
-                        </a:rPr>
-                        <a:t>16.3</a:t>
+                        <a:t>16.7</a:t>
                       </a:r>
                     </a:p>
                   </a:txBody>
@@ -4358,7 +4358,7 @@
                           </a:solidFill>
                           <a:latin typeface="Calibri"/>
                         </a:rPr>
-                        <a:t>3,851</a:t>
+                        <a:t>3,808</a:t>
                       </a:r>
                     </a:p>
                   </a:txBody>
@@ -4381,7 +4381,7 @@
                           </a:solidFill>
                           <a:latin typeface="Calibri"/>
                         </a:rPr>
-                        <a:t>-2.04%</a:t>
+                        <a:t>-1.12%</a:t>
                       </a:r>
                     </a:p>
                   </a:txBody>
@@ -4404,7 +4404,7 @@
                           </a:solidFill>
                           <a:latin typeface="Calibri"/>
                         </a:rPr>
-                        <a:t>-3.71%</a:t>
+                        <a:t>-2.93%</a:t>
                       </a:r>
                     </a:p>
                   </a:txBody>
@@ -4427,7 +4427,7 @@
                           </a:solidFill>
                           <a:latin typeface="Calibri"/>
                         </a:rPr>
-                        <a:t>-5.09%</a:t>
+                        <a:t>-6.31%</a:t>
                       </a:r>
                     </a:p>
                   </a:txBody>
@@ -4450,7 +4450,7 @@
                           </a:solidFill>
                           <a:latin typeface="Calibri"/>
                         </a:rPr>
-                        <a:t>-12.0%</a:t>
+                        <a:t>-13.0%</a:t>
                       </a:r>
                     </a:p>
                   </a:txBody>
@@ -4496,7 +4496,7 @@
                           </a:solidFill>
                           <a:latin typeface="Calibri"/>
                         </a:rPr>
-                        <a:t>31.9</a:t>
+                        <a:t>31.6</a:t>
                       </a:r>
                     </a:p>
                   </a:txBody>
@@ -4544,7 +4544,7 @@
                           </a:solidFill>
                           <a:latin typeface="Calibri"/>
                         </a:rPr>
-                        <a:t>1,235</a:t>
+                        <a:t>1,240</a:t>
                       </a:r>
                     </a:p>
                   </a:txBody>
@@ -4563,11 +4563,34 @@
                       <a:r>
                         <a:rPr sz="1000" b="0">
                           <a:solidFill>
+                            <a:srgbClr val="0B7A3B"/>
+                          </a:solidFill>
+                          <a:latin typeface="Calibri"/>
+                        </a:rPr>
+                        <a:t>+0.38%</a:t>
+                      </a:r>
+                    </a:p>
+                  </a:txBody>
+                  <a:tcPr>
+                    <a:solidFill>
+                      <a:srgbClr val="F3F5F7"/>
+                    </a:solidFill>
+                  </a:tcPr>
+                </a:tc>
+                <a:tc>
+                  <a:txBody>
+                    <a:bodyPr/>
+                    <a:lstStyle/>
+                    <a:p>
+                      <a:pPr algn="r"/>
+                      <a:r>
+                        <a:rPr sz="1000" b="0">
+                          <a:solidFill>
                             <a:srgbClr val="B3261E"/>
                           </a:solidFill>
                           <a:latin typeface="Calibri"/>
                         </a:rPr>
-                        <a:t>-1.77%</a:t>
+                        <a:t>-3.05%</a:t>
                       </a:r>
                     </a:p>
                   </a:txBody>
@@ -4590,7 +4613,7 @@
                           </a:solidFill>
                           <a:latin typeface="Calibri"/>
                         </a:rPr>
-                        <a:t>-5.67%</a:t>
+                        <a:t>-6.20%</a:t>
                       </a:r>
                     </a:p>
                   </a:txBody>
@@ -4609,11 +4632,11 @@
                       <a:r>
                         <a:rPr sz="1000" b="0">
                           <a:solidFill>
-                            <a:srgbClr val="B3261E"/>
-                          </a:solidFill>
-                          <a:latin typeface="Calibri"/>
-                        </a:rPr>
-                        <a:t>-5.70%</a:t>
+                            <a:srgbClr val="1F2A37"/>
+                          </a:solidFill>
+                          <a:latin typeface="Calibri"/>
+                        </a:rPr>
+                        <a:t>-21.8%</a:t>
                       </a:r>
                     </a:p>
                   </a:txBody>
@@ -4636,7 +4659,7 @@
                           </a:solidFill>
                           <a:latin typeface="Calibri"/>
                         </a:rPr>
-                        <a:t>-22.1%</a:t>
+                        <a:t>18%</a:t>
                       </a:r>
                     </a:p>
                   </a:txBody>
@@ -4659,30 +4682,7 @@
                           </a:solidFill>
                           <a:latin typeface="Calibri"/>
                         </a:rPr>
-                        <a:t>19%</a:t>
-                      </a:r>
-                    </a:p>
-                  </a:txBody>
-                  <a:tcPr>
-                    <a:solidFill>
-                      <a:srgbClr val="F3F5F7"/>
-                    </a:solidFill>
-                  </a:tcPr>
-                </a:tc>
-                <a:tc>
-                  <a:txBody>
-                    <a:bodyPr/>
-                    <a:lstStyle/>
-                    <a:p>
-                      <a:pPr algn="r"/>
-                      <a:r>
-                        <a:rPr sz="1000" b="0">
-                          <a:solidFill>
-                            <a:srgbClr val="1F2A37"/>
-                          </a:solidFill>
-                          <a:latin typeface="Calibri"/>
-                        </a:rPr>
-                        <a:t>22.4</a:t>
+                        <a:t>22.5</a:t>
                       </a:r>
                     </a:p>
                   </a:txBody>
@@ -4730,7 +4730,7 @@
                           </a:solidFill>
                           <a:latin typeface="Calibri"/>
                         </a:rPr>
-                        <a:t>2,251</a:t>
+                        <a:t>2,189</a:t>
                       </a:r>
                     </a:p>
                   </a:txBody>
@@ -4749,11 +4749,11 @@
                       <a:r>
                         <a:rPr sz="1000" b="0">
                           <a:solidFill>
-                            <a:srgbClr val="0B7A3B"/>
-                          </a:solidFill>
-                          <a:latin typeface="Calibri"/>
-                        </a:rPr>
-                        <a:t>+2.28%</a:t>
+                            <a:srgbClr val="B3261E"/>
+                          </a:solidFill>
+                          <a:latin typeface="Calibri"/>
+                        </a:rPr>
+                        <a:t>-2.76%</a:t>
                       </a:r>
                     </a:p>
                   </a:txBody>
@@ -4776,7 +4776,7 @@
                           </a:solidFill>
                           <a:latin typeface="Calibri"/>
                         </a:rPr>
-                        <a:t>-0.84%</a:t>
+                        <a:t>-0.87%</a:t>
                       </a:r>
                     </a:p>
                   </a:txBody>
@@ -4799,7 +4799,7 @@
                           </a:solidFill>
                           <a:latin typeface="Calibri"/>
                         </a:rPr>
-                        <a:t>-4.66%</a:t>
+                        <a:t>-4.00%</a:t>
                       </a:r>
                     </a:p>
                   </a:txBody>
@@ -4822,7 +4822,7 @@
                           </a:solidFill>
                           <a:latin typeface="Calibri"/>
                         </a:rPr>
-                        <a:t>-29.8%</a:t>
+                        <a:t>-31.7%</a:t>
                       </a:r>
                     </a:p>
                   </a:txBody>
@@ -4868,7 +4868,7 @@
                           </a:solidFill>
                           <a:latin typeface="Calibri"/>
                         </a:rPr>
-                        <a:t>16.4</a:t>
+                        <a:t>15.9</a:t>
                       </a:r>
                     </a:p>
                   </a:txBody>
@@ -4952,7 +4952,7 @@
                 </a:solidFill>
                 <a:latin typeface="Calibri"/>
               </a:rPr>
-              <a:t>Breadth was risk-off: 3 of 8 names advanced on the day.</a:t>
+              <a:t>Breadth was risk-on: 5 of 8 names advanced on the day.</a:t>
             </a:r>
           </a:p>
           <a:p>
@@ -4968,7 +4968,7 @@
                 </a:solidFill>
                 <a:latin typeface="Calibri"/>
               </a:rPr>
-              <a:t>•  Best performer on the day: INFY.NS at +3.79%.</a:t>
+              <a:t>•  Best performer on the day: ITC.NS at +2.38%.</a:t>
             </a:r>
           </a:p>
           <a:p>
@@ -4984,7 +4984,7 @@
                 </a:solidFill>
                 <a:latin typeface="Calibri"/>
               </a:rPr>
-              <a:t>•  Weakest on the day: ICICIBANK.NS at -2.10%.</a:t>
+              <a:t>•  Weakest on the day: TCS.NS at -2.76%.</a:t>
             </a:r>
           </a:p>
           <a:p>
@@ -5000,7 +5000,7 @@
                 </a:solidFill>
                 <a:latin typeface="Calibri"/>
               </a:rPr>
-              <a:t>•  Median one-day move across the watchlist: -0.38%.</a:t>
+              <a:t>•  Median one-day move across the watchlist: +0.32%.</a:t>
             </a:r>
           </a:p>
           <a:p>
@@ -5016,7 +5016,7 @@
                 </a:solidFill>
                 <a:latin typeface="Calibri"/>
               </a:rPr>
-              <a:t>•  ITC.NS sits furthest below its 52-week high, at -35.8%.</a:t>
+              <a:t>•  INFY.NS sits furthest below its 52-week high, at -35.9%.</a:t>
             </a:r>
           </a:p>
           <a:p>
@@ -5064,7 +5064,7 @@
                 </a:solidFill>
                 <a:latin typeface="Calibri"/>
               </a:rPr>
-              <a:t>•  60 headlines collected, 2 tagged to a watchlist name by substring match (unverified).</a:t>
+              <a:t>•  60 headlines collected, 3 tagged to a watchlist name by substring match (unverified).</a:t>
             </a:r>
           </a:p>
           <a:p>

--- a/public/deskbrief.pptx
+++ b/public/deskbrief.pptx
@@ -3128,7 +3128,7 @@
                 </a:solidFill>
                 <a:latin typeface="Calibri"/>
               </a:rPr>
-              <a:t>8 names  |  generated 16 Sep 2026 17:11  |  source: Yahoo Finance via yfinance, Indian financial RSS</a:t>
+              <a:t>8 names  |  generated 17 Sep 2026 17:10  |  source: Yahoo Finance via yfinance, Indian financial RSS</a:t>
             </a:r>
           </a:p>
         </p:txBody>
@@ -3428,7 +3428,7 @@
                           </a:solidFill>
                           <a:latin typeface="Calibri"/>
                         </a:rPr>
-                        <a:t>1,835</a:t>
+                        <a:t>1,836</a:t>
                       </a:r>
                     </a:p>
                   </a:txBody>
@@ -3451,7 +3451,7 @@
                           </a:solidFill>
                           <a:latin typeface="Calibri"/>
                         </a:rPr>
-                        <a:t>+0.25%</a:t>
+                        <a:t>+0.05%</a:t>
                       </a:r>
                     </a:p>
                   </a:txBody>
@@ -3470,11 +3470,11 @@
                       <a:r>
                         <a:rPr sz="1000" b="0">
                           <a:solidFill>
-                            <a:srgbClr val="0B7A3B"/>
-                          </a:solidFill>
-                          <a:latin typeface="Calibri"/>
-                        </a:rPr>
-                        <a:t>+1.12%</a:t>
+                            <a:srgbClr val="B3261E"/>
+                          </a:solidFill>
+                          <a:latin typeface="Calibri"/>
+                        </a:rPr>
+                        <a:t>-0.16%</a:t>
                       </a:r>
                     </a:p>
                   </a:txBody>
@@ -3497,7 +3497,7 @@
                           </a:solidFill>
                           <a:latin typeface="Calibri"/>
                         </a:rPr>
-                        <a:t>-5.13%</a:t>
+                        <a:t>-4.47%</a:t>
                       </a:r>
                     </a:p>
                   </a:txBody>
@@ -3520,7 +3520,7 @@
                           </a:solidFill>
                           <a:latin typeface="Calibri"/>
                         </a:rPr>
-                        <a:t>-14.1%</a:t>
+                        <a:t>-14.0%</a:t>
                       </a:r>
                     </a:p>
                   </a:txBody>
@@ -3566,7 +3566,7 @@
                           </a:solidFill>
                           <a:latin typeface="Calibri"/>
                         </a:rPr>
-                        <a:t>38.4</a:t>
+                        <a:t>38.3</a:t>
                       </a:r>
                     </a:p>
                   </a:txBody>
@@ -3614,7 +3614,7 @@
                           </a:solidFill>
                           <a:latin typeface="Calibri"/>
                         </a:rPr>
-                        <a:t>722</a:t>
+                        <a:t>713</a:t>
                       </a:r>
                     </a:p>
                   </a:txBody>
@@ -3633,11 +3633,34 @@
                       <a:r>
                         <a:rPr sz="1000" b="0">
                           <a:solidFill>
+                            <a:srgbClr val="B3261E"/>
+                          </a:solidFill>
+                          <a:latin typeface="Calibri"/>
+                        </a:rPr>
+                        <a:t>-1.18%</a:t>
+                      </a:r>
+                    </a:p>
+                  </a:txBody>
+                  <a:tcPr>
+                    <a:solidFill>
+                      <a:srgbClr val="FFFFFF"/>
+                    </a:solidFill>
+                  </a:tcPr>
+                </a:tc>
+                <a:tc>
+                  <a:txBody>
+                    <a:bodyPr/>
+                    <a:lstStyle/>
+                    <a:p>
+                      <a:pPr algn="r"/>
+                      <a:r>
+                        <a:rPr sz="1000" b="0">
+                          <a:solidFill>
                             <a:srgbClr val="0B7A3B"/>
                           </a:solidFill>
                           <a:latin typeface="Calibri"/>
                         </a:rPr>
-                        <a:t>+0.69%</a:t>
+                        <a:t>+2.77%</a:t>
                       </a:r>
                     </a:p>
                   </a:txBody>
@@ -3656,11 +3679,11 @@
                       <a:r>
                         <a:rPr sz="1000" b="0">
                           <a:solidFill>
-                            <a:srgbClr val="0B7A3B"/>
-                          </a:solidFill>
-                          <a:latin typeface="Calibri"/>
-                        </a:rPr>
-                        <a:t>+5.01%</a:t>
+                            <a:srgbClr val="B3261E"/>
+                          </a:solidFill>
+                          <a:latin typeface="Calibri"/>
+                        </a:rPr>
+                        <a:t>-0.97%</a:t>
                       </a:r>
                     </a:p>
                   </a:txBody>
@@ -3679,11 +3702,11 @@
                       <a:r>
                         <a:rPr sz="1000" b="0">
                           <a:solidFill>
-                            <a:srgbClr val="B3261E"/>
-                          </a:solidFill>
-                          <a:latin typeface="Calibri"/>
-                        </a:rPr>
-                        <a:t>-0.21%</a:t>
+                            <a:srgbClr val="1F2A37"/>
+                          </a:solidFill>
+                          <a:latin typeface="Calibri"/>
+                        </a:rPr>
+                        <a:t>-28.2%</a:t>
                       </a:r>
                     </a:p>
                   </a:txBody>
@@ -3706,7 +3729,7 @@
                           </a:solidFill>
                           <a:latin typeface="Calibri"/>
                         </a:rPr>
-                        <a:t>-27.3%</a:t>
+                        <a:t>16%</a:t>
                       </a:r>
                     </a:p>
                   </a:txBody>
@@ -3729,30 +3752,7 @@
                           </a:solidFill>
                           <a:latin typeface="Calibri"/>
                         </a:rPr>
-                        <a:t>16%</a:t>
-                      </a:r>
-                    </a:p>
-                  </a:txBody>
-                  <a:tcPr>
-                    <a:solidFill>
-                      <a:srgbClr val="FFFFFF"/>
-                    </a:solidFill>
-                  </a:tcPr>
-                </a:tc>
-                <a:tc>
-                  <a:txBody>
-                    <a:bodyPr/>
-                    <a:lstStyle/>
-                    <a:p>
-                      <a:pPr algn="r"/>
-                      <a:r>
-                        <a:rPr sz="1000" b="0">
-                          <a:solidFill>
-                            <a:srgbClr val="1F2A37"/>
-                          </a:solidFill>
-                          <a:latin typeface="Calibri"/>
-                        </a:rPr>
-                        <a:t>15.8</a:t>
+                        <a:t>15.6</a:t>
                       </a:r>
                     </a:p>
                   </a:txBody>
@@ -3800,7 +3800,7 @@
                           </a:solidFill>
                           <a:latin typeface="Calibri"/>
                         </a:rPr>
-                        <a:t>1,359</a:t>
+                        <a:t>1,348</a:t>
                       </a:r>
                     </a:p>
                   </a:txBody>
@@ -3819,11 +3819,11 @@
                       <a:r>
                         <a:rPr sz="1000" b="0">
                           <a:solidFill>
-                            <a:srgbClr val="0B7A3B"/>
-                          </a:solidFill>
-                          <a:latin typeface="Calibri"/>
-                        </a:rPr>
-                        <a:t>+0.62%</a:t>
+                            <a:srgbClr val="B3261E"/>
+                          </a:solidFill>
+                          <a:latin typeface="Calibri"/>
+                        </a:rPr>
+                        <a:t>-0.82%</a:t>
                       </a:r>
                     </a:p>
                   </a:txBody>
@@ -3846,7 +3846,7 @@
                           </a:solidFill>
                           <a:latin typeface="Calibri"/>
                         </a:rPr>
-                        <a:t>-2.18%</a:t>
+                        <a:t>-2.67%</a:t>
                       </a:r>
                     </a:p>
                   </a:txBody>
@@ -3869,7 +3869,7 @@
                           </a:solidFill>
                           <a:latin typeface="Calibri"/>
                         </a:rPr>
-                        <a:t>-3.77%</a:t>
+                        <a:t>-3.88%</a:t>
                       </a:r>
                     </a:p>
                   </a:txBody>
@@ -3892,7 +3892,7 @@
                           </a:solidFill>
                           <a:latin typeface="Calibri"/>
                         </a:rPr>
-                        <a:t>-6.9%</a:t>
+                        <a:t>-7.7%</a:t>
                       </a:r>
                     </a:p>
                   </a:txBody>
@@ -3938,7 +3938,7 @@
                           </a:solidFill>
                           <a:latin typeface="Calibri"/>
                         </a:rPr>
-                        <a:t>17.6</a:t>
+                        <a:t>17.4</a:t>
                       </a:r>
                     </a:p>
                   </a:txBody>
@@ -3986,7 +3986,7 @@
                           </a:solidFill>
                           <a:latin typeface="Calibri"/>
                         </a:rPr>
-                        <a:t>1,060</a:t>
+                        <a:t>1,059</a:t>
                       </a:r>
                     </a:p>
                   </a:txBody>
@@ -4009,7 +4009,7 @@
                           </a:solidFill>
                           <a:latin typeface="Calibri"/>
                         </a:rPr>
-                        <a:t>-1.58%</a:t>
+                        <a:t>-0.13%</a:t>
                       </a:r>
                     </a:p>
                   </a:txBody>
@@ -4032,7 +4032,7 @@
                           </a:solidFill>
                           <a:latin typeface="Calibri"/>
                         </a:rPr>
-                        <a:t>+2.42%</a:t>
+                        <a:t>+2.13%</a:t>
                       </a:r>
                     </a:p>
                   </a:txBody>
@@ -4055,7 +4055,7 @@
                           </a:solidFill>
                           <a:latin typeface="Calibri"/>
                         </a:rPr>
-                        <a:t>-4.93%</a:t>
+                        <a:t>-5.47%</a:t>
                       </a:r>
                     </a:p>
                   </a:txBody>
@@ -4078,7 +4078,7 @@
                           </a:solidFill>
                           <a:latin typeface="Calibri"/>
                         </a:rPr>
-                        <a:t>-35.9%</a:t>
+                        <a:t>-36.0%</a:t>
                       </a:r>
                     </a:p>
                   </a:txBody>
@@ -4124,7 +4124,7 @@
                           </a:solidFill>
                           <a:latin typeface="Calibri"/>
                         </a:rPr>
-                        <a:t>13.8</a:t>
+                        <a:t>13.6</a:t>
                       </a:r>
                     </a:p>
                   </a:txBody>
@@ -4172,7 +4172,7 @@
                           </a:solidFill>
                           <a:latin typeface="Calibri"/>
                         </a:rPr>
-                        <a:t>264</a:t>
+                        <a:t>266</a:t>
                       </a:r>
                     </a:p>
                   </a:txBody>
@@ -4195,7 +4195,7 @@
                           </a:solidFill>
                           <a:latin typeface="Calibri"/>
                         </a:rPr>
-                        <a:t>+2.38%</a:t>
+                        <a:t>+0.78%</a:t>
                       </a:r>
                     </a:p>
                   </a:txBody>
@@ -4218,7 +4218,7 @@
                           </a:solidFill>
                           <a:latin typeface="Calibri"/>
                         </a:rPr>
-                        <a:t>+1.28%</a:t>
+                        <a:t>+2.66%</a:t>
                       </a:r>
                     </a:p>
                   </a:txBody>
@@ -4241,7 +4241,7 @@
                           </a:solidFill>
                           <a:latin typeface="Calibri"/>
                         </a:rPr>
-                        <a:t>-2.17%</a:t>
+                        <a:t>-0.32%</a:t>
                       </a:r>
                     </a:p>
                   </a:txBody>
@@ -4264,7 +4264,7 @@
                           </a:solidFill>
                           <a:latin typeface="Calibri"/>
                         </a:rPr>
-                        <a:t>-34.3%</a:t>
+                        <a:t>-33.8%</a:t>
                       </a:r>
                     </a:p>
                   </a:txBody>
@@ -4287,7 +4287,7 @@
                           </a:solidFill>
                           <a:latin typeface="Calibri"/>
                         </a:rPr>
-                        <a:t>22%</a:t>
+                        <a:t>23%</a:t>
                       </a:r>
                     </a:p>
                   </a:txBody>
@@ -4310,7 +4310,7 @@
                           </a:solidFill>
                           <a:latin typeface="Calibri"/>
                         </a:rPr>
-                        <a:t>16.7</a:t>
+                        <a:t>16.8</a:t>
                       </a:r>
                     </a:p>
                   </a:txBody>
@@ -4358,7 +4358,7 @@
                           </a:solidFill>
                           <a:latin typeface="Calibri"/>
                         </a:rPr>
-                        <a:t>3,808</a:t>
+                        <a:t>3,836</a:t>
                       </a:r>
                     </a:p>
                   </a:txBody>
@@ -4377,11 +4377,34 @@
                       <a:r>
                         <a:rPr sz="1000" b="0">
                           <a:solidFill>
+                            <a:srgbClr val="0B7A3B"/>
+                          </a:solidFill>
+                          <a:latin typeface="Calibri"/>
+                        </a:rPr>
+                        <a:t>+0.75%</a:t>
+                      </a:r>
+                    </a:p>
+                  </a:txBody>
+                  <a:tcPr>
+                    <a:solidFill>
+                      <a:srgbClr val="FFFFFF"/>
+                    </a:solidFill>
+                  </a:tcPr>
+                </a:tc>
+                <a:tc>
+                  <a:txBody>
+                    <a:bodyPr/>
+                    <a:lstStyle/>
+                    <a:p>
+                      <a:pPr algn="r"/>
+                      <a:r>
+                        <a:rPr sz="1000" b="0">
+                          <a:solidFill>
                             <a:srgbClr val="B3261E"/>
                           </a:solidFill>
                           <a:latin typeface="Calibri"/>
                         </a:rPr>
-                        <a:t>-1.12%</a:t>
+                        <a:t>-3.00%</a:t>
                       </a:r>
                     </a:p>
                   </a:txBody>
@@ -4404,7 +4427,7 @@
                           </a:solidFill>
                           <a:latin typeface="Calibri"/>
                         </a:rPr>
-                        <a:t>-2.93%</a:t>
+                        <a:t>-5.08%</a:t>
                       </a:r>
                     </a:p>
                   </a:txBody>
@@ -4423,11 +4446,11 @@
                       <a:r>
                         <a:rPr sz="1000" b="0">
                           <a:solidFill>
-                            <a:srgbClr val="B3261E"/>
-                          </a:solidFill>
-                          <a:latin typeface="Calibri"/>
-                        </a:rPr>
-                        <a:t>-6.31%</a:t>
+                            <a:srgbClr val="1F2A37"/>
+                          </a:solidFill>
+                          <a:latin typeface="Calibri"/>
+                        </a:rPr>
+                        <a:t>-12.3%</a:t>
                       </a:r>
                     </a:p>
                   </a:txBody>
@@ -4450,7 +4473,7 @@
                           </a:solidFill>
                           <a:latin typeface="Calibri"/>
                         </a:rPr>
-                        <a:t>-13.0%</a:t>
+                        <a:t>14%</a:t>
                       </a:r>
                     </a:p>
                   </a:txBody>
@@ -4473,30 +4496,7 @@
                           </a:solidFill>
                           <a:latin typeface="Calibri"/>
                         </a:rPr>
-                        <a:t>14%</a:t>
-                      </a:r>
-                    </a:p>
-                  </a:txBody>
-                  <a:tcPr>
-                    <a:solidFill>
-                      <a:srgbClr val="FFFFFF"/>
-                    </a:solidFill>
-                  </a:tcPr>
-                </a:tc>
-                <a:tc>
-                  <a:txBody>
-                    <a:bodyPr/>
-                    <a:lstStyle/>
-                    <a:p>
-                      <a:pPr algn="r"/>
-                      <a:r>
-                        <a:rPr sz="1000" b="0">
-                          <a:solidFill>
-                            <a:srgbClr val="1F2A37"/>
-                          </a:solidFill>
-                          <a:latin typeface="Calibri"/>
-                        </a:rPr>
-                        <a:t>31.6</a:t>
+                        <a:t>31.8</a:t>
                       </a:r>
                     </a:p>
                   </a:txBody>
@@ -4544,7 +4544,7 @@
                           </a:solidFill>
                           <a:latin typeface="Calibri"/>
                         </a:rPr>
-                        <a:t>1,240</a:t>
+                        <a:t>1,244</a:t>
                       </a:r>
                     </a:p>
                   </a:txBody>
@@ -4567,7 +4567,7 @@
                           </a:solidFill>
                           <a:latin typeface="Calibri"/>
                         </a:rPr>
-                        <a:t>+0.38%</a:t>
+                        <a:t>+0.31%</a:t>
                       </a:r>
                     </a:p>
                   </a:txBody>
@@ -4590,7 +4590,7 @@
                           </a:solidFill>
                           <a:latin typeface="Calibri"/>
                         </a:rPr>
-                        <a:t>-3.05%</a:t>
+                        <a:t>-2.36%</a:t>
                       </a:r>
                     </a:p>
                   </a:txBody>
@@ -4613,7 +4613,7 @@
                           </a:solidFill>
                           <a:latin typeface="Calibri"/>
                         </a:rPr>
-                        <a:t>-6.20%</a:t>
+                        <a:t>-5.12%</a:t>
                       </a:r>
                     </a:p>
                   </a:txBody>
@@ -4636,7 +4636,7 @@
                           </a:solidFill>
                           <a:latin typeface="Calibri"/>
                         </a:rPr>
-                        <a:t>-21.8%</a:t>
+                        <a:t>-21.5%</a:t>
                       </a:r>
                     </a:p>
                   </a:txBody>
@@ -4659,7 +4659,7 @@
                           </a:solidFill>
                           <a:latin typeface="Calibri"/>
                         </a:rPr>
-                        <a:t>18%</a:t>
+                        <a:t>15%</a:t>
                       </a:r>
                     </a:p>
                   </a:txBody>
@@ -4730,7 +4730,7 @@
                           </a:solidFill>
                           <a:latin typeface="Calibri"/>
                         </a:rPr>
-                        <a:t>2,189</a:t>
+                        <a:t>2,190</a:t>
                       </a:r>
                     </a:p>
                   </a:txBody>
@@ -4749,11 +4749,34 @@
                       <a:r>
                         <a:rPr sz="1000" b="0">
                           <a:solidFill>
+                            <a:srgbClr val="0B7A3B"/>
+                          </a:solidFill>
+                          <a:latin typeface="Calibri"/>
+                        </a:rPr>
+                        <a:t>+0.05%</a:t>
+                      </a:r>
+                    </a:p>
+                  </a:txBody>
+                  <a:tcPr>
+                    <a:solidFill>
+                      <a:srgbClr val="FFFFFF"/>
+                    </a:solidFill>
+                  </a:tcPr>
+                </a:tc>
+                <a:tc>
+                  <a:txBody>
+                    <a:bodyPr/>
+                    <a:lstStyle/>
+                    <a:p>
+                      <a:pPr algn="r"/>
+                      <a:r>
+                        <a:rPr sz="1000" b="0">
+                          <a:solidFill>
                             <a:srgbClr val="B3261E"/>
                           </a:solidFill>
                           <a:latin typeface="Calibri"/>
                         </a:rPr>
-                        <a:t>-2.76%</a:t>
+                        <a:t>-0.64%</a:t>
                       </a:r>
                     </a:p>
                   </a:txBody>
@@ -4776,30 +4799,7 @@
                           </a:solidFill>
                           <a:latin typeface="Calibri"/>
                         </a:rPr>
-                        <a:t>-0.87%</a:t>
-                      </a:r>
-                    </a:p>
-                  </a:txBody>
-                  <a:tcPr>
-                    <a:solidFill>
-                      <a:srgbClr val="FFFFFF"/>
-                    </a:solidFill>
-                  </a:tcPr>
-                </a:tc>
-                <a:tc>
-                  <a:txBody>
-                    <a:bodyPr/>
-                    <a:lstStyle/>
-                    <a:p>
-                      <a:pPr algn="r"/>
-                      <a:r>
-                        <a:rPr sz="1000" b="0">
-                          <a:solidFill>
-                            <a:srgbClr val="B3261E"/>
-                          </a:solidFill>
-                          <a:latin typeface="Calibri"/>
-                        </a:rPr>
-                        <a:t>-4.00%</a:t>
+                        <a:t>-4.33%</a:t>
                       </a:r>
                     </a:p>
                   </a:txBody>
@@ -4968,7 +4968,7 @@
                 </a:solidFill>
                 <a:latin typeface="Calibri"/>
               </a:rPr>
-              <a:t>•  Best performer on the day: ITC.NS at +2.38%.</a:t>
+              <a:t>•  Best performer on the day: ITC.NS at +0.78%.</a:t>
             </a:r>
           </a:p>
           <a:p>
@@ -4984,7 +4984,7 @@
                 </a:solidFill>
                 <a:latin typeface="Calibri"/>
               </a:rPr>
-              <a:t>•  Weakest on the day: TCS.NS at -2.76%.</a:t>
+              <a:t>•  Weakest on the day: HDFCBANK.NS at -1.18%.</a:t>
             </a:r>
           </a:p>
           <a:p>
@@ -5000,7 +5000,7 @@
                 </a:solidFill>
                 <a:latin typeface="Calibri"/>
               </a:rPr>
-              <a:t>•  Median one-day move across the watchlist: +0.32%.</a:t>
+              <a:t>•  Median one-day move across the watchlist: +0.05%.</a:t>
             </a:r>
           </a:p>
           <a:p>
@@ -5016,7 +5016,7 @@
                 </a:solidFill>
                 <a:latin typeface="Calibri"/>
               </a:rPr>
-              <a:t>•  INFY.NS sits furthest below its 52-week high, at -35.9%.</a:t>
+              <a:t>•  INFY.NS sits furthest below its 52-week high, at -36.0%.</a:t>
             </a:r>
           </a:p>
           <a:p>
@@ -5064,7 +5064,7 @@
                 </a:solidFill>
                 <a:latin typeface="Calibri"/>
               </a:rPr>
-              <a:t>•  60 headlines collected, 3 tagged to a watchlist name by substring match (unverified).</a:t>
+              <a:t>•  60 headlines collected, 2 tagged to a watchlist name by substring match (unverified).</a:t>
             </a:r>
           </a:p>
           <a:p>

--- a/public/deskbrief.pptx
+++ b/public/deskbrief.pptx
@@ -3128,7 +3128,7 @@
                 </a:solidFill>
                 <a:latin typeface="Calibri"/>
               </a:rPr>
-              <a:t>8 names  |  generated 17 Sep 2026 17:10  |  source: Yahoo Finance via yfinance, Indian financial RSS</a:t>
+              <a:t>8 names  |  generated 18 Sep 2026 16:36  |  source: Yahoo Finance via yfinance, Indian financial RSS</a:t>
             </a:r>
           </a:p>
         </p:txBody>
@@ -3428,7 +3428,7 @@
                           </a:solidFill>
                           <a:latin typeface="Calibri"/>
                         </a:rPr>
-                        <a:t>1,836</a:t>
+                        <a:t>1,893</a:t>
                       </a:r>
                     </a:p>
                   </a:txBody>
@@ -3451,7 +3451,7 @@
                           </a:solidFill>
                           <a:latin typeface="Calibri"/>
                         </a:rPr>
-                        <a:t>+0.05%</a:t>
+                        <a:t>+3.12%</a:t>
                       </a:r>
                     </a:p>
                   </a:txBody>
@@ -3470,11 +3470,34 @@
                       <a:r>
                         <a:rPr sz="1000" b="0">
                           <a:solidFill>
+                            <a:srgbClr val="0B7A3B"/>
+                          </a:solidFill>
+                          <a:latin typeface="Calibri"/>
+                        </a:rPr>
+                        <a:t>+3.40%</a:t>
+                      </a:r>
+                    </a:p>
+                  </a:txBody>
+                  <a:tcPr>
+                    <a:solidFill>
+                      <a:srgbClr val="F3F5F7"/>
+                    </a:solidFill>
+                  </a:tcPr>
+                </a:tc>
+                <a:tc>
+                  <a:txBody>
+                    <a:bodyPr/>
+                    <a:lstStyle/>
+                    <a:p>
+                      <a:pPr algn="r"/>
+                      <a:r>
+                        <a:rPr sz="1000" b="0">
+                          <a:solidFill>
                             <a:srgbClr val="B3261E"/>
                           </a:solidFill>
                           <a:latin typeface="Calibri"/>
                         </a:rPr>
-                        <a:t>-0.16%</a:t>
+                        <a:t>-2.49%</a:t>
                       </a:r>
                     </a:p>
                   </a:txBody>
@@ -3493,11 +3516,11 @@
                       <a:r>
                         <a:rPr sz="1000" b="0">
                           <a:solidFill>
-                            <a:srgbClr val="B3261E"/>
-                          </a:solidFill>
-                          <a:latin typeface="Calibri"/>
-                        </a:rPr>
-                        <a:t>-4.47%</a:t>
+                            <a:srgbClr val="1F2A37"/>
+                          </a:solidFill>
+                          <a:latin typeface="Calibri"/>
+                        </a:rPr>
+                        <a:t>-11.4%</a:t>
                       </a:r>
                     </a:p>
                   </a:txBody>
@@ -3520,7 +3543,7 @@
                           </a:solidFill>
                           <a:latin typeface="Calibri"/>
                         </a:rPr>
-                        <a:t>-14.0%</a:t>
+                        <a:t>25%</a:t>
                       </a:r>
                     </a:p>
                   </a:txBody>
@@ -3543,30 +3566,7 @@
                           </a:solidFill>
                           <a:latin typeface="Calibri"/>
                         </a:rPr>
-                        <a:t>23%</a:t>
-                      </a:r>
-                    </a:p>
-                  </a:txBody>
-                  <a:tcPr>
-                    <a:solidFill>
-                      <a:srgbClr val="F3F5F7"/>
-                    </a:solidFill>
-                  </a:tcPr>
-                </a:tc>
-                <a:tc>
-                  <a:txBody>
-                    <a:bodyPr/>
-                    <a:lstStyle/>
-                    <a:p>
-                      <a:pPr algn="r"/>
-                      <a:r>
-                        <a:rPr sz="1000" b="0">
-                          <a:solidFill>
-                            <a:srgbClr val="1F2A37"/>
-                          </a:solidFill>
-                          <a:latin typeface="Calibri"/>
-                        </a:rPr>
-                        <a:t>38.3</a:t>
+                        <a:t>39.5</a:t>
                       </a:r>
                     </a:p>
                   </a:txBody>
@@ -3614,7 +3614,7 @@
                           </a:solidFill>
                           <a:latin typeface="Calibri"/>
                         </a:rPr>
-                        <a:t>713</a:t>
+                        <a:t>731</a:t>
                       </a:r>
                     </a:p>
                   </a:txBody>
@@ -3633,11 +3633,11 @@
                       <a:r>
                         <a:rPr sz="1000" b="0">
                           <a:solidFill>
-                            <a:srgbClr val="B3261E"/>
-                          </a:solidFill>
-                          <a:latin typeface="Calibri"/>
-                        </a:rPr>
-                        <a:t>-1.18%</a:t>
+                            <a:srgbClr val="0B7A3B"/>
+                          </a:solidFill>
+                          <a:latin typeface="Calibri"/>
+                        </a:rPr>
+                        <a:t>+2.52%</a:t>
                       </a:r>
                     </a:p>
                   </a:txBody>
@@ -3660,7 +3660,7 @@
                           </a:solidFill>
                           <a:latin typeface="Calibri"/>
                         </a:rPr>
-                        <a:t>+2.77%</a:t>
+                        <a:t>+3.21%</a:t>
                       </a:r>
                     </a:p>
                   </a:txBody>
@@ -3679,11 +3679,11 @@
                       <a:r>
                         <a:rPr sz="1000" b="0">
                           <a:solidFill>
-                            <a:srgbClr val="B3261E"/>
-                          </a:solidFill>
-                          <a:latin typeface="Calibri"/>
-                        </a:rPr>
-                        <a:t>-0.97%</a:t>
+                            <a:srgbClr val="0B7A3B"/>
+                          </a:solidFill>
+                          <a:latin typeface="Calibri"/>
+                        </a:rPr>
+                        <a:t>+0.82%</a:t>
                       </a:r>
                     </a:p>
                   </a:txBody>
@@ -3706,7 +3706,7 @@
                           </a:solidFill>
                           <a:latin typeface="Calibri"/>
                         </a:rPr>
-                        <a:t>-28.2%</a:t>
+                        <a:t>-26.4%</a:t>
                       </a:r>
                     </a:p>
                   </a:txBody>
@@ -3729,7 +3729,7 @@
                           </a:solidFill>
                           <a:latin typeface="Calibri"/>
                         </a:rPr>
-                        <a:t>16%</a:t>
+                        <a:t>18%</a:t>
                       </a:r>
                     </a:p>
                   </a:txBody>
@@ -3752,7 +3752,7 @@
                           </a:solidFill>
                           <a:latin typeface="Calibri"/>
                         </a:rPr>
-                        <a:t>15.6</a:t>
+                        <a:t>16.0</a:t>
                       </a:r>
                     </a:p>
                   </a:txBody>
@@ -3800,7 +3800,7 @@
                           </a:solidFill>
                           <a:latin typeface="Calibri"/>
                         </a:rPr>
-                        <a:t>1,348</a:t>
+                        <a:t>1,339</a:t>
                       </a:r>
                     </a:p>
                   </a:txBody>
@@ -3823,7 +3823,7 @@
                           </a:solidFill>
                           <a:latin typeface="Calibri"/>
                         </a:rPr>
-                        <a:t>-0.82%</a:t>
+                        <a:t>-0.65%</a:t>
                       </a:r>
                     </a:p>
                   </a:txBody>
@@ -3846,7 +3846,7 @@
                           </a:solidFill>
                           <a:latin typeface="Calibri"/>
                         </a:rPr>
-                        <a:t>-2.67%</a:t>
+                        <a:t>-2.93%</a:t>
                       </a:r>
                     </a:p>
                   </a:txBody>
@@ -3869,7 +3869,7 @@
                           </a:solidFill>
                           <a:latin typeface="Calibri"/>
                         </a:rPr>
-                        <a:t>-3.88%</a:t>
+                        <a:t>-5.17%</a:t>
                       </a:r>
                     </a:p>
                   </a:txBody>
@@ -3892,7 +3892,7 @@
                           </a:solidFill>
                           <a:latin typeface="Calibri"/>
                         </a:rPr>
-                        <a:t>-7.7%</a:t>
+                        <a:t>-8.3%</a:t>
                       </a:r>
                     </a:p>
                   </a:txBody>
@@ -3915,7 +3915,7 @@
                           </a:solidFill>
                           <a:latin typeface="Calibri"/>
                         </a:rPr>
-                        <a:t>16%</a:t>
+                        <a:t>15%</a:t>
                       </a:r>
                     </a:p>
                   </a:txBody>
@@ -3938,7 +3938,7 @@
                           </a:solidFill>
                           <a:latin typeface="Calibri"/>
                         </a:rPr>
-                        <a:t>17.4</a:t>
+                        <a:t>17.3</a:t>
                       </a:r>
                     </a:p>
                   </a:txBody>
@@ -3986,7 +3986,7 @@
                           </a:solidFill>
                           <a:latin typeface="Calibri"/>
                         </a:rPr>
-                        <a:t>1,059</a:t>
+                        <a:t>1,051</a:t>
                       </a:r>
                     </a:p>
                   </a:txBody>
@@ -4009,7 +4009,7 @@
                           </a:solidFill>
                           <a:latin typeface="Calibri"/>
                         </a:rPr>
-                        <a:t>-0.13%</a:t>
+                        <a:t>-0.68%</a:t>
                       </a:r>
                     </a:p>
                   </a:txBody>
@@ -4032,7 +4032,7 @@
                           </a:solidFill>
                           <a:latin typeface="Calibri"/>
                         </a:rPr>
-                        <a:t>+2.13%</a:t>
+                        <a:t>+1.32%</a:t>
                       </a:r>
                     </a:p>
                   </a:txBody>
@@ -4055,7 +4055,7 @@
                           </a:solidFill>
                           <a:latin typeface="Calibri"/>
                         </a:rPr>
-                        <a:t>-5.47%</a:t>
+                        <a:t>-6.96%</a:t>
                       </a:r>
                     </a:p>
                   </a:txBody>
@@ -4078,7 +4078,7 @@
                           </a:solidFill>
                           <a:latin typeface="Calibri"/>
                         </a:rPr>
-                        <a:t>-36.0%</a:t>
+                        <a:t>-36.4%</a:t>
                       </a:r>
                     </a:p>
                   </a:txBody>
@@ -4101,7 +4101,7 @@
                           </a:solidFill>
                           <a:latin typeface="Calibri"/>
                         </a:rPr>
-                        <a:t>28%</a:t>
+                        <a:t>27%</a:t>
                       </a:r>
                     </a:p>
                   </a:txBody>
@@ -4124,7 +4124,7 @@
                           </a:solidFill>
                           <a:latin typeface="Calibri"/>
                         </a:rPr>
-                        <a:t>13.6</a:t>
+                        <a:t>13.5</a:t>
                       </a:r>
                     </a:p>
                   </a:txBody>
@@ -4172,7 +4172,7 @@
                           </a:solidFill>
                           <a:latin typeface="Calibri"/>
                         </a:rPr>
-                        <a:t>266</a:t>
+                        <a:t>262</a:t>
                       </a:r>
                     </a:p>
                   </a:txBody>
@@ -4191,11 +4191,34 @@
                       <a:r>
                         <a:rPr sz="1000" b="0">
                           <a:solidFill>
+                            <a:srgbClr val="B3261E"/>
+                          </a:solidFill>
+                          <a:latin typeface="Calibri"/>
+                        </a:rPr>
+                        <a:t>-1.47%</a:t>
+                      </a:r>
+                    </a:p>
+                  </a:txBody>
+                  <a:tcPr>
+                    <a:solidFill>
+                      <a:srgbClr val="F3F5F7"/>
+                    </a:solidFill>
+                  </a:tcPr>
+                </a:tc>
+                <a:tc>
+                  <a:txBody>
+                    <a:bodyPr/>
+                    <a:lstStyle/>
+                    <a:p>
+                      <a:pPr algn="r"/>
+                      <a:r>
+                        <a:rPr sz="1000" b="0">
+                          <a:solidFill>
                             <a:srgbClr val="0B7A3B"/>
                           </a:solidFill>
                           <a:latin typeface="Calibri"/>
                         </a:rPr>
-                        <a:t>+0.78%</a:t>
+                        <a:t>+0.94%</a:t>
                       </a:r>
                     </a:p>
                   </a:txBody>
@@ -4214,11 +4237,11 @@
                       <a:r>
                         <a:rPr sz="1000" b="0">
                           <a:solidFill>
-                            <a:srgbClr val="0B7A3B"/>
-                          </a:solidFill>
-                          <a:latin typeface="Calibri"/>
-                        </a:rPr>
-                        <a:t>+2.66%</a:t>
+                            <a:srgbClr val="B3261E"/>
+                          </a:solidFill>
+                          <a:latin typeface="Calibri"/>
+                        </a:rPr>
+                        <a:t>-3.44%</a:t>
                       </a:r>
                     </a:p>
                   </a:txBody>
@@ -4237,11 +4260,11 @@
                       <a:r>
                         <a:rPr sz="1000" b="0">
                           <a:solidFill>
-                            <a:srgbClr val="B3261E"/>
-                          </a:solidFill>
-                          <a:latin typeface="Calibri"/>
-                        </a:rPr>
-                        <a:t>-0.32%</a:t>
+                            <a:srgbClr val="1F2A37"/>
+                          </a:solidFill>
+                          <a:latin typeface="Calibri"/>
+                        </a:rPr>
+                        <a:t>-34.8%</a:t>
                       </a:r>
                     </a:p>
                   </a:txBody>
@@ -4264,7 +4287,7 @@
                           </a:solidFill>
                           <a:latin typeface="Calibri"/>
                         </a:rPr>
-                        <a:t>-33.8%</a:t>
+                        <a:t>23%</a:t>
                       </a:r>
                     </a:p>
                   </a:txBody>
@@ -4287,30 +4310,7 @@
                           </a:solidFill>
                           <a:latin typeface="Calibri"/>
                         </a:rPr>
-                        <a:t>23%</a:t>
-                      </a:r>
-                    </a:p>
-                  </a:txBody>
-                  <a:tcPr>
-                    <a:solidFill>
-                      <a:srgbClr val="F3F5F7"/>
-                    </a:solidFill>
-                  </a:tcPr>
-                </a:tc>
-                <a:tc>
-                  <a:txBody>
-                    <a:bodyPr/>
-                    <a:lstStyle/>
-                    <a:p>
-                      <a:pPr algn="r"/>
-                      <a:r>
-                        <a:rPr sz="1000" b="0">
-                          <a:solidFill>
-                            <a:srgbClr val="1F2A37"/>
-                          </a:solidFill>
-                          <a:latin typeface="Calibri"/>
-                        </a:rPr>
-                        <a:t>16.8</a:t>
+                        <a:t>16.6</a:t>
                       </a:r>
                     </a:p>
                   </a:txBody>
@@ -4358,7 +4358,7 @@
                           </a:solidFill>
                           <a:latin typeface="Calibri"/>
                         </a:rPr>
-                        <a:t>3,836</a:t>
+                        <a:t>3,885</a:t>
                       </a:r>
                     </a:p>
                   </a:txBody>
@@ -4381,7 +4381,7 @@
                           </a:solidFill>
                           <a:latin typeface="Calibri"/>
                         </a:rPr>
-                        <a:t>+0.75%</a:t>
+                        <a:t>+1.27%</a:t>
                       </a:r>
                     </a:p>
                   </a:txBody>
@@ -4404,7 +4404,7 @@
                           </a:solidFill>
                           <a:latin typeface="Calibri"/>
                         </a:rPr>
-                        <a:t>-3.00%</a:t>
+                        <a:t>-1.16%</a:t>
                       </a:r>
                     </a:p>
                   </a:txBody>
@@ -4427,7 +4427,7 @@
                           </a:solidFill>
                           <a:latin typeface="Calibri"/>
                         </a:rPr>
-                        <a:t>-5.08%</a:t>
+                        <a:t>-4.80%</a:t>
                       </a:r>
                     </a:p>
                   </a:txBody>
@@ -4450,7 +4450,7 @@
                           </a:solidFill>
                           <a:latin typeface="Calibri"/>
                         </a:rPr>
-                        <a:t>-12.3%</a:t>
+                        <a:t>-11.2%</a:t>
                       </a:r>
                     </a:p>
                   </a:txBody>
@@ -4496,7 +4496,7 @@
                           </a:solidFill>
                           <a:latin typeface="Calibri"/>
                         </a:rPr>
-                        <a:t>31.8</a:t>
+                        <a:t>32.3</a:t>
                       </a:r>
                     </a:p>
                   </a:txBody>
@@ -4544,7 +4544,7 @@
                           </a:solidFill>
                           <a:latin typeface="Calibri"/>
                         </a:rPr>
-                        <a:t>1,244</a:t>
+                        <a:t>1,226</a:t>
                       </a:r>
                     </a:p>
                   </a:txBody>
@@ -4563,11 +4563,11 @@
                       <a:r>
                         <a:rPr sz="1000" b="0">
                           <a:solidFill>
-                            <a:srgbClr val="0B7A3B"/>
-                          </a:solidFill>
-                          <a:latin typeface="Calibri"/>
-                        </a:rPr>
-                        <a:t>+0.31%</a:t>
+                            <a:srgbClr val="B3261E"/>
+                          </a:solidFill>
+                          <a:latin typeface="Calibri"/>
+                        </a:rPr>
+                        <a:t>-1.41%</a:t>
                       </a:r>
                     </a:p>
                   </a:txBody>
@@ -4590,7 +4590,7 @@
                           </a:solidFill>
                           <a:latin typeface="Calibri"/>
                         </a:rPr>
-                        <a:t>-2.36%</a:t>
+                        <a:t>-2.47%</a:t>
                       </a:r>
                     </a:p>
                   </a:txBody>
@@ -4613,7 +4613,7 @@
                           </a:solidFill>
                           <a:latin typeface="Calibri"/>
                         </a:rPr>
-                        <a:t>-5.12%</a:t>
+                        <a:t>-6.61%</a:t>
                       </a:r>
                     </a:p>
                   </a:txBody>
@@ -4636,7 +4636,7 @@
                           </a:solidFill>
                           <a:latin typeface="Calibri"/>
                         </a:rPr>
-                        <a:t>-21.5%</a:t>
+                        <a:t>-22.6%</a:t>
                       </a:r>
                     </a:p>
                   </a:txBody>
@@ -4682,7 +4682,7 @@
                           </a:solidFill>
                           <a:latin typeface="Calibri"/>
                         </a:rPr>
-                        <a:t>22.5</a:t>
+                        <a:t>22.2</a:t>
                       </a:r>
                     </a:p>
                   </a:txBody>
@@ -4730,7 +4730,7 @@
                           </a:solidFill>
                           <a:latin typeface="Calibri"/>
                         </a:rPr>
-                        <a:t>2,190</a:t>
+                        <a:t>2,105</a:t>
                       </a:r>
                     </a:p>
                   </a:txBody>
@@ -4749,11 +4749,11 @@
                       <a:r>
                         <a:rPr sz="1000" b="0">
                           <a:solidFill>
-                            <a:srgbClr val="0B7A3B"/>
-                          </a:solidFill>
-                          <a:latin typeface="Calibri"/>
-                        </a:rPr>
-                        <a:t>+0.05%</a:t>
+                            <a:srgbClr val="B3261E"/>
+                          </a:solidFill>
+                          <a:latin typeface="Calibri"/>
+                        </a:rPr>
+                        <a:t>-3.88%</a:t>
                       </a:r>
                     </a:p>
                   </a:txBody>
@@ -4776,7 +4776,7 @@
                           </a:solidFill>
                           <a:latin typeface="Calibri"/>
                         </a:rPr>
-                        <a:t>-0.64%</a:t>
+                        <a:t>-4.35%</a:t>
                       </a:r>
                     </a:p>
                   </a:txBody>
@@ -4799,7 +4799,7 @@
                           </a:solidFill>
                           <a:latin typeface="Calibri"/>
                         </a:rPr>
-                        <a:t>-4.33%</a:t>
+                        <a:t>-8.40%</a:t>
                       </a:r>
                     </a:p>
                   </a:txBody>
@@ -4822,7 +4822,7 @@
                           </a:solidFill>
                           <a:latin typeface="Calibri"/>
                         </a:rPr>
-                        <a:t>-31.7%</a:t>
+                        <a:t>-34.3%</a:t>
                       </a:r>
                     </a:p>
                   </a:txBody>
@@ -4868,7 +4868,7 @@
                           </a:solidFill>
                           <a:latin typeface="Calibri"/>
                         </a:rPr>
-                        <a:t>15.9</a:t>
+                        <a:t>15.3</a:t>
                       </a:r>
                     </a:p>
                   </a:txBody>
@@ -4952,7 +4952,7 @@
                 </a:solidFill>
                 <a:latin typeface="Calibri"/>
               </a:rPr>
-              <a:t>Breadth was risk-on: 5 of 8 names advanced on the day.</a:t>
+              <a:t>Breadth was risk-off: 3 of 8 names advanced on the day.</a:t>
             </a:r>
           </a:p>
           <a:p>
@@ -4968,7 +4968,7 @@
                 </a:solidFill>
                 <a:latin typeface="Calibri"/>
               </a:rPr>
-              <a:t>•  Best performer on the day: ITC.NS at +0.78%.</a:t>
+              <a:t>•  Best performer on the day: BHARTIARTL.NS at +3.12%.</a:t>
             </a:r>
           </a:p>
           <a:p>
@@ -4984,7 +4984,7 @@
                 </a:solidFill>
                 <a:latin typeface="Calibri"/>
               </a:rPr>
-              <a:t>•  Weakest on the day: HDFCBANK.NS at -1.18%.</a:t>
+              <a:t>•  Weakest on the day: TCS.NS at -3.88%.</a:t>
             </a:r>
           </a:p>
           <a:p>
@@ -5000,7 +5000,7 @@
                 </a:solidFill>
                 <a:latin typeface="Calibri"/>
               </a:rPr>
-              <a:t>•  Median one-day move across the watchlist: +0.05%.</a:t>
+              <a:t>•  Median one-day move across the watchlist: -0.66%.</a:t>
             </a:r>
           </a:p>
           <a:p>
@@ -5016,7 +5016,7 @@
                 </a:solidFill>
                 <a:latin typeface="Calibri"/>
               </a:rPr>
-              <a:t>•  INFY.NS sits furthest below its 52-week high, at -36.0%.</a:t>
+              <a:t>•  INFY.NS sits furthest below its 52-week high, at -36.4%.</a:t>
             </a:r>
           </a:p>
           <a:p>
@@ -5048,7 +5048,7 @@
                 </a:solidFill>
                 <a:latin typeface="Calibri"/>
               </a:rPr>
-              <a:t>•  Highest 30-day realised volatility: INFY.NS at 27.6% annualised.</a:t>
+              <a:t>•  Highest 30-day realised volatility: INFY.NS at 27.4% annualised.</a:t>
             </a:r>
           </a:p>
           <a:p>
@@ -5064,7 +5064,7 @@
                 </a:solidFill>
                 <a:latin typeface="Calibri"/>
               </a:rPr>
-              <a:t>•  60 headlines collected, 2 tagged to a watchlist name by substring match (unverified).</a:t>
+              <a:t>•  60 headlines collected, 3 tagged to a watchlist name by substring match (unverified).</a:t>
             </a:r>
           </a:p>
           <a:p>

--- a/public/deskbrief.pptx
+++ b/public/deskbrief.pptx
@@ -3128,7 +3128,7 @@
                 </a:solidFill>
                 <a:latin typeface="Calibri"/>
               </a:rPr>
-              <a:t>8 names  |  generated 18 Sep 2026 16:36  |  source: Yahoo Finance via yfinance, Indian financial RSS</a:t>
+              <a:t>8 names  |  generated 21 Sep 2026 18:15  |  source: Yahoo Finance via yfinance, Indian financial RSS</a:t>
             </a:r>
           </a:p>
         </p:txBody>
@@ -3428,7 +3428,7 @@
                           </a:solidFill>
                           <a:latin typeface="Calibri"/>
                         </a:rPr>
-                        <a:t>1,893</a:t>
+                        <a:t>1,830</a:t>
                       </a:r>
                     </a:p>
                   </a:txBody>
@@ -3447,11 +3447,11 @@
                       <a:r>
                         <a:rPr sz="1000" b="0">
                           <a:solidFill>
-                            <a:srgbClr val="0B7A3B"/>
-                          </a:solidFill>
-                          <a:latin typeface="Calibri"/>
-                        </a:rPr>
-                        <a:t>+3.12%</a:t>
+                            <a:srgbClr val="B3261E"/>
+                          </a:solidFill>
+                          <a:latin typeface="Calibri"/>
+                        </a:rPr>
+                        <a:t>-3.33%</a:t>
                       </a:r>
                     </a:p>
                   </a:txBody>
@@ -3470,11 +3470,11 @@
                       <a:r>
                         <a:rPr sz="1000" b="0">
                           <a:solidFill>
-                            <a:srgbClr val="0B7A3B"/>
-                          </a:solidFill>
-                          <a:latin typeface="Calibri"/>
-                        </a:rPr>
-                        <a:t>+3.40%</a:t>
+                            <a:srgbClr val="B3261E"/>
+                          </a:solidFill>
+                          <a:latin typeface="Calibri"/>
+                        </a:rPr>
+                        <a:t>-0.05%</a:t>
                       </a:r>
                     </a:p>
                   </a:txBody>
@@ -3497,7 +3497,7 @@
                           </a:solidFill>
                           <a:latin typeface="Calibri"/>
                         </a:rPr>
-                        <a:t>-2.49%</a:t>
+                        <a:t>-5.95%</a:t>
                       </a:r>
                     </a:p>
                   </a:txBody>
@@ -3520,7 +3520,7 @@
                           </a:solidFill>
                           <a:latin typeface="Calibri"/>
                         </a:rPr>
-                        <a:t>-11.4%</a:t>
+                        <a:t>-14.3%</a:t>
                       </a:r>
                     </a:p>
                   </a:txBody>
@@ -3543,7 +3543,7 @@
                           </a:solidFill>
                           <a:latin typeface="Calibri"/>
                         </a:rPr>
-                        <a:t>25%</a:t>
+                        <a:t>27%</a:t>
                       </a:r>
                     </a:p>
                   </a:txBody>
@@ -3566,7 +3566,7 @@
                           </a:solidFill>
                           <a:latin typeface="Calibri"/>
                         </a:rPr>
-                        <a:t>39.5</a:t>
+                        <a:t>38.2</a:t>
                       </a:r>
                     </a:p>
                   </a:txBody>
@@ -3614,7 +3614,7 @@
                           </a:solidFill>
                           <a:latin typeface="Calibri"/>
                         </a:rPr>
-                        <a:t>731</a:t>
+                        <a:t>740</a:t>
                       </a:r>
                     </a:p>
                   </a:txBody>
@@ -3637,7 +3637,7 @@
                           </a:solidFill>
                           <a:latin typeface="Calibri"/>
                         </a:rPr>
-                        <a:t>+2.52%</a:t>
+                        <a:t>+1.16%</a:t>
                       </a:r>
                     </a:p>
                   </a:txBody>
@@ -3660,7 +3660,7 @@
                           </a:solidFill>
                           <a:latin typeface="Calibri"/>
                         </a:rPr>
-                        <a:t>+3.21%</a:t>
+                        <a:t>+4.41%</a:t>
                       </a:r>
                     </a:p>
                   </a:txBody>
@@ -3683,7 +3683,7 @@
                           </a:solidFill>
                           <a:latin typeface="Calibri"/>
                         </a:rPr>
-                        <a:t>+0.82%</a:t>
+                        <a:t>+1.73%</a:t>
                       </a:r>
                     </a:p>
                   </a:txBody>
@@ -3706,7 +3706,7 @@
                           </a:solidFill>
                           <a:latin typeface="Calibri"/>
                         </a:rPr>
-                        <a:t>-26.4%</a:t>
+                        <a:t>-25.5%</a:t>
                       </a:r>
                     </a:p>
                   </a:txBody>
@@ -3752,7 +3752,7 @@
                           </a:solidFill>
                           <a:latin typeface="Calibri"/>
                         </a:rPr>
-                        <a:t>16.0</a:t>
+                        <a:t>16.2</a:t>
                       </a:r>
                     </a:p>
                   </a:txBody>
@@ -3800,7 +3800,7 @@
                           </a:solidFill>
                           <a:latin typeface="Calibri"/>
                         </a:rPr>
-                        <a:t>1,339</a:t>
+                        <a:t>1,345</a:t>
                       </a:r>
                     </a:p>
                   </a:txBody>
@@ -3819,11 +3819,34 @@
                       <a:r>
                         <a:rPr sz="1000" b="0">
                           <a:solidFill>
+                            <a:srgbClr val="0B7A3B"/>
+                          </a:solidFill>
+                          <a:latin typeface="Calibri"/>
+                        </a:rPr>
+                        <a:t>+0.46%</a:t>
+                      </a:r>
+                    </a:p>
+                  </a:txBody>
+                  <a:tcPr>
+                    <a:solidFill>
+                      <a:srgbClr val="F3F5F7"/>
+                    </a:solidFill>
+                  </a:tcPr>
+                </a:tc>
+                <a:tc>
+                  <a:txBody>
+                    <a:bodyPr/>
+                    <a:lstStyle/>
+                    <a:p>
+                      <a:pPr algn="r"/>
+                      <a:r>
+                        <a:rPr sz="1000" b="0">
+                          <a:solidFill>
                             <a:srgbClr val="B3261E"/>
                           </a:solidFill>
                           <a:latin typeface="Calibri"/>
                         </a:rPr>
-                        <a:t>-0.65%</a:t>
+                        <a:t>-2.49%</a:t>
                       </a:r>
                     </a:p>
                   </a:txBody>
@@ -3846,7 +3869,7 @@
                           </a:solidFill>
                           <a:latin typeface="Calibri"/>
                         </a:rPr>
-                        <a:t>-2.93%</a:t>
+                        <a:t>-5.28%</a:t>
                       </a:r>
                     </a:p>
                   </a:txBody>
@@ -3865,11 +3888,11 @@
                       <a:r>
                         <a:rPr sz="1000" b="0">
                           <a:solidFill>
-                            <a:srgbClr val="B3261E"/>
-                          </a:solidFill>
-                          <a:latin typeface="Calibri"/>
-                        </a:rPr>
-                        <a:t>-5.17%</a:t>
+                            <a:srgbClr val="1F2A37"/>
+                          </a:solidFill>
+                          <a:latin typeface="Calibri"/>
+                        </a:rPr>
+                        <a:t>-7.9%</a:t>
                       </a:r>
                     </a:p>
                   </a:txBody>
@@ -3892,7 +3915,7 @@
                           </a:solidFill>
                           <a:latin typeface="Calibri"/>
                         </a:rPr>
-                        <a:t>-8.3%</a:t>
+                        <a:t>15%</a:t>
                       </a:r>
                     </a:p>
                   </a:txBody>
@@ -3915,30 +3938,7 @@
                           </a:solidFill>
                           <a:latin typeface="Calibri"/>
                         </a:rPr>
-                        <a:t>15%</a:t>
-                      </a:r>
-                    </a:p>
-                  </a:txBody>
-                  <a:tcPr>
-                    <a:solidFill>
-                      <a:srgbClr val="F3F5F7"/>
-                    </a:solidFill>
-                  </a:tcPr>
-                </a:tc>
-                <a:tc>
-                  <a:txBody>
-                    <a:bodyPr/>
-                    <a:lstStyle/>
-                    <a:p>
-                      <a:pPr algn="r"/>
-                      <a:r>
-                        <a:rPr sz="1000" b="0">
-                          <a:solidFill>
-                            <a:srgbClr val="1F2A37"/>
-                          </a:solidFill>
-                          <a:latin typeface="Calibri"/>
-                        </a:rPr>
-                        <a:t>17.3</a:t>
+                        <a:t>17.4</a:t>
                       </a:r>
                     </a:p>
                   </a:txBody>
@@ -3986,7 +3986,7 @@
                           </a:solidFill>
                           <a:latin typeface="Calibri"/>
                         </a:rPr>
-                        <a:t>1,051</a:t>
+                        <a:t>1,038</a:t>
                       </a:r>
                     </a:p>
                   </a:txBody>
@@ -4009,7 +4009,7 @@
                           </a:solidFill>
                           <a:latin typeface="Calibri"/>
                         </a:rPr>
-                        <a:t>-0.68%</a:t>
+                        <a:t>-1.23%</a:t>
                       </a:r>
                     </a:p>
                   </a:txBody>
@@ -4032,7 +4032,7 @@
                           </a:solidFill>
                           <a:latin typeface="Calibri"/>
                         </a:rPr>
-                        <a:t>+1.32%</a:t>
+                        <a:t>+0.08%</a:t>
                       </a:r>
                     </a:p>
                   </a:txBody>
@@ -4055,7 +4055,7 @@
                           </a:solidFill>
                           <a:latin typeface="Calibri"/>
                         </a:rPr>
-                        <a:t>-6.96%</a:t>
+                        <a:t>-7.36%</a:t>
                       </a:r>
                     </a:p>
                   </a:txBody>
@@ -4078,7 +4078,7 @@
                           </a:solidFill>
                           <a:latin typeface="Calibri"/>
                         </a:rPr>
-                        <a:t>-36.4%</a:t>
+                        <a:t>-37.2%</a:t>
                       </a:r>
                     </a:p>
                   </a:txBody>
@@ -4124,7 +4124,7 @@
                           </a:solidFill>
                           <a:latin typeface="Calibri"/>
                         </a:rPr>
-                        <a:t>13.5</a:t>
+                        <a:t>13.3</a:t>
                       </a:r>
                     </a:p>
                   </a:txBody>
@@ -4172,7 +4172,7 @@
                           </a:solidFill>
                           <a:latin typeface="Calibri"/>
                         </a:rPr>
-                        <a:t>262</a:t>
+                        <a:t>267</a:t>
                       </a:r>
                     </a:p>
                   </a:txBody>
@@ -4191,11 +4191,57 @@
                       <a:r>
                         <a:rPr sz="1000" b="0">
                           <a:solidFill>
+                            <a:srgbClr val="0B7A3B"/>
+                          </a:solidFill>
+                          <a:latin typeface="Calibri"/>
+                        </a:rPr>
+                        <a:t>+1.79%</a:t>
+                      </a:r>
+                    </a:p>
+                  </a:txBody>
+                  <a:tcPr>
+                    <a:solidFill>
+                      <a:srgbClr val="F3F5F7"/>
+                    </a:solidFill>
+                  </a:tcPr>
+                </a:tc>
+                <a:tc>
+                  <a:txBody>
+                    <a:bodyPr/>
+                    <a:lstStyle/>
+                    <a:p>
+                      <a:pPr algn="r"/>
+                      <a:r>
+                        <a:rPr sz="1000" b="0">
+                          <a:solidFill>
+                            <a:srgbClr val="0B7A3B"/>
+                          </a:solidFill>
+                          <a:latin typeface="Calibri"/>
+                        </a:rPr>
+                        <a:t>+2.75%</a:t>
+                      </a:r>
+                    </a:p>
+                  </a:txBody>
+                  <a:tcPr>
+                    <a:solidFill>
+                      <a:srgbClr val="F3F5F7"/>
+                    </a:solidFill>
+                  </a:tcPr>
+                </a:tc>
+                <a:tc>
+                  <a:txBody>
+                    <a:bodyPr/>
+                    <a:lstStyle/>
+                    <a:p>
+                      <a:pPr algn="r"/>
+                      <a:r>
+                        <a:rPr sz="1000" b="0">
+                          <a:solidFill>
                             <a:srgbClr val="B3261E"/>
                           </a:solidFill>
                           <a:latin typeface="Calibri"/>
                         </a:rPr>
-                        <a:t>-1.47%</a:t>
+                        <a:t>-0.89%</a:t>
                       </a:r>
                     </a:p>
                   </a:txBody>
@@ -4214,11 +4260,11 @@
                       <a:r>
                         <a:rPr sz="1000" b="0">
                           <a:solidFill>
-                            <a:srgbClr val="0B7A3B"/>
-                          </a:solidFill>
-                          <a:latin typeface="Calibri"/>
-                        </a:rPr>
-                        <a:t>+0.94%</a:t>
+                            <a:srgbClr val="1F2A37"/>
+                          </a:solidFill>
+                          <a:latin typeface="Calibri"/>
+                        </a:rPr>
+                        <a:t>-33.6%</a:t>
                       </a:r>
                     </a:p>
                   </a:txBody>
@@ -4237,11 +4283,11 @@
                       <a:r>
                         <a:rPr sz="1000" b="0">
                           <a:solidFill>
-                            <a:srgbClr val="B3261E"/>
-                          </a:solidFill>
-                          <a:latin typeface="Calibri"/>
-                        </a:rPr>
-                        <a:t>-3.44%</a:t>
+                            <a:srgbClr val="1F2A37"/>
+                          </a:solidFill>
+                          <a:latin typeface="Calibri"/>
+                        </a:rPr>
+                        <a:t>23%</a:t>
                       </a:r>
                     </a:p>
                   </a:txBody>
@@ -4264,53 +4310,7 @@
                           </a:solidFill>
                           <a:latin typeface="Calibri"/>
                         </a:rPr>
-                        <a:t>-34.8%</a:t>
-                      </a:r>
-                    </a:p>
-                  </a:txBody>
-                  <a:tcPr>
-                    <a:solidFill>
-                      <a:srgbClr val="F3F5F7"/>
-                    </a:solidFill>
-                  </a:tcPr>
-                </a:tc>
-                <a:tc>
-                  <a:txBody>
-                    <a:bodyPr/>
-                    <a:lstStyle/>
-                    <a:p>
-                      <a:pPr algn="r"/>
-                      <a:r>
-                        <a:rPr sz="1000" b="0">
-                          <a:solidFill>
-                            <a:srgbClr val="1F2A37"/>
-                          </a:solidFill>
-                          <a:latin typeface="Calibri"/>
-                        </a:rPr>
-                        <a:t>23%</a:t>
-                      </a:r>
-                    </a:p>
-                  </a:txBody>
-                  <a:tcPr>
-                    <a:solidFill>
-                      <a:srgbClr val="F3F5F7"/>
-                    </a:solidFill>
-                  </a:tcPr>
-                </a:tc>
-                <a:tc>
-                  <a:txBody>
-                    <a:bodyPr/>
-                    <a:lstStyle/>
-                    <a:p>
-                      <a:pPr algn="r"/>
-                      <a:r>
-                        <a:rPr sz="1000" b="0">
-                          <a:solidFill>
-                            <a:srgbClr val="1F2A37"/>
-                          </a:solidFill>
-                          <a:latin typeface="Calibri"/>
-                        </a:rPr>
-                        <a:t>16.6</a:t>
+                        <a:t>16.9</a:t>
                       </a:r>
                     </a:p>
                   </a:txBody>
@@ -4358,7 +4358,7 @@
                           </a:solidFill>
                           <a:latin typeface="Calibri"/>
                         </a:rPr>
-                        <a:t>3,885</a:t>
+                        <a:t>3,905</a:t>
                       </a:r>
                     </a:p>
                   </a:txBody>
@@ -4381,7 +4381,7 @@
                           </a:solidFill>
                           <a:latin typeface="Calibri"/>
                         </a:rPr>
-                        <a:t>+1.27%</a:t>
+                        <a:t>+0.51%</a:t>
                       </a:r>
                     </a:p>
                   </a:txBody>
@@ -4404,7 +4404,7 @@
                           </a:solidFill>
                           <a:latin typeface="Calibri"/>
                         </a:rPr>
-                        <a:t>-1.16%</a:t>
+                        <a:t>-0.66%</a:t>
                       </a:r>
                     </a:p>
                   </a:txBody>
@@ -4427,7 +4427,7 @@
                           </a:solidFill>
                           <a:latin typeface="Calibri"/>
                         </a:rPr>
-                        <a:t>-4.80%</a:t>
+                        <a:t>-4.60%</a:t>
                       </a:r>
                     </a:p>
                   </a:txBody>
@@ -4450,7 +4450,7 @@
                           </a:solidFill>
                           <a:latin typeface="Calibri"/>
                         </a:rPr>
-                        <a:t>-11.2%</a:t>
+                        <a:t>-10.8%</a:t>
                       </a:r>
                     </a:p>
                   </a:txBody>
@@ -4496,7 +4496,7 @@
                           </a:solidFill>
                           <a:latin typeface="Calibri"/>
                         </a:rPr>
-                        <a:t>32.3</a:t>
+                        <a:t>32.4</a:t>
                       </a:r>
                     </a:p>
                   </a:txBody>
@@ -4544,7 +4544,7 @@
                           </a:solidFill>
                           <a:latin typeface="Calibri"/>
                         </a:rPr>
-                        <a:t>1,226</a:t>
+                        <a:t>1,247</a:t>
                       </a:r>
                     </a:p>
                   </a:txBody>
@@ -4563,11 +4563,34 @@
                       <a:r>
                         <a:rPr sz="1000" b="0">
                           <a:solidFill>
+                            <a:srgbClr val="0B7A3B"/>
+                          </a:solidFill>
+                          <a:latin typeface="Calibri"/>
+                        </a:rPr>
+                        <a:t>+1.71%</a:t>
+                      </a:r>
+                    </a:p>
+                  </a:txBody>
+                  <a:tcPr>
+                    <a:solidFill>
+                      <a:srgbClr val="F3F5F7"/>
+                    </a:solidFill>
+                  </a:tcPr>
+                </a:tc>
+                <a:tc>
+                  <a:txBody>
+                    <a:bodyPr/>
+                    <a:lstStyle/>
+                    <a:p>
+                      <a:pPr algn="r"/>
+                      <a:r>
+                        <a:rPr sz="1000" b="0">
+                          <a:solidFill>
                             <a:srgbClr val="B3261E"/>
                           </a:solidFill>
                           <a:latin typeface="Calibri"/>
                         </a:rPr>
-                        <a:t>-1.41%</a:t>
+                        <a:t>-0.80%</a:t>
                       </a:r>
                     </a:p>
                   </a:txBody>
@@ -4590,7 +4613,7 @@
                           </a:solidFill>
                           <a:latin typeface="Calibri"/>
                         </a:rPr>
-                        <a:t>-2.47%</a:t>
+                        <a:t>-5.21%</a:t>
                       </a:r>
                     </a:p>
                   </a:txBody>
@@ -4609,11 +4632,11 @@
                       <a:r>
                         <a:rPr sz="1000" b="0">
                           <a:solidFill>
-                            <a:srgbClr val="B3261E"/>
-                          </a:solidFill>
-                          <a:latin typeface="Calibri"/>
-                        </a:rPr>
-                        <a:t>-6.61%</a:t>
+                            <a:srgbClr val="1F2A37"/>
+                          </a:solidFill>
+                          <a:latin typeface="Calibri"/>
+                        </a:rPr>
+                        <a:t>-21.3%</a:t>
                       </a:r>
                     </a:p>
                   </a:txBody>
@@ -4636,7 +4659,7 @@
                           </a:solidFill>
                           <a:latin typeface="Calibri"/>
                         </a:rPr>
-                        <a:t>-22.6%</a:t>
+                        <a:t>16%</a:t>
                       </a:r>
                     </a:p>
                   </a:txBody>
@@ -4659,30 +4682,7 @@
                           </a:solidFill>
                           <a:latin typeface="Calibri"/>
                         </a:rPr>
-                        <a:t>15%</a:t>
-                      </a:r>
-                    </a:p>
-                  </a:txBody>
-                  <a:tcPr>
-                    <a:solidFill>
-                      <a:srgbClr val="F3F5F7"/>
-                    </a:solidFill>
-                  </a:tcPr>
-                </a:tc>
-                <a:tc>
-                  <a:txBody>
-                    <a:bodyPr/>
-                    <a:lstStyle/>
-                    <a:p>
-                      <a:pPr algn="r"/>
-                      <a:r>
-                        <a:rPr sz="1000" b="0">
-                          <a:solidFill>
-                            <a:srgbClr val="1F2A37"/>
-                          </a:solidFill>
-                          <a:latin typeface="Calibri"/>
-                        </a:rPr>
-                        <a:t>22.2</a:t>
+                        <a:t>22.6</a:t>
                       </a:r>
                     </a:p>
                   </a:txBody>
@@ -4730,7 +4730,7 @@
                           </a:solidFill>
                           <a:latin typeface="Calibri"/>
                         </a:rPr>
-                        <a:t>2,105</a:t>
+                        <a:t>2,129</a:t>
                       </a:r>
                     </a:p>
                   </a:txBody>
@@ -4749,11 +4749,34 @@
                       <a:r>
                         <a:rPr sz="1000" b="0">
                           <a:solidFill>
+                            <a:srgbClr val="0B7A3B"/>
+                          </a:solidFill>
+                          <a:latin typeface="Calibri"/>
+                        </a:rPr>
+                        <a:t>+1.13%</a:t>
+                      </a:r>
+                    </a:p>
+                  </a:txBody>
+                  <a:tcPr>
+                    <a:solidFill>
+                      <a:srgbClr val="FFFFFF"/>
+                    </a:solidFill>
+                  </a:tcPr>
+                </a:tc>
+                <a:tc>
+                  <a:txBody>
+                    <a:bodyPr/>
+                    <a:lstStyle/>
+                    <a:p>
+                      <a:pPr algn="r"/>
+                      <a:r>
+                        <a:rPr sz="1000" b="0">
+                          <a:solidFill>
                             <a:srgbClr val="B3261E"/>
                           </a:solidFill>
                           <a:latin typeface="Calibri"/>
                         </a:rPr>
-                        <a:t>-3.88%</a:t>
+                        <a:t>-3.28%</a:t>
                       </a:r>
                     </a:p>
                   </a:txBody>
@@ -4776,7 +4799,7 @@
                           </a:solidFill>
                           <a:latin typeface="Calibri"/>
                         </a:rPr>
-                        <a:t>-4.35%</a:t>
+                        <a:t>-7.53%</a:t>
                       </a:r>
                     </a:p>
                   </a:txBody>
@@ -4795,11 +4818,11 @@
                       <a:r>
                         <a:rPr sz="1000" b="0">
                           <a:solidFill>
-                            <a:srgbClr val="B3261E"/>
-                          </a:solidFill>
-                          <a:latin typeface="Calibri"/>
-                        </a:rPr>
-                        <a:t>-8.40%</a:t>
+                            <a:srgbClr val="1F2A37"/>
+                          </a:solidFill>
+                          <a:latin typeface="Calibri"/>
+                        </a:rPr>
+                        <a:t>-33.6%</a:t>
                       </a:r>
                     </a:p>
                   </a:txBody>
@@ -4822,7 +4845,7 @@
                           </a:solidFill>
                           <a:latin typeface="Calibri"/>
                         </a:rPr>
-                        <a:t>-34.3%</a:t>
+                        <a:t>27%</a:t>
                       </a:r>
                     </a:p>
                   </a:txBody>
@@ -4845,30 +4868,7 @@
                           </a:solidFill>
                           <a:latin typeface="Calibri"/>
                         </a:rPr>
-                        <a:t>27%</a:t>
-                      </a:r>
-                    </a:p>
-                  </a:txBody>
-                  <a:tcPr>
-                    <a:solidFill>
-                      <a:srgbClr val="FFFFFF"/>
-                    </a:solidFill>
-                  </a:tcPr>
-                </a:tc>
-                <a:tc>
-                  <a:txBody>
-                    <a:bodyPr/>
-                    <a:lstStyle/>
-                    <a:p>
-                      <a:pPr algn="r"/>
-                      <a:r>
-                        <a:rPr sz="1000" b="0">
-                          <a:solidFill>
-                            <a:srgbClr val="1F2A37"/>
-                          </a:solidFill>
-                          <a:latin typeface="Calibri"/>
-                        </a:rPr>
-                        <a:t>15.3</a:t>
+                        <a:t>15.5</a:t>
                       </a:r>
                     </a:p>
                   </a:txBody>
@@ -4952,7 +4952,7 @@
                 </a:solidFill>
                 <a:latin typeface="Calibri"/>
               </a:rPr>
-              <a:t>Breadth was risk-off: 3 of 8 names advanced on the day.</a:t>
+              <a:t>Breadth was risk-on: 6 of 8 names advanced on the day.</a:t>
             </a:r>
           </a:p>
           <a:p>
@@ -4968,7 +4968,7 @@
                 </a:solidFill>
                 <a:latin typeface="Calibri"/>
               </a:rPr>
-              <a:t>•  Best performer on the day: BHARTIARTL.NS at +3.12%.</a:t>
+              <a:t>•  Best performer on the day: ITC.NS at +1.79%.</a:t>
             </a:r>
           </a:p>
           <a:p>
@@ -4984,7 +4984,7 @@
                 </a:solidFill>
                 <a:latin typeface="Calibri"/>
               </a:rPr>
-              <a:t>•  Weakest on the day: TCS.NS at -3.88%.</a:t>
+              <a:t>•  Weakest on the day: BHARTIARTL.NS at -3.33%.</a:t>
             </a:r>
           </a:p>
           <a:p>
@@ -5000,7 +5000,7 @@
                 </a:solidFill>
                 <a:latin typeface="Calibri"/>
               </a:rPr>
-              <a:t>•  Median one-day move across the watchlist: -0.66%.</a:t>
+              <a:t>•  Median one-day move across the watchlist: +0.82%.</a:t>
             </a:r>
           </a:p>
           <a:p>
@@ -5016,7 +5016,7 @@
                 </a:solidFill>
                 <a:latin typeface="Calibri"/>
               </a:rPr>
-              <a:t>•  INFY.NS sits furthest below its 52-week high, at -36.4%.</a:t>
+              <a:t>•  INFY.NS sits furthest below its 52-week high, at -37.2%.</a:t>
             </a:r>
           </a:p>
           <a:p>
@@ -5048,7 +5048,7 @@
                 </a:solidFill>
                 <a:latin typeface="Calibri"/>
               </a:rPr>
-              <a:t>•  Highest 30-day realised volatility: INFY.NS at 27.4% annualised.</a:t>
+              <a:t>•  Highest 30-day realised volatility: TCS.NS at 27.4% annualised.</a:t>
             </a:r>
           </a:p>
           <a:p>
@@ -5064,7 +5064,7 @@
                 </a:solidFill>
                 <a:latin typeface="Calibri"/>
               </a:rPr>
-              <a:t>•  60 headlines collected, 3 tagged to a watchlist name by substring match (unverified).</a:t>
+              <a:t>•  60 headlines collected, 1 tagged to a watchlist name by substring match (unverified).</a:t>
             </a:r>
           </a:p>
           <a:p>

--- a/public/deskbrief.pptx
+++ b/public/deskbrief.pptx
@@ -3128,7 +3128,7 @@
                 </a:solidFill>
                 <a:latin typeface="Calibri"/>
               </a:rPr>
-              <a:t>8 names  |  generated 21 Sep 2026 18:15  |  source: Yahoo Finance via yfinance, Indian financial RSS</a:t>
+              <a:t>8 names  |  generated 22 Sep 2026 17:07  |  source: Yahoo Finance via yfinance, Indian financial RSS</a:t>
             </a:r>
           </a:p>
         </p:txBody>
@@ -3428,7 +3428,7 @@
                           </a:solidFill>
                           <a:latin typeface="Calibri"/>
                         </a:rPr>
-                        <a:t>1,830</a:t>
+                        <a:t>1,817</a:t>
                       </a:r>
                     </a:p>
                   </a:txBody>
@@ -3451,7 +3451,7 @@
                           </a:solidFill>
                           <a:latin typeface="Calibri"/>
                         </a:rPr>
-                        <a:t>-3.33%</a:t>
+                        <a:t>-0.71%</a:t>
                       </a:r>
                     </a:p>
                   </a:txBody>
@@ -3474,7 +3474,7 @@
                           </a:solidFill>
                           <a:latin typeface="Calibri"/>
                         </a:rPr>
-                        <a:t>-0.05%</a:t>
+                        <a:t>-0.72%</a:t>
                       </a:r>
                     </a:p>
                   </a:txBody>
@@ -3497,7 +3497,7 @@
                           </a:solidFill>
                           <a:latin typeface="Calibri"/>
                         </a:rPr>
-                        <a:t>-5.95%</a:t>
+                        <a:t>-6.09%</a:t>
                       </a:r>
                     </a:p>
                   </a:txBody>
@@ -3520,7 +3520,7 @@
                           </a:solidFill>
                           <a:latin typeface="Calibri"/>
                         </a:rPr>
-                        <a:t>-14.3%</a:t>
+                        <a:t>-14.9%</a:t>
                       </a:r>
                     </a:p>
                   </a:txBody>
@@ -3543,7 +3543,7 @@
                           </a:solidFill>
                           <a:latin typeface="Calibri"/>
                         </a:rPr>
-                        <a:t>27%</a:t>
+                        <a:t>26%</a:t>
                       </a:r>
                     </a:p>
                   </a:txBody>
@@ -3566,7 +3566,7 @@
                           </a:solidFill>
                           <a:latin typeface="Calibri"/>
                         </a:rPr>
-                        <a:t>38.2</a:t>
+                        <a:t>37.9</a:t>
                       </a:r>
                     </a:p>
                   </a:txBody>
@@ -3614,7 +3614,7 @@
                           </a:solidFill>
                           <a:latin typeface="Calibri"/>
                         </a:rPr>
-                        <a:t>740</a:t>
+                        <a:t>739</a:t>
                       </a:r>
                     </a:p>
                   </a:txBody>
@@ -3633,11 +3633,34 @@
                       <a:r>
                         <a:rPr sz="1000" b="0">
                           <a:solidFill>
+                            <a:srgbClr val="B3261E"/>
+                          </a:solidFill>
+                          <a:latin typeface="Calibri"/>
+                        </a:rPr>
+                        <a:t>-0.12%</a:t>
+                      </a:r>
+                    </a:p>
+                  </a:txBody>
+                  <a:tcPr>
+                    <a:solidFill>
+                      <a:srgbClr val="FFFFFF"/>
+                    </a:solidFill>
+                  </a:tcPr>
+                </a:tc>
+                <a:tc>
+                  <a:txBody>
+                    <a:bodyPr/>
+                    <a:lstStyle/>
+                    <a:p>
+                      <a:pPr algn="r"/>
+                      <a:r>
+                        <a:rPr sz="1000" b="0">
+                          <a:solidFill>
                             <a:srgbClr val="0B7A3B"/>
                           </a:solidFill>
                           <a:latin typeface="Calibri"/>
                         </a:rPr>
-                        <a:t>+1.16%</a:t>
+                        <a:t>+3.08%</a:t>
                       </a:r>
                     </a:p>
                   </a:txBody>
@@ -3660,7 +3683,7 @@
                           </a:solidFill>
                           <a:latin typeface="Calibri"/>
                         </a:rPr>
-                        <a:t>+4.41%</a:t>
+                        <a:t>+1.32%</a:t>
                       </a:r>
                     </a:p>
                   </a:txBody>
@@ -3679,11 +3702,11 @@
                       <a:r>
                         <a:rPr sz="1000" b="0">
                           <a:solidFill>
-                            <a:srgbClr val="0B7A3B"/>
-                          </a:solidFill>
-                          <a:latin typeface="Calibri"/>
-                        </a:rPr>
-                        <a:t>+1.73%</a:t>
+                            <a:srgbClr val="1F2A37"/>
+                          </a:solidFill>
+                          <a:latin typeface="Calibri"/>
+                        </a:rPr>
+                        <a:t>-25.6%</a:t>
                       </a:r>
                     </a:p>
                   </a:txBody>
@@ -3706,7 +3729,7 @@
                           </a:solidFill>
                           <a:latin typeface="Calibri"/>
                         </a:rPr>
-                        <a:t>-25.5%</a:t>
+                        <a:t>18%</a:t>
                       </a:r>
                     </a:p>
                   </a:txBody>
@@ -3729,30 +3752,7 @@
                           </a:solidFill>
                           <a:latin typeface="Calibri"/>
                         </a:rPr>
-                        <a:t>18%</a:t>
-                      </a:r>
-                    </a:p>
-                  </a:txBody>
-                  <a:tcPr>
-                    <a:solidFill>
-                      <a:srgbClr val="FFFFFF"/>
-                    </a:solidFill>
-                  </a:tcPr>
-                </a:tc>
-                <a:tc>
-                  <a:txBody>
-                    <a:bodyPr/>
-                    <a:lstStyle/>
-                    <a:p>
-                      <a:pPr algn="r"/>
-                      <a:r>
-                        <a:rPr sz="1000" b="0">
-                          <a:solidFill>
-                            <a:srgbClr val="1F2A37"/>
-                          </a:solidFill>
-                          <a:latin typeface="Calibri"/>
-                        </a:rPr>
-                        <a:t>16.2</a:t>
+                        <a:t>16.1</a:t>
                       </a:r>
                     </a:p>
                   </a:txBody>
@@ -3800,7 +3800,7 @@
                           </a:solidFill>
                           <a:latin typeface="Calibri"/>
                         </a:rPr>
-                        <a:t>1,345</a:t>
+                        <a:t>1,340</a:t>
                       </a:r>
                     </a:p>
                   </a:txBody>
@@ -3819,11 +3819,11 @@
                       <a:r>
                         <a:rPr sz="1000" b="0">
                           <a:solidFill>
-                            <a:srgbClr val="0B7A3B"/>
-                          </a:solidFill>
-                          <a:latin typeface="Calibri"/>
-                        </a:rPr>
-                        <a:t>+0.46%</a:t>
+                            <a:srgbClr val="B3261E"/>
+                          </a:solidFill>
+                          <a:latin typeface="Calibri"/>
+                        </a:rPr>
+                        <a:t>-0.40%</a:t>
                       </a:r>
                     </a:p>
                   </a:txBody>
@@ -3846,7 +3846,7 @@
                           </a:solidFill>
                           <a:latin typeface="Calibri"/>
                         </a:rPr>
-                        <a:t>-2.49%</a:t>
+                        <a:t>-0.80%</a:t>
                       </a:r>
                     </a:p>
                   </a:txBody>
@@ -3869,7 +3869,7 @@
                           </a:solidFill>
                           <a:latin typeface="Calibri"/>
                         </a:rPr>
-                        <a:t>-5.28%</a:t>
+                        <a:t>-5.33%</a:t>
                       </a:r>
                     </a:p>
                   </a:txBody>
@@ -3892,7 +3892,7 @@
                           </a:solidFill>
                           <a:latin typeface="Calibri"/>
                         </a:rPr>
-                        <a:t>-7.9%</a:t>
+                        <a:t>-8.2%</a:t>
                       </a:r>
                     </a:p>
                   </a:txBody>
@@ -3938,7 +3938,7 @@
                           </a:solidFill>
                           <a:latin typeface="Calibri"/>
                         </a:rPr>
-                        <a:t>17.4</a:t>
+                        <a:t>17.3</a:t>
                       </a:r>
                     </a:p>
                   </a:txBody>
@@ -3986,7 +3986,7 @@
                           </a:solidFill>
                           <a:latin typeface="Calibri"/>
                         </a:rPr>
-                        <a:t>1,038</a:t>
+                        <a:t>1,029</a:t>
                       </a:r>
                     </a:p>
                   </a:txBody>
@@ -4009,7 +4009,7 @@
                           </a:solidFill>
                           <a:latin typeface="Calibri"/>
                         </a:rPr>
-                        <a:t>-1.23%</a:t>
+                        <a:t>-0.88%</a:t>
                       </a:r>
                     </a:p>
                   </a:txBody>
@@ -4028,11 +4028,11 @@
                       <a:r>
                         <a:rPr sz="1000" b="0">
                           <a:solidFill>
-                            <a:srgbClr val="0B7A3B"/>
-                          </a:solidFill>
-                          <a:latin typeface="Calibri"/>
-                        </a:rPr>
-                        <a:t>+0.08%</a:t>
+                            <a:srgbClr val="B3261E"/>
+                          </a:solidFill>
+                          <a:latin typeface="Calibri"/>
+                        </a:rPr>
+                        <a:t>-4.42%</a:t>
                       </a:r>
                     </a:p>
                   </a:txBody>
@@ -4055,7 +4055,7 @@
                           </a:solidFill>
                           <a:latin typeface="Calibri"/>
                         </a:rPr>
-                        <a:t>-7.36%</a:t>
+                        <a:t>-8.90%</a:t>
                       </a:r>
                     </a:p>
                   </a:txBody>
@@ -4078,7 +4078,7 @@
                           </a:solidFill>
                           <a:latin typeface="Calibri"/>
                         </a:rPr>
-                        <a:t>-37.2%</a:t>
+                        <a:t>-37.8%</a:t>
                       </a:r>
                     </a:p>
                   </a:txBody>
@@ -4124,7 +4124,7 @@
                           </a:solidFill>
                           <a:latin typeface="Calibri"/>
                         </a:rPr>
-                        <a:t>13.3</a:t>
+                        <a:t>13.2</a:t>
                       </a:r>
                     </a:p>
                   </a:txBody>
@@ -4172,7 +4172,7 @@
                           </a:solidFill>
                           <a:latin typeface="Calibri"/>
                         </a:rPr>
-                        <a:t>267</a:t>
+                        <a:t>266</a:t>
                       </a:r>
                     </a:p>
                   </a:txBody>
@@ -4191,11 +4191,34 @@
                       <a:r>
                         <a:rPr sz="1000" b="0">
                           <a:solidFill>
+                            <a:srgbClr val="B3261E"/>
+                          </a:solidFill>
+                          <a:latin typeface="Calibri"/>
+                        </a:rPr>
+                        <a:t>-0.45%</a:t>
+                      </a:r>
+                    </a:p>
+                  </a:txBody>
+                  <a:tcPr>
+                    <a:solidFill>
+                      <a:srgbClr val="F3F5F7"/>
+                    </a:solidFill>
+                  </a:tcPr>
+                </a:tc>
+                <a:tc>
+                  <a:txBody>
+                    <a:bodyPr/>
+                    <a:lstStyle/>
+                    <a:p>
+                      <a:pPr algn="r"/>
+                      <a:r>
+                        <a:rPr sz="1000" b="0">
+                          <a:solidFill>
                             <a:srgbClr val="0B7A3B"/>
                           </a:solidFill>
                           <a:latin typeface="Calibri"/>
                         </a:rPr>
-                        <a:t>+1.79%</a:t>
+                        <a:t>+3.02%</a:t>
                       </a:r>
                     </a:p>
                   </a:txBody>
@@ -4214,11 +4237,11 @@
                       <a:r>
                         <a:rPr sz="1000" b="0">
                           <a:solidFill>
-                            <a:srgbClr val="0B7A3B"/>
-                          </a:solidFill>
-                          <a:latin typeface="Calibri"/>
-                        </a:rPr>
-                        <a:t>+2.75%</a:t>
+                            <a:srgbClr val="B3261E"/>
+                          </a:solidFill>
+                          <a:latin typeface="Calibri"/>
+                        </a:rPr>
+                        <a:t>-1.45%</a:t>
                       </a:r>
                     </a:p>
                   </a:txBody>
@@ -4237,11 +4260,11 @@
                       <a:r>
                         <a:rPr sz="1000" b="0">
                           <a:solidFill>
-                            <a:srgbClr val="B3261E"/>
-                          </a:solidFill>
-                          <a:latin typeface="Calibri"/>
-                        </a:rPr>
-                        <a:t>-0.89%</a:t>
+                            <a:srgbClr val="1F2A37"/>
+                          </a:solidFill>
+                          <a:latin typeface="Calibri"/>
+                        </a:rPr>
+                        <a:t>-33.9%</a:t>
                       </a:r>
                     </a:p>
                   </a:txBody>
@@ -4264,7 +4287,7 @@
                           </a:solidFill>
                           <a:latin typeface="Calibri"/>
                         </a:rPr>
-                        <a:t>-33.6%</a:t>
+                        <a:t>23%</a:t>
                       </a:r>
                     </a:p>
                   </a:txBody>
@@ -4287,30 +4310,7 @@
                           </a:solidFill>
                           <a:latin typeface="Calibri"/>
                         </a:rPr>
-                        <a:t>23%</a:t>
-                      </a:r>
-                    </a:p>
-                  </a:txBody>
-                  <a:tcPr>
-                    <a:solidFill>
-                      <a:srgbClr val="F3F5F7"/>
-                    </a:solidFill>
-                  </a:tcPr>
-                </a:tc>
-                <a:tc>
-                  <a:txBody>
-                    <a:bodyPr/>
-                    <a:lstStyle/>
-                    <a:p>
-                      <a:pPr algn="r"/>
-                      <a:r>
-                        <a:rPr sz="1000" b="0">
-                          <a:solidFill>
-                            <a:srgbClr val="1F2A37"/>
-                          </a:solidFill>
-                          <a:latin typeface="Calibri"/>
-                        </a:rPr>
-                        <a:t>16.9</a:t>
+                        <a:t>16.8</a:t>
                       </a:r>
                     </a:p>
                   </a:txBody>
@@ -4358,7 +4358,7 @@
                           </a:solidFill>
                           <a:latin typeface="Calibri"/>
                         </a:rPr>
-                        <a:t>3,905</a:t>
+                        <a:t>3,866</a:t>
                       </a:r>
                     </a:p>
                   </a:txBody>
@@ -4377,11 +4377,34 @@
                       <a:r>
                         <a:rPr sz="1000" b="0">
                           <a:solidFill>
+                            <a:srgbClr val="B3261E"/>
+                          </a:solidFill>
+                          <a:latin typeface="Calibri"/>
+                        </a:rPr>
+                        <a:t>-0.98%</a:t>
+                      </a:r>
+                    </a:p>
+                  </a:txBody>
+                  <a:tcPr>
+                    <a:solidFill>
+                      <a:srgbClr val="FFFFFF"/>
+                    </a:solidFill>
+                  </a:tcPr>
+                </a:tc>
+                <a:tc>
+                  <a:txBody>
+                    <a:bodyPr/>
+                    <a:lstStyle/>
+                    <a:p>
+                      <a:pPr algn="r"/>
+                      <a:r>
+                        <a:rPr sz="1000" b="0">
+                          <a:solidFill>
                             <a:srgbClr val="0B7A3B"/>
                           </a:solidFill>
                           <a:latin typeface="Calibri"/>
                         </a:rPr>
-                        <a:t>+0.51%</a:t>
+                        <a:t>+0.41%</a:t>
                       </a:r>
                     </a:p>
                   </a:txBody>
@@ -4404,7 +4427,7 @@
                           </a:solidFill>
                           <a:latin typeface="Calibri"/>
                         </a:rPr>
-                        <a:t>-0.66%</a:t>
+                        <a:t>-5.47%</a:t>
                       </a:r>
                     </a:p>
                   </a:txBody>
@@ -4423,11 +4446,11 @@
                       <a:r>
                         <a:rPr sz="1000" b="0">
                           <a:solidFill>
-                            <a:srgbClr val="B3261E"/>
-                          </a:solidFill>
-                          <a:latin typeface="Calibri"/>
-                        </a:rPr>
-                        <a:t>-4.60%</a:t>
+                            <a:srgbClr val="1F2A37"/>
+                          </a:solidFill>
+                          <a:latin typeface="Calibri"/>
+                        </a:rPr>
+                        <a:t>-11.6%</a:t>
                       </a:r>
                     </a:p>
                   </a:txBody>
@@ -4450,7 +4473,7 @@
                           </a:solidFill>
                           <a:latin typeface="Calibri"/>
                         </a:rPr>
-                        <a:t>-10.8%</a:t>
+                        <a:t>14%</a:t>
                       </a:r>
                     </a:p>
                   </a:txBody>
@@ -4473,30 +4496,7 @@
                           </a:solidFill>
                           <a:latin typeface="Calibri"/>
                         </a:rPr>
-                        <a:t>14%</a:t>
-                      </a:r>
-                    </a:p>
-                  </a:txBody>
-                  <a:tcPr>
-                    <a:solidFill>
-                      <a:srgbClr val="FFFFFF"/>
-                    </a:solidFill>
-                  </a:tcPr>
-                </a:tc>
-                <a:tc>
-                  <a:txBody>
-                    <a:bodyPr/>
-                    <a:lstStyle/>
-                    <a:p>
-                      <a:pPr algn="r"/>
-                      <a:r>
-                        <a:rPr sz="1000" b="0">
-                          <a:solidFill>
-                            <a:srgbClr val="1F2A37"/>
-                          </a:solidFill>
-                          <a:latin typeface="Calibri"/>
-                        </a:rPr>
-                        <a:t>32.4</a:t>
+                        <a:t>32.0</a:t>
                       </a:r>
                     </a:p>
                   </a:txBody>
@@ -4544,7 +4544,7 @@
                           </a:solidFill>
                           <a:latin typeface="Calibri"/>
                         </a:rPr>
-                        <a:t>1,247</a:t>
+                        <a:t>1,240</a:t>
                       </a:r>
                     </a:p>
                   </a:txBody>
@@ -4563,11 +4563,34 @@
                       <a:r>
                         <a:rPr sz="1000" b="0">
                           <a:solidFill>
+                            <a:srgbClr val="B3261E"/>
+                          </a:solidFill>
+                          <a:latin typeface="Calibri"/>
+                        </a:rPr>
+                        <a:t>-0.56%</a:t>
+                      </a:r>
+                    </a:p>
+                  </a:txBody>
+                  <a:tcPr>
+                    <a:solidFill>
+                      <a:srgbClr val="F3F5F7"/>
+                    </a:solidFill>
+                  </a:tcPr>
+                </a:tc>
+                <a:tc>
+                  <a:txBody>
+                    <a:bodyPr/>
+                    <a:lstStyle/>
+                    <a:p>
+                      <a:pPr algn="r"/>
+                      <a:r>
+                        <a:rPr sz="1000" b="0">
+                          <a:solidFill>
                             <a:srgbClr val="0B7A3B"/>
                           </a:solidFill>
                           <a:latin typeface="Calibri"/>
                         </a:rPr>
-                        <a:t>+1.71%</a:t>
+                        <a:t>+0.41%</a:t>
                       </a:r>
                     </a:p>
                   </a:txBody>
@@ -4590,7 +4613,7 @@
                           </a:solidFill>
                           <a:latin typeface="Calibri"/>
                         </a:rPr>
-                        <a:t>-0.80%</a:t>
+                        <a:t>-5.30%</a:t>
                       </a:r>
                     </a:p>
                   </a:txBody>
@@ -4609,11 +4632,11 @@
                       <a:r>
                         <a:rPr sz="1000" b="0">
                           <a:solidFill>
-                            <a:srgbClr val="B3261E"/>
-                          </a:solidFill>
-                          <a:latin typeface="Calibri"/>
-                        </a:rPr>
-                        <a:t>-5.21%</a:t>
+                            <a:srgbClr val="1F2A37"/>
+                          </a:solidFill>
+                          <a:latin typeface="Calibri"/>
+                        </a:rPr>
+                        <a:t>-21.7%</a:t>
                       </a:r>
                     </a:p>
                   </a:txBody>
@@ -4636,7 +4659,7 @@
                           </a:solidFill>
                           <a:latin typeface="Calibri"/>
                         </a:rPr>
-                        <a:t>-21.3%</a:t>
+                        <a:t>16%</a:t>
                       </a:r>
                     </a:p>
                   </a:txBody>
@@ -4659,30 +4682,7 @@
                           </a:solidFill>
                           <a:latin typeface="Calibri"/>
                         </a:rPr>
-                        <a:t>16%</a:t>
-                      </a:r>
-                    </a:p>
-                  </a:txBody>
-                  <a:tcPr>
-                    <a:solidFill>
-                      <a:srgbClr val="F3F5F7"/>
-                    </a:solidFill>
-                  </a:tcPr>
-                </a:tc>
-                <a:tc>
-                  <a:txBody>
-                    <a:bodyPr/>
-                    <a:lstStyle/>
-                    <a:p>
-                      <a:pPr algn="r"/>
-                      <a:r>
-                        <a:rPr sz="1000" b="0">
-                          <a:solidFill>
-                            <a:srgbClr val="1F2A37"/>
-                          </a:solidFill>
-                          <a:latin typeface="Calibri"/>
-                        </a:rPr>
-                        <a:t>22.6</a:t>
+                        <a:t>22.5</a:t>
                       </a:r>
                     </a:p>
                   </a:txBody>
@@ -4730,7 +4730,7 @@
                           </a:solidFill>
                           <a:latin typeface="Calibri"/>
                         </a:rPr>
-                        <a:t>2,129</a:t>
+                        <a:t>2,105</a:t>
                       </a:r>
                     </a:p>
                   </a:txBody>
@@ -4749,11 +4749,11 @@
                       <a:r>
                         <a:rPr sz="1000" b="0">
                           <a:solidFill>
-                            <a:srgbClr val="0B7A3B"/>
-                          </a:solidFill>
-                          <a:latin typeface="Calibri"/>
-                        </a:rPr>
-                        <a:t>+1.13%</a:t>
+                            <a:srgbClr val="B3261E"/>
+                          </a:solidFill>
+                          <a:latin typeface="Calibri"/>
+                        </a:rPr>
+                        <a:t>-1.11%</a:t>
                       </a:r>
                     </a:p>
                   </a:txBody>
@@ -4776,7 +4776,7 @@
                           </a:solidFill>
                           <a:latin typeface="Calibri"/>
                         </a:rPr>
-                        <a:t>-3.28%</a:t>
+                        <a:t>-6.49%</a:t>
                       </a:r>
                     </a:p>
                   </a:txBody>
@@ -4799,7 +4799,7 @@
                           </a:solidFill>
                           <a:latin typeface="Calibri"/>
                         </a:rPr>
-                        <a:t>-7.53%</a:t>
+                        <a:t>-7.84%</a:t>
                       </a:r>
                     </a:p>
                   </a:txBody>
@@ -4822,7 +4822,7 @@
                           </a:solidFill>
                           <a:latin typeface="Calibri"/>
                         </a:rPr>
-                        <a:t>-33.6%</a:t>
+                        <a:t>-34.3%</a:t>
                       </a:r>
                     </a:p>
                   </a:txBody>
@@ -4868,7 +4868,7 @@
                           </a:solidFill>
                           <a:latin typeface="Calibri"/>
                         </a:rPr>
-                        <a:t>15.5</a:t>
+                        <a:t>15.3</a:t>
                       </a:r>
                     </a:p>
                   </a:txBody>
@@ -4952,7 +4952,7 @@
                 </a:solidFill>
                 <a:latin typeface="Calibri"/>
               </a:rPr>
-              <a:t>Breadth was risk-on: 6 of 8 names advanced on the day.</a:t>
+              <a:t>Breadth was risk-off: 0 of 8 names advanced on the day.</a:t>
             </a:r>
           </a:p>
           <a:p>
@@ -4968,7 +4968,7 @@
                 </a:solidFill>
                 <a:latin typeface="Calibri"/>
               </a:rPr>
-              <a:t>•  Best performer on the day: ITC.NS at +1.79%.</a:t>
+              <a:t>•  Best performer on the day: HDFCBANK.NS at -0.12%.</a:t>
             </a:r>
           </a:p>
           <a:p>
@@ -4984,7 +4984,7 @@
                 </a:solidFill>
                 <a:latin typeface="Calibri"/>
               </a:rPr>
-              <a:t>•  Weakest on the day: BHARTIARTL.NS at -3.33%.</a:t>
+              <a:t>•  Weakest on the day: TCS.NS at -1.11%.</a:t>
             </a:r>
           </a:p>
           <a:p>
@@ -5000,7 +5000,7 @@
                 </a:solidFill>
                 <a:latin typeface="Calibri"/>
               </a:rPr>
-              <a:t>•  Median one-day move across the watchlist: +0.82%.</a:t>
+              <a:t>•  Median one-day move across the watchlist: -0.64%.</a:t>
             </a:r>
           </a:p>
           <a:p>
@@ -5016,7 +5016,7 @@
                 </a:solidFill>
                 <a:latin typeface="Calibri"/>
               </a:rPr>
-              <a:t>•  INFY.NS sits furthest below its 52-week high, at -37.2%.</a:t>
+              <a:t>•  INFY.NS sits furthest below its 52-week high, at -37.8%.</a:t>
             </a:r>
           </a:p>
           <a:p>
@@ -5048,7 +5048,7 @@
                 </a:solidFill>
                 <a:latin typeface="Calibri"/>
               </a:rPr>
-              <a:t>•  Highest 30-day realised volatility: TCS.NS at 27.4% annualised.</a:t>
+              <a:t>•  Highest 30-day realised volatility: TCS.NS at 27.2% annualised.</a:t>
             </a:r>
           </a:p>
           <a:p>
@@ -5064,7 +5064,7 @@
                 </a:solidFill>
                 <a:latin typeface="Calibri"/>
               </a:rPr>
-              <a:t>•  60 headlines collected, 1 tagged to a watchlist name by substring match (unverified).</a:t>
+              <a:t>•  60 headlines collected, 2 tagged to a watchlist name by substring match (unverified).</a:t>
             </a:r>
           </a:p>
           <a:p>

--- a/public/deskbrief.pptx
+++ b/public/deskbrief.pptx
@@ -3128,7 +3128,7 @@
                 </a:solidFill>
                 <a:latin typeface="Calibri"/>
               </a:rPr>
-              <a:t>8 names  |  generated 22 Sep 2026 17:07  |  source: Yahoo Finance via yfinance, Indian financial RSS</a:t>
+              <a:t>8 names  |  generated 23 Sep 2026 17:20  |  source: Yahoo Finance via yfinance, Indian financial RSS</a:t>
             </a:r>
           </a:p>
         </p:txBody>
@@ -3428,7 +3428,7 @@
                           </a:solidFill>
                           <a:latin typeface="Calibri"/>
                         </a:rPr>
-                        <a:t>1,817</a:t>
+                        <a:t>1,833</a:t>
                       </a:r>
                     </a:p>
                   </a:txBody>
@@ -3447,11 +3447,34 @@
                       <a:r>
                         <a:rPr sz="1000" b="0">
                           <a:solidFill>
+                            <a:srgbClr val="0B7A3B"/>
+                          </a:solidFill>
+                          <a:latin typeface="Calibri"/>
+                        </a:rPr>
+                        <a:t>+0.88%</a:t>
+                      </a:r>
+                    </a:p>
+                  </a:txBody>
+                  <a:tcPr>
+                    <a:solidFill>
+                      <a:srgbClr val="F3F5F7"/>
+                    </a:solidFill>
+                  </a:tcPr>
+                </a:tc>
+                <a:tc>
+                  <a:txBody>
+                    <a:bodyPr/>
+                    <a:lstStyle/>
+                    <a:p>
+                      <a:pPr algn="r"/>
+                      <a:r>
+                        <a:rPr sz="1000" b="0">
+                          <a:solidFill>
                             <a:srgbClr val="B3261E"/>
                           </a:solidFill>
                           <a:latin typeface="Calibri"/>
                         </a:rPr>
-                        <a:t>-0.71%</a:t>
+                        <a:t>-0.10%</a:t>
                       </a:r>
                     </a:p>
                   </a:txBody>
@@ -3474,7 +3497,7 @@
                           </a:solidFill>
                           <a:latin typeface="Calibri"/>
                         </a:rPr>
-                        <a:t>-0.72%</a:t>
+                        <a:t>-5.84%</a:t>
                       </a:r>
                     </a:p>
                   </a:txBody>
@@ -3493,11 +3516,11 @@
                       <a:r>
                         <a:rPr sz="1000" b="0">
                           <a:solidFill>
-                            <a:srgbClr val="B3261E"/>
-                          </a:solidFill>
-                          <a:latin typeface="Calibri"/>
-                        </a:rPr>
-                        <a:t>-6.09%</a:t>
+                            <a:srgbClr val="1F2A37"/>
+                          </a:solidFill>
+                          <a:latin typeface="Calibri"/>
+                        </a:rPr>
+                        <a:t>-14.2%</a:t>
                       </a:r>
                     </a:p>
                   </a:txBody>
@@ -3520,7 +3543,7 @@
                           </a:solidFill>
                           <a:latin typeface="Calibri"/>
                         </a:rPr>
-                        <a:t>-14.9%</a:t>
+                        <a:t>26%</a:t>
                       </a:r>
                     </a:p>
                   </a:txBody>
@@ -3543,30 +3566,7 @@
                           </a:solidFill>
                           <a:latin typeface="Calibri"/>
                         </a:rPr>
-                        <a:t>26%</a:t>
-                      </a:r>
-                    </a:p>
-                  </a:txBody>
-                  <a:tcPr>
-                    <a:solidFill>
-                      <a:srgbClr val="F3F5F7"/>
-                    </a:solidFill>
-                  </a:tcPr>
-                </a:tc>
-                <a:tc>
-                  <a:txBody>
-                    <a:bodyPr/>
-                    <a:lstStyle/>
-                    <a:p>
-                      <a:pPr algn="r"/>
-                      <a:r>
-                        <a:rPr sz="1000" b="0">
-                          <a:solidFill>
-                            <a:srgbClr val="1F2A37"/>
-                          </a:solidFill>
-                          <a:latin typeface="Calibri"/>
-                        </a:rPr>
-                        <a:t>37.9</a:t>
+                        <a:t>38.7</a:t>
                       </a:r>
                     </a:p>
                   </a:txBody>
@@ -3614,7 +3614,7 @@
                           </a:solidFill>
                           <a:latin typeface="Calibri"/>
                         </a:rPr>
-                        <a:t>739</a:t>
+                        <a:t>737</a:t>
                       </a:r>
                     </a:p>
                   </a:txBody>
@@ -3637,7 +3637,7 @@
                           </a:solidFill>
                           <a:latin typeface="Calibri"/>
                         </a:rPr>
-                        <a:t>-0.12%</a:t>
+                        <a:t>-0.18%</a:t>
                       </a:r>
                     </a:p>
                   </a:txBody>
@@ -3660,7 +3660,7 @@
                           </a:solidFill>
                           <a:latin typeface="Calibri"/>
                         </a:rPr>
-                        <a:t>+3.08%</a:t>
+                        <a:t>+2.18%</a:t>
                       </a:r>
                     </a:p>
                   </a:txBody>
@@ -3683,7 +3683,7 @@
                           </a:solidFill>
                           <a:latin typeface="Calibri"/>
                         </a:rPr>
-                        <a:t>+1.32%</a:t>
+                        <a:t>+1.34%</a:t>
                       </a:r>
                     </a:p>
                   </a:txBody>
@@ -3706,7 +3706,7 @@
                           </a:solidFill>
                           <a:latin typeface="Calibri"/>
                         </a:rPr>
-                        <a:t>-25.6%</a:t>
+                        <a:t>-25.8%</a:t>
                       </a:r>
                     </a:p>
                   </a:txBody>
@@ -3819,11 +3819,34 @@
                       <a:r>
                         <a:rPr sz="1000" b="0">
                           <a:solidFill>
+                            <a:srgbClr val="0B7A3B"/>
+                          </a:solidFill>
+                          <a:latin typeface="Calibri"/>
+                        </a:rPr>
+                        <a:t>+0.03%</a:t>
+                      </a:r>
+                    </a:p>
+                  </a:txBody>
+                  <a:tcPr>
+                    <a:solidFill>
+                      <a:srgbClr val="F3F5F7"/>
+                    </a:solidFill>
+                  </a:tcPr>
+                </a:tc>
+                <a:tc>
+                  <a:txBody>
+                    <a:bodyPr/>
+                    <a:lstStyle/>
+                    <a:p>
+                      <a:pPr algn="r"/>
+                      <a:r>
+                        <a:rPr sz="1000" b="0">
+                          <a:solidFill>
                             <a:srgbClr val="B3261E"/>
                           </a:solidFill>
                           <a:latin typeface="Calibri"/>
                         </a:rPr>
-                        <a:t>-0.40%</a:t>
+                        <a:t>-1.38%</a:t>
                       </a:r>
                     </a:p>
                   </a:txBody>
@@ -3846,30 +3869,7 @@
                           </a:solidFill>
                           <a:latin typeface="Calibri"/>
                         </a:rPr>
-                        <a:t>-0.80%</a:t>
-                      </a:r>
-                    </a:p>
-                  </a:txBody>
-                  <a:tcPr>
-                    <a:solidFill>
-                      <a:srgbClr val="F3F5F7"/>
-                    </a:solidFill>
-                  </a:tcPr>
-                </a:tc>
-                <a:tc>
-                  <a:txBody>
-                    <a:bodyPr/>
-                    <a:lstStyle/>
-                    <a:p>
-                      <a:pPr algn="r"/>
-                      <a:r>
-                        <a:rPr sz="1000" b="0">
-                          <a:solidFill>
-                            <a:srgbClr val="B3261E"/>
-                          </a:solidFill>
-                          <a:latin typeface="Calibri"/>
-                        </a:rPr>
-                        <a:t>-5.33%</a:t>
+                        <a:t>-5.81%</a:t>
                       </a:r>
                     </a:p>
                   </a:txBody>
@@ -3986,7 +3986,7 @@
                           </a:solidFill>
                           <a:latin typeface="Calibri"/>
                         </a:rPr>
-                        <a:t>1,029</a:t>
+                        <a:t>1,020</a:t>
                       </a:r>
                     </a:p>
                   </a:txBody>
@@ -4009,7 +4009,7 @@
                           </a:solidFill>
                           <a:latin typeface="Calibri"/>
                         </a:rPr>
-                        <a:t>-0.88%</a:t>
+                        <a:t>-0.86%</a:t>
                       </a:r>
                     </a:p>
                   </a:txBody>
@@ -4032,7 +4032,7 @@
                           </a:solidFill>
                           <a:latin typeface="Calibri"/>
                         </a:rPr>
-                        <a:t>-4.42%</a:t>
+                        <a:t>-3.73%</a:t>
                       </a:r>
                     </a:p>
                   </a:txBody>
@@ -4055,7 +4055,7 @@
                           </a:solidFill>
                           <a:latin typeface="Calibri"/>
                         </a:rPr>
-                        <a:t>-8.90%</a:t>
+                        <a:t>-10.80%</a:t>
                       </a:r>
                     </a:p>
                   </a:txBody>
@@ -4078,7 +4078,7 @@
                           </a:solidFill>
                           <a:latin typeface="Calibri"/>
                         </a:rPr>
-                        <a:t>-37.8%</a:t>
+                        <a:t>-38.3%</a:t>
                       </a:r>
                     </a:p>
                   </a:txBody>
@@ -4124,7 +4124,7 @@
                           </a:solidFill>
                           <a:latin typeface="Calibri"/>
                         </a:rPr>
-                        <a:t>13.2</a:t>
+                        <a:t>13.1</a:t>
                       </a:r>
                     </a:p>
                   </a:txBody>
@@ -4172,7 +4172,7 @@
                           </a:solidFill>
                           <a:latin typeface="Calibri"/>
                         </a:rPr>
-                        <a:t>266</a:t>
+                        <a:t>270</a:t>
                       </a:r>
                     </a:p>
                   </a:txBody>
@@ -4191,11 +4191,57 @@
                       <a:r>
                         <a:rPr sz="1000" b="0">
                           <a:solidFill>
+                            <a:srgbClr val="0B7A3B"/>
+                          </a:solidFill>
+                          <a:latin typeface="Calibri"/>
+                        </a:rPr>
+                        <a:t>+1.64%</a:t>
+                      </a:r>
+                    </a:p>
+                  </a:txBody>
+                  <a:tcPr>
+                    <a:solidFill>
+                      <a:srgbClr val="F3F5F7"/>
+                    </a:solidFill>
+                  </a:tcPr>
+                </a:tc>
+                <a:tc>
+                  <a:txBody>
+                    <a:bodyPr/>
+                    <a:lstStyle/>
+                    <a:p>
+                      <a:pPr algn="r"/>
+                      <a:r>
+                        <a:rPr sz="1000" b="0">
+                          <a:solidFill>
+                            <a:srgbClr val="0B7A3B"/>
+                          </a:solidFill>
+                          <a:latin typeface="Calibri"/>
+                        </a:rPr>
+                        <a:t>+2.27%</a:t>
+                      </a:r>
+                    </a:p>
+                  </a:txBody>
+                  <a:tcPr>
+                    <a:solidFill>
+                      <a:srgbClr val="F3F5F7"/>
+                    </a:solidFill>
+                  </a:tcPr>
+                </a:tc>
+                <a:tc>
+                  <a:txBody>
+                    <a:bodyPr/>
+                    <a:lstStyle/>
+                    <a:p>
+                      <a:pPr algn="r"/>
+                      <a:r>
+                        <a:rPr sz="1000" b="0">
+                          <a:solidFill>
                             <a:srgbClr val="B3261E"/>
                           </a:solidFill>
                           <a:latin typeface="Calibri"/>
                         </a:rPr>
-                        <a:t>-0.45%</a:t>
+                        <a:t>-0.46%</a:t>
                       </a:r>
                     </a:p>
                   </a:txBody>
@@ -4214,11 +4260,11 @@
                       <a:r>
                         <a:rPr sz="1000" b="0">
                           <a:solidFill>
-                            <a:srgbClr val="0B7A3B"/>
-                          </a:solidFill>
-                          <a:latin typeface="Calibri"/>
-                        </a:rPr>
-                        <a:t>+3.02%</a:t>
+                            <a:srgbClr val="1F2A37"/>
+                          </a:solidFill>
+                          <a:latin typeface="Calibri"/>
+                        </a:rPr>
+                        <a:t>-32.8%</a:t>
                       </a:r>
                     </a:p>
                   </a:txBody>
@@ -4237,11 +4283,11 @@
                       <a:r>
                         <a:rPr sz="1000" b="0">
                           <a:solidFill>
-                            <a:srgbClr val="B3261E"/>
-                          </a:solidFill>
-                          <a:latin typeface="Calibri"/>
-                        </a:rPr>
-                        <a:t>-1.45%</a:t>
+                            <a:srgbClr val="1F2A37"/>
+                          </a:solidFill>
+                          <a:latin typeface="Calibri"/>
+                        </a:rPr>
+                        <a:t>24%</a:t>
                       </a:r>
                     </a:p>
                   </a:txBody>
@@ -4264,53 +4310,7 @@
                           </a:solidFill>
                           <a:latin typeface="Calibri"/>
                         </a:rPr>
-                        <a:t>-33.9%</a:t>
-                      </a:r>
-                    </a:p>
-                  </a:txBody>
-                  <a:tcPr>
-                    <a:solidFill>
-                      <a:srgbClr val="F3F5F7"/>
-                    </a:solidFill>
-                  </a:tcPr>
-                </a:tc>
-                <a:tc>
-                  <a:txBody>
-                    <a:bodyPr/>
-                    <a:lstStyle/>
-                    <a:p>
-                      <a:pPr algn="r"/>
-                      <a:r>
-                        <a:rPr sz="1000" b="0">
-                          <a:solidFill>
-                            <a:srgbClr val="1F2A37"/>
-                          </a:solidFill>
-                          <a:latin typeface="Calibri"/>
-                        </a:rPr>
-                        <a:t>23%</a:t>
-                      </a:r>
-                    </a:p>
-                  </a:txBody>
-                  <a:tcPr>
-                    <a:solidFill>
-                      <a:srgbClr val="F3F5F7"/>
-                    </a:solidFill>
-                  </a:tcPr>
-                </a:tc>
-                <a:tc>
-                  <a:txBody>
-                    <a:bodyPr/>
-                    <a:lstStyle/>
-                    <a:p>
-                      <a:pPr algn="r"/>
-                      <a:r>
-                        <a:rPr sz="1000" b="0">
-                          <a:solidFill>
-                            <a:srgbClr val="1F2A37"/>
-                          </a:solidFill>
-                          <a:latin typeface="Calibri"/>
-                        </a:rPr>
-                        <a:t>16.8</a:t>
+                        <a:t>17.1</a:t>
                       </a:r>
                     </a:p>
                   </a:txBody>
@@ -4358,7 +4358,7 @@
                           </a:solidFill>
                           <a:latin typeface="Calibri"/>
                         </a:rPr>
-                        <a:t>3,866</a:t>
+                        <a:t>3,930</a:t>
                       </a:r>
                     </a:p>
                   </a:txBody>
@@ -4377,11 +4377,57 @@
                       <a:r>
                         <a:rPr sz="1000" b="0">
                           <a:solidFill>
+                            <a:srgbClr val="0B7A3B"/>
+                          </a:solidFill>
+                          <a:latin typeface="Calibri"/>
+                        </a:rPr>
+                        <a:t>+1.64%</a:t>
+                      </a:r>
+                    </a:p>
+                  </a:txBody>
+                  <a:tcPr>
+                    <a:solidFill>
+                      <a:srgbClr val="FFFFFF"/>
+                    </a:solidFill>
+                  </a:tcPr>
+                </a:tc>
+                <a:tc>
+                  <a:txBody>
+                    <a:bodyPr/>
+                    <a:lstStyle/>
+                    <a:p>
+                      <a:pPr algn="r"/>
+                      <a:r>
+                        <a:rPr sz="1000" b="0">
+                          <a:solidFill>
+                            <a:srgbClr val="0B7A3B"/>
+                          </a:solidFill>
+                          <a:latin typeface="Calibri"/>
+                        </a:rPr>
+                        <a:t>+3.21%</a:t>
+                      </a:r>
+                    </a:p>
+                  </a:txBody>
+                  <a:tcPr>
+                    <a:solidFill>
+                      <a:srgbClr val="FFFFFF"/>
+                    </a:solidFill>
+                  </a:tcPr>
+                </a:tc>
+                <a:tc>
+                  <a:txBody>
+                    <a:bodyPr/>
+                    <a:lstStyle/>
+                    <a:p>
+                      <a:pPr algn="r"/>
+                      <a:r>
+                        <a:rPr sz="1000" b="0">
+                          <a:solidFill>
                             <a:srgbClr val="B3261E"/>
                           </a:solidFill>
                           <a:latin typeface="Calibri"/>
                         </a:rPr>
-                        <a:t>-0.98%</a:t>
+                        <a:t>-4.59%</a:t>
                       </a:r>
                     </a:p>
                   </a:txBody>
@@ -4400,11 +4446,11 @@
                       <a:r>
                         <a:rPr sz="1000" b="0">
                           <a:solidFill>
-                            <a:srgbClr val="0B7A3B"/>
-                          </a:solidFill>
-                          <a:latin typeface="Calibri"/>
-                        </a:rPr>
-                        <a:t>+0.41%</a:t>
+                            <a:srgbClr val="1F2A37"/>
+                          </a:solidFill>
+                          <a:latin typeface="Calibri"/>
+                        </a:rPr>
+                        <a:t>-10.2%</a:t>
                       </a:r>
                     </a:p>
                   </a:txBody>
@@ -4423,11 +4469,11 @@
                       <a:r>
                         <a:rPr sz="1000" b="0">
                           <a:solidFill>
-                            <a:srgbClr val="B3261E"/>
-                          </a:solidFill>
-                          <a:latin typeface="Calibri"/>
-                        </a:rPr>
-                        <a:t>-5.47%</a:t>
+                            <a:srgbClr val="1F2A37"/>
+                          </a:solidFill>
+                          <a:latin typeface="Calibri"/>
+                        </a:rPr>
+                        <a:t>15%</a:t>
                       </a:r>
                     </a:p>
                   </a:txBody>
@@ -4450,53 +4496,7 @@
                           </a:solidFill>
                           <a:latin typeface="Calibri"/>
                         </a:rPr>
-                        <a:t>-11.6%</a:t>
-                      </a:r>
-                    </a:p>
-                  </a:txBody>
-                  <a:tcPr>
-                    <a:solidFill>
-                      <a:srgbClr val="FFFFFF"/>
-                    </a:solidFill>
-                  </a:tcPr>
-                </a:tc>
-                <a:tc>
-                  <a:txBody>
-                    <a:bodyPr/>
-                    <a:lstStyle/>
-                    <a:p>
-                      <a:pPr algn="r"/>
-                      <a:r>
-                        <a:rPr sz="1000" b="0">
-                          <a:solidFill>
-                            <a:srgbClr val="1F2A37"/>
-                          </a:solidFill>
-                          <a:latin typeface="Calibri"/>
-                        </a:rPr>
-                        <a:t>14%</a:t>
-                      </a:r>
-                    </a:p>
-                  </a:txBody>
-                  <a:tcPr>
-                    <a:solidFill>
-                      <a:srgbClr val="FFFFFF"/>
-                    </a:solidFill>
-                  </a:tcPr>
-                </a:tc>
-                <a:tc>
-                  <a:txBody>
-                    <a:bodyPr/>
-                    <a:lstStyle/>
-                    <a:p>
-                      <a:pPr algn="r"/>
-                      <a:r>
-                        <a:rPr sz="1000" b="0">
-                          <a:solidFill>
-                            <a:srgbClr val="1F2A37"/>
-                          </a:solidFill>
-                          <a:latin typeface="Calibri"/>
-                        </a:rPr>
-                        <a:t>32.0</a:t>
+                        <a:t>32.6</a:t>
                       </a:r>
                     </a:p>
                   </a:txBody>
@@ -4544,7 +4544,7 @@
                           </a:solidFill>
                           <a:latin typeface="Calibri"/>
                         </a:rPr>
-                        <a:t>1,240</a:t>
+                        <a:t>1,248</a:t>
                       </a:r>
                     </a:p>
                   </a:txBody>
@@ -4563,11 +4563,57 @@
                       <a:r>
                         <a:rPr sz="1000" b="0">
                           <a:solidFill>
+                            <a:srgbClr val="0B7A3B"/>
+                          </a:solidFill>
+                          <a:latin typeface="Calibri"/>
+                        </a:rPr>
+                        <a:t>+0.61%</a:t>
+                      </a:r>
+                    </a:p>
+                  </a:txBody>
+                  <a:tcPr>
+                    <a:solidFill>
+                      <a:srgbClr val="F3F5F7"/>
+                    </a:solidFill>
+                  </a:tcPr>
+                </a:tc>
+                <a:tc>
+                  <a:txBody>
+                    <a:bodyPr/>
+                    <a:lstStyle/>
+                    <a:p>
+                      <a:pPr algn="r"/>
+                      <a:r>
+                        <a:rPr sz="1000" b="0">
+                          <a:solidFill>
+                            <a:srgbClr val="0B7A3B"/>
+                          </a:solidFill>
+                          <a:latin typeface="Calibri"/>
+                        </a:rPr>
+                        <a:t>+0.65%</a:t>
+                      </a:r>
+                    </a:p>
+                  </a:txBody>
+                  <a:tcPr>
+                    <a:solidFill>
+                      <a:srgbClr val="F3F5F7"/>
+                    </a:solidFill>
+                  </a:tcPr>
+                </a:tc>
+                <a:tc>
+                  <a:txBody>
+                    <a:bodyPr/>
+                    <a:lstStyle/>
+                    <a:p>
+                      <a:pPr algn="r"/>
+                      <a:r>
+                        <a:rPr sz="1000" b="0">
+                          <a:solidFill>
                             <a:srgbClr val="B3261E"/>
                           </a:solidFill>
                           <a:latin typeface="Calibri"/>
                         </a:rPr>
-                        <a:t>-0.56%</a:t>
+                        <a:t>-5.24%</a:t>
                       </a:r>
                     </a:p>
                   </a:txBody>
@@ -4586,11 +4632,11 @@
                       <a:r>
                         <a:rPr sz="1000" b="0">
                           <a:solidFill>
-                            <a:srgbClr val="0B7A3B"/>
-                          </a:solidFill>
-                          <a:latin typeface="Calibri"/>
-                        </a:rPr>
-                        <a:t>+0.41%</a:t>
+                            <a:srgbClr val="1F2A37"/>
+                          </a:solidFill>
+                          <a:latin typeface="Calibri"/>
+                        </a:rPr>
+                        <a:t>-21.3%</a:t>
                       </a:r>
                     </a:p>
                   </a:txBody>
@@ -4609,11 +4655,11 @@
                       <a:r>
                         <a:rPr sz="1000" b="0">
                           <a:solidFill>
-                            <a:srgbClr val="B3261E"/>
-                          </a:solidFill>
-                          <a:latin typeface="Calibri"/>
-                        </a:rPr>
-                        <a:t>-5.30%</a:t>
+                            <a:srgbClr val="1F2A37"/>
+                          </a:solidFill>
+                          <a:latin typeface="Calibri"/>
+                        </a:rPr>
+                        <a:t>16%</a:t>
                       </a:r>
                     </a:p>
                   </a:txBody>
@@ -4636,53 +4682,7 @@
                           </a:solidFill>
                           <a:latin typeface="Calibri"/>
                         </a:rPr>
-                        <a:t>-21.7%</a:t>
-                      </a:r>
-                    </a:p>
-                  </a:txBody>
-                  <a:tcPr>
-                    <a:solidFill>
-                      <a:srgbClr val="F3F5F7"/>
-                    </a:solidFill>
-                  </a:tcPr>
-                </a:tc>
-                <a:tc>
-                  <a:txBody>
-                    <a:bodyPr/>
-                    <a:lstStyle/>
-                    <a:p>
-                      <a:pPr algn="r"/>
-                      <a:r>
-                        <a:rPr sz="1000" b="0">
-                          <a:solidFill>
-                            <a:srgbClr val="1F2A37"/>
-                          </a:solidFill>
-                          <a:latin typeface="Calibri"/>
-                        </a:rPr>
-                        <a:t>16%</a:t>
-                      </a:r>
-                    </a:p>
-                  </a:txBody>
-                  <a:tcPr>
-                    <a:solidFill>
-                      <a:srgbClr val="F3F5F7"/>
-                    </a:solidFill>
-                  </a:tcPr>
-                </a:tc>
-                <a:tc>
-                  <a:txBody>
-                    <a:bodyPr/>
-                    <a:lstStyle/>
-                    <a:p>
-                      <a:pPr algn="r"/>
-                      <a:r>
-                        <a:rPr sz="1000" b="0">
-                          <a:solidFill>
-                            <a:srgbClr val="1F2A37"/>
-                          </a:solidFill>
-                          <a:latin typeface="Calibri"/>
-                        </a:rPr>
-                        <a:t>22.5</a:t>
+                        <a:t>22.6</a:t>
                       </a:r>
                     </a:p>
                   </a:txBody>
@@ -4730,7 +4730,7 @@
                           </a:solidFill>
                           <a:latin typeface="Calibri"/>
                         </a:rPr>
-                        <a:t>2,105</a:t>
+                        <a:t>2,090</a:t>
                       </a:r>
                     </a:p>
                   </a:txBody>
@@ -4753,7 +4753,7 @@
                           </a:solidFill>
                           <a:latin typeface="Calibri"/>
                         </a:rPr>
-                        <a:t>-1.11%</a:t>
+                        <a:t>-0.73%</a:t>
                       </a:r>
                     </a:p>
                   </a:txBody>
@@ -4776,7 +4776,7 @@
                           </a:solidFill>
                           <a:latin typeface="Calibri"/>
                         </a:rPr>
-                        <a:t>-6.49%</a:t>
+                        <a:t>-4.53%</a:t>
                       </a:r>
                     </a:p>
                   </a:txBody>
@@ -4799,7 +4799,7 @@
                           </a:solidFill>
                           <a:latin typeface="Calibri"/>
                         </a:rPr>
-                        <a:t>-7.84%</a:t>
+                        <a:t>-9.00%</a:t>
                       </a:r>
                     </a:p>
                   </a:txBody>
@@ -4822,7 +4822,7 @@
                           </a:solidFill>
                           <a:latin typeface="Calibri"/>
                         </a:rPr>
-                        <a:t>-34.3%</a:t>
+                        <a:t>-34.8%</a:t>
                       </a:r>
                     </a:p>
                   </a:txBody>
@@ -4845,7 +4845,7 @@
                           </a:solidFill>
                           <a:latin typeface="Calibri"/>
                         </a:rPr>
-                        <a:t>27%</a:t>
+                        <a:t>25%</a:t>
                       </a:r>
                     </a:p>
                   </a:txBody>
@@ -4952,7 +4952,7 @@
                 </a:solidFill>
                 <a:latin typeface="Calibri"/>
               </a:rPr>
-              <a:t>Breadth was risk-off: 0 of 8 names advanced on the day.</a:t>
+              <a:t>Breadth was risk-on: 5 of 8 names advanced on the day.</a:t>
             </a:r>
           </a:p>
           <a:p>
@@ -4968,7 +4968,7 @@
                 </a:solidFill>
                 <a:latin typeface="Calibri"/>
               </a:rPr>
-              <a:t>•  Best performer on the day: HDFCBANK.NS at -0.12%.</a:t>
+              <a:t>•  Best performer on the day: LT.NS at +1.64%.</a:t>
             </a:r>
           </a:p>
           <a:p>
@@ -4984,7 +4984,7 @@
                 </a:solidFill>
                 <a:latin typeface="Calibri"/>
               </a:rPr>
-              <a:t>•  Weakest on the day: TCS.NS at -1.11%.</a:t>
+              <a:t>•  Weakest on the day: INFY.NS at -0.86%.</a:t>
             </a:r>
           </a:p>
           <a:p>
@@ -5000,7 +5000,7 @@
                 </a:solidFill>
                 <a:latin typeface="Calibri"/>
               </a:rPr>
-              <a:t>•  Median one-day move across the watchlist: -0.64%.</a:t>
+              <a:t>•  Median one-day move across the watchlist: +0.32%.</a:t>
             </a:r>
           </a:p>
           <a:p>
@@ -5016,7 +5016,7 @@
                 </a:solidFill>
                 <a:latin typeface="Calibri"/>
               </a:rPr>
-              <a:t>•  INFY.NS sits furthest below its 52-week high, at -37.8%.</a:t>
+              <a:t>•  INFY.NS sits furthest below its 52-week high, at -38.3%.</a:t>
             </a:r>
           </a:p>
           <a:p>
@@ -5048,7 +5048,7 @@
                 </a:solidFill>
                 <a:latin typeface="Calibri"/>
               </a:rPr>
-              <a:t>•  Highest 30-day realised volatility: TCS.NS at 27.2% annualised.</a:t>
+              <a:t>•  Highest 30-day realised volatility: INFY.NS at 27.1% annualised.</a:t>
             </a:r>
           </a:p>
           <a:p>
@@ -5064,7 +5064,7 @@
                 </a:solidFill>
                 <a:latin typeface="Calibri"/>
               </a:rPr>
-              <a:t>•  60 headlines collected, 2 tagged to a watchlist name by substring match (unverified).</a:t>
+              <a:t>•  60 headlines collected, 1 tagged to a watchlist name by substring match (unverified).</a:t>
             </a:r>
           </a:p>
           <a:p>

--- a/public/deskbrief.pptx
+++ b/public/deskbrief.pptx
@@ -3128,7 +3128,7 @@
                 </a:solidFill>
                 <a:latin typeface="Calibri"/>
               </a:rPr>
-              <a:t>8 names  |  generated 23 Sep 2026 17:20  |  source: Yahoo Finance via yfinance, Indian financial RSS</a:t>
+              <a:t>8 names  |  generated 24 Sep 2026 17:24  |  source: Yahoo Finance via yfinance, Indian financial RSS</a:t>
             </a:r>
           </a:p>
         </p:txBody>
@@ -3428,7 +3428,7 @@
                           </a:solidFill>
                           <a:latin typeface="Calibri"/>
                         </a:rPr>
-                        <a:t>1,833</a:t>
+                        <a:t>1,796</a:t>
                       </a:r>
                     </a:p>
                   </a:txBody>
@@ -3447,11 +3447,11 @@
                       <a:r>
                         <a:rPr sz="1000" b="0">
                           <a:solidFill>
-                            <a:srgbClr val="0B7A3B"/>
-                          </a:solidFill>
-                          <a:latin typeface="Calibri"/>
-                        </a:rPr>
-                        <a:t>+0.88%</a:t>
+                            <a:srgbClr val="B3261E"/>
+                          </a:solidFill>
+                          <a:latin typeface="Calibri"/>
+                        </a:rPr>
+                        <a:t>-2.04%</a:t>
                       </a:r>
                     </a:p>
                   </a:txBody>
@@ -3474,7 +3474,7 @@
                           </a:solidFill>
                           <a:latin typeface="Calibri"/>
                         </a:rPr>
-                        <a:t>-0.10%</a:t>
+                        <a:t>-2.19%</a:t>
                       </a:r>
                     </a:p>
                   </a:txBody>
@@ -3497,7 +3497,7 @@
                           </a:solidFill>
                           <a:latin typeface="Calibri"/>
                         </a:rPr>
-                        <a:t>-5.84%</a:t>
+                        <a:t>-5.59%</a:t>
                       </a:r>
                     </a:p>
                   </a:txBody>
@@ -3520,7 +3520,7 @@
                           </a:solidFill>
                           <a:latin typeface="Calibri"/>
                         </a:rPr>
-                        <a:t>-14.2%</a:t>
+                        <a:t>-15.9%</a:t>
                       </a:r>
                     </a:p>
                   </a:txBody>
@@ -3543,7 +3543,7 @@
                           </a:solidFill>
                           <a:latin typeface="Calibri"/>
                         </a:rPr>
-                        <a:t>26%</a:t>
+                        <a:t>27%</a:t>
                       </a:r>
                     </a:p>
                   </a:txBody>
@@ -3566,7 +3566,7 @@
                           </a:solidFill>
                           <a:latin typeface="Calibri"/>
                         </a:rPr>
-                        <a:t>38.7</a:t>
+                        <a:t>37.9</a:t>
                       </a:r>
                     </a:p>
                   </a:txBody>
@@ -3614,7 +3614,7 @@
                           </a:solidFill>
                           <a:latin typeface="Calibri"/>
                         </a:rPr>
-                        <a:t>737</a:t>
+                        <a:t>729</a:t>
                       </a:r>
                     </a:p>
                   </a:txBody>
@@ -3637,7 +3637,7 @@
                           </a:solidFill>
                           <a:latin typeface="Calibri"/>
                         </a:rPr>
-                        <a:t>-0.18%</a:t>
+                        <a:t>-1.13%</a:t>
                       </a:r>
                     </a:p>
                   </a:txBody>
@@ -3660,7 +3660,7 @@
                           </a:solidFill>
                           <a:latin typeface="Calibri"/>
                         </a:rPr>
-                        <a:t>+2.18%</a:t>
+                        <a:t>+2.23%</a:t>
                       </a:r>
                     </a:p>
                   </a:txBody>
@@ -3683,7 +3683,7 @@
                           </a:solidFill>
                           <a:latin typeface="Calibri"/>
                         </a:rPr>
-                        <a:t>+1.34%</a:t>
+                        <a:t>+0.23%</a:t>
                       </a:r>
                     </a:p>
                   </a:txBody>
@@ -3706,7 +3706,7 @@
                           </a:solidFill>
                           <a:latin typeface="Calibri"/>
                         </a:rPr>
-                        <a:t>-25.8%</a:t>
+                        <a:t>-26.6%</a:t>
                       </a:r>
                     </a:p>
                   </a:txBody>
@@ -3752,7 +3752,7 @@
                           </a:solidFill>
                           <a:latin typeface="Calibri"/>
                         </a:rPr>
-                        <a:t>16.1</a:t>
+                        <a:t>15.9</a:t>
                       </a:r>
                     </a:p>
                   </a:txBody>
@@ -3800,7 +3800,7 @@
                           </a:solidFill>
                           <a:latin typeface="Calibri"/>
                         </a:rPr>
-                        <a:t>1,340</a:t>
+                        <a:t>1,334</a:t>
                       </a:r>
                     </a:p>
                   </a:txBody>
@@ -3819,11 +3819,11 @@
                       <a:r>
                         <a:rPr sz="1000" b="0">
                           <a:solidFill>
-                            <a:srgbClr val="0B7A3B"/>
-                          </a:solidFill>
-                          <a:latin typeface="Calibri"/>
-                        </a:rPr>
-                        <a:t>+0.03%</a:t>
+                            <a:srgbClr val="B3261E"/>
+                          </a:solidFill>
+                          <a:latin typeface="Calibri"/>
+                        </a:rPr>
+                        <a:t>-0.41%</a:t>
                       </a:r>
                     </a:p>
                   </a:txBody>
@@ -3846,7 +3846,7 @@
                           </a:solidFill>
                           <a:latin typeface="Calibri"/>
                         </a:rPr>
-                        <a:t>-1.38%</a:t>
+                        <a:t>-0.97%</a:t>
                       </a:r>
                     </a:p>
                   </a:txBody>
@@ -3869,7 +3869,7 @@
                           </a:solidFill>
                           <a:latin typeface="Calibri"/>
                         </a:rPr>
-                        <a:t>-5.81%</a:t>
+                        <a:t>-6.68%</a:t>
                       </a:r>
                     </a:p>
                   </a:txBody>
@@ -3892,7 +3892,7 @@
                           </a:solidFill>
                           <a:latin typeface="Calibri"/>
                         </a:rPr>
-                        <a:t>-8.2%</a:t>
+                        <a:t>-8.6%</a:t>
                       </a:r>
                     </a:p>
                   </a:txBody>
@@ -3915,7 +3915,7 @@
                           </a:solidFill>
                           <a:latin typeface="Calibri"/>
                         </a:rPr>
-                        <a:t>15%</a:t>
+                        <a:t>14%</a:t>
                       </a:r>
                     </a:p>
                   </a:txBody>
@@ -3986,7 +3986,7 @@
                           </a:solidFill>
                           <a:latin typeface="Calibri"/>
                         </a:rPr>
-                        <a:t>1,020</a:t>
+                        <a:t>1,014</a:t>
                       </a:r>
                     </a:p>
                   </a:txBody>
@@ -4009,7 +4009,7 @@
                           </a:solidFill>
                           <a:latin typeface="Calibri"/>
                         </a:rPr>
-                        <a:t>-0.86%</a:t>
+                        <a:t>-0.59%</a:t>
                       </a:r>
                     </a:p>
                   </a:txBody>
@@ -4032,7 +4032,7 @@
                           </a:solidFill>
                           <a:latin typeface="Calibri"/>
                         </a:rPr>
-                        <a:t>-3.73%</a:t>
+                        <a:t>-4.17%</a:t>
                       </a:r>
                     </a:p>
                   </a:txBody>
@@ -4055,7 +4055,7 @@
                           </a:solidFill>
                           <a:latin typeface="Calibri"/>
                         </a:rPr>
-                        <a:t>-10.80%</a:t>
+                        <a:t>-9.42%</a:t>
                       </a:r>
                     </a:p>
                   </a:txBody>
@@ -4078,7 +4078,7 @@
                           </a:solidFill>
                           <a:latin typeface="Calibri"/>
                         </a:rPr>
-                        <a:t>-38.3%</a:t>
+                        <a:t>-38.7%</a:t>
                       </a:r>
                     </a:p>
                   </a:txBody>
@@ -4172,7 +4172,7 @@
                           </a:solidFill>
                           <a:latin typeface="Calibri"/>
                         </a:rPr>
-                        <a:t>270</a:t>
+                        <a:t>268</a:t>
                       </a:r>
                     </a:p>
                   </a:txBody>
@@ -4191,11 +4191,34 @@
                       <a:r>
                         <a:rPr sz="1000" b="0">
                           <a:solidFill>
+                            <a:srgbClr val="B3261E"/>
+                          </a:solidFill>
+                          <a:latin typeface="Calibri"/>
+                        </a:rPr>
+                        <a:t>-0.80%</a:t>
+                      </a:r>
+                    </a:p>
+                  </a:txBody>
+                  <a:tcPr>
+                    <a:solidFill>
+                      <a:srgbClr val="F3F5F7"/>
+                    </a:solidFill>
+                  </a:tcPr>
+                </a:tc>
+                <a:tc>
+                  <a:txBody>
+                    <a:bodyPr/>
+                    <a:lstStyle/>
+                    <a:p>
+                      <a:pPr algn="r"/>
+                      <a:r>
+                        <a:rPr sz="1000" b="0">
+                          <a:solidFill>
                             <a:srgbClr val="0B7A3B"/>
                           </a:solidFill>
                           <a:latin typeface="Calibri"/>
                         </a:rPr>
-                        <a:t>+1.64%</a:t>
+                        <a:t>+0.68%</a:t>
                       </a:r>
                     </a:p>
                   </a:txBody>
@@ -4214,11 +4237,11 @@
                       <a:r>
                         <a:rPr sz="1000" b="0">
                           <a:solidFill>
-                            <a:srgbClr val="0B7A3B"/>
-                          </a:solidFill>
-                          <a:latin typeface="Calibri"/>
-                        </a:rPr>
-                        <a:t>+2.27%</a:t>
+                            <a:srgbClr val="B3261E"/>
+                          </a:solidFill>
+                          <a:latin typeface="Calibri"/>
+                        </a:rPr>
+                        <a:t>-0.83%</a:t>
                       </a:r>
                     </a:p>
                   </a:txBody>
@@ -4237,11 +4260,11 @@
                       <a:r>
                         <a:rPr sz="1000" b="0">
                           <a:solidFill>
-                            <a:srgbClr val="B3261E"/>
-                          </a:solidFill>
-                          <a:latin typeface="Calibri"/>
-                        </a:rPr>
-                        <a:t>-0.46%</a:t>
+                            <a:srgbClr val="1F2A37"/>
+                          </a:solidFill>
+                          <a:latin typeface="Calibri"/>
+                        </a:rPr>
+                        <a:t>-33.3%</a:t>
                       </a:r>
                     </a:p>
                   </a:txBody>
@@ -4264,7 +4287,7 @@
                           </a:solidFill>
                           <a:latin typeface="Calibri"/>
                         </a:rPr>
-                        <a:t>-32.8%</a:t>
+                        <a:t>24%</a:t>
                       </a:r>
                     </a:p>
                   </a:txBody>
@@ -4287,30 +4310,7 @@
                           </a:solidFill>
                           <a:latin typeface="Calibri"/>
                         </a:rPr>
-                        <a:t>24%</a:t>
-                      </a:r>
-                    </a:p>
-                  </a:txBody>
-                  <a:tcPr>
-                    <a:solidFill>
-                      <a:srgbClr val="F3F5F7"/>
-                    </a:solidFill>
-                  </a:tcPr>
-                </a:tc>
-                <a:tc>
-                  <a:txBody>
-                    <a:bodyPr/>
-                    <a:lstStyle/>
-                    <a:p>
-                      <a:pPr algn="r"/>
-                      <a:r>
-                        <a:rPr sz="1000" b="0">
-                          <a:solidFill>
-                            <a:srgbClr val="1F2A37"/>
-                          </a:solidFill>
-                          <a:latin typeface="Calibri"/>
-                        </a:rPr>
-                        <a:t>17.1</a:t>
+                        <a:t>16.9</a:t>
                       </a:r>
                     </a:p>
                   </a:txBody>
@@ -4358,7 +4358,7 @@
                           </a:solidFill>
                           <a:latin typeface="Calibri"/>
                         </a:rPr>
-                        <a:t>3,930</a:t>
+                        <a:t>3,858</a:t>
                       </a:r>
                     </a:p>
                   </a:txBody>
@@ -4377,11 +4377,34 @@
                       <a:r>
                         <a:rPr sz="1000" b="0">
                           <a:solidFill>
+                            <a:srgbClr val="B3261E"/>
+                          </a:solidFill>
+                          <a:latin typeface="Calibri"/>
+                        </a:rPr>
+                        <a:t>-1.82%</a:t>
+                      </a:r>
+                    </a:p>
+                  </a:txBody>
+                  <a:tcPr>
+                    <a:solidFill>
+                      <a:srgbClr val="FFFFFF"/>
+                    </a:solidFill>
+                  </a:tcPr>
+                </a:tc>
+                <a:tc>
+                  <a:txBody>
+                    <a:bodyPr/>
+                    <a:lstStyle/>
+                    <a:p>
+                      <a:pPr algn="r"/>
+                      <a:r>
+                        <a:rPr sz="1000" b="0">
+                          <a:solidFill>
                             <a:srgbClr val="0B7A3B"/>
                           </a:solidFill>
                           <a:latin typeface="Calibri"/>
                         </a:rPr>
-                        <a:t>+1.64%</a:t>
+                        <a:t>+0.58%</a:t>
                       </a:r>
                     </a:p>
                   </a:txBody>
@@ -4400,11 +4423,11 @@
                       <a:r>
                         <a:rPr sz="1000" b="0">
                           <a:solidFill>
-                            <a:srgbClr val="0B7A3B"/>
-                          </a:solidFill>
-                          <a:latin typeface="Calibri"/>
-                        </a:rPr>
-                        <a:t>+3.21%</a:t>
+                            <a:srgbClr val="B3261E"/>
+                          </a:solidFill>
+                          <a:latin typeface="Calibri"/>
+                        </a:rPr>
+                        <a:t>-4.45%</a:t>
                       </a:r>
                     </a:p>
                   </a:txBody>
@@ -4423,11 +4446,11 @@
                       <a:r>
                         <a:rPr sz="1000" b="0">
                           <a:solidFill>
-                            <a:srgbClr val="B3261E"/>
-                          </a:solidFill>
-                          <a:latin typeface="Calibri"/>
-                        </a:rPr>
-                        <a:t>-4.59%</a:t>
+                            <a:srgbClr val="1F2A37"/>
+                          </a:solidFill>
+                          <a:latin typeface="Calibri"/>
+                        </a:rPr>
+                        <a:t>-11.8%</a:t>
                       </a:r>
                     </a:p>
                   </a:txBody>
@@ -4450,7 +4473,7 @@
                           </a:solidFill>
                           <a:latin typeface="Calibri"/>
                         </a:rPr>
-                        <a:t>-10.2%</a:t>
+                        <a:t>16%</a:t>
                       </a:r>
                     </a:p>
                   </a:txBody>
@@ -4473,30 +4496,7 @@
                           </a:solidFill>
                           <a:latin typeface="Calibri"/>
                         </a:rPr>
-                        <a:t>15%</a:t>
-                      </a:r>
-                    </a:p>
-                  </a:txBody>
-                  <a:tcPr>
-                    <a:solidFill>
-                      <a:srgbClr val="FFFFFF"/>
-                    </a:solidFill>
-                  </a:tcPr>
-                </a:tc>
-                <a:tc>
-                  <a:txBody>
-                    <a:bodyPr/>
-                    <a:lstStyle/>
-                    <a:p>
-                      <a:pPr algn="r"/>
-                      <a:r>
-                        <a:rPr sz="1000" b="0">
-                          <a:solidFill>
-                            <a:srgbClr val="1F2A37"/>
-                          </a:solidFill>
-                          <a:latin typeface="Calibri"/>
-                        </a:rPr>
-                        <a:t>32.6</a:t>
+                        <a:t>32.0</a:t>
                       </a:r>
                     </a:p>
                   </a:txBody>
@@ -4544,7 +4544,7 @@
                           </a:solidFill>
                           <a:latin typeface="Calibri"/>
                         </a:rPr>
-                        <a:t>1,248</a:t>
+                        <a:t>1,219</a:t>
                       </a:r>
                     </a:p>
                   </a:txBody>
@@ -4563,11 +4563,11 @@
                       <a:r>
                         <a:rPr sz="1000" b="0">
                           <a:solidFill>
-                            <a:srgbClr val="0B7A3B"/>
-                          </a:solidFill>
-                          <a:latin typeface="Calibri"/>
-                        </a:rPr>
-                        <a:t>+0.61%</a:t>
+                            <a:srgbClr val="B3261E"/>
+                          </a:solidFill>
+                          <a:latin typeface="Calibri"/>
+                        </a:rPr>
+                        <a:t>-2.31%</a:t>
                       </a:r>
                     </a:p>
                   </a:txBody>
@@ -4586,11 +4586,11 @@
                       <a:r>
                         <a:rPr sz="1000" b="0">
                           <a:solidFill>
-                            <a:srgbClr val="0B7A3B"/>
-                          </a:solidFill>
-                          <a:latin typeface="Calibri"/>
-                        </a:rPr>
-                        <a:t>+0.65%</a:t>
+                            <a:srgbClr val="B3261E"/>
+                          </a:solidFill>
+                          <a:latin typeface="Calibri"/>
+                        </a:rPr>
+                        <a:t>-1.99%</a:t>
                       </a:r>
                     </a:p>
                   </a:txBody>
@@ -4613,7 +4613,7 @@
                           </a:solidFill>
                           <a:latin typeface="Calibri"/>
                         </a:rPr>
-                        <a:t>-5.24%</a:t>
+                        <a:t>-6.07%</a:t>
                       </a:r>
                     </a:p>
                   </a:txBody>
@@ -4636,7 +4636,7 @@
                           </a:solidFill>
                           <a:latin typeface="Calibri"/>
                         </a:rPr>
-                        <a:t>-21.3%</a:t>
+                        <a:t>-23.1%</a:t>
                       </a:r>
                     </a:p>
                   </a:txBody>
@@ -4659,7 +4659,7 @@
                           </a:solidFill>
                           <a:latin typeface="Calibri"/>
                         </a:rPr>
-                        <a:t>16%</a:t>
+                        <a:t>17%</a:t>
                       </a:r>
                     </a:p>
                   </a:txBody>
@@ -4682,7 +4682,7 @@
                           </a:solidFill>
                           <a:latin typeface="Calibri"/>
                         </a:rPr>
-                        <a:t>22.6</a:t>
+                        <a:t>22.1</a:t>
                       </a:r>
                     </a:p>
                   </a:txBody>
@@ -4730,7 +4730,7 @@
                           </a:solidFill>
                           <a:latin typeface="Calibri"/>
                         </a:rPr>
-                        <a:t>2,090</a:t>
+                        <a:t>2,087</a:t>
                       </a:r>
                     </a:p>
                   </a:txBody>
@@ -4753,7 +4753,7 @@
                           </a:solidFill>
                           <a:latin typeface="Calibri"/>
                         </a:rPr>
-                        <a:t>-0.73%</a:t>
+                        <a:t>-0.12%</a:t>
                       </a:r>
                     </a:p>
                   </a:txBody>
@@ -4776,7 +4776,7 @@
                           </a:solidFill>
                           <a:latin typeface="Calibri"/>
                         </a:rPr>
-                        <a:t>-4.53%</a:t>
+                        <a:t>-4.70%</a:t>
                       </a:r>
                     </a:p>
                   </a:txBody>
@@ -4799,7 +4799,7 @@
                           </a:solidFill>
                           <a:latin typeface="Calibri"/>
                         </a:rPr>
-                        <a:t>-9.00%</a:t>
+                        <a:t>-8.06%</a:t>
                       </a:r>
                     </a:p>
                   </a:txBody>
@@ -4822,7 +4822,7 @@
                           </a:solidFill>
                           <a:latin typeface="Calibri"/>
                         </a:rPr>
-                        <a:t>-34.8%</a:t>
+                        <a:t>-34.9%</a:t>
                       </a:r>
                     </a:p>
                   </a:txBody>
@@ -4868,7 +4868,7 @@
                           </a:solidFill>
                           <a:latin typeface="Calibri"/>
                         </a:rPr>
-                        <a:t>15.3</a:t>
+                        <a:t>15.2</a:t>
                       </a:r>
                     </a:p>
                   </a:txBody>
@@ -4952,7 +4952,7 @@
                 </a:solidFill>
                 <a:latin typeface="Calibri"/>
               </a:rPr>
-              <a:t>Breadth was risk-on: 5 of 8 names advanced on the day.</a:t>
+              <a:t>Breadth was risk-off: 0 of 8 names advanced on the day.</a:t>
             </a:r>
           </a:p>
           <a:p>
@@ -4968,7 +4968,7 @@
                 </a:solidFill>
                 <a:latin typeface="Calibri"/>
               </a:rPr>
-              <a:t>•  Best performer on the day: LT.NS at +1.64%.</a:t>
+              <a:t>•  Best performer on the day: TCS.NS at -0.12%.</a:t>
             </a:r>
           </a:p>
           <a:p>
@@ -4984,7 +4984,7 @@
                 </a:solidFill>
                 <a:latin typeface="Calibri"/>
               </a:rPr>
-              <a:t>•  Weakest on the day: INFY.NS at -0.86%.</a:t>
+              <a:t>•  Weakest on the day: RELIANCE.NS at -2.31%.</a:t>
             </a:r>
           </a:p>
           <a:p>
@@ -5000,7 +5000,7 @@
                 </a:solidFill>
                 <a:latin typeface="Calibri"/>
               </a:rPr>
-              <a:t>•  Median one-day move across the watchlist: +0.32%.</a:t>
+              <a:t>•  Median one-day move across the watchlist: -0.96%.</a:t>
             </a:r>
           </a:p>
           <a:p>
@@ -5016,7 +5016,7 @@
                 </a:solidFill>
                 <a:latin typeface="Calibri"/>
               </a:rPr>
-              <a:t>•  INFY.NS sits furthest below its 52-week high, at -38.3%.</a:t>
+              <a:t>•  INFY.NS sits furthest below its 52-week high, at -38.7%.</a:t>
             </a:r>
           </a:p>
           <a:p>
@@ -5048,7 +5048,7 @@
                 </a:solidFill>
                 <a:latin typeface="Calibri"/>
               </a:rPr>
-              <a:t>•  Highest 30-day realised volatility: INFY.NS at 27.1% annualised.</a:t>
+              <a:t>•  Highest 30-day realised volatility: INFY.NS at 27.0% annualised.</a:t>
             </a:r>
           </a:p>
           <a:p>
@@ -5064,7 +5064,7 @@
                 </a:solidFill>
                 <a:latin typeface="Calibri"/>
               </a:rPr>
-              <a:t>•  60 headlines collected, 1 tagged to a watchlist name by substring match (unverified).</a:t>
+              <a:t>•  60 headlines collected, 4 tagged to a watchlist name by substring match (unverified).</a:t>
             </a:r>
           </a:p>
           <a:p>

--- a/public/deskbrief.pptx
+++ b/public/deskbrief.pptx
@@ -3128,7 +3128,7 @@
                 </a:solidFill>
                 <a:latin typeface="Calibri"/>
               </a:rPr>
-              <a:t>8 names  |  generated 24 Sep 2026 17:24  |  source: Yahoo Finance via yfinance, Indian financial RSS</a:t>
+              <a:t>8 names  |  generated 25 Sep 2026 17:24  |  source: Yahoo Finance via yfinance, Indian financial RSS</a:t>
             </a:r>
           </a:p>
         </p:txBody>
@@ -3428,7 +3428,7 @@
                           </a:solidFill>
                           <a:latin typeface="Calibri"/>
                         </a:rPr>
-                        <a:t>1,796</a:t>
+                        <a:t>1,785</a:t>
                       </a:r>
                     </a:p>
                   </a:txBody>
@@ -3451,7 +3451,7 @@
                           </a:solidFill>
                           <a:latin typeface="Calibri"/>
                         </a:rPr>
-                        <a:t>-2.04%</a:t>
+                        <a:t>-0.58%</a:t>
                       </a:r>
                     </a:p>
                   </a:txBody>
@@ -3474,7 +3474,7 @@
                           </a:solidFill>
                           <a:latin typeface="Calibri"/>
                         </a:rPr>
-                        <a:t>-2.19%</a:t>
+                        <a:t>-5.70%</a:t>
                       </a:r>
                     </a:p>
                   </a:txBody>
@@ -3497,7 +3497,7 @@
                           </a:solidFill>
                           <a:latin typeface="Calibri"/>
                         </a:rPr>
-                        <a:t>-5.59%</a:t>
+                        <a:t>-4.95%</a:t>
                       </a:r>
                     </a:p>
                   </a:txBody>
@@ -3520,7 +3520,7 @@
                           </a:solidFill>
                           <a:latin typeface="Calibri"/>
                         </a:rPr>
-                        <a:t>-15.9%</a:t>
+                        <a:t>-16.4%</a:t>
                       </a:r>
                     </a:p>
                   </a:txBody>
@@ -3543,7 +3543,7 @@
                           </a:solidFill>
                           <a:latin typeface="Calibri"/>
                         </a:rPr>
-                        <a:t>27%</a:t>
+                        <a:t>25%</a:t>
                       </a:r>
                     </a:p>
                   </a:txBody>
@@ -3566,7 +3566,7 @@
                           </a:solidFill>
                           <a:latin typeface="Calibri"/>
                         </a:rPr>
-                        <a:t>37.9</a:t>
+                        <a:t>38.1</a:t>
                       </a:r>
                     </a:p>
                   </a:txBody>
@@ -3614,7 +3614,7 @@
                           </a:solidFill>
                           <a:latin typeface="Calibri"/>
                         </a:rPr>
-                        <a:t>729</a:t>
+                        <a:t>736</a:t>
                       </a:r>
                     </a:p>
                   </a:txBody>
@@ -3633,11 +3633,11 @@
                       <a:r>
                         <a:rPr sz="1000" b="0">
                           <a:solidFill>
-                            <a:srgbClr val="B3261E"/>
-                          </a:solidFill>
-                          <a:latin typeface="Calibri"/>
-                        </a:rPr>
-                        <a:t>-1.13%</a:t>
+                            <a:srgbClr val="0B7A3B"/>
+                          </a:solidFill>
+                          <a:latin typeface="Calibri"/>
+                        </a:rPr>
+                        <a:t>+0.92%</a:t>
                       </a:r>
                     </a:p>
                   </a:txBody>
@@ -3660,7 +3660,7 @@
                           </a:solidFill>
                           <a:latin typeface="Calibri"/>
                         </a:rPr>
-                        <a:t>+2.23%</a:t>
+                        <a:t>+0.63%</a:t>
                       </a:r>
                     </a:p>
                   </a:txBody>
@@ -3683,7 +3683,7 @@
                           </a:solidFill>
                           <a:latin typeface="Calibri"/>
                         </a:rPr>
-                        <a:t>+0.23%</a:t>
+                        <a:t>+3.46%</a:t>
                       </a:r>
                     </a:p>
                   </a:txBody>
@@ -3706,7 +3706,7 @@
                           </a:solidFill>
                           <a:latin typeface="Calibri"/>
                         </a:rPr>
-                        <a:t>-26.6%</a:t>
+                        <a:t>-25.9%</a:t>
                       </a:r>
                     </a:p>
                   </a:txBody>
@@ -3752,7 +3752,7 @@
                           </a:solidFill>
                           <a:latin typeface="Calibri"/>
                         </a:rPr>
-                        <a:t>15.9</a:t>
+                        <a:t>16.1</a:t>
                       </a:r>
                     </a:p>
                   </a:txBody>
@@ -3800,7 +3800,7 @@
                           </a:solidFill>
                           <a:latin typeface="Calibri"/>
                         </a:rPr>
-                        <a:t>1,334</a:t>
+                        <a:t>1,327</a:t>
                       </a:r>
                     </a:p>
                   </a:txBody>
@@ -3823,7 +3823,7 @@
                           </a:solidFill>
                           <a:latin typeface="Calibri"/>
                         </a:rPr>
-                        <a:t>-0.41%</a:t>
+                        <a:t>-0.58%</a:t>
                       </a:r>
                     </a:p>
                   </a:txBody>
@@ -3846,7 +3846,7 @@
                           </a:solidFill>
                           <a:latin typeface="Calibri"/>
                         </a:rPr>
-                        <a:t>-0.97%</a:t>
+                        <a:t>-0.90%</a:t>
                       </a:r>
                     </a:p>
                   </a:txBody>
@@ -3869,7 +3869,7 @@
                           </a:solidFill>
                           <a:latin typeface="Calibri"/>
                         </a:rPr>
-                        <a:t>-6.68%</a:t>
+                        <a:t>-8.05%</a:t>
                       </a:r>
                     </a:p>
                   </a:txBody>
@@ -3892,7 +3892,7 @@
                           </a:solidFill>
                           <a:latin typeface="Calibri"/>
                         </a:rPr>
-                        <a:t>-8.6%</a:t>
+                        <a:t>-9.1%</a:t>
                       </a:r>
                     </a:p>
                   </a:txBody>
@@ -3938,7 +3938,7 @@
                           </a:solidFill>
                           <a:latin typeface="Calibri"/>
                         </a:rPr>
-                        <a:t>17.3</a:t>
+                        <a:t>17.2</a:t>
                       </a:r>
                     </a:p>
                   </a:txBody>
@@ -3986,7 +3986,7 @@
                           </a:solidFill>
                           <a:latin typeface="Calibri"/>
                         </a:rPr>
-                        <a:t>1,014</a:t>
+                        <a:t>1,000</a:t>
                       </a:r>
                     </a:p>
                   </a:txBody>
@@ -4009,7 +4009,7 @@
                           </a:solidFill>
                           <a:latin typeface="Calibri"/>
                         </a:rPr>
-                        <a:t>-0.59%</a:t>
+                        <a:t>-1.41%</a:t>
                       </a:r>
                     </a:p>
                   </a:txBody>
@@ -4032,7 +4032,7 @@
                           </a:solidFill>
                           <a:latin typeface="Calibri"/>
                         </a:rPr>
-                        <a:t>-4.17%</a:t>
+                        <a:t>-4.87%</a:t>
                       </a:r>
                     </a:p>
                   </a:txBody>
@@ -4055,7 +4055,7 @@
                           </a:solidFill>
                           <a:latin typeface="Calibri"/>
                         </a:rPr>
-                        <a:t>-9.42%</a:t>
+                        <a:t>-9.96%</a:t>
                       </a:r>
                     </a:p>
                   </a:txBody>
@@ -4078,7 +4078,7 @@
                           </a:solidFill>
                           <a:latin typeface="Calibri"/>
                         </a:rPr>
-                        <a:t>-38.7%</a:t>
+                        <a:t>-39.5%</a:t>
                       </a:r>
                     </a:p>
                   </a:txBody>
@@ -4124,7 +4124,7 @@
                           </a:solidFill>
                           <a:latin typeface="Calibri"/>
                         </a:rPr>
-                        <a:t>13.1</a:t>
+                        <a:t>12.9</a:t>
                       </a:r>
                     </a:p>
                   </a:txBody>
@@ -4172,7 +4172,7 @@
                           </a:solidFill>
                           <a:latin typeface="Calibri"/>
                         </a:rPr>
-                        <a:t>268</a:t>
+                        <a:t>269</a:t>
                       </a:r>
                     </a:p>
                   </a:txBody>
@@ -4191,11 +4191,11 @@
                       <a:r>
                         <a:rPr sz="1000" b="0">
                           <a:solidFill>
-                            <a:srgbClr val="B3261E"/>
-                          </a:solidFill>
-                          <a:latin typeface="Calibri"/>
-                        </a:rPr>
-                        <a:t>-0.80%</a:t>
+                            <a:srgbClr val="0B7A3B"/>
+                          </a:solidFill>
+                          <a:latin typeface="Calibri"/>
+                        </a:rPr>
+                        <a:t>+0.37%</a:t>
                       </a:r>
                     </a:p>
                   </a:txBody>
@@ -4218,7 +4218,7 @@
                           </a:solidFill>
                           <a:latin typeface="Calibri"/>
                         </a:rPr>
-                        <a:t>+0.68%</a:t>
+                        <a:t>+2.55%</a:t>
                       </a:r>
                     </a:p>
                   </a:txBody>
@@ -4237,11 +4237,11 @@
                       <a:r>
                         <a:rPr sz="1000" b="0">
                           <a:solidFill>
-                            <a:srgbClr val="B3261E"/>
-                          </a:solidFill>
-                          <a:latin typeface="Calibri"/>
-                        </a:rPr>
-                        <a:t>-0.83%</a:t>
+                            <a:srgbClr val="1F2A37"/>
+                          </a:solidFill>
+                          <a:latin typeface="Calibri"/>
+                        </a:rPr>
+                        <a:t>+0.00%</a:t>
                       </a:r>
                     </a:p>
                   </a:txBody>
@@ -4264,7 +4264,7 @@
                           </a:solidFill>
                           <a:latin typeface="Calibri"/>
                         </a:rPr>
-                        <a:t>-33.3%</a:t>
+                        <a:t>-33.1%</a:t>
                       </a:r>
                     </a:p>
                   </a:txBody>
@@ -4310,7 +4310,7 @@
                           </a:solidFill>
                           <a:latin typeface="Calibri"/>
                         </a:rPr>
-                        <a:t>16.9</a:t>
+                        <a:t>17.0</a:t>
                       </a:r>
                     </a:p>
                   </a:txBody>
@@ -4358,7 +4358,7 @@
                           </a:solidFill>
                           <a:latin typeface="Calibri"/>
                         </a:rPr>
-                        <a:t>3,858</a:t>
+                        <a:t>3,876</a:t>
                       </a:r>
                     </a:p>
                   </a:txBody>
@@ -4377,11 +4377,34 @@
                       <a:r>
                         <a:rPr sz="1000" b="0">
                           <a:solidFill>
+                            <a:srgbClr val="0B7A3B"/>
+                          </a:solidFill>
+                          <a:latin typeface="Calibri"/>
+                        </a:rPr>
+                        <a:t>+0.46%</a:t>
+                      </a:r>
+                    </a:p>
+                  </a:txBody>
+                  <a:tcPr>
+                    <a:solidFill>
+                      <a:srgbClr val="FFFFFF"/>
+                    </a:solidFill>
+                  </a:tcPr>
+                </a:tc>
+                <a:tc>
+                  <a:txBody>
+                    <a:bodyPr/>
+                    <a:lstStyle/>
+                    <a:p>
+                      <a:pPr algn="r"/>
+                      <a:r>
+                        <a:rPr sz="1000" b="0">
+                          <a:solidFill>
                             <a:srgbClr val="B3261E"/>
                           </a:solidFill>
                           <a:latin typeface="Calibri"/>
                         </a:rPr>
-                        <a:t>-1.82%</a:t>
+                        <a:t>-0.23%</a:t>
                       </a:r>
                     </a:p>
                   </a:txBody>
@@ -4400,11 +4423,11 @@
                       <a:r>
                         <a:rPr sz="1000" b="0">
                           <a:solidFill>
-                            <a:srgbClr val="0B7A3B"/>
-                          </a:solidFill>
-                          <a:latin typeface="Calibri"/>
-                        </a:rPr>
-                        <a:t>+0.58%</a:t>
+                            <a:srgbClr val="B3261E"/>
+                          </a:solidFill>
+                          <a:latin typeface="Calibri"/>
+                        </a:rPr>
+                        <a:t>-3.74%</a:t>
                       </a:r>
                     </a:p>
                   </a:txBody>
@@ -4423,11 +4446,11 @@
                       <a:r>
                         <a:rPr sz="1000" b="0">
                           <a:solidFill>
-                            <a:srgbClr val="B3261E"/>
-                          </a:solidFill>
-                          <a:latin typeface="Calibri"/>
-                        </a:rPr>
-                        <a:t>-4.45%</a:t>
+                            <a:srgbClr val="1F2A37"/>
+                          </a:solidFill>
+                          <a:latin typeface="Calibri"/>
+                        </a:rPr>
+                        <a:t>-11.4%</a:t>
                       </a:r>
                     </a:p>
                   </a:txBody>
@@ -4450,7 +4473,7 @@
                           </a:solidFill>
                           <a:latin typeface="Calibri"/>
                         </a:rPr>
-                        <a:t>-11.8%</a:t>
+                        <a:t>16%</a:t>
                       </a:r>
                     </a:p>
                   </a:txBody>
@@ -4473,30 +4496,7 @@
                           </a:solidFill>
                           <a:latin typeface="Calibri"/>
                         </a:rPr>
-                        <a:t>16%</a:t>
-                      </a:r>
-                    </a:p>
-                  </a:txBody>
-                  <a:tcPr>
-                    <a:solidFill>
-                      <a:srgbClr val="FFFFFF"/>
-                    </a:solidFill>
-                  </a:tcPr>
-                </a:tc>
-                <a:tc>
-                  <a:txBody>
-                    <a:bodyPr/>
-                    <a:lstStyle/>
-                    <a:p>
-                      <a:pPr algn="r"/>
-                      <a:r>
-                        <a:rPr sz="1000" b="0">
-                          <a:solidFill>
-                            <a:srgbClr val="1F2A37"/>
-                          </a:solidFill>
-                          <a:latin typeface="Calibri"/>
-                        </a:rPr>
-                        <a:t>32.0</a:t>
+                        <a:t>32.2</a:t>
                       </a:r>
                     </a:p>
                   </a:txBody>
@@ -4544,7 +4544,7 @@
                           </a:solidFill>
                           <a:latin typeface="Calibri"/>
                         </a:rPr>
-                        <a:t>1,219</a:t>
+                        <a:t>1,226</a:t>
                       </a:r>
                     </a:p>
                   </a:txBody>
@@ -4563,11 +4563,34 @@
                       <a:r>
                         <a:rPr sz="1000" b="0">
                           <a:solidFill>
+                            <a:srgbClr val="0B7A3B"/>
+                          </a:solidFill>
+                          <a:latin typeface="Calibri"/>
+                        </a:rPr>
+                        <a:t>+0.56%</a:t>
+                      </a:r>
+                    </a:p>
+                  </a:txBody>
+                  <a:tcPr>
+                    <a:solidFill>
+                      <a:srgbClr val="F3F5F7"/>
+                    </a:solidFill>
+                  </a:tcPr>
+                </a:tc>
+                <a:tc>
+                  <a:txBody>
+                    <a:bodyPr/>
+                    <a:lstStyle/>
+                    <a:p>
+                      <a:pPr algn="r"/>
+                      <a:r>
+                        <a:rPr sz="1000" b="0">
+                          <a:solidFill>
                             <a:srgbClr val="B3261E"/>
                           </a:solidFill>
                           <a:latin typeface="Calibri"/>
                         </a:rPr>
-                        <a:t>-2.31%</a:t>
+                        <a:t>-0.03%</a:t>
                       </a:r>
                     </a:p>
                   </a:txBody>
@@ -4590,7 +4613,7 @@
                           </a:solidFill>
                           <a:latin typeface="Calibri"/>
                         </a:rPr>
-                        <a:t>-1.99%</a:t>
+                        <a:t>-4.38%</a:t>
                       </a:r>
                     </a:p>
                   </a:txBody>
@@ -4609,11 +4632,11 @@
                       <a:r>
                         <a:rPr sz="1000" b="0">
                           <a:solidFill>
-                            <a:srgbClr val="B3261E"/>
-                          </a:solidFill>
-                          <a:latin typeface="Calibri"/>
-                        </a:rPr>
-                        <a:t>-6.07%</a:t>
+                            <a:srgbClr val="1F2A37"/>
+                          </a:solidFill>
+                          <a:latin typeface="Calibri"/>
+                        </a:rPr>
+                        <a:t>-22.6%</a:t>
                       </a:r>
                     </a:p>
                   </a:txBody>
@@ -4636,7 +4659,7 @@
                           </a:solidFill>
                           <a:latin typeface="Calibri"/>
                         </a:rPr>
-                        <a:t>-23.1%</a:t>
+                        <a:t>17%</a:t>
                       </a:r>
                     </a:p>
                   </a:txBody>
@@ -4659,30 +4682,7 @@
                           </a:solidFill>
                           <a:latin typeface="Calibri"/>
                         </a:rPr>
-                        <a:t>17%</a:t>
-                      </a:r>
-                    </a:p>
-                  </a:txBody>
-                  <a:tcPr>
-                    <a:solidFill>
-                      <a:srgbClr val="F3F5F7"/>
-                    </a:solidFill>
-                  </a:tcPr>
-                </a:tc>
-                <a:tc>
-                  <a:txBody>
-                    <a:bodyPr/>
-                    <a:lstStyle/>
-                    <a:p>
-                      <a:pPr algn="r"/>
-                      <a:r>
-                        <a:rPr sz="1000" b="0">
-                          <a:solidFill>
-                            <a:srgbClr val="1F2A37"/>
-                          </a:solidFill>
-                          <a:latin typeface="Calibri"/>
-                        </a:rPr>
-                        <a:t>22.1</a:t>
+                        <a:t>22.2</a:t>
                       </a:r>
                     </a:p>
                   </a:txBody>
@@ -4730,7 +4730,7 @@
                           </a:solidFill>
                           <a:latin typeface="Calibri"/>
                         </a:rPr>
-                        <a:t>2,087</a:t>
+                        <a:t>2,082</a:t>
                       </a:r>
                     </a:p>
                   </a:txBody>
@@ -4753,7 +4753,7 @@
                           </a:solidFill>
                           <a:latin typeface="Calibri"/>
                         </a:rPr>
-                        <a:t>-0.12%</a:t>
+                        <a:t>-0.24%</a:t>
                       </a:r>
                     </a:p>
                   </a:txBody>
@@ -4776,7 +4776,7 @@
                           </a:solidFill>
                           <a:latin typeface="Calibri"/>
                         </a:rPr>
-                        <a:t>-4.70%</a:t>
+                        <a:t>-1.09%</a:t>
                       </a:r>
                     </a:p>
                   </a:txBody>
@@ -4799,7 +4799,7 @@
                           </a:solidFill>
                           <a:latin typeface="Calibri"/>
                         </a:rPr>
-                        <a:t>-8.06%</a:t>
+                        <a:t>-7.40%</a:t>
                       </a:r>
                     </a:p>
                   </a:txBody>
@@ -4822,7 +4822,7 @@
                           </a:solidFill>
                           <a:latin typeface="Calibri"/>
                         </a:rPr>
-                        <a:t>-34.9%</a:t>
+                        <a:t>-35.0%</a:t>
                       </a:r>
                     </a:p>
                   </a:txBody>
@@ -4868,7 +4868,7 @@
                           </a:solidFill>
                           <a:latin typeface="Calibri"/>
                         </a:rPr>
-                        <a:t>15.2</a:t>
+                        <a:t>15.1</a:t>
                       </a:r>
                     </a:p>
                   </a:txBody>
@@ -4952,7 +4952,7 @@
                 </a:solidFill>
                 <a:latin typeface="Calibri"/>
               </a:rPr>
-              <a:t>Breadth was risk-off: 0 of 8 names advanced on the day.</a:t>
+              <a:t>Breadth was mixed: 4 of 8 names advanced on the day.</a:t>
             </a:r>
           </a:p>
           <a:p>
@@ -4968,7 +4968,7 @@
                 </a:solidFill>
                 <a:latin typeface="Calibri"/>
               </a:rPr>
-              <a:t>•  Best performer on the day: TCS.NS at -0.12%.</a:t>
+              <a:t>•  Best performer on the day: HDFCBANK.NS at +0.92%.</a:t>
             </a:r>
           </a:p>
           <a:p>
@@ -4984,7 +4984,7 @@
                 </a:solidFill>
                 <a:latin typeface="Calibri"/>
               </a:rPr>
-              <a:t>•  Weakest on the day: RELIANCE.NS at -2.31%.</a:t>
+              <a:t>•  Weakest on the day: INFY.NS at -1.41%.</a:t>
             </a:r>
           </a:p>
           <a:p>
@@ -5000,7 +5000,7 @@
                 </a:solidFill>
                 <a:latin typeface="Calibri"/>
               </a:rPr>
-              <a:t>•  Median one-day move across the watchlist: -0.96%.</a:t>
+              <a:t>•  Median one-day move across the watchlist: +0.07%.</a:t>
             </a:r>
           </a:p>
           <a:p>
@@ -5016,7 +5016,7 @@
                 </a:solidFill>
                 <a:latin typeface="Calibri"/>
               </a:rPr>
-              <a:t>•  INFY.NS sits furthest below its 52-week high, at -38.7%.</a:t>
+              <a:t>•  INFY.NS sits furthest below its 52-week high, at -39.5%.</a:t>
             </a:r>
           </a:p>
           <a:p>
@@ -5048,7 +5048,7 @@
                 </a:solidFill>
                 <a:latin typeface="Calibri"/>
               </a:rPr>
-              <a:t>•  Highest 30-day realised volatility: INFY.NS at 27.0% annualised.</a:t>
+              <a:t>•  Highest 30-day realised volatility: INFY.NS at 27.2% annualised.</a:t>
             </a:r>
           </a:p>
           <a:p>
@@ -5064,7 +5064,7 @@
                 </a:solidFill>
                 <a:latin typeface="Calibri"/>
               </a:rPr>
-              <a:t>•  60 headlines collected, 4 tagged to a watchlist name by substring match (unverified).</a:t>
+              <a:t>•  60 headlines collected, 1 tagged to a watchlist name by substring match (unverified).</a:t>
             </a:r>
           </a:p>
           <a:p>

--- a/public/deskbrief.pptx
+++ b/public/deskbrief.pptx
@@ -3128,7 +3128,7 @@
                 </a:solidFill>
                 <a:latin typeface="Calibri"/>
               </a:rPr>
-              <a:t>8 names  |  generated 25 Sep 2026 17:24  |  source: Yahoo Finance via yfinance, Indian financial RSS</a:t>
+              <a:t>8 names  |  generated 28 Sep 2026 19:46  |  source: Yahoo Finance via yfinance, Indian financial RSS</a:t>
             </a:r>
           </a:p>
         </p:txBody>
@@ -3566,7 +3566,7 @@
                           </a:solidFill>
                           <a:latin typeface="Calibri"/>
                         </a:rPr>
-                        <a:t>38.1</a:t>
+                        <a:t>37.0</a:t>
                       </a:r>
                     </a:p>
                   </a:txBody>
@@ -3752,7 +3752,7 @@
                           </a:solidFill>
                           <a:latin typeface="Calibri"/>
                         </a:rPr>
-                        <a:t>16.1</a:t>
+                        <a:t>15.7</a:t>
                       </a:r>
                     </a:p>
                   </a:txBody>
@@ -3938,7 +3938,7 @@
                           </a:solidFill>
                           <a:latin typeface="Calibri"/>
                         </a:rPr>
-                        <a:t>17.2</a:t>
+                        <a:t>16.8</a:t>
                       </a:r>
                     </a:p>
                   </a:txBody>
@@ -4310,7 +4310,7 @@
                           </a:solidFill>
                           <a:latin typeface="Calibri"/>
                         </a:rPr>
-                        <a:t>17.0</a:t>
+                        <a:t>16.7</a:t>
                       </a:r>
                     </a:p>
                   </a:txBody>
@@ -4496,7 +4496,7 @@
                           </a:solidFill>
                           <a:latin typeface="Calibri"/>
                         </a:rPr>
-                        <a:t>32.2</a:t>
+                        <a:t>31.2</a:t>
                       </a:r>
                     </a:p>
                   </a:txBody>
@@ -4682,7 +4682,7 @@
                           </a:solidFill>
                           <a:latin typeface="Calibri"/>
                         </a:rPr>
-                        <a:t>22.2</a:t>
+                        <a:t>21.7</a:t>
                       </a:r>
                     </a:p>
                   </a:txBody>
@@ -4868,7 +4868,7 @@
                           </a:solidFill>
                           <a:latin typeface="Calibri"/>
                         </a:rPr>
-                        <a:t>15.1</a:t>
+                        <a:t>15.0</a:t>
                       </a:r>
                     </a:p>
                   </a:txBody>
@@ -5064,7 +5064,7 @@
                 </a:solidFill>
                 <a:latin typeface="Calibri"/>
               </a:rPr>
-              <a:t>•  60 headlines collected, 1 tagged to a watchlist name by substring match (unverified).</a:t>
+              <a:t>•  60 headlines collected, 3 tagged to a watchlist name by substring match (unverified).</a:t>
             </a:r>
           </a:p>
           <a:p>

--- a/public/deskbrief.pptx
+++ b/public/deskbrief.pptx
@@ -3128,7 +3128,7 @@
                 </a:solidFill>
                 <a:latin typeface="Calibri"/>
               </a:rPr>
-              <a:t>8 names  |  generated 28 Sep 2026 19:46  |  source: Yahoo Finance via yfinance, Indian financial RSS</a:t>
+              <a:t>8 names  |  generated 29 Sep 2026 18:10  |  source: Yahoo Finance via yfinance, Indian financial RSS</a:t>
             </a:r>
           </a:p>
         </p:txBody>
@@ -3428,7 +3428,7 @@
                           </a:solidFill>
                           <a:latin typeface="Calibri"/>
                         </a:rPr>
-                        <a:t>1,785</a:t>
+                        <a:t>1,771</a:t>
                       </a:r>
                     </a:p>
                   </a:txBody>
@@ -3451,7 +3451,7 @@
                           </a:solidFill>
                           <a:latin typeface="Calibri"/>
                         </a:rPr>
-                        <a:t>-0.58%</a:t>
+                        <a:t>-0.01%</a:t>
                       </a:r>
                     </a:p>
                   </a:txBody>
@@ -3474,7 +3474,7 @@
                           </a:solidFill>
                           <a:latin typeface="Calibri"/>
                         </a:rPr>
-                        <a:t>-5.70%</a:t>
+                        <a:t>-2.53%</a:t>
                       </a:r>
                     </a:p>
                   </a:txBody>
@@ -3497,7 +3497,7 @@
                           </a:solidFill>
                           <a:latin typeface="Calibri"/>
                         </a:rPr>
-                        <a:t>-4.95%</a:t>
+                        <a:t>-2.25%</a:t>
                       </a:r>
                     </a:p>
                   </a:txBody>
@@ -3520,7 +3520,7 @@
                           </a:solidFill>
                           <a:latin typeface="Calibri"/>
                         </a:rPr>
-                        <a:t>-16.4%</a:t>
+                        <a:t>-17.1%</a:t>
                       </a:r>
                     </a:p>
                   </a:txBody>
@@ -3566,7 +3566,7 @@
                           </a:solidFill>
                           <a:latin typeface="Calibri"/>
                         </a:rPr>
-                        <a:t>37.0</a:t>
+                        <a:t>37.3</a:t>
                       </a:r>
                     </a:p>
                   </a:txBody>
@@ -3614,7 +3614,7 @@
                           </a:solidFill>
                           <a:latin typeface="Calibri"/>
                         </a:rPr>
-                        <a:t>736</a:t>
+                        <a:t>723</a:t>
                       </a:r>
                     </a:p>
                   </a:txBody>
@@ -3637,7 +3637,7 @@
                           </a:solidFill>
                           <a:latin typeface="Calibri"/>
                         </a:rPr>
-                        <a:t>+0.92%</a:t>
+                        <a:t>+0.51%</a:t>
                       </a:r>
                     </a:p>
                   </a:txBody>
@@ -3656,11 +3656,34 @@
                       <a:r>
                         <a:rPr sz="1000" b="0">
                           <a:solidFill>
+                            <a:srgbClr val="B3261E"/>
+                          </a:solidFill>
+                          <a:latin typeface="Calibri"/>
+                        </a:rPr>
+                        <a:t>-2.15%</a:t>
+                      </a:r>
+                    </a:p>
+                  </a:txBody>
+                  <a:tcPr>
+                    <a:solidFill>
+                      <a:srgbClr val="FFFFFF"/>
+                    </a:solidFill>
+                  </a:tcPr>
+                </a:tc>
+                <a:tc>
+                  <a:txBody>
+                    <a:bodyPr/>
+                    <a:lstStyle/>
+                    <a:p>
+                      <a:pPr algn="r"/>
+                      <a:r>
+                        <a:rPr sz="1000" b="0">
+                          <a:solidFill>
                             <a:srgbClr val="0B7A3B"/>
                           </a:solidFill>
                           <a:latin typeface="Calibri"/>
                         </a:rPr>
-                        <a:t>+0.63%</a:t>
+                        <a:t>+1.93%</a:t>
                       </a:r>
                     </a:p>
                   </a:txBody>
@@ -3679,11 +3702,11 @@
                       <a:r>
                         <a:rPr sz="1000" b="0">
                           <a:solidFill>
-                            <a:srgbClr val="0B7A3B"/>
-                          </a:solidFill>
-                          <a:latin typeface="Calibri"/>
-                        </a:rPr>
-                        <a:t>+3.46%</a:t>
+                            <a:srgbClr val="1F2A37"/>
+                          </a:solidFill>
+                          <a:latin typeface="Calibri"/>
+                        </a:rPr>
+                        <a:t>-27.2%</a:t>
                       </a:r>
                     </a:p>
                   </a:txBody>
@@ -3706,7 +3729,7 @@
                           </a:solidFill>
                           <a:latin typeface="Calibri"/>
                         </a:rPr>
-                        <a:t>-25.9%</a:t>
+                        <a:t>20%</a:t>
                       </a:r>
                     </a:p>
                   </a:txBody>
@@ -3729,30 +3752,7 @@
                           </a:solidFill>
                           <a:latin typeface="Calibri"/>
                         </a:rPr>
-                        <a:t>18%</a:t>
-                      </a:r>
-                    </a:p>
-                  </a:txBody>
-                  <a:tcPr>
-                    <a:solidFill>
-                      <a:srgbClr val="FFFFFF"/>
-                    </a:solidFill>
-                  </a:tcPr>
-                </a:tc>
-                <a:tc>
-                  <a:txBody>
-                    <a:bodyPr/>
-                    <a:lstStyle/>
-                    <a:p>
-                      <a:pPr algn="r"/>
-                      <a:r>
-                        <a:rPr sz="1000" b="0">
-                          <a:solidFill>
-                            <a:srgbClr val="1F2A37"/>
-                          </a:solidFill>
-                          <a:latin typeface="Calibri"/>
-                        </a:rPr>
-                        <a:t>15.7</a:t>
+                        <a:t>15.8</a:t>
                       </a:r>
                     </a:p>
                   </a:txBody>
@@ -3800,7 +3800,7 @@
                           </a:solidFill>
                           <a:latin typeface="Calibri"/>
                         </a:rPr>
-                        <a:t>1,327</a:t>
+                        <a:t>1,292</a:t>
                       </a:r>
                     </a:p>
                   </a:txBody>
@@ -3823,7 +3823,7 @@
                           </a:solidFill>
                           <a:latin typeface="Calibri"/>
                         </a:rPr>
-                        <a:t>-0.58%</a:t>
+                        <a:t>-0.75%</a:t>
                       </a:r>
                     </a:p>
                   </a:txBody>
@@ -3846,7 +3846,7 @@
                           </a:solidFill>
                           <a:latin typeface="Calibri"/>
                         </a:rPr>
-                        <a:t>-0.90%</a:t>
+                        <a:t>-3.54%</a:t>
                       </a:r>
                     </a:p>
                   </a:txBody>
@@ -3869,7 +3869,7 @@
                           </a:solidFill>
                           <a:latin typeface="Calibri"/>
                         </a:rPr>
-                        <a:t>-8.05%</a:t>
+                        <a:t>-11.13%</a:t>
                       </a:r>
                     </a:p>
                   </a:txBody>
@@ -3892,7 +3892,7 @@
                           </a:solidFill>
                           <a:latin typeface="Calibri"/>
                         </a:rPr>
-                        <a:t>-9.1%</a:t>
+                        <a:t>-11.5%</a:t>
                       </a:r>
                     </a:p>
                   </a:txBody>
@@ -3915,7 +3915,7 @@
                           </a:solidFill>
                           <a:latin typeface="Calibri"/>
                         </a:rPr>
-                        <a:t>14%</a:t>
+                        <a:t>15%</a:t>
                       </a:r>
                     </a:p>
                   </a:txBody>
@@ -3938,7 +3938,7 @@
                           </a:solidFill>
                           <a:latin typeface="Calibri"/>
                         </a:rPr>
-                        <a:t>16.8</a:t>
+                        <a:t>16.7</a:t>
                       </a:r>
                     </a:p>
                   </a:txBody>
@@ -3986,7 +3986,7 @@
                           </a:solidFill>
                           <a:latin typeface="Calibri"/>
                         </a:rPr>
-                        <a:t>1,000</a:t>
+                        <a:t>1,015</a:t>
                       </a:r>
                     </a:p>
                   </a:txBody>
@@ -4005,11 +4005,34 @@
                       <a:r>
                         <a:rPr sz="1000" b="0">
                           <a:solidFill>
+                            <a:srgbClr val="0B7A3B"/>
+                          </a:solidFill>
+                          <a:latin typeface="Calibri"/>
+                        </a:rPr>
+                        <a:t>+1.22%</a:t>
+                      </a:r>
+                    </a:p>
+                  </a:txBody>
+                  <a:tcPr>
+                    <a:solidFill>
+                      <a:srgbClr val="FFFFFF"/>
+                    </a:solidFill>
+                  </a:tcPr>
+                </a:tc>
+                <a:tc>
+                  <a:txBody>
+                    <a:bodyPr/>
+                    <a:lstStyle/>
+                    <a:p>
+                      <a:pPr algn="r"/>
+                      <a:r>
+                        <a:rPr sz="1000" b="0">
+                          <a:solidFill>
                             <a:srgbClr val="B3261E"/>
                           </a:solidFill>
                           <a:latin typeface="Calibri"/>
                         </a:rPr>
-                        <a:t>-1.41%</a:t>
+                        <a:t>-1.36%</a:t>
                       </a:r>
                     </a:p>
                   </a:txBody>
@@ -4032,7 +4055,7 @@
                           </a:solidFill>
                           <a:latin typeface="Calibri"/>
                         </a:rPr>
-                        <a:t>-4.87%</a:t>
+                        <a:t>-10.44%</a:t>
                       </a:r>
                     </a:p>
                   </a:txBody>
@@ -4051,11 +4074,11 @@
                       <a:r>
                         <a:rPr sz="1000" b="0">
                           <a:solidFill>
-                            <a:srgbClr val="B3261E"/>
-                          </a:solidFill>
-                          <a:latin typeface="Calibri"/>
-                        </a:rPr>
-                        <a:t>-9.96%</a:t>
+                            <a:srgbClr val="1F2A37"/>
+                          </a:solidFill>
+                          <a:latin typeface="Calibri"/>
+                        </a:rPr>
+                        <a:t>-38.6%</a:t>
                       </a:r>
                     </a:p>
                   </a:txBody>
@@ -4078,7 +4101,7 @@
                           </a:solidFill>
                           <a:latin typeface="Calibri"/>
                         </a:rPr>
-                        <a:t>-39.5%</a:t>
+                        <a:t>26%</a:t>
                       </a:r>
                     </a:p>
                   </a:txBody>
@@ -4101,30 +4124,7 @@
                           </a:solidFill>
                           <a:latin typeface="Calibri"/>
                         </a:rPr>
-                        <a:t>27%</a:t>
-                      </a:r>
-                    </a:p>
-                  </a:txBody>
-                  <a:tcPr>
-                    <a:solidFill>
-                      <a:srgbClr val="FFFFFF"/>
-                    </a:solidFill>
-                  </a:tcPr>
-                </a:tc>
-                <a:tc>
-                  <a:txBody>
-                    <a:bodyPr/>
-                    <a:lstStyle/>
-                    <a:p>
-                      <a:pPr algn="r"/>
-                      <a:r>
-                        <a:rPr sz="1000" b="0">
-                          <a:solidFill>
-                            <a:srgbClr val="1F2A37"/>
-                          </a:solidFill>
-                          <a:latin typeface="Calibri"/>
-                        </a:rPr>
-                        <a:t>12.9</a:t>
+                        <a:t>13.1</a:t>
                       </a:r>
                     </a:p>
                   </a:txBody>
@@ -4172,7 +4172,7 @@
                           </a:solidFill>
                           <a:latin typeface="Calibri"/>
                         </a:rPr>
-                        <a:t>269</a:t>
+                        <a:t>265</a:t>
                       </a:r>
                     </a:p>
                   </a:txBody>
@@ -4191,11 +4191,57 @@
                       <a:r>
                         <a:rPr sz="1000" b="0">
                           <a:solidFill>
+                            <a:srgbClr val="B3261E"/>
+                          </a:solidFill>
+                          <a:latin typeface="Calibri"/>
+                        </a:rPr>
+                        <a:t>-0.04%</a:t>
+                      </a:r>
+                    </a:p>
+                  </a:txBody>
+                  <a:tcPr>
+                    <a:solidFill>
+                      <a:srgbClr val="F3F5F7"/>
+                    </a:solidFill>
+                  </a:tcPr>
+                </a:tc>
+                <a:tc>
+                  <a:txBody>
+                    <a:bodyPr/>
+                    <a:lstStyle/>
+                    <a:p>
+                      <a:pPr algn="r"/>
+                      <a:r>
+                        <a:rPr sz="1000" b="0">
+                          <a:solidFill>
+                            <a:srgbClr val="B3261E"/>
+                          </a:solidFill>
+                          <a:latin typeface="Calibri"/>
+                        </a:rPr>
+                        <a:t>-0.26%</a:t>
+                      </a:r>
+                    </a:p>
+                  </a:txBody>
+                  <a:tcPr>
+                    <a:solidFill>
+                      <a:srgbClr val="F3F5F7"/>
+                    </a:solidFill>
+                  </a:tcPr>
+                </a:tc>
+                <a:tc>
+                  <a:txBody>
+                    <a:bodyPr/>
+                    <a:lstStyle/>
+                    <a:p>
+                      <a:pPr algn="r"/>
+                      <a:r>
+                        <a:rPr sz="1000" b="0">
+                          <a:solidFill>
                             <a:srgbClr val="0B7A3B"/>
                           </a:solidFill>
                           <a:latin typeface="Calibri"/>
                         </a:rPr>
-                        <a:t>+0.37%</a:t>
+                        <a:t>+3.76%</a:t>
                       </a:r>
                     </a:p>
                   </a:txBody>
@@ -4214,11 +4260,11 @@
                       <a:r>
                         <a:rPr sz="1000" b="0">
                           <a:solidFill>
-                            <a:srgbClr val="0B7A3B"/>
-                          </a:solidFill>
-                          <a:latin typeface="Calibri"/>
-                        </a:rPr>
-                        <a:t>+2.55%</a:t>
+                            <a:srgbClr val="1F2A37"/>
+                          </a:solidFill>
+                          <a:latin typeface="Calibri"/>
+                        </a:rPr>
+                        <a:t>-34.1%</a:t>
                       </a:r>
                     </a:p>
                   </a:txBody>
@@ -4241,53 +4287,7 @@
                           </a:solidFill>
                           <a:latin typeface="Calibri"/>
                         </a:rPr>
-                        <a:t>+0.00%</a:t>
-                      </a:r>
-                    </a:p>
-                  </a:txBody>
-                  <a:tcPr>
-                    <a:solidFill>
-                      <a:srgbClr val="F3F5F7"/>
-                    </a:solidFill>
-                  </a:tcPr>
-                </a:tc>
-                <a:tc>
-                  <a:txBody>
-                    <a:bodyPr/>
-                    <a:lstStyle/>
-                    <a:p>
-                      <a:pPr algn="r"/>
-                      <a:r>
-                        <a:rPr sz="1000" b="0">
-                          <a:solidFill>
-                            <a:srgbClr val="1F2A37"/>
-                          </a:solidFill>
-                          <a:latin typeface="Calibri"/>
-                        </a:rPr>
-                        <a:t>-33.1%</a:t>
-                      </a:r>
-                    </a:p>
-                  </a:txBody>
-                  <a:tcPr>
-                    <a:solidFill>
-                      <a:srgbClr val="F3F5F7"/>
-                    </a:solidFill>
-                  </a:tcPr>
-                </a:tc>
-                <a:tc>
-                  <a:txBody>
-                    <a:bodyPr/>
-                    <a:lstStyle/>
-                    <a:p>
-                      <a:pPr algn="r"/>
-                      <a:r>
-                        <a:rPr sz="1000" b="0">
-                          <a:solidFill>
-                            <a:srgbClr val="1F2A37"/>
-                          </a:solidFill>
-                          <a:latin typeface="Calibri"/>
-                        </a:rPr>
-                        <a:t>24%</a:t>
+                        <a:t>23%</a:t>
                       </a:r>
                     </a:p>
                   </a:txBody>
@@ -4358,7 +4358,7 @@
                           </a:solidFill>
                           <a:latin typeface="Calibri"/>
                         </a:rPr>
-                        <a:t>3,876</a:t>
+                        <a:t>3,749</a:t>
                       </a:r>
                     </a:p>
                   </a:txBody>
@@ -4377,11 +4377,11 @@
                       <a:r>
                         <a:rPr sz="1000" b="0">
                           <a:solidFill>
-                            <a:srgbClr val="0B7A3B"/>
-                          </a:solidFill>
-                          <a:latin typeface="Calibri"/>
-                        </a:rPr>
-                        <a:t>+0.46%</a:t>
+                            <a:srgbClr val="B3261E"/>
+                          </a:solidFill>
+                          <a:latin typeface="Calibri"/>
+                        </a:rPr>
+                        <a:t>-0.46%</a:t>
                       </a:r>
                     </a:p>
                   </a:txBody>
@@ -4404,7 +4404,7 @@
                           </a:solidFill>
                           <a:latin typeface="Calibri"/>
                         </a:rPr>
-                        <a:t>-0.23%</a:t>
+                        <a:t>-3.03%</a:t>
                       </a:r>
                     </a:p>
                   </a:txBody>
@@ -4427,7 +4427,7 @@
                           </a:solidFill>
                           <a:latin typeface="Calibri"/>
                         </a:rPr>
-                        <a:t>-3.74%</a:t>
+                        <a:t>-7.31%</a:t>
                       </a:r>
                     </a:p>
                   </a:txBody>
@@ -4450,7 +4450,7 @@
                           </a:solidFill>
                           <a:latin typeface="Calibri"/>
                         </a:rPr>
-                        <a:t>-11.4%</a:t>
+                        <a:t>-14.3%</a:t>
                       </a:r>
                     </a:p>
                   </a:txBody>
@@ -4473,7 +4473,7 @@
                           </a:solidFill>
                           <a:latin typeface="Calibri"/>
                         </a:rPr>
-                        <a:t>16%</a:t>
+                        <a:t>17%</a:t>
                       </a:r>
                     </a:p>
                   </a:txBody>
@@ -4496,7 +4496,7 @@
                           </a:solidFill>
                           <a:latin typeface="Calibri"/>
                         </a:rPr>
-                        <a:t>31.2</a:t>
+                        <a:t>31.1</a:t>
                       </a:r>
                     </a:p>
                   </a:txBody>
@@ -4544,7 +4544,7 @@
                           </a:solidFill>
                           <a:latin typeface="Calibri"/>
                         </a:rPr>
-                        <a:t>1,226</a:t>
+                        <a:t>1,182</a:t>
                       </a:r>
                     </a:p>
                   </a:txBody>
@@ -4563,11 +4563,11 @@
                       <a:r>
                         <a:rPr sz="1000" b="0">
                           <a:solidFill>
-                            <a:srgbClr val="0B7A3B"/>
-                          </a:solidFill>
-                          <a:latin typeface="Calibri"/>
-                        </a:rPr>
-                        <a:t>+0.56%</a:t>
+                            <a:srgbClr val="B3261E"/>
+                          </a:solidFill>
+                          <a:latin typeface="Calibri"/>
+                        </a:rPr>
+                        <a:t>-1.30%</a:t>
                       </a:r>
                     </a:p>
                   </a:txBody>
@@ -4590,7 +4590,7 @@
                           </a:solidFill>
                           <a:latin typeface="Calibri"/>
                         </a:rPr>
-                        <a:t>-0.03%</a:t>
+                        <a:t>-4.71%</a:t>
                       </a:r>
                     </a:p>
                   </a:txBody>
@@ -4613,7 +4613,7 @@
                           </a:solidFill>
                           <a:latin typeface="Calibri"/>
                         </a:rPr>
-                        <a:t>-4.38%</a:t>
+                        <a:t>-7.44%</a:t>
                       </a:r>
                     </a:p>
                   </a:txBody>
@@ -4636,7 +4636,7 @@
                           </a:solidFill>
                           <a:latin typeface="Calibri"/>
                         </a:rPr>
-                        <a:t>-22.6%</a:t>
+                        <a:t>-25.4%</a:t>
                       </a:r>
                     </a:p>
                   </a:txBody>
@@ -4659,7 +4659,7 @@
                           </a:solidFill>
                           <a:latin typeface="Calibri"/>
                         </a:rPr>
-                        <a:t>17%</a:t>
+                        <a:t>18%</a:t>
                       </a:r>
                     </a:p>
                   </a:txBody>
@@ -4682,7 +4682,7 @@
                           </a:solidFill>
                           <a:latin typeface="Calibri"/>
                         </a:rPr>
-                        <a:t>21.7</a:t>
+                        <a:t>21.4</a:t>
                       </a:r>
                     </a:p>
                   </a:txBody>
@@ -4730,7 +4730,7 @@
                           </a:solidFill>
                           <a:latin typeface="Calibri"/>
                         </a:rPr>
-                        <a:t>2,082</a:t>
+                        <a:t>2,032</a:t>
                       </a:r>
                     </a:p>
                   </a:txBody>
@@ -4753,7 +4753,7 @@
                           </a:solidFill>
                           <a:latin typeface="Calibri"/>
                         </a:rPr>
-                        <a:t>-0.24%</a:t>
+                        <a:t>-1.85%</a:t>
                       </a:r>
                     </a:p>
                   </a:txBody>
@@ -4776,7 +4776,7 @@
                           </a:solidFill>
                           <a:latin typeface="Calibri"/>
                         </a:rPr>
-                        <a:t>-1.09%</a:t>
+                        <a:t>-3.45%</a:t>
                       </a:r>
                     </a:p>
                   </a:txBody>
@@ -4799,7 +4799,7 @@
                           </a:solidFill>
                           <a:latin typeface="Calibri"/>
                         </a:rPr>
-                        <a:t>-7.40%</a:t>
+                        <a:t>-15.29%</a:t>
                       </a:r>
                     </a:p>
                   </a:txBody>
@@ -4822,7 +4822,7 @@
                           </a:solidFill>
                           <a:latin typeface="Calibri"/>
                         </a:rPr>
-                        <a:t>-35.0%</a:t>
+                        <a:t>-36.6%</a:t>
                       </a:r>
                     </a:p>
                   </a:txBody>
@@ -4845,7 +4845,7 @@
                           </a:solidFill>
                           <a:latin typeface="Calibri"/>
                         </a:rPr>
-                        <a:t>25%</a:t>
+                        <a:t>24%</a:t>
                       </a:r>
                     </a:p>
                   </a:txBody>
@@ -4868,7 +4868,7 @@
                           </a:solidFill>
                           <a:latin typeface="Calibri"/>
                         </a:rPr>
-                        <a:t>15.0</a:t>
+                        <a:t>14.8</a:t>
                       </a:r>
                     </a:p>
                   </a:txBody>
@@ -4952,7 +4952,7 @@
                 </a:solidFill>
                 <a:latin typeface="Calibri"/>
               </a:rPr>
-              <a:t>Breadth was mixed: 4 of 8 names advanced on the day.</a:t>
+              <a:t>Breadth was risk-off: 2 of 8 names advanced on the day.</a:t>
             </a:r>
           </a:p>
           <a:p>
@@ -4968,7 +4968,7 @@
                 </a:solidFill>
                 <a:latin typeface="Calibri"/>
               </a:rPr>
-              <a:t>•  Best performer on the day: HDFCBANK.NS at +0.92%.</a:t>
+              <a:t>•  Best performer on the day: INFY.NS at +1.22%.</a:t>
             </a:r>
           </a:p>
           <a:p>
@@ -4984,7 +4984,7 @@
                 </a:solidFill>
                 <a:latin typeface="Calibri"/>
               </a:rPr>
-              <a:t>•  Weakest on the day: INFY.NS at -1.41%.</a:t>
+              <a:t>•  Weakest on the day: TCS.NS at -1.85%.</a:t>
             </a:r>
           </a:p>
           <a:p>
@@ -5000,7 +5000,7 @@
                 </a:solidFill>
                 <a:latin typeface="Calibri"/>
               </a:rPr>
-              <a:t>•  Median one-day move across the watchlist: +0.07%.</a:t>
+              <a:t>•  Median one-day move across the watchlist: -0.25%.</a:t>
             </a:r>
           </a:p>
           <a:p>
@@ -5016,7 +5016,7 @@
                 </a:solidFill>
                 <a:latin typeface="Calibri"/>
               </a:rPr>
-              <a:t>•  INFY.NS sits furthest below its 52-week high, at -39.5%.</a:t>
+              <a:t>•  INFY.NS sits furthest below its 52-week high, at -38.6%.</a:t>
             </a:r>
           </a:p>
           <a:p>
@@ -5048,7 +5048,7 @@
                 </a:solidFill>
                 <a:latin typeface="Calibri"/>
               </a:rPr>
-              <a:t>•  Highest 30-day realised volatility: INFY.NS at 27.2% annualised.</a:t>
+              <a:t>•  Highest 30-day realised volatility: INFY.NS at 26.4% annualised.</a:t>
             </a:r>
           </a:p>
           <a:p>
@@ -5064,7 +5064,7 @@
                 </a:solidFill>
                 <a:latin typeface="Calibri"/>
               </a:rPr>
-              <a:t>•  60 headlines collected, 3 tagged to a watchlist name by substring match (unverified).</a:t>
+              <a:t>•  60 headlines collected, 2 tagged to a watchlist name by substring match (unverified).</a:t>
             </a:r>
           </a:p>
           <a:p>

--- a/public/deskbrief.pptx
+++ b/public/deskbrief.pptx
@@ -3128,7 +3128,7 @@
                 </a:solidFill>
                 <a:latin typeface="Calibri"/>
               </a:rPr>
-              <a:t>8 names  |  generated 29 Sep 2026 18:10  |  source: Yahoo Finance via yfinance, Indian financial RSS</a:t>
+              <a:t>8 names  |  generated 30 Sep 2026 18:03  |  source: Yahoo Finance via yfinance, Indian financial RSS</a:t>
             </a:r>
           </a:p>
         </p:txBody>
@@ -3428,7 +3428,7 @@
                           </a:solidFill>
                           <a:latin typeface="Calibri"/>
                         </a:rPr>
-                        <a:t>1,771</a:t>
+                        <a:t>1,757</a:t>
                       </a:r>
                     </a:p>
                   </a:txBody>
@@ -3451,7 +3451,7 @@
                           </a:solidFill>
                           <a:latin typeface="Calibri"/>
                         </a:rPr>
-                        <a:t>-0.01%</a:t>
+                        <a:t>-0.80%</a:t>
                       </a:r>
                     </a:p>
                   </a:txBody>
@@ -3474,7 +3474,7 @@
                           </a:solidFill>
                           <a:latin typeface="Calibri"/>
                         </a:rPr>
-                        <a:t>-2.53%</a:t>
+                        <a:t>-4.16%</a:t>
                       </a:r>
                     </a:p>
                   </a:txBody>
@@ -3497,7 +3497,7 @@
                           </a:solidFill>
                           <a:latin typeface="Calibri"/>
                         </a:rPr>
-                        <a:t>-2.25%</a:t>
+                        <a:t>-6.40%</a:t>
                       </a:r>
                     </a:p>
                   </a:txBody>
@@ -3520,7 +3520,7 @@
                           </a:solidFill>
                           <a:latin typeface="Calibri"/>
                         </a:rPr>
-                        <a:t>-17.1%</a:t>
+                        <a:t>-17.7%</a:t>
                       </a:r>
                     </a:p>
                   </a:txBody>
@@ -3566,7 +3566,7 @@
                           </a:solidFill>
                           <a:latin typeface="Calibri"/>
                         </a:rPr>
-                        <a:t>37.3</a:t>
+                        <a:t>36.7</a:t>
                       </a:r>
                     </a:p>
                   </a:txBody>
@@ -3614,7 +3614,7 @@
                           </a:solidFill>
                           <a:latin typeface="Calibri"/>
                         </a:rPr>
-                        <a:t>723</a:t>
+                        <a:t>709</a:t>
                       </a:r>
                     </a:p>
                   </a:txBody>
@@ -3633,11 +3633,11 @@
                       <a:r>
                         <a:rPr sz="1000" b="0">
                           <a:solidFill>
-                            <a:srgbClr val="0B7A3B"/>
-                          </a:solidFill>
-                          <a:latin typeface="Calibri"/>
-                        </a:rPr>
-                        <a:t>+0.51%</a:t>
+                            <a:srgbClr val="B3261E"/>
+                          </a:solidFill>
+                          <a:latin typeface="Calibri"/>
+                        </a:rPr>
+                        <a:t>-1.94%</a:t>
                       </a:r>
                     </a:p>
                   </a:txBody>
@@ -3660,7 +3660,7 @@
                           </a:solidFill>
                           <a:latin typeface="Calibri"/>
                         </a:rPr>
-                        <a:t>-2.15%</a:t>
+                        <a:t>-3.87%</a:t>
                       </a:r>
                     </a:p>
                   </a:txBody>
@@ -3679,11 +3679,11 @@
                       <a:r>
                         <a:rPr sz="1000" b="0">
                           <a:solidFill>
-                            <a:srgbClr val="0B7A3B"/>
-                          </a:solidFill>
-                          <a:latin typeface="Calibri"/>
-                        </a:rPr>
-                        <a:t>+1.93%</a:t>
+                            <a:srgbClr val="B3261E"/>
+                          </a:solidFill>
+                          <a:latin typeface="Calibri"/>
+                        </a:rPr>
+                        <a:t>-0.45%</a:t>
                       </a:r>
                     </a:p>
                   </a:txBody>
@@ -3706,7 +3706,7 @@
                           </a:solidFill>
                           <a:latin typeface="Calibri"/>
                         </a:rPr>
-                        <a:t>-27.2%</a:t>
+                        <a:t>-28.6%</a:t>
                       </a:r>
                     </a:p>
                   </a:txBody>
@@ -3752,7 +3752,7 @@
                           </a:solidFill>
                           <a:latin typeface="Calibri"/>
                         </a:rPr>
-                        <a:t>15.8</a:t>
+                        <a:t>15.5</a:t>
                       </a:r>
                     </a:p>
                   </a:txBody>
@@ -3800,7 +3800,7 @@
                           </a:solidFill>
                           <a:latin typeface="Calibri"/>
                         </a:rPr>
-                        <a:t>1,292</a:t>
+                        <a:t>1,322</a:t>
                       </a:r>
                     </a:p>
                   </a:txBody>
@@ -3819,11 +3819,34 @@
                       <a:r>
                         <a:rPr sz="1000" b="0">
                           <a:solidFill>
+                            <a:srgbClr val="0B7A3B"/>
+                          </a:solidFill>
+                          <a:latin typeface="Calibri"/>
+                        </a:rPr>
+                        <a:t>+2.28%</a:t>
+                      </a:r>
+                    </a:p>
+                  </a:txBody>
+                  <a:tcPr>
+                    <a:solidFill>
+                      <a:srgbClr val="F3F5F7"/>
+                    </a:solidFill>
+                  </a:tcPr>
+                </a:tc>
+                <a:tc>
+                  <a:txBody>
+                    <a:bodyPr/>
+                    <a:lstStyle/>
+                    <a:p>
+                      <a:pPr algn="r"/>
+                      <a:r>
+                        <a:rPr sz="1000" b="0">
+                          <a:solidFill>
                             <a:srgbClr val="B3261E"/>
                           </a:solidFill>
                           <a:latin typeface="Calibri"/>
                         </a:rPr>
-                        <a:t>-0.75%</a:t>
+                        <a:t>-1.37%</a:t>
                       </a:r>
                     </a:p>
                   </a:txBody>
@@ -3846,7 +3869,7 @@
                           </a:solidFill>
                           <a:latin typeface="Calibri"/>
                         </a:rPr>
-                        <a:t>-3.54%</a:t>
+                        <a:t>-8.09%</a:t>
                       </a:r>
                     </a:p>
                   </a:txBody>
@@ -3865,11 +3888,11 @@
                       <a:r>
                         <a:rPr sz="1000" b="0">
                           <a:solidFill>
-                            <a:srgbClr val="B3261E"/>
-                          </a:solidFill>
-                          <a:latin typeface="Calibri"/>
-                        </a:rPr>
-                        <a:t>-11.13%</a:t>
+                            <a:srgbClr val="1F2A37"/>
+                          </a:solidFill>
+                          <a:latin typeface="Calibri"/>
+                        </a:rPr>
+                        <a:t>-9.5%</a:t>
                       </a:r>
                     </a:p>
                   </a:txBody>
@@ -3892,7 +3915,7 @@
                           </a:solidFill>
                           <a:latin typeface="Calibri"/>
                         </a:rPr>
-                        <a:t>-11.5%</a:t>
+                        <a:t>16%</a:t>
                       </a:r>
                     </a:p>
                   </a:txBody>
@@ -3915,30 +3938,7 @@
                           </a:solidFill>
                           <a:latin typeface="Calibri"/>
                         </a:rPr>
-                        <a:t>15%</a:t>
-                      </a:r>
-                    </a:p>
-                  </a:txBody>
-                  <a:tcPr>
-                    <a:solidFill>
-                      <a:srgbClr val="F3F5F7"/>
-                    </a:solidFill>
-                  </a:tcPr>
-                </a:tc>
-                <a:tc>
-                  <a:txBody>
-                    <a:bodyPr/>
-                    <a:lstStyle/>
-                    <a:p>
-                      <a:pPr algn="r"/>
-                      <a:r>
-                        <a:rPr sz="1000" b="0">
-                          <a:solidFill>
-                            <a:srgbClr val="1F2A37"/>
-                          </a:solidFill>
-                          <a:latin typeface="Calibri"/>
-                        </a:rPr>
-                        <a:t>16.7</a:t>
+                        <a:t>17.1</a:t>
                       </a:r>
                     </a:p>
                   </a:txBody>
@@ -3986,7 +3986,7 @@
                           </a:solidFill>
                           <a:latin typeface="Calibri"/>
                         </a:rPr>
-                        <a:t>1,015</a:t>
+                        <a:t>994</a:t>
                       </a:r>
                     </a:p>
                   </a:txBody>
@@ -4005,11 +4005,11 @@
                       <a:r>
                         <a:rPr sz="1000" b="0">
                           <a:solidFill>
-                            <a:srgbClr val="0B7A3B"/>
-                          </a:solidFill>
-                          <a:latin typeface="Calibri"/>
-                        </a:rPr>
-                        <a:t>+1.22%</a:t>
+                            <a:srgbClr val="B3261E"/>
+                          </a:solidFill>
+                          <a:latin typeface="Calibri"/>
+                        </a:rPr>
+                        <a:t>-2.10%</a:t>
                       </a:r>
                     </a:p>
                   </a:txBody>
@@ -4032,7 +4032,7 @@
                           </a:solidFill>
                           <a:latin typeface="Calibri"/>
                         </a:rPr>
-                        <a:t>-1.36%</a:t>
+                        <a:t>-2.59%</a:t>
                       </a:r>
                     </a:p>
                   </a:txBody>
@@ -4055,7 +4055,7 @@
                           </a:solidFill>
                           <a:latin typeface="Calibri"/>
                         </a:rPr>
-                        <a:t>-10.44%</a:t>
+                        <a:t>-14.01%</a:t>
                       </a:r>
                     </a:p>
                   </a:txBody>
@@ -4078,7 +4078,7 @@
                           </a:solidFill>
                           <a:latin typeface="Calibri"/>
                         </a:rPr>
-                        <a:t>-38.6%</a:t>
+                        <a:t>-39.9%</a:t>
                       </a:r>
                     </a:p>
                   </a:txBody>
@@ -4101,7 +4101,7 @@
                           </a:solidFill>
                           <a:latin typeface="Calibri"/>
                         </a:rPr>
-                        <a:t>26%</a:t>
+                        <a:t>27%</a:t>
                       </a:r>
                     </a:p>
                   </a:txBody>
@@ -4124,7 +4124,7 @@
                           </a:solidFill>
                           <a:latin typeface="Calibri"/>
                         </a:rPr>
-                        <a:t>13.1</a:t>
+                        <a:t>12.8</a:t>
                       </a:r>
                     </a:p>
                   </a:txBody>
@@ -4172,7 +4172,7 @@
                           </a:solidFill>
                           <a:latin typeface="Calibri"/>
                         </a:rPr>
-                        <a:t>265</a:t>
+                        <a:t>263</a:t>
                       </a:r>
                     </a:p>
                   </a:txBody>
@@ -4195,7 +4195,7 @@
                           </a:solidFill>
                           <a:latin typeface="Calibri"/>
                         </a:rPr>
-                        <a:t>-0.04%</a:t>
+                        <a:t>-0.89%</a:t>
                       </a:r>
                     </a:p>
                   </a:txBody>
@@ -4218,7 +4218,7 @@
                           </a:solidFill>
                           <a:latin typeface="Calibri"/>
                         </a:rPr>
-                        <a:t>-0.26%</a:t>
+                        <a:t>-2.74%</a:t>
                       </a:r>
                     </a:p>
                   </a:txBody>
@@ -4237,11 +4237,11 @@
                       <a:r>
                         <a:rPr sz="1000" b="0">
                           <a:solidFill>
-                            <a:srgbClr val="0B7A3B"/>
-                          </a:solidFill>
-                          <a:latin typeface="Calibri"/>
-                        </a:rPr>
-                        <a:t>+3.76%</a:t>
+                            <a:srgbClr val="B3261E"/>
+                          </a:solidFill>
+                          <a:latin typeface="Calibri"/>
+                        </a:rPr>
+                        <a:t>-1.44%</a:t>
                       </a:r>
                     </a:p>
                   </a:txBody>
@@ -4264,7 +4264,7 @@
                           </a:solidFill>
                           <a:latin typeface="Calibri"/>
                         </a:rPr>
-                        <a:t>-34.1%</a:t>
+                        <a:t>-34.6%</a:t>
                       </a:r>
                     </a:p>
                   </a:txBody>
@@ -4310,7 +4310,7 @@
                           </a:solidFill>
                           <a:latin typeface="Calibri"/>
                         </a:rPr>
-                        <a:t>16.7</a:t>
+                        <a:t>16.6</a:t>
                       </a:r>
                     </a:p>
                   </a:txBody>
@@ -4358,7 +4358,7 @@
                           </a:solidFill>
                           <a:latin typeface="Calibri"/>
                         </a:rPr>
-                        <a:t>3,749</a:t>
+                        <a:t>3,760</a:t>
                       </a:r>
                     </a:p>
                   </a:txBody>
@@ -4377,11 +4377,34 @@
                       <a:r>
                         <a:rPr sz="1000" b="0">
                           <a:solidFill>
+                            <a:srgbClr val="0B7A3B"/>
+                          </a:solidFill>
+                          <a:latin typeface="Calibri"/>
+                        </a:rPr>
+                        <a:t>+0.29%</a:t>
+                      </a:r>
+                    </a:p>
+                  </a:txBody>
+                  <a:tcPr>
+                    <a:solidFill>
+                      <a:srgbClr val="FFFFFF"/>
+                    </a:solidFill>
+                  </a:tcPr>
+                </a:tc>
+                <a:tc>
+                  <a:txBody>
+                    <a:bodyPr/>
+                    <a:lstStyle/>
+                    <a:p>
+                      <a:pPr algn="r"/>
+                      <a:r>
+                        <a:rPr sz="1000" b="0">
+                          <a:solidFill>
                             <a:srgbClr val="B3261E"/>
                           </a:solidFill>
                           <a:latin typeface="Calibri"/>
                         </a:rPr>
-                        <a:t>-0.46%</a:t>
+                        <a:t>-4.32%</a:t>
                       </a:r>
                     </a:p>
                   </a:txBody>
@@ -4404,7 +4427,7 @@
                           </a:solidFill>
                           <a:latin typeface="Calibri"/>
                         </a:rPr>
-                        <a:t>-3.03%</a:t>
+                        <a:t>-5.53%</a:t>
                       </a:r>
                     </a:p>
                   </a:txBody>
@@ -4423,34 +4446,11 @@
                       <a:r>
                         <a:rPr sz="1000" b="0">
                           <a:solidFill>
-                            <a:srgbClr val="B3261E"/>
-                          </a:solidFill>
-                          <a:latin typeface="Calibri"/>
-                        </a:rPr>
-                        <a:t>-7.31%</a:t>
-                      </a:r>
-                    </a:p>
-                  </a:txBody>
-                  <a:tcPr>
-                    <a:solidFill>
-                      <a:srgbClr val="FFFFFF"/>
-                    </a:solidFill>
-                  </a:tcPr>
-                </a:tc>
-                <a:tc>
-                  <a:txBody>
-                    <a:bodyPr/>
-                    <a:lstStyle/>
-                    <a:p>
-                      <a:pPr algn="r"/>
-                      <a:r>
-                        <a:rPr sz="1000" b="0">
-                          <a:solidFill>
                             <a:srgbClr val="1F2A37"/>
                           </a:solidFill>
                           <a:latin typeface="Calibri"/>
                         </a:rPr>
-                        <a:t>-14.3%</a:t>
+                        <a:t>-14.1%</a:t>
                       </a:r>
                     </a:p>
                   </a:txBody>
@@ -4544,7 +4544,7 @@
                           </a:solidFill>
                           <a:latin typeface="Calibri"/>
                         </a:rPr>
-                        <a:t>1,182</a:t>
+                        <a:t>1,187</a:t>
                       </a:r>
                     </a:p>
                   </a:txBody>
@@ -4563,11 +4563,34 @@
                       <a:r>
                         <a:rPr sz="1000" b="0">
                           <a:solidFill>
+                            <a:srgbClr val="0B7A3B"/>
+                          </a:solidFill>
+                          <a:latin typeface="Calibri"/>
+                        </a:rPr>
+                        <a:t>+0.42%</a:t>
+                      </a:r>
+                    </a:p>
+                  </a:txBody>
+                  <a:tcPr>
+                    <a:solidFill>
+                      <a:srgbClr val="F3F5F7"/>
+                    </a:solidFill>
+                  </a:tcPr>
+                </a:tc>
+                <a:tc>
+                  <a:txBody>
+                    <a:bodyPr/>
+                    <a:lstStyle/>
+                    <a:p>
+                      <a:pPr algn="r"/>
+                      <a:r>
+                        <a:rPr sz="1000" b="0">
+                          <a:solidFill>
                             <a:srgbClr val="B3261E"/>
                           </a:solidFill>
                           <a:latin typeface="Calibri"/>
                         </a:rPr>
-                        <a:t>-1.30%</a:t>
+                        <a:t>-4.89%</a:t>
                       </a:r>
                     </a:p>
                   </a:txBody>
@@ -4590,7 +4613,7 @@
                           </a:solidFill>
                           <a:latin typeface="Calibri"/>
                         </a:rPr>
-                        <a:t>-4.71%</a:t>
+                        <a:t>-9.32%</a:t>
                       </a:r>
                     </a:p>
                   </a:txBody>
@@ -4609,11 +4632,11 @@
                       <a:r>
                         <a:rPr sz="1000" b="0">
                           <a:solidFill>
-                            <a:srgbClr val="B3261E"/>
-                          </a:solidFill>
-                          <a:latin typeface="Calibri"/>
-                        </a:rPr>
-                        <a:t>-7.44%</a:t>
+                            <a:srgbClr val="1F2A37"/>
+                          </a:solidFill>
+                          <a:latin typeface="Calibri"/>
+                        </a:rPr>
+                        <a:t>-25.1%</a:t>
                       </a:r>
                     </a:p>
                   </a:txBody>
@@ -4636,7 +4659,7 @@
                           </a:solidFill>
                           <a:latin typeface="Calibri"/>
                         </a:rPr>
-                        <a:t>-25.4%</a:t>
+                        <a:t>18%</a:t>
                       </a:r>
                     </a:p>
                   </a:txBody>
@@ -4659,30 +4682,7 @@
                           </a:solidFill>
                           <a:latin typeface="Calibri"/>
                         </a:rPr>
-                        <a:t>18%</a:t>
-                      </a:r>
-                    </a:p>
-                  </a:txBody>
-                  <a:tcPr>
-                    <a:solidFill>
-                      <a:srgbClr val="F3F5F7"/>
-                    </a:solidFill>
-                  </a:tcPr>
-                </a:tc>
-                <a:tc>
-                  <a:txBody>
-                    <a:bodyPr/>
-                    <a:lstStyle/>
-                    <a:p>
-                      <a:pPr algn="r"/>
-                      <a:r>
-                        <a:rPr sz="1000" b="0">
-                          <a:solidFill>
-                            <a:srgbClr val="1F2A37"/>
-                          </a:solidFill>
-                          <a:latin typeface="Calibri"/>
-                        </a:rPr>
-                        <a:t>21.4</a:t>
+                        <a:t>21.5</a:t>
                       </a:r>
                     </a:p>
                   </a:txBody>
@@ -4730,7 +4730,7 @@
                           </a:solidFill>
                           <a:latin typeface="Calibri"/>
                         </a:rPr>
-                        <a:t>2,032</a:t>
+                        <a:t>2,051</a:t>
                       </a:r>
                     </a:p>
                   </a:txBody>
@@ -4749,11 +4749,34 @@
                       <a:r>
                         <a:rPr sz="1000" b="0">
                           <a:solidFill>
+                            <a:srgbClr val="0B7A3B"/>
+                          </a:solidFill>
+                          <a:latin typeface="Calibri"/>
+                        </a:rPr>
+                        <a:t>+0.90%</a:t>
+                      </a:r>
+                    </a:p>
+                  </a:txBody>
+                  <a:tcPr>
+                    <a:solidFill>
+                      <a:srgbClr val="FFFFFF"/>
+                    </a:solidFill>
+                  </a:tcPr>
+                </a:tc>
+                <a:tc>
+                  <a:txBody>
+                    <a:bodyPr/>
+                    <a:lstStyle/>
+                    <a:p>
+                      <a:pPr algn="r"/>
+                      <a:r>
+                        <a:rPr sz="1000" b="0">
+                          <a:solidFill>
                             <a:srgbClr val="B3261E"/>
                           </a:solidFill>
                           <a:latin typeface="Calibri"/>
                         </a:rPr>
-                        <a:t>-1.85%</a:t>
+                        <a:t>-1.87%</a:t>
                       </a:r>
                     </a:p>
                   </a:txBody>
@@ -4776,7 +4799,7 @@
                           </a:solidFill>
                           <a:latin typeface="Calibri"/>
                         </a:rPr>
-                        <a:t>-3.45%</a:t>
+                        <a:t>-13.44%</a:t>
                       </a:r>
                     </a:p>
                   </a:txBody>
@@ -4795,11 +4818,11 @@
                       <a:r>
                         <a:rPr sz="1000" b="0">
                           <a:solidFill>
-                            <a:srgbClr val="B3261E"/>
-                          </a:solidFill>
-                          <a:latin typeface="Calibri"/>
-                        </a:rPr>
-                        <a:t>-15.29%</a:t>
+                            <a:srgbClr val="1F2A37"/>
+                          </a:solidFill>
+                          <a:latin typeface="Calibri"/>
+                        </a:rPr>
+                        <a:t>-36.0%</a:t>
                       </a:r>
                     </a:p>
                   </a:txBody>
@@ -4822,7 +4845,7 @@
                           </a:solidFill>
                           <a:latin typeface="Calibri"/>
                         </a:rPr>
-                        <a:t>-36.6%</a:t>
+                        <a:t>25%</a:t>
                       </a:r>
                     </a:p>
                   </a:txBody>
@@ -4845,30 +4868,7 @@
                           </a:solidFill>
                           <a:latin typeface="Calibri"/>
                         </a:rPr>
-                        <a:t>24%</a:t>
-                      </a:r>
-                    </a:p>
-                  </a:txBody>
-                  <a:tcPr>
-                    <a:solidFill>
-                      <a:srgbClr val="FFFFFF"/>
-                    </a:solidFill>
-                  </a:tcPr>
-                </a:tc>
-                <a:tc>
-                  <a:txBody>
-                    <a:bodyPr/>
-                    <a:lstStyle/>
-                    <a:p>
-                      <a:pPr algn="r"/>
-                      <a:r>
-                        <a:rPr sz="1000" b="0">
-                          <a:solidFill>
-                            <a:srgbClr val="1F2A37"/>
-                          </a:solidFill>
-                          <a:latin typeface="Calibri"/>
-                        </a:rPr>
-                        <a:t>14.8</a:t>
+                        <a:t>14.9</a:t>
                       </a:r>
                     </a:p>
                   </a:txBody>
@@ -4900,7 +4900,7 @@
         <p:spPr>
           <a:xfrm>
             <a:off x="411480" y="4370832"/>
-            <a:ext cx="7040880" cy="2063354"/>
+            <a:ext cx="7040880" cy="2061863"/>
           </a:xfrm>
           <a:prstGeom prst="rect">
             <a:avLst/>
@@ -4952,7 +4952,7 @@
                 </a:solidFill>
                 <a:latin typeface="Calibri"/>
               </a:rPr>
-              <a:t>Breadth was risk-off: 2 of 8 names advanced on the day.</a:t>
+              <a:t>Breadth was mixed: 4 of 8 names advanced on the day.</a:t>
             </a:r>
           </a:p>
           <a:p>
@@ -4968,7 +4968,7 @@
                 </a:solidFill>
                 <a:latin typeface="Calibri"/>
               </a:rPr>
-              <a:t>•  Best performer on the day: INFY.NS at +1.22%.</a:t>
+              <a:t>•  Best performer on the day: ICICIBANK.NS at +2.28%.</a:t>
             </a:r>
           </a:p>
           <a:p>
@@ -4984,7 +4984,7 @@
                 </a:solidFill>
                 <a:latin typeface="Calibri"/>
               </a:rPr>
-              <a:t>•  Weakest on the day: TCS.NS at -1.85%.</a:t>
+              <a:t>•  Weakest on the day: INFY.NS at -2.10%.</a:t>
             </a:r>
           </a:p>
           <a:p>
@@ -5000,7 +5000,7 @@
                 </a:solidFill>
                 <a:latin typeface="Calibri"/>
               </a:rPr>
-              <a:t>•  Median one-day move across the watchlist: -0.25%.</a:t>
+              <a:t>•  Median one-day move across the watchlist: -0.26%.</a:t>
             </a:r>
           </a:p>
           <a:p>
@@ -5016,7 +5016,7 @@
                 </a:solidFill>
                 <a:latin typeface="Calibri"/>
               </a:rPr>
-              <a:t>•  INFY.NS sits furthest below its 52-week high, at -38.6%.</a:t>
+              <a:t>•  INFY.NS sits furthest below its 52-week high, at -39.9%.</a:t>
             </a:r>
           </a:p>
           <a:p>
@@ -5048,7 +5048,7 @@
                 </a:solidFill>
                 <a:latin typeface="Calibri"/>
               </a:rPr>
-              <a:t>•  Highest 30-day realised volatility: INFY.NS at 26.4% annualised.</a:t>
+              <a:t>•  Highest 30-day realised volatility: INFY.NS at 26.9% annualised.</a:t>
             </a:r>
           </a:p>
           <a:p>
@@ -5064,7 +5064,7 @@
                 </a:solidFill>
                 <a:latin typeface="Calibri"/>
               </a:rPr>
-              <a:t>•  60 headlines collected, 2 tagged to a watchlist name by substring match (unverified).</a:t>
+              <a:t>•  60 headlines collected, 4 tagged to a watchlist name by substring match (unverified).</a:t>
             </a:r>
           </a:p>
           <a:p>

--- a/public/deskbrief.pptx
+++ b/public/deskbrief.pptx
@@ -3128,7 +3128,7 @@
                 </a:solidFill>
                 <a:latin typeface="Calibri"/>
               </a:rPr>
-              <a:t>8 names  |  generated 30 Sep 2026 18:03  |  source: Yahoo Finance via yfinance, Indian financial RSS</a:t>
+              <a:t>8 names  |  generated 01 Oct 2026 18:30  |  source: Yahoo Finance via yfinance, Indian financial RSS</a:t>
             </a:r>
           </a:p>
         </p:txBody>
@@ -3566,7 +3566,7 @@
                           </a:solidFill>
                           <a:latin typeface="Calibri"/>
                         </a:rPr>
-                        <a:t>36.7</a:t>
+                        <a:t>36.4</a:t>
                       </a:r>
                     </a:p>
                   </a:txBody>
@@ -3752,7 +3752,7 @@
                           </a:solidFill>
                           <a:latin typeface="Calibri"/>
                         </a:rPr>
-                        <a:t>15.5</a:t>
+                        <a:t>15.8</a:t>
                       </a:r>
                     </a:p>
                   </a:txBody>
@@ -3938,7 +3938,7 @@
                           </a:solidFill>
                           <a:latin typeface="Calibri"/>
                         </a:rPr>
-                        <a:t>17.1</a:t>
+                        <a:t>16.9</a:t>
                       </a:r>
                     </a:p>
                   </a:txBody>
@@ -4124,7 +4124,7 @@
                           </a:solidFill>
                           <a:latin typeface="Calibri"/>
                         </a:rPr>
-                        <a:t>12.8</a:t>
+                        <a:t>13.3</a:t>
                       </a:r>
                     </a:p>
                   </a:txBody>
@@ -4310,7 +4310,7 @@
                           </a:solidFill>
                           <a:latin typeface="Calibri"/>
                         </a:rPr>
-                        <a:t>16.6</a:t>
+                        <a:t>16.2</a:t>
                       </a:r>
                     </a:p>
                   </a:txBody>
@@ -4496,7 +4496,7 @@
                           </a:solidFill>
                           <a:latin typeface="Calibri"/>
                         </a:rPr>
-                        <a:t>31.1</a:t>
+                        <a:t>30.6</a:t>
                       </a:r>
                     </a:p>
                   </a:txBody>
@@ -4682,7 +4682,7 @@
                           </a:solidFill>
                           <a:latin typeface="Calibri"/>
                         </a:rPr>
-                        <a:t>21.5</a:t>
+                        <a:t>21.2</a:t>
                       </a:r>
                     </a:p>
                   </a:txBody>
@@ -4868,7 +4868,7 @@
                           </a:solidFill>
                           <a:latin typeface="Calibri"/>
                         </a:rPr>
-                        <a:t>14.9</a:t>
+                        <a:t>15.1</a:t>
                       </a:r>
                     </a:p>
                   </a:txBody>
@@ -5064,7 +5064,7 @@
                 </a:solidFill>
                 <a:latin typeface="Calibri"/>
               </a:rPr>
-              <a:t>•  60 headlines collected, 4 tagged to a watchlist name by substring match (unverified).</a:t>
+              <a:t>•  60 headlines collected, 7 tagged to a watchlist name by substring match (unverified).</a:t>
             </a:r>
           </a:p>
           <a:p>

--- a/public/deskbrief.pptx
+++ b/public/deskbrief.pptx
@@ -3128,7 +3128,7 @@
                 </a:solidFill>
                 <a:latin typeface="Calibri"/>
               </a:rPr>
-              <a:t>8 names  |  generated 01 Oct 2026 18:30  |  source: Yahoo Finance via yfinance, Indian financial RSS</a:t>
+              <a:t>8 names  |  generated 02 Oct 2026 17:57  |  source: Yahoo Finance via yfinance, Indian financial RSS</a:t>
             </a:r>
           </a:p>
         </p:txBody>
@@ -3428,7 +3428,7 @@
                           </a:solidFill>
                           <a:latin typeface="Calibri"/>
                         </a:rPr>
-                        <a:t>1,757</a:t>
+                        <a:t>1,741</a:t>
                       </a:r>
                     </a:p>
                   </a:txBody>
@@ -3451,7 +3451,7 @@
                           </a:solidFill>
                           <a:latin typeface="Calibri"/>
                         </a:rPr>
-                        <a:t>-0.80%</a:t>
+                        <a:t>-0.90%</a:t>
                       </a:r>
                     </a:p>
                   </a:txBody>
@@ -3474,7 +3474,7 @@
                           </a:solidFill>
                           <a:latin typeface="Calibri"/>
                         </a:rPr>
-                        <a:t>-4.16%</a:t>
+                        <a:t>-3.05%</a:t>
                       </a:r>
                     </a:p>
                   </a:txBody>
@@ -3497,7 +3497,7 @@
                           </a:solidFill>
                           <a:latin typeface="Calibri"/>
                         </a:rPr>
-                        <a:t>-6.40%</a:t>
+                        <a:t>-6.53%</a:t>
                       </a:r>
                     </a:p>
                   </a:txBody>
@@ -3520,7 +3520,7 @@
                           </a:solidFill>
                           <a:latin typeface="Calibri"/>
                         </a:rPr>
-                        <a:t>-17.7%</a:t>
+                        <a:t>-18.5%</a:t>
                       </a:r>
                     </a:p>
                   </a:txBody>
@@ -3543,7 +3543,7 @@
                           </a:solidFill>
                           <a:latin typeface="Calibri"/>
                         </a:rPr>
-                        <a:t>25%</a:t>
+                        <a:t>24%</a:t>
                       </a:r>
                     </a:p>
                   </a:txBody>
@@ -3614,7 +3614,7 @@
                           </a:solidFill>
                           <a:latin typeface="Calibri"/>
                         </a:rPr>
-                        <a:t>709</a:t>
+                        <a:t>721</a:t>
                       </a:r>
                     </a:p>
                   </a:txBody>
@@ -3633,11 +3633,34 @@
                       <a:r>
                         <a:rPr sz="1000" b="0">
                           <a:solidFill>
+                            <a:srgbClr val="0B7A3B"/>
+                          </a:solidFill>
+                          <a:latin typeface="Calibri"/>
+                        </a:rPr>
+                        <a:t>+1.76%</a:t>
+                      </a:r>
+                    </a:p>
+                  </a:txBody>
+                  <a:tcPr>
+                    <a:solidFill>
+                      <a:srgbClr val="FFFFFF"/>
+                    </a:solidFill>
+                  </a:tcPr>
+                </a:tc>
+                <a:tc>
+                  <a:txBody>
+                    <a:bodyPr/>
+                    <a:lstStyle/>
+                    <a:p>
+                      <a:pPr algn="r"/>
+                      <a:r>
+                        <a:rPr sz="1000" b="0">
+                          <a:solidFill>
                             <a:srgbClr val="B3261E"/>
                           </a:solidFill>
                           <a:latin typeface="Calibri"/>
                         </a:rPr>
-                        <a:t>-1.94%</a:t>
+                        <a:t>-1.06%</a:t>
                       </a:r>
                     </a:p>
                   </a:txBody>
@@ -3656,11 +3679,11 @@
                       <a:r>
                         <a:rPr sz="1000" b="0">
                           <a:solidFill>
-                            <a:srgbClr val="B3261E"/>
-                          </a:solidFill>
-                          <a:latin typeface="Calibri"/>
-                        </a:rPr>
-                        <a:t>-3.87%</a:t>
+                            <a:srgbClr val="0B7A3B"/>
+                          </a:solidFill>
+                          <a:latin typeface="Calibri"/>
+                        </a:rPr>
+                        <a:t>+2.91%</a:t>
                       </a:r>
                     </a:p>
                   </a:txBody>
@@ -3679,11 +3702,11 @@
                       <a:r>
                         <a:rPr sz="1000" b="0">
                           <a:solidFill>
-                            <a:srgbClr val="B3261E"/>
-                          </a:solidFill>
-                          <a:latin typeface="Calibri"/>
-                        </a:rPr>
-                        <a:t>-0.45%</a:t>
+                            <a:srgbClr val="1F2A37"/>
+                          </a:solidFill>
+                          <a:latin typeface="Calibri"/>
+                        </a:rPr>
+                        <a:t>-27.4%</a:t>
                       </a:r>
                     </a:p>
                   </a:txBody>
@@ -3706,30 +3729,7 @@
                           </a:solidFill>
                           <a:latin typeface="Calibri"/>
                         </a:rPr>
-                        <a:t>-28.6%</a:t>
-                      </a:r>
-                    </a:p>
-                  </a:txBody>
-                  <a:tcPr>
-                    <a:solidFill>
-                      <a:srgbClr val="FFFFFF"/>
-                    </a:solidFill>
-                  </a:tcPr>
-                </a:tc>
-                <a:tc>
-                  <a:txBody>
-                    <a:bodyPr/>
-                    <a:lstStyle/>
-                    <a:p>
-                      <a:pPr algn="r"/>
-                      <a:r>
-                        <a:rPr sz="1000" b="0">
-                          <a:solidFill>
-                            <a:srgbClr val="1F2A37"/>
-                          </a:solidFill>
-                          <a:latin typeface="Calibri"/>
-                        </a:rPr>
-                        <a:t>20%</a:t>
+                        <a:t>21%</a:t>
                       </a:r>
                     </a:p>
                   </a:txBody>
@@ -3800,7 +3800,7 @@
                           </a:solidFill>
                           <a:latin typeface="Calibri"/>
                         </a:rPr>
-                        <a:t>1,322</a:t>
+                        <a:t>1,311</a:t>
                       </a:r>
                     </a:p>
                   </a:txBody>
@@ -3819,11 +3819,11 @@
                       <a:r>
                         <a:rPr sz="1000" b="0">
                           <a:solidFill>
-                            <a:srgbClr val="0B7A3B"/>
-                          </a:solidFill>
-                          <a:latin typeface="Calibri"/>
-                        </a:rPr>
-                        <a:t>+2.28%</a:t>
+                            <a:srgbClr val="B3261E"/>
+                          </a:solidFill>
+                          <a:latin typeface="Calibri"/>
+                        </a:rPr>
+                        <a:t>-0.84%</a:t>
                       </a:r>
                     </a:p>
                   </a:txBody>
@@ -3846,7 +3846,7 @@
                           </a:solidFill>
                           <a:latin typeface="Calibri"/>
                         </a:rPr>
-                        <a:t>-1.37%</a:t>
+                        <a:t>-1.79%</a:t>
                       </a:r>
                     </a:p>
                   </a:txBody>
@@ -3869,7 +3869,7 @@
                           </a:solidFill>
                           <a:latin typeface="Calibri"/>
                         </a:rPr>
-                        <a:t>-8.09%</a:t>
+                        <a:t>-8.12%</a:t>
                       </a:r>
                     </a:p>
                   </a:txBody>
@@ -3892,7 +3892,7 @@
                           </a:solidFill>
                           <a:latin typeface="Calibri"/>
                         </a:rPr>
-                        <a:t>-9.5%</a:t>
+                        <a:t>-10.2%</a:t>
                       </a:r>
                     </a:p>
                   </a:txBody>
@@ -3986,7 +3986,7 @@
                           </a:solidFill>
                           <a:latin typeface="Calibri"/>
                         </a:rPr>
-                        <a:t>994</a:t>
+                        <a:t>1,035</a:t>
                       </a:r>
                     </a:p>
                   </a:txBody>
@@ -4005,11 +4005,57 @@
                       <a:r>
                         <a:rPr sz="1000" b="0">
                           <a:solidFill>
+                            <a:srgbClr val="0B7A3B"/>
+                          </a:solidFill>
+                          <a:latin typeface="Calibri"/>
+                        </a:rPr>
+                        <a:t>+4.11%</a:t>
+                      </a:r>
+                    </a:p>
+                  </a:txBody>
+                  <a:tcPr>
+                    <a:solidFill>
+                      <a:srgbClr val="FFFFFF"/>
+                    </a:solidFill>
+                  </a:tcPr>
+                </a:tc>
+                <a:tc>
+                  <a:txBody>
+                    <a:bodyPr/>
+                    <a:lstStyle/>
+                    <a:p>
+                      <a:pPr algn="r"/>
+                      <a:r>
+                        <a:rPr sz="1000" b="0">
+                          <a:solidFill>
+                            <a:srgbClr val="0B7A3B"/>
+                          </a:solidFill>
+                          <a:latin typeface="Calibri"/>
+                        </a:rPr>
+                        <a:t>+2.02%</a:t>
+                      </a:r>
+                    </a:p>
+                  </a:txBody>
+                  <a:tcPr>
+                    <a:solidFill>
+                      <a:srgbClr val="FFFFFF"/>
+                    </a:solidFill>
+                  </a:tcPr>
+                </a:tc>
+                <a:tc>
+                  <a:txBody>
+                    <a:bodyPr/>
+                    <a:lstStyle/>
+                    <a:p>
+                      <a:pPr algn="r"/>
+                      <a:r>
+                        <a:rPr sz="1000" b="0">
+                          <a:solidFill>
                             <a:srgbClr val="B3261E"/>
                           </a:solidFill>
                           <a:latin typeface="Calibri"/>
                         </a:rPr>
-                        <a:t>-2.10%</a:t>
+                        <a:t>-9.21%</a:t>
                       </a:r>
                     </a:p>
                   </a:txBody>
@@ -4028,11 +4074,11 @@
                       <a:r>
                         <a:rPr sz="1000" b="0">
                           <a:solidFill>
-                            <a:srgbClr val="B3261E"/>
-                          </a:solidFill>
-                          <a:latin typeface="Calibri"/>
-                        </a:rPr>
-                        <a:t>-2.59%</a:t>
+                            <a:srgbClr val="1F2A37"/>
+                          </a:solidFill>
+                          <a:latin typeface="Calibri"/>
+                        </a:rPr>
+                        <a:t>-37.4%</a:t>
                       </a:r>
                     </a:p>
                   </a:txBody>
@@ -4051,57 +4097,11 @@
                       <a:r>
                         <a:rPr sz="1000" b="0">
                           <a:solidFill>
-                            <a:srgbClr val="B3261E"/>
-                          </a:solidFill>
-                          <a:latin typeface="Calibri"/>
-                        </a:rPr>
-                        <a:t>-14.01%</a:t>
-                      </a:r>
-                    </a:p>
-                  </a:txBody>
-                  <a:tcPr>
-                    <a:solidFill>
-                      <a:srgbClr val="FFFFFF"/>
-                    </a:solidFill>
-                  </a:tcPr>
-                </a:tc>
-                <a:tc>
-                  <a:txBody>
-                    <a:bodyPr/>
-                    <a:lstStyle/>
-                    <a:p>
-                      <a:pPr algn="r"/>
-                      <a:r>
-                        <a:rPr sz="1000" b="0">
-                          <a:solidFill>
                             <a:srgbClr val="1F2A37"/>
                           </a:solidFill>
                           <a:latin typeface="Calibri"/>
                         </a:rPr>
-                        <a:t>-39.9%</a:t>
-                      </a:r>
-                    </a:p>
-                  </a:txBody>
-                  <a:tcPr>
-                    <a:solidFill>
-                      <a:srgbClr val="FFFFFF"/>
-                    </a:solidFill>
-                  </a:tcPr>
-                </a:tc>
-                <a:tc>
-                  <a:txBody>
-                    <a:bodyPr/>
-                    <a:lstStyle/>
-                    <a:p>
-                      <a:pPr algn="r"/>
-                      <a:r>
-                        <a:rPr sz="1000" b="0">
-                          <a:solidFill>
-                            <a:srgbClr val="1F2A37"/>
-                          </a:solidFill>
-                          <a:latin typeface="Calibri"/>
-                        </a:rPr>
-                        <a:t>27%</a:t>
+                        <a:t>30%</a:t>
                       </a:r>
                     </a:p>
                   </a:txBody>
@@ -4172,7 +4172,7 @@
                           </a:solidFill>
                           <a:latin typeface="Calibri"/>
                         </a:rPr>
-                        <a:t>263</a:t>
+                        <a:t>256</a:t>
                       </a:r>
                     </a:p>
                   </a:txBody>
@@ -4195,7 +4195,7 @@
                           </a:solidFill>
                           <a:latin typeface="Calibri"/>
                         </a:rPr>
-                        <a:t>-0.89%</a:t>
+                        <a:t>-2.61%</a:t>
                       </a:r>
                     </a:p>
                   </a:txBody>
@@ -4218,7 +4218,7 @@
                           </a:solidFill>
                           <a:latin typeface="Calibri"/>
                         </a:rPr>
-                        <a:t>-2.74%</a:t>
+                        <a:t>-4.51%</a:t>
                       </a:r>
                     </a:p>
                   </a:txBody>
@@ -4241,7 +4241,7 @@
                           </a:solidFill>
                           <a:latin typeface="Calibri"/>
                         </a:rPr>
-                        <a:t>-1.44%</a:t>
+                        <a:t>-3.91%</a:t>
                       </a:r>
                     </a:p>
                   </a:txBody>
@@ -4264,7 +4264,7 @@
                           </a:solidFill>
                           <a:latin typeface="Calibri"/>
                         </a:rPr>
-                        <a:t>-34.6%</a:t>
+                        <a:t>-36.3%</a:t>
                       </a:r>
                     </a:p>
                   </a:txBody>
@@ -4287,7 +4287,7 @@
                           </a:solidFill>
                           <a:latin typeface="Calibri"/>
                         </a:rPr>
-                        <a:t>23%</a:t>
+                        <a:t>24%</a:t>
                       </a:r>
                     </a:p>
                   </a:txBody>
@@ -4358,7 +4358,7 @@
                           </a:solidFill>
                           <a:latin typeface="Calibri"/>
                         </a:rPr>
-                        <a:t>3,760</a:t>
+                        <a:t>3,693</a:t>
                       </a:r>
                     </a:p>
                   </a:txBody>
@@ -4377,11 +4377,11 @@
                       <a:r>
                         <a:rPr sz="1000" b="0">
                           <a:solidFill>
-                            <a:srgbClr val="0B7A3B"/>
-                          </a:solidFill>
-                          <a:latin typeface="Calibri"/>
-                        </a:rPr>
-                        <a:t>+0.29%</a:t>
+                            <a:srgbClr val="B3261E"/>
+                          </a:solidFill>
+                          <a:latin typeface="Calibri"/>
+                        </a:rPr>
+                        <a:t>-1.77%</a:t>
                       </a:r>
                     </a:p>
                   </a:txBody>
@@ -4404,7 +4404,7 @@
                           </a:solidFill>
                           <a:latin typeface="Calibri"/>
                         </a:rPr>
-                        <a:t>-4.32%</a:t>
+                        <a:t>-4.28%</a:t>
                       </a:r>
                     </a:p>
                   </a:txBody>
@@ -4427,7 +4427,7 @@
                           </a:solidFill>
                           <a:latin typeface="Calibri"/>
                         </a:rPr>
-                        <a:t>-5.53%</a:t>
+                        <a:t>-7.22%</a:t>
                       </a:r>
                     </a:p>
                   </a:txBody>
@@ -4450,7 +4450,7 @@
                           </a:solidFill>
                           <a:latin typeface="Calibri"/>
                         </a:rPr>
-                        <a:t>-14.1%</a:t>
+                        <a:t>-15.6%</a:t>
                       </a:r>
                     </a:p>
                   </a:txBody>
@@ -4496,7 +4496,7 @@
                           </a:solidFill>
                           <a:latin typeface="Calibri"/>
                         </a:rPr>
-                        <a:t>30.6</a:t>
+                        <a:t>30.7</a:t>
                       </a:r>
                     </a:p>
                   </a:txBody>
@@ -4544,7 +4544,7 @@
                           </a:solidFill>
                           <a:latin typeface="Calibri"/>
                         </a:rPr>
-                        <a:t>1,187</a:t>
+                        <a:t>1,168</a:t>
                       </a:r>
                     </a:p>
                   </a:txBody>
@@ -4563,11 +4563,11 @@
                       <a:r>
                         <a:rPr sz="1000" b="0">
                           <a:solidFill>
-                            <a:srgbClr val="0B7A3B"/>
-                          </a:solidFill>
-                          <a:latin typeface="Calibri"/>
-                        </a:rPr>
-                        <a:t>+0.42%</a:t>
+                            <a:srgbClr val="B3261E"/>
+                          </a:solidFill>
+                          <a:latin typeface="Calibri"/>
+                        </a:rPr>
+                        <a:t>-1.63%</a:t>
                       </a:r>
                     </a:p>
                   </a:txBody>
@@ -4590,7 +4590,7 @@
                           </a:solidFill>
                           <a:latin typeface="Calibri"/>
                         </a:rPr>
-                        <a:t>-4.89%</a:t>
+                        <a:t>-4.22%</a:t>
                       </a:r>
                     </a:p>
                   </a:txBody>
@@ -4613,7 +4613,7 @@
                           </a:solidFill>
                           <a:latin typeface="Calibri"/>
                         </a:rPr>
-                        <a:t>-9.32%</a:t>
+                        <a:t>-11.07%</a:t>
                       </a:r>
                     </a:p>
                   </a:txBody>
@@ -4636,7 +4636,7 @@
                           </a:solidFill>
                           <a:latin typeface="Calibri"/>
                         </a:rPr>
-                        <a:t>-25.1%</a:t>
+                        <a:t>-26.3%</a:t>
                       </a:r>
                     </a:p>
                   </a:txBody>
@@ -4659,7 +4659,7 @@
                           </a:solidFill>
                           <a:latin typeface="Calibri"/>
                         </a:rPr>
-                        <a:t>18%</a:t>
+                        <a:t>19%</a:t>
                       </a:r>
                     </a:p>
                   </a:txBody>
@@ -4682,7 +4682,7 @@
                           </a:solidFill>
                           <a:latin typeface="Calibri"/>
                         </a:rPr>
-                        <a:t>21.2</a:t>
+                        <a:t>21.1</a:t>
                       </a:r>
                     </a:p>
                   </a:txBody>
@@ -4730,7 +4730,7 @@
                           </a:solidFill>
                           <a:latin typeface="Calibri"/>
                         </a:rPr>
-                        <a:t>2,051</a:t>
+                        <a:t>2,075</a:t>
                       </a:r>
                     </a:p>
                   </a:txBody>
@@ -4753,7 +4753,7 @@
                           </a:solidFill>
                           <a:latin typeface="Calibri"/>
                         </a:rPr>
-                        <a:t>+0.90%</a:t>
+                        <a:t>+1.19%</a:t>
                       </a:r>
                     </a:p>
                   </a:txBody>
@@ -4776,7 +4776,7 @@
                           </a:solidFill>
                           <a:latin typeface="Calibri"/>
                         </a:rPr>
-                        <a:t>-1.87%</a:t>
+                        <a:t>-0.57%</a:t>
                       </a:r>
                     </a:p>
                   </a:txBody>
@@ -4799,7 +4799,7 @@
                           </a:solidFill>
                           <a:latin typeface="Calibri"/>
                         </a:rPr>
-                        <a:t>-13.44%</a:t>
+                        <a:t>-11.63%</a:t>
                       </a:r>
                     </a:p>
                   </a:txBody>
@@ -4822,7 +4822,7 @@
                           </a:solidFill>
                           <a:latin typeface="Calibri"/>
                         </a:rPr>
-                        <a:t>-36.0%</a:t>
+                        <a:t>-35.2%</a:t>
                       </a:r>
                     </a:p>
                   </a:txBody>
@@ -4952,7 +4952,7 @@
                 </a:solidFill>
                 <a:latin typeface="Calibri"/>
               </a:rPr>
-              <a:t>Breadth was mixed: 4 of 8 names advanced on the day.</a:t>
+              <a:t>Breadth was risk-off: 3 of 8 names advanced on the day.</a:t>
             </a:r>
           </a:p>
           <a:p>
@@ -4968,7 +4968,7 @@
                 </a:solidFill>
                 <a:latin typeface="Calibri"/>
               </a:rPr>
-              <a:t>•  Best performer on the day: ICICIBANK.NS at +2.28%.</a:t>
+              <a:t>•  Best performer on the day: INFY.NS at +4.11%.</a:t>
             </a:r>
           </a:p>
           <a:p>
@@ -4984,7 +4984,7 @@
                 </a:solidFill>
                 <a:latin typeface="Calibri"/>
               </a:rPr>
-              <a:t>•  Weakest on the day: INFY.NS at -2.10%.</a:t>
+              <a:t>•  Weakest on the day: ITC.NS at -2.61%.</a:t>
             </a:r>
           </a:p>
           <a:p>
@@ -5000,7 +5000,7 @@
                 </a:solidFill>
                 <a:latin typeface="Calibri"/>
               </a:rPr>
-              <a:t>•  Median one-day move across the watchlist: -0.26%.</a:t>
+              <a:t>•  Median one-day move across the watchlist: -0.87%.</a:t>
             </a:r>
           </a:p>
           <a:p>
@@ -5016,7 +5016,7 @@
                 </a:solidFill>
                 <a:latin typeface="Calibri"/>
               </a:rPr>
-              <a:t>•  INFY.NS sits furthest below its 52-week high, at -39.9%.</a:t>
+              <a:t>•  INFY.NS sits furthest below its 52-week high, at -37.4%.</a:t>
             </a:r>
           </a:p>
           <a:p>
@@ -5048,7 +5048,7 @@
                 </a:solidFill>
                 <a:latin typeface="Calibri"/>
               </a:rPr>
-              <a:t>•  Highest 30-day realised volatility: INFY.NS at 26.9% annualised.</a:t>
+              <a:t>•  Highest 30-day realised volatility: INFY.NS at 29.6% annualised.</a:t>
             </a:r>
           </a:p>
           <a:p>
@@ -5064,7 +5064,7 @@
                 </a:solidFill>
                 <a:latin typeface="Calibri"/>
               </a:rPr>
-              <a:t>•  60 headlines collected, 7 tagged to a watchlist name by substring match (unverified).</a:t>
+              <a:t>•  60 headlines collected, 2 tagged to a watchlist name by substring match (unverified).</a:t>
             </a:r>
           </a:p>
           <a:p>

--- a/public/deskbrief.pptx
+++ b/public/deskbrief.pptx
@@ -3128,7 +3128,7 @@
                 </a:solidFill>
                 <a:latin typeface="Calibri"/>
               </a:rPr>
-              <a:t>8 names  |  generated 02 Oct 2026 17:57  |  source: Yahoo Finance via yfinance, Indian financial RSS</a:t>
+              <a:t>8 names  |  generated 06 Oct 2026 18:31  |  source: Yahoo Finance via yfinance, Indian financial RSS</a:t>
             </a:r>
           </a:p>
         </p:txBody>
@@ -3428,7 +3428,7 @@
                           </a:solidFill>
                           <a:latin typeface="Calibri"/>
                         </a:rPr>
-                        <a:t>1,741</a:t>
+                        <a:t>1,780</a:t>
                       </a:r>
                     </a:p>
                   </a:txBody>
@@ -3447,11 +3447,57 @@
                       <a:r>
                         <a:rPr sz="1000" b="0">
                           <a:solidFill>
+                            <a:srgbClr val="0B7A3B"/>
+                          </a:solidFill>
+                          <a:latin typeface="Calibri"/>
+                        </a:rPr>
+                        <a:t>+2.23%</a:t>
+                      </a:r>
+                    </a:p>
+                  </a:txBody>
+                  <a:tcPr>
+                    <a:solidFill>
+                      <a:srgbClr val="F3F5F7"/>
+                    </a:solidFill>
+                  </a:tcPr>
+                </a:tc>
+                <a:tc>
+                  <a:txBody>
+                    <a:bodyPr/>
+                    <a:lstStyle/>
+                    <a:p>
+                      <a:pPr algn="r"/>
+                      <a:r>
+                        <a:rPr sz="1000" b="0">
+                          <a:solidFill>
+                            <a:srgbClr val="0B7A3B"/>
+                          </a:solidFill>
+                          <a:latin typeface="Calibri"/>
+                        </a:rPr>
+                        <a:t>+0.48%</a:t>
+                      </a:r>
+                    </a:p>
+                  </a:txBody>
+                  <a:tcPr>
+                    <a:solidFill>
+                      <a:srgbClr val="F3F5F7"/>
+                    </a:solidFill>
+                  </a:tcPr>
+                </a:tc>
+                <a:tc>
+                  <a:txBody>
+                    <a:bodyPr/>
+                    <a:lstStyle/>
+                    <a:p>
+                      <a:pPr algn="r"/>
+                      <a:r>
+                        <a:rPr sz="1000" b="0">
+                          <a:solidFill>
                             <a:srgbClr val="B3261E"/>
                           </a:solidFill>
                           <a:latin typeface="Calibri"/>
                         </a:rPr>
-                        <a:t>-0.90%</a:t>
+                        <a:t>-3.27%</a:t>
                       </a:r>
                     </a:p>
                   </a:txBody>
@@ -3470,11 +3516,11 @@
                       <a:r>
                         <a:rPr sz="1000" b="0">
                           <a:solidFill>
-                            <a:srgbClr val="B3261E"/>
-                          </a:solidFill>
-                          <a:latin typeface="Calibri"/>
-                        </a:rPr>
-                        <a:t>-3.05%</a:t>
+                            <a:srgbClr val="1F2A37"/>
+                          </a:solidFill>
+                          <a:latin typeface="Calibri"/>
+                        </a:rPr>
+                        <a:t>-16.7%</a:t>
                       </a:r>
                     </a:p>
                   </a:txBody>
@@ -3493,11 +3539,11 @@
                       <a:r>
                         <a:rPr sz="1000" b="0">
                           <a:solidFill>
-                            <a:srgbClr val="B3261E"/>
-                          </a:solidFill>
-                          <a:latin typeface="Calibri"/>
-                        </a:rPr>
-                        <a:t>-6.53%</a:t>
+                            <a:srgbClr val="1F2A37"/>
+                          </a:solidFill>
+                          <a:latin typeface="Calibri"/>
+                        </a:rPr>
+                        <a:t>25%</a:t>
                       </a:r>
                     </a:p>
                   </a:txBody>
@@ -3520,53 +3566,7 @@
                           </a:solidFill>
                           <a:latin typeface="Calibri"/>
                         </a:rPr>
-                        <a:t>-18.5%</a:t>
-                      </a:r>
-                    </a:p>
-                  </a:txBody>
-                  <a:tcPr>
-                    <a:solidFill>
-                      <a:srgbClr val="F3F5F7"/>
-                    </a:solidFill>
-                  </a:tcPr>
-                </a:tc>
-                <a:tc>
-                  <a:txBody>
-                    <a:bodyPr/>
-                    <a:lstStyle/>
-                    <a:p>
-                      <a:pPr algn="r"/>
-                      <a:r>
-                        <a:rPr sz="1000" b="0">
-                          <a:solidFill>
-                            <a:srgbClr val="1F2A37"/>
-                          </a:solidFill>
-                          <a:latin typeface="Calibri"/>
-                        </a:rPr>
-                        <a:t>24%</a:t>
-                      </a:r>
-                    </a:p>
-                  </a:txBody>
-                  <a:tcPr>
-                    <a:solidFill>
-                      <a:srgbClr val="F3F5F7"/>
-                    </a:solidFill>
-                  </a:tcPr>
-                </a:tc>
-                <a:tc>
-                  <a:txBody>
-                    <a:bodyPr/>
-                    <a:lstStyle/>
-                    <a:p>
-                      <a:pPr algn="r"/>
-                      <a:r>
-                        <a:rPr sz="1000" b="0">
-                          <a:solidFill>
-                            <a:srgbClr val="1F2A37"/>
-                          </a:solidFill>
-                          <a:latin typeface="Calibri"/>
-                        </a:rPr>
-                        <a:t>36.4</a:t>
+                        <a:t>37.8</a:t>
                       </a:r>
                     </a:p>
                   </a:txBody>
@@ -3614,7 +3614,7 @@
                           </a:solidFill>
                           <a:latin typeface="Calibri"/>
                         </a:rPr>
-                        <a:t>721</a:t>
+                        <a:t>705</a:t>
                       </a:r>
                     </a:p>
                   </a:txBody>
@@ -3633,11 +3633,11 @@
                       <a:r>
                         <a:rPr sz="1000" b="0">
                           <a:solidFill>
-                            <a:srgbClr val="0B7A3B"/>
-                          </a:solidFill>
-                          <a:latin typeface="Calibri"/>
-                        </a:rPr>
-                        <a:t>+1.76%</a:t>
+                            <a:srgbClr val="B3261E"/>
+                          </a:solidFill>
+                          <a:latin typeface="Calibri"/>
+                        </a:rPr>
+                        <a:t>-2.27%</a:t>
                       </a:r>
                     </a:p>
                   </a:txBody>
@@ -3660,7 +3660,7 @@
                           </a:solidFill>
                           <a:latin typeface="Calibri"/>
                         </a:rPr>
-                        <a:t>-1.06%</a:t>
+                        <a:t>-1.98%</a:t>
                       </a:r>
                     </a:p>
                   </a:txBody>
@@ -3679,11 +3679,11 @@
                       <a:r>
                         <a:rPr sz="1000" b="0">
                           <a:solidFill>
-                            <a:srgbClr val="0B7A3B"/>
-                          </a:solidFill>
-                          <a:latin typeface="Calibri"/>
-                        </a:rPr>
-                        <a:t>+2.91%</a:t>
+                            <a:srgbClr val="B3261E"/>
+                          </a:solidFill>
+                          <a:latin typeface="Calibri"/>
+                        </a:rPr>
+                        <a:t>-1.03%</a:t>
                       </a:r>
                     </a:p>
                   </a:txBody>
@@ -3706,7 +3706,7 @@
                           </a:solidFill>
                           <a:latin typeface="Calibri"/>
                         </a:rPr>
-                        <a:t>-27.4%</a:t>
+                        <a:t>-29.0%</a:t>
                       </a:r>
                     </a:p>
                   </a:txBody>
@@ -3729,7 +3729,7 @@
                           </a:solidFill>
                           <a:latin typeface="Calibri"/>
                         </a:rPr>
-                        <a:t>21%</a:t>
+                        <a:t>22%</a:t>
                       </a:r>
                     </a:p>
                   </a:txBody>
@@ -3752,7 +3752,7 @@
                           </a:solidFill>
                           <a:latin typeface="Calibri"/>
                         </a:rPr>
-                        <a:t>15.8</a:t>
+                        <a:t>15.6</a:t>
                       </a:r>
                     </a:p>
                   </a:txBody>
@@ -3800,7 +3800,7 @@
                           </a:solidFill>
                           <a:latin typeface="Calibri"/>
                         </a:rPr>
-                        <a:t>1,311</a:t>
+                        <a:t>1,332</a:t>
                       </a:r>
                     </a:p>
                   </a:txBody>
@@ -3819,11 +3819,57 @@
                       <a:r>
                         <a:rPr sz="1000" b="0">
                           <a:solidFill>
+                            <a:srgbClr val="0B7A3B"/>
+                          </a:solidFill>
+                          <a:latin typeface="Calibri"/>
+                        </a:rPr>
+                        <a:t>+1.63%</a:t>
+                      </a:r>
+                    </a:p>
+                  </a:txBody>
+                  <a:tcPr>
+                    <a:solidFill>
+                      <a:srgbClr val="F3F5F7"/>
+                    </a:solidFill>
+                  </a:tcPr>
+                </a:tc>
+                <a:tc>
+                  <a:txBody>
+                    <a:bodyPr/>
+                    <a:lstStyle/>
+                    <a:p>
+                      <a:pPr algn="r"/>
+                      <a:r>
+                        <a:rPr sz="1000" b="0">
+                          <a:solidFill>
+                            <a:srgbClr val="0B7A3B"/>
+                          </a:solidFill>
+                          <a:latin typeface="Calibri"/>
+                        </a:rPr>
+                        <a:t>+2.30%</a:t>
+                      </a:r>
+                    </a:p>
+                  </a:txBody>
+                  <a:tcPr>
+                    <a:solidFill>
+                      <a:srgbClr val="F3F5F7"/>
+                    </a:solidFill>
+                  </a:tcPr>
+                </a:tc>
+                <a:tc>
+                  <a:txBody>
+                    <a:bodyPr/>
+                    <a:lstStyle/>
+                    <a:p>
+                      <a:pPr algn="r"/>
+                      <a:r>
+                        <a:rPr sz="1000" b="0">
+                          <a:solidFill>
                             <a:srgbClr val="B3261E"/>
                           </a:solidFill>
                           <a:latin typeface="Calibri"/>
                         </a:rPr>
-                        <a:t>-0.84%</a:t>
+                        <a:t>-6.41%</a:t>
                       </a:r>
                     </a:p>
                   </a:txBody>
@@ -3842,11 +3888,11 @@
                       <a:r>
                         <a:rPr sz="1000" b="0">
                           <a:solidFill>
-                            <a:srgbClr val="B3261E"/>
-                          </a:solidFill>
-                          <a:latin typeface="Calibri"/>
-                        </a:rPr>
-                        <a:t>-1.79%</a:t>
+                            <a:srgbClr val="1F2A37"/>
+                          </a:solidFill>
+                          <a:latin typeface="Calibri"/>
+                        </a:rPr>
+                        <a:t>-8.8%</a:t>
                       </a:r>
                     </a:p>
                   </a:txBody>
@@ -3865,11 +3911,11 @@
                       <a:r>
                         <a:rPr sz="1000" b="0">
                           <a:solidFill>
-                            <a:srgbClr val="B3261E"/>
-                          </a:solidFill>
-                          <a:latin typeface="Calibri"/>
-                        </a:rPr>
-                        <a:t>-8.12%</a:t>
+                            <a:srgbClr val="1F2A37"/>
+                          </a:solidFill>
+                          <a:latin typeface="Calibri"/>
+                        </a:rPr>
+                        <a:t>17%</a:t>
                       </a:r>
                     </a:p>
                   </a:txBody>
@@ -3892,53 +3938,7 @@
                           </a:solidFill>
                           <a:latin typeface="Calibri"/>
                         </a:rPr>
-                        <a:t>-10.2%</a:t>
-                      </a:r>
-                    </a:p>
-                  </a:txBody>
-                  <a:tcPr>
-                    <a:solidFill>
-                      <a:srgbClr val="F3F5F7"/>
-                    </a:solidFill>
-                  </a:tcPr>
-                </a:tc>
-                <a:tc>
-                  <a:txBody>
-                    <a:bodyPr/>
-                    <a:lstStyle/>
-                    <a:p>
-                      <a:pPr algn="r"/>
-                      <a:r>
-                        <a:rPr sz="1000" b="0">
-                          <a:solidFill>
-                            <a:srgbClr val="1F2A37"/>
-                          </a:solidFill>
-                          <a:latin typeface="Calibri"/>
-                        </a:rPr>
-                        <a:t>16%</a:t>
-                      </a:r>
-                    </a:p>
-                  </a:txBody>
-                  <a:tcPr>
-                    <a:solidFill>
-                      <a:srgbClr val="F3F5F7"/>
-                    </a:solidFill>
-                  </a:tcPr>
-                </a:tc>
-                <a:tc>
-                  <a:txBody>
-                    <a:bodyPr/>
-                    <a:lstStyle/>
-                    <a:p>
-                      <a:pPr algn="r"/>
-                      <a:r>
-                        <a:rPr sz="1000" b="0">
-                          <a:solidFill>
-                            <a:srgbClr val="1F2A37"/>
-                          </a:solidFill>
-                          <a:latin typeface="Calibri"/>
-                        </a:rPr>
-                        <a:t>16.9</a:t>
+                        <a:t>17.4</a:t>
                       </a:r>
                     </a:p>
                   </a:txBody>
@@ -3986,7 +3986,7 @@
                           </a:solidFill>
                           <a:latin typeface="Calibri"/>
                         </a:rPr>
-                        <a:t>1,035</a:t>
+                        <a:t>1,020</a:t>
                       </a:r>
                     </a:p>
                   </a:txBody>
@@ -4005,11 +4005,34 @@
                       <a:r>
                         <a:rPr sz="1000" b="0">
                           <a:solidFill>
+                            <a:srgbClr val="B3261E"/>
+                          </a:solidFill>
+                          <a:latin typeface="Calibri"/>
+                        </a:rPr>
+                        <a:t>-1.40%</a:t>
+                      </a:r>
+                    </a:p>
+                  </a:txBody>
+                  <a:tcPr>
+                    <a:solidFill>
+                      <a:srgbClr val="FFFFFF"/>
+                    </a:solidFill>
+                  </a:tcPr>
+                </a:tc>
+                <a:tc>
+                  <a:txBody>
+                    <a:bodyPr/>
+                    <a:lstStyle/>
+                    <a:p>
+                      <a:pPr algn="r"/>
+                      <a:r>
+                        <a:rPr sz="1000" b="0">
+                          <a:solidFill>
                             <a:srgbClr val="0B7A3B"/>
                           </a:solidFill>
                           <a:latin typeface="Calibri"/>
                         </a:rPr>
-                        <a:t>+4.11%</a:t>
+                        <a:t>+1.72%</a:t>
                       </a:r>
                     </a:p>
                   </a:txBody>
@@ -4028,11 +4051,11 @@
                       <a:r>
                         <a:rPr sz="1000" b="0">
                           <a:solidFill>
-                            <a:srgbClr val="0B7A3B"/>
-                          </a:solidFill>
-                          <a:latin typeface="Calibri"/>
-                        </a:rPr>
-                        <a:t>+2.02%</a:t>
+                            <a:srgbClr val="B3261E"/>
+                          </a:solidFill>
+                          <a:latin typeface="Calibri"/>
+                        </a:rPr>
+                        <a:t>-9.69%</a:t>
                       </a:r>
                     </a:p>
                   </a:txBody>
@@ -4051,11 +4074,11 @@
                       <a:r>
                         <a:rPr sz="1000" b="0">
                           <a:solidFill>
-                            <a:srgbClr val="B3261E"/>
-                          </a:solidFill>
-                          <a:latin typeface="Calibri"/>
-                        </a:rPr>
-                        <a:t>-9.21%</a:t>
+                            <a:srgbClr val="1F2A37"/>
+                          </a:solidFill>
+                          <a:latin typeface="Calibri"/>
+                        </a:rPr>
+                        <a:t>-38.3%</a:t>
                       </a:r>
                     </a:p>
                   </a:txBody>
@@ -4078,7 +4101,7 @@
                           </a:solidFill>
                           <a:latin typeface="Calibri"/>
                         </a:rPr>
-                        <a:t>-37.4%</a:t>
+                        <a:t>30%</a:t>
                       </a:r>
                     </a:p>
                   </a:txBody>
@@ -4101,30 +4124,7 @@
                           </a:solidFill>
                           <a:latin typeface="Calibri"/>
                         </a:rPr>
-                        <a:t>30%</a:t>
-                      </a:r>
-                    </a:p>
-                  </a:txBody>
-                  <a:tcPr>
-                    <a:solidFill>
-                      <a:srgbClr val="FFFFFF"/>
-                    </a:solidFill>
-                  </a:tcPr>
-                </a:tc>
-                <a:tc>
-                  <a:txBody>
-                    <a:bodyPr/>
-                    <a:lstStyle/>
-                    <a:p>
-                      <a:pPr algn="r"/>
-                      <a:r>
-                        <a:rPr sz="1000" b="0">
-                          <a:solidFill>
-                            <a:srgbClr val="1F2A37"/>
-                          </a:solidFill>
-                          <a:latin typeface="Calibri"/>
-                        </a:rPr>
-                        <a:t>13.3</a:t>
+                        <a:t>13.8</a:t>
                       </a:r>
                     </a:p>
                   </a:txBody>
@@ -4172,7 +4172,7 @@
                           </a:solidFill>
                           <a:latin typeface="Calibri"/>
                         </a:rPr>
-                        <a:t>256</a:t>
+                        <a:t>269</a:t>
                       </a:r>
                     </a:p>
                   </a:txBody>
@@ -4191,11 +4191,11 @@
                       <a:r>
                         <a:rPr sz="1000" b="0">
                           <a:solidFill>
-                            <a:srgbClr val="B3261E"/>
-                          </a:solidFill>
-                          <a:latin typeface="Calibri"/>
-                        </a:rPr>
-                        <a:t>-2.61%</a:t>
+                            <a:srgbClr val="0B7A3B"/>
+                          </a:solidFill>
+                          <a:latin typeface="Calibri"/>
+                        </a:rPr>
+                        <a:t>+5.08%</a:t>
                       </a:r>
                     </a:p>
                   </a:txBody>
@@ -4214,11 +4214,11 @@
                       <a:r>
                         <a:rPr sz="1000" b="0">
                           <a:solidFill>
-                            <a:srgbClr val="B3261E"/>
-                          </a:solidFill>
-                          <a:latin typeface="Calibri"/>
-                        </a:rPr>
-                        <a:t>-4.51%</a:t>
+                            <a:srgbClr val="0B7A3B"/>
+                          </a:solidFill>
+                          <a:latin typeface="Calibri"/>
+                        </a:rPr>
+                        <a:t>+1.40%</a:t>
                       </a:r>
                     </a:p>
                   </a:txBody>
@@ -4237,11 +4237,11 @@
                       <a:r>
                         <a:rPr sz="1000" b="0">
                           <a:solidFill>
-                            <a:srgbClr val="B3261E"/>
-                          </a:solidFill>
-                          <a:latin typeface="Calibri"/>
-                        </a:rPr>
-                        <a:t>-3.91%</a:t>
+                            <a:srgbClr val="0B7A3B"/>
+                          </a:solidFill>
+                          <a:latin typeface="Calibri"/>
+                        </a:rPr>
+                        <a:t>+1.82%</a:t>
                       </a:r>
                     </a:p>
                   </a:txBody>
@@ -4264,7 +4264,7 @@
                           </a:solidFill>
                           <a:latin typeface="Calibri"/>
                         </a:rPr>
-                        <a:t>-36.3%</a:t>
+                        <a:t>-33.1%</a:t>
                       </a:r>
                     </a:p>
                   </a:txBody>
@@ -4287,7 +4287,7 @@
                           </a:solidFill>
                           <a:latin typeface="Calibri"/>
                         </a:rPr>
-                        <a:t>24%</a:t>
+                        <a:t>28%</a:t>
                       </a:r>
                     </a:p>
                   </a:txBody>
@@ -4310,7 +4310,7 @@
                           </a:solidFill>
                           <a:latin typeface="Calibri"/>
                         </a:rPr>
-                        <a:t>16.2</a:t>
+                        <a:t>16.8</a:t>
                       </a:r>
                     </a:p>
                   </a:txBody>
@@ -4358,7 +4358,7 @@
                           </a:solidFill>
                           <a:latin typeface="Calibri"/>
                         </a:rPr>
-                        <a:t>3,693</a:t>
+                        <a:t>3,750</a:t>
                       </a:r>
                     </a:p>
                   </a:txBody>
@@ -4377,11 +4377,34 @@
                       <a:r>
                         <a:rPr sz="1000" b="0">
                           <a:solidFill>
+                            <a:srgbClr val="0B7A3B"/>
+                          </a:solidFill>
+                          <a:latin typeface="Calibri"/>
+                        </a:rPr>
+                        <a:t>+1.53%</a:t>
+                      </a:r>
+                    </a:p>
+                  </a:txBody>
+                  <a:tcPr>
+                    <a:solidFill>
+                      <a:srgbClr val="FFFFFF"/>
+                    </a:solidFill>
+                  </a:tcPr>
+                </a:tc>
+                <a:tc>
+                  <a:txBody>
+                    <a:bodyPr/>
+                    <a:lstStyle/>
+                    <a:p>
+                      <a:pPr algn="r"/>
+                      <a:r>
+                        <a:rPr sz="1000" b="0">
+                          <a:solidFill>
                             <a:srgbClr val="B3261E"/>
                           </a:solidFill>
                           <a:latin typeface="Calibri"/>
                         </a:rPr>
-                        <a:t>-1.77%</a:t>
+                        <a:t>-0.44%</a:t>
                       </a:r>
                     </a:p>
                   </a:txBody>
@@ -4404,7 +4427,7 @@
                           </a:solidFill>
                           <a:latin typeface="Calibri"/>
                         </a:rPr>
-                        <a:t>-4.28%</a:t>
+                        <a:t>-5.40%</a:t>
                       </a:r>
                     </a:p>
                   </a:txBody>
@@ -4423,11 +4446,11 @@
                       <a:r>
                         <a:rPr sz="1000" b="0">
                           <a:solidFill>
-                            <a:srgbClr val="B3261E"/>
-                          </a:solidFill>
-                          <a:latin typeface="Calibri"/>
-                        </a:rPr>
-                        <a:t>-7.22%</a:t>
+                            <a:srgbClr val="1F2A37"/>
+                          </a:solidFill>
+                          <a:latin typeface="Calibri"/>
+                        </a:rPr>
+                        <a:t>-14.3%</a:t>
                       </a:r>
                     </a:p>
                   </a:txBody>
@@ -4450,7 +4473,7 @@
                           </a:solidFill>
                           <a:latin typeface="Calibri"/>
                         </a:rPr>
-                        <a:t>-15.6%</a:t>
+                        <a:t>18%</a:t>
                       </a:r>
                     </a:p>
                   </a:txBody>
@@ -4473,30 +4496,7 @@
                           </a:solidFill>
                           <a:latin typeface="Calibri"/>
                         </a:rPr>
-                        <a:t>17%</a:t>
-                      </a:r>
-                    </a:p>
-                  </a:txBody>
-                  <a:tcPr>
-                    <a:solidFill>
-                      <a:srgbClr val="FFFFFF"/>
-                    </a:solidFill>
-                  </a:tcPr>
-                </a:tc>
-                <a:tc>
-                  <a:txBody>
-                    <a:bodyPr/>
-                    <a:lstStyle/>
-                    <a:p>
-                      <a:pPr algn="r"/>
-                      <a:r>
-                        <a:rPr sz="1000" b="0">
-                          <a:solidFill>
-                            <a:srgbClr val="1F2A37"/>
-                          </a:solidFill>
-                          <a:latin typeface="Calibri"/>
-                        </a:rPr>
-                        <a:t>30.7</a:t>
+                        <a:t>31.3</a:t>
                       </a:r>
                     </a:p>
                   </a:txBody>
@@ -4544,7 +4544,7 @@
                           </a:solidFill>
                           <a:latin typeface="Calibri"/>
                         </a:rPr>
-                        <a:t>1,168</a:t>
+                        <a:t>1,186</a:t>
                       </a:r>
                     </a:p>
                   </a:txBody>
@@ -4563,11 +4563,34 @@
                       <a:r>
                         <a:rPr sz="1000" b="0">
                           <a:solidFill>
+                            <a:srgbClr val="0B7A3B"/>
+                          </a:solidFill>
+                          <a:latin typeface="Calibri"/>
+                        </a:rPr>
+                        <a:t>+1.60%</a:t>
+                      </a:r>
+                    </a:p>
+                  </a:txBody>
+                  <a:tcPr>
+                    <a:solidFill>
+                      <a:srgbClr val="F3F5F7"/>
+                    </a:solidFill>
+                  </a:tcPr>
+                </a:tc>
+                <a:tc>
+                  <a:txBody>
+                    <a:bodyPr/>
+                    <a:lstStyle/>
+                    <a:p>
+                      <a:pPr algn="r"/>
+                      <a:r>
+                        <a:rPr sz="1000" b="0">
+                          <a:solidFill>
                             <a:srgbClr val="B3261E"/>
                           </a:solidFill>
                           <a:latin typeface="Calibri"/>
                         </a:rPr>
-                        <a:t>-1.63%</a:t>
+                        <a:t>-0.94%</a:t>
                       </a:r>
                     </a:p>
                   </a:txBody>
@@ -4590,7 +4613,7 @@
                           </a:solidFill>
                           <a:latin typeface="Calibri"/>
                         </a:rPr>
-                        <a:t>-4.22%</a:t>
+                        <a:t>-10.26%</a:t>
                       </a:r>
                     </a:p>
                   </a:txBody>
@@ -4609,11 +4632,11 @@
                       <a:r>
                         <a:rPr sz="1000" b="0">
                           <a:solidFill>
-                            <a:srgbClr val="B3261E"/>
-                          </a:solidFill>
-                          <a:latin typeface="Calibri"/>
-                        </a:rPr>
-                        <a:t>-11.07%</a:t>
+                            <a:srgbClr val="1F2A37"/>
+                          </a:solidFill>
+                          <a:latin typeface="Calibri"/>
+                        </a:rPr>
+                        <a:t>-25.1%</a:t>
                       </a:r>
                     </a:p>
                   </a:txBody>
@@ -4636,7 +4659,7 @@
                           </a:solidFill>
                           <a:latin typeface="Calibri"/>
                         </a:rPr>
-                        <a:t>-26.3%</a:t>
+                        <a:t>19%</a:t>
                       </a:r>
                     </a:p>
                   </a:txBody>
@@ -4659,30 +4682,7 @@
                           </a:solidFill>
                           <a:latin typeface="Calibri"/>
                         </a:rPr>
-                        <a:t>19%</a:t>
-                      </a:r>
-                    </a:p>
-                  </a:txBody>
-                  <a:tcPr>
-                    <a:solidFill>
-                      <a:srgbClr val="F3F5F7"/>
-                    </a:solidFill>
-                  </a:tcPr>
-                </a:tc>
-                <a:tc>
-                  <a:txBody>
-                    <a:bodyPr/>
-                    <a:lstStyle/>
-                    <a:p>
-                      <a:pPr algn="r"/>
-                      <a:r>
-                        <a:rPr sz="1000" b="0">
-                          <a:solidFill>
-                            <a:srgbClr val="1F2A37"/>
-                          </a:solidFill>
-                          <a:latin typeface="Calibri"/>
-                        </a:rPr>
-                        <a:t>21.1</a:t>
+                        <a:t>22.1</a:t>
                       </a:r>
                     </a:p>
                   </a:txBody>
@@ -4730,7 +4730,7 @@
                           </a:solidFill>
                           <a:latin typeface="Calibri"/>
                         </a:rPr>
-                        <a:t>2,075</a:t>
+                        <a:t>2,114</a:t>
                       </a:r>
                     </a:p>
                   </a:txBody>
@@ -4753,7 +4753,7 @@
                           </a:solidFill>
                           <a:latin typeface="Calibri"/>
                         </a:rPr>
-                        <a:t>+1.19%</a:t>
+                        <a:t>+1.90%</a:t>
                       </a:r>
                     </a:p>
                   </a:txBody>
@@ -4772,11 +4772,34 @@
                       <a:r>
                         <a:rPr sz="1000" b="0">
                           <a:solidFill>
+                            <a:srgbClr val="0B7A3B"/>
+                          </a:solidFill>
+                          <a:latin typeface="Calibri"/>
+                        </a:rPr>
+                        <a:t>+2.11%</a:t>
+                      </a:r>
+                    </a:p>
+                  </a:txBody>
+                  <a:tcPr>
+                    <a:solidFill>
+                      <a:srgbClr val="FFFFFF"/>
+                    </a:solidFill>
+                  </a:tcPr>
+                </a:tc>
+                <a:tc>
+                  <a:txBody>
+                    <a:bodyPr/>
+                    <a:lstStyle/>
+                    <a:p>
+                      <a:pPr algn="r"/>
+                      <a:r>
+                        <a:rPr sz="1000" b="0">
+                          <a:solidFill>
                             <a:srgbClr val="B3261E"/>
                           </a:solidFill>
                           <a:latin typeface="Calibri"/>
                         </a:rPr>
-                        <a:t>-0.57%</a:t>
+                        <a:t>-8.23%</a:t>
                       </a:r>
                     </a:p>
                   </a:txBody>
@@ -4795,11 +4818,11 @@
                       <a:r>
                         <a:rPr sz="1000" b="0">
                           <a:solidFill>
-                            <a:srgbClr val="B3261E"/>
-                          </a:solidFill>
-                          <a:latin typeface="Calibri"/>
-                        </a:rPr>
-                        <a:t>-11.63%</a:t>
+                            <a:srgbClr val="1F2A37"/>
+                          </a:solidFill>
+                          <a:latin typeface="Calibri"/>
+                        </a:rPr>
+                        <a:t>-34.0%</a:t>
                       </a:r>
                     </a:p>
                   </a:txBody>
@@ -4822,7 +4845,7 @@
                           </a:solidFill>
                           <a:latin typeface="Calibri"/>
                         </a:rPr>
-                        <a:t>-35.2%</a:t>
+                        <a:t>26%</a:t>
                       </a:r>
                     </a:p>
                   </a:txBody>
@@ -4845,30 +4868,7 @@
                           </a:solidFill>
                           <a:latin typeface="Calibri"/>
                         </a:rPr>
-                        <a:t>25%</a:t>
-                      </a:r>
-                    </a:p>
-                  </a:txBody>
-                  <a:tcPr>
-                    <a:solidFill>
-                      <a:srgbClr val="FFFFFF"/>
-                    </a:solidFill>
-                  </a:tcPr>
-                </a:tc>
-                <a:tc>
-                  <a:txBody>
-                    <a:bodyPr/>
-                    <a:lstStyle/>
-                    <a:p>
-                      <a:pPr algn="r"/>
-                      <a:r>
-                        <a:rPr sz="1000" b="0">
-                          <a:solidFill>
-                            <a:srgbClr val="1F2A37"/>
-                          </a:solidFill>
-                          <a:latin typeface="Calibri"/>
-                        </a:rPr>
-                        <a:t>15.1</a:t>
+                        <a:t>15.3</a:t>
                       </a:r>
                     </a:p>
                   </a:txBody>
@@ -4900,7 +4900,7 @@
         <p:spPr>
           <a:xfrm>
             <a:off x="411480" y="4370832"/>
-            <a:ext cx="7040880" cy="2061863"/>
+            <a:ext cx="7040880" cy="2063354"/>
           </a:xfrm>
           <a:prstGeom prst="rect">
             <a:avLst/>
@@ -4952,7 +4952,7 @@
                 </a:solidFill>
                 <a:latin typeface="Calibri"/>
               </a:rPr>
-              <a:t>Breadth was risk-off: 3 of 8 names advanced on the day.</a:t>
+              <a:t>Breadth was risk-on: 6 of 8 names advanced on the day.</a:t>
             </a:r>
           </a:p>
           <a:p>
@@ -4968,7 +4968,7 @@
                 </a:solidFill>
                 <a:latin typeface="Calibri"/>
               </a:rPr>
-              <a:t>•  Best performer on the day: INFY.NS at +4.11%.</a:t>
+              <a:t>•  Best performer on the day: ITC.NS at +5.08%.</a:t>
             </a:r>
           </a:p>
           <a:p>
@@ -4984,7 +4984,7 @@
                 </a:solidFill>
                 <a:latin typeface="Calibri"/>
               </a:rPr>
-              <a:t>•  Weakest on the day: ITC.NS at -2.61%.</a:t>
+              <a:t>•  Weakest on the day: HDFCBANK.NS at -2.27%.</a:t>
             </a:r>
           </a:p>
           <a:p>
@@ -5000,7 +5000,7 @@
                 </a:solidFill>
                 <a:latin typeface="Calibri"/>
               </a:rPr>
-              <a:t>•  Median one-day move across the watchlist: -0.87%.</a:t>
+              <a:t>•  Median one-day move across the watchlist: +1.62%.</a:t>
             </a:r>
           </a:p>
           <a:p>
@@ -5016,7 +5016,7 @@
                 </a:solidFill>
                 <a:latin typeface="Calibri"/>
               </a:rPr>
-              <a:t>•  INFY.NS sits furthest below its 52-week high, at -37.4%.</a:t>
+              <a:t>•  INFY.NS sits furthest below its 52-week high, at -38.3%.</a:t>
             </a:r>
           </a:p>
           <a:p>
@@ -5048,7 +5048,7 @@
                 </a:solidFill>
                 <a:latin typeface="Calibri"/>
               </a:rPr>
-              <a:t>•  Highest 30-day realised volatility: INFY.NS at 29.6% annualised.</a:t>
+              <a:t>•  Highest 30-day realised volatility: INFY.NS at 29.5% annualised.</a:t>
             </a:r>
           </a:p>
           <a:p>
@@ -5064,7 +5064,7 @@
                 </a:solidFill>
                 <a:latin typeface="Calibri"/>
               </a:rPr>
-              <a:t>•  60 headlines collected, 2 tagged to a watchlist name by substring match (unverified).</a:t>
+              <a:t>•  60 headlines collected, 3 tagged to a watchlist name by substring match (unverified).</a:t>
             </a:r>
           </a:p>
           <a:p>

--- a/public/deskbrief.pptx
+++ b/public/deskbrief.pptx
@@ -3128,7 +3128,7 @@
                 </a:solidFill>
                 <a:latin typeface="Calibri"/>
               </a:rPr>
-              <a:t>8 names  |  generated 06 Oct 2026 18:31  |  source: Yahoo Finance via yfinance, Indian financial RSS</a:t>
+              <a:t>8 names  |  generated 07 Oct 2026 19:01  |  source: Yahoo Finance via yfinance, Indian financial RSS</a:t>
             </a:r>
           </a:p>
         </p:txBody>
@@ -3428,7 +3428,7 @@
                           </a:solidFill>
                           <a:latin typeface="Calibri"/>
                         </a:rPr>
-                        <a:t>1,780</a:t>
+                        <a:t>1,810</a:t>
                       </a:r>
                     </a:p>
                   </a:txBody>
@@ -3451,7 +3451,7 @@
                           </a:solidFill>
                           <a:latin typeface="Calibri"/>
                         </a:rPr>
-                        <a:t>+2.23%</a:t>
+                        <a:t>+1.72%</a:t>
                       </a:r>
                     </a:p>
                   </a:txBody>
@@ -3474,7 +3474,7 @@
                           </a:solidFill>
                           <a:latin typeface="Calibri"/>
                         </a:rPr>
-                        <a:t>+0.48%</a:t>
+                        <a:t>+2.22%</a:t>
                       </a:r>
                     </a:p>
                   </a:txBody>
@@ -3497,7 +3497,7 @@
                           </a:solidFill>
                           <a:latin typeface="Calibri"/>
                         </a:rPr>
-                        <a:t>-3.27%</a:t>
+                        <a:t>-2.35%</a:t>
                       </a:r>
                     </a:p>
                   </a:txBody>
@@ -3520,7 +3520,7 @@
                           </a:solidFill>
                           <a:latin typeface="Calibri"/>
                         </a:rPr>
-                        <a:t>-16.7%</a:t>
+                        <a:t>-15.2%</a:t>
                       </a:r>
                     </a:p>
                   </a:txBody>
@@ -3543,7 +3543,7 @@
                           </a:solidFill>
                           <a:latin typeface="Calibri"/>
                         </a:rPr>
-                        <a:t>25%</a:t>
+                        <a:t>26%</a:t>
                       </a:r>
                     </a:p>
                   </a:txBody>
@@ -3566,7 +3566,7 @@
                           </a:solidFill>
                           <a:latin typeface="Calibri"/>
                         </a:rPr>
-                        <a:t>37.8</a:t>
+                        <a:t>38.3</a:t>
                       </a:r>
                     </a:p>
                   </a:txBody>
@@ -3614,7 +3614,7 @@
                           </a:solidFill>
                           <a:latin typeface="Calibri"/>
                         </a:rPr>
-                        <a:t>705</a:t>
+                        <a:t>711</a:t>
                       </a:r>
                     </a:p>
                   </a:txBody>
@@ -3633,11 +3633,34 @@
                       <a:r>
                         <a:rPr sz="1000" b="0">
                           <a:solidFill>
+                            <a:srgbClr val="0B7A3B"/>
+                          </a:solidFill>
+                          <a:latin typeface="Calibri"/>
+                        </a:rPr>
+                        <a:t>+0.94%</a:t>
+                      </a:r>
+                    </a:p>
+                  </a:txBody>
+                  <a:tcPr>
+                    <a:solidFill>
+                      <a:srgbClr val="FFFFFF"/>
+                    </a:solidFill>
+                  </a:tcPr>
+                </a:tc>
+                <a:tc>
+                  <a:txBody>
+                    <a:bodyPr/>
+                    <a:lstStyle/>
+                    <a:p>
+                      <a:pPr algn="r"/>
+                      <a:r>
+                        <a:rPr sz="1000" b="0">
+                          <a:solidFill>
                             <a:srgbClr val="B3261E"/>
                           </a:solidFill>
                           <a:latin typeface="Calibri"/>
                         </a:rPr>
-                        <a:t>-2.27%</a:t>
+                        <a:t>-1.56%</a:t>
                       </a:r>
                     </a:p>
                   </a:txBody>
@@ -3656,11 +3679,11 @@
                       <a:r>
                         <a:rPr sz="1000" b="0">
                           <a:solidFill>
-                            <a:srgbClr val="B3261E"/>
-                          </a:solidFill>
-                          <a:latin typeface="Calibri"/>
-                        </a:rPr>
-                        <a:t>-1.98%</a:t>
+                            <a:srgbClr val="0B7A3B"/>
+                          </a:solidFill>
+                          <a:latin typeface="Calibri"/>
+                        </a:rPr>
+                        <a:t>+0.13%</a:t>
                       </a:r>
                     </a:p>
                   </a:txBody>
@@ -3679,11 +3702,11 @@
                       <a:r>
                         <a:rPr sz="1000" b="0">
                           <a:solidFill>
-                            <a:srgbClr val="B3261E"/>
-                          </a:solidFill>
-                          <a:latin typeface="Calibri"/>
-                        </a:rPr>
-                        <a:t>-1.03%</a:t>
+                            <a:srgbClr val="1F2A37"/>
+                          </a:solidFill>
+                          <a:latin typeface="Calibri"/>
+                        </a:rPr>
+                        <a:t>-28.4%</a:t>
                       </a:r>
                     </a:p>
                   </a:txBody>
@@ -3706,7 +3729,7 @@
                           </a:solidFill>
                           <a:latin typeface="Calibri"/>
                         </a:rPr>
-                        <a:t>-29.0%</a:t>
+                        <a:t>22%</a:t>
                       </a:r>
                     </a:p>
                   </a:txBody>
@@ -3729,30 +3752,7 @@
                           </a:solidFill>
                           <a:latin typeface="Calibri"/>
                         </a:rPr>
-                        <a:t>22%</a:t>
-                      </a:r>
-                    </a:p>
-                  </a:txBody>
-                  <a:tcPr>
-                    <a:solidFill>
-                      <a:srgbClr val="FFFFFF"/>
-                    </a:solidFill>
-                  </a:tcPr>
-                </a:tc>
-                <a:tc>
-                  <a:txBody>
-                    <a:bodyPr/>
-                    <a:lstStyle/>
-                    <a:p>
-                      <a:pPr algn="r"/>
-                      <a:r>
-                        <a:rPr sz="1000" b="0">
-                          <a:solidFill>
-                            <a:srgbClr val="1F2A37"/>
-                          </a:solidFill>
-                          <a:latin typeface="Calibri"/>
-                        </a:rPr>
-                        <a:t>15.6</a:t>
+                        <a:t>15.4</a:t>
                       </a:r>
                     </a:p>
                   </a:txBody>
@@ -3800,7 +3800,7 @@
                           </a:solidFill>
                           <a:latin typeface="Calibri"/>
                         </a:rPr>
-                        <a:t>1,332</a:t>
+                        <a:t>1,343</a:t>
                       </a:r>
                     </a:p>
                   </a:txBody>
@@ -3823,7 +3823,7 @@
                           </a:solidFill>
                           <a:latin typeface="Calibri"/>
                         </a:rPr>
-                        <a:t>+1.63%</a:t>
+                        <a:t>+0.81%</a:t>
                       </a:r>
                     </a:p>
                   </a:txBody>
@@ -3846,7 +3846,7 @@
                           </a:solidFill>
                           <a:latin typeface="Calibri"/>
                         </a:rPr>
-                        <a:t>+2.30%</a:t>
+                        <a:t>+3.92%</a:t>
                       </a:r>
                     </a:p>
                   </a:txBody>
@@ -3869,7 +3869,7 @@
                           </a:solidFill>
                           <a:latin typeface="Calibri"/>
                         </a:rPr>
-                        <a:t>-6.41%</a:t>
+                        <a:t>-5.93%</a:t>
                       </a:r>
                     </a:p>
                   </a:txBody>
@@ -3892,7 +3892,7 @@
                           </a:solidFill>
                           <a:latin typeface="Calibri"/>
                         </a:rPr>
-                        <a:t>-8.8%</a:t>
+                        <a:t>-8.0%</a:t>
                       </a:r>
                     </a:p>
                   </a:txBody>
@@ -3938,7 +3938,7 @@
                           </a:solidFill>
                           <a:latin typeface="Calibri"/>
                         </a:rPr>
-                        <a:t>17.4</a:t>
+                        <a:t>17.5</a:t>
                       </a:r>
                     </a:p>
                   </a:txBody>
@@ -3986,7 +3986,7 @@
                           </a:solidFill>
                           <a:latin typeface="Calibri"/>
                         </a:rPr>
-                        <a:t>1,020</a:t>
+                        <a:t>1,014</a:t>
                       </a:r>
                     </a:p>
                   </a:txBody>
@@ -4009,7 +4009,7 @@
                           </a:solidFill>
                           <a:latin typeface="Calibri"/>
                         </a:rPr>
-                        <a:t>-1.40%</a:t>
+                        <a:t>-0.65%</a:t>
                       </a:r>
                     </a:p>
                   </a:txBody>
@@ -4028,11 +4028,11 @@
                       <a:r>
                         <a:rPr sz="1000" b="0">
                           <a:solidFill>
-                            <a:srgbClr val="0B7A3B"/>
-                          </a:solidFill>
-                          <a:latin typeface="Calibri"/>
-                        </a:rPr>
-                        <a:t>+1.72%</a:t>
+                            <a:srgbClr val="B3261E"/>
+                          </a:solidFill>
+                          <a:latin typeface="Calibri"/>
+                        </a:rPr>
+                        <a:t>-0.15%</a:t>
                       </a:r>
                     </a:p>
                   </a:txBody>
@@ -4055,7 +4055,7 @@
                           </a:solidFill>
                           <a:latin typeface="Calibri"/>
                         </a:rPr>
-                        <a:t>-9.69%</a:t>
+                        <a:t>-6.77%</a:t>
                       </a:r>
                     </a:p>
                   </a:txBody>
@@ -4078,7 +4078,7 @@
                           </a:solidFill>
                           <a:latin typeface="Calibri"/>
                         </a:rPr>
-                        <a:t>-38.3%</a:t>
+                        <a:t>-38.7%</a:t>
                       </a:r>
                     </a:p>
                   </a:txBody>
@@ -4101,7 +4101,7 @@
                           </a:solidFill>
                           <a:latin typeface="Calibri"/>
                         </a:rPr>
-                        <a:t>30%</a:t>
+                        <a:t>29%</a:t>
                       </a:r>
                     </a:p>
                   </a:txBody>
@@ -4124,7 +4124,7 @@
                           </a:solidFill>
                           <a:latin typeface="Calibri"/>
                         </a:rPr>
-                        <a:t>13.8</a:t>
+                        <a:t>13.5</a:t>
                       </a:r>
                     </a:p>
                   </a:txBody>
@@ -4172,7 +4172,7 @@
                           </a:solidFill>
                           <a:latin typeface="Calibri"/>
                         </a:rPr>
-                        <a:t>269</a:t>
+                        <a:t>267</a:t>
                       </a:r>
                     </a:p>
                   </a:txBody>
@@ -4191,11 +4191,34 @@
                       <a:r>
                         <a:rPr sz="1000" b="0">
                           <a:solidFill>
+                            <a:srgbClr val="B3261E"/>
+                          </a:solidFill>
+                          <a:latin typeface="Calibri"/>
+                        </a:rPr>
+                        <a:t>-0.82%</a:t>
+                      </a:r>
+                    </a:p>
+                  </a:txBody>
+                  <a:tcPr>
+                    <a:solidFill>
+                      <a:srgbClr val="F3F5F7"/>
+                    </a:solidFill>
+                  </a:tcPr>
+                </a:tc>
+                <a:tc>
+                  <a:txBody>
+                    <a:bodyPr/>
+                    <a:lstStyle/>
+                    <a:p>
+                      <a:pPr algn="r"/>
+                      <a:r>
+                        <a:rPr sz="1000" b="0">
+                          <a:solidFill>
                             <a:srgbClr val="0B7A3B"/>
                           </a:solidFill>
                           <a:latin typeface="Calibri"/>
                         </a:rPr>
-                        <a:t>+5.08%</a:t>
+                        <a:t>+0.60%</a:t>
                       </a:r>
                     </a:p>
                   </a:txBody>
@@ -4218,7 +4241,7 @@
                           </a:solidFill>
                           <a:latin typeface="Calibri"/>
                         </a:rPr>
-                        <a:t>+1.40%</a:t>
+                        <a:t>+1.21%</a:t>
                       </a:r>
                     </a:p>
                   </a:txBody>
@@ -4237,34 +4260,11 @@
                       <a:r>
                         <a:rPr sz="1000" b="0">
                           <a:solidFill>
-                            <a:srgbClr val="0B7A3B"/>
-                          </a:solidFill>
-                          <a:latin typeface="Calibri"/>
-                        </a:rPr>
-                        <a:t>+1.82%</a:t>
-                      </a:r>
-                    </a:p>
-                  </a:txBody>
-                  <a:tcPr>
-                    <a:solidFill>
-                      <a:srgbClr val="F3F5F7"/>
-                    </a:solidFill>
-                  </a:tcPr>
-                </a:tc>
-                <a:tc>
-                  <a:txBody>
-                    <a:bodyPr/>
-                    <a:lstStyle/>
-                    <a:p>
-                      <a:pPr algn="r"/>
-                      <a:r>
-                        <a:rPr sz="1000" b="0">
-                          <a:solidFill>
                             <a:srgbClr val="1F2A37"/>
                           </a:solidFill>
                           <a:latin typeface="Calibri"/>
                         </a:rPr>
-                        <a:t>-33.1%</a:t>
+                        <a:t>-33.7%</a:t>
                       </a:r>
                     </a:p>
                   </a:txBody>
@@ -4358,7 +4358,7 @@
                           </a:solidFill>
                           <a:latin typeface="Calibri"/>
                         </a:rPr>
-                        <a:t>3,750</a:t>
+                        <a:t>3,770</a:t>
                       </a:r>
                     </a:p>
                   </a:txBody>
@@ -4381,7 +4381,7 @@
                           </a:solidFill>
                           <a:latin typeface="Calibri"/>
                         </a:rPr>
-                        <a:t>+1.53%</a:t>
+                        <a:t>+0.53%</a:t>
                       </a:r>
                     </a:p>
                   </a:txBody>
@@ -4400,11 +4400,34 @@
                       <a:r>
                         <a:rPr sz="1000" b="0">
                           <a:solidFill>
+                            <a:srgbClr val="0B7A3B"/>
+                          </a:solidFill>
+                          <a:latin typeface="Calibri"/>
+                        </a:rPr>
+                        <a:t>+0.56%</a:t>
+                      </a:r>
+                    </a:p>
+                  </a:txBody>
+                  <a:tcPr>
+                    <a:solidFill>
+                      <a:srgbClr val="FFFFFF"/>
+                    </a:solidFill>
+                  </a:tcPr>
+                </a:tc>
+                <a:tc>
+                  <a:txBody>
+                    <a:bodyPr/>
+                    <a:lstStyle/>
+                    <a:p>
+                      <a:pPr algn="r"/>
+                      <a:r>
+                        <a:rPr sz="1000" b="0">
+                          <a:solidFill>
                             <a:srgbClr val="B3261E"/>
                           </a:solidFill>
                           <a:latin typeface="Calibri"/>
                         </a:rPr>
-                        <a:t>-0.44%</a:t>
+                        <a:t>-5.73%</a:t>
                       </a:r>
                     </a:p>
                   </a:txBody>
@@ -4423,11 +4446,11 @@
                       <a:r>
                         <a:rPr sz="1000" b="0">
                           <a:solidFill>
-                            <a:srgbClr val="B3261E"/>
-                          </a:solidFill>
-                          <a:latin typeface="Calibri"/>
-                        </a:rPr>
-                        <a:t>-5.40%</a:t>
+                            <a:srgbClr val="1F2A37"/>
+                          </a:solidFill>
+                          <a:latin typeface="Calibri"/>
+                        </a:rPr>
+                        <a:t>-13.8%</a:t>
                       </a:r>
                     </a:p>
                   </a:txBody>
@@ -4450,7 +4473,7 @@
                           </a:solidFill>
                           <a:latin typeface="Calibri"/>
                         </a:rPr>
-                        <a:t>-14.3%</a:t>
+                        <a:t>18%</a:t>
                       </a:r>
                     </a:p>
                   </a:txBody>
@@ -4473,30 +4496,7 @@
                           </a:solidFill>
                           <a:latin typeface="Calibri"/>
                         </a:rPr>
-                        <a:t>18%</a:t>
-                      </a:r>
-                    </a:p>
-                  </a:txBody>
-                  <a:tcPr>
-                    <a:solidFill>
-                      <a:srgbClr val="FFFFFF"/>
-                    </a:solidFill>
-                  </a:tcPr>
-                </a:tc>
-                <a:tc>
-                  <a:txBody>
-                    <a:bodyPr/>
-                    <a:lstStyle/>
-                    <a:p>
-                      <a:pPr algn="r"/>
-                      <a:r>
-                        <a:rPr sz="1000" b="0">
-                          <a:solidFill>
-                            <a:srgbClr val="1F2A37"/>
-                          </a:solidFill>
-                          <a:latin typeface="Calibri"/>
-                        </a:rPr>
-                        <a:t>31.3</a:t>
+                        <a:t>30.7</a:t>
                       </a:r>
                     </a:p>
                   </a:txBody>
@@ -4544,7 +4544,7 @@
                           </a:solidFill>
                           <a:latin typeface="Calibri"/>
                         </a:rPr>
-                        <a:t>1,186</a:t>
+                        <a:t>1,218</a:t>
                       </a:r>
                     </a:p>
                   </a:txBody>
@@ -4567,7 +4567,7 @@
                           </a:solidFill>
                           <a:latin typeface="Calibri"/>
                         </a:rPr>
-                        <a:t>+1.60%</a:t>
+                        <a:t>+2.66%</a:t>
                       </a:r>
                     </a:p>
                   </a:txBody>
@@ -4586,11 +4586,34 @@
                       <a:r>
                         <a:rPr sz="1000" b="0">
                           <a:solidFill>
+                            <a:srgbClr val="0B7A3B"/>
+                          </a:solidFill>
+                          <a:latin typeface="Calibri"/>
+                        </a:rPr>
+                        <a:t>+3.05%</a:t>
+                      </a:r>
+                    </a:p>
+                  </a:txBody>
+                  <a:tcPr>
+                    <a:solidFill>
+                      <a:srgbClr val="F3F5F7"/>
+                    </a:solidFill>
+                  </a:tcPr>
+                </a:tc>
+                <a:tc>
+                  <a:txBody>
+                    <a:bodyPr/>
+                    <a:lstStyle/>
+                    <a:p>
+                      <a:pPr algn="r"/>
+                      <a:r>
+                        <a:rPr sz="1000" b="0">
+                          <a:solidFill>
                             <a:srgbClr val="B3261E"/>
                           </a:solidFill>
                           <a:latin typeface="Calibri"/>
                         </a:rPr>
-                        <a:t>-0.94%</a:t>
+                        <a:t>-6.99%</a:t>
                       </a:r>
                     </a:p>
                   </a:txBody>
@@ -4609,11 +4632,11 @@
                       <a:r>
                         <a:rPr sz="1000" b="0">
                           <a:solidFill>
-                            <a:srgbClr val="B3261E"/>
-                          </a:solidFill>
-                          <a:latin typeface="Calibri"/>
-                        </a:rPr>
-                        <a:t>-10.26%</a:t>
+                            <a:srgbClr val="1F2A37"/>
+                          </a:solidFill>
+                          <a:latin typeface="Calibri"/>
+                        </a:rPr>
+                        <a:t>-23.2%</a:t>
                       </a:r>
                     </a:p>
                   </a:txBody>
@@ -4636,7 +4659,7 @@
                           </a:solidFill>
                           <a:latin typeface="Calibri"/>
                         </a:rPr>
-                        <a:t>-25.1%</a:t>
+                        <a:t>21%</a:t>
                       </a:r>
                     </a:p>
                   </a:txBody>
@@ -4659,30 +4682,7 @@
                           </a:solidFill>
                           <a:latin typeface="Calibri"/>
                         </a:rPr>
-                        <a:t>19%</a:t>
-                      </a:r>
-                    </a:p>
-                  </a:txBody>
-                  <a:tcPr>
-                    <a:solidFill>
-                      <a:srgbClr val="F3F5F7"/>
-                    </a:solidFill>
-                  </a:tcPr>
-                </a:tc>
-                <a:tc>
-                  <a:txBody>
-                    <a:bodyPr/>
-                    <a:lstStyle/>
-                    <a:p>
-                      <a:pPr algn="r"/>
-                      <a:r>
-                        <a:rPr sz="1000" b="0">
-                          <a:solidFill>
-                            <a:srgbClr val="1F2A37"/>
-                          </a:solidFill>
-                          <a:latin typeface="Calibri"/>
-                        </a:rPr>
-                        <a:t>22.1</a:t>
+                        <a:t>21.9</a:t>
                       </a:r>
                     </a:p>
                   </a:txBody>
@@ -4730,7 +4730,7 @@
                           </a:solidFill>
                           <a:latin typeface="Calibri"/>
                         </a:rPr>
-                        <a:t>2,114</a:t>
+                        <a:t>2,100</a:t>
                       </a:r>
                     </a:p>
                   </a:txBody>
@@ -4749,11 +4749,34 @@
                       <a:r>
                         <a:rPr sz="1000" b="0">
                           <a:solidFill>
+                            <a:srgbClr val="B3261E"/>
+                          </a:solidFill>
+                          <a:latin typeface="Calibri"/>
+                        </a:rPr>
+                        <a:t>-0.68%</a:t>
+                      </a:r>
+                    </a:p>
+                  </a:txBody>
+                  <a:tcPr>
+                    <a:solidFill>
+                      <a:srgbClr val="FFFFFF"/>
+                    </a:solidFill>
+                  </a:tcPr>
+                </a:tc>
+                <a:tc>
+                  <a:txBody>
+                    <a:bodyPr/>
+                    <a:lstStyle/>
+                    <a:p>
+                      <a:pPr algn="r"/>
+                      <a:r>
+                        <a:rPr sz="1000" b="0">
+                          <a:solidFill>
                             <a:srgbClr val="0B7A3B"/>
                           </a:solidFill>
                           <a:latin typeface="Calibri"/>
                         </a:rPr>
-                        <a:t>+1.90%</a:t>
+                        <a:t>+3.33%</a:t>
                       </a:r>
                     </a:p>
                   </a:txBody>
@@ -4772,11 +4795,11 @@
                       <a:r>
                         <a:rPr sz="1000" b="0">
                           <a:solidFill>
-                            <a:srgbClr val="0B7A3B"/>
-                          </a:solidFill>
-                          <a:latin typeface="Calibri"/>
-                        </a:rPr>
-                        <a:t>+2.11%</a:t>
+                            <a:srgbClr val="B3261E"/>
+                          </a:solidFill>
+                          <a:latin typeface="Calibri"/>
+                        </a:rPr>
+                        <a:t>-7.49%</a:t>
                       </a:r>
                     </a:p>
                   </a:txBody>
@@ -4795,11 +4818,11 @@
                       <a:r>
                         <a:rPr sz="1000" b="0">
                           <a:solidFill>
-                            <a:srgbClr val="B3261E"/>
-                          </a:solidFill>
-                          <a:latin typeface="Calibri"/>
-                        </a:rPr>
-                        <a:t>-8.23%</a:t>
+                            <a:srgbClr val="1F2A37"/>
+                          </a:solidFill>
+                          <a:latin typeface="Calibri"/>
+                        </a:rPr>
+                        <a:t>-34.5%</a:t>
                       </a:r>
                     </a:p>
                   </a:txBody>
@@ -4822,7 +4845,7 @@
                           </a:solidFill>
                           <a:latin typeface="Calibri"/>
                         </a:rPr>
-                        <a:t>-34.0%</a:t>
+                        <a:t>26%</a:t>
                       </a:r>
                     </a:p>
                   </a:txBody>
@@ -4845,30 +4868,7 @@
                           </a:solidFill>
                           <a:latin typeface="Calibri"/>
                         </a:rPr>
-                        <a:t>26%</a:t>
-                      </a:r>
-                    </a:p>
-                  </a:txBody>
-                  <a:tcPr>
-                    <a:solidFill>
-                      <a:srgbClr val="FFFFFF"/>
-                    </a:solidFill>
-                  </a:tcPr>
-                </a:tc>
-                <a:tc>
-                  <a:txBody>
-                    <a:bodyPr/>
-                    <a:lstStyle/>
-                    <a:p>
-                      <a:pPr algn="r"/>
-                      <a:r>
-                        <a:rPr sz="1000" b="0">
-                          <a:solidFill>
-                            <a:srgbClr val="1F2A37"/>
-                          </a:solidFill>
-                          <a:latin typeface="Calibri"/>
-                        </a:rPr>
-                        <a:t>15.3</a:t>
+                        <a:t>15.1</a:t>
                       </a:r>
                     </a:p>
                   </a:txBody>
@@ -4952,7 +4952,7 @@
                 </a:solidFill>
                 <a:latin typeface="Calibri"/>
               </a:rPr>
-              <a:t>Breadth was risk-on: 6 of 8 names advanced on the day.</a:t>
+              <a:t>Breadth was risk-on: 5 of 8 names advanced on the day.</a:t>
             </a:r>
           </a:p>
           <a:p>
@@ -4968,7 +4968,7 @@
                 </a:solidFill>
                 <a:latin typeface="Calibri"/>
               </a:rPr>
-              <a:t>•  Best performer on the day: ITC.NS at +5.08%.</a:t>
+              <a:t>•  Best performer on the day: RELIANCE.NS at +2.66%.</a:t>
             </a:r>
           </a:p>
           <a:p>
@@ -4984,7 +4984,7 @@
                 </a:solidFill>
                 <a:latin typeface="Calibri"/>
               </a:rPr>
-              <a:t>•  Weakest on the day: HDFCBANK.NS at -2.27%.</a:t>
+              <a:t>•  Weakest on the day: ITC.NS at -0.82%.</a:t>
             </a:r>
           </a:p>
           <a:p>
@@ -5000,7 +5000,7 @@
                 </a:solidFill>
                 <a:latin typeface="Calibri"/>
               </a:rPr>
-              <a:t>•  Median one-day move across the watchlist: +1.62%.</a:t>
+              <a:t>•  Median one-day move across the watchlist: +0.67%.</a:t>
             </a:r>
           </a:p>
           <a:p>
@@ -5016,7 +5016,7 @@
                 </a:solidFill>
                 <a:latin typeface="Calibri"/>
               </a:rPr>
-              <a:t>•  INFY.NS sits furthest below its 52-week high, at -38.3%.</a:t>
+              <a:t>•  INFY.NS sits furthest below its 52-week high, at -38.7%.</a:t>
             </a:r>
           </a:p>
           <a:p>
@@ -5048,7 +5048,7 @@
                 </a:solidFill>
                 <a:latin typeface="Calibri"/>
               </a:rPr>
-              <a:t>•  Highest 30-day realised volatility: INFY.NS at 29.5% annualised.</a:t>
+              <a:t>•  Highest 30-day realised volatility: INFY.NS at 29.2% annualised.</a:t>
             </a:r>
           </a:p>
           <a:p>
@@ -5064,7 +5064,7 @@
                 </a:solidFill>
                 <a:latin typeface="Calibri"/>
               </a:rPr>
-              <a:t>•  60 headlines collected, 3 tagged to a watchlist name by substring match (unverified).</a:t>
+              <a:t>•  60 headlines collected, 5 tagged to a watchlist name by substring match (unverified).</a:t>
             </a:r>
           </a:p>
           <a:p>

--- a/public/deskbrief.pptx
+++ b/public/deskbrief.pptx
@@ -3128,7 +3128,7 @@
                 </a:solidFill>
                 <a:latin typeface="Calibri"/>
               </a:rPr>
-              <a:t>8 names  |  generated 07 Oct 2026 19:01  |  source: Yahoo Finance via yfinance, Indian financial RSS</a:t>
+              <a:t>8 names  |  generated 08 Oct 2026 18:56  |  source: Yahoo Finance via yfinance, Indian financial RSS</a:t>
             </a:r>
           </a:p>
         </p:txBody>
@@ -3428,7 +3428,7 @@
                           </a:solidFill>
                           <a:latin typeface="Calibri"/>
                         </a:rPr>
-                        <a:t>1,810</a:t>
+                        <a:t>1,834</a:t>
                       </a:r>
                     </a:p>
                   </a:txBody>
@@ -3451,7 +3451,7 @@
                           </a:solidFill>
                           <a:latin typeface="Calibri"/>
                         </a:rPr>
-                        <a:t>+1.72%</a:t>
+                        <a:t>+1.29%</a:t>
                       </a:r>
                     </a:p>
                   </a:txBody>
@@ -3474,7 +3474,7 @@
                           </a:solidFill>
                           <a:latin typeface="Calibri"/>
                         </a:rPr>
-                        <a:t>+2.22%</a:t>
+                        <a:t>+4.38%</a:t>
                       </a:r>
                     </a:p>
                   </a:txBody>
@@ -3497,7 +3497,7 @@
                           </a:solidFill>
                           <a:latin typeface="Calibri"/>
                         </a:rPr>
-                        <a:t>-2.35%</a:t>
+                        <a:t>-0.55%</a:t>
                       </a:r>
                     </a:p>
                   </a:txBody>
@@ -3520,7 +3520,7 @@
                           </a:solidFill>
                           <a:latin typeface="Calibri"/>
                         </a:rPr>
-                        <a:t>-15.2%</a:t>
+                        <a:t>-14.1%</a:t>
                       </a:r>
                     </a:p>
                   </a:txBody>
@@ -3566,7 +3566,7 @@
                           </a:solidFill>
                           <a:latin typeface="Calibri"/>
                         </a:rPr>
-                        <a:t>38.3</a:t>
+                        <a:t>37.7</a:t>
                       </a:r>
                     </a:p>
                   </a:txBody>
@@ -3614,7 +3614,7 @@
                           </a:solidFill>
                           <a:latin typeface="Calibri"/>
                         </a:rPr>
-                        <a:t>711</a:t>
+                        <a:t>703</a:t>
                       </a:r>
                     </a:p>
                   </a:txBody>
@@ -3633,11 +3633,11 @@
                       <a:r>
                         <a:rPr sz="1000" b="0">
                           <a:solidFill>
-                            <a:srgbClr val="0B7A3B"/>
-                          </a:solidFill>
-                          <a:latin typeface="Calibri"/>
-                        </a:rPr>
-                        <a:t>+0.94%</a:t>
+                            <a:srgbClr val="B3261E"/>
+                          </a:solidFill>
+                          <a:latin typeface="Calibri"/>
+                        </a:rPr>
+                        <a:t>-1.22%</a:t>
                       </a:r>
                     </a:p>
                   </a:txBody>
@@ -3660,7 +3660,7 @@
                           </a:solidFill>
                           <a:latin typeface="Calibri"/>
                         </a:rPr>
-                        <a:t>-1.56%</a:t>
+                        <a:t>-0.84%</a:t>
                       </a:r>
                     </a:p>
                   </a:txBody>
@@ -3679,11 +3679,11 @@
                       <a:r>
                         <a:rPr sz="1000" b="0">
                           <a:solidFill>
-                            <a:srgbClr val="0B7A3B"/>
-                          </a:solidFill>
-                          <a:latin typeface="Calibri"/>
-                        </a:rPr>
-                        <a:t>+0.13%</a:t>
+                            <a:srgbClr val="B3261E"/>
+                          </a:solidFill>
+                          <a:latin typeface="Calibri"/>
+                        </a:rPr>
+                        <a:t>-0.04%</a:t>
                       </a:r>
                     </a:p>
                   </a:txBody>
@@ -3706,7 +3706,7 @@
                           </a:solidFill>
                           <a:latin typeface="Calibri"/>
                         </a:rPr>
-                        <a:t>-28.4%</a:t>
+                        <a:t>-29.2%</a:t>
                       </a:r>
                     </a:p>
                   </a:txBody>
@@ -3752,7 +3752,7 @@
                           </a:solidFill>
                           <a:latin typeface="Calibri"/>
                         </a:rPr>
-                        <a:t>15.4</a:t>
+                        <a:t>15.1</a:t>
                       </a:r>
                     </a:p>
                   </a:txBody>
@@ -3800,7 +3800,7 @@
                           </a:solidFill>
                           <a:latin typeface="Calibri"/>
                         </a:rPr>
-                        <a:t>1,343</a:t>
+                        <a:t>1,358</a:t>
                       </a:r>
                     </a:p>
                   </a:txBody>
@@ -3823,7 +3823,7 @@
                           </a:solidFill>
                           <a:latin typeface="Calibri"/>
                         </a:rPr>
-                        <a:t>+0.81%</a:t>
+                        <a:t>+1.09%</a:t>
                       </a:r>
                     </a:p>
                   </a:txBody>
@@ -3846,7 +3846,7 @@
                           </a:solidFill>
                           <a:latin typeface="Calibri"/>
                         </a:rPr>
-                        <a:t>+3.92%</a:t>
+                        <a:t>+2.71%</a:t>
                       </a:r>
                     </a:p>
                   </a:txBody>
@@ -3869,7 +3869,7 @@
                           </a:solidFill>
                           <a:latin typeface="Calibri"/>
                         </a:rPr>
-                        <a:t>-5.93%</a:t>
+                        <a:t>-2.99%</a:t>
                       </a:r>
                     </a:p>
                   </a:txBody>
@@ -3892,7 +3892,7 @@
                           </a:solidFill>
                           <a:latin typeface="Calibri"/>
                         </a:rPr>
-                        <a:t>-8.0%</a:t>
+                        <a:t>-7.0%</a:t>
                       </a:r>
                     </a:p>
                   </a:txBody>
@@ -3938,7 +3938,7 @@
                           </a:solidFill>
                           <a:latin typeface="Calibri"/>
                         </a:rPr>
-                        <a:t>17.5</a:t>
+                        <a:t>17.4</a:t>
                       </a:r>
                     </a:p>
                   </a:txBody>
@@ -3986,7 +3986,7 @@
                           </a:solidFill>
                           <a:latin typeface="Calibri"/>
                         </a:rPr>
-                        <a:t>1,014</a:t>
+                        <a:t>992</a:t>
                       </a:r>
                     </a:p>
                   </a:txBody>
@@ -4009,7 +4009,7 @@
                           </a:solidFill>
                           <a:latin typeface="Calibri"/>
                         </a:rPr>
-                        <a:t>-0.65%</a:t>
+                        <a:t>-2.16%</a:t>
                       </a:r>
                     </a:p>
                   </a:txBody>
@@ -4032,7 +4032,7 @@
                           </a:solidFill>
                           <a:latin typeface="Calibri"/>
                         </a:rPr>
-                        <a:t>-0.15%</a:t>
+                        <a:t>-0.21%</a:t>
                       </a:r>
                     </a:p>
                   </a:txBody>
@@ -4055,7 +4055,7 @@
                           </a:solidFill>
                           <a:latin typeface="Calibri"/>
                         </a:rPr>
-                        <a:t>-6.77%</a:t>
+                        <a:t>-8.32%</a:t>
                       </a:r>
                     </a:p>
                   </a:txBody>
@@ -4078,7 +4078,7 @@
                           </a:solidFill>
                           <a:latin typeface="Calibri"/>
                         </a:rPr>
-                        <a:t>-38.7%</a:t>
+                        <a:t>-40.0%</a:t>
                       </a:r>
                     </a:p>
                   </a:txBody>
@@ -4124,7 +4124,7 @@
                           </a:solidFill>
                           <a:latin typeface="Calibri"/>
                         </a:rPr>
-                        <a:t>13.5</a:t>
+                        <a:t>13.6</a:t>
                       </a:r>
                     </a:p>
                   </a:txBody>
@@ -4172,7 +4172,7 @@
                           </a:solidFill>
                           <a:latin typeface="Calibri"/>
                         </a:rPr>
-                        <a:t>267</a:t>
+                        <a:t>266</a:t>
                       </a:r>
                     </a:p>
                   </a:txBody>
@@ -4195,7 +4195,7 @@
                           </a:solidFill>
                           <a:latin typeface="Calibri"/>
                         </a:rPr>
-                        <a:t>-0.82%</a:t>
+                        <a:t>-0.37%</a:t>
                       </a:r>
                     </a:p>
                   </a:txBody>
@@ -4218,7 +4218,7 @@
                           </a:solidFill>
                           <a:latin typeface="Calibri"/>
                         </a:rPr>
-                        <a:t>+0.60%</a:t>
+                        <a:t>+1.12%</a:t>
                       </a:r>
                     </a:p>
                   </a:txBody>
@@ -4241,7 +4241,7 @@
                           </a:solidFill>
                           <a:latin typeface="Calibri"/>
                         </a:rPr>
-                        <a:t>+1.21%</a:t>
+                        <a:t>+0.83%</a:t>
                       </a:r>
                     </a:p>
                   </a:txBody>
@@ -4264,7 +4264,7 @@
                           </a:solidFill>
                           <a:latin typeface="Calibri"/>
                         </a:rPr>
-                        <a:t>-33.7%</a:t>
+                        <a:t>-33.9%</a:t>
                       </a:r>
                     </a:p>
                   </a:txBody>
@@ -4310,7 +4310,7 @@
                           </a:solidFill>
                           <a:latin typeface="Calibri"/>
                         </a:rPr>
-                        <a:t>16.8</a:t>
+                        <a:t>16.1</a:t>
                       </a:r>
                     </a:p>
                   </a:txBody>
@@ -4358,7 +4358,7 @@
                           </a:solidFill>
                           <a:latin typeface="Calibri"/>
                         </a:rPr>
-                        <a:t>3,770</a:t>
+                        <a:t>3,702</a:t>
                       </a:r>
                     </a:p>
                   </a:txBody>
@@ -4377,11 +4377,11 @@
                       <a:r>
                         <a:rPr sz="1000" b="0">
                           <a:solidFill>
-                            <a:srgbClr val="0B7A3B"/>
-                          </a:solidFill>
-                          <a:latin typeface="Calibri"/>
-                        </a:rPr>
-                        <a:t>+0.53%</a:t>
+                            <a:srgbClr val="B3261E"/>
+                          </a:solidFill>
+                          <a:latin typeface="Calibri"/>
+                        </a:rPr>
+                        <a:t>-1.82%</a:t>
                       </a:r>
                     </a:p>
                   </a:txBody>
@@ -4400,11 +4400,11 @@
                       <a:r>
                         <a:rPr sz="1000" b="0">
                           <a:solidFill>
-                            <a:srgbClr val="0B7A3B"/>
-                          </a:solidFill>
-                          <a:latin typeface="Calibri"/>
-                        </a:rPr>
-                        <a:t>+0.56%</a:t>
+                            <a:srgbClr val="B3261E"/>
+                          </a:solidFill>
+                          <a:latin typeface="Calibri"/>
+                        </a:rPr>
+                        <a:t>-1.56%</a:t>
                       </a:r>
                     </a:p>
                   </a:txBody>
@@ -4427,7 +4427,7 @@
                           </a:solidFill>
                           <a:latin typeface="Calibri"/>
                         </a:rPr>
-                        <a:t>-5.73%</a:t>
+                        <a:t>-6.20%</a:t>
                       </a:r>
                     </a:p>
                   </a:txBody>
@@ -4450,7 +4450,7 @@
                           </a:solidFill>
                           <a:latin typeface="Calibri"/>
                         </a:rPr>
-                        <a:t>-13.8%</a:t>
+                        <a:t>-15.4%</a:t>
                       </a:r>
                     </a:p>
                   </a:txBody>
@@ -4496,7 +4496,7 @@
                           </a:solidFill>
                           <a:latin typeface="Calibri"/>
                         </a:rPr>
-                        <a:t>30.7</a:t>
+                        <a:t>30.1</a:t>
                       </a:r>
                     </a:p>
                   </a:txBody>
@@ -4544,7 +4544,7 @@
                           </a:solidFill>
                           <a:latin typeface="Calibri"/>
                         </a:rPr>
-                        <a:t>1,218</a:t>
+                        <a:t>1,208</a:t>
                       </a:r>
                     </a:p>
                   </a:txBody>
@@ -4563,11 +4563,34 @@
                       <a:r>
                         <a:rPr sz="1000" b="0">
                           <a:solidFill>
+                            <a:srgbClr val="B3261E"/>
+                          </a:solidFill>
+                          <a:latin typeface="Calibri"/>
+                        </a:rPr>
+                        <a:t>-0.85%</a:t>
+                      </a:r>
+                    </a:p>
+                  </a:txBody>
+                  <a:tcPr>
+                    <a:solidFill>
+                      <a:srgbClr val="F3F5F7"/>
+                    </a:solidFill>
+                  </a:tcPr>
+                </a:tc>
+                <a:tc>
+                  <a:txBody>
+                    <a:bodyPr/>
+                    <a:lstStyle/>
+                    <a:p>
+                      <a:pPr algn="r"/>
+                      <a:r>
+                        <a:rPr sz="1000" b="0">
+                          <a:solidFill>
                             <a:srgbClr val="0B7A3B"/>
                           </a:solidFill>
                           <a:latin typeface="Calibri"/>
                         </a:rPr>
-                        <a:t>+2.66%</a:t>
+                        <a:t>+1.74%</a:t>
                       </a:r>
                     </a:p>
                   </a:txBody>
@@ -4586,11 +4609,11 @@
                       <a:r>
                         <a:rPr sz="1000" b="0">
                           <a:solidFill>
-                            <a:srgbClr val="0B7A3B"/>
-                          </a:solidFill>
-                          <a:latin typeface="Calibri"/>
-                        </a:rPr>
-                        <a:t>+3.05%</a:t>
+                            <a:srgbClr val="B3261E"/>
+                          </a:solidFill>
+                          <a:latin typeface="Calibri"/>
+                        </a:rPr>
+                        <a:t>-6.73%</a:t>
                       </a:r>
                     </a:p>
                   </a:txBody>
@@ -4609,11 +4632,11 @@
                       <a:r>
                         <a:rPr sz="1000" b="0">
                           <a:solidFill>
-                            <a:srgbClr val="B3261E"/>
-                          </a:solidFill>
-                          <a:latin typeface="Calibri"/>
-                        </a:rPr>
-                        <a:t>-6.99%</a:t>
+                            <a:srgbClr val="1F2A37"/>
+                          </a:solidFill>
+                          <a:latin typeface="Calibri"/>
+                        </a:rPr>
+                        <a:t>-23.8%</a:t>
                       </a:r>
                     </a:p>
                   </a:txBody>
@@ -4636,7 +4659,7 @@
                           </a:solidFill>
                           <a:latin typeface="Calibri"/>
                         </a:rPr>
-                        <a:t>-23.2%</a:t>
+                        <a:t>21%</a:t>
                       </a:r>
                     </a:p>
                   </a:txBody>
@@ -4659,30 +4682,7 @@
                           </a:solidFill>
                           <a:latin typeface="Calibri"/>
                         </a:rPr>
-                        <a:t>21%</a:t>
-                      </a:r>
-                    </a:p>
-                  </a:txBody>
-                  <a:tcPr>
-                    <a:solidFill>
-                      <a:srgbClr val="F3F5F7"/>
-                    </a:solidFill>
-                  </a:tcPr>
-                </a:tc>
-                <a:tc>
-                  <a:txBody>
-                    <a:bodyPr/>
-                    <a:lstStyle/>
-                    <a:p>
-                      <a:pPr algn="r"/>
-                      <a:r>
-                        <a:rPr sz="1000" b="0">
-                          <a:solidFill>
-                            <a:srgbClr val="1F2A37"/>
-                          </a:solidFill>
-                          <a:latin typeface="Calibri"/>
-                        </a:rPr>
-                        <a:t>21.9</a:t>
+                        <a:t>21.3</a:t>
                       </a:r>
                     </a:p>
                   </a:txBody>
@@ -4730,7 +4730,7 @@
                           </a:solidFill>
                           <a:latin typeface="Calibri"/>
                         </a:rPr>
-                        <a:t>2,100</a:t>
+                        <a:t>2,080</a:t>
                       </a:r>
                     </a:p>
                   </a:txBody>
@@ -4753,7 +4753,7 @@
                           </a:solidFill>
                           <a:latin typeface="Calibri"/>
                         </a:rPr>
-                        <a:t>-0.68%</a:t>
+                        <a:t>-0.94%</a:t>
                       </a:r>
                     </a:p>
                   </a:txBody>
@@ -4776,7 +4776,7 @@
                           </a:solidFill>
                           <a:latin typeface="Calibri"/>
                         </a:rPr>
-                        <a:t>+3.33%</a:t>
+                        <a:t>+1.45%</a:t>
                       </a:r>
                     </a:p>
                   </a:txBody>
@@ -4799,7 +4799,7 @@
                           </a:solidFill>
                           <a:latin typeface="Calibri"/>
                         </a:rPr>
-                        <a:t>-7.49%</a:t>
+                        <a:t>-7.77%</a:t>
                       </a:r>
                     </a:p>
                   </a:txBody>
@@ -4822,7 +4822,7 @@
                           </a:solidFill>
                           <a:latin typeface="Calibri"/>
                         </a:rPr>
-                        <a:t>-34.5%</a:t>
+                        <a:t>-35.1%</a:t>
                       </a:r>
                     </a:p>
                   </a:txBody>
@@ -4952,7 +4952,7 @@
                 </a:solidFill>
                 <a:latin typeface="Calibri"/>
               </a:rPr>
-              <a:t>Breadth was risk-on: 5 of 8 names advanced on the day.</a:t>
+              <a:t>Breadth was risk-off: 2 of 8 names advanced on the day.</a:t>
             </a:r>
           </a:p>
           <a:p>
@@ -4968,7 +4968,7 @@
                 </a:solidFill>
                 <a:latin typeface="Calibri"/>
               </a:rPr>
-              <a:t>•  Best performer on the day: RELIANCE.NS at +2.66%.</a:t>
+              <a:t>•  Best performer on the day: BHARTIARTL.NS at +1.29%.</a:t>
             </a:r>
           </a:p>
           <a:p>
@@ -4984,7 +4984,7 @@
                 </a:solidFill>
                 <a:latin typeface="Calibri"/>
               </a:rPr>
-              <a:t>•  Weakest on the day: ITC.NS at -0.82%.</a:t>
+              <a:t>•  Weakest on the day: INFY.NS at -2.16%.</a:t>
             </a:r>
           </a:p>
           <a:p>
@@ -5000,7 +5000,7 @@
                 </a:solidFill>
                 <a:latin typeface="Calibri"/>
               </a:rPr>
-              <a:t>•  Median one-day move across the watchlist: +0.67%.</a:t>
+              <a:t>•  Median one-day move across the watchlist: -0.89%.</a:t>
             </a:r>
           </a:p>
           <a:p>
@@ -5016,7 +5016,7 @@
                 </a:solidFill>
                 <a:latin typeface="Calibri"/>
               </a:rPr>
-              <a:t>•  INFY.NS sits furthest below its 52-week high, at -38.7%.</a:t>
+              <a:t>•  INFY.NS sits furthest below its 52-week high, at -40.0%.</a:t>
             </a:r>
           </a:p>
           <a:p>
@@ -5064,7 +5064,7 @@
                 </a:solidFill>
                 <a:latin typeface="Calibri"/>
               </a:rPr>
-              <a:t>•  60 headlines collected, 5 tagged to a watchlist name by substring match (unverified).</a:t>
+              <a:t>•  60 headlines collected, 7 tagged to a watchlist name by substring match (unverified).</a:t>
             </a:r>
           </a:p>
           <a:p>

--- a/public/deskbrief.pptx
+++ b/public/deskbrief.pptx
@@ -3128,7 +3128,7 @@
                 </a:solidFill>
                 <a:latin typeface="Calibri"/>
               </a:rPr>
-              <a:t>8 names  |  generated 08 Oct 2026 18:56  |  source: Yahoo Finance via yfinance, Indian financial RSS</a:t>
+              <a:t>8 names  |  generated 09 Oct 2026 18:27  |  source: Yahoo Finance via yfinance, Indian financial RSS</a:t>
             </a:r>
           </a:p>
         </p:txBody>
@@ -3428,7 +3428,7 @@
                           </a:solidFill>
                           <a:latin typeface="Calibri"/>
                         </a:rPr>
-                        <a:t>1,834</a:t>
+                        <a:t>1,805</a:t>
                       </a:r>
                     </a:p>
                   </a:txBody>
@@ -3451,7 +3451,7 @@
                           </a:solidFill>
                           <a:latin typeface="Calibri"/>
                         </a:rPr>
-                        <a:t>+1.29%</a:t>
+                        <a:t>+0.03%</a:t>
                       </a:r>
                     </a:p>
                   </a:txBody>
@@ -3474,7 +3474,7 @@
                           </a:solidFill>
                           <a:latin typeface="Calibri"/>
                         </a:rPr>
-                        <a:t>+4.38%</a:t>
+                        <a:t>+3.68%</a:t>
                       </a:r>
                     </a:p>
                   </a:txBody>
@@ -3497,7 +3497,7 @@
                           </a:solidFill>
                           <a:latin typeface="Calibri"/>
                         </a:rPr>
-                        <a:t>-0.55%</a:t>
+                        <a:t>-1.84%</a:t>
                       </a:r>
                     </a:p>
                   </a:txBody>
@@ -3520,7 +3520,7 @@
                           </a:solidFill>
                           <a:latin typeface="Calibri"/>
                         </a:rPr>
-                        <a:t>-14.1%</a:t>
+                        <a:t>-15.5%</a:t>
                       </a:r>
                     </a:p>
                   </a:txBody>
@@ -3614,7 +3614,7 @@
                           </a:solidFill>
                           <a:latin typeface="Calibri"/>
                         </a:rPr>
-                        <a:t>703</a:t>
+                        <a:t>707</a:t>
                       </a:r>
                     </a:p>
                   </a:txBody>
@@ -3633,11 +3633,34 @@
                       <a:r>
                         <a:rPr sz="1000" b="0">
                           <a:solidFill>
+                            <a:srgbClr val="0B7A3B"/>
+                          </a:solidFill>
+                          <a:latin typeface="Calibri"/>
+                        </a:rPr>
+                        <a:t>+2.17%</a:t>
+                      </a:r>
+                    </a:p>
+                  </a:txBody>
+                  <a:tcPr>
+                    <a:solidFill>
+                      <a:srgbClr val="FFFFFF"/>
+                    </a:solidFill>
+                  </a:tcPr>
+                </a:tc>
+                <a:tc>
+                  <a:txBody>
+                    <a:bodyPr/>
+                    <a:lstStyle/>
+                    <a:p>
+                      <a:pPr algn="r"/>
+                      <a:r>
+                        <a:rPr sz="1000" b="0">
+                          <a:solidFill>
                             <a:srgbClr val="B3261E"/>
                           </a:solidFill>
                           <a:latin typeface="Calibri"/>
                         </a:rPr>
-                        <a:t>-1.22%</a:t>
+                        <a:t>-1.93%</a:t>
                       </a:r>
                     </a:p>
                   </a:txBody>
@@ -3656,11 +3679,11 @@
                       <a:r>
                         <a:rPr sz="1000" b="0">
                           <a:solidFill>
-                            <a:srgbClr val="B3261E"/>
-                          </a:solidFill>
-                          <a:latin typeface="Calibri"/>
-                        </a:rPr>
-                        <a:t>-0.84%</a:t>
+                            <a:srgbClr val="0B7A3B"/>
+                          </a:solidFill>
+                          <a:latin typeface="Calibri"/>
+                        </a:rPr>
+                        <a:t>+1.94%</a:t>
                       </a:r>
                     </a:p>
                   </a:txBody>
@@ -3679,11 +3702,11 @@
                       <a:r>
                         <a:rPr sz="1000" b="0">
                           <a:solidFill>
-                            <a:srgbClr val="B3261E"/>
-                          </a:solidFill>
-                          <a:latin typeface="Calibri"/>
-                        </a:rPr>
-                        <a:t>-0.04%</a:t>
+                            <a:srgbClr val="1F2A37"/>
+                          </a:solidFill>
+                          <a:latin typeface="Calibri"/>
+                        </a:rPr>
+                        <a:t>-28.8%</a:t>
                       </a:r>
                     </a:p>
                   </a:txBody>
@@ -3706,7 +3729,7 @@
                           </a:solidFill>
                           <a:latin typeface="Calibri"/>
                         </a:rPr>
-                        <a:t>-29.2%</a:t>
+                        <a:t>22%</a:t>
                       </a:r>
                     </a:p>
                   </a:txBody>
@@ -3729,30 +3752,7 @@
                           </a:solidFill>
                           <a:latin typeface="Calibri"/>
                         </a:rPr>
-                        <a:t>22%</a:t>
-                      </a:r>
-                    </a:p>
-                  </a:txBody>
-                  <a:tcPr>
-                    <a:solidFill>
-                      <a:srgbClr val="FFFFFF"/>
-                    </a:solidFill>
-                  </a:tcPr>
-                </a:tc>
-                <a:tc>
-                  <a:txBody>
-                    <a:bodyPr/>
-                    <a:lstStyle/>
-                    <a:p>
-                      <a:pPr algn="r"/>
-                      <a:r>
-                        <a:rPr sz="1000" b="0">
-                          <a:solidFill>
-                            <a:srgbClr val="1F2A37"/>
-                          </a:solidFill>
-                          <a:latin typeface="Calibri"/>
-                        </a:rPr>
-                        <a:t>15.1</a:t>
+                        <a:t>15.5</a:t>
                       </a:r>
                     </a:p>
                   </a:txBody>
@@ -3800,7 +3800,7 @@
                           </a:solidFill>
                           <a:latin typeface="Calibri"/>
                         </a:rPr>
-                        <a:t>1,358</a:t>
+                        <a:t>1,355</a:t>
                       </a:r>
                     </a:p>
                   </a:txBody>
@@ -3823,7 +3823,7 @@
                           </a:solidFill>
                           <a:latin typeface="Calibri"/>
                         </a:rPr>
-                        <a:t>+1.09%</a:t>
+                        <a:t>+0.44%</a:t>
                       </a:r>
                     </a:p>
                   </a:txBody>
@@ -3846,7 +3846,7 @@
                           </a:solidFill>
                           <a:latin typeface="Calibri"/>
                         </a:rPr>
-                        <a:t>+2.71%</a:t>
+                        <a:t>+3.39%</a:t>
                       </a:r>
                     </a:p>
                   </a:txBody>
@@ -3869,7 +3869,7 @@
                           </a:solidFill>
                           <a:latin typeface="Calibri"/>
                         </a:rPr>
-                        <a:t>-2.99%</a:t>
+                        <a:t>-2.13%</a:t>
                       </a:r>
                     </a:p>
                   </a:txBody>
@@ -3892,7 +3892,7 @@
                           </a:solidFill>
                           <a:latin typeface="Calibri"/>
                         </a:rPr>
-                        <a:t>-7.0%</a:t>
+                        <a:t>-7.2%</a:t>
                       </a:r>
                     </a:p>
                   </a:txBody>
@@ -3938,7 +3938,7 @@
                           </a:solidFill>
                           <a:latin typeface="Calibri"/>
                         </a:rPr>
-                        <a:t>17.4</a:t>
+                        <a:t>17.5</a:t>
                       </a:r>
                     </a:p>
                   </a:txBody>
@@ -3986,7 +3986,7 @@
                           </a:solidFill>
                           <a:latin typeface="Calibri"/>
                         </a:rPr>
-                        <a:t>992</a:t>
+                        <a:t>1,023</a:t>
                       </a:r>
                     </a:p>
                   </a:txBody>
@@ -4005,11 +4005,34 @@
                       <a:r>
                         <a:rPr sz="1000" b="0">
                           <a:solidFill>
+                            <a:srgbClr val="0B7A3B"/>
+                          </a:solidFill>
+                          <a:latin typeface="Calibri"/>
+                        </a:rPr>
+                        <a:t>+2.65%</a:t>
+                      </a:r>
+                    </a:p>
+                  </a:txBody>
+                  <a:tcPr>
+                    <a:solidFill>
+                      <a:srgbClr val="FFFFFF"/>
+                    </a:solidFill>
+                  </a:tcPr>
+                </a:tc>
+                <a:tc>
+                  <a:txBody>
+                    <a:bodyPr/>
+                    <a:lstStyle/>
+                    <a:p>
+                      <a:pPr algn="r"/>
+                      <a:r>
+                        <a:rPr sz="1000" b="0">
+                          <a:solidFill>
                             <a:srgbClr val="B3261E"/>
                           </a:solidFill>
                           <a:latin typeface="Calibri"/>
                         </a:rPr>
-                        <a:t>-2.16%</a:t>
+                        <a:t>-1.12%</a:t>
                       </a:r>
                     </a:p>
                   </a:txBody>
@@ -4032,7 +4055,7 @@
                           </a:solidFill>
                           <a:latin typeface="Calibri"/>
                         </a:rPr>
-                        <a:t>-0.21%</a:t>
+                        <a:t>-1.26%</a:t>
                       </a:r>
                     </a:p>
                   </a:txBody>
@@ -4051,11 +4074,11 @@
                       <a:r>
                         <a:rPr sz="1000" b="0">
                           <a:solidFill>
-                            <a:srgbClr val="B3261E"/>
-                          </a:solidFill>
-                          <a:latin typeface="Calibri"/>
-                        </a:rPr>
-                        <a:t>-8.32%</a:t>
+                            <a:srgbClr val="1F2A37"/>
+                          </a:solidFill>
+                          <a:latin typeface="Calibri"/>
+                        </a:rPr>
+                        <a:t>-38.1%</a:t>
                       </a:r>
                     </a:p>
                   </a:txBody>
@@ -4078,7 +4101,7 @@
                           </a:solidFill>
                           <a:latin typeface="Calibri"/>
                         </a:rPr>
-                        <a:t>-40.0%</a:t>
+                        <a:t>29%</a:t>
                       </a:r>
                     </a:p>
                   </a:txBody>
@@ -4101,30 +4124,7 @@
                           </a:solidFill>
                           <a:latin typeface="Calibri"/>
                         </a:rPr>
-                        <a:t>29%</a:t>
-                      </a:r>
-                    </a:p>
-                  </a:txBody>
-                  <a:tcPr>
-                    <a:solidFill>
-                      <a:srgbClr val="FFFFFF"/>
-                    </a:solidFill>
-                  </a:tcPr>
-                </a:tc>
-                <a:tc>
-                  <a:txBody>
-                    <a:bodyPr/>
-                    <a:lstStyle/>
-                    <a:p>
-                      <a:pPr algn="r"/>
-                      <a:r>
-                        <a:rPr sz="1000" b="0">
-                          <a:solidFill>
-                            <a:srgbClr val="1F2A37"/>
-                          </a:solidFill>
-                          <a:latin typeface="Calibri"/>
-                        </a:rPr>
-                        <a:t>13.6</a:t>
+                        <a:t>13.9</a:t>
                       </a:r>
                     </a:p>
                   </a:txBody>
@@ -4191,11 +4191,11 @@
                       <a:r>
                         <a:rPr sz="1000" b="0">
                           <a:solidFill>
-                            <a:srgbClr val="B3261E"/>
-                          </a:solidFill>
-                          <a:latin typeface="Calibri"/>
-                        </a:rPr>
-                        <a:t>-0.37%</a:t>
+                            <a:srgbClr val="0B7A3B"/>
+                          </a:solidFill>
+                          <a:latin typeface="Calibri"/>
+                        </a:rPr>
+                        <a:t>+4.31%</a:t>
                       </a:r>
                     </a:p>
                   </a:txBody>
@@ -4218,7 +4218,7 @@
                           </a:solidFill>
                           <a:latin typeface="Calibri"/>
                         </a:rPr>
-                        <a:t>+1.12%</a:t>
+                        <a:t>+3.95%</a:t>
                       </a:r>
                     </a:p>
                   </a:txBody>
@@ -4241,7 +4241,7 @@
                           </a:solidFill>
                           <a:latin typeface="Calibri"/>
                         </a:rPr>
-                        <a:t>+0.83%</a:t>
+                        <a:t>+2.58%</a:t>
                       </a:r>
                     </a:p>
                   </a:txBody>
@@ -4264,7 +4264,7 @@
                           </a:solidFill>
                           <a:latin typeface="Calibri"/>
                         </a:rPr>
-                        <a:t>-33.9%</a:t>
+                        <a:t>-33.8%</a:t>
                       </a:r>
                     </a:p>
                   </a:txBody>
@@ -4287,7 +4287,7 @@
                           </a:solidFill>
                           <a:latin typeface="Calibri"/>
                         </a:rPr>
-                        <a:t>28%</a:t>
+                        <a:t>33%</a:t>
                       </a:r>
                     </a:p>
                   </a:txBody>
@@ -4310,7 +4310,7 @@
                           </a:solidFill>
                           <a:latin typeface="Calibri"/>
                         </a:rPr>
-                        <a:t>16.1</a:t>
+                        <a:t>16.8</a:t>
                       </a:r>
                     </a:p>
                   </a:txBody>
@@ -4358,7 +4358,7 @@
                           </a:solidFill>
                           <a:latin typeface="Calibri"/>
                         </a:rPr>
-                        <a:t>3,702</a:t>
+                        <a:t>3,703</a:t>
                       </a:r>
                     </a:p>
                   </a:txBody>
@@ -4377,11 +4377,57 @@
                       <a:r>
                         <a:rPr sz="1000" b="0">
                           <a:solidFill>
+                            <a:srgbClr val="0B7A3B"/>
+                          </a:solidFill>
+                          <a:latin typeface="Calibri"/>
+                        </a:rPr>
+                        <a:t>+2.16%</a:t>
+                      </a:r>
+                    </a:p>
+                  </a:txBody>
+                  <a:tcPr>
+                    <a:solidFill>
+                      <a:srgbClr val="FFFFFF"/>
+                    </a:solidFill>
+                  </a:tcPr>
+                </a:tc>
+                <a:tc>
+                  <a:txBody>
+                    <a:bodyPr/>
+                    <a:lstStyle/>
+                    <a:p>
+                      <a:pPr algn="r"/>
+                      <a:r>
+                        <a:rPr sz="1000" b="0">
+                          <a:solidFill>
+                            <a:srgbClr val="0B7A3B"/>
+                          </a:solidFill>
+                          <a:latin typeface="Calibri"/>
+                        </a:rPr>
+                        <a:t>+0.27%</a:t>
+                      </a:r>
+                    </a:p>
+                  </a:txBody>
+                  <a:tcPr>
+                    <a:solidFill>
+                      <a:srgbClr val="FFFFFF"/>
+                    </a:solidFill>
+                  </a:tcPr>
+                </a:tc>
+                <a:tc>
+                  <a:txBody>
+                    <a:bodyPr/>
+                    <a:lstStyle/>
+                    <a:p>
+                      <a:pPr algn="r"/>
+                      <a:r>
+                        <a:rPr sz="1000" b="0">
+                          <a:solidFill>
                             <a:srgbClr val="B3261E"/>
                           </a:solidFill>
                           <a:latin typeface="Calibri"/>
                         </a:rPr>
-                        <a:t>-1.82%</a:t>
+                        <a:t>-6.36%</a:t>
                       </a:r>
                     </a:p>
                   </a:txBody>
@@ -4400,11 +4446,11 @@
                       <a:r>
                         <a:rPr sz="1000" b="0">
                           <a:solidFill>
-                            <a:srgbClr val="B3261E"/>
-                          </a:solidFill>
-                          <a:latin typeface="Calibri"/>
-                        </a:rPr>
-                        <a:t>-1.56%</a:t>
+                            <a:srgbClr val="1F2A37"/>
+                          </a:solidFill>
+                          <a:latin typeface="Calibri"/>
+                        </a:rPr>
+                        <a:t>-15.4%</a:t>
                       </a:r>
                     </a:p>
                   </a:txBody>
@@ -4423,11 +4469,11 @@
                       <a:r>
                         <a:rPr sz="1000" b="0">
                           <a:solidFill>
-                            <a:srgbClr val="B3261E"/>
-                          </a:solidFill>
-                          <a:latin typeface="Calibri"/>
-                        </a:rPr>
-                        <a:t>-6.20%</a:t>
+                            <a:srgbClr val="1F2A37"/>
+                          </a:solidFill>
+                          <a:latin typeface="Calibri"/>
+                        </a:rPr>
+                        <a:t>20%</a:t>
                       </a:r>
                     </a:p>
                   </a:txBody>
@@ -4450,53 +4496,7 @@
                           </a:solidFill>
                           <a:latin typeface="Calibri"/>
                         </a:rPr>
-                        <a:t>-15.4%</a:t>
-                      </a:r>
-                    </a:p>
-                  </a:txBody>
-                  <a:tcPr>
-                    <a:solidFill>
-                      <a:srgbClr val="FFFFFF"/>
-                    </a:solidFill>
-                  </a:tcPr>
-                </a:tc>
-                <a:tc>
-                  <a:txBody>
-                    <a:bodyPr/>
-                    <a:lstStyle/>
-                    <a:p>
-                      <a:pPr algn="r"/>
-                      <a:r>
-                        <a:rPr sz="1000" b="0">
-                          <a:solidFill>
-                            <a:srgbClr val="1F2A37"/>
-                          </a:solidFill>
-                          <a:latin typeface="Calibri"/>
-                        </a:rPr>
-                        <a:t>18%</a:t>
-                      </a:r>
-                    </a:p>
-                  </a:txBody>
-                  <a:tcPr>
-                    <a:solidFill>
-                      <a:srgbClr val="FFFFFF"/>
-                    </a:solidFill>
-                  </a:tcPr>
-                </a:tc>
-                <a:tc>
-                  <a:txBody>
-                    <a:bodyPr/>
-                    <a:lstStyle/>
-                    <a:p>
-                      <a:pPr algn="r"/>
-                      <a:r>
-                        <a:rPr sz="1000" b="0">
-                          <a:solidFill>
-                            <a:srgbClr val="1F2A37"/>
-                          </a:solidFill>
-                          <a:latin typeface="Calibri"/>
-                        </a:rPr>
-                        <a:t>30.1</a:t>
+                        <a:t>30.7</a:t>
                       </a:r>
                     </a:p>
                   </a:txBody>
@@ -4544,7 +4544,7 @@
                           </a:solidFill>
                           <a:latin typeface="Calibri"/>
                         </a:rPr>
-                        <a:t>1,208</a:t>
+                        <a:t>1,170</a:t>
                       </a:r>
                     </a:p>
                   </a:txBody>
@@ -4567,7 +4567,7 @@
                           </a:solidFill>
                           <a:latin typeface="Calibri"/>
                         </a:rPr>
-                        <a:t>-0.85%</a:t>
+                        <a:t>-0.65%</a:t>
                       </a:r>
                     </a:p>
                   </a:txBody>
@@ -4590,7 +4590,7 @@
                           </a:solidFill>
                           <a:latin typeface="Calibri"/>
                         </a:rPr>
-                        <a:t>+1.74%</a:t>
+                        <a:t>+0.22%</a:t>
                       </a:r>
                     </a:p>
                   </a:txBody>
@@ -4613,7 +4613,7 @@
                           </a:solidFill>
                           <a:latin typeface="Calibri"/>
                         </a:rPr>
-                        <a:t>-6.73%</a:t>
+                        <a:t>-8.14%</a:t>
                       </a:r>
                     </a:p>
                   </a:txBody>
@@ -4636,7 +4636,7 @@
                           </a:solidFill>
                           <a:latin typeface="Calibri"/>
                         </a:rPr>
-                        <a:t>-23.8%</a:t>
+                        <a:t>-26.2%</a:t>
                       </a:r>
                     </a:p>
                   </a:txBody>
@@ -4659,7 +4659,7 @@
                           </a:solidFill>
                           <a:latin typeface="Calibri"/>
                         </a:rPr>
-                        <a:t>21%</a:t>
+                        <a:t>22%</a:t>
                       </a:r>
                     </a:p>
                   </a:txBody>
@@ -4682,7 +4682,7 @@
                           </a:solidFill>
                           <a:latin typeface="Calibri"/>
                         </a:rPr>
-                        <a:t>21.3</a:t>
+                        <a:t>21.2</a:t>
                       </a:r>
                     </a:p>
                   </a:txBody>
@@ -4730,7 +4730,7 @@
                           </a:solidFill>
                           <a:latin typeface="Calibri"/>
                         </a:rPr>
-                        <a:t>2,080</a:t>
+                        <a:t>2,156</a:t>
                       </a:r>
                     </a:p>
                   </a:txBody>
@@ -4749,11 +4749,57 @@
                       <a:r>
                         <a:rPr sz="1000" b="0">
                           <a:solidFill>
+                            <a:srgbClr val="0B7A3B"/>
+                          </a:solidFill>
+                          <a:latin typeface="Calibri"/>
+                        </a:rPr>
+                        <a:t>+3.85%</a:t>
+                      </a:r>
+                    </a:p>
+                  </a:txBody>
+                  <a:tcPr>
+                    <a:solidFill>
+                      <a:srgbClr val="FFFFFF"/>
+                    </a:solidFill>
+                  </a:tcPr>
+                </a:tc>
+                <a:tc>
+                  <a:txBody>
+                    <a:bodyPr/>
+                    <a:lstStyle/>
+                    <a:p>
+                      <a:pPr algn="r"/>
+                      <a:r>
+                        <a:rPr sz="1000" b="0">
+                          <a:solidFill>
+                            <a:srgbClr val="0B7A3B"/>
+                          </a:solidFill>
+                          <a:latin typeface="Calibri"/>
+                        </a:rPr>
+                        <a:t>+3.90%</a:t>
+                      </a:r>
+                    </a:p>
+                  </a:txBody>
+                  <a:tcPr>
+                    <a:solidFill>
+                      <a:srgbClr val="FFFFFF"/>
+                    </a:solidFill>
+                  </a:tcPr>
+                </a:tc>
+                <a:tc>
+                  <a:txBody>
+                    <a:bodyPr/>
+                    <a:lstStyle/>
+                    <a:p>
+                      <a:pPr algn="r"/>
+                      <a:r>
+                        <a:rPr sz="1000" b="0">
+                          <a:solidFill>
                             <a:srgbClr val="B3261E"/>
                           </a:solidFill>
                           <a:latin typeface="Calibri"/>
                         </a:rPr>
-                        <a:t>-0.94%</a:t>
+                        <a:t>-2.18%</a:t>
                       </a:r>
                     </a:p>
                   </a:txBody>
@@ -4772,11 +4818,11 @@
                       <a:r>
                         <a:rPr sz="1000" b="0">
                           <a:solidFill>
-                            <a:srgbClr val="0B7A3B"/>
-                          </a:solidFill>
-                          <a:latin typeface="Calibri"/>
-                        </a:rPr>
-                        <a:t>+1.45%</a:t>
+                            <a:srgbClr val="1F2A37"/>
+                          </a:solidFill>
+                          <a:latin typeface="Calibri"/>
+                        </a:rPr>
+                        <a:t>-32.7%</a:t>
                       </a:r>
                     </a:p>
                   </a:txBody>
@@ -4795,11 +4841,11 @@
                       <a:r>
                         <a:rPr sz="1000" b="0">
                           <a:solidFill>
-                            <a:srgbClr val="B3261E"/>
-                          </a:solidFill>
-                          <a:latin typeface="Calibri"/>
-                        </a:rPr>
-                        <a:t>-7.77%</a:t>
+                            <a:srgbClr val="1F2A37"/>
+                          </a:solidFill>
+                          <a:latin typeface="Calibri"/>
+                        </a:rPr>
+                        <a:t>25%</a:t>
                       </a:r>
                     </a:p>
                   </a:txBody>
@@ -4822,53 +4868,7 @@
                           </a:solidFill>
                           <a:latin typeface="Calibri"/>
                         </a:rPr>
-                        <a:t>-35.1%</a:t>
-                      </a:r>
-                    </a:p>
-                  </a:txBody>
-                  <a:tcPr>
-                    <a:solidFill>
-                      <a:srgbClr val="FFFFFF"/>
-                    </a:solidFill>
-                  </a:tcPr>
-                </a:tc>
-                <a:tc>
-                  <a:txBody>
-                    <a:bodyPr/>
-                    <a:lstStyle/>
-                    <a:p>
-                      <a:pPr algn="r"/>
-                      <a:r>
-                        <a:rPr sz="1000" b="0">
-                          <a:solidFill>
-                            <a:srgbClr val="1F2A37"/>
-                          </a:solidFill>
-                          <a:latin typeface="Calibri"/>
-                        </a:rPr>
-                        <a:t>26%</a:t>
-                      </a:r>
-                    </a:p>
-                  </a:txBody>
-                  <a:tcPr>
-                    <a:solidFill>
-                      <a:srgbClr val="FFFFFF"/>
-                    </a:solidFill>
-                  </a:tcPr>
-                </a:tc>
-                <a:tc>
-                  <a:txBody>
-                    <a:bodyPr/>
-                    <a:lstStyle/>
-                    <a:p>
-                      <a:pPr algn="r"/>
-                      <a:r>
-                        <a:rPr sz="1000" b="0">
-                          <a:solidFill>
-                            <a:srgbClr val="1F2A37"/>
-                          </a:solidFill>
-                          <a:latin typeface="Calibri"/>
-                        </a:rPr>
-                        <a:t>15.1</a:t>
+                        <a:t>15.7</a:t>
                       </a:r>
                     </a:p>
                   </a:txBody>
@@ -4952,7 +4952,7 @@
                 </a:solidFill>
                 <a:latin typeface="Calibri"/>
               </a:rPr>
-              <a:t>Breadth was risk-off: 2 of 8 names advanced on the day.</a:t>
+              <a:t>Breadth was risk-on: 7 of 8 names advanced on the day.</a:t>
             </a:r>
           </a:p>
           <a:p>
@@ -4968,7 +4968,7 @@
                 </a:solidFill>
                 <a:latin typeface="Calibri"/>
               </a:rPr>
-              <a:t>•  Best performer on the day: BHARTIARTL.NS at +1.29%.</a:t>
+              <a:t>•  Best performer on the day: ITC.NS at +4.31%.</a:t>
             </a:r>
           </a:p>
           <a:p>
@@ -4984,7 +4984,7 @@
                 </a:solidFill>
                 <a:latin typeface="Calibri"/>
               </a:rPr>
-              <a:t>•  Weakest on the day: INFY.NS at -2.16%.</a:t>
+              <a:t>•  Weakest on the day: RELIANCE.NS at -0.65%.</a:t>
             </a:r>
           </a:p>
           <a:p>
@@ -5000,7 +5000,7 @@
                 </a:solidFill>
                 <a:latin typeface="Calibri"/>
               </a:rPr>
-              <a:t>•  Median one-day move across the watchlist: -0.89%.</a:t>
+              <a:t>•  Median one-day move across the watchlist: +2.16%.</a:t>
             </a:r>
           </a:p>
           <a:p>
@@ -5016,7 +5016,7 @@
                 </a:solidFill>
                 <a:latin typeface="Calibri"/>
               </a:rPr>
-              <a:t>•  INFY.NS sits furthest below its 52-week high, at -40.0%.</a:t>
+              <a:t>•  INFY.NS sits furthest below its 52-week high, at -38.1%.</a:t>
             </a:r>
           </a:p>
           <a:p>
@@ -5048,7 +5048,7 @@
                 </a:solidFill>
                 <a:latin typeface="Calibri"/>
               </a:rPr>
-              <a:t>•  Highest 30-day realised volatility: INFY.NS at 29.2% annualised.</a:t>
+              <a:t>•  Highest 30-day realised volatility: ITC.NS at 32.7% annualised.</a:t>
             </a:r>
           </a:p>
           <a:p>
@@ -5064,7 +5064,7 @@
                 </a:solidFill>
                 <a:latin typeface="Calibri"/>
               </a:rPr>
-              <a:t>•  60 headlines collected, 7 tagged to a watchlist name by substring match (unverified).</a:t>
+              <a:t>•  60 headlines collected, 8 tagged to a watchlist name by substring match (unverified).</a:t>
             </a:r>
           </a:p>
           <a:p>

--- a/public/deskbrief.pptx
+++ b/public/deskbrief.pptx
@@ -3128,7 +3128,7 @@
                 </a:solidFill>
                 <a:latin typeface="Calibri"/>
               </a:rPr>
-              <a:t>8 names  |  generated 09 Oct 2026 18:27  |  source: Yahoo Finance via yfinance, Indian financial RSS</a:t>
+              <a:t>8 names  |  generated 12 Oct 2026 21:20  |  source: Yahoo Finance via yfinance, Indian financial RSS</a:t>
             </a:r>
           </a:p>
         </p:txBody>
@@ -3566,7 +3566,7 @@
                           </a:solidFill>
                           <a:latin typeface="Calibri"/>
                         </a:rPr>
-                        <a:t>37.7</a:t>
+                        <a:t>37.2</a:t>
                       </a:r>
                     </a:p>
                   </a:txBody>
@@ -3752,7 +3752,7 @@
                           </a:solidFill>
                           <a:latin typeface="Calibri"/>
                         </a:rPr>
-                        <a:t>15.5</a:t>
+                        <a:t>15.4</a:t>
                       </a:r>
                     </a:p>
                   </a:txBody>
@@ -3938,7 +3938,7 @@
                           </a:solidFill>
                           <a:latin typeface="Calibri"/>
                         </a:rPr>
-                        <a:t>17.5</a:t>
+                        <a:t>17.3</a:t>
                       </a:r>
                     </a:p>
                   </a:txBody>
@@ -4310,7 +4310,7 @@
                           </a:solidFill>
                           <a:latin typeface="Calibri"/>
                         </a:rPr>
-                        <a:t>16.8</a:t>
+                        <a:t>16.3</a:t>
                       </a:r>
                     </a:p>
                   </a:txBody>
@@ -4496,7 +4496,7 @@
                           </a:solidFill>
                           <a:latin typeface="Calibri"/>
                         </a:rPr>
-                        <a:t>30.7</a:t>
+                        <a:t>30.1</a:t>
                       </a:r>
                     </a:p>
                   </a:txBody>
@@ -4682,7 +4682,7 @@
                           </a:solidFill>
                           <a:latin typeface="Calibri"/>
                         </a:rPr>
-                        <a:t>21.2</a:t>
+                        <a:t>21.0</a:t>
                       </a:r>
                     </a:p>
                   </a:txBody>
@@ -4868,7 +4868,7 @@
                           </a:solidFill>
                           <a:latin typeface="Calibri"/>
                         </a:rPr>
-                        <a:t>15.7</a:t>
+                        <a:t>14.9</a:t>
                       </a:r>
                     </a:p>
                   </a:txBody>
@@ -5064,7 +5064,7 @@
                 </a:solidFill>
                 <a:latin typeface="Calibri"/>
               </a:rPr>
-              <a:t>•  60 headlines collected, 8 tagged to a watchlist name by substring match (unverified).</a:t>
+              <a:t>•  60 headlines collected, 5 tagged to a watchlist name by substring match (unverified).</a:t>
             </a:r>
           </a:p>
           <a:p>

--- a/public/deskbrief.pptx
+++ b/public/deskbrief.pptx
@@ -3128,7 +3128,7 @@
                 </a:solidFill>
                 <a:latin typeface="Calibri"/>
               </a:rPr>
-              <a:t>8 names  |  generated 12 Oct 2026 21:20  |  source: Yahoo Finance via yfinance, Indian financial RSS</a:t>
+              <a:t>8 names  |  generated 13 Oct 2026 19:25  |  source: Yahoo Finance via yfinance, Indian financial RSS</a:t>
             </a:r>
           </a:p>
         </p:txBody>
@@ -3428,7 +3428,7 @@
                           </a:solidFill>
                           <a:latin typeface="Calibri"/>
                         </a:rPr>
-                        <a:t>1,805</a:t>
+                        <a:t>1,779</a:t>
                       </a:r>
                     </a:p>
                   </a:txBody>
@@ -3447,11 +3447,11 @@
                       <a:r>
                         <a:rPr sz="1000" b="0">
                           <a:solidFill>
-                            <a:srgbClr val="0B7A3B"/>
-                          </a:solidFill>
-                          <a:latin typeface="Calibri"/>
-                        </a:rPr>
-                        <a:t>+0.03%</a:t>
+                            <a:srgbClr val="B3261E"/>
+                          </a:solidFill>
+                          <a:latin typeface="Calibri"/>
+                        </a:rPr>
+                        <a:t>-1.46%</a:t>
                       </a:r>
                     </a:p>
                   </a:txBody>
@@ -3470,11 +3470,11 @@
                       <a:r>
                         <a:rPr sz="1000" b="0">
                           <a:solidFill>
-                            <a:srgbClr val="0B7A3B"/>
-                          </a:solidFill>
-                          <a:latin typeface="Calibri"/>
-                        </a:rPr>
-                        <a:t>+3.68%</a:t>
+                            <a:srgbClr val="B3261E"/>
+                          </a:solidFill>
+                          <a:latin typeface="Calibri"/>
+                        </a:rPr>
+                        <a:t>-0.07%</a:t>
                       </a:r>
                     </a:p>
                   </a:txBody>
@@ -3497,7 +3497,7 @@
                           </a:solidFill>
                           <a:latin typeface="Calibri"/>
                         </a:rPr>
-                        <a:t>-1.84%</a:t>
+                        <a:t>-2.86%</a:t>
                       </a:r>
                     </a:p>
                   </a:txBody>
@@ -3520,7 +3520,7 @@
                           </a:solidFill>
                           <a:latin typeface="Calibri"/>
                         </a:rPr>
-                        <a:t>-15.5%</a:t>
+                        <a:t>-16.7%</a:t>
                       </a:r>
                     </a:p>
                   </a:txBody>
@@ -3543,7 +3543,7 @@
                           </a:solidFill>
                           <a:latin typeface="Calibri"/>
                         </a:rPr>
-                        <a:t>26%</a:t>
+                        <a:t>24%</a:t>
                       </a:r>
                     </a:p>
                   </a:txBody>
@@ -3614,7 +3614,7 @@
                           </a:solidFill>
                           <a:latin typeface="Calibri"/>
                         </a:rPr>
-                        <a:t>707</a:t>
+                        <a:t>705</a:t>
                       </a:r>
                     </a:p>
                   </a:txBody>
@@ -3633,11 +3633,34 @@
                       <a:r>
                         <a:rPr sz="1000" b="0">
                           <a:solidFill>
+                            <a:srgbClr val="B3261E"/>
+                          </a:solidFill>
+                          <a:latin typeface="Calibri"/>
+                        </a:rPr>
+                        <a:t>-0.33%</a:t>
+                      </a:r>
+                    </a:p>
+                  </a:txBody>
+                  <a:tcPr>
+                    <a:solidFill>
+                      <a:srgbClr val="FFFFFF"/>
+                    </a:solidFill>
+                  </a:tcPr>
+                </a:tc>
+                <a:tc>
+                  <a:txBody>
+                    <a:bodyPr/>
+                    <a:lstStyle/>
+                    <a:p>
+                      <a:pPr algn="r"/>
+                      <a:r>
+                        <a:rPr sz="1000" b="0">
+                          <a:solidFill>
                             <a:srgbClr val="0B7A3B"/>
                           </a:solidFill>
                           <a:latin typeface="Calibri"/>
                         </a:rPr>
-                        <a:t>+2.17%</a:t>
+                        <a:t>+0.01%</a:t>
                       </a:r>
                     </a:p>
                   </a:txBody>
@@ -3660,7 +3683,7 @@
                           </a:solidFill>
                           <a:latin typeface="Calibri"/>
                         </a:rPr>
-                        <a:t>-1.93%</a:t>
+                        <a:t>-0.47%</a:t>
                       </a:r>
                     </a:p>
                   </a:txBody>
@@ -3679,11 +3702,11 @@
                       <a:r>
                         <a:rPr sz="1000" b="0">
                           <a:solidFill>
-                            <a:srgbClr val="0B7A3B"/>
-                          </a:solidFill>
-                          <a:latin typeface="Calibri"/>
-                        </a:rPr>
-                        <a:t>+1.94%</a:t>
+                            <a:srgbClr val="1F2A37"/>
+                          </a:solidFill>
+                          <a:latin typeface="Calibri"/>
+                        </a:rPr>
+                        <a:t>-29.0%</a:t>
                       </a:r>
                     </a:p>
                   </a:txBody>
@@ -3706,7 +3729,7 @@
                           </a:solidFill>
                           <a:latin typeface="Calibri"/>
                         </a:rPr>
-                        <a:t>-28.8%</a:t>
+                        <a:t>22%</a:t>
                       </a:r>
                     </a:p>
                   </a:txBody>
@@ -3729,30 +3752,7 @@
                           </a:solidFill>
                           <a:latin typeface="Calibri"/>
                         </a:rPr>
-                        <a:t>22%</a:t>
-                      </a:r>
-                    </a:p>
-                  </a:txBody>
-                  <a:tcPr>
-                    <a:solidFill>
-                      <a:srgbClr val="FFFFFF"/>
-                    </a:solidFill>
-                  </a:tcPr>
-                </a:tc>
-                <a:tc>
-                  <a:txBody>
-                    <a:bodyPr/>
-                    <a:lstStyle/>
-                    <a:p>
-                      <a:pPr algn="r"/>
-                      <a:r>
-                        <a:rPr sz="1000" b="0">
-                          <a:solidFill>
-                            <a:srgbClr val="1F2A37"/>
-                          </a:solidFill>
-                          <a:latin typeface="Calibri"/>
-                        </a:rPr>
-                        <a:t>15.4</a:t>
+                        <a:t>15.6</a:t>
                       </a:r>
                     </a:p>
                   </a:txBody>
@@ -3800,7 +3800,7 @@
                           </a:solidFill>
                           <a:latin typeface="Calibri"/>
                         </a:rPr>
-                        <a:t>1,355</a:t>
+                        <a:t>1,340</a:t>
                       </a:r>
                     </a:p>
                   </a:txBody>
@@ -3819,11 +3819,34 @@
                       <a:r>
                         <a:rPr sz="1000" b="0">
                           <a:solidFill>
+                            <a:srgbClr val="B3261E"/>
+                          </a:solidFill>
+                          <a:latin typeface="Calibri"/>
+                        </a:rPr>
+                        <a:t>-1.11%</a:t>
+                      </a:r>
+                    </a:p>
+                  </a:txBody>
+                  <a:tcPr>
+                    <a:solidFill>
+                      <a:srgbClr val="F3F5F7"/>
+                    </a:solidFill>
+                  </a:tcPr>
+                </a:tc>
+                <a:tc>
+                  <a:txBody>
+                    <a:bodyPr/>
+                    <a:lstStyle/>
+                    <a:p>
+                      <a:pPr algn="r"/>
+                      <a:r>
+                        <a:rPr sz="1000" b="0">
+                          <a:solidFill>
                             <a:srgbClr val="0B7A3B"/>
                           </a:solidFill>
                           <a:latin typeface="Calibri"/>
                         </a:rPr>
-                        <a:t>+0.44%</a:t>
+                        <a:t>+0.60%</a:t>
                       </a:r>
                     </a:p>
                   </a:txBody>
@@ -3842,11 +3865,11 @@
                       <a:r>
                         <a:rPr sz="1000" b="0">
                           <a:solidFill>
-                            <a:srgbClr val="0B7A3B"/>
-                          </a:solidFill>
-                          <a:latin typeface="Calibri"/>
-                        </a:rPr>
-                        <a:t>+3.39%</a:t>
+                            <a:srgbClr val="B3261E"/>
+                          </a:solidFill>
+                          <a:latin typeface="Calibri"/>
+                        </a:rPr>
+                        <a:t>-2.85%</a:t>
                       </a:r>
                     </a:p>
                   </a:txBody>
@@ -3865,11 +3888,11 @@
                       <a:r>
                         <a:rPr sz="1000" b="0">
                           <a:solidFill>
-                            <a:srgbClr val="B3261E"/>
-                          </a:solidFill>
-                          <a:latin typeface="Calibri"/>
-                        </a:rPr>
-                        <a:t>-2.13%</a:t>
+                            <a:srgbClr val="1F2A37"/>
+                          </a:solidFill>
+                          <a:latin typeface="Calibri"/>
+                        </a:rPr>
+                        <a:t>-8.2%</a:t>
                       </a:r>
                     </a:p>
                   </a:txBody>
@@ -3892,7 +3915,7 @@
                           </a:solidFill>
                           <a:latin typeface="Calibri"/>
                         </a:rPr>
-                        <a:t>-7.2%</a:t>
+                        <a:t>16%</a:t>
                       </a:r>
                     </a:p>
                   </a:txBody>
@@ -3915,30 +3938,7 @@
                           </a:solidFill>
                           <a:latin typeface="Calibri"/>
                         </a:rPr>
-                        <a:t>17%</a:t>
-                      </a:r>
-                    </a:p>
-                  </a:txBody>
-                  <a:tcPr>
-                    <a:solidFill>
-                      <a:srgbClr val="F3F5F7"/>
-                    </a:solidFill>
-                  </a:tcPr>
-                </a:tc>
-                <a:tc>
-                  <a:txBody>
-                    <a:bodyPr/>
-                    <a:lstStyle/>
-                    <a:p>
-                      <a:pPr algn="r"/>
-                      <a:r>
-                        <a:rPr sz="1000" b="0">
-                          <a:solidFill>
-                            <a:srgbClr val="1F2A37"/>
-                          </a:solidFill>
-                          <a:latin typeface="Calibri"/>
-                        </a:rPr>
-                        <a:t>17.3</a:t>
+                        <a:t>17.6</a:t>
                       </a:r>
                     </a:p>
                   </a:txBody>
@@ -3986,7 +3986,7 @@
                           </a:solidFill>
                           <a:latin typeface="Calibri"/>
                         </a:rPr>
-                        <a:t>1,023</a:t>
+                        <a:t>1,020</a:t>
                       </a:r>
                     </a:p>
                   </a:txBody>
@@ -4005,11 +4005,11 @@
                       <a:r>
                         <a:rPr sz="1000" b="0">
                           <a:solidFill>
-                            <a:srgbClr val="0B7A3B"/>
-                          </a:solidFill>
-                          <a:latin typeface="Calibri"/>
-                        </a:rPr>
-                        <a:t>+2.65%</a:t>
+                            <a:srgbClr val="B3261E"/>
+                          </a:solidFill>
+                          <a:latin typeface="Calibri"/>
+                        </a:rPr>
+                        <a:t>-0.33%</a:t>
                       </a:r>
                     </a:p>
                   </a:txBody>
@@ -4032,7 +4032,7 @@
                           </a:solidFill>
                           <a:latin typeface="Calibri"/>
                         </a:rPr>
-                        <a:t>-1.12%</a:t>
+                        <a:t>-0.05%</a:t>
                       </a:r>
                     </a:p>
                   </a:txBody>
@@ -4055,7 +4055,7 @@
                           </a:solidFill>
                           <a:latin typeface="Calibri"/>
                         </a:rPr>
-                        <a:t>-1.26%</a:t>
+                        <a:t>-1.71%</a:t>
                       </a:r>
                     </a:p>
                   </a:txBody>
@@ -4078,7 +4078,7 @@
                           </a:solidFill>
                           <a:latin typeface="Calibri"/>
                         </a:rPr>
-                        <a:t>-38.1%</a:t>
+                        <a:t>-38.3%</a:t>
                       </a:r>
                     </a:p>
                   </a:txBody>
@@ -4124,7 +4124,7 @@
                           </a:solidFill>
                           <a:latin typeface="Calibri"/>
                         </a:rPr>
-                        <a:t>13.9</a:t>
+                        <a:t>14.4</a:t>
                       </a:r>
                     </a:p>
                   </a:txBody>
@@ -4172,7 +4172,7 @@
                           </a:solidFill>
                           <a:latin typeface="Calibri"/>
                         </a:rPr>
-                        <a:t>266</a:t>
+                        <a:t>258</a:t>
                       </a:r>
                     </a:p>
                   </a:txBody>
@@ -4191,11 +4191,11 @@
                       <a:r>
                         <a:rPr sz="1000" b="0">
                           <a:solidFill>
-                            <a:srgbClr val="0B7A3B"/>
-                          </a:solidFill>
-                          <a:latin typeface="Calibri"/>
-                        </a:rPr>
-                        <a:t>+4.31%</a:t>
+                            <a:srgbClr val="B3261E"/>
+                          </a:solidFill>
+                          <a:latin typeface="Calibri"/>
+                        </a:rPr>
+                        <a:t>-3.05%</a:t>
                       </a:r>
                     </a:p>
                   </a:txBody>
@@ -4214,11 +4214,11 @@
                       <a:r>
                         <a:rPr sz="1000" b="0">
                           <a:solidFill>
-                            <a:srgbClr val="0B7A3B"/>
-                          </a:solidFill>
-                          <a:latin typeface="Calibri"/>
-                        </a:rPr>
-                        <a:t>+3.95%</a:t>
+                            <a:srgbClr val="B3261E"/>
+                          </a:solidFill>
+                          <a:latin typeface="Calibri"/>
+                        </a:rPr>
+                        <a:t>-4.09%</a:t>
                       </a:r>
                     </a:p>
                   </a:txBody>
@@ -4237,11 +4237,11 @@
                       <a:r>
                         <a:rPr sz="1000" b="0">
                           <a:solidFill>
-                            <a:srgbClr val="0B7A3B"/>
-                          </a:solidFill>
-                          <a:latin typeface="Calibri"/>
-                        </a:rPr>
-                        <a:t>+2.58%</a:t>
+                            <a:srgbClr val="B3261E"/>
+                          </a:solidFill>
+                          <a:latin typeface="Calibri"/>
+                        </a:rPr>
+                        <a:t>-0.75%</a:t>
                       </a:r>
                     </a:p>
                   </a:txBody>
@@ -4264,7 +4264,7 @@
                           </a:solidFill>
                           <a:latin typeface="Calibri"/>
                         </a:rPr>
-                        <a:t>-33.8%</a:t>
+                        <a:t>-35.8%</a:t>
                       </a:r>
                     </a:p>
                   </a:txBody>
@@ -4287,7 +4287,7 @@
                           </a:solidFill>
                           <a:latin typeface="Calibri"/>
                         </a:rPr>
-                        <a:t>33%</a:t>
+                        <a:t>32%</a:t>
                       </a:r>
                     </a:p>
                   </a:txBody>
@@ -4310,7 +4310,7 @@
                           </a:solidFill>
                           <a:latin typeface="Calibri"/>
                         </a:rPr>
-                        <a:t>16.3</a:t>
+                        <a:t>16.0</a:t>
                       </a:r>
                     </a:p>
                   </a:txBody>
@@ -4358,7 +4358,7 @@
                           </a:solidFill>
                           <a:latin typeface="Calibri"/>
                         </a:rPr>
-                        <a:t>3,703</a:t>
+                        <a:t>3,628</a:t>
                       </a:r>
                     </a:p>
                   </a:txBody>
@@ -4377,11 +4377,11 @@
                       <a:r>
                         <a:rPr sz="1000" b="0">
                           <a:solidFill>
-                            <a:srgbClr val="0B7A3B"/>
-                          </a:solidFill>
-                          <a:latin typeface="Calibri"/>
-                        </a:rPr>
-                        <a:t>+2.16%</a:t>
+                            <a:srgbClr val="B3261E"/>
+                          </a:solidFill>
+                          <a:latin typeface="Calibri"/>
+                        </a:rPr>
+                        <a:t>-2.05%</a:t>
                       </a:r>
                     </a:p>
                   </a:txBody>
@@ -4400,11 +4400,11 @@
                       <a:r>
                         <a:rPr sz="1000" b="0">
                           <a:solidFill>
-                            <a:srgbClr val="0B7A3B"/>
-                          </a:solidFill>
-                          <a:latin typeface="Calibri"/>
-                        </a:rPr>
-                        <a:t>+0.27%</a:t>
+                            <a:srgbClr val="B3261E"/>
+                          </a:solidFill>
+                          <a:latin typeface="Calibri"/>
+                        </a:rPr>
+                        <a:t>-3.27%</a:t>
                       </a:r>
                     </a:p>
                   </a:txBody>
@@ -4427,7 +4427,7 @@
                           </a:solidFill>
                           <a:latin typeface="Calibri"/>
                         </a:rPr>
-                        <a:t>-6.36%</a:t>
+                        <a:t>-7.71%</a:t>
                       </a:r>
                     </a:p>
                   </a:txBody>
@@ -4450,7 +4450,7 @@
                           </a:solidFill>
                           <a:latin typeface="Calibri"/>
                         </a:rPr>
-                        <a:t>-15.4%</a:t>
+                        <a:t>-17.1%</a:t>
                       </a:r>
                     </a:p>
                   </a:txBody>
@@ -4473,7 +4473,7 @@
                           </a:solidFill>
                           <a:latin typeface="Calibri"/>
                         </a:rPr>
-                        <a:t>20%</a:t>
+                        <a:t>21%</a:t>
                       </a:r>
                     </a:p>
                   </a:txBody>
@@ -4496,7 +4496,7 @@
                           </a:solidFill>
                           <a:latin typeface="Calibri"/>
                         </a:rPr>
-                        <a:t>30.1</a:t>
+                        <a:t>29.9</a:t>
                       </a:r>
                     </a:p>
                   </a:txBody>
@@ -4544,7 +4544,7 @@
                           </a:solidFill>
                           <a:latin typeface="Calibri"/>
                         </a:rPr>
-                        <a:t>1,170</a:t>
+                        <a:t>1,159</a:t>
                       </a:r>
                     </a:p>
                   </a:txBody>
@@ -4567,7 +4567,7 @@
                           </a:solidFill>
                           <a:latin typeface="Calibri"/>
                         </a:rPr>
-                        <a:t>-0.65%</a:t>
+                        <a:t>-0.97%</a:t>
                       </a:r>
                     </a:p>
                   </a:txBody>
@@ -4586,11 +4586,11 @@
                       <a:r>
                         <a:rPr sz="1000" b="0">
                           <a:solidFill>
-                            <a:srgbClr val="0B7A3B"/>
-                          </a:solidFill>
-                          <a:latin typeface="Calibri"/>
-                        </a:rPr>
-                        <a:t>+0.22%</a:t>
+                            <a:srgbClr val="B3261E"/>
+                          </a:solidFill>
+                          <a:latin typeface="Calibri"/>
+                        </a:rPr>
+                        <a:t>-2.32%</a:t>
                       </a:r>
                     </a:p>
                   </a:txBody>
@@ -4613,7 +4613,7 @@
                           </a:solidFill>
                           <a:latin typeface="Calibri"/>
                         </a:rPr>
-                        <a:t>-8.14%</a:t>
+                        <a:t>-7.84%</a:t>
                       </a:r>
                     </a:p>
                   </a:txBody>
@@ -4636,7 +4636,7 @@
                           </a:solidFill>
                           <a:latin typeface="Calibri"/>
                         </a:rPr>
-                        <a:t>-26.2%</a:t>
+                        <a:t>-26.9%</a:t>
                       </a:r>
                     </a:p>
                   </a:txBody>
@@ -4682,7 +4682,7 @@
                           </a:solidFill>
                           <a:latin typeface="Calibri"/>
                         </a:rPr>
-                        <a:t>21.0</a:t>
+                        <a:t>20.9</a:t>
                       </a:r>
                     </a:p>
                   </a:txBody>
@@ -4730,7 +4730,7 @@
                           </a:solidFill>
                           <a:latin typeface="Calibri"/>
                         </a:rPr>
-                        <a:t>2,156</a:t>
+                        <a:t>2,125</a:t>
                       </a:r>
                     </a:p>
                   </a:txBody>
@@ -4749,11 +4749,34 @@
                       <a:r>
                         <a:rPr sz="1000" b="0">
                           <a:solidFill>
+                            <a:srgbClr val="B3261E"/>
+                          </a:solidFill>
+                          <a:latin typeface="Calibri"/>
+                        </a:rPr>
+                        <a:t>-1.44%</a:t>
+                      </a:r>
+                    </a:p>
+                  </a:txBody>
+                  <a:tcPr>
+                    <a:solidFill>
+                      <a:srgbClr val="FFFFFF"/>
+                    </a:solidFill>
+                  </a:tcPr>
+                </a:tc>
+                <a:tc>
+                  <a:txBody>
+                    <a:bodyPr/>
+                    <a:lstStyle/>
+                    <a:p>
+                      <a:pPr algn="r"/>
+                      <a:r>
+                        <a:rPr sz="1000" b="0">
+                          <a:solidFill>
                             <a:srgbClr val="0B7A3B"/>
                           </a:solidFill>
                           <a:latin typeface="Calibri"/>
                         </a:rPr>
-                        <a:t>+3.85%</a:t>
+                        <a:t>+0.50%</a:t>
                       </a:r>
                     </a:p>
                   </a:txBody>
@@ -4772,11 +4795,11 @@
                       <a:r>
                         <a:rPr sz="1000" b="0">
                           <a:solidFill>
-                            <a:srgbClr val="0B7A3B"/>
-                          </a:solidFill>
-                          <a:latin typeface="Calibri"/>
-                        </a:rPr>
-                        <a:t>+3.90%</a:t>
+                            <a:srgbClr val="B3261E"/>
+                          </a:solidFill>
+                          <a:latin typeface="Calibri"/>
+                        </a:rPr>
+                        <a:t>-3.44%</a:t>
                       </a:r>
                     </a:p>
                   </a:txBody>
@@ -4795,11 +4818,11 @@
                       <a:r>
                         <a:rPr sz="1000" b="0">
                           <a:solidFill>
-                            <a:srgbClr val="B3261E"/>
-                          </a:solidFill>
-                          <a:latin typeface="Calibri"/>
-                        </a:rPr>
-                        <a:t>-2.18%</a:t>
+                            <a:srgbClr val="1F2A37"/>
+                          </a:solidFill>
+                          <a:latin typeface="Calibri"/>
+                        </a:rPr>
+                        <a:t>-33.7%</a:t>
                       </a:r>
                     </a:p>
                   </a:txBody>
@@ -4822,7 +4845,7 @@
                           </a:solidFill>
                           <a:latin typeface="Calibri"/>
                         </a:rPr>
-                        <a:t>-32.7%</a:t>
+                        <a:t>24%</a:t>
                       </a:r>
                     </a:p>
                   </a:txBody>
@@ -4845,30 +4868,7 @@
                           </a:solidFill>
                           <a:latin typeface="Calibri"/>
                         </a:rPr>
-                        <a:t>25%</a:t>
-                      </a:r>
-                    </a:p>
-                  </a:txBody>
-                  <a:tcPr>
-                    <a:solidFill>
-                      <a:srgbClr val="FFFFFF"/>
-                    </a:solidFill>
-                  </a:tcPr>
-                </a:tc>
-                <a:tc>
-                  <a:txBody>
-                    <a:bodyPr/>
-                    <a:lstStyle/>
-                    <a:p>
-                      <a:pPr algn="r"/>
-                      <a:r>
-                        <a:rPr sz="1000" b="0">
-                          <a:solidFill>
-                            <a:srgbClr val="1F2A37"/>
-                          </a:solidFill>
-                          <a:latin typeface="Calibri"/>
-                        </a:rPr>
-                        <a:t>14.9</a:t>
+                        <a:t>15.7</a:t>
                       </a:r>
                     </a:p>
                   </a:txBody>
@@ -4900,7 +4900,7 @@
         <p:spPr>
           <a:xfrm>
             <a:off x="411480" y="4370832"/>
-            <a:ext cx="7040880" cy="2063354"/>
+            <a:ext cx="7040880" cy="2061863"/>
           </a:xfrm>
           <a:prstGeom prst="rect">
             <a:avLst/>
@@ -4952,7 +4952,7 @@
                 </a:solidFill>
                 <a:latin typeface="Calibri"/>
               </a:rPr>
-              <a:t>Breadth was risk-on: 7 of 8 names advanced on the day.</a:t>
+              <a:t>Breadth was risk-off: 0 of 8 names advanced on the day.</a:t>
             </a:r>
           </a:p>
           <a:p>
@@ -4968,7 +4968,7 @@
                 </a:solidFill>
                 <a:latin typeface="Calibri"/>
               </a:rPr>
-              <a:t>•  Best performer on the day: ITC.NS at +4.31%.</a:t>
+              <a:t>•  Best performer on the day: INFY.NS at -0.33%.</a:t>
             </a:r>
           </a:p>
           <a:p>
@@ -4984,7 +4984,7 @@
                 </a:solidFill>
                 <a:latin typeface="Calibri"/>
               </a:rPr>
-              <a:t>•  Weakest on the day: RELIANCE.NS at -0.65%.</a:t>
+              <a:t>•  Weakest on the day: ITC.NS at -3.05%.</a:t>
             </a:r>
           </a:p>
           <a:p>
@@ -5000,7 +5000,7 @@
                 </a:solidFill>
                 <a:latin typeface="Calibri"/>
               </a:rPr>
-              <a:t>•  Median one-day move across the watchlist: +2.16%.</a:t>
+              <a:t>•  Median one-day move across the watchlist: -1.27%.</a:t>
             </a:r>
           </a:p>
           <a:p>
@@ -5016,7 +5016,7 @@
                 </a:solidFill>
                 <a:latin typeface="Calibri"/>
               </a:rPr>
-              <a:t>•  INFY.NS sits furthest below its 52-week high, at -38.1%.</a:t>
+              <a:t>•  INFY.NS sits furthest below its 52-week high, at -38.3%.</a:t>
             </a:r>
           </a:p>
           <a:p>
@@ -5048,7 +5048,7 @@
                 </a:solidFill>
                 <a:latin typeface="Calibri"/>
               </a:rPr>
-              <a:t>•  Highest 30-day realised volatility: ITC.NS at 32.7% annualised.</a:t>
+              <a:t>•  Highest 30-day realised volatility: ITC.NS at 31.8% annualised.</a:t>
             </a:r>
           </a:p>
           <a:p>
@@ -5064,7 +5064,7 @@
                 </a:solidFill>
                 <a:latin typeface="Calibri"/>
               </a:rPr>
-              <a:t>•  60 headlines collected, 5 tagged to a watchlist name by substring match (unverified).</a:t>
+              <a:t>•  60 headlines collected, 4 tagged to a watchlist name by substring match (unverified).</a:t>
             </a:r>
           </a:p>
           <a:p>

--- a/public/deskbrief.pptx
+++ b/public/deskbrief.pptx
@@ -3128,7 +3128,7 @@
                 </a:solidFill>
                 <a:latin typeface="Calibri"/>
               </a:rPr>
-              <a:t>8 names  |  generated 13 Oct 2026 19:25  |  source: Yahoo Finance via yfinance, Indian financial RSS</a:t>
+              <a:t>8 names  |  generated 14 Oct 2026 17:25  |  source: Yahoo Finance via yfinance, Indian financial RSS</a:t>
             </a:r>
           </a:p>
         </p:txBody>
@@ -3428,7 +3428,7 @@
                           </a:solidFill>
                           <a:latin typeface="Calibri"/>
                         </a:rPr>
-                        <a:t>1,779</a:t>
+                        <a:t>1,795</a:t>
                       </a:r>
                     </a:p>
                   </a:txBody>
@@ -3451,7 +3451,7 @@
                           </a:solidFill>
                           <a:latin typeface="Calibri"/>
                         </a:rPr>
-                        <a:t>-1.46%</a:t>
+                        <a:t>-0.66%</a:t>
                       </a:r>
                     </a:p>
                   </a:txBody>
@@ -3474,7 +3474,7 @@
                           </a:solidFill>
                           <a:latin typeface="Calibri"/>
                         </a:rPr>
-                        <a:t>-0.07%</a:t>
+                        <a:t>-2.14%</a:t>
                       </a:r>
                     </a:p>
                   </a:txBody>
@@ -3497,7 +3497,7 @@
                           </a:solidFill>
                           <a:latin typeface="Calibri"/>
                         </a:rPr>
-                        <a:t>-2.86%</a:t>
+                        <a:t>-1.96%</a:t>
                       </a:r>
                     </a:p>
                   </a:txBody>
@@ -3520,7 +3520,7 @@
                           </a:solidFill>
                           <a:latin typeface="Calibri"/>
                         </a:rPr>
-                        <a:t>-16.7%</a:t>
+                        <a:t>-16.0%</a:t>
                       </a:r>
                     </a:p>
                   </a:txBody>
@@ -3543,7 +3543,7 @@
                           </a:solidFill>
                           <a:latin typeface="Calibri"/>
                         </a:rPr>
-                        <a:t>24%</a:t>
+                        <a:t>22%</a:t>
                       </a:r>
                     </a:p>
                   </a:txBody>
@@ -3566,7 +3566,7 @@
                           </a:solidFill>
                           <a:latin typeface="Calibri"/>
                         </a:rPr>
-                        <a:t>37.2</a:t>
+                        <a:t>37.0</a:t>
                       </a:r>
                     </a:p>
                   </a:txBody>
@@ -3614,7 +3614,7 @@
                           </a:solidFill>
                           <a:latin typeface="Calibri"/>
                         </a:rPr>
-                        <a:t>705</a:t>
+                        <a:t>711</a:t>
                       </a:r>
                     </a:p>
                   </a:txBody>
@@ -3637,7 +3637,7 @@
                           </a:solidFill>
                           <a:latin typeface="Calibri"/>
                         </a:rPr>
-                        <a:t>-0.33%</a:t>
+                        <a:t>-0.46%</a:t>
                       </a:r>
                     </a:p>
                   </a:txBody>
@@ -3660,7 +3660,7 @@
                           </a:solidFill>
                           <a:latin typeface="Calibri"/>
                         </a:rPr>
-                        <a:t>+0.01%</a:t>
+                        <a:t>+1.13%</a:t>
                       </a:r>
                     </a:p>
                   </a:txBody>
@@ -3683,7 +3683,7 @@
                           </a:solidFill>
                           <a:latin typeface="Calibri"/>
                         </a:rPr>
-                        <a:t>-0.47%</a:t>
+                        <a:t>-0.82%</a:t>
                       </a:r>
                     </a:p>
                   </a:txBody>
@@ -3706,7 +3706,7 @@
                           </a:solidFill>
                           <a:latin typeface="Calibri"/>
                         </a:rPr>
-                        <a:t>-29.0%</a:t>
+                        <a:t>-28.4%</a:t>
                       </a:r>
                     </a:p>
                   </a:txBody>
@@ -3752,7 +3752,7 @@
                           </a:solidFill>
                           <a:latin typeface="Calibri"/>
                         </a:rPr>
-                        <a:t>15.6</a:t>
+                        <a:t>15.5</a:t>
                       </a:r>
                     </a:p>
                   </a:txBody>
@@ -3800,7 +3800,7 @@
                           </a:solidFill>
                           <a:latin typeface="Calibri"/>
                         </a:rPr>
-                        <a:t>1,340</a:t>
+                        <a:t>1,339</a:t>
                       </a:r>
                     </a:p>
                   </a:txBody>
@@ -3823,7 +3823,7 @@
                           </a:solidFill>
                           <a:latin typeface="Calibri"/>
                         </a:rPr>
-                        <a:t>-1.11%</a:t>
+                        <a:t>-1.59%</a:t>
                       </a:r>
                     </a:p>
                   </a:txBody>
@@ -3842,11 +3842,11 @@
                       <a:r>
                         <a:rPr sz="1000" b="0">
                           <a:solidFill>
-                            <a:srgbClr val="0B7A3B"/>
-                          </a:solidFill>
-                          <a:latin typeface="Calibri"/>
-                        </a:rPr>
-                        <a:t>+0.60%</a:t>
+                            <a:srgbClr val="B3261E"/>
+                          </a:solidFill>
+                          <a:latin typeface="Calibri"/>
+                        </a:rPr>
+                        <a:t>-1.39%</a:t>
                       </a:r>
                     </a:p>
                   </a:txBody>
@@ -3869,7 +3869,7 @@
                           </a:solidFill>
                           <a:latin typeface="Calibri"/>
                         </a:rPr>
-                        <a:t>-2.85%</a:t>
+                        <a:t>-0.87%</a:t>
                       </a:r>
                     </a:p>
                   </a:txBody>
@@ -3892,7 +3892,7 @@
                           </a:solidFill>
                           <a:latin typeface="Calibri"/>
                         </a:rPr>
-                        <a:t>-8.2%</a:t>
+                        <a:t>-8.3%</a:t>
                       </a:r>
                     </a:p>
                   </a:txBody>
@@ -3915,7 +3915,7 @@
                           </a:solidFill>
                           <a:latin typeface="Calibri"/>
                         </a:rPr>
-                        <a:t>16%</a:t>
+                        <a:t>17%</a:t>
                       </a:r>
                     </a:p>
                   </a:txBody>
@@ -3938,7 +3938,7 @@
                           </a:solidFill>
                           <a:latin typeface="Calibri"/>
                         </a:rPr>
-                        <a:t>17.6</a:t>
+                        <a:t>17.3</a:t>
                       </a:r>
                     </a:p>
                   </a:txBody>
@@ -3986,7 +3986,7 @@
                           </a:solidFill>
                           <a:latin typeface="Calibri"/>
                         </a:rPr>
-                        <a:t>1,020</a:t>
+                        <a:t>1,088</a:t>
                       </a:r>
                     </a:p>
                   </a:txBody>
@@ -4005,11 +4005,11 @@
                       <a:r>
                         <a:rPr sz="1000" b="0">
                           <a:solidFill>
-                            <a:srgbClr val="B3261E"/>
-                          </a:solidFill>
-                          <a:latin typeface="Calibri"/>
-                        </a:rPr>
-                        <a:t>-0.33%</a:t>
+                            <a:srgbClr val="0B7A3B"/>
+                          </a:solidFill>
+                          <a:latin typeface="Calibri"/>
+                        </a:rPr>
+                        <a:t>+2.44%</a:t>
                       </a:r>
                     </a:p>
                   </a:txBody>
@@ -4028,11 +4028,11 @@
                       <a:r>
                         <a:rPr sz="1000" b="0">
                           <a:solidFill>
-                            <a:srgbClr val="B3261E"/>
-                          </a:solidFill>
-                          <a:latin typeface="Calibri"/>
-                        </a:rPr>
-                        <a:t>-0.05%</a:t>
+                            <a:srgbClr val="0B7A3B"/>
+                          </a:solidFill>
+                          <a:latin typeface="Calibri"/>
+                        </a:rPr>
+                        <a:t>+9.68%</a:t>
                       </a:r>
                     </a:p>
                   </a:txBody>
@@ -4051,11 +4051,11 @@
                       <a:r>
                         <a:rPr sz="1000" b="0">
                           <a:solidFill>
-                            <a:srgbClr val="B3261E"/>
-                          </a:solidFill>
-                          <a:latin typeface="Calibri"/>
-                        </a:rPr>
-                        <a:t>-1.71%</a:t>
+                            <a:srgbClr val="0B7A3B"/>
+                          </a:solidFill>
+                          <a:latin typeface="Calibri"/>
+                        </a:rPr>
+                        <a:t>+1.02%</a:t>
                       </a:r>
                     </a:p>
                   </a:txBody>
@@ -4078,7 +4078,7 @@
                           </a:solidFill>
                           <a:latin typeface="Calibri"/>
                         </a:rPr>
-                        <a:t>-38.3%</a:t>
+                        <a:t>-34.2%</a:t>
                       </a:r>
                     </a:p>
                   </a:txBody>
@@ -4101,7 +4101,7 @@
                           </a:solidFill>
                           <a:latin typeface="Calibri"/>
                         </a:rPr>
-                        <a:t>29%</a:t>
+                        <a:t>32%</a:t>
                       </a:r>
                     </a:p>
                   </a:txBody>
@@ -4124,7 +4124,7 @@
                           </a:solidFill>
                           <a:latin typeface="Calibri"/>
                         </a:rPr>
-                        <a:t>14.4</a:t>
+                        <a:t>14.8</a:t>
                       </a:r>
                     </a:p>
                   </a:txBody>
@@ -4172,7 +4172,7 @@
                           </a:solidFill>
                           <a:latin typeface="Calibri"/>
                         </a:rPr>
-                        <a:t>258</a:t>
+                        <a:t>262</a:t>
                       </a:r>
                     </a:p>
                   </a:txBody>
@@ -4191,11 +4191,34 @@
                       <a:r>
                         <a:rPr sz="1000" b="0">
                           <a:solidFill>
+                            <a:srgbClr val="0B7A3B"/>
+                          </a:solidFill>
+                          <a:latin typeface="Calibri"/>
+                        </a:rPr>
+                        <a:t>+0.19%</a:t>
+                      </a:r>
+                    </a:p>
+                  </a:txBody>
+                  <a:tcPr>
+                    <a:solidFill>
+                      <a:srgbClr val="F3F5F7"/>
+                    </a:solidFill>
+                  </a:tcPr>
+                </a:tc>
+                <a:tc>
+                  <a:txBody>
+                    <a:bodyPr/>
+                    <a:lstStyle/>
+                    <a:p>
+                      <a:pPr algn="r"/>
+                      <a:r>
+                        <a:rPr sz="1000" b="0">
+                          <a:solidFill>
                             <a:srgbClr val="B3261E"/>
                           </a:solidFill>
                           <a:latin typeface="Calibri"/>
                         </a:rPr>
-                        <a:t>-3.05%</a:t>
+                        <a:t>-1.58%</a:t>
                       </a:r>
                     </a:p>
                   </a:txBody>
@@ -4214,11 +4237,11 @@
                       <a:r>
                         <a:rPr sz="1000" b="0">
                           <a:solidFill>
-                            <a:srgbClr val="B3261E"/>
-                          </a:solidFill>
-                          <a:latin typeface="Calibri"/>
-                        </a:rPr>
-                        <a:t>-4.09%</a:t>
+                            <a:srgbClr val="0B7A3B"/>
+                          </a:solidFill>
+                          <a:latin typeface="Calibri"/>
+                        </a:rPr>
+                        <a:t>+1.36%</a:t>
                       </a:r>
                     </a:p>
                   </a:txBody>
@@ -4237,11 +4260,11 @@
                       <a:r>
                         <a:rPr sz="1000" b="0">
                           <a:solidFill>
-                            <a:srgbClr val="B3261E"/>
-                          </a:solidFill>
-                          <a:latin typeface="Calibri"/>
-                        </a:rPr>
-                        <a:t>-0.75%</a:t>
+                            <a:srgbClr val="1F2A37"/>
+                          </a:solidFill>
+                          <a:latin typeface="Calibri"/>
+                        </a:rPr>
+                        <a:t>-34.9%</a:t>
                       </a:r>
                     </a:p>
                   </a:txBody>
@@ -4264,7 +4287,7 @@
                           </a:solidFill>
                           <a:latin typeface="Calibri"/>
                         </a:rPr>
-                        <a:t>-35.8%</a:t>
+                        <a:t>29%</a:t>
                       </a:r>
                     </a:p>
                   </a:txBody>
@@ -4287,30 +4310,7 @@
                           </a:solidFill>
                           <a:latin typeface="Calibri"/>
                         </a:rPr>
-                        <a:t>32%</a:t>
-                      </a:r>
-                    </a:p>
-                  </a:txBody>
-                  <a:tcPr>
-                    <a:solidFill>
-                      <a:srgbClr val="F3F5F7"/>
-                    </a:solidFill>
-                  </a:tcPr>
-                </a:tc>
-                <a:tc>
-                  <a:txBody>
-                    <a:bodyPr/>
-                    <a:lstStyle/>
-                    <a:p>
-                      <a:pPr algn="r"/>
-                      <a:r>
-                        <a:rPr sz="1000" b="0">
-                          <a:solidFill>
-                            <a:srgbClr val="1F2A37"/>
-                          </a:solidFill>
-                          <a:latin typeface="Calibri"/>
-                        </a:rPr>
-                        <a:t>16.0</a:t>
+                        <a:t>16.5</a:t>
                       </a:r>
                     </a:p>
                   </a:txBody>
@@ -4358,7 +4358,7 @@
                           </a:solidFill>
                           <a:latin typeface="Calibri"/>
                         </a:rPr>
-                        <a:t>3,628</a:t>
+                        <a:t>3,642</a:t>
                       </a:r>
                     </a:p>
                   </a:txBody>
@@ -4381,7 +4381,7 @@
                           </a:solidFill>
                           <a:latin typeface="Calibri"/>
                         </a:rPr>
-                        <a:t>-2.05%</a:t>
+                        <a:t>-0.90%</a:t>
                       </a:r>
                     </a:p>
                   </a:txBody>
@@ -4404,7 +4404,7 @@
                           </a:solidFill>
                           <a:latin typeface="Calibri"/>
                         </a:rPr>
-                        <a:t>-3.27%</a:t>
+                        <a:t>-1.61%</a:t>
                       </a:r>
                     </a:p>
                   </a:txBody>
@@ -4427,7 +4427,7 @@
                           </a:solidFill>
                           <a:latin typeface="Calibri"/>
                         </a:rPr>
-                        <a:t>-7.71%</a:t>
+                        <a:t>-5.42%</a:t>
                       </a:r>
                     </a:p>
                   </a:txBody>
@@ -4450,7 +4450,7 @@
                           </a:solidFill>
                           <a:latin typeface="Calibri"/>
                         </a:rPr>
-                        <a:t>-17.1%</a:t>
+                        <a:t>-16.8%</a:t>
                       </a:r>
                     </a:p>
                   </a:txBody>
@@ -4496,7 +4496,7 @@
                           </a:solidFill>
                           <a:latin typeface="Calibri"/>
                         </a:rPr>
-                        <a:t>29.9</a:t>
+                        <a:t>30.2</a:t>
                       </a:r>
                     </a:p>
                   </a:txBody>
@@ -4544,7 +4544,7 @@
                           </a:solidFill>
                           <a:latin typeface="Calibri"/>
                         </a:rPr>
-                        <a:t>1,159</a:t>
+                        <a:t>1,175</a:t>
                       </a:r>
                     </a:p>
                   </a:txBody>
@@ -4563,11 +4563,34 @@
                       <a:r>
                         <a:rPr sz="1000" b="0">
                           <a:solidFill>
+                            <a:srgbClr val="0B7A3B"/>
+                          </a:solidFill>
+                          <a:latin typeface="Calibri"/>
+                        </a:rPr>
+                        <a:t>+0.68%</a:t>
+                      </a:r>
+                    </a:p>
+                  </a:txBody>
+                  <a:tcPr>
+                    <a:solidFill>
+                      <a:srgbClr val="F3F5F7"/>
+                    </a:solidFill>
+                  </a:tcPr>
+                </a:tc>
+                <a:tc>
+                  <a:txBody>
+                    <a:bodyPr/>
+                    <a:lstStyle/>
+                    <a:p>
+                      <a:pPr algn="r"/>
+                      <a:r>
+                        <a:rPr sz="1000" b="0">
+                          <a:solidFill>
                             <a:srgbClr val="B3261E"/>
                           </a:solidFill>
                           <a:latin typeface="Calibri"/>
                         </a:rPr>
-                        <a:t>-0.97%</a:t>
+                        <a:t>-2.74%</a:t>
                       </a:r>
                     </a:p>
                   </a:txBody>
@@ -4590,7 +4613,7 @@
                           </a:solidFill>
                           <a:latin typeface="Calibri"/>
                         </a:rPr>
-                        <a:t>-2.32%</a:t>
+                        <a:t>-4.91%</a:t>
                       </a:r>
                     </a:p>
                   </a:txBody>
@@ -4609,11 +4632,11 @@
                       <a:r>
                         <a:rPr sz="1000" b="0">
                           <a:solidFill>
-                            <a:srgbClr val="B3261E"/>
-                          </a:solidFill>
-                          <a:latin typeface="Calibri"/>
-                        </a:rPr>
-                        <a:t>-7.84%</a:t>
+                            <a:srgbClr val="1F2A37"/>
+                          </a:solidFill>
+                          <a:latin typeface="Calibri"/>
+                        </a:rPr>
+                        <a:t>-25.9%</a:t>
                       </a:r>
                     </a:p>
                   </a:txBody>
@@ -4636,7 +4659,7 @@
                           </a:solidFill>
                           <a:latin typeface="Calibri"/>
                         </a:rPr>
-                        <a:t>-26.9%</a:t>
+                        <a:t>20%</a:t>
                       </a:r>
                     </a:p>
                   </a:txBody>
@@ -4659,30 +4682,7 @@
                           </a:solidFill>
                           <a:latin typeface="Calibri"/>
                         </a:rPr>
-                        <a:t>22%</a:t>
-                      </a:r>
-                    </a:p>
-                  </a:txBody>
-                  <a:tcPr>
-                    <a:solidFill>
-                      <a:srgbClr val="F3F5F7"/>
-                    </a:solidFill>
-                  </a:tcPr>
-                </a:tc>
-                <a:tc>
-                  <a:txBody>
-                    <a:bodyPr/>
-                    <a:lstStyle/>
-                    <a:p>
-                      <a:pPr algn="r"/>
-                      <a:r>
-                        <a:rPr sz="1000" b="0">
-                          <a:solidFill>
-                            <a:srgbClr val="1F2A37"/>
-                          </a:solidFill>
-                          <a:latin typeface="Calibri"/>
-                        </a:rPr>
-                        <a:t>20.9</a:t>
+                        <a:t>21.3</a:t>
                       </a:r>
                     </a:p>
                   </a:txBody>
@@ -4730,7 +4730,7 @@
                           </a:solidFill>
                           <a:latin typeface="Calibri"/>
                         </a:rPr>
-                        <a:t>2,125</a:t>
+                        <a:t>2,305</a:t>
                       </a:r>
                     </a:p>
                   </a:txBody>
@@ -4749,11 +4749,11 @@
                       <a:r>
                         <a:rPr sz="1000" b="0">
                           <a:solidFill>
-                            <a:srgbClr val="B3261E"/>
-                          </a:solidFill>
-                          <a:latin typeface="Calibri"/>
-                        </a:rPr>
-                        <a:t>-1.44%</a:t>
+                            <a:srgbClr val="0B7A3B"/>
+                          </a:solidFill>
+                          <a:latin typeface="Calibri"/>
+                        </a:rPr>
+                        <a:t>+2.11%</a:t>
                       </a:r>
                     </a:p>
                   </a:txBody>
@@ -4776,7 +4776,7 @@
                           </a:solidFill>
                           <a:latin typeface="Calibri"/>
                         </a:rPr>
-                        <a:t>+0.50%</a:t>
+                        <a:t>+11.39%</a:t>
                       </a:r>
                     </a:p>
                   </a:txBody>
@@ -4795,11 +4795,11 @@
                       <a:r>
                         <a:rPr sz="1000" b="0">
                           <a:solidFill>
-                            <a:srgbClr val="B3261E"/>
-                          </a:solidFill>
-                          <a:latin typeface="Calibri"/>
-                        </a:rPr>
-                        <a:t>-3.44%</a:t>
+                            <a:srgbClr val="0B7A3B"/>
+                          </a:solidFill>
+                          <a:latin typeface="Calibri"/>
+                        </a:rPr>
+                        <a:t>+2.94%</a:t>
                       </a:r>
                     </a:p>
                   </a:txBody>
@@ -4822,7 +4822,7 @@
                           </a:solidFill>
                           <a:latin typeface="Calibri"/>
                         </a:rPr>
-                        <a:t>-33.7%</a:t>
+                        <a:t>-27.7%</a:t>
                       </a:r>
                     </a:p>
                   </a:txBody>
@@ -4845,7 +4845,7 @@
                           </a:solidFill>
                           <a:latin typeface="Calibri"/>
                         </a:rPr>
-                        <a:t>24%</a:t>
+                        <a:t>31%</a:t>
                       </a:r>
                     </a:p>
                   </a:txBody>
@@ -4868,7 +4868,7 @@
                           </a:solidFill>
                           <a:latin typeface="Calibri"/>
                         </a:rPr>
-                        <a:t>15.7</a:t>
+                        <a:t>16.2</a:t>
                       </a:r>
                     </a:p>
                   </a:txBody>
@@ -4952,7 +4952,7 @@
                 </a:solidFill>
                 <a:latin typeface="Calibri"/>
               </a:rPr>
-              <a:t>Breadth was risk-off: 0 of 8 names advanced on the day.</a:t>
+              <a:t>Breadth was mixed: 4 of 8 names advanced on the day.</a:t>
             </a:r>
           </a:p>
           <a:p>
@@ -4968,7 +4968,7 @@
                 </a:solidFill>
                 <a:latin typeface="Calibri"/>
               </a:rPr>
-              <a:t>•  Best performer on the day: INFY.NS at -0.33%.</a:t>
+              <a:t>•  Best performer on the day: INFY.NS at +2.44%.</a:t>
             </a:r>
           </a:p>
           <a:p>
@@ -4984,7 +4984,7 @@
                 </a:solidFill>
                 <a:latin typeface="Calibri"/>
               </a:rPr>
-              <a:t>•  Weakest on the day: ITC.NS at -3.05%.</a:t>
+              <a:t>•  Weakest on the day: ICICIBANK.NS at -1.59%.</a:t>
             </a:r>
           </a:p>
           <a:p>
@@ -5000,7 +5000,7 @@
                 </a:solidFill>
                 <a:latin typeface="Calibri"/>
               </a:rPr>
-              <a:t>•  Median one-day move across the watchlist: -1.27%.</a:t>
+              <a:t>•  Median one-day move across the watchlist: -0.14%.</a:t>
             </a:r>
           </a:p>
           <a:p>
@@ -5016,7 +5016,7 @@
                 </a:solidFill>
                 <a:latin typeface="Calibri"/>
               </a:rPr>
-              <a:t>•  INFY.NS sits furthest below its 52-week high, at -38.3%.</a:t>
+              <a:t>•  ITC.NS sits furthest below its 52-week high, at -34.9%.</a:t>
             </a:r>
           </a:p>
           <a:p>
@@ -5048,7 +5048,7 @@
                 </a:solidFill>
                 <a:latin typeface="Calibri"/>
               </a:rPr>
-              <a:t>•  Highest 30-day realised volatility: ITC.NS at 31.8% annualised.</a:t>
+              <a:t>•  Highest 30-day realised volatility: INFY.NS at 31.7% annualised.</a:t>
             </a:r>
           </a:p>
           <a:p>
@@ -5064,7 +5064,7 @@
                 </a:solidFill>
                 <a:latin typeface="Calibri"/>
               </a:rPr>
-              <a:t>•  60 headlines collected, 4 tagged to a watchlist name by substring match (unverified).</a:t>
+              <a:t>•  60 headlines collected, 7 tagged to a watchlist name by substring match (unverified).</a:t>
             </a:r>
           </a:p>
           <a:p>

--- a/public/deskbrief.pptx
+++ b/public/deskbrief.pptx
@@ -3128,7 +3128,7 @@
                 </a:solidFill>
                 <a:latin typeface="Calibri"/>
               </a:rPr>
-              <a:t>8 names  |  generated 14 Oct 2026 17:25  |  source: Yahoo Finance via yfinance, Indian financial RSS</a:t>
+              <a:t>8 names  |  generated 15 Oct 2026 17:14  |  source: Yahoo Finance via yfinance, Indian financial RSS</a:t>
             </a:r>
           </a:p>
         </p:txBody>
@@ -3428,7 +3428,7 @@
                           </a:solidFill>
                           <a:latin typeface="Calibri"/>
                         </a:rPr>
-                        <a:t>1,795</a:t>
+                        <a:t>1,854</a:t>
                       </a:r>
                     </a:p>
                   </a:txBody>
@@ -3447,11 +3447,11 @@
                       <a:r>
                         <a:rPr sz="1000" b="0">
                           <a:solidFill>
-                            <a:srgbClr val="B3261E"/>
-                          </a:solidFill>
-                          <a:latin typeface="Calibri"/>
-                        </a:rPr>
-                        <a:t>-0.66%</a:t>
+                            <a:srgbClr val="0B7A3B"/>
+                          </a:solidFill>
+                          <a:latin typeface="Calibri"/>
+                        </a:rPr>
+                        <a:t>+3.31%</a:t>
                       </a:r>
                     </a:p>
                   </a:txBody>
@@ -3470,11 +3470,11 @@
                       <a:r>
                         <a:rPr sz="1000" b="0">
                           <a:solidFill>
-                            <a:srgbClr val="B3261E"/>
-                          </a:solidFill>
-                          <a:latin typeface="Calibri"/>
-                        </a:rPr>
-                        <a:t>-2.14%</a:t>
+                            <a:srgbClr val="0B7A3B"/>
+                          </a:solidFill>
+                          <a:latin typeface="Calibri"/>
+                        </a:rPr>
+                        <a:t>+2.74%</a:t>
                       </a:r>
                     </a:p>
                   </a:txBody>
@@ -3493,11 +3493,11 @@
                       <a:r>
                         <a:rPr sz="1000" b="0">
                           <a:solidFill>
-                            <a:srgbClr val="B3261E"/>
-                          </a:solidFill>
-                          <a:latin typeface="Calibri"/>
-                        </a:rPr>
-                        <a:t>-1.96%</a:t>
+                            <a:srgbClr val="0B7A3B"/>
+                          </a:solidFill>
+                          <a:latin typeface="Calibri"/>
+                        </a:rPr>
+                        <a:t>+1.04%</a:t>
                       </a:r>
                     </a:p>
                   </a:txBody>
@@ -3520,7 +3520,7 @@
                           </a:solidFill>
                           <a:latin typeface="Calibri"/>
                         </a:rPr>
-                        <a:t>-16.0%</a:t>
+                        <a:t>-13.2%</a:t>
                       </a:r>
                     </a:p>
                   </a:txBody>
@@ -3543,7 +3543,7 @@
                           </a:solidFill>
                           <a:latin typeface="Calibri"/>
                         </a:rPr>
-                        <a:t>22%</a:t>
+                        <a:t>24%</a:t>
                       </a:r>
                     </a:p>
                   </a:txBody>
@@ -3566,7 +3566,7 @@
                           </a:solidFill>
                           <a:latin typeface="Calibri"/>
                         </a:rPr>
-                        <a:t>37.0</a:t>
+                        <a:t>38.2</a:t>
                       </a:r>
                     </a:p>
                   </a:txBody>
@@ -3614,7 +3614,7 @@
                           </a:solidFill>
                           <a:latin typeface="Calibri"/>
                         </a:rPr>
-                        <a:t>711</a:t>
+                        <a:t>727</a:t>
                       </a:r>
                     </a:p>
                   </a:txBody>
@@ -3633,11 +3633,11 @@
                       <a:r>
                         <a:rPr sz="1000" b="0">
                           <a:solidFill>
-                            <a:srgbClr val="B3261E"/>
-                          </a:solidFill>
-                          <a:latin typeface="Calibri"/>
-                        </a:rPr>
-                        <a:t>-0.46%</a:t>
+                            <a:srgbClr val="0B7A3B"/>
+                          </a:solidFill>
+                          <a:latin typeface="Calibri"/>
+                        </a:rPr>
+                        <a:t>+2.27%</a:t>
                       </a:r>
                     </a:p>
                   </a:txBody>
@@ -3660,7 +3660,7 @@
                           </a:solidFill>
                           <a:latin typeface="Calibri"/>
                         </a:rPr>
-                        <a:t>+1.13%</a:t>
+                        <a:t>+5.00%</a:t>
                       </a:r>
                     </a:p>
                   </a:txBody>
@@ -3679,11 +3679,11 @@
                       <a:r>
                         <a:rPr sz="1000" b="0">
                           <a:solidFill>
-                            <a:srgbClr val="B3261E"/>
-                          </a:solidFill>
-                          <a:latin typeface="Calibri"/>
-                        </a:rPr>
-                        <a:t>-0.82%</a:t>
+                            <a:srgbClr val="0B7A3B"/>
+                          </a:solidFill>
+                          <a:latin typeface="Calibri"/>
+                        </a:rPr>
+                        <a:t>+0.74%</a:t>
                       </a:r>
                     </a:p>
                   </a:txBody>
@@ -3706,7 +3706,7 @@
                           </a:solidFill>
                           <a:latin typeface="Calibri"/>
                         </a:rPr>
-                        <a:t>-28.4%</a:t>
+                        <a:t>-26.8%</a:t>
                       </a:r>
                     </a:p>
                   </a:txBody>
@@ -3729,7 +3729,7 @@
                           </a:solidFill>
                           <a:latin typeface="Calibri"/>
                         </a:rPr>
-                        <a:t>22%</a:t>
+                        <a:t>23%</a:t>
                       </a:r>
                     </a:p>
                   </a:txBody>
@@ -3752,7 +3752,7 @@
                           </a:solidFill>
                           <a:latin typeface="Calibri"/>
                         </a:rPr>
-                        <a:t>15.5</a:t>
+                        <a:t>15.9</a:t>
                       </a:r>
                     </a:p>
                   </a:txBody>
@@ -3800,7 +3800,7 @@
                           </a:solidFill>
                           <a:latin typeface="Calibri"/>
                         </a:rPr>
-                        <a:t>1,339</a:t>
+                        <a:t>1,389</a:t>
                       </a:r>
                     </a:p>
                   </a:txBody>
@@ -3819,11 +3819,11 @@
                       <a:r>
                         <a:rPr sz="1000" b="0">
                           <a:solidFill>
-                            <a:srgbClr val="B3261E"/>
-                          </a:solidFill>
-                          <a:latin typeface="Calibri"/>
-                        </a:rPr>
-                        <a:t>-1.59%</a:t>
+                            <a:srgbClr val="0B7A3B"/>
+                          </a:solidFill>
+                          <a:latin typeface="Calibri"/>
+                        </a:rPr>
+                        <a:t>+3.80%</a:t>
                       </a:r>
                     </a:p>
                   </a:txBody>
@@ -3842,11 +3842,11 @@
                       <a:r>
                         <a:rPr sz="1000" b="0">
                           <a:solidFill>
-                            <a:srgbClr val="B3261E"/>
-                          </a:solidFill>
-                          <a:latin typeface="Calibri"/>
-                        </a:rPr>
-                        <a:t>-1.39%</a:t>
+                            <a:srgbClr val="0B7A3B"/>
+                          </a:solidFill>
+                          <a:latin typeface="Calibri"/>
+                        </a:rPr>
+                        <a:t>+2.99%</a:t>
                       </a:r>
                     </a:p>
                   </a:txBody>
@@ -3865,11 +3865,11 @@
                       <a:r>
                         <a:rPr sz="1000" b="0">
                           <a:solidFill>
-                            <a:srgbClr val="B3261E"/>
-                          </a:solidFill>
-                          <a:latin typeface="Calibri"/>
-                        </a:rPr>
-                        <a:t>-0.87%</a:t>
+                            <a:srgbClr val="0B7A3B"/>
+                          </a:solidFill>
+                          <a:latin typeface="Calibri"/>
+                        </a:rPr>
+                        <a:t>+2.25%</a:t>
                       </a:r>
                     </a:p>
                   </a:txBody>
@@ -3892,7 +3892,7 @@
                           </a:solidFill>
                           <a:latin typeface="Calibri"/>
                         </a:rPr>
-                        <a:t>-8.3%</a:t>
+                        <a:t>-4.8%</a:t>
                       </a:r>
                     </a:p>
                   </a:txBody>
@@ -3915,7 +3915,7 @@
                           </a:solidFill>
                           <a:latin typeface="Calibri"/>
                         </a:rPr>
-                        <a:t>17%</a:t>
+                        <a:t>20%</a:t>
                       </a:r>
                     </a:p>
                   </a:txBody>
@@ -3938,7 +3938,7 @@
                           </a:solidFill>
                           <a:latin typeface="Calibri"/>
                         </a:rPr>
-                        <a:t>17.3</a:t>
+                        <a:t>18.0</a:t>
                       </a:r>
                     </a:p>
                   </a:txBody>
@@ -3986,7 +3986,7 @@
                           </a:solidFill>
                           <a:latin typeface="Calibri"/>
                         </a:rPr>
-                        <a:t>1,088</a:t>
+                        <a:t>1,110</a:t>
                       </a:r>
                     </a:p>
                   </a:txBody>
@@ -4009,7 +4009,7 @@
                           </a:solidFill>
                           <a:latin typeface="Calibri"/>
                         </a:rPr>
-                        <a:t>+2.44%</a:t>
+                        <a:t>+2.02%</a:t>
                       </a:r>
                     </a:p>
                   </a:txBody>
@@ -4032,7 +4032,7 @@
                           </a:solidFill>
                           <a:latin typeface="Calibri"/>
                         </a:rPr>
-                        <a:t>+9.68%</a:t>
+                        <a:t>+11.33%</a:t>
                       </a:r>
                     </a:p>
                   </a:txBody>
@@ -4055,7 +4055,7 @@
                           </a:solidFill>
                           <a:latin typeface="Calibri"/>
                         </a:rPr>
-                        <a:t>+1.02%</a:t>
+                        <a:t>+4.72%</a:t>
                       </a:r>
                     </a:p>
                   </a:txBody>
@@ -4078,7 +4078,7 @@
                           </a:solidFill>
                           <a:latin typeface="Calibri"/>
                         </a:rPr>
-                        <a:t>-34.2%</a:t>
+                        <a:t>-32.9%</a:t>
                       </a:r>
                     </a:p>
                   </a:txBody>
@@ -4124,7 +4124,7 @@
                           </a:solidFill>
                           <a:latin typeface="Calibri"/>
                         </a:rPr>
-                        <a:t>14.8</a:t>
+                        <a:t>15.1</a:t>
                       </a:r>
                     </a:p>
                   </a:txBody>
@@ -4172,7 +4172,7 @@
                           </a:solidFill>
                           <a:latin typeface="Calibri"/>
                         </a:rPr>
-                        <a:t>262</a:t>
+                        <a:t>264</a:t>
                       </a:r>
                     </a:p>
                   </a:txBody>
@@ -4195,7 +4195,7 @@
                           </a:solidFill>
                           <a:latin typeface="Calibri"/>
                         </a:rPr>
-                        <a:t>+0.19%</a:t>
+                        <a:t>+0.92%</a:t>
                       </a:r>
                     </a:p>
                   </a:txBody>
@@ -4214,11 +4214,34 @@
                       <a:r>
                         <a:rPr sz="1000" b="0">
                           <a:solidFill>
+                            <a:srgbClr val="0B7A3B"/>
+                          </a:solidFill>
+                          <a:latin typeface="Calibri"/>
+                        </a:rPr>
+                        <a:t>+3.49%</a:t>
+                      </a:r>
+                    </a:p>
+                  </a:txBody>
+                  <a:tcPr>
+                    <a:solidFill>
+                      <a:srgbClr val="F3F5F7"/>
+                    </a:solidFill>
+                  </a:tcPr>
+                </a:tc>
+                <a:tc>
+                  <a:txBody>
+                    <a:bodyPr/>
+                    <a:lstStyle/>
+                    <a:p>
+                      <a:pPr algn="r"/>
+                      <a:r>
+                        <a:rPr sz="1000" b="0">
+                          <a:solidFill>
                             <a:srgbClr val="B3261E"/>
                           </a:solidFill>
                           <a:latin typeface="Calibri"/>
                         </a:rPr>
-                        <a:t>-1.58%</a:t>
+                        <a:t>-0.09%</a:t>
                       </a:r>
                     </a:p>
                   </a:txBody>
@@ -4237,11 +4260,11 @@
                       <a:r>
                         <a:rPr sz="1000" b="0">
                           <a:solidFill>
-                            <a:srgbClr val="0B7A3B"/>
-                          </a:solidFill>
-                          <a:latin typeface="Calibri"/>
-                        </a:rPr>
-                        <a:t>+1.36%</a:t>
+                            <a:srgbClr val="1F2A37"/>
+                          </a:solidFill>
+                          <a:latin typeface="Calibri"/>
+                        </a:rPr>
+                        <a:t>-34.4%</a:t>
                       </a:r>
                     </a:p>
                   </a:txBody>
@@ -4264,7 +4287,7 @@
                           </a:solidFill>
                           <a:latin typeface="Calibri"/>
                         </a:rPr>
-                        <a:t>-34.9%</a:t>
+                        <a:t>29%</a:t>
                       </a:r>
                     </a:p>
                   </a:txBody>
@@ -4287,30 +4310,7 @@
                           </a:solidFill>
                           <a:latin typeface="Calibri"/>
                         </a:rPr>
-                        <a:t>29%</a:t>
-                      </a:r>
-                    </a:p>
-                  </a:txBody>
-                  <a:tcPr>
-                    <a:solidFill>
-                      <a:srgbClr val="F3F5F7"/>
-                    </a:solidFill>
-                  </a:tcPr>
-                </a:tc>
-                <a:tc>
-                  <a:txBody>
-                    <a:bodyPr/>
-                    <a:lstStyle/>
-                    <a:p>
-                      <a:pPr algn="r"/>
-                      <a:r>
-                        <a:rPr sz="1000" b="0">
-                          <a:solidFill>
-                            <a:srgbClr val="1F2A37"/>
-                          </a:solidFill>
-                          <a:latin typeface="Calibri"/>
-                        </a:rPr>
-                        <a:t>16.5</a:t>
+                        <a:t>16.7</a:t>
                       </a:r>
                     </a:p>
                   </a:txBody>
@@ -4358,7 +4358,7 @@
                           </a:solidFill>
                           <a:latin typeface="Calibri"/>
                         </a:rPr>
-                        <a:t>3,642</a:t>
+                        <a:t>3,632</a:t>
                       </a:r>
                     </a:p>
                   </a:txBody>
@@ -4381,7 +4381,7 @@
                           </a:solidFill>
                           <a:latin typeface="Calibri"/>
                         </a:rPr>
-                        <a:t>-0.90%</a:t>
+                        <a:t>-0.27%</a:t>
                       </a:r>
                     </a:p>
                   </a:txBody>
@@ -4400,11 +4400,34 @@
                       <a:r>
                         <a:rPr sz="1000" b="0">
                           <a:solidFill>
+                            <a:srgbClr val="0B7A3B"/>
+                          </a:solidFill>
+                          <a:latin typeface="Calibri"/>
+                        </a:rPr>
+                        <a:t>+0.19%</a:t>
+                      </a:r>
+                    </a:p>
+                  </a:txBody>
+                  <a:tcPr>
+                    <a:solidFill>
+                      <a:srgbClr val="FFFFFF"/>
+                    </a:solidFill>
+                  </a:tcPr>
+                </a:tc>
+                <a:tc>
+                  <a:txBody>
+                    <a:bodyPr/>
+                    <a:lstStyle/>
+                    <a:p>
+                      <a:pPr algn="r"/>
+                      <a:r>
+                        <a:rPr sz="1000" b="0">
+                          <a:solidFill>
                             <a:srgbClr val="B3261E"/>
                           </a:solidFill>
                           <a:latin typeface="Calibri"/>
                         </a:rPr>
-                        <a:t>-1.61%</a:t>
+                        <a:t>-4.61%</a:t>
                       </a:r>
                     </a:p>
                   </a:txBody>
@@ -4423,11 +4446,11 @@
                       <a:r>
                         <a:rPr sz="1000" b="0">
                           <a:solidFill>
-                            <a:srgbClr val="B3261E"/>
-                          </a:solidFill>
-                          <a:latin typeface="Calibri"/>
-                        </a:rPr>
-                        <a:t>-5.42%</a:t>
+                            <a:srgbClr val="1F2A37"/>
+                          </a:solidFill>
+                          <a:latin typeface="Calibri"/>
+                        </a:rPr>
+                        <a:t>-17.0%</a:t>
                       </a:r>
                     </a:p>
                   </a:txBody>
@@ -4450,7 +4473,7 @@
                           </a:solidFill>
                           <a:latin typeface="Calibri"/>
                         </a:rPr>
-                        <a:t>-16.8%</a:t>
+                        <a:t>21%</a:t>
                       </a:r>
                     </a:p>
                   </a:txBody>
@@ -4473,30 +4496,7 @@
                           </a:solidFill>
                           <a:latin typeface="Calibri"/>
                         </a:rPr>
-                        <a:t>21%</a:t>
-                      </a:r>
-                    </a:p>
-                  </a:txBody>
-                  <a:tcPr>
-                    <a:solidFill>
-                      <a:srgbClr val="FFFFFF"/>
-                    </a:solidFill>
-                  </a:tcPr>
-                </a:tc>
-                <a:tc>
-                  <a:txBody>
-                    <a:bodyPr/>
-                    <a:lstStyle/>
-                    <a:p>
-                      <a:pPr algn="r"/>
-                      <a:r>
-                        <a:rPr sz="1000" b="0">
-                          <a:solidFill>
-                            <a:srgbClr val="1F2A37"/>
-                          </a:solidFill>
-                          <a:latin typeface="Calibri"/>
-                        </a:rPr>
-                        <a:t>30.2</a:t>
+                        <a:t>30.1</a:t>
                       </a:r>
                     </a:p>
                   </a:txBody>
@@ -4544,7 +4544,7 @@
                           </a:solidFill>
                           <a:latin typeface="Calibri"/>
                         </a:rPr>
-                        <a:t>1,175</a:t>
+                        <a:t>1,215</a:t>
                       </a:r>
                     </a:p>
                   </a:txBody>
@@ -4567,7 +4567,7 @@
                           </a:solidFill>
                           <a:latin typeface="Calibri"/>
                         </a:rPr>
-                        <a:t>+0.68%</a:t>
+                        <a:t>+3.44%</a:t>
                       </a:r>
                     </a:p>
                   </a:txBody>
@@ -4586,11 +4586,34 @@
                       <a:r>
                         <a:rPr sz="1000" b="0">
                           <a:solidFill>
+                            <a:srgbClr val="0B7A3B"/>
+                          </a:solidFill>
+                          <a:latin typeface="Calibri"/>
+                        </a:rPr>
+                        <a:t>+3.14%</a:t>
+                      </a:r>
+                    </a:p>
+                  </a:txBody>
+                  <a:tcPr>
+                    <a:solidFill>
+                      <a:srgbClr val="F3F5F7"/>
+                    </a:solidFill>
+                  </a:tcPr>
+                </a:tc>
+                <a:tc>
+                  <a:txBody>
+                    <a:bodyPr/>
+                    <a:lstStyle/>
+                    <a:p>
+                      <a:pPr algn="r"/>
+                      <a:r>
+                        <a:rPr sz="1000" b="0">
+                          <a:solidFill>
                             <a:srgbClr val="B3261E"/>
                           </a:solidFill>
                           <a:latin typeface="Calibri"/>
                         </a:rPr>
-                        <a:t>-2.74%</a:t>
+                        <a:t>-2.02%</a:t>
                       </a:r>
                     </a:p>
                   </a:txBody>
@@ -4609,11 +4632,11 @@
                       <a:r>
                         <a:rPr sz="1000" b="0">
                           <a:solidFill>
-                            <a:srgbClr val="B3261E"/>
-                          </a:solidFill>
-                          <a:latin typeface="Calibri"/>
-                        </a:rPr>
-                        <a:t>-4.91%</a:t>
+                            <a:srgbClr val="1F2A37"/>
+                          </a:solidFill>
+                          <a:latin typeface="Calibri"/>
+                        </a:rPr>
+                        <a:t>-23.3%</a:t>
                       </a:r>
                     </a:p>
                   </a:txBody>
@@ -4636,7 +4659,7 @@
                           </a:solidFill>
                           <a:latin typeface="Calibri"/>
                         </a:rPr>
-                        <a:t>-25.9%</a:t>
+                        <a:t>23%</a:t>
                       </a:r>
                     </a:p>
                   </a:txBody>
@@ -4659,30 +4682,7 @@
                           </a:solidFill>
                           <a:latin typeface="Calibri"/>
                         </a:rPr>
-                        <a:t>20%</a:t>
-                      </a:r>
-                    </a:p>
-                  </a:txBody>
-                  <a:tcPr>
-                    <a:solidFill>
-                      <a:srgbClr val="F3F5F7"/>
-                    </a:solidFill>
-                  </a:tcPr>
-                </a:tc>
-                <a:tc>
-                  <a:txBody>
-                    <a:bodyPr/>
-                    <a:lstStyle/>
-                    <a:p>
-                      <a:pPr algn="r"/>
-                      <a:r>
-                        <a:rPr sz="1000" b="0">
-                          <a:solidFill>
-                            <a:srgbClr val="1F2A37"/>
-                          </a:solidFill>
-                          <a:latin typeface="Calibri"/>
-                        </a:rPr>
-                        <a:t>21.3</a:t>
+                        <a:t>22.0</a:t>
                       </a:r>
                     </a:p>
                   </a:txBody>
@@ -4730,7 +4730,7 @@
                           </a:solidFill>
                           <a:latin typeface="Calibri"/>
                         </a:rPr>
-                        <a:t>2,305</a:t>
+                        <a:t>2,350</a:t>
                       </a:r>
                     </a:p>
                   </a:txBody>
@@ -4753,7 +4753,7 @@
                           </a:solidFill>
                           <a:latin typeface="Calibri"/>
                         </a:rPr>
-                        <a:t>+2.11%</a:t>
+                        <a:t>+1.96%</a:t>
                       </a:r>
                     </a:p>
                   </a:txBody>
@@ -4776,7 +4776,7 @@
                           </a:solidFill>
                           <a:latin typeface="Calibri"/>
                         </a:rPr>
-                        <a:t>+11.39%</a:t>
+                        <a:t>+13.80%</a:t>
                       </a:r>
                     </a:p>
                   </a:txBody>
@@ -4799,7 +4799,7 @@
                           </a:solidFill>
                           <a:latin typeface="Calibri"/>
                         </a:rPr>
-                        <a:t>+2.94%</a:t>
+                        <a:t>+7.94%</a:t>
                       </a:r>
                     </a:p>
                   </a:txBody>
@@ -4822,7 +4822,7 @@
                           </a:solidFill>
                           <a:latin typeface="Calibri"/>
                         </a:rPr>
-                        <a:t>-27.7%</a:t>
+                        <a:t>-26.3%</a:t>
                       </a:r>
                     </a:p>
                   </a:txBody>
@@ -4845,7 +4845,7 @@
                           </a:solidFill>
                           <a:latin typeface="Calibri"/>
                         </a:rPr>
-                        <a:t>31%</a:t>
+                        <a:t>32%</a:t>
                       </a:r>
                     </a:p>
                   </a:txBody>
@@ -4868,7 +4868,7 @@
                           </a:solidFill>
                           <a:latin typeface="Calibri"/>
                         </a:rPr>
-                        <a:t>16.2</a:t>
+                        <a:t>16.5</a:t>
                       </a:r>
                     </a:p>
                   </a:txBody>
@@ -4900,7 +4900,7 @@
         <p:spPr>
           <a:xfrm>
             <a:off x="411480" y="4370832"/>
-            <a:ext cx="7040880" cy="2061863"/>
+            <a:ext cx="7040880" cy="2063354"/>
           </a:xfrm>
           <a:prstGeom prst="rect">
             <a:avLst/>
@@ -4952,7 +4952,7 @@
                 </a:solidFill>
                 <a:latin typeface="Calibri"/>
               </a:rPr>
-              <a:t>Breadth was mixed: 4 of 8 names advanced on the day.</a:t>
+              <a:t>Breadth was risk-on: 7 of 8 names advanced on the day.</a:t>
             </a:r>
           </a:p>
           <a:p>
@@ -4968,7 +4968,7 @@
                 </a:solidFill>
                 <a:latin typeface="Calibri"/>
               </a:rPr>
-              <a:t>•  Best performer on the day: INFY.NS at +2.44%.</a:t>
+              <a:t>•  Best performer on the day: ICICIBANK.NS at +3.80%.</a:t>
             </a:r>
           </a:p>
           <a:p>
@@ -4984,7 +4984,7 @@
                 </a:solidFill>
                 <a:latin typeface="Calibri"/>
               </a:rPr>
-              <a:t>•  Weakest on the day: ICICIBANK.NS at -1.59%.</a:t>
+              <a:t>•  Weakest on the day: LT.NS at -0.27%.</a:t>
             </a:r>
           </a:p>
           <a:p>
@@ -5000,7 +5000,7 @@
                 </a:solidFill>
                 <a:latin typeface="Calibri"/>
               </a:rPr>
-              <a:t>•  Median one-day move across the watchlist: -0.14%.</a:t>
+              <a:t>•  Median one-day move across the watchlist: +2.15%.</a:t>
             </a:r>
           </a:p>
           <a:p>
@@ -5016,7 +5016,23 @@
                 </a:solidFill>
                 <a:latin typeface="Calibri"/>
               </a:rPr>
-              <a:t>•  ITC.NS sits furthest below its 52-week high, at -34.9%.</a:t>
+              <a:t>•  ITC.NS sits furthest below its 52-week high, at -34.4%.</a:t>
+            </a:r>
+          </a:p>
+          <a:p>
+            <a:pPr>
+              <a:spcBef>
+                <a:spcPts val="500"/>
+              </a:spcBef>
+            </a:pPr>
+            <a:r>
+              <a:rPr sz="1000" b="0">
+                <a:solidFill>
+                  <a:srgbClr val="1F2A37"/>
+                </a:solidFill>
+                <a:latin typeface="Calibri"/>
+              </a:rPr>
+              <a:t>•  1 name(s) within 5% of the 52-week high: ICICIBANK.NS.</a:t>
             </a:r>
           </a:p>
           <a:p>
@@ -5048,7 +5064,7 @@
                 </a:solidFill>
                 <a:latin typeface="Calibri"/>
               </a:rPr>
-              <a:t>•  Highest 30-day realised volatility: INFY.NS at 31.7% annualised.</a:t>
+              <a:t>•  Highest 30-day realised volatility: INFY.NS at 32.2% annualised.</a:t>
             </a:r>
           </a:p>
           <a:p>
@@ -5064,7 +5080,7 @@
                 </a:solidFill>
                 <a:latin typeface="Calibri"/>
               </a:rPr>
-              <a:t>•  60 headlines collected, 7 tagged to a watchlist name by substring match (unverified).</a:t>
+              <a:t>•  60 headlines collected, 10 tagged to a watchlist name by substring match (unverified).</a:t>
             </a:r>
           </a:p>
           <a:p>

--- a/public/deskbrief.pptx
+++ b/public/deskbrief.pptx
@@ -3128,7 +3128,7 @@
                 </a:solidFill>
                 <a:latin typeface="Calibri"/>
               </a:rPr>
-              <a:t>8 names  |  generated 15 Oct 2026 17:14  |  source: Yahoo Finance via yfinance, Indian financial RSS</a:t>
+              <a:t>8 names  |  generated 16 Oct 2026 16:50  |  source: Yahoo Finance via yfinance, Indian financial RSS</a:t>
             </a:r>
           </a:p>
         </p:txBody>
@@ -3428,7 +3428,7 @@
                           </a:solidFill>
                           <a:latin typeface="Calibri"/>
                         </a:rPr>
-                        <a:t>1,854</a:t>
+                        <a:t>1,905</a:t>
                       </a:r>
                     </a:p>
                   </a:txBody>
@@ -3451,7 +3451,7 @@
                           </a:solidFill>
                           <a:latin typeface="Calibri"/>
                         </a:rPr>
-                        <a:t>+3.31%</a:t>
+                        <a:t>+2.75%</a:t>
                       </a:r>
                     </a:p>
                   </a:txBody>
@@ -3474,7 +3474,7 @@
                           </a:solidFill>
                           <a:latin typeface="Calibri"/>
                         </a:rPr>
-                        <a:t>+2.74%</a:t>
+                        <a:t>+5.53%</a:t>
                       </a:r>
                     </a:p>
                   </a:txBody>
@@ -3497,7 +3497,7 @@
                           </a:solidFill>
                           <a:latin typeface="Calibri"/>
                         </a:rPr>
-                        <a:t>+1.04%</a:t>
+                        <a:t>+3.76%</a:t>
                       </a:r>
                     </a:p>
                   </a:txBody>
@@ -3520,7 +3520,7 @@
                           </a:solidFill>
                           <a:latin typeface="Calibri"/>
                         </a:rPr>
-                        <a:t>-13.2%</a:t>
+                        <a:t>-10.8%</a:t>
                       </a:r>
                     </a:p>
                   </a:txBody>
@@ -3566,7 +3566,7 @@
                           </a:solidFill>
                           <a:latin typeface="Calibri"/>
                         </a:rPr>
-                        <a:t>38.2</a:t>
+                        <a:t>39.8</a:t>
                       </a:r>
                     </a:p>
                   </a:txBody>
@@ -3614,7 +3614,7 @@
                           </a:solidFill>
                           <a:latin typeface="Calibri"/>
                         </a:rPr>
-                        <a:t>727</a:t>
+                        <a:t>729</a:t>
                       </a:r>
                     </a:p>
                   </a:txBody>
@@ -3637,7 +3637,7 @@
                           </a:solidFill>
                           <a:latin typeface="Calibri"/>
                         </a:rPr>
-                        <a:t>+2.27%</a:t>
+                        <a:t>+0.28%</a:t>
                       </a:r>
                     </a:p>
                   </a:txBody>
@@ -3660,7 +3660,7 @@
                           </a:solidFill>
                           <a:latin typeface="Calibri"/>
                         </a:rPr>
-                        <a:t>+5.00%</a:t>
+                        <a:t>+3.05%</a:t>
                       </a:r>
                     </a:p>
                   </a:txBody>
@@ -3683,7 +3683,7 @@
                           </a:solidFill>
                           <a:latin typeface="Calibri"/>
                         </a:rPr>
-                        <a:t>+0.74%</a:t>
+                        <a:t>+2.22%</a:t>
                       </a:r>
                     </a:p>
                   </a:txBody>
@@ -3706,7 +3706,7 @@
                           </a:solidFill>
                           <a:latin typeface="Calibri"/>
                         </a:rPr>
-                        <a:t>-26.8%</a:t>
+                        <a:t>-26.6%</a:t>
                       </a:r>
                     </a:p>
                   </a:txBody>
@@ -3800,7 +3800,7 @@
                           </a:solidFill>
                           <a:latin typeface="Calibri"/>
                         </a:rPr>
-                        <a:t>1,389</a:t>
+                        <a:t>1,397</a:t>
                       </a:r>
                     </a:p>
                   </a:txBody>
@@ -3823,7 +3823,7 @@
                           </a:solidFill>
                           <a:latin typeface="Calibri"/>
                         </a:rPr>
-                        <a:t>+3.80%</a:t>
+                        <a:t>+0.55%</a:t>
                       </a:r>
                     </a:p>
                   </a:txBody>
@@ -3846,7 +3846,7 @@
                           </a:solidFill>
                           <a:latin typeface="Calibri"/>
                         </a:rPr>
-                        <a:t>+2.99%</a:t>
+                        <a:t>+3.10%</a:t>
                       </a:r>
                     </a:p>
                   </a:txBody>
@@ -3869,7 +3869,7 @@
                           </a:solidFill>
                           <a:latin typeface="Calibri"/>
                         </a:rPr>
-                        <a:t>+2.25%</a:t>
+                        <a:t>+3.67%</a:t>
                       </a:r>
                     </a:p>
                   </a:txBody>
@@ -3892,7 +3892,7 @@
                           </a:solidFill>
                           <a:latin typeface="Calibri"/>
                         </a:rPr>
-                        <a:t>-4.8%</a:t>
+                        <a:t>-4.3%</a:t>
                       </a:r>
                     </a:p>
                   </a:txBody>
@@ -3938,7 +3938,7 @@
                           </a:solidFill>
                           <a:latin typeface="Calibri"/>
                         </a:rPr>
-                        <a:t>18.0</a:t>
+                        <a:t>18.1</a:t>
                       </a:r>
                     </a:p>
                   </a:txBody>
@@ -3986,7 +3986,7 @@
                           </a:solidFill>
                           <a:latin typeface="Calibri"/>
                         </a:rPr>
-                        <a:t>1,110</a:t>
+                        <a:t>1,161</a:t>
                       </a:r>
                     </a:p>
                   </a:txBody>
@@ -4009,7 +4009,7 @@
                           </a:solidFill>
                           <a:latin typeface="Calibri"/>
                         </a:rPr>
-                        <a:t>+2.02%</a:t>
+                        <a:t>+4.61%</a:t>
                       </a:r>
                     </a:p>
                   </a:txBody>
@@ -4032,7 +4032,7 @@
                           </a:solidFill>
                           <a:latin typeface="Calibri"/>
                         </a:rPr>
-                        <a:t>+11.33%</a:t>
+                        <a:t>+13.46%</a:t>
                       </a:r>
                     </a:p>
                   </a:txBody>
@@ -4055,7 +4055,7 @@
                           </a:solidFill>
                           <a:latin typeface="Calibri"/>
                         </a:rPr>
-                        <a:t>+4.72%</a:t>
+                        <a:t>+9.69%</a:t>
                       </a:r>
                     </a:p>
                   </a:txBody>
@@ -4078,7 +4078,7 @@
                           </a:solidFill>
                           <a:latin typeface="Calibri"/>
                         </a:rPr>
-                        <a:t>-32.9%</a:t>
+                        <a:t>-29.8%</a:t>
                       </a:r>
                     </a:p>
                   </a:txBody>
@@ -4101,7 +4101,7 @@
                           </a:solidFill>
                           <a:latin typeface="Calibri"/>
                         </a:rPr>
-                        <a:t>32%</a:t>
+                        <a:t>35%</a:t>
                       </a:r>
                     </a:p>
                   </a:txBody>
@@ -4124,7 +4124,7 @@
                           </a:solidFill>
                           <a:latin typeface="Calibri"/>
                         </a:rPr>
-                        <a:t>15.1</a:t>
+                        <a:t>15.8</a:t>
                       </a:r>
                     </a:p>
                   </a:txBody>
@@ -4191,11 +4191,11 @@
                       <a:r>
                         <a:rPr sz="1000" b="0">
                           <a:solidFill>
-                            <a:srgbClr val="0B7A3B"/>
-                          </a:solidFill>
-                          <a:latin typeface="Calibri"/>
-                        </a:rPr>
-                        <a:t>+0.92%</a:t>
+                            <a:srgbClr val="B3261E"/>
+                          </a:solidFill>
+                          <a:latin typeface="Calibri"/>
+                        </a:rPr>
+                        <a:t>-0.15%</a:t>
                       </a:r>
                     </a:p>
                   </a:txBody>
@@ -4214,11 +4214,11 @@
                       <a:r>
                         <a:rPr sz="1000" b="0">
                           <a:solidFill>
-                            <a:srgbClr val="0B7A3B"/>
-                          </a:solidFill>
-                          <a:latin typeface="Calibri"/>
-                        </a:rPr>
-                        <a:t>+3.49%</a:t>
+                            <a:srgbClr val="B3261E"/>
+                          </a:solidFill>
+                          <a:latin typeface="Calibri"/>
+                        </a:rPr>
+                        <a:t>-0.94%</a:t>
                       </a:r>
                     </a:p>
                   </a:txBody>
@@ -4241,7 +4241,7 @@
                           </a:solidFill>
                           <a:latin typeface="Calibri"/>
                         </a:rPr>
-                        <a:t>-0.09%</a:t>
+                        <a:t>-1.01%</a:t>
                       </a:r>
                     </a:p>
                   </a:txBody>
@@ -4264,7 +4264,7 @@
                           </a:solidFill>
                           <a:latin typeface="Calibri"/>
                         </a:rPr>
-                        <a:t>-34.4%</a:t>
+                        <a:t>-34.5%</a:t>
                       </a:r>
                     </a:p>
                   </a:txBody>
@@ -4310,7 +4310,7 @@
                           </a:solidFill>
                           <a:latin typeface="Calibri"/>
                         </a:rPr>
-                        <a:t>16.7</a:t>
+                        <a:t>16.6</a:t>
                       </a:r>
                     </a:p>
                   </a:txBody>
@@ -4358,7 +4358,7 @@
                           </a:solidFill>
                           <a:latin typeface="Calibri"/>
                         </a:rPr>
-                        <a:t>3,632</a:t>
+                        <a:t>3,627</a:t>
                       </a:r>
                     </a:p>
                   </a:txBody>
@@ -4381,7 +4381,7 @@
                           </a:solidFill>
                           <a:latin typeface="Calibri"/>
                         </a:rPr>
-                        <a:t>-0.27%</a:t>
+                        <a:t>-0.13%</a:t>
                       </a:r>
                     </a:p>
                   </a:txBody>
@@ -4400,11 +4400,11 @@
                       <a:r>
                         <a:rPr sz="1000" b="0">
                           <a:solidFill>
-                            <a:srgbClr val="0B7A3B"/>
-                          </a:solidFill>
-                          <a:latin typeface="Calibri"/>
-                        </a:rPr>
-                        <a:t>+0.19%</a:t>
+                            <a:srgbClr val="B3261E"/>
+                          </a:solidFill>
+                          <a:latin typeface="Calibri"/>
+                        </a:rPr>
+                        <a:t>-2.06%</a:t>
                       </a:r>
                     </a:p>
                   </a:txBody>
@@ -4427,7 +4427,7 @@
                           </a:solidFill>
                           <a:latin typeface="Calibri"/>
                         </a:rPr>
-                        <a:t>-4.61%</a:t>
+                        <a:t>-5.45%</a:t>
                       </a:r>
                     </a:p>
                   </a:txBody>
@@ -4450,7 +4450,7 @@
                           </a:solidFill>
                           <a:latin typeface="Calibri"/>
                         </a:rPr>
-                        <a:t>-17.0%</a:t>
+                        <a:t>-17.1%</a:t>
                       </a:r>
                     </a:p>
                   </a:txBody>
@@ -4544,7 +4544,7 @@
                           </a:solidFill>
                           <a:latin typeface="Calibri"/>
                         </a:rPr>
-                        <a:t>1,215</a:t>
+                        <a:t>1,211</a:t>
                       </a:r>
                     </a:p>
                   </a:txBody>
@@ -4563,11 +4563,34 @@
                       <a:r>
                         <a:rPr sz="1000" b="0">
                           <a:solidFill>
+                            <a:srgbClr val="B3261E"/>
+                          </a:solidFill>
+                          <a:latin typeface="Calibri"/>
+                        </a:rPr>
+                        <a:t>-0.31%</a:t>
+                      </a:r>
+                    </a:p>
+                  </a:txBody>
+                  <a:tcPr>
+                    <a:solidFill>
+                      <a:srgbClr val="F3F5F7"/>
+                    </a:solidFill>
+                  </a:tcPr>
+                </a:tc>
+                <a:tc>
+                  <a:txBody>
+                    <a:bodyPr/>
+                    <a:lstStyle/>
+                    <a:p>
+                      <a:pPr algn="r"/>
+                      <a:r>
+                        <a:rPr sz="1000" b="0">
+                          <a:solidFill>
                             <a:srgbClr val="0B7A3B"/>
                           </a:solidFill>
                           <a:latin typeface="Calibri"/>
                         </a:rPr>
-                        <a:t>+3.44%</a:t>
+                        <a:t>+3.49%</a:t>
                       </a:r>
                     </a:p>
                   </a:txBody>
@@ -4586,11 +4609,11 @@
                       <a:r>
                         <a:rPr sz="1000" b="0">
                           <a:solidFill>
-                            <a:srgbClr val="0B7A3B"/>
-                          </a:solidFill>
-                          <a:latin typeface="Calibri"/>
-                        </a:rPr>
-                        <a:t>+3.14%</a:t>
+                            <a:srgbClr val="B3261E"/>
+                          </a:solidFill>
+                          <a:latin typeface="Calibri"/>
+                        </a:rPr>
+                        <a:t>-2.63%</a:t>
                       </a:r>
                     </a:p>
                   </a:txBody>
@@ -4609,11 +4632,11 @@
                       <a:r>
                         <a:rPr sz="1000" b="0">
                           <a:solidFill>
-                            <a:srgbClr val="B3261E"/>
-                          </a:solidFill>
-                          <a:latin typeface="Calibri"/>
-                        </a:rPr>
-                        <a:t>-2.02%</a:t>
+                            <a:srgbClr val="1F2A37"/>
+                          </a:solidFill>
+                          <a:latin typeface="Calibri"/>
+                        </a:rPr>
+                        <a:t>-23.6%</a:t>
                       </a:r>
                     </a:p>
                   </a:txBody>
@@ -4636,7 +4659,7 @@
                           </a:solidFill>
                           <a:latin typeface="Calibri"/>
                         </a:rPr>
-                        <a:t>-23.3%</a:t>
+                        <a:t>22%</a:t>
                       </a:r>
                     </a:p>
                   </a:txBody>
@@ -4659,30 +4682,7 @@
                           </a:solidFill>
                           <a:latin typeface="Calibri"/>
                         </a:rPr>
-                        <a:t>23%</a:t>
-                      </a:r>
-                    </a:p>
-                  </a:txBody>
-                  <a:tcPr>
-                    <a:solidFill>
-                      <a:srgbClr val="F3F5F7"/>
-                    </a:solidFill>
-                  </a:tcPr>
-                </a:tc>
-                <a:tc>
-                  <a:txBody>
-                    <a:bodyPr/>
-                    <a:lstStyle/>
-                    <a:p>
-                      <a:pPr algn="r"/>
-                      <a:r>
-                        <a:rPr sz="1000" b="0">
-                          <a:solidFill>
-                            <a:srgbClr val="1F2A37"/>
-                          </a:solidFill>
-                          <a:latin typeface="Calibri"/>
-                        </a:rPr>
-                        <a:t>22.0</a:t>
+                        <a:t>21.9</a:t>
                       </a:r>
                     </a:p>
                   </a:txBody>
@@ -4730,7 +4730,7 @@
                           </a:solidFill>
                           <a:latin typeface="Calibri"/>
                         </a:rPr>
-                        <a:t>2,350</a:t>
+                        <a:t>2,465</a:t>
                       </a:r>
                     </a:p>
                   </a:txBody>
@@ -4753,7 +4753,7 @@
                           </a:solidFill>
                           <a:latin typeface="Calibri"/>
                         </a:rPr>
-                        <a:t>+1.96%</a:t>
+                        <a:t>+4.89%</a:t>
                       </a:r>
                     </a:p>
                   </a:txBody>
@@ -4776,7 +4776,7 @@
                           </a:solidFill>
                           <a:latin typeface="Calibri"/>
                         </a:rPr>
-                        <a:t>+13.80%</a:t>
+                        <a:t>+14.94%</a:t>
                       </a:r>
                     </a:p>
                   </a:txBody>
@@ -4799,7 +4799,7 @@
                           </a:solidFill>
                           <a:latin typeface="Calibri"/>
                         </a:rPr>
-                        <a:t>+7.94%</a:t>
+                        <a:t>+13.16%</a:t>
                       </a:r>
                     </a:p>
                   </a:txBody>
@@ -4822,7 +4822,7 @@
                           </a:solidFill>
                           <a:latin typeface="Calibri"/>
                         </a:rPr>
-                        <a:t>-26.3%</a:t>
+                        <a:t>-22.7%</a:t>
                       </a:r>
                     </a:p>
                   </a:txBody>
@@ -4845,7 +4845,7 @@
                           </a:solidFill>
                           <a:latin typeface="Calibri"/>
                         </a:rPr>
-                        <a:t>32%</a:t>
+                        <a:t>34%</a:t>
                       </a:r>
                     </a:p>
                   </a:txBody>
@@ -4868,7 +4868,7 @@
                           </a:solidFill>
                           <a:latin typeface="Calibri"/>
                         </a:rPr>
-                        <a:t>16.5</a:t>
+                        <a:t>17.3</a:t>
                       </a:r>
                     </a:p>
                   </a:txBody>
@@ -4952,7 +4952,7 @@
                 </a:solidFill>
                 <a:latin typeface="Calibri"/>
               </a:rPr>
-              <a:t>Breadth was risk-on: 7 of 8 names advanced on the day.</a:t>
+              <a:t>Breadth was risk-on: 5 of 8 names advanced on the day.</a:t>
             </a:r>
           </a:p>
           <a:p>
@@ -4968,7 +4968,7 @@
                 </a:solidFill>
                 <a:latin typeface="Calibri"/>
               </a:rPr>
-              <a:t>•  Best performer on the day: ICICIBANK.NS at +3.80%.</a:t>
+              <a:t>•  Best performer on the day: TCS.NS at +4.89%.</a:t>
             </a:r>
           </a:p>
           <a:p>
@@ -4984,7 +4984,7 @@
                 </a:solidFill>
                 <a:latin typeface="Calibri"/>
               </a:rPr>
-              <a:t>•  Weakest on the day: LT.NS at -0.27%.</a:t>
+              <a:t>•  Weakest on the day: RELIANCE.NS at -0.31%.</a:t>
             </a:r>
           </a:p>
           <a:p>
@@ -5000,7 +5000,7 @@
                 </a:solidFill>
                 <a:latin typeface="Calibri"/>
               </a:rPr>
-              <a:t>•  Median one-day move across the watchlist: +2.15%.</a:t>
+              <a:t>•  Median one-day move across the watchlist: +0.41%.</a:t>
             </a:r>
           </a:p>
           <a:p>
@@ -5016,7 +5016,7 @@
                 </a:solidFill>
                 <a:latin typeface="Calibri"/>
               </a:rPr>
-              <a:t>•  ITC.NS sits furthest below its 52-week high, at -34.4%.</a:t>
+              <a:t>•  ITC.NS sits furthest below its 52-week high, at -34.5%.</a:t>
             </a:r>
           </a:p>
           <a:p>
@@ -5064,7 +5064,7 @@
                 </a:solidFill>
                 <a:latin typeface="Calibri"/>
               </a:rPr>
-              <a:t>•  Highest 30-day realised volatility: INFY.NS at 32.2% annualised.</a:t>
+              <a:t>•  Highest 30-day realised volatility: INFY.NS at 34.9% annualised.</a:t>
             </a:r>
           </a:p>
           <a:p>
@@ -5080,7 +5080,7 @@
                 </a:solidFill>
                 <a:latin typeface="Calibri"/>
               </a:rPr>
-              <a:t>•  60 headlines collected, 10 tagged to a watchlist name by substring match (unverified).</a:t>
+              <a:t>•  60 headlines collected, 7 tagged to a watchlist name by substring match (unverified).</a:t>
             </a:r>
           </a:p>
           <a:p>

--- a/public/deskbrief.pptx
+++ b/public/deskbrief.pptx
@@ -3128,7 +3128,7 @@
                 </a:solidFill>
                 <a:latin typeface="Calibri"/>
               </a:rPr>
-              <a:t>8 names  |  generated 16 Oct 2026 16:50  |  source: Yahoo Finance via yfinance, Indian financial RSS</a:t>
+              <a:t>8 names  |  generated 19 Oct 2026 18:47  |  source: Yahoo Finance via yfinance, Indian financial RSS</a:t>
             </a:r>
           </a:p>
         </p:txBody>
@@ -3566,7 +3566,7 @@
                           </a:solidFill>
                           <a:latin typeface="Calibri"/>
                         </a:rPr>
-                        <a:t>39.8</a:t>
+                        <a:t>39.2</a:t>
                       </a:r>
                     </a:p>
                   </a:txBody>
@@ -3752,7 +3752,7 @@
                           </a:solidFill>
                           <a:latin typeface="Calibri"/>
                         </a:rPr>
-                        <a:t>15.9</a:t>
+                        <a:t>15.6</a:t>
                       </a:r>
                     </a:p>
                   </a:txBody>
@@ -3938,7 +3938,7 @@
                           </a:solidFill>
                           <a:latin typeface="Calibri"/>
                         </a:rPr>
-                        <a:t>18.1</a:t>
+                        <a:t>17.9</a:t>
                       </a:r>
                     </a:p>
                   </a:txBody>
@@ -4124,7 +4124,7 @@
                           </a:solidFill>
                           <a:latin typeface="Calibri"/>
                         </a:rPr>
-                        <a:t>15.8</a:t>
+                        <a:t>15.4</a:t>
                       </a:r>
                     </a:p>
                   </a:txBody>
@@ -4310,7 +4310,7 @@
                           </a:solidFill>
                           <a:latin typeface="Calibri"/>
                         </a:rPr>
-                        <a:t>16.6</a:t>
+                        <a:t>16.5</a:t>
                       </a:r>
                     </a:p>
                   </a:txBody>
@@ -4496,7 +4496,7 @@
                           </a:solidFill>
                           <a:latin typeface="Calibri"/>
                         </a:rPr>
-                        <a:t>30.1</a:t>
+                        <a:t>30.4</a:t>
                       </a:r>
                     </a:p>
                   </a:txBody>
@@ -4682,7 +4682,7 @@
                           </a:solidFill>
                           <a:latin typeface="Calibri"/>
                         </a:rPr>
-                        <a:t>21.9</a:t>
+                        <a:t>21.8</a:t>
                       </a:r>
                     </a:p>
                   </a:txBody>
@@ -5080,7 +5080,7 @@
                 </a:solidFill>
                 <a:latin typeface="Calibri"/>
               </a:rPr>
-              <a:t>•  60 headlines collected, 7 tagged to a watchlist name by substring match (unverified).</a:t>
+              <a:t>•  60 headlines collected, 4 tagged to a watchlist name by substring match (unverified).</a:t>
             </a:r>
           </a:p>
           <a:p>

--- a/public/deskbrief.pptx
+++ b/public/deskbrief.pptx
@@ -3128,7 +3128,7 @@
                 </a:solidFill>
                 <a:latin typeface="Calibri"/>
               </a:rPr>
-              <a:t>8 names  |  generated 19 Oct 2026 18:47  |  source: Yahoo Finance via yfinance, Indian financial RSS</a:t>
+              <a:t>8 names  |  generated 20 Oct 2026 17:24  |  source: Yahoo Finance via yfinance, Indian financial RSS</a:t>
             </a:r>
           </a:p>
         </p:txBody>
@@ -3428,7 +3428,7 @@
                           </a:solidFill>
                           <a:latin typeface="Calibri"/>
                         </a:rPr>
-                        <a:t>1,905</a:t>
+                        <a:t>1,875</a:t>
                       </a:r>
                     </a:p>
                   </a:txBody>
@@ -3447,11 +3447,34 @@
                       <a:r>
                         <a:rPr sz="1000" b="0">
                           <a:solidFill>
+                            <a:srgbClr val="B3261E"/>
+                          </a:solidFill>
+                          <a:latin typeface="Calibri"/>
+                        </a:rPr>
+                        <a:t>-1.56%</a:t>
+                      </a:r>
+                    </a:p>
+                  </a:txBody>
+                  <a:tcPr>
+                    <a:solidFill>
+                      <a:srgbClr val="F3F5F7"/>
+                    </a:solidFill>
+                  </a:tcPr>
+                </a:tc>
+                <a:tc>
+                  <a:txBody>
+                    <a:bodyPr/>
+                    <a:lstStyle/>
+                    <a:p>
+                      <a:pPr algn="r"/>
+                      <a:r>
+                        <a:rPr sz="1000" b="0">
+                          <a:solidFill>
                             <a:srgbClr val="0B7A3B"/>
                           </a:solidFill>
                           <a:latin typeface="Calibri"/>
                         </a:rPr>
-                        <a:t>+2.75%</a:t>
+                        <a:t>+5.43%</a:t>
                       </a:r>
                     </a:p>
                   </a:txBody>
@@ -3470,11 +3493,11 @@
                       <a:r>
                         <a:rPr sz="1000" b="0">
                           <a:solidFill>
-                            <a:srgbClr val="0B7A3B"/>
-                          </a:solidFill>
-                          <a:latin typeface="Calibri"/>
-                        </a:rPr>
-                        <a:t>+5.53%</a:t>
+                            <a:srgbClr val="B3261E"/>
+                          </a:solidFill>
+                          <a:latin typeface="Calibri"/>
+                        </a:rPr>
+                        <a:t>-0.96%</a:t>
                       </a:r>
                     </a:p>
                   </a:txBody>
@@ -3493,11 +3516,11 @@
                       <a:r>
                         <a:rPr sz="1000" b="0">
                           <a:solidFill>
-                            <a:srgbClr val="0B7A3B"/>
-                          </a:solidFill>
-                          <a:latin typeface="Calibri"/>
-                        </a:rPr>
-                        <a:t>+3.76%</a:t>
+                            <a:srgbClr val="1F2A37"/>
+                          </a:solidFill>
+                          <a:latin typeface="Calibri"/>
+                        </a:rPr>
+                        <a:t>-12.2%</a:t>
                       </a:r>
                     </a:p>
                   </a:txBody>
@@ -3520,30 +3543,7 @@
                           </a:solidFill>
                           <a:latin typeface="Calibri"/>
                         </a:rPr>
-                        <a:t>-10.8%</a:t>
-                      </a:r>
-                    </a:p>
-                  </a:txBody>
-                  <a:tcPr>
-                    <a:solidFill>
-                      <a:srgbClr val="F3F5F7"/>
-                    </a:solidFill>
-                  </a:tcPr>
-                </a:tc>
-                <a:tc>
-                  <a:txBody>
-                    <a:bodyPr/>
-                    <a:lstStyle/>
-                    <a:p>
-                      <a:pPr algn="r"/>
-                      <a:r>
-                        <a:rPr sz="1000" b="0">
-                          <a:solidFill>
-                            <a:srgbClr val="1F2A37"/>
-                          </a:solidFill>
-                          <a:latin typeface="Calibri"/>
-                        </a:rPr>
-                        <a:t>24%</a:t>
+                        <a:t>25%</a:t>
                       </a:r>
                     </a:p>
                   </a:txBody>
@@ -3614,7 +3614,7 @@
                           </a:solidFill>
                           <a:latin typeface="Calibri"/>
                         </a:rPr>
-                        <a:t>729</a:t>
+                        <a:t>712</a:t>
                       </a:r>
                     </a:p>
                   </a:txBody>
@@ -3633,11 +3633,34 @@
                       <a:r>
                         <a:rPr sz="1000" b="0">
                           <a:solidFill>
+                            <a:srgbClr val="B3261E"/>
+                          </a:solidFill>
+                          <a:latin typeface="Calibri"/>
+                        </a:rPr>
+                        <a:t>-2.31%</a:t>
+                      </a:r>
+                    </a:p>
+                  </a:txBody>
+                  <a:tcPr>
+                    <a:solidFill>
+                      <a:srgbClr val="FFFFFF"/>
+                    </a:solidFill>
+                  </a:tcPr>
+                </a:tc>
+                <a:tc>
+                  <a:txBody>
+                    <a:bodyPr/>
+                    <a:lstStyle/>
+                    <a:p>
+                      <a:pPr algn="r"/>
+                      <a:r>
+                        <a:rPr sz="1000" b="0">
+                          <a:solidFill>
                             <a:srgbClr val="0B7A3B"/>
                           </a:solidFill>
                           <a:latin typeface="Calibri"/>
                         </a:rPr>
-                        <a:t>+0.28%</a:t>
+                        <a:t>+1.01%</a:t>
                       </a:r>
                     </a:p>
                   </a:txBody>
@@ -3656,11 +3679,11 @@
                       <a:r>
                         <a:rPr sz="1000" b="0">
                           <a:solidFill>
-                            <a:srgbClr val="0B7A3B"/>
-                          </a:solidFill>
-                          <a:latin typeface="Calibri"/>
-                        </a:rPr>
-                        <a:t>+3.05%</a:t>
+                            <a:srgbClr val="B3261E"/>
+                          </a:solidFill>
+                          <a:latin typeface="Calibri"/>
+                        </a:rPr>
+                        <a:t>-2.60%</a:t>
                       </a:r>
                     </a:p>
                   </a:txBody>
@@ -3679,11 +3702,11 @@
                       <a:r>
                         <a:rPr sz="1000" b="0">
                           <a:solidFill>
-                            <a:srgbClr val="0B7A3B"/>
-                          </a:solidFill>
-                          <a:latin typeface="Calibri"/>
-                        </a:rPr>
-                        <a:t>+2.22%</a:t>
+                            <a:srgbClr val="1F2A37"/>
+                          </a:solidFill>
+                          <a:latin typeface="Calibri"/>
+                        </a:rPr>
+                        <a:t>-28.3%</a:t>
                       </a:r>
                     </a:p>
                   </a:txBody>
@@ -3706,30 +3729,7 @@
                           </a:solidFill>
                           <a:latin typeface="Calibri"/>
                         </a:rPr>
-                        <a:t>-26.6%</a:t>
-                      </a:r>
-                    </a:p>
-                  </a:txBody>
-                  <a:tcPr>
-                    <a:solidFill>
-                      <a:srgbClr val="FFFFFF"/>
-                    </a:solidFill>
-                  </a:tcPr>
-                </a:tc>
-                <a:tc>
-                  <a:txBody>
-                    <a:bodyPr/>
-                    <a:lstStyle/>
-                    <a:p>
-                      <a:pPr algn="r"/>
-                      <a:r>
-                        <a:rPr sz="1000" b="0">
-                          <a:solidFill>
-                            <a:srgbClr val="1F2A37"/>
-                          </a:solidFill>
-                          <a:latin typeface="Calibri"/>
-                        </a:rPr>
-                        <a:t>23%</a:t>
+                        <a:t>24%</a:t>
                       </a:r>
                     </a:p>
                   </a:txBody>
@@ -3800,7 +3800,7 @@
                           </a:solidFill>
                           <a:latin typeface="Calibri"/>
                         </a:rPr>
-                        <a:t>1,397</a:t>
+                        <a:t>1,381</a:t>
                       </a:r>
                     </a:p>
                   </a:txBody>
@@ -3819,11 +3819,34 @@
                       <a:r>
                         <a:rPr sz="1000" b="0">
                           <a:solidFill>
+                            <a:srgbClr val="B3261E"/>
+                          </a:solidFill>
+                          <a:latin typeface="Calibri"/>
+                        </a:rPr>
+                        <a:t>-1.15%</a:t>
+                      </a:r>
+                    </a:p>
+                  </a:txBody>
+                  <a:tcPr>
+                    <a:solidFill>
+                      <a:srgbClr val="F3F5F7"/>
+                    </a:solidFill>
+                  </a:tcPr>
+                </a:tc>
+                <a:tc>
+                  <a:txBody>
+                    <a:bodyPr/>
+                    <a:lstStyle/>
+                    <a:p>
+                      <a:pPr algn="r"/>
+                      <a:r>
+                        <a:rPr sz="1000" b="0">
+                          <a:solidFill>
                             <a:srgbClr val="0B7A3B"/>
                           </a:solidFill>
                           <a:latin typeface="Calibri"/>
                         </a:rPr>
-                        <a:t>+0.55%</a:t>
+                        <a:t>+3.06%</a:t>
                       </a:r>
                     </a:p>
                   </a:txBody>
@@ -3846,7 +3869,7 @@
                           </a:solidFill>
                           <a:latin typeface="Calibri"/>
                         </a:rPr>
-                        <a:t>+3.10%</a:t>
+                        <a:t>+3.14%</a:t>
                       </a:r>
                     </a:p>
                   </a:txBody>
@@ -3865,34 +3888,11 @@
                       <a:r>
                         <a:rPr sz="1000" b="0">
                           <a:solidFill>
-                            <a:srgbClr val="0B7A3B"/>
-                          </a:solidFill>
-                          <a:latin typeface="Calibri"/>
-                        </a:rPr>
-                        <a:t>+3.67%</a:t>
-                      </a:r>
-                    </a:p>
-                  </a:txBody>
-                  <a:tcPr>
-                    <a:solidFill>
-                      <a:srgbClr val="F3F5F7"/>
-                    </a:solidFill>
-                  </a:tcPr>
-                </a:tc>
-                <a:tc>
-                  <a:txBody>
-                    <a:bodyPr/>
-                    <a:lstStyle/>
-                    <a:p>
-                      <a:pPr algn="r"/>
-                      <a:r>
-                        <a:rPr sz="1000" b="0">
-                          <a:solidFill>
                             <a:srgbClr val="1F2A37"/>
                           </a:solidFill>
                           <a:latin typeface="Calibri"/>
                         </a:rPr>
-                        <a:t>-4.3%</a:t>
+                        <a:t>-5.4%</a:t>
                       </a:r>
                     </a:p>
                   </a:txBody>
@@ -3986,7 +3986,7 @@
                           </a:solidFill>
                           <a:latin typeface="Calibri"/>
                         </a:rPr>
-                        <a:t>1,161</a:t>
+                        <a:t>1,131</a:t>
                       </a:r>
                     </a:p>
                   </a:txBody>
@@ -4005,11 +4005,34 @@
                       <a:r>
                         <a:rPr sz="1000" b="0">
                           <a:solidFill>
+                            <a:srgbClr val="B3261E"/>
+                          </a:solidFill>
+                          <a:latin typeface="Calibri"/>
+                        </a:rPr>
+                        <a:t>-2.63%</a:t>
+                      </a:r>
+                    </a:p>
+                  </a:txBody>
+                  <a:tcPr>
+                    <a:solidFill>
+                      <a:srgbClr val="FFFFFF"/>
+                    </a:solidFill>
+                  </a:tcPr>
+                </a:tc>
+                <a:tc>
+                  <a:txBody>
+                    <a:bodyPr/>
+                    <a:lstStyle/>
+                    <a:p>
+                      <a:pPr algn="r"/>
+                      <a:r>
+                        <a:rPr sz="1000" b="0">
+                          <a:solidFill>
                             <a:srgbClr val="0B7A3B"/>
                           </a:solidFill>
                           <a:latin typeface="Calibri"/>
                         </a:rPr>
-                        <a:t>+4.61%</a:t>
+                        <a:t>+10.85%</a:t>
                       </a:r>
                     </a:p>
                   </a:txBody>
@@ -4032,7 +4055,7 @@
                           </a:solidFill>
                           <a:latin typeface="Calibri"/>
                         </a:rPr>
-                        <a:t>+13.46%</a:t>
+                        <a:t>+7.54%</a:t>
                       </a:r>
                     </a:p>
                   </a:txBody>
@@ -4051,11 +4074,11 @@
                       <a:r>
                         <a:rPr sz="1000" b="0">
                           <a:solidFill>
-                            <a:srgbClr val="0B7A3B"/>
-                          </a:solidFill>
-                          <a:latin typeface="Calibri"/>
-                        </a:rPr>
-                        <a:t>+9.69%</a:t>
+                            <a:srgbClr val="1F2A37"/>
+                          </a:solidFill>
+                          <a:latin typeface="Calibri"/>
+                        </a:rPr>
+                        <a:t>-31.6%</a:t>
                       </a:r>
                     </a:p>
                   </a:txBody>
@@ -4078,30 +4101,7 @@
                           </a:solidFill>
                           <a:latin typeface="Calibri"/>
                         </a:rPr>
-                        <a:t>-29.8%</a:t>
-                      </a:r>
-                    </a:p>
-                  </a:txBody>
-                  <a:tcPr>
-                    <a:solidFill>
-                      <a:srgbClr val="FFFFFF"/>
-                    </a:solidFill>
-                  </a:tcPr>
-                </a:tc>
-                <a:tc>
-                  <a:txBody>
-                    <a:bodyPr/>
-                    <a:lstStyle/>
-                    <a:p>
-                      <a:pPr algn="r"/>
-                      <a:r>
-                        <a:rPr sz="1000" b="0">
-                          <a:solidFill>
-                            <a:srgbClr val="1F2A37"/>
-                          </a:solidFill>
-                          <a:latin typeface="Calibri"/>
-                        </a:rPr>
-                        <a:t>35%</a:t>
+                        <a:t>34%</a:t>
                       </a:r>
                     </a:p>
                   </a:txBody>
@@ -4172,7 +4172,7 @@
                           </a:solidFill>
                           <a:latin typeface="Calibri"/>
                         </a:rPr>
-                        <a:t>264</a:t>
+                        <a:t>261</a:t>
                       </a:r>
                     </a:p>
                   </a:txBody>
@@ -4195,7 +4195,7 @@
                           </a:solidFill>
                           <a:latin typeface="Calibri"/>
                         </a:rPr>
-                        <a:t>-0.15%</a:t>
+                        <a:t>-1.02%</a:t>
                       </a:r>
                     </a:p>
                   </a:txBody>
@@ -4214,11 +4214,34 @@
                       <a:r>
                         <a:rPr sz="1000" b="0">
                           <a:solidFill>
+                            <a:srgbClr val="0B7A3B"/>
+                          </a:solidFill>
+                          <a:latin typeface="Calibri"/>
+                        </a:rPr>
+                        <a:t>+1.12%</a:t>
+                      </a:r>
+                    </a:p>
+                  </a:txBody>
+                  <a:tcPr>
+                    <a:solidFill>
+                      <a:srgbClr val="F3F5F7"/>
+                    </a:solidFill>
+                  </a:tcPr>
+                </a:tc>
+                <a:tc>
+                  <a:txBody>
+                    <a:bodyPr/>
+                    <a:lstStyle/>
+                    <a:p>
+                      <a:pPr algn="r"/>
+                      <a:r>
+                        <a:rPr sz="1000" b="0">
+                          <a:solidFill>
                             <a:srgbClr val="B3261E"/>
                           </a:solidFill>
                           <a:latin typeface="Calibri"/>
                         </a:rPr>
-                        <a:t>-0.94%</a:t>
+                        <a:t>-0.57%</a:t>
                       </a:r>
                     </a:p>
                   </a:txBody>
@@ -4237,34 +4260,11 @@
                       <a:r>
                         <a:rPr sz="1000" b="0">
                           <a:solidFill>
-                            <a:srgbClr val="B3261E"/>
-                          </a:solidFill>
-                          <a:latin typeface="Calibri"/>
-                        </a:rPr>
-                        <a:t>-1.01%</a:t>
-                      </a:r>
-                    </a:p>
-                  </a:txBody>
-                  <a:tcPr>
-                    <a:solidFill>
-                      <a:srgbClr val="F3F5F7"/>
-                    </a:solidFill>
-                  </a:tcPr>
-                </a:tc>
-                <a:tc>
-                  <a:txBody>
-                    <a:bodyPr/>
-                    <a:lstStyle/>
-                    <a:p>
-                      <a:pPr algn="r"/>
-                      <a:r>
-                        <a:rPr sz="1000" b="0">
-                          <a:solidFill>
                             <a:srgbClr val="1F2A37"/>
                           </a:solidFill>
                           <a:latin typeface="Calibri"/>
                         </a:rPr>
-                        <a:t>-34.5%</a:t>
+                        <a:t>-35.1%</a:t>
                       </a:r>
                     </a:p>
                   </a:txBody>
@@ -4358,7 +4358,7 @@
                           </a:solidFill>
                           <a:latin typeface="Calibri"/>
                         </a:rPr>
-                        <a:t>3,627</a:t>
+                        <a:t>3,662</a:t>
                       </a:r>
                     </a:p>
                   </a:txBody>
@@ -4377,11 +4377,57 @@
                       <a:r>
                         <a:rPr sz="1000" b="0">
                           <a:solidFill>
+                            <a:srgbClr val="0B7A3B"/>
+                          </a:solidFill>
+                          <a:latin typeface="Calibri"/>
+                        </a:rPr>
+                        <a:t>+0.96%</a:t>
+                      </a:r>
+                    </a:p>
+                  </a:txBody>
+                  <a:tcPr>
+                    <a:solidFill>
+                      <a:srgbClr val="FFFFFF"/>
+                    </a:solidFill>
+                  </a:tcPr>
+                </a:tc>
+                <a:tc>
+                  <a:txBody>
+                    <a:bodyPr/>
+                    <a:lstStyle/>
+                    <a:p>
+                      <a:pPr algn="r"/>
+                      <a:r>
+                        <a:rPr sz="1000" b="0">
+                          <a:solidFill>
+                            <a:srgbClr val="0B7A3B"/>
+                          </a:solidFill>
+                          <a:latin typeface="Calibri"/>
+                        </a:rPr>
+                        <a:t>+0.95%</a:t>
+                      </a:r>
+                    </a:p>
+                  </a:txBody>
+                  <a:tcPr>
+                    <a:solidFill>
+                      <a:srgbClr val="FFFFFF"/>
+                    </a:solidFill>
+                  </a:tcPr>
+                </a:tc>
+                <a:tc>
+                  <a:txBody>
+                    <a:bodyPr/>
+                    <a:lstStyle/>
+                    <a:p>
+                      <a:pPr algn="r"/>
+                      <a:r>
+                        <a:rPr sz="1000" b="0">
+                          <a:solidFill>
                             <a:srgbClr val="B3261E"/>
                           </a:solidFill>
                           <a:latin typeface="Calibri"/>
                         </a:rPr>
-                        <a:t>-0.13%</a:t>
+                        <a:t>-5.74%</a:t>
                       </a:r>
                     </a:p>
                   </a:txBody>
@@ -4400,57 +4446,11 @@
                       <a:r>
                         <a:rPr sz="1000" b="0">
                           <a:solidFill>
-                            <a:srgbClr val="B3261E"/>
-                          </a:solidFill>
-                          <a:latin typeface="Calibri"/>
-                        </a:rPr>
-                        <a:t>-2.06%</a:t>
-                      </a:r>
-                    </a:p>
-                  </a:txBody>
-                  <a:tcPr>
-                    <a:solidFill>
-                      <a:srgbClr val="FFFFFF"/>
-                    </a:solidFill>
-                  </a:tcPr>
-                </a:tc>
-                <a:tc>
-                  <a:txBody>
-                    <a:bodyPr/>
-                    <a:lstStyle/>
-                    <a:p>
-                      <a:pPr algn="r"/>
-                      <a:r>
-                        <a:rPr sz="1000" b="0">
-                          <a:solidFill>
-                            <a:srgbClr val="B3261E"/>
-                          </a:solidFill>
-                          <a:latin typeface="Calibri"/>
-                        </a:rPr>
-                        <a:t>-5.45%</a:t>
-                      </a:r>
-                    </a:p>
-                  </a:txBody>
-                  <a:tcPr>
-                    <a:solidFill>
-                      <a:srgbClr val="FFFFFF"/>
-                    </a:solidFill>
-                  </a:tcPr>
-                </a:tc>
-                <a:tc>
-                  <a:txBody>
-                    <a:bodyPr/>
-                    <a:lstStyle/>
-                    <a:p>
-                      <a:pPr algn="r"/>
-                      <a:r>
-                        <a:rPr sz="1000" b="0">
-                          <a:solidFill>
                             <a:srgbClr val="1F2A37"/>
                           </a:solidFill>
                           <a:latin typeface="Calibri"/>
                         </a:rPr>
-                        <a:t>-17.1%</a:t>
+                        <a:t>-16.3%</a:t>
                       </a:r>
                     </a:p>
                   </a:txBody>
@@ -4544,7 +4544,7 @@
                           </a:solidFill>
                           <a:latin typeface="Calibri"/>
                         </a:rPr>
-                        <a:t>1,211</a:t>
+                        <a:t>1,202</a:t>
                       </a:r>
                     </a:p>
                   </a:txBody>
@@ -4567,7 +4567,7 @@
                           </a:solidFill>
                           <a:latin typeface="Calibri"/>
                         </a:rPr>
-                        <a:t>-0.31%</a:t>
+                        <a:t>-0.76%</a:t>
                       </a:r>
                     </a:p>
                   </a:txBody>
@@ -4590,7 +4590,7 @@
                           </a:solidFill>
                           <a:latin typeface="Calibri"/>
                         </a:rPr>
-                        <a:t>+3.49%</a:t>
+                        <a:t>+3.72%</a:t>
                       </a:r>
                     </a:p>
                   </a:txBody>
@@ -4613,7 +4613,7 @@
                           </a:solidFill>
                           <a:latin typeface="Calibri"/>
                         </a:rPr>
-                        <a:t>-2.63%</a:t>
+                        <a:t>-1.99%</a:t>
                       </a:r>
                     </a:p>
                   </a:txBody>
@@ -4636,7 +4636,7 @@
                           </a:solidFill>
                           <a:latin typeface="Calibri"/>
                         </a:rPr>
-                        <a:t>-23.6%</a:t>
+                        <a:t>-24.2%</a:t>
                       </a:r>
                     </a:p>
                   </a:txBody>
@@ -4730,7 +4730,7 @@
                           </a:solidFill>
                           <a:latin typeface="Calibri"/>
                         </a:rPr>
-                        <a:t>2,465</a:t>
+                        <a:t>2,461</a:t>
                       </a:r>
                     </a:p>
                   </a:txBody>
@@ -4749,11 +4749,34 @@
                       <a:r>
                         <a:rPr sz="1000" b="0">
                           <a:solidFill>
+                            <a:srgbClr val="B3261E"/>
+                          </a:solidFill>
+                          <a:latin typeface="Calibri"/>
+                        </a:rPr>
+                        <a:t>-0.17%</a:t>
+                      </a:r>
+                    </a:p>
+                  </a:txBody>
+                  <a:tcPr>
+                    <a:solidFill>
+                      <a:srgbClr val="FFFFFF"/>
+                    </a:solidFill>
+                  </a:tcPr>
+                </a:tc>
+                <a:tc>
+                  <a:txBody>
+                    <a:bodyPr/>
+                    <a:lstStyle/>
+                    <a:p>
+                      <a:pPr algn="r"/>
+                      <a:r>
+                        <a:rPr sz="1000" b="0">
+                          <a:solidFill>
                             <a:srgbClr val="0B7A3B"/>
                           </a:solidFill>
                           <a:latin typeface="Calibri"/>
                         </a:rPr>
-                        <a:t>+4.89%</a:t>
+                        <a:t>+16.42%</a:t>
                       </a:r>
                     </a:p>
                   </a:txBody>
@@ -4776,7 +4799,7 @@
                           </a:solidFill>
                           <a:latin typeface="Calibri"/>
                         </a:rPr>
-                        <a:t>+14.94%</a:t>
+                        <a:t>+17.53%</a:t>
                       </a:r>
                     </a:p>
                   </a:txBody>
@@ -4795,34 +4818,11 @@
                       <a:r>
                         <a:rPr sz="1000" b="0">
                           <a:solidFill>
-                            <a:srgbClr val="0B7A3B"/>
-                          </a:solidFill>
-                          <a:latin typeface="Calibri"/>
-                        </a:rPr>
-                        <a:t>+13.16%</a:t>
-                      </a:r>
-                    </a:p>
-                  </a:txBody>
-                  <a:tcPr>
-                    <a:solidFill>
-                      <a:srgbClr val="FFFFFF"/>
-                    </a:solidFill>
-                  </a:tcPr>
-                </a:tc>
-                <a:tc>
-                  <a:txBody>
-                    <a:bodyPr/>
-                    <a:lstStyle/>
-                    <a:p>
-                      <a:pPr algn="r"/>
-                      <a:r>
-                        <a:rPr sz="1000" b="0">
-                          <a:solidFill>
                             <a:srgbClr val="1F2A37"/>
                           </a:solidFill>
                           <a:latin typeface="Calibri"/>
                         </a:rPr>
-                        <a:t>-22.7%</a:t>
+                        <a:t>-22.8%</a:t>
                       </a:r>
                     </a:p>
                   </a:txBody>
@@ -4952,7 +4952,7 @@
                 </a:solidFill>
                 <a:latin typeface="Calibri"/>
               </a:rPr>
-              <a:t>Breadth was risk-on: 5 of 8 names advanced on the day.</a:t>
+              <a:t>Breadth was risk-off: 1 of 8 names advanced on the day.</a:t>
             </a:r>
           </a:p>
           <a:p>
@@ -4968,7 +4968,7 @@
                 </a:solidFill>
                 <a:latin typeface="Calibri"/>
               </a:rPr>
-              <a:t>•  Best performer on the day: TCS.NS at +4.89%.</a:t>
+              <a:t>•  Best performer on the day: LT.NS at +0.96%.</a:t>
             </a:r>
           </a:p>
           <a:p>
@@ -4984,7 +4984,7 @@
                 </a:solidFill>
                 <a:latin typeface="Calibri"/>
               </a:rPr>
-              <a:t>•  Weakest on the day: RELIANCE.NS at -0.31%.</a:t>
+              <a:t>•  Weakest on the day: INFY.NS at -2.63%.</a:t>
             </a:r>
           </a:p>
           <a:p>
@@ -5000,7 +5000,7 @@
                 </a:solidFill>
                 <a:latin typeface="Calibri"/>
               </a:rPr>
-              <a:t>•  Median one-day move across the watchlist: +0.41%.</a:t>
+              <a:t>•  Median one-day move across the watchlist: -1.08%.</a:t>
             </a:r>
           </a:p>
           <a:p>
@@ -5016,23 +5016,7 @@
                 </a:solidFill>
                 <a:latin typeface="Calibri"/>
               </a:rPr>
-              <a:t>•  ITC.NS sits furthest below its 52-week high, at -34.5%.</a:t>
-            </a:r>
-          </a:p>
-          <a:p>
-            <a:pPr>
-              <a:spcBef>
-                <a:spcPts val="500"/>
-              </a:spcBef>
-            </a:pPr>
-            <a:r>
-              <a:rPr sz="1000" b="0">
-                <a:solidFill>
-                  <a:srgbClr val="1F2A37"/>
-                </a:solidFill>
-                <a:latin typeface="Calibri"/>
-              </a:rPr>
-              <a:t>•  1 name(s) within 5% of the 52-week high: ICICIBANK.NS.</a:t>
+              <a:t>•  ITC.NS sits furthest below its 52-week high, at -35.1%.</a:t>
             </a:r>
           </a:p>
           <a:p>
@@ -5064,7 +5048,7 @@
                 </a:solidFill>
                 <a:latin typeface="Calibri"/>
               </a:rPr>
-              <a:t>•  Highest 30-day realised volatility: INFY.NS at 34.9% annualised.</a:t>
+              <a:t>•  Highest 30-day realised volatility: TCS.NS at 33.9% annualised.</a:t>
             </a:r>
           </a:p>
           <a:p>
@@ -5080,7 +5064,7 @@
                 </a:solidFill>
                 <a:latin typeface="Calibri"/>
               </a:rPr>
-              <a:t>•  60 headlines collected, 4 tagged to a watchlist name by substring match (unverified).</a:t>
+              <a:t>•  60 headlines collected, 2 tagged to a watchlist name by substring match (unverified).</a:t>
             </a:r>
           </a:p>
           <a:p>

--- a/public/deskbrief.pptx
+++ b/public/deskbrief.pptx
@@ -3128,7 +3128,7 @@
                 </a:solidFill>
                 <a:latin typeface="Calibri"/>
               </a:rPr>
-              <a:t>8 names  |  generated 20 Oct 2026 17:24  |  source: Yahoo Finance via yfinance, Indian financial RSS</a:t>
+              <a:t>8 names  |  generated 21 Oct 2026 17:28  |  source: Yahoo Finance via yfinance, Indian financial RSS</a:t>
             </a:r>
           </a:p>
         </p:txBody>
@@ -3428,7 +3428,7 @@
                           </a:solidFill>
                           <a:latin typeface="Calibri"/>
                         </a:rPr>
-                        <a:t>1,875</a:t>
+                        <a:t>1,892</a:t>
                       </a:r>
                     </a:p>
                   </a:txBody>
@@ -3447,11 +3447,11 @@
                       <a:r>
                         <a:rPr sz="1000" b="0">
                           <a:solidFill>
-                            <a:srgbClr val="B3261E"/>
-                          </a:solidFill>
-                          <a:latin typeface="Calibri"/>
-                        </a:rPr>
-                        <a:t>-1.56%</a:t>
+                            <a:srgbClr val="0B7A3B"/>
+                          </a:solidFill>
+                          <a:latin typeface="Calibri"/>
+                        </a:rPr>
+                        <a:t>+0.88%</a:t>
                       </a:r>
                     </a:p>
                   </a:txBody>
@@ -3474,7 +3474,7 @@
                           </a:solidFill>
                           <a:latin typeface="Calibri"/>
                         </a:rPr>
-                        <a:t>+5.43%</a:t>
+                        <a:t>+4.72%</a:t>
                       </a:r>
                     </a:p>
                   </a:txBody>
@@ -3493,11 +3493,11 @@
                       <a:r>
                         <a:rPr sz="1000" b="0">
                           <a:solidFill>
-                            <a:srgbClr val="B3261E"/>
-                          </a:solidFill>
-                          <a:latin typeface="Calibri"/>
-                        </a:rPr>
-                        <a:t>-0.96%</a:t>
+                            <a:srgbClr val="0B7A3B"/>
+                          </a:solidFill>
+                          <a:latin typeface="Calibri"/>
+                        </a:rPr>
+                        <a:t>+3.36%</a:t>
                       </a:r>
                     </a:p>
                   </a:txBody>
@@ -3520,7 +3520,7 @@
                           </a:solidFill>
                           <a:latin typeface="Calibri"/>
                         </a:rPr>
-                        <a:t>-12.2%</a:t>
+                        <a:t>-11.4%</a:t>
                       </a:r>
                     </a:p>
                   </a:txBody>
@@ -3566,7 +3566,7 @@
                           </a:solidFill>
                           <a:latin typeface="Calibri"/>
                         </a:rPr>
-                        <a:t>39.2</a:t>
+                        <a:t>39.5</a:t>
                       </a:r>
                     </a:p>
                   </a:txBody>
@@ -3614,7 +3614,7 @@
                           </a:solidFill>
                           <a:latin typeface="Calibri"/>
                         </a:rPr>
-                        <a:t>712</a:t>
+                        <a:t>707</a:t>
                       </a:r>
                     </a:p>
                   </a:txBody>
@@ -3637,7 +3637,7 @@
                           </a:solidFill>
                           <a:latin typeface="Calibri"/>
                         </a:rPr>
-                        <a:t>-2.31%</a:t>
+                        <a:t>-0.71%</a:t>
                       </a:r>
                     </a:p>
                   </a:txBody>
@@ -3656,11 +3656,11 @@
                       <a:r>
                         <a:rPr sz="1000" b="0">
                           <a:solidFill>
-                            <a:srgbClr val="0B7A3B"/>
-                          </a:solidFill>
-                          <a:latin typeface="Calibri"/>
-                        </a:rPr>
-                        <a:t>+1.01%</a:t>
+                            <a:srgbClr val="B3261E"/>
+                          </a:solidFill>
+                          <a:latin typeface="Calibri"/>
+                        </a:rPr>
+                        <a:t>-0.99%</a:t>
                       </a:r>
                     </a:p>
                   </a:txBody>
@@ -3683,7 +3683,7 @@
                           </a:solidFill>
                           <a:latin typeface="Calibri"/>
                         </a:rPr>
-                        <a:t>-2.60%</a:t>
+                        <a:t>-4.40%</a:t>
                       </a:r>
                     </a:p>
                   </a:txBody>
@@ -3706,7 +3706,7 @@
                           </a:solidFill>
                           <a:latin typeface="Calibri"/>
                         </a:rPr>
-                        <a:t>-28.3%</a:t>
+                        <a:t>-28.8%</a:t>
                       </a:r>
                     </a:p>
                   </a:txBody>
@@ -3729,7 +3729,7 @@
                           </a:solidFill>
                           <a:latin typeface="Calibri"/>
                         </a:rPr>
-                        <a:t>24%</a:t>
+                        <a:t>23%</a:t>
                       </a:r>
                     </a:p>
                   </a:txBody>
@@ -3752,7 +3752,7 @@
                           </a:solidFill>
                           <a:latin typeface="Calibri"/>
                         </a:rPr>
-                        <a:t>15.6</a:t>
+                        <a:t>15.5</a:t>
                       </a:r>
                     </a:p>
                   </a:txBody>
@@ -3800,7 +3800,7 @@
                           </a:solidFill>
                           <a:latin typeface="Calibri"/>
                         </a:rPr>
-                        <a:t>1,381</a:t>
+                        <a:t>1,385</a:t>
                       </a:r>
                     </a:p>
                   </a:txBody>
@@ -3819,11 +3819,11 @@
                       <a:r>
                         <a:rPr sz="1000" b="0">
                           <a:solidFill>
-                            <a:srgbClr val="B3261E"/>
-                          </a:solidFill>
-                          <a:latin typeface="Calibri"/>
-                        </a:rPr>
-                        <a:t>-1.15%</a:t>
+                            <a:srgbClr val="0B7A3B"/>
+                          </a:solidFill>
+                          <a:latin typeface="Calibri"/>
+                        </a:rPr>
+                        <a:t>+0.29%</a:t>
                       </a:r>
                     </a:p>
                   </a:txBody>
@@ -3846,7 +3846,7 @@
                           </a:solidFill>
                           <a:latin typeface="Calibri"/>
                         </a:rPr>
-                        <a:t>+3.06%</a:t>
+                        <a:t>+1.82%</a:t>
                       </a:r>
                     </a:p>
                   </a:txBody>
@@ -3869,7 +3869,7 @@
                           </a:solidFill>
                           <a:latin typeface="Calibri"/>
                         </a:rPr>
-                        <a:t>+3.14%</a:t>
+                        <a:t>+2.97%</a:t>
                       </a:r>
                     </a:p>
                   </a:txBody>
@@ -3892,7 +3892,7 @@
                           </a:solidFill>
                           <a:latin typeface="Calibri"/>
                         </a:rPr>
-                        <a:t>-5.4%</a:t>
+                        <a:t>-5.1%</a:t>
                       </a:r>
                     </a:p>
                   </a:txBody>
@@ -3986,7 +3986,7 @@
                           </a:solidFill>
                           <a:latin typeface="Calibri"/>
                         </a:rPr>
-                        <a:t>1,131</a:t>
+                        <a:t>1,168</a:t>
                       </a:r>
                     </a:p>
                   </a:txBody>
@@ -4005,11 +4005,11 @@
                       <a:r>
                         <a:rPr sz="1000" b="0">
                           <a:solidFill>
-                            <a:srgbClr val="B3261E"/>
-                          </a:solidFill>
-                          <a:latin typeface="Calibri"/>
-                        </a:rPr>
-                        <a:t>-2.63%</a:t>
+                            <a:srgbClr val="0B7A3B"/>
+                          </a:solidFill>
+                          <a:latin typeface="Calibri"/>
+                        </a:rPr>
+                        <a:t>+3.30%</a:t>
                       </a:r>
                     </a:p>
                   </a:txBody>
@@ -4032,7 +4032,7 @@
                           </a:solidFill>
                           <a:latin typeface="Calibri"/>
                         </a:rPr>
-                        <a:t>+10.85%</a:t>
+                        <a:t>+9.97%</a:t>
                       </a:r>
                     </a:p>
                   </a:txBody>
@@ -4055,7 +4055,7 @@
                           </a:solidFill>
                           <a:latin typeface="Calibri"/>
                         </a:rPr>
-                        <a:t>+7.54%</a:t>
+                        <a:t>+12.47%</a:t>
                       </a:r>
                     </a:p>
                   </a:txBody>
@@ -4078,7 +4078,7 @@
                           </a:solidFill>
                           <a:latin typeface="Calibri"/>
                         </a:rPr>
-                        <a:t>-31.6%</a:t>
+                        <a:t>-29.4%</a:t>
                       </a:r>
                     </a:p>
                   </a:txBody>
@@ -4101,7 +4101,7 @@
                           </a:solidFill>
                           <a:latin typeface="Calibri"/>
                         </a:rPr>
-                        <a:t>34%</a:t>
+                        <a:t>35%</a:t>
                       </a:r>
                     </a:p>
                   </a:txBody>
@@ -4124,7 +4124,7 @@
                           </a:solidFill>
                           <a:latin typeface="Calibri"/>
                         </a:rPr>
-                        <a:t>15.4</a:t>
+                        <a:t>15.9</a:t>
                       </a:r>
                     </a:p>
                   </a:txBody>
@@ -4172,7 +4172,7 @@
                           </a:solidFill>
                           <a:latin typeface="Calibri"/>
                         </a:rPr>
-                        <a:t>261</a:t>
+                        <a:t>262</a:t>
                       </a:r>
                     </a:p>
                   </a:txBody>
@@ -4191,11 +4191,57 @@
                       <a:r>
                         <a:rPr sz="1000" b="0">
                           <a:solidFill>
+                            <a:srgbClr val="0B7A3B"/>
+                          </a:solidFill>
+                          <a:latin typeface="Calibri"/>
+                        </a:rPr>
+                        <a:t>+0.46%</a:t>
+                      </a:r>
+                    </a:p>
+                  </a:txBody>
+                  <a:tcPr>
+                    <a:solidFill>
+                      <a:srgbClr val="F3F5F7"/>
+                    </a:solidFill>
+                  </a:tcPr>
+                </a:tc>
+                <a:tc>
+                  <a:txBody>
+                    <a:bodyPr/>
+                    <a:lstStyle/>
+                    <a:p>
+                      <a:pPr algn="r"/>
+                      <a:r>
+                        <a:rPr sz="1000" b="0">
+                          <a:solidFill>
+                            <a:srgbClr val="0B7A3B"/>
+                          </a:solidFill>
+                          <a:latin typeface="Calibri"/>
+                        </a:rPr>
+                        <a:t>+0.38%</a:t>
+                      </a:r>
+                    </a:p>
+                  </a:txBody>
+                  <a:tcPr>
+                    <a:solidFill>
+                      <a:srgbClr val="F3F5F7"/>
+                    </a:solidFill>
+                  </a:tcPr>
+                </a:tc>
+                <a:tc>
+                  <a:txBody>
+                    <a:bodyPr/>
+                    <a:lstStyle/>
+                    <a:p>
+                      <a:pPr algn="r"/>
+                      <a:r>
+                        <a:rPr sz="1000" b="0">
+                          <a:solidFill>
                             <a:srgbClr val="B3261E"/>
                           </a:solidFill>
                           <a:latin typeface="Calibri"/>
                         </a:rPr>
-                        <a:t>-1.02%</a:t>
+                        <a:t>-1.87%</a:t>
                       </a:r>
                     </a:p>
                   </a:txBody>
@@ -4214,57 +4260,11 @@
                       <a:r>
                         <a:rPr sz="1000" b="0">
                           <a:solidFill>
-                            <a:srgbClr val="0B7A3B"/>
-                          </a:solidFill>
-                          <a:latin typeface="Calibri"/>
-                        </a:rPr>
-                        <a:t>+1.12%</a:t>
-                      </a:r>
-                    </a:p>
-                  </a:txBody>
-                  <a:tcPr>
-                    <a:solidFill>
-                      <a:srgbClr val="F3F5F7"/>
-                    </a:solidFill>
-                  </a:tcPr>
-                </a:tc>
-                <a:tc>
-                  <a:txBody>
-                    <a:bodyPr/>
-                    <a:lstStyle/>
-                    <a:p>
-                      <a:pPr algn="r"/>
-                      <a:r>
-                        <a:rPr sz="1000" b="0">
-                          <a:solidFill>
-                            <a:srgbClr val="B3261E"/>
-                          </a:solidFill>
-                          <a:latin typeface="Calibri"/>
-                        </a:rPr>
-                        <a:t>-0.57%</a:t>
-                      </a:r>
-                    </a:p>
-                  </a:txBody>
-                  <a:tcPr>
-                    <a:solidFill>
-                      <a:srgbClr val="F3F5F7"/>
-                    </a:solidFill>
-                  </a:tcPr>
-                </a:tc>
-                <a:tc>
-                  <a:txBody>
-                    <a:bodyPr/>
-                    <a:lstStyle/>
-                    <a:p>
-                      <a:pPr algn="r"/>
-                      <a:r>
-                        <a:rPr sz="1000" b="0">
-                          <a:solidFill>
                             <a:srgbClr val="1F2A37"/>
                           </a:solidFill>
                           <a:latin typeface="Calibri"/>
                         </a:rPr>
-                        <a:t>-35.1%</a:t>
+                        <a:t>-34.8%</a:t>
                       </a:r>
                     </a:p>
                   </a:txBody>
@@ -4358,7 +4358,7 @@
                           </a:solidFill>
                           <a:latin typeface="Calibri"/>
                         </a:rPr>
-                        <a:t>3,662</a:t>
+                        <a:t>3,636</a:t>
                       </a:r>
                     </a:p>
                   </a:txBody>
@@ -4377,11 +4377,11 @@
                       <a:r>
                         <a:rPr sz="1000" b="0">
                           <a:solidFill>
-                            <a:srgbClr val="0B7A3B"/>
-                          </a:solidFill>
-                          <a:latin typeface="Calibri"/>
-                        </a:rPr>
-                        <a:t>+0.96%</a:t>
+                            <a:srgbClr val="B3261E"/>
+                          </a:solidFill>
+                          <a:latin typeface="Calibri"/>
+                        </a:rPr>
+                        <a:t>-0.71%</a:t>
                       </a:r>
                     </a:p>
                   </a:txBody>
@@ -4400,11 +4400,11 @@
                       <a:r>
                         <a:rPr sz="1000" b="0">
                           <a:solidFill>
-                            <a:srgbClr val="0B7A3B"/>
-                          </a:solidFill>
-                          <a:latin typeface="Calibri"/>
-                        </a:rPr>
-                        <a:t>+0.95%</a:t>
+                            <a:srgbClr val="B3261E"/>
+                          </a:solidFill>
+                          <a:latin typeface="Calibri"/>
+                        </a:rPr>
+                        <a:t>-1.06%</a:t>
                       </a:r>
                     </a:p>
                   </a:txBody>
@@ -4427,7 +4427,7 @@
                           </a:solidFill>
                           <a:latin typeface="Calibri"/>
                         </a:rPr>
-                        <a:t>-5.74%</a:t>
+                        <a:t>-6.88%</a:t>
                       </a:r>
                     </a:p>
                   </a:txBody>
@@ -4450,7 +4450,7 @@
                           </a:solidFill>
                           <a:latin typeface="Calibri"/>
                         </a:rPr>
-                        <a:t>-16.3%</a:t>
+                        <a:t>-16.9%</a:t>
                       </a:r>
                     </a:p>
                   </a:txBody>
@@ -4496,7 +4496,7 @@
                           </a:solidFill>
                           <a:latin typeface="Calibri"/>
                         </a:rPr>
-                        <a:t>30.4</a:t>
+                        <a:t>30.2</a:t>
                       </a:r>
                     </a:p>
                   </a:txBody>
@@ -4544,7 +4544,7 @@
                           </a:solidFill>
                           <a:latin typeface="Calibri"/>
                         </a:rPr>
-                        <a:t>1,202</a:t>
+                        <a:t>1,209</a:t>
                       </a:r>
                     </a:p>
                   </a:txBody>
@@ -4563,11 +4563,57 @@
                       <a:r>
                         <a:rPr sz="1000" b="0">
                           <a:solidFill>
+                            <a:srgbClr val="0B7A3B"/>
+                          </a:solidFill>
+                          <a:latin typeface="Calibri"/>
+                        </a:rPr>
+                        <a:t>+0.58%</a:t>
+                      </a:r>
+                    </a:p>
+                  </a:txBody>
+                  <a:tcPr>
+                    <a:solidFill>
+                      <a:srgbClr val="F3F5F7"/>
+                    </a:solidFill>
+                  </a:tcPr>
+                </a:tc>
+                <a:tc>
+                  <a:txBody>
+                    <a:bodyPr/>
+                    <a:lstStyle/>
+                    <a:p>
+                      <a:pPr algn="r"/>
+                      <a:r>
+                        <a:rPr sz="1000" b="0">
+                          <a:solidFill>
+                            <a:srgbClr val="0B7A3B"/>
+                          </a:solidFill>
+                          <a:latin typeface="Calibri"/>
+                        </a:rPr>
+                        <a:t>+3.63%</a:t>
+                      </a:r>
+                    </a:p>
+                  </a:txBody>
+                  <a:tcPr>
+                    <a:solidFill>
+                      <a:srgbClr val="F3F5F7"/>
+                    </a:solidFill>
+                  </a:tcPr>
+                </a:tc>
+                <a:tc>
+                  <a:txBody>
+                    <a:bodyPr/>
+                    <a:lstStyle/>
+                    <a:p>
+                      <a:pPr algn="r"/>
+                      <a:r>
+                        <a:rPr sz="1000" b="0">
+                          <a:solidFill>
                             <a:srgbClr val="B3261E"/>
                           </a:solidFill>
                           <a:latin typeface="Calibri"/>
                         </a:rPr>
-                        <a:t>-0.76%</a:t>
+                        <a:t>-3.08%</a:t>
                       </a:r>
                     </a:p>
                   </a:txBody>
@@ -4586,11 +4632,11 @@
                       <a:r>
                         <a:rPr sz="1000" b="0">
                           <a:solidFill>
-                            <a:srgbClr val="0B7A3B"/>
-                          </a:solidFill>
-                          <a:latin typeface="Calibri"/>
-                        </a:rPr>
-                        <a:t>+3.72%</a:t>
+                            <a:srgbClr val="1F2A37"/>
+                          </a:solidFill>
+                          <a:latin typeface="Calibri"/>
+                        </a:rPr>
+                        <a:t>-23.7%</a:t>
                       </a:r>
                     </a:p>
                   </a:txBody>
@@ -4609,11 +4655,11 @@
                       <a:r>
                         <a:rPr sz="1000" b="0">
                           <a:solidFill>
-                            <a:srgbClr val="B3261E"/>
-                          </a:solidFill>
-                          <a:latin typeface="Calibri"/>
-                        </a:rPr>
-                        <a:t>-1.99%</a:t>
+                            <a:srgbClr val="1F2A37"/>
+                          </a:solidFill>
+                          <a:latin typeface="Calibri"/>
+                        </a:rPr>
+                        <a:t>22%</a:t>
                       </a:r>
                     </a:p>
                   </a:txBody>
@@ -4636,53 +4682,7 @@
                           </a:solidFill>
                           <a:latin typeface="Calibri"/>
                         </a:rPr>
-                        <a:t>-24.2%</a:t>
-                      </a:r>
-                    </a:p>
-                  </a:txBody>
-                  <a:tcPr>
-                    <a:solidFill>
-                      <a:srgbClr val="F3F5F7"/>
-                    </a:solidFill>
-                  </a:tcPr>
-                </a:tc>
-                <a:tc>
-                  <a:txBody>
-                    <a:bodyPr/>
-                    <a:lstStyle/>
-                    <a:p>
-                      <a:pPr algn="r"/>
-                      <a:r>
-                        <a:rPr sz="1000" b="0">
-                          <a:solidFill>
-                            <a:srgbClr val="1F2A37"/>
-                          </a:solidFill>
-                          <a:latin typeface="Calibri"/>
-                        </a:rPr>
-                        <a:t>22%</a:t>
-                      </a:r>
-                    </a:p>
-                  </a:txBody>
-                  <a:tcPr>
-                    <a:solidFill>
-                      <a:srgbClr val="F3F5F7"/>
-                    </a:solidFill>
-                  </a:tcPr>
-                </a:tc>
-                <a:tc>
-                  <a:txBody>
-                    <a:bodyPr/>
-                    <a:lstStyle/>
-                    <a:p>
-                      <a:pPr algn="r"/>
-                      <a:r>
-                        <a:rPr sz="1000" b="0">
-                          <a:solidFill>
-                            <a:srgbClr val="1F2A37"/>
-                          </a:solidFill>
-                          <a:latin typeface="Calibri"/>
-                        </a:rPr>
-                        <a:t>21.8</a:t>
+                        <a:t>21.9</a:t>
                       </a:r>
                     </a:p>
                   </a:txBody>
@@ -4730,7 +4730,7 @@
                           </a:solidFill>
                           <a:latin typeface="Calibri"/>
                         </a:rPr>
-                        <a:t>2,461</a:t>
+                        <a:t>2,529</a:t>
                       </a:r>
                     </a:p>
                   </a:txBody>
@@ -4749,11 +4749,11 @@
                       <a:r>
                         <a:rPr sz="1000" b="0">
                           <a:solidFill>
-                            <a:srgbClr val="B3261E"/>
-                          </a:solidFill>
-                          <a:latin typeface="Calibri"/>
-                        </a:rPr>
-                        <a:t>-0.17%</a:t>
+                            <a:srgbClr val="0B7A3B"/>
+                          </a:solidFill>
+                          <a:latin typeface="Calibri"/>
+                        </a:rPr>
+                        <a:t>+2.77%</a:t>
                       </a:r>
                     </a:p>
                   </a:txBody>
@@ -4776,7 +4776,7 @@
                           </a:solidFill>
                           <a:latin typeface="Calibri"/>
                         </a:rPr>
-                        <a:t>+16.42%</a:t>
+                        <a:t>+12.04%</a:t>
                       </a:r>
                     </a:p>
                   </a:txBody>
@@ -4799,7 +4799,7 @@
                           </a:solidFill>
                           <a:latin typeface="Calibri"/>
                         </a:rPr>
-                        <a:t>+17.53%</a:t>
+                        <a:t>+19.44%</a:t>
                       </a:r>
                     </a:p>
                   </a:txBody>
@@ -4822,7 +4822,7 @@
                           </a:solidFill>
                           <a:latin typeface="Calibri"/>
                         </a:rPr>
-                        <a:t>-22.8%</a:t>
+                        <a:t>-20.7%</a:t>
                       </a:r>
                     </a:p>
                   </a:txBody>
@@ -4845,7 +4845,7 @@
                           </a:solidFill>
                           <a:latin typeface="Calibri"/>
                         </a:rPr>
-                        <a:t>34%</a:t>
+                        <a:t>35%</a:t>
                       </a:r>
                     </a:p>
                   </a:txBody>
@@ -4868,7 +4868,7 @@
                           </a:solidFill>
                           <a:latin typeface="Calibri"/>
                         </a:rPr>
-                        <a:t>17.3</a:t>
+                        <a:t>17.7</a:t>
                       </a:r>
                     </a:p>
                   </a:txBody>
@@ -4952,7 +4952,7 @@
                 </a:solidFill>
                 <a:latin typeface="Calibri"/>
               </a:rPr>
-              <a:t>Breadth was risk-off: 1 of 8 names advanced on the day.</a:t>
+              <a:t>Breadth was risk-on: 6 of 8 names advanced on the day.</a:t>
             </a:r>
           </a:p>
           <a:p>
@@ -4968,7 +4968,7 @@
                 </a:solidFill>
                 <a:latin typeface="Calibri"/>
               </a:rPr>
-              <a:t>•  Best performer on the day: LT.NS at +0.96%.</a:t>
+              <a:t>•  Best performer on the day: INFY.NS at +3.30%.</a:t>
             </a:r>
           </a:p>
           <a:p>
@@ -4984,7 +4984,7 @@
                 </a:solidFill>
                 <a:latin typeface="Calibri"/>
               </a:rPr>
-              <a:t>•  Weakest on the day: INFY.NS at -2.63%.</a:t>
+              <a:t>•  Weakest on the day: HDFCBANK.NS at -0.71%.</a:t>
             </a:r>
           </a:p>
           <a:p>
@@ -5000,7 +5000,7 @@
                 </a:solidFill>
                 <a:latin typeface="Calibri"/>
               </a:rPr>
-              <a:t>•  Median one-day move across the watchlist: -1.08%.</a:t>
+              <a:t>•  Median one-day move across the watchlist: +0.52%.</a:t>
             </a:r>
           </a:p>
           <a:p>
@@ -5016,7 +5016,7 @@
                 </a:solidFill>
                 <a:latin typeface="Calibri"/>
               </a:rPr>
-              <a:t>•  ITC.NS sits furthest below its 52-week high, at -35.1%.</a:t>
+              <a:t>•  ITC.NS sits furthest below its 52-week high, at -34.8%.</a:t>
             </a:r>
           </a:p>
           <a:p>
@@ -5048,7 +5048,7 @@
                 </a:solidFill>
                 <a:latin typeface="Calibri"/>
               </a:rPr>
-              <a:t>•  Highest 30-day realised volatility: TCS.NS at 33.9% annualised.</a:t>
+              <a:t>•  Highest 30-day realised volatility: INFY.NS at 35.0% annualised.</a:t>
             </a:r>
           </a:p>
           <a:p>
@@ -5064,7 +5064,7 @@
                 </a:solidFill>
                 <a:latin typeface="Calibri"/>
               </a:rPr>
-              <a:t>•  60 headlines collected, 2 tagged to a watchlist name by substring match (unverified).</a:t>
+              <a:t>•  60 headlines collected, 7 tagged to a watchlist name by substring match (unverified).</a:t>
             </a:r>
           </a:p>
           <a:p>

--- a/public/deskbrief.pptx
+++ b/public/deskbrief.pptx
@@ -3128,7 +3128,7 @@
                 </a:solidFill>
                 <a:latin typeface="Calibri"/>
               </a:rPr>
-              <a:t>8 names  |  generated 21 Oct 2026 17:28  |  source: Yahoo Finance via yfinance, Indian financial RSS</a:t>
+              <a:t>8 names  |  generated 22 Oct 2026 17:26  |  source: Yahoo Finance via yfinance, Indian financial RSS</a:t>
             </a:r>
           </a:p>
         </p:txBody>
@@ -3428,7 +3428,7 @@
                           </a:solidFill>
                           <a:latin typeface="Calibri"/>
                         </a:rPr>
-                        <a:t>1,892</a:t>
+                        <a:t>1,895</a:t>
                       </a:r>
                     </a:p>
                   </a:txBody>
@@ -3451,7 +3451,7 @@
                           </a:solidFill>
                           <a:latin typeface="Calibri"/>
                         </a:rPr>
-                        <a:t>+0.88%</a:t>
+                        <a:t>+0.17%</a:t>
                       </a:r>
                     </a:p>
                   </a:txBody>
@@ -3474,7 +3474,7 @@
                           </a:solidFill>
                           <a:latin typeface="Calibri"/>
                         </a:rPr>
-                        <a:t>+4.72%</a:t>
+                        <a:t>+5.59%</a:t>
                       </a:r>
                     </a:p>
                   </a:txBody>
@@ -3497,7 +3497,7 @@
                           </a:solidFill>
                           <a:latin typeface="Calibri"/>
                         </a:rPr>
-                        <a:t>+3.36%</a:t>
+                        <a:t>+4.28%</a:t>
                       </a:r>
                     </a:p>
                   </a:txBody>
@@ -3520,7 +3520,7 @@
                           </a:solidFill>
                           <a:latin typeface="Calibri"/>
                         </a:rPr>
-                        <a:t>-11.4%</a:t>
+                        <a:t>-11.3%</a:t>
                       </a:r>
                     </a:p>
                   </a:txBody>
@@ -3543,7 +3543,7 @@
                           </a:solidFill>
                           <a:latin typeface="Calibri"/>
                         </a:rPr>
-                        <a:t>25%</a:t>
+                        <a:t>24%</a:t>
                       </a:r>
                     </a:p>
                   </a:txBody>
@@ -3566,7 +3566,7 @@
                           </a:solidFill>
                           <a:latin typeface="Calibri"/>
                         </a:rPr>
-                        <a:t>39.5</a:t>
+                        <a:t>39.6</a:t>
                       </a:r>
                     </a:p>
                   </a:txBody>
@@ -3614,7 +3614,7 @@
                           </a:solidFill>
                           <a:latin typeface="Calibri"/>
                         </a:rPr>
-                        <a:t>707</a:t>
+                        <a:t>694</a:t>
                       </a:r>
                     </a:p>
                   </a:txBody>
@@ -3637,7 +3637,7 @@
                           </a:solidFill>
                           <a:latin typeface="Calibri"/>
                         </a:rPr>
-                        <a:t>-0.71%</a:t>
+                        <a:t>-1.82%</a:t>
                       </a:r>
                     </a:p>
                   </a:txBody>
@@ -3660,7 +3660,7 @@
                           </a:solidFill>
                           <a:latin typeface="Calibri"/>
                         </a:rPr>
-                        <a:t>-0.99%</a:t>
+                        <a:t>-2.34%</a:t>
                       </a:r>
                     </a:p>
                   </a:txBody>
@@ -3683,7 +3683,7 @@
                           </a:solidFill>
                           <a:latin typeface="Calibri"/>
                         </a:rPr>
-                        <a:t>-4.40%</a:t>
+                        <a:t>-6.03%</a:t>
                       </a:r>
                     </a:p>
                   </a:txBody>
@@ -3706,7 +3706,7 @@
                           </a:solidFill>
                           <a:latin typeface="Calibri"/>
                         </a:rPr>
-                        <a:t>-28.8%</a:t>
+                        <a:t>-30.1%</a:t>
                       </a:r>
                     </a:p>
                   </a:txBody>
@@ -3752,7 +3752,7 @@
                           </a:solidFill>
                           <a:latin typeface="Calibri"/>
                         </a:rPr>
-                        <a:t>15.5</a:t>
+                        <a:t>15.2</a:t>
                       </a:r>
                     </a:p>
                   </a:txBody>
@@ -3800,7 +3800,7 @@
                           </a:solidFill>
                           <a:latin typeface="Calibri"/>
                         </a:rPr>
-                        <a:t>1,385</a:t>
+                        <a:t>1,398</a:t>
                       </a:r>
                     </a:p>
                   </a:txBody>
@@ -3823,7 +3823,7 @@
                           </a:solidFill>
                           <a:latin typeface="Calibri"/>
                         </a:rPr>
-                        <a:t>+0.29%</a:t>
+                        <a:t>+0.97%</a:t>
                       </a:r>
                     </a:p>
                   </a:txBody>
@@ -3846,7 +3846,7 @@
                           </a:solidFill>
                           <a:latin typeface="Calibri"/>
                         </a:rPr>
-                        <a:t>+1.82%</a:t>
+                        <a:t>+4.47%</a:t>
                       </a:r>
                     </a:p>
                   </a:txBody>
@@ -3869,7 +3869,7 @@
                           </a:solidFill>
                           <a:latin typeface="Calibri"/>
                         </a:rPr>
-                        <a:t>+2.97%</a:t>
+                        <a:t>+4.40%</a:t>
                       </a:r>
                     </a:p>
                   </a:txBody>
@@ -3892,7 +3892,7 @@
                           </a:solidFill>
                           <a:latin typeface="Calibri"/>
                         </a:rPr>
-                        <a:t>-5.1%</a:t>
+                        <a:t>-4.2%</a:t>
                       </a:r>
                     </a:p>
                   </a:txBody>
@@ -3938,7 +3938,7 @@
                           </a:solidFill>
                           <a:latin typeface="Calibri"/>
                         </a:rPr>
-                        <a:t>17.9</a:t>
+                        <a:t>18.1</a:t>
                       </a:r>
                     </a:p>
                   </a:txBody>
@@ -3986,7 +3986,7 @@
                           </a:solidFill>
                           <a:latin typeface="Calibri"/>
                         </a:rPr>
-                        <a:t>1,168</a:t>
+                        <a:t>1,153</a:t>
                       </a:r>
                     </a:p>
                   </a:txBody>
@@ -4005,11 +4005,34 @@
                       <a:r>
                         <a:rPr sz="1000" b="0">
                           <a:solidFill>
+                            <a:srgbClr val="B3261E"/>
+                          </a:solidFill>
+                          <a:latin typeface="Calibri"/>
+                        </a:rPr>
+                        <a:t>-1.25%</a:t>
+                      </a:r>
+                    </a:p>
+                  </a:txBody>
+                  <a:tcPr>
+                    <a:solidFill>
+                      <a:srgbClr val="FFFFFF"/>
+                    </a:solidFill>
+                  </a:tcPr>
+                </a:tc>
+                <a:tc>
+                  <a:txBody>
+                    <a:bodyPr/>
+                    <a:lstStyle/>
+                    <a:p>
+                      <a:pPr algn="r"/>
+                      <a:r>
+                        <a:rPr sz="1000" b="0">
+                          <a:solidFill>
                             <a:srgbClr val="0B7A3B"/>
                           </a:solidFill>
                           <a:latin typeface="Calibri"/>
                         </a:rPr>
-                        <a:t>+3.30%</a:t>
+                        <a:t>+6.01%</a:t>
                       </a:r>
                     </a:p>
                   </a:txBody>
@@ -4032,7 +4055,7 @@
                           </a:solidFill>
                           <a:latin typeface="Calibri"/>
                         </a:rPr>
-                        <a:t>+9.97%</a:t>
+                        <a:t>+12.04%</a:t>
                       </a:r>
                     </a:p>
                   </a:txBody>
@@ -4051,11 +4074,11 @@
                       <a:r>
                         <a:rPr sz="1000" b="0">
                           <a:solidFill>
-                            <a:srgbClr val="0B7A3B"/>
-                          </a:solidFill>
-                          <a:latin typeface="Calibri"/>
-                        </a:rPr>
-                        <a:t>+12.47%</a:t>
+                            <a:srgbClr val="1F2A37"/>
+                          </a:solidFill>
+                          <a:latin typeface="Calibri"/>
+                        </a:rPr>
+                        <a:t>-30.3%</a:t>
                       </a:r>
                     </a:p>
                   </a:txBody>
@@ -4078,7 +4101,7 @@
                           </a:solidFill>
                           <a:latin typeface="Calibri"/>
                         </a:rPr>
-                        <a:t>-29.4%</a:t>
+                        <a:t>32%</a:t>
                       </a:r>
                     </a:p>
                   </a:txBody>
@@ -4101,30 +4124,7 @@
                           </a:solidFill>
                           <a:latin typeface="Calibri"/>
                         </a:rPr>
-                        <a:t>35%</a:t>
-                      </a:r>
-                    </a:p>
-                  </a:txBody>
-                  <a:tcPr>
-                    <a:solidFill>
-                      <a:srgbClr val="FFFFFF"/>
-                    </a:solidFill>
-                  </a:tcPr>
-                </a:tc>
-                <a:tc>
-                  <a:txBody>
-                    <a:bodyPr/>
-                    <a:lstStyle/>
-                    <a:p>
-                      <a:pPr algn="r"/>
-                      <a:r>
-                        <a:rPr sz="1000" b="0">
-                          <a:solidFill>
-                            <a:srgbClr val="1F2A37"/>
-                          </a:solidFill>
-                          <a:latin typeface="Calibri"/>
-                        </a:rPr>
-                        <a:t>15.9</a:t>
+                        <a:t>15.7</a:t>
                       </a:r>
                     </a:p>
                   </a:txBody>
@@ -4172,7 +4172,7 @@
                           </a:solidFill>
                           <a:latin typeface="Calibri"/>
                         </a:rPr>
-                        <a:t>262</a:t>
+                        <a:t>259</a:t>
                       </a:r>
                     </a:p>
                   </a:txBody>
@@ -4191,11 +4191,11 @@
                       <a:r>
                         <a:rPr sz="1000" b="0">
                           <a:solidFill>
-                            <a:srgbClr val="0B7A3B"/>
-                          </a:solidFill>
-                          <a:latin typeface="Calibri"/>
-                        </a:rPr>
-                        <a:t>+0.46%</a:t>
+                            <a:srgbClr val="B3261E"/>
+                          </a:solidFill>
+                          <a:latin typeface="Calibri"/>
+                        </a:rPr>
+                        <a:t>-1.18%</a:t>
                       </a:r>
                     </a:p>
                   </a:txBody>
@@ -4214,11 +4214,11 @@
                       <a:r>
                         <a:rPr sz="1000" b="0">
                           <a:solidFill>
-                            <a:srgbClr val="0B7A3B"/>
-                          </a:solidFill>
-                          <a:latin typeface="Calibri"/>
-                        </a:rPr>
-                        <a:t>+0.38%</a:t>
+                            <a:srgbClr val="B3261E"/>
+                          </a:solidFill>
+                          <a:latin typeface="Calibri"/>
+                        </a:rPr>
+                        <a:t>-0.99%</a:t>
                       </a:r>
                     </a:p>
                   </a:txBody>
@@ -4241,7 +4241,7 @@
                           </a:solidFill>
                           <a:latin typeface="Calibri"/>
                         </a:rPr>
-                        <a:t>-1.87%</a:t>
+                        <a:t>-2.60%</a:t>
                       </a:r>
                     </a:p>
                   </a:txBody>
@@ -4264,7 +4264,7 @@
                           </a:solidFill>
                           <a:latin typeface="Calibri"/>
                         </a:rPr>
-                        <a:t>-34.8%</a:t>
+                        <a:t>-35.6%</a:t>
                       </a:r>
                     </a:p>
                   </a:txBody>
@@ -4287,7 +4287,7 @@
                           </a:solidFill>
                           <a:latin typeface="Calibri"/>
                         </a:rPr>
-                        <a:t>29%</a:t>
+                        <a:t>30%</a:t>
                       </a:r>
                     </a:p>
                   </a:txBody>
@@ -4310,7 +4310,7 @@
                           </a:solidFill>
                           <a:latin typeface="Calibri"/>
                         </a:rPr>
-                        <a:t>16.5</a:t>
+                        <a:t>16.3</a:t>
                       </a:r>
                     </a:p>
                   </a:txBody>
@@ -4358,7 +4358,7 @@
                           </a:solidFill>
                           <a:latin typeface="Calibri"/>
                         </a:rPr>
-                        <a:t>3,636</a:t>
+                        <a:t>3,638</a:t>
                       </a:r>
                     </a:p>
                   </a:txBody>
@@ -4377,11 +4377,34 @@
                       <a:r>
                         <a:rPr sz="1000" b="0">
                           <a:solidFill>
+                            <a:srgbClr val="0B7A3B"/>
+                          </a:solidFill>
+                          <a:latin typeface="Calibri"/>
+                        </a:rPr>
+                        <a:t>+0.06%</a:t>
+                      </a:r>
+                    </a:p>
+                  </a:txBody>
+                  <a:tcPr>
+                    <a:solidFill>
+                      <a:srgbClr val="FFFFFF"/>
+                    </a:solidFill>
+                  </a:tcPr>
+                </a:tc>
+                <a:tc>
+                  <a:txBody>
+                    <a:bodyPr/>
+                    <a:lstStyle/>
+                    <a:p>
+                      <a:pPr algn="r"/>
+                      <a:r>
+                        <a:rPr sz="1000" b="0">
+                          <a:solidFill>
                             <a:srgbClr val="B3261E"/>
                           </a:solidFill>
                           <a:latin typeface="Calibri"/>
                         </a:rPr>
-                        <a:t>-0.71%</a:t>
+                        <a:t>-0.10%</a:t>
                       </a:r>
                     </a:p>
                   </a:txBody>
@@ -4404,7 +4427,7 @@
                           </a:solidFill>
                           <a:latin typeface="Calibri"/>
                         </a:rPr>
-                        <a:t>-1.06%</a:t>
+                        <a:t>-5.90%</a:t>
                       </a:r>
                     </a:p>
                   </a:txBody>
@@ -4423,34 +4446,11 @@
                       <a:r>
                         <a:rPr sz="1000" b="0">
                           <a:solidFill>
-                            <a:srgbClr val="B3261E"/>
-                          </a:solidFill>
-                          <a:latin typeface="Calibri"/>
-                        </a:rPr>
-                        <a:t>-6.88%</a:t>
-                      </a:r>
-                    </a:p>
-                  </a:txBody>
-                  <a:tcPr>
-                    <a:solidFill>
-                      <a:srgbClr val="FFFFFF"/>
-                    </a:solidFill>
-                  </a:tcPr>
-                </a:tc>
-                <a:tc>
-                  <a:txBody>
-                    <a:bodyPr/>
-                    <a:lstStyle/>
-                    <a:p>
-                      <a:pPr algn="r"/>
-                      <a:r>
-                        <a:rPr sz="1000" b="0">
-                          <a:solidFill>
                             <a:srgbClr val="1F2A37"/>
                           </a:solidFill>
                           <a:latin typeface="Calibri"/>
                         </a:rPr>
-                        <a:t>-16.9%</a:t>
+                        <a:t>-16.8%</a:t>
                       </a:r>
                     </a:p>
                   </a:txBody>
@@ -4544,7 +4544,7 @@
                           </a:solidFill>
                           <a:latin typeface="Calibri"/>
                         </a:rPr>
-                        <a:t>1,209</a:t>
+                        <a:t>1,184</a:t>
                       </a:r>
                     </a:p>
                   </a:txBody>
@@ -4563,11 +4563,34 @@
                       <a:r>
                         <a:rPr sz="1000" b="0">
                           <a:solidFill>
+                            <a:srgbClr val="B3261E"/>
+                          </a:solidFill>
+                          <a:latin typeface="Calibri"/>
+                        </a:rPr>
+                        <a:t>-2.03%</a:t>
+                      </a:r>
+                    </a:p>
+                  </a:txBody>
+                  <a:tcPr>
+                    <a:solidFill>
+                      <a:srgbClr val="F3F5F7"/>
+                    </a:solidFill>
+                  </a:tcPr>
+                </a:tc>
+                <a:tc>
+                  <a:txBody>
+                    <a:bodyPr/>
+                    <a:lstStyle/>
+                    <a:p>
+                      <a:pPr algn="r"/>
+                      <a:r>
+                        <a:rPr sz="1000" b="0">
+                          <a:solidFill>
                             <a:srgbClr val="0B7A3B"/>
                           </a:solidFill>
                           <a:latin typeface="Calibri"/>
                         </a:rPr>
-                        <a:t>+0.58%</a:t>
+                        <a:t>+0.84%</a:t>
                       </a:r>
                     </a:p>
                   </a:txBody>
@@ -4586,11 +4609,11 @@
                       <a:r>
                         <a:rPr sz="1000" b="0">
                           <a:solidFill>
-                            <a:srgbClr val="0B7A3B"/>
-                          </a:solidFill>
-                          <a:latin typeface="Calibri"/>
-                        </a:rPr>
-                        <a:t>+3.63%</a:t>
+                            <a:srgbClr val="B3261E"/>
+                          </a:solidFill>
+                          <a:latin typeface="Calibri"/>
+                        </a:rPr>
+                        <a:t>-4.51%</a:t>
                       </a:r>
                     </a:p>
                   </a:txBody>
@@ -4609,11 +4632,11 @@
                       <a:r>
                         <a:rPr sz="1000" b="0">
                           <a:solidFill>
-                            <a:srgbClr val="B3261E"/>
-                          </a:solidFill>
-                          <a:latin typeface="Calibri"/>
-                        </a:rPr>
-                        <a:t>-3.08%</a:t>
+                            <a:srgbClr val="1F2A37"/>
+                          </a:solidFill>
+                          <a:latin typeface="Calibri"/>
+                        </a:rPr>
+                        <a:t>-25.3%</a:t>
                       </a:r>
                     </a:p>
                   </a:txBody>
@@ -4636,7 +4659,7 @@
                           </a:solidFill>
                           <a:latin typeface="Calibri"/>
                         </a:rPr>
-                        <a:t>-23.7%</a:t>
+                        <a:t>23%</a:t>
                       </a:r>
                     </a:p>
                   </a:txBody>
@@ -4659,30 +4682,7 @@
                           </a:solidFill>
                           <a:latin typeface="Calibri"/>
                         </a:rPr>
-                        <a:t>22%</a:t>
-                      </a:r>
-                    </a:p>
-                  </a:txBody>
-                  <a:tcPr>
-                    <a:solidFill>
-                      <a:srgbClr val="F3F5F7"/>
-                    </a:solidFill>
-                  </a:tcPr>
-                </a:tc>
-                <a:tc>
-                  <a:txBody>
-                    <a:bodyPr/>
-                    <a:lstStyle/>
-                    <a:p>
-                      <a:pPr algn="r"/>
-                      <a:r>
-                        <a:rPr sz="1000" b="0">
-                          <a:solidFill>
-                            <a:srgbClr val="1F2A37"/>
-                          </a:solidFill>
-                          <a:latin typeface="Calibri"/>
-                        </a:rPr>
-                        <a:t>21.9</a:t>
+                        <a:t>21.5</a:t>
                       </a:r>
                     </a:p>
                   </a:txBody>
@@ -4730,7 +4730,7 @@
                           </a:solidFill>
                           <a:latin typeface="Calibri"/>
                         </a:rPr>
-                        <a:t>2,529</a:t>
+                        <a:t>2,507</a:t>
                       </a:r>
                     </a:p>
                   </a:txBody>
@@ -4749,11 +4749,34 @@
                       <a:r>
                         <a:rPr sz="1000" b="0">
                           <a:solidFill>
+                            <a:srgbClr val="B3261E"/>
+                          </a:solidFill>
+                          <a:latin typeface="Calibri"/>
+                        </a:rPr>
+                        <a:t>-0.87%</a:t>
+                      </a:r>
+                    </a:p>
+                  </a:txBody>
+                  <a:tcPr>
+                    <a:solidFill>
+                      <a:srgbClr val="FFFFFF"/>
+                    </a:solidFill>
+                  </a:tcPr>
+                </a:tc>
+                <a:tc>
+                  <a:txBody>
+                    <a:bodyPr/>
+                    <a:lstStyle/>
+                    <a:p>
+                      <a:pPr algn="r"/>
+                      <a:r>
+                        <a:rPr sz="1000" b="0">
+                          <a:solidFill>
                             <a:srgbClr val="0B7A3B"/>
                           </a:solidFill>
                           <a:latin typeface="Calibri"/>
                         </a:rPr>
-                        <a:t>+2.77%</a:t>
+                        <a:t>+8.76%</a:t>
                       </a:r>
                     </a:p>
                   </a:txBody>
@@ -4776,7 +4799,7 @@
                           </a:solidFill>
                           <a:latin typeface="Calibri"/>
                         </a:rPr>
-                        <a:t>+12.04%</a:t>
+                        <a:t>+19.73%</a:t>
                       </a:r>
                     </a:p>
                   </a:txBody>
@@ -4795,11 +4818,11 @@
                       <a:r>
                         <a:rPr sz="1000" b="0">
                           <a:solidFill>
-                            <a:srgbClr val="0B7A3B"/>
-                          </a:solidFill>
-                          <a:latin typeface="Calibri"/>
-                        </a:rPr>
-                        <a:t>+19.44%</a:t>
+                            <a:srgbClr val="1F2A37"/>
+                          </a:solidFill>
+                          <a:latin typeface="Calibri"/>
+                        </a:rPr>
+                        <a:t>-21.3%</a:t>
                       </a:r>
                     </a:p>
                   </a:txBody>
@@ -4822,7 +4845,7 @@
                           </a:solidFill>
                           <a:latin typeface="Calibri"/>
                         </a:rPr>
-                        <a:t>-20.7%</a:t>
+                        <a:t>34%</a:t>
                       </a:r>
                     </a:p>
                   </a:txBody>
@@ -4845,30 +4868,7 @@
                           </a:solidFill>
                           <a:latin typeface="Calibri"/>
                         </a:rPr>
-                        <a:t>35%</a:t>
-                      </a:r>
-                    </a:p>
-                  </a:txBody>
-                  <a:tcPr>
-                    <a:solidFill>
-                      <a:srgbClr val="FFFFFF"/>
-                    </a:solidFill>
-                  </a:tcPr>
-                </a:tc>
-                <a:tc>
-                  <a:txBody>
-                    <a:bodyPr/>
-                    <a:lstStyle/>
-                    <a:p>
-                      <a:pPr algn="r"/>
-                      <a:r>
-                        <a:rPr sz="1000" b="0">
-                          <a:solidFill>
-                            <a:srgbClr val="1F2A37"/>
-                          </a:solidFill>
-                          <a:latin typeface="Calibri"/>
-                        </a:rPr>
-                        <a:t>17.7</a:t>
+                        <a:t>17.6</a:t>
                       </a:r>
                     </a:p>
                   </a:txBody>
@@ -4952,7 +4952,7 @@
                 </a:solidFill>
                 <a:latin typeface="Calibri"/>
               </a:rPr>
-              <a:t>Breadth was risk-on: 6 of 8 names advanced on the day.</a:t>
+              <a:t>Breadth was risk-off: 3 of 8 names advanced on the day.</a:t>
             </a:r>
           </a:p>
           <a:p>
@@ -4968,7 +4968,7 @@
                 </a:solidFill>
                 <a:latin typeface="Calibri"/>
               </a:rPr>
-              <a:t>•  Best performer on the day: INFY.NS at +3.30%.</a:t>
+              <a:t>•  Best performer on the day: ICICIBANK.NS at +0.97%.</a:t>
             </a:r>
           </a:p>
           <a:p>
@@ -4984,7 +4984,7 @@
                 </a:solidFill>
                 <a:latin typeface="Calibri"/>
               </a:rPr>
-              <a:t>•  Weakest on the day: HDFCBANK.NS at -0.71%.</a:t>
+              <a:t>•  Weakest on the day: RELIANCE.NS at -2.03%.</a:t>
             </a:r>
           </a:p>
           <a:p>
@@ -5000,7 +5000,7 @@
                 </a:solidFill>
                 <a:latin typeface="Calibri"/>
               </a:rPr>
-              <a:t>•  Median one-day move across the watchlist: +0.52%.</a:t>
+              <a:t>•  Median one-day move across the watchlist: -1.03%.</a:t>
             </a:r>
           </a:p>
           <a:p>
@@ -5016,7 +5016,23 @@
                 </a:solidFill>
                 <a:latin typeface="Calibri"/>
               </a:rPr>
-              <a:t>•  ITC.NS sits furthest below its 52-week high, at -34.8%.</a:t>
+              <a:t>•  ITC.NS sits furthest below its 52-week high, at -35.6%.</a:t>
+            </a:r>
+          </a:p>
+          <a:p>
+            <a:pPr>
+              <a:spcBef>
+                <a:spcPts val="500"/>
+              </a:spcBef>
+            </a:pPr>
+            <a:r>
+              <a:rPr sz="1000" b="0">
+                <a:solidFill>
+                  <a:srgbClr val="1F2A37"/>
+                </a:solidFill>
+                <a:latin typeface="Calibri"/>
+              </a:rPr>
+              <a:t>•  1 name(s) within 5% of the 52-week high: ICICIBANK.NS.</a:t>
             </a:r>
           </a:p>
           <a:p>
@@ -5048,7 +5064,7 @@
                 </a:solidFill>
                 <a:latin typeface="Calibri"/>
               </a:rPr>
-              <a:t>•  Highest 30-day realised volatility: INFY.NS at 35.0% annualised.</a:t>
+              <a:t>•  Highest 30-day realised volatility: TCS.NS at 33.9% annualised.</a:t>
             </a:r>
           </a:p>
           <a:p>
@@ -5064,7 +5080,7 @@
                 </a:solidFill>
                 <a:latin typeface="Calibri"/>
               </a:rPr>
-              <a:t>•  60 headlines collected, 7 tagged to a watchlist name by substring match (unverified).</a:t>
+              <a:t>•  60 headlines collected, 4 tagged to a watchlist name by substring match (unverified).</a:t>
             </a:r>
           </a:p>
           <a:p>

--- a/public/deskbrief.pptx
+++ b/public/deskbrief.pptx
@@ -3128,7 +3128,7 @@
                 </a:solidFill>
                 <a:latin typeface="Calibri"/>
               </a:rPr>
-              <a:t>8 names  |  generated 22 Oct 2026 17:26  |  source: Yahoo Finance via yfinance, Indian financial RSS</a:t>
+              <a:t>8 names  |  generated 23 Oct 2026 17:20  |  source: Yahoo Finance via yfinance, Indian financial RSS</a:t>
             </a:r>
           </a:p>
         </p:txBody>
@@ -3428,7 +3428,7 @@
                           </a:solidFill>
                           <a:latin typeface="Calibri"/>
                         </a:rPr>
-                        <a:t>1,895</a:t>
+                        <a:t>1,892</a:t>
                       </a:r>
                     </a:p>
                   </a:txBody>
@@ -3447,11 +3447,34 @@
                       <a:r>
                         <a:rPr sz="1000" b="0">
                           <a:solidFill>
+                            <a:srgbClr val="B3261E"/>
+                          </a:solidFill>
+                          <a:latin typeface="Calibri"/>
+                        </a:rPr>
+                        <a:t>-0.15%</a:t>
+                      </a:r>
+                    </a:p>
+                  </a:txBody>
+                  <a:tcPr>
+                    <a:solidFill>
+                      <a:srgbClr val="F3F5F7"/>
+                    </a:solidFill>
+                  </a:tcPr>
+                </a:tc>
+                <a:tc>
+                  <a:txBody>
+                    <a:bodyPr/>
+                    <a:lstStyle/>
+                    <a:p>
+                      <a:pPr algn="r"/>
+                      <a:r>
+                        <a:rPr sz="1000" b="0">
+                          <a:solidFill>
                             <a:srgbClr val="0B7A3B"/>
                           </a:solidFill>
                           <a:latin typeface="Calibri"/>
                         </a:rPr>
-                        <a:t>+0.17%</a:t>
+                        <a:t>+2.06%</a:t>
                       </a:r>
                     </a:p>
                   </a:txBody>
@@ -3474,7 +3497,7 @@
                           </a:solidFill>
                           <a:latin typeface="Calibri"/>
                         </a:rPr>
-                        <a:t>+5.59%</a:t>
+                        <a:t>+3.21%</a:t>
                       </a:r>
                     </a:p>
                   </a:txBody>
@@ -3493,11 +3516,11 @@
                       <a:r>
                         <a:rPr sz="1000" b="0">
                           <a:solidFill>
-                            <a:srgbClr val="0B7A3B"/>
-                          </a:solidFill>
-                          <a:latin typeface="Calibri"/>
-                        </a:rPr>
-                        <a:t>+4.28%</a:t>
+                            <a:srgbClr val="1F2A37"/>
+                          </a:solidFill>
+                          <a:latin typeface="Calibri"/>
+                        </a:rPr>
+                        <a:t>-11.4%</a:t>
                       </a:r>
                     </a:p>
                   </a:txBody>
@@ -3520,7 +3543,7 @@
                           </a:solidFill>
                           <a:latin typeface="Calibri"/>
                         </a:rPr>
-                        <a:t>-11.3%</a:t>
+                        <a:t>24%</a:t>
                       </a:r>
                     </a:p>
                   </a:txBody>
@@ -3543,30 +3566,7 @@
                           </a:solidFill>
                           <a:latin typeface="Calibri"/>
                         </a:rPr>
-                        <a:t>24%</a:t>
-                      </a:r>
-                    </a:p>
-                  </a:txBody>
-                  <a:tcPr>
-                    <a:solidFill>
-                      <a:srgbClr val="F3F5F7"/>
-                    </a:solidFill>
-                  </a:tcPr>
-                </a:tc>
-                <a:tc>
-                  <a:txBody>
-                    <a:bodyPr/>
-                    <a:lstStyle/>
-                    <a:p>
-                      <a:pPr algn="r"/>
-                      <a:r>
-                        <a:rPr sz="1000" b="0">
-                          <a:solidFill>
-                            <a:srgbClr val="1F2A37"/>
-                          </a:solidFill>
-                          <a:latin typeface="Calibri"/>
-                        </a:rPr>
-                        <a:t>39.6</a:t>
+                        <a:t>39.5</a:t>
                       </a:r>
                     </a:p>
                   </a:txBody>
@@ -3614,7 +3614,7 @@
                           </a:solidFill>
                           <a:latin typeface="Calibri"/>
                         </a:rPr>
-                        <a:t>694</a:t>
+                        <a:t>693</a:t>
                       </a:r>
                     </a:p>
                   </a:txBody>
@@ -3637,7 +3637,7 @@
                           </a:solidFill>
                           <a:latin typeface="Calibri"/>
                         </a:rPr>
-                        <a:t>-1.82%</a:t>
+                        <a:t>-0.18%</a:t>
                       </a:r>
                     </a:p>
                   </a:txBody>
@@ -3660,7 +3660,7 @@
                           </a:solidFill>
                           <a:latin typeface="Calibri"/>
                         </a:rPr>
-                        <a:t>-2.34%</a:t>
+                        <a:t>-4.68%</a:t>
                       </a:r>
                     </a:p>
                   </a:txBody>
@@ -3706,7 +3706,7 @@
                           </a:solidFill>
                           <a:latin typeface="Calibri"/>
                         </a:rPr>
-                        <a:t>-30.1%</a:t>
+                        <a:t>-30.2%</a:t>
                       </a:r>
                     </a:p>
                   </a:txBody>
@@ -3752,7 +3752,7 @@
                           </a:solidFill>
                           <a:latin typeface="Calibri"/>
                         </a:rPr>
-                        <a:t>15.2</a:t>
+                        <a:t>15.1</a:t>
                       </a:r>
                     </a:p>
                   </a:txBody>
@@ -3800,7 +3800,7 @@
                           </a:solidFill>
                           <a:latin typeface="Calibri"/>
                         </a:rPr>
-                        <a:t>1,398</a:t>
+                        <a:t>1,394</a:t>
                       </a:r>
                     </a:p>
                   </a:txBody>
@@ -3819,11 +3819,34 @@
                       <a:r>
                         <a:rPr sz="1000" b="0">
                           <a:solidFill>
+                            <a:srgbClr val="B3261E"/>
+                          </a:solidFill>
+                          <a:latin typeface="Calibri"/>
+                        </a:rPr>
+                        <a:t>-0.31%</a:t>
+                      </a:r>
+                    </a:p>
+                  </a:txBody>
+                  <a:tcPr>
+                    <a:solidFill>
+                      <a:srgbClr val="F3F5F7"/>
+                    </a:solidFill>
+                  </a:tcPr>
+                </a:tc>
+                <a:tc>
+                  <a:txBody>
+                    <a:bodyPr/>
+                    <a:lstStyle/>
+                    <a:p>
+                      <a:pPr algn="r"/>
+                      <a:r>
+                        <a:rPr sz="1000" b="0">
+                          <a:solidFill>
                             <a:srgbClr val="0B7A3B"/>
                           </a:solidFill>
                           <a:latin typeface="Calibri"/>
                         </a:rPr>
-                        <a:t>+0.97%</a:t>
+                        <a:t>+0.35%</a:t>
                       </a:r>
                     </a:p>
                   </a:txBody>
@@ -3846,7 +3869,7 @@
                           </a:solidFill>
                           <a:latin typeface="Calibri"/>
                         </a:rPr>
-                        <a:t>+4.47%</a:t>
+                        <a:t>+4.04%</a:t>
                       </a:r>
                     </a:p>
                   </a:txBody>
@@ -3865,11 +3888,11 @@
                       <a:r>
                         <a:rPr sz="1000" b="0">
                           <a:solidFill>
-                            <a:srgbClr val="0B7A3B"/>
-                          </a:solidFill>
-                          <a:latin typeface="Calibri"/>
-                        </a:rPr>
-                        <a:t>+4.40%</a:t>
+                            <a:srgbClr val="1F2A37"/>
+                          </a:solidFill>
+                          <a:latin typeface="Calibri"/>
+                        </a:rPr>
+                        <a:t>-4.5%</a:t>
                       </a:r>
                     </a:p>
                   </a:txBody>
@@ -3892,7 +3915,7 @@
                           </a:solidFill>
                           <a:latin typeface="Calibri"/>
                         </a:rPr>
-                        <a:t>-4.2%</a:t>
+                        <a:t>20%</a:t>
                       </a:r>
                     </a:p>
                   </a:txBody>
@@ -3915,30 +3938,7 @@
                           </a:solidFill>
                           <a:latin typeface="Calibri"/>
                         </a:rPr>
-                        <a:t>20%</a:t>
-                      </a:r>
-                    </a:p>
-                  </a:txBody>
-                  <a:tcPr>
-                    <a:solidFill>
-                      <a:srgbClr val="F3F5F7"/>
-                    </a:solidFill>
-                  </a:tcPr>
-                </a:tc>
-                <a:tc>
-                  <a:txBody>
-                    <a:bodyPr/>
-                    <a:lstStyle/>
-                    <a:p>
-                      <a:pPr algn="r"/>
-                      <a:r>
-                        <a:rPr sz="1000" b="0">
-                          <a:solidFill>
-                            <a:srgbClr val="1F2A37"/>
-                          </a:solidFill>
-                          <a:latin typeface="Calibri"/>
-                        </a:rPr>
-                        <a:t>18.1</a:t>
+                        <a:t>18.0</a:t>
                       </a:r>
                     </a:p>
                   </a:txBody>
@@ -3986,7 +3986,7 @@
                           </a:solidFill>
                           <a:latin typeface="Calibri"/>
                         </a:rPr>
-                        <a:t>1,153</a:t>
+                        <a:t>1,154</a:t>
                       </a:r>
                     </a:p>
                   </a:txBody>
@@ -4005,11 +4005,11 @@
                       <a:r>
                         <a:rPr sz="1000" b="0">
                           <a:solidFill>
-                            <a:srgbClr val="B3261E"/>
-                          </a:solidFill>
-                          <a:latin typeface="Calibri"/>
-                        </a:rPr>
-                        <a:t>-1.25%</a:t>
+                            <a:srgbClr val="0B7A3B"/>
+                          </a:solidFill>
+                          <a:latin typeface="Calibri"/>
+                        </a:rPr>
+                        <a:t>+0.04%</a:t>
                       </a:r>
                     </a:p>
                   </a:txBody>
@@ -4032,7 +4032,7 @@
                           </a:solidFill>
                           <a:latin typeface="Calibri"/>
                         </a:rPr>
-                        <a:t>+6.01%</a:t>
+                        <a:t>+3.95%</a:t>
                       </a:r>
                     </a:p>
                   </a:txBody>
@@ -4055,7 +4055,7 @@
                           </a:solidFill>
                           <a:latin typeface="Calibri"/>
                         </a:rPr>
-                        <a:t>+12.04%</a:t>
+                        <a:t>+13.06%</a:t>
                       </a:r>
                     </a:p>
                   </a:txBody>
@@ -4078,7 +4078,7 @@
                           </a:solidFill>
                           <a:latin typeface="Calibri"/>
                         </a:rPr>
-                        <a:t>-30.3%</a:t>
+                        <a:t>-30.2%</a:t>
                       </a:r>
                     </a:p>
                   </a:txBody>
@@ -4172,7 +4172,7 @@
                           </a:solidFill>
                           <a:latin typeface="Calibri"/>
                         </a:rPr>
-                        <a:t>259</a:t>
+                        <a:t>258</a:t>
                       </a:r>
                     </a:p>
                   </a:txBody>
@@ -4195,7 +4195,7 @@
                           </a:solidFill>
                           <a:latin typeface="Calibri"/>
                         </a:rPr>
-                        <a:t>-1.18%</a:t>
+                        <a:t>-0.39%</a:t>
                       </a:r>
                     </a:p>
                   </a:txBody>
@@ -4218,7 +4218,7 @@
                           </a:solidFill>
                           <a:latin typeface="Calibri"/>
                         </a:rPr>
-                        <a:t>-0.99%</a:t>
+                        <a:t>-2.27%</a:t>
                       </a:r>
                     </a:p>
                   </a:txBody>
@@ -4241,7 +4241,7 @@
                           </a:solidFill>
                           <a:latin typeface="Calibri"/>
                         </a:rPr>
-                        <a:t>-2.60%</a:t>
+                        <a:t>-4.53%</a:t>
                       </a:r>
                     </a:p>
                   </a:txBody>
@@ -4264,7 +4264,7 @@
                           </a:solidFill>
                           <a:latin typeface="Calibri"/>
                         </a:rPr>
-                        <a:t>-35.6%</a:t>
+                        <a:t>-35.8%</a:t>
                       </a:r>
                     </a:p>
                   </a:txBody>
@@ -4358,7 +4358,7 @@
                           </a:solidFill>
                           <a:latin typeface="Calibri"/>
                         </a:rPr>
-                        <a:t>3,638</a:t>
+                        <a:t>3,647</a:t>
                       </a:r>
                     </a:p>
                   </a:txBody>
@@ -4381,7 +4381,7 @@
                           </a:solidFill>
                           <a:latin typeface="Calibri"/>
                         </a:rPr>
-                        <a:t>+0.06%</a:t>
+                        <a:t>+0.24%</a:t>
                       </a:r>
                     </a:p>
                   </a:txBody>
@@ -4400,11 +4400,34 @@
                       <a:r>
                         <a:rPr sz="1000" b="0">
                           <a:solidFill>
+                            <a:srgbClr val="0B7A3B"/>
+                          </a:solidFill>
+                          <a:latin typeface="Calibri"/>
+                        </a:rPr>
+                        <a:t>+0.41%</a:t>
+                      </a:r>
+                    </a:p>
+                  </a:txBody>
+                  <a:tcPr>
+                    <a:solidFill>
+                      <a:srgbClr val="FFFFFF"/>
+                    </a:solidFill>
+                  </a:tcPr>
+                </a:tc>
+                <a:tc>
+                  <a:txBody>
+                    <a:bodyPr/>
+                    <a:lstStyle/>
+                    <a:p>
+                      <a:pPr algn="r"/>
+                      <a:r>
+                        <a:rPr sz="1000" b="0">
+                          <a:solidFill>
                             <a:srgbClr val="B3261E"/>
                           </a:solidFill>
                           <a:latin typeface="Calibri"/>
                         </a:rPr>
-                        <a:t>-0.10%</a:t>
+                        <a:t>-7.20%</a:t>
                       </a:r>
                     </a:p>
                   </a:txBody>
@@ -4423,11 +4446,11 @@
                       <a:r>
                         <a:rPr sz="1000" b="0">
                           <a:solidFill>
-                            <a:srgbClr val="B3261E"/>
-                          </a:solidFill>
-                          <a:latin typeface="Calibri"/>
-                        </a:rPr>
-                        <a:t>-5.90%</a:t>
+                            <a:srgbClr val="1F2A37"/>
+                          </a:solidFill>
+                          <a:latin typeface="Calibri"/>
+                        </a:rPr>
+                        <a:t>-16.6%</a:t>
                       </a:r>
                     </a:p>
                   </a:txBody>
@@ -4450,7 +4473,7 @@
                           </a:solidFill>
                           <a:latin typeface="Calibri"/>
                         </a:rPr>
-                        <a:t>-16.8%</a:t>
+                        <a:t>20%</a:t>
                       </a:r>
                     </a:p>
                   </a:txBody>
@@ -4473,30 +4496,7 @@
                           </a:solidFill>
                           <a:latin typeface="Calibri"/>
                         </a:rPr>
-                        <a:t>21%</a:t>
-                      </a:r>
-                    </a:p>
-                  </a:txBody>
-                  <a:tcPr>
-                    <a:solidFill>
-                      <a:srgbClr val="FFFFFF"/>
-                    </a:solidFill>
-                  </a:tcPr>
-                </a:tc>
-                <a:tc>
-                  <a:txBody>
-                    <a:bodyPr/>
-                    <a:lstStyle/>
-                    <a:p>
-                      <a:pPr algn="r"/>
-                      <a:r>
-                        <a:rPr sz="1000" b="0">
-                          <a:solidFill>
-                            <a:srgbClr val="1F2A37"/>
-                          </a:solidFill>
-                          <a:latin typeface="Calibri"/>
-                        </a:rPr>
-                        <a:t>30.2</a:t>
+                        <a:t>30.3</a:t>
                       </a:r>
                     </a:p>
                   </a:txBody>
@@ -4544,7 +4544,7 @@
                           </a:solidFill>
                           <a:latin typeface="Calibri"/>
                         </a:rPr>
-                        <a:t>1,184</a:t>
+                        <a:t>1,190</a:t>
                       </a:r>
                     </a:p>
                   </a:txBody>
@@ -4563,11 +4563,34 @@
                       <a:r>
                         <a:rPr sz="1000" b="0">
                           <a:solidFill>
+                            <a:srgbClr val="0B7A3B"/>
+                          </a:solidFill>
+                          <a:latin typeface="Calibri"/>
+                        </a:rPr>
+                        <a:t>+0.46%</a:t>
+                      </a:r>
+                    </a:p>
+                  </a:txBody>
+                  <a:tcPr>
+                    <a:solidFill>
+                      <a:srgbClr val="F3F5F7"/>
+                    </a:solidFill>
+                  </a:tcPr>
+                </a:tc>
+                <a:tc>
+                  <a:txBody>
+                    <a:bodyPr/>
+                    <a:lstStyle/>
+                    <a:p>
+                      <a:pPr algn="r"/>
+                      <a:r>
+                        <a:rPr sz="1000" b="0">
+                          <a:solidFill>
                             <a:srgbClr val="B3261E"/>
                           </a:solidFill>
                           <a:latin typeface="Calibri"/>
                         </a:rPr>
-                        <a:t>-2.03%</a:t>
+                        <a:t>-2.06%</a:t>
                       </a:r>
                     </a:p>
                   </a:txBody>
@@ -4586,11 +4609,11 @@
                       <a:r>
                         <a:rPr sz="1000" b="0">
                           <a:solidFill>
-                            <a:srgbClr val="0B7A3B"/>
-                          </a:solidFill>
-                          <a:latin typeface="Calibri"/>
-                        </a:rPr>
-                        <a:t>+0.84%</a:t>
+                            <a:srgbClr val="B3261E"/>
+                          </a:solidFill>
+                          <a:latin typeface="Calibri"/>
+                        </a:rPr>
+                        <a:t>-4.65%</a:t>
                       </a:r>
                     </a:p>
                   </a:txBody>
@@ -4609,11 +4632,11 @@
                       <a:r>
                         <a:rPr sz="1000" b="0">
                           <a:solidFill>
-                            <a:srgbClr val="B3261E"/>
-                          </a:solidFill>
-                          <a:latin typeface="Calibri"/>
-                        </a:rPr>
-                        <a:t>-4.51%</a:t>
+                            <a:srgbClr val="1F2A37"/>
+                          </a:solidFill>
+                          <a:latin typeface="Calibri"/>
+                        </a:rPr>
+                        <a:t>-24.9%</a:t>
                       </a:r>
                     </a:p>
                   </a:txBody>
@@ -4636,7 +4659,7 @@
                           </a:solidFill>
                           <a:latin typeface="Calibri"/>
                         </a:rPr>
-                        <a:t>-25.3%</a:t>
+                        <a:t>23%</a:t>
                       </a:r>
                     </a:p>
                   </a:txBody>
@@ -4659,30 +4682,7 @@
                           </a:solidFill>
                           <a:latin typeface="Calibri"/>
                         </a:rPr>
-                        <a:t>23%</a:t>
-                      </a:r>
-                    </a:p>
-                  </a:txBody>
-                  <a:tcPr>
-                    <a:solidFill>
-                      <a:srgbClr val="F3F5F7"/>
-                    </a:solidFill>
-                  </a:tcPr>
-                </a:tc>
-                <a:tc>
-                  <a:txBody>
-                    <a:bodyPr/>
-                    <a:lstStyle/>
-                    <a:p>
-                      <a:pPr algn="r"/>
-                      <a:r>
-                        <a:rPr sz="1000" b="0">
-                          <a:solidFill>
-                            <a:srgbClr val="1F2A37"/>
-                          </a:solidFill>
-                          <a:latin typeface="Calibri"/>
-                        </a:rPr>
-                        <a:t>21.5</a:t>
+                        <a:t>21.6</a:t>
                       </a:r>
                     </a:p>
                   </a:txBody>
@@ -4730,7 +4730,7 @@
                           </a:solidFill>
                           <a:latin typeface="Calibri"/>
                         </a:rPr>
-                        <a:t>2,507</a:t>
+                        <a:t>2,530</a:t>
                       </a:r>
                     </a:p>
                   </a:txBody>
@@ -4749,11 +4749,11 @@
                       <a:r>
                         <a:rPr sz="1000" b="0">
                           <a:solidFill>
-                            <a:srgbClr val="B3261E"/>
-                          </a:solidFill>
-                          <a:latin typeface="Calibri"/>
-                        </a:rPr>
-                        <a:t>-0.87%</a:t>
+                            <a:srgbClr val="0B7A3B"/>
+                          </a:solidFill>
+                          <a:latin typeface="Calibri"/>
+                        </a:rPr>
+                        <a:t>+0.92%</a:t>
                       </a:r>
                     </a:p>
                   </a:txBody>
@@ -4776,7 +4776,7 @@
                           </a:solidFill>
                           <a:latin typeface="Calibri"/>
                         </a:rPr>
-                        <a:t>+8.76%</a:t>
+                        <a:t>+7.66%</a:t>
                       </a:r>
                     </a:p>
                   </a:txBody>
@@ -4799,7 +4799,7 @@
                           </a:solidFill>
                           <a:latin typeface="Calibri"/>
                         </a:rPr>
-                        <a:t>+19.73%</a:t>
+                        <a:t>+21.72%</a:t>
                       </a:r>
                     </a:p>
                   </a:txBody>
@@ -4822,7 +4822,7 @@
                           </a:solidFill>
                           <a:latin typeface="Calibri"/>
                         </a:rPr>
-                        <a:t>-21.3%</a:t>
+                        <a:t>-20.6%</a:t>
                       </a:r>
                     </a:p>
                   </a:txBody>
@@ -4868,7 +4868,7 @@
                           </a:solidFill>
                           <a:latin typeface="Calibri"/>
                         </a:rPr>
-                        <a:t>17.6</a:t>
+                        <a:t>17.7</a:t>
                       </a:r>
                     </a:p>
                   </a:txBody>
@@ -4952,7 +4952,7 @@
                 </a:solidFill>
                 <a:latin typeface="Calibri"/>
               </a:rPr>
-              <a:t>Breadth was risk-off: 3 of 8 names advanced on the day.</a:t>
+              <a:t>Breadth was mixed: 4 of 8 names advanced on the day.</a:t>
             </a:r>
           </a:p>
           <a:p>
@@ -4968,7 +4968,7 @@
                 </a:solidFill>
                 <a:latin typeface="Calibri"/>
               </a:rPr>
-              <a:t>•  Best performer on the day: ICICIBANK.NS at +0.97%.</a:t>
+              <a:t>•  Best performer on the day: TCS.NS at +0.92%.</a:t>
             </a:r>
           </a:p>
           <a:p>
@@ -4984,7 +4984,7 @@
                 </a:solidFill>
                 <a:latin typeface="Calibri"/>
               </a:rPr>
-              <a:t>•  Weakest on the day: RELIANCE.NS at -2.03%.</a:t>
+              <a:t>•  Weakest on the day: ITC.NS at -0.39%.</a:t>
             </a:r>
           </a:p>
           <a:p>
@@ -5000,7 +5000,7 @@
                 </a:solidFill>
                 <a:latin typeface="Calibri"/>
               </a:rPr>
-              <a:t>•  Median one-day move across the watchlist: -1.03%.</a:t>
+              <a:t>•  Median one-day move across the watchlist: -0.06%.</a:t>
             </a:r>
           </a:p>
           <a:p>
@@ -5016,7 +5016,7 @@
                 </a:solidFill>
                 <a:latin typeface="Calibri"/>
               </a:rPr>
-              <a:t>•  ITC.NS sits furthest below its 52-week high, at -35.6%.</a:t>
+              <a:t>•  ITC.NS sits furthest below its 52-week high, at -35.8%.</a:t>
             </a:r>
           </a:p>
           <a:p>
@@ -5080,7 +5080,7 @@
                 </a:solidFill>
                 <a:latin typeface="Calibri"/>
               </a:rPr>
-              <a:t>•  60 headlines collected, 4 tagged to a watchlist name by substring match (unverified).</a:t>
+              <a:t>•  60 headlines collected, 5 tagged to a watchlist name by substring match (unverified).</a:t>
             </a:r>
           </a:p>
           <a:p>

--- a/public/deskbrief.pptx
+++ b/public/deskbrief.pptx
@@ -3128,7 +3128,7 @@
                 </a:solidFill>
                 <a:latin typeface="Calibri"/>
               </a:rPr>
-              <a:t>8 names  |  generated 23 Oct 2026 17:20  |  source: Yahoo Finance via yfinance, Indian financial RSS</a:t>
+              <a:t>8 names  |  generated 26 Oct 2026 18:45  |  source: Yahoo Finance via yfinance, Indian financial RSS</a:t>
             </a:r>
           </a:p>
         </p:txBody>
@@ -3566,7 +3566,7 @@
                           </a:solidFill>
                           <a:latin typeface="Calibri"/>
                         </a:rPr>
-                        <a:t>39.5</a:t>
+                        <a:t>40.1</a:t>
                       </a:r>
                     </a:p>
                   </a:txBody>
@@ -3752,7 +3752,7 @@
                           </a:solidFill>
                           <a:latin typeface="Calibri"/>
                         </a:rPr>
-                        <a:t>15.1</a:t>
+                        <a:t>15.0</a:t>
                       </a:r>
                     </a:p>
                   </a:txBody>
@@ -3938,7 +3938,7 @@
                           </a:solidFill>
                           <a:latin typeface="Calibri"/>
                         </a:rPr>
-                        <a:t>18.0</a:t>
+                        <a:t>17.2</a:t>
                       </a:r>
                     </a:p>
                   </a:txBody>
@@ -4124,7 +4124,7 @@
                           </a:solidFill>
                           <a:latin typeface="Calibri"/>
                         </a:rPr>
-                        <a:t>15.7</a:t>
+                        <a:t>15.5</a:t>
                       </a:r>
                     </a:p>
                   </a:txBody>
@@ -4310,7 +4310,7 @@
                           </a:solidFill>
                           <a:latin typeface="Calibri"/>
                         </a:rPr>
-                        <a:t>16.3</a:t>
+                        <a:t>16.4</a:t>
                       </a:r>
                     </a:p>
                   </a:txBody>
@@ -4496,7 +4496,7 @@
                           </a:solidFill>
                           <a:latin typeface="Calibri"/>
                         </a:rPr>
-                        <a:t>30.3</a:t>
+                        <a:t>30.5</a:t>
                       </a:r>
                     </a:p>
                   </a:txBody>
@@ -4682,7 +4682,7 @@
                           </a:solidFill>
                           <a:latin typeface="Calibri"/>
                         </a:rPr>
-                        <a:t>21.6</a:t>
+                        <a:t>21.8</a:t>
                       </a:r>
                     </a:p>
                   </a:txBody>
@@ -4868,7 +4868,7 @@
                           </a:solidFill>
                           <a:latin typeface="Calibri"/>
                         </a:rPr>
-                        <a:t>17.7</a:t>
+                        <a:t>17.8</a:t>
                       </a:r>
                     </a:p>
                   </a:txBody>
@@ -5080,7 +5080,7 @@
                 </a:solidFill>
                 <a:latin typeface="Calibri"/>
               </a:rPr>
-              <a:t>•  60 headlines collected, 5 tagged to a watchlist name by substring match (unverified).</a:t>
+              <a:t>•  60 headlines collected, 4 tagged to a watchlist name by substring match (unverified).</a:t>
             </a:r>
           </a:p>
           <a:p>

--- a/public/deskbrief.pptx
+++ b/public/deskbrief.pptx
@@ -3128,7 +3128,7 @@
                 </a:solidFill>
                 <a:latin typeface="Calibri"/>
               </a:rPr>
-              <a:t>8 names  |  generated 26 Oct 2026 18:45  |  source: Yahoo Finance via yfinance, Indian financial RSS</a:t>
+              <a:t>8 names  |  generated 27 Oct 2026 18:08  |  source: Yahoo Finance via yfinance, Indian financial RSS</a:t>
             </a:r>
           </a:p>
         </p:txBody>
@@ -3428,7 +3428,7 @@
                           </a:solidFill>
                           <a:latin typeface="Calibri"/>
                         </a:rPr>
-                        <a:t>1,892</a:t>
+                        <a:t>1,979</a:t>
                       </a:r>
                     </a:p>
                   </a:txBody>
@@ -3447,11 +3447,11 @@
                       <a:r>
                         <a:rPr sz="1000" b="0">
                           <a:solidFill>
-                            <a:srgbClr val="B3261E"/>
-                          </a:solidFill>
-                          <a:latin typeface="Calibri"/>
-                        </a:rPr>
-                        <a:t>-0.15%</a:t>
+                            <a:srgbClr val="0B7A3B"/>
+                          </a:solidFill>
+                          <a:latin typeface="Calibri"/>
+                        </a:rPr>
+                        <a:t>+3.20%</a:t>
                       </a:r>
                     </a:p>
                   </a:txBody>
@@ -3474,7 +3474,7 @@
                           </a:solidFill>
                           <a:latin typeface="Calibri"/>
                         </a:rPr>
-                        <a:t>+2.06%</a:t>
+                        <a:t>+5.52%</a:t>
                       </a:r>
                     </a:p>
                   </a:txBody>
@@ -3497,7 +3497,7 @@
                           </a:solidFill>
                           <a:latin typeface="Calibri"/>
                         </a:rPr>
-                        <a:t>+3.21%</a:t>
+                        <a:t>+10.83%</a:t>
                       </a:r>
                     </a:p>
                   </a:txBody>
@@ -3520,7 +3520,7 @@
                           </a:solidFill>
                           <a:latin typeface="Calibri"/>
                         </a:rPr>
-                        <a:t>-11.4%</a:t>
+                        <a:t>-7.4%</a:t>
                       </a:r>
                     </a:p>
                   </a:txBody>
@@ -3543,7 +3543,7 @@
                           </a:solidFill>
                           <a:latin typeface="Calibri"/>
                         </a:rPr>
-                        <a:t>24%</a:t>
+                        <a:t>26%</a:t>
                       </a:r>
                     </a:p>
                   </a:txBody>
@@ -3566,7 +3566,7 @@
                           </a:solidFill>
                           <a:latin typeface="Calibri"/>
                         </a:rPr>
-                        <a:t>40.1</a:t>
+                        <a:t>40.8</a:t>
                       </a:r>
                     </a:p>
                   </a:txBody>
@@ -3614,7 +3614,7 @@
                           </a:solidFill>
                           <a:latin typeface="Calibri"/>
                         </a:rPr>
-                        <a:t>693</a:t>
+                        <a:t>680</a:t>
                       </a:r>
                     </a:p>
                   </a:txBody>
@@ -3637,7 +3637,7 @@
                           </a:solidFill>
                           <a:latin typeface="Calibri"/>
                         </a:rPr>
-                        <a:t>-0.18%</a:t>
+                        <a:t>-1.14%</a:t>
                       </a:r>
                     </a:p>
                   </a:txBody>
@@ -3660,7 +3660,7 @@
                           </a:solidFill>
                           <a:latin typeface="Calibri"/>
                         </a:rPr>
-                        <a:t>-4.68%</a:t>
+                        <a:t>-4.47%</a:t>
                       </a:r>
                     </a:p>
                   </a:txBody>
@@ -3683,7 +3683,7 @@
                           </a:solidFill>
                           <a:latin typeface="Calibri"/>
                         </a:rPr>
-                        <a:t>-6.03%</a:t>
+                        <a:t>-7.53%</a:t>
                       </a:r>
                     </a:p>
                   </a:txBody>
@@ -3706,7 +3706,7 @@
                           </a:solidFill>
                           <a:latin typeface="Calibri"/>
                         </a:rPr>
-                        <a:t>-30.2%</a:t>
+                        <a:t>-31.5%</a:t>
                       </a:r>
                     </a:p>
                   </a:txBody>
@@ -3729,7 +3729,7 @@
                           </a:solidFill>
                           <a:latin typeface="Calibri"/>
                         </a:rPr>
-                        <a:t>23%</a:t>
+                        <a:t>22%</a:t>
                       </a:r>
                     </a:p>
                   </a:txBody>
@@ -3752,7 +3752,7 @@
                           </a:solidFill>
                           <a:latin typeface="Calibri"/>
                         </a:rPr>
-                        <a:t>15.0</a:t>
+                        <a:t>14.9</a:t>
                       </a:r>
                     </a:p>
                   </a:txBody>
@@ -3800,7 +3800,7 @@
                           </a:solidFill>
                           <a:latin typeface="Calibri"/>
                         </a:rPr>
-                        <a:t>1,394</a:t>
+                        <a:t>1,387</a:t>
                       </a:r>
                     </a:p>
                   </a:txBody>
@@ -3823,7 +3823,7 @@
                           </a:solidFill>
                           <a:latin typeface="Calibri"/>
                         </a:rPr>
-                        <a:t>-0.31%</a:t>
+                        <a:t>-1.15%</a:t>
                       </a:r>
                     </a:p>
                   </a:txBody>
@@ -3846,7 +3846,7 @@
                           </a:solidFill>
                           <a:latin typeface="Calibri"/>
                         </a:rPr>
-                        <a:t>+0.35%</a:t>
+                        <a:t>+0.43%</a:t>
                       </a:r>
                     </a:p>
                   </a:txBody>
@@ -3869,7 +3869,7 @@
                           </a:solidFill>
                           <a:latin typeface="Calibri"/>
                         </a:rPr>
-                        <a:t>+4.04%</a:t>
+                        <a:t>+4.53%</a:t>
                       </a:r>
                     </a:p>
                   </a:txBody>
@@ -3892,7 +3892,7 @@
                           </a:solidFill>
                           <a:latin typeface="Calibri"/>
                         </a:rPr>
-                        <a:t>-4.5%</a:t>
+                        <a:t>-5.0%</a:t>
                       </a:r>
                     </a:p>
                   </a:txBody>
@@ -3938,7 +3938,7 @@
                           </a:solidFill>
                           <a:latin typeface="Calibri"/>
                         </a:rPr>
-                        <a:t>17.2</a:t>
+                        <a:t>17.0</a:t>
                       </a:r>
                     </a:p>
                   </a:txBody>
@@ -3986,7 +3986,7 @@
                           </a:solidFill>
                           <a:latin typeface="Calibri"/>
                         </a:rPr>
-                        <a:t>1,154</a:t>
+                        <a:t>1,163</a:t>
                       </a:r>
                     </a:p>
                   </a:txBody>
@@ -4005,11 +4005,34 @@
                       <a:r>
                         <a:rPr sz="1000" b="0">
                           <a:solidFill>
+                            <a:srgbClr val="B3261E"/>
+                          </a:solidFill>
+                          <a:latin typeface="Calibri"/>
+                        </a:rPr>
+                        <a:t>-0.26%</a:t>
+                      </a:r>
+                    </a:p>
+                  </a:txBody>
+                  <a:tcPr>
+                    <a:solidFill>
+                      <a:srgbClr val="FFFFFF"/>
+                    </a:solidFill>
+                  </a:tcPr>
+                </a:tc>
+                <a:tc>
+                  <a:txBody>
+                    <a:bodyPr/>
+                    <a:lstStyle/>
+                    <a:p>
+                      <a:pPr algn="r"/>
+                      <a:r>
+                        <a:rPr sz="1000" b="0">
+                          <a:solidFill>
                             <a:srgbClr val="0B7A3B"/>
                           </a:solidFill>
                           <a:latin typeface="Calibri"/>
                         </a:rPr>
-                        <a:t>+0.04%</a:t>
+                        <a:t>+2.86%</a:t>
                       </a:r>
                     </a:p>
                   </a:txBody>
@@ -4032,7 +4055,7 @@
                           </a:solidFill>
                           <a:latin typeface="Calibri"/>
                         </a:rPr>
-                        <a:t>+3.95%</a:t>
+                        <a:t>+16.28%</a:t>
                       </a:r>
                     </a:p>
                   </a:txBody>
@@ -4051,34 +4074,11 @@
                       <a:r>
                         <a:rPr sz="1000" b="0">
                           <a:solidFill>
-                            <a:srgbClr val="0B7A3B"/>
-                          </a:solidFill>
-                          <a:latin typeface="Calibri"/>
-                        </a:rPr>
-                        <a:t>+13.06%</a:t>
-                      </a:r>
-                    </a:p>
-                  </a:txBody>
-                  <a:tcPr>
-                    <a:solidFill>
-                      <a:srgbClr val="FFFFFF"/>
-                    </a:solidFill>
-                  </a:tcPr>
-                </a:tc>
-                <a:tc>
-                  <a:txBody>
-                    <a:bodyPr/>
-                    <a:lstStyle/>
-                    <a:p>
-                      <a:pPr algn="r"/>
-                      <a:r>
-                        <a:rPr sz="1000" b="0">
-                          <a:solidFill>
                             <a:srgbClr val="1F2A37"/>
                           </a:solidFill>
                           <a:latin typeface="Calibri"/>
                         </a:rPr>
-                        <a:t>-30.2%</a:t>
+                        <a:t>-29.7%</a:t>
                       </a:r>
                     </a:p>
                   </a:txBody>
@@ -4172,7 +4172,7 @@
                           </a:solidFill>
                           <a:latin typeface="Calibri"/>
                         </a:rPr>
-                        <a:t>258</a:t>
+                        <a:t>260</a:t>
                       </a:r>
                     </a:p>
                   </a:txBody>
@@ -4195,7 +4195,7 @@
                           </a:solidFill>
                           <a:latin typeface="Calibri"/>
                         </a:rPr>
-                        <a:t>-0.39%</a:t>
+                        <a:t>-0.19%</a:t>
                       </a:r>
                     </a:p>
                   </a:txBody>
@@ -4218,7 +4218,7 @@
                           </a:solidFill>
                           <a:latin typeface="Calibri"/>
                         </a:rPr>
-                        <a:t>-2.27%</a:t>
+                        <a:t>-0.31%</a:t>
                       </a:r>
                     </a:p>
                   </a:txBody>
@@ -4241,7 +4241,7 @@
                           </a:solidFill>
                           <a:latin typeface="Calibri"/>
                         </a:rPr>
-                        <a:t>-4.53%</a:t>
+                        <a:t>-3.35%</a:t>
                       </a:r>
                     </a:p>
                   </a:txBody>
@@ -4264,7 +4264,7 @@
                           </a:solidFill>
                           <a:latin typeface="Calibri"/>
                         </a:rPr>
-                        <a:t>-35.8%</a:t>
+                        <a:t>-35.3%</a:t>
                       </a:r>
                     </a:p>
                   </a:txBody>
@@ -4358,7 +4358,7 @@
                           </a:solidFill>
                           <a:latin typeface="Calibri"/>
                         </a:rPr>
-                        <a:t>3,647</a:t>
+                        <a:t>3,665</a:t>
                       </a:r>
                     </a:p>
                   </a:txBody>
@@ -4377,11 +4377,34 @@
                       <a:r>
                         <a:rPr sz="1000" b="0">
                           <a:solidFill>
+                            <a:srgbClr val="B3261E"/>
+                          </a:solidFill>
+                          <a:latin typeface="Calibri"/>
+                        </a:rPr>
+                        <a:t>-0.40%</a:t>
+                      </a:r>
+                    </a:p>
+                  </a:txBody>
+                  <a:tcPr>
+                    <a:solidFill>
+                      <a:srgbClr val="FFFFFF"/>
+                    </a:solidFill>
+                  </a:tcPr>
+                </a:tc>
+                <a:tc>
+                  <a:txBody>
+                    <a:bodyPr/>
+                    <a:lstStyle/>
+                    <a:p>
+                      <a:pPr algn="r"/>
+                      <a:r>
+                        <a:rPr sz="1000" b="0">
+                          <a:solidFill>
                             <a:srgbClr val="0B7A3B"/>
                           </a:solidFill>
                           <a:latin typeface="Calibri"/>
                         </a:rPr>
-                        <a:t>+0.24%</a:t>
+                        <a:t>+0.09%</a:t>
                       </a:r>
                     </a:p>
                   </a:txBody>
@@ -4400,11 +4423,11 @@
                       <a:r>
                         <a:rPr sz="1000" b="0">
                           <a:solidFill>
-                            <a:srgbClr val="0B7A3B"/>
-                          </a:solidFill>
-                          <a:latin typeface="Calibri"/>
-                        </a:rPr>
-                        <a:t>+0.41%</a:t>
+                            <a:srgbClr val="B3261E"/>
+                          </a:solidFill>
+                          <a:latin typeface="Calibri"/>
+                        </a:rPr>
+                        <a:t>-5.45%</a:t>
                       </a:r>
                     </a:p>
                   </a:txBody>
@@ -4423,11 +4446,11 @@
                       <a:r>
                         <a:rPr sz="1000" b="0">
                           <a:solidFill>
-                            <a:srgbClr val="B3261E"/>
-                          </a:solidFill>
-                          <a:latin typeface="Calibri"/>
-                        </a:rPr>
-                        <a:t>-7.20%</a:t>
+                            <a:srgbClr val="1F2A37"/>
+                          </a:solidFill>
+                          <a:latin typeface="Calibri"/>
+                        </a:rPr>
+                        <a:t>-16.2%</a:t>
                       </a:r>
                     </a:p>
                   </a:txBody>
@@ -4450,7 +4473,7 @@
                           </a:solidFill>
                           <a:latin typeface="Calibri"/>
                         </a:rPr>
-                        <a:t>-16.6%</a:t>
+                        <a:t>21%</a:t>
                       </a:r>
                     </a:p>
                   </a:txBody>
@@ -4473,30 +4496,7 @@
                           </a:solidFill>
                           <a:latin typeface="Calibri"/>
                         </a:rPr>
-                        <a:t>20%</a:t>
-                      </a:r>
-                    </a:p>
-                  </a:txBody>
-                  <a:tcPr>
-                    <a:solidFill>
-                      <a:srgbClr val="FFFFFF"/>
-                    </a:solidFill>
-                  </a:tcPr>
-                </a:tc>
-                <a:tc>
-                  <a:txBody>
-                    <a:bodyPr/>
-                    <a:lstStyle/>
-                    <a:p>
-                      <a:pPr algn="r"/>
-                      <a:r>
-                        <a:rPr sz="1000" b="0">
-                          <a:solidFill>
-                            <a:srgbClr val="1F2A37"/>
-                          </a:solidFill>
-                          <a:latin typeface="Calibri"/>
-                        </a:rPr>
-                        <a:t>30.5</a:t>
+                        <a:t>30.4</a:t>
                       </a:r>
                     </a:p>
                   </a:txBody>
@@ -4544,7 +4544,7 @@
                           </a:solidFill>
                           <a:latin typeface="Calibri"/>
                         </a:rPr>
-                        <a:t>1,190</a:t>
+                        <a:t>1,196</a:t>
                       </a:r>
                     </a:p>
                   </a:txBody>
@@ -4563,11 +4563,11 @@
                       <a:r>
                         <a:rPr sz="1000" b="0">
                           <a:solidFill>
-                            <a:srgbClr val="0B7A3B"/>
-                          </a:solidFill>
-                          <a:latin typeface="Calibri"/>
-                        </a:rPr>
-                        <a:t>+0.46%</a:t>
+                            <a:srgbClr val="B3261E"/>
+                          </a:solidFill>
+                          <a:latin typeface="Calibri"/>
+                        </a:rPr>
+                        <a:t>-0.47%</a:t>
                       </a:r>
                     </a:p>
                   </a:txBody>
@@ -4590,7 +4590,7 @@
                           </a:solidFill>
                           <a:latin typeface="Calibri"/>
                         </a:rPr>
-                        <a:t>-2.06%</a:t>
+                        <a:t>-0.48%</a:t>
                       </a:r>
                     </a:p>
                   </a:txBody>
@@ -4613,7 +4613,7 @@
                           </a:solidFill>
                           <a:latin typeface="Calibri"/>
                         </a:rPr>
-                        <a:t>-4.65%</a:t>
+                        <a:t>-2.43%</a:t>
                       </a:r>
                     </a:p>
                   </a:txBody>
@@ -4636,7 +4636,7 @@
                           </a:solidFill>
                           <a:latin typeface="Calibri"/>
                         </a:rPr>
-                        <a:t>-24.9%</a:t>
+                        <a:t>-24.5%</a:t>
                       </a:r>
                     </a:p>
                   </a:txBody>
@@ -4682,7 +4682,7 @@
                           </a:solidFill>
                           <a:latin typeface="Calibri"/>
                         </a:rPr>
-                        <a:t>21.8</a:t>
+                        <a:t>21.7</a:t>
                       </a:r>
                     </a:p>
                   </a:txBody>
@@ -4730,7 +4730,7 @@
                           </a:solidFill>
                           <a:latin typeface="Calibri"/>
                         </a:rPr>
-                        <a:t>2,530</a:t>
+                        <a:t>2,497</a:t>
                       </a:r>
                     </a:p>
                   </a:txBody>
@@ -4749,11 +4749,34 @@
                       <a:r>
                         <a:rPr sz="1000" b="0">
                           <a:solidFill>
+                            <a:srgbClr val="B3261E"/>
+                          </a:solidFill>
+                          <a:latin typeface="Calibri"/>
+                        </a:rPr>
+                        <a:t>-1.50%</a:t>
+                      </a:r>
+                    </a:p>
+                  </a:txBody>
+                  <a:tcPr>
+                    <a:solidFill>
+                      <a:srgbClr val="FFFFFF"/>
+                    </a:solidFill>
+                  </a:tcPr>
+                </a:tc>
+                <a:tc>
+                  <a:txBody>
+                    <a:bodyPr/>
+                    <a:lstStyle/>
+                    <a:p>
+                      <a:pPr algn="r"/>
+                      <a:r>
+                        <a:rPr sz="1000" b="0">
+                          <a:solidFill>
                             <a:srgbClr val="0B7A3B"/>
                           </a:solidFill>
                           <a:latin typeface="Calibri"/>
                         </a:rPr>
-                        <a:t>+0.92%</a:t>
+                        <a:t>+1.46%</a:t>
                       </a:r>
                     </a:p>
                   </a:txBody>
@@ -4776,7 +4799,7 @@
                           </a:solidFill>
                           <a:latin typeface="Calibri"/>
                         </a:rPr>
-                        <a:t>+7.66%</a:t>
+                        <a:t>+20.57%</a:t>
                       </a:r>
                     </a:p>
                   </a:txBody>
@@ -4795,11 +4818,11 @@
                       <a:r>
                         <a:rPr sz="1000" b="0">
                           <a:solidFill>
-                            <a:srgbClr val="0B7A3B"/>
-                          </a:solidFill>
-                          <a:latin typeface="Calibri"/>
-                        </a:rPr>
-                        <a:t>+21.72%</a:t>
+                            <a:srgbClr val="1F2A37"/>
+                          </a:solidFill>
+                          <a:latin typeface="Calibri"/>
+                        </a:rPr>
+                        <a:t>-21.7%</a:t>
                       </a:r>
                     </a:p>
                   </a:txBody>
@@ -4822,7 +4845,7 @@
                           </a:solidFill>
                           <a:latin typeface="Calibri"/>
                         </a:rPr>
-                        <a:t>-20.6%</a:t>
+                        <a:t>34%</a:t>
                       </a:r>
                     </a:p>
                   </a:txBody>
@@ -4845,30 +4868,7 @@
                           </a:solidFill>
                           <a:latin typeface="Calibri"/>
                         </a:rPr>
-                        <a:t>34%</a:t>
-                      </a:r>
-                    </a:p>
-                  </a:txBody>
-                  <a:tcPr>
-                    <a:solidFill>
-                      <a:srgbClr val="FFFFFF"/>
-                    </a:solidFill>
-                  </a:tcPr>
-                </a:tc>
-                <a:tc>
-                  <a:txBody>
-                    <a:bodyPr/>
-                    <a:lstStyle/>
-                    <a:p>
-                      <a:pPr algn="r"/>
-                      <a:r>
-                        <a:rPr sz="1000" b="0">
-                          <a:solidFill>
-                            <a:srgbClr val="1F2A37"/>
-                          </a:solidFill>
-                          <a:latin typeface="Calibri"/>
-                        </a:rPr>
-                        <a:t>17.8</a:t>
+                        <a:t>17.5</a:t>
                       </a:r>
                     </a:p>
                   </a:txBody>
@@ -4952,7 +4952,7 @@
                 </a:solidFill>
                 <a:latin typeface="Calibri"/>
               </a:rPr>
-              <a:t>Breadth was mixed: 4 of 8 names advanced on the day.</a:t>
+              <a:t>Breadth was risk-off: 1 of 8 names advanced on the day.</a:t>
             </a:r>
           </a:p>
           <a:p>
@@ -4968,7 +4968,7 @@
                 </a:solidFill>
                 <a:latin typeface="Calibri"/>
               </a:rPr>
-              <a:t>•  Best performer on the day: TCS.NS at +0.92%.</a:t>
+              <a:t>•  Best performer on the day: BHARTIARTL.NS at +3.20%.</a:t>
             </a:r>
           </a:p>
           <a:p>
@@ -4984,7 +4984,7 @@
                 </a:solidFill>
                 <a:latin typeface="Calibri"/>
               </a:rPr>
-              <a:t>•  Weakest on the day: ITC.NS at -0.39%.</a:t>
+              <a:t>•  Weakest on the day: TCS.NS at -1.50%.</a:t>
             </a:r>
           </a:p>
           <a:p>
@@ -5000,7 +5000,7 @@
                 </a:solidFill>
                 <a:latin typeface="Calibri"/>
               </a:rPr>
-              <a:t>•  Median one-day move across the watchlist: -0.06%.</a:t>
+              <a:t>•  Median one-day move across the watchlist: -0.44%.</a:t>
             </a:r>
           </a:p>
           <a:p>
@@ -5016,23 +5016,7 @@
                 </a:solidFill>
                 <a:latin typeface="Calibri"/>
               </a:rPr>
-              <a:t>•  ITC.NS sits furthest below its 52-week high, at -35.8%.</a:t>
-            </a:r>
-          </a:p>
-          <a:p>
-            <a:pPr>
-              <a:spcBef>
-                <a:spcPts val="500"/>
-              </a:spcBef>
-            </a:pPr>
-            <a:r>
-              <a:rPr sz="1000" b="0">
-                <a:solidFill>
-                  <a:srgbClr val="1F2A37"/>
-                </a:solidFill>
-                <a:latin typeface="Calibri"/>
-              </a:rPr>
-              <a:t>•  1 name(s) within 5% of the 52-week high: ICICIBANK.NS.</a:t>
+              <a:t>•  ITC.NS sits furthest below its 52-week high, at -35.3%.</a:t>
             </a:r>
           </a:p>
           <a:p>
@@ -5064,7 +5048,7 @@
                 </a:solidFill>
                 <a:latin typeface="Calibri"/>
               </a:rPr>
-              <a:t>•  Highest 30-day realised volatility: TCS.NS at 33.9% annualised.</a:t>
+              <a:t>•  Highest 30-day realised volatility: TCS.NS at 34.3% annualised.</a:t>
             </a:r>
           </a:p>
           <a:p>

--- a/public/deskbrief.pptx
+++ b/public/deskbrief.pptx
@@ -3128,7 +3128,7 @@
                 </a:solidFill>
                 <a:latin typeface="Calibri"/>
               </a:rPr>
-              <a:t>8 names  |  generated 27 Oct 2026 18:08  |  source: Yahoo Finance via yfinance, Indian financial RSS</a:t>
+              <a:t>8 names  |  generated 28 Oct 2026 18:25  |  source: Yahoo Finance via yfinance, Indian financial RSS</a:t>
             </a:r>
           </a:p>
         </p:txBody>
@@ -3428,7 +3428,7 @@
                           </a:solidFill>
                           <a:latin typeface="Calibri"/>
                         </a:rPr>
-                        <a:t>1,979</a:t>
+                        <a:t>1,948</a:t>
                       </a:r>
                     </a:p>
                   </a:txBody>
@@ -3447,11 +3447,34 @@
                       <a:r>
                         <a:rPr sz="1000" b="0">
                           <a:solidFill>
+                            <a:srgbClr val="B3261E"/>
+                          </a:solidFill>
+                          <a:latin typeface="Calibri"/>
+                        </a:rPr>
+                        <a:t>-1.55%</a:t>
+                      </a:r>
+                    </a:p>
+                  </a:txBody>
+                  <a:tcPr>
+                    <a:solidFill>
+                      <a:srgbClr val="F3F5F7"/>
+                    </a:solidFill>
+                  </a:tcPr>
+                </a:tc>
+                <a:tc>
+                  <a:txBody>
+                    <a:bodyPr/>
+                    <a:lstStyle/>
+                    <a:p>
+                      <a:pPr algn="r"/>
+                      <a:r>
+                        <a:rPr sz="1000" b="0">
+                          <a:solidFill>
                             <a:srgbClr val="0B7A3B"/>
                           </a:solidFill>
                           <a:latin typeface="Calibri"/>
                         </a:rPr>
-                        <a:t>+3.20%</a:t>
+                        <a:t>+2.98%</a:t>
                       </a:r>
                     </a:p>
                   </a:txBody>
@@ -3474,7 +3497,7 @@
                           </a:solidFill>
                           <a:latin typeface="Calibri"/>
                         </a:rPr>
-                        <a:t>+5.52%</a:t>
+                        <a:t>+9.98%</a:t>
                       </a:r>
                     </a:p>
                   </a:txBody>
@@ -3493,11 +3516,11 @@
                       <a:r>
                         <a:rPr sz="1000" b="0">
                           <a:solidFill>
-                            <a:srgbClr val="0B7A3B"/>
-                          </a:solidFill>
-                          <a:latin typeface="Calibri"/>
-                        </a:rPr>
-                        <a:t>+10.83%</a:t>
+                            <a:srgbClr val="1F2A37"/>
+                          </a:solidFill>
+                          <a:latin typeface="Calibri"/>
+                        </a:rPr>
+                        <a:t>-8.8%</a:t>
                       </a:r>
                     </a:p>
                   </a:txBody>
@@ -3520,7 +3543,7 @@
                           </a:solidFill>
                           <a:latin typeface="Calibri"/>
                         </a:rPr>
-                        <a:t>-7.4%</a:t>
+                        <a:t>26%</a:t>
                       </a:r>
                     </a:p>
                   </a:txBody>
@@ -3543,30 +3566,7 @@
                           </a:solidFill>
                           <a:latin typeface="Calibri"/>
                         </a:rPr>
-                        <a:t>26%</a:t>
-                      </a:r>
-                    </a:p>
-                  </a:txBody>
-                  <a:tcPr>
-                    <a:solidFill>
-                      <a:srgbClr val="F3F5F7"/>
-                    </a:solidFill>
-                  </a:tcPr>
-                </a:tc>
-                <a:tc>
-                  <a:txBody>
-                    <a:bodyPr/>
-                    <a:lstStyle/>
-                    <a:p>
-                      <a:pPr algn="r"/>
-                      <a:r>
-                        <a:rPr sz="1000" b="0">
-                          <a:solidFill>
-                            <a:srgbClr val="1F2A37"/>
-                          </a:solidFill>
-                          <a:latin typeface="Calibri"/>
-                        </a:rPr>
-                        <a:t>40.8</a:t>
+                        <a:t>40.7</a:t>
                       </a:r>
                     </a:p>
                   </a:txBody>
@@ -3614,7 +3614,7 @@
                           </a:solidFill>
                           <a:latin typeface="Calibri"/>
                         </a:rPr>
-                        <a:t>680</a:t>
+                        <a:t>685</a:t>
                       </a:r>
                     </a:p>
                   </a:txBody>
@@ -3633,11 +3633,34 @@
                       <a:r>
                         <a:rPr sz="1000" b="0">
                           <a:solidFill>
+                            <a:srgbClr val="0B7A3B"/>
+                          </a:solidFill>
+                          <a:latin typeface="Calibri"/>
+                        </a:rPr>
+                        <a:t>+0.75%</a:t>
+                      </a:r>
+                    </a:p>
+                  </a:txBody>
+                  <a:tcPr>
+                    <a:solidFill>
+                      <a:srgbClr val="FFFFFF"/>
+                    </a:solidFill>
+                  </a:tcPr>
+                </a:tc>
+                <a:tc>
+                  <a:txBody>
+                    <a:bodyPr/>
+                    <a:lstStyle/>
+                    <a:p>
+                      <a:pPr algn="r"/>
+                      <a:r>
+                        <a:rPr sz="1000" b="0">
+                          <a:solidFill>
                             <a:srgbClr val="B3261E"/>
                           </a:solidFill>
                           <a:latin typeface="Calibri"/>
                         </a:rPr>
-                        <a:t>-1.14%</a:t>
+                        <a:t>-3.06%</a:t>
                       </a:r>
                     </a:p>
                   </a:txBody>
@@ -3660,7 +3683,7 @@
                           </a:solidFill>
                           <a:latin typeface="Calibri"/>
                         </a:rPr>
-                        <a:t>-4.47%</a:t>
+                        <a:t>-4.69%</a:t>
                       </a:r>
                     </a:p>
                   </a:txBody>
@@ -3679,11 +3702,11 @@
                       <a:r>
                         <a:rPr sz="1000" b="0">
                           <a:solidFill>
-                            <a:srgbClr val="B3261E"/>
-                          </a:solidFill>
-                          <a:latin typeface="Calibri"/>
-                        </a:rPr>
-                        <a:t>-7.53%</a:t>
+                            <a:srgbClr val="1F2A37"/>
+                          </a:solidFill>
+                          <a:latin typeface="Calibri"/>
+                        </a:rPr>
+                        <a:t>-31.0%</a:t>
                       </a:r>
                     </a:p>
                   </a:txBody>
@@ -3706,7 +3729,7 @@
                           </a:solidFill>
                           <a:latin typeface="Calibri"/>
                         </a:rPr>
-                        <a:t>-31.5%</a:t>
+                        <a:t>22%</a:t>
                       </a:r>
                     </a:p>
                   </a:txBody>
@@ -3729,30 +3752,7 @@
                           </a:solidFill>
                           <a:latin typeface="Calibri"/>
                         </a:rPr>
-                        <a:t>22%</a:t>
-                      </a:r>
-                    </a:p>
-                  </a:txBody>
-                  <a:tcPr>
-                    <a:solidFill>
-                      <a:srgbClr val="FFFFFF"/>
-                    </a:solidFill>
-                  </a:tcPr>
-                </a:tc>
-                <a:tc>
-                  <a:txBody>
-                    <a:bodyPr/>
-                    <a:lstStyle/>
-                    <a:p>
-                      <a:pPr algn="r"/>
-                      <a:r>
-                        <a:rPr sz="1000" b="0">
-                          <a:solidFill>
-                            <a:srgbClr val="1F2A37"/>
-                          </a:solidFill>
-                          <a:latin typeface="Calibri"/>
-                        </a:rPr>
-                        <a:t>14.9</a:t>
+                        <a:t>15.0</a:t>
                       </a:r>
                     </a:p>
                   </a:txBody>
@@ -3800,7 +3800,7 @@
                           </a:solidFill>
                           <a:latin typeface="Calibri"/>
                         </a:rPr>
-                        <a:t>1,387</a:t>
+                        <a:t>1,378</a:t>
                       </a:r>
                     </a:p>
                   </a:txBody>
@@ -3823,7 +3823,7 @@
                           </a:solidFill>
                           <a:latin typeface="Calibri"/>
                         </a:rPr>
-                        <a:t>-1.15%</a:t>
+                        <a:t>-0.67%</a:t>
                       </a:r>
                     </a:p>
                   </a:txBody>
@@ -3842,11 +3842,34 @@
                       <a:r>
                         <a:rPr sz="1000" b="0">
                           <a:solidFill>
+                            <a:srgbClr val="B3261E"/>
+                          </a:solidFill>
+                          <a:latin typeface="Calibri"/>
+                        </a:rPr>
+                        <a:t>-0.53%</a:t>
+                      </a:r>
+                    </a:p>
+                  </a:txBody>
+                  <a:tcPr>
+                    <a:solidFill>
+                      <a:srgbClr val="F3F5F7"/>
+                    </a:solidFill>
+                  </a:tcPr>
+                </a:tc>
+                <a:tc>
+                  <a:txBody>
+                    <a:bodyPr/>
+                    <a:lstStyle/>
+                    <a:p>
+                      <a:pPr algn="r"/>
+                      <a:r>
+                        <a:rPr sz="1000" b="0">
+                          <a:solidFill>
                             <a:srgbClr val="0B7A3B"/>
                           </a:solidFill>
                           <a:latin typeface="Calibri"/>
                         </a:rPr>
-                        <a:t>+0.43%</a:t>
+                        <a:t>+5.81%</a:t>
                       </a:r>
                     </a:p>
                   </a:txBody>
@@ -3865,11 +3888,11 @@
                       <a:r>
                         <a:rPr sz="1000" b="0">
                           <a:solidFill>
-                            <a:srgbClr val="0B7A3B"/>
-                          </a:solidFill>
-                          <a:latin typeface="Calibri"/>
-                        </a:rPr>
-                        <a:t>+4.53%</a:t>
+                            <a:srgbClr val="1F2A37"/>
+                          </a:solidFill>
+                          <a:latin typeface="Calibri"/>
+                        </a:rPr>
+                        <a:t>-5.6%</a:t>
                       </a:r>
                     </a:p>
                   </a:txBody>
@@ -3892,7 +3915,7 @@
                           </a:solidFill>
                           <a:latin typeface="Calibri"/>
                         </a:rPr>
-                        <a:t>-5.0%</a:t>
+                        <a:t>19%</a:t>
                       </a:r>
                     </a:p>
                   </a:txBody>
@@ -3915,30 +3938,7 @@
                           </a:solidFill>
                           <a:latin typeface="Calibri"/>
                         </a:rPr>
-                        <a:t>20%</a:t>
-                      </a:r>
-                    </a:p>
-                  </a:txBody>
-                  <a:tcPr>
-                    <a:solidFill>
-                      <a:srgbClr val="F3F5F7"/>
-                    </a:solidFill>
-                  </a:tcPr>
-                </a:tc>
-                <a:tc>
-                  <a:txBody>
-                    <a:bodyPr/>
-                    <a:lstStyle/>
-                    <a:p>
-                      <a:pPr algn="r"/>
-                      <a:r>
-                        <a:rPr sz="1000" b="0">
-                          <a:solidFill>
-                            <a:srgbClr val="1F2A37"/>
-                          </a:solidFill>
-                          <a:latin typeface="Calibri"/>
-                        </a:rPr>
-                        <a:t>17.0</a:t>
+                        <a:t>16.9</a:t>
                       </a:r>
                     </a:p>
                   </a:txBody>
@@ -3986,7 +3986,7 @@
                           </a:solidFill>
                           <a:latin typeface="Calibri"/>
                         </a:rPr>
-                        <a:t>1,163</a:t>
+                        <a:t>1,123</a:t>
                       </a:r>
                     </a:p>
                   </a:txBody>
@@ -4009,7 +4009,7 @@
                           </a:solidFill>
                           <a:latin typeface="Calibri"/>
                         </a:rPr>
-                        <a:t>-0.26%</a:t>
+                        <a:t>-3.43%</a:t>
                       </a:r>
                     </a:p>
                   </a:txBody>
@@ -4028,11 +4028,34 @@
                       <a:r>
                         <a:rPr sz="1000" b="0">
                           <a:solidFill>
+                            <a:srgbClr val="B3261E"/>
+                          </a:solidFill>
+                          <a:latin typeface="Calibri"/>
+                        </a:rPr>
+                        <a:t>-3.84%</a:t>
+                      </a:r>
+                    </a:p>
+                  </a:txBody>
+                  <a:tcPr>
+                    <a:solidFill>
+                      <a:srgbClr val="FFFFFF"/>
+                    </a:solidFill>
+                  </a:tcPr>
+                </a:tc>
+                <a:tc>
+                  <a:txBody>
+                    <a:bodyPr/>
+                    <a:lstStyle/>
+                    <a:p>
+                      <a:pPr algn="r"/>
+                      <a:r>
+                        <a:rPr sz="1000" b="0">
+                          <a:solidFill>
                             <a:srgbClr val="0B7A3B"/>
                           </a:solidFill>
                           <a:latin typeface="Calibri"/>
                         </a:rPr>
-                        <a:t>+2.86%</a:t>
+                        <a:t>+11.96%</a:t>
                       </a:r>
                     </a:p>
                   </a:txBody>
@@ -4051,11 +4074,11 @@
                       <a:r>
                         <a:rPr sz="1000" b="0">
                           <a:solidFill>
-                            <a:srgbClr val="0B7A3B"/>
-                          </a:solidFill>
-                          <a:latin typeface="Calibri"/>
-                        </a:rPr>
-                        <a:t>+16.28%</a:t>
+                            <a:srgbClr val="1F2A37"/>
+                          </a:solidFill>
+                          <a:latin typeface="Calibri"/>
+                        </a:rPr>
+                        <a:t>-32.1%</a:t>
                       </a:r>
                     </a:p>
                   </a:txBody>
@@ -4078,7 +4101,7 @@
                           </a:solidFill>
                           <a:latin typeface="Calibri"/>
                         </a:rPr>
-                        <a:t>-29.7%</a:t>
+                        <a:t>33%</a:t>
                       </a:r>
                     </a:p>
                   </a:txBody>
@@ -4101,30 +4124,7 @@
                           </a:solidFill>
                           <a:latin typeface="Calibri"/>
                         </a:rPr>
-                        <a:t>32%</a:t>
-                      </a:r>
-                    </a:p>
-                  </a:txBody>
-                  <a:tcPr>
-                    <a:solidFill>
-                      <a:srgbClr val="FFFFFF"/>
-                    </a:solidFill>
-                  </a:tcPr>
-                </a:tc>
-                <a:tc>
-                  <a:txBody>
-                    <a:bodyPr/>
-                    <a:lstStyle/>
-                    <a:p>
-                      <a:pPr algn="r"/>
-                      <a:r>
-                        <a:rPr sz="1000" b="0">
-                          <a:solidFill>
-                            <a:srgbClr val="1F2A37"/>
-                          </a:solidFill>
-                          <a:latin typeface="Calibri"/>
-                        </a:rPr>
-                        <a:t>15.5</a:t>
+                        <a:t>15.0</a:t>
                       </a:r>
                     </a:p>
                   </a:txBody>
@@ -4218,7 +4218,7 @@
                           </a:solidFill>
                           <a:latin typeface="Calibri"/>
                         </a:rPr>
-                        <a:t>-0.31%</a:t>
+                        <a:t>-0.95%</a:t>
                       </a:r>
                     </a:p>
                   </a:txBody>
@@ -4241,7 +4241,7 @@
                           </a:solidFill>
                           <a:latin typeface="Calibri"/>
                         </a:rPr>
-                        <a:t>-3.35%</a:t>
+                        <a:t>-2.15%</a:t>
                       </a:r>
                     </a:p>
                   </a:txBody>
@@ -4264,7 +4264,7 @@
                           </a:solidFill>
                           <a:latin typeface="Calibri"/>
                         </a:rPr>
-                        <a:t>-35.3%</a:t>
+                        <a:t>-35.4%</a:t>
                       </a:r>
                     </a:p>
                   </a:txBody>
@@ -4358,7 +4358,7 @@
                           </a:solidFill>
                           <a:latin typeface="Calibri"/>
                         </a:rPr>
-                        <a:t>3,665</a:t>
+                        <a:t>3,801</a:t>
                       </a:r>
                     </a:p>
                   </a:txBody>
@@ -4377,11 +4377,11 @@
                       <a:r>
                         <a:rPr sz="1000" b="0">
                           <a:solidFill>
-                            <a:srgbClr val="B3261E"/>
-                          </a:solidFill>
-                          <a:latin typeface="Calibri"/>
-                        </a:rPr>
-                        <a:t>-0.40%</a:t>
+                            <a:srgbClr val="0B7A3B"/>
+                          </a:solidFill>
+                          <a:latin typeface="Calibri"/>
+                        </a:rPr>
+                        <a:t>+3.72%</a:t>
                       </a:r>
                     </a:p>
                   </a:txBody>
@@ -4404,7 +4404,7 @@
                           </a:solidFill>
                           <a:latin typeface="Calibri"/>
                         </a:rPr>
-                        <a:t>+0.09%</a:t>
+                        <a:t>+4.55%</a:t>
                       </a:r>
                     </a:p>
                   </a:txBody>
@@ -4423,11 +4423,11 @@
                       <a:r>
                         <a:rPr sz="1000" b="0">
                           <a:solidFill>
-                            <a:srgbClr val="B3261E"/>
-                          </a:solidFill>
-                          <a:latin typeface="Calibri"/>
-                        </a:rPr>
-                        <a:t>-5.45%</a:t>
+                            <a:srgbClr val="0B7A3B"/>
+                          </a:solidFill>
+                          <a:latin typeface="Calibri"/>
+                        </a:rPr>
+                        <a:t>+0.93%</a:t>
                       </a:r>
                     </a:p>
                   </a:txBody>
@@ -4450,7 +4450,7 @@
                           </a:solidFill>
                           <a:latin typeface="Calibri"/>
                         </a:rPr>
-                        <a:t>-16.2%</a:t>
+                        <a:t>-13.1%</a:t>
                       </a:r>
                     </a:p>
                   </a:txBody>
@@ -4473,7 +4473,7 @@
                           </a:solidFill>
                           <a:latin typeface="Calibri"/>
                         </a:rPr>
-                        <a:t>21%</a:t>
+                        <a:t>23%</a:t>
                       </a:r>
                     </a:p>
                   </a:txBody>
@@ -4496,7 +4496,7 @@
                           </a:solidFill>
                           <a:latin typeface="Calibri"/>
                         </a:rPr>
-                        <a:t>30.4</a:t>
+                        <a:t>29.3</a:t>
                       </a:r>
                     </a:p>
                   </a:txBody>
@@ -4544,7 +4544,7 @@
                           </a:solidFill>
                           <a:latin typeface="Calibri"/>
                         </a:rPr>
-                        <a:t>1,196</a:t>
+                        <a:t>1,158</a:t>
                       </a:r>
                     </a:p>
                   </a:txBody>
@@ -4567,7 +4567,7 @@
                           </a:solidFill>
                           <a:latin typeface="Calibri"/>
                         </a:rPr>
-                        <a:t>-0.47%</a:t>
+                        <a:t>-3.19%</a:t>
                       </a:r>
                     </a:p>
                   </a:txBody>
@@ -4590,7 +4590,7 @@
                           </a:solidFill>
                           <a:latin typeface="Calibri"/>
                         </a:rPr>
-                        <a:t>-0.48%</a:t>
+                        <a:t>-4.22%</a:t>
                       </a:r>
                     </a:p>
                   </a:txBody>
@@ -4613,7 +4613,7 @@
                           </a:solidFill>
                           <a:latin typeface="Calibri"/>
                         </a:rPr>
-                        <a:t>-2.43%</a:t>
+                        <a:t>-3.31%</a:t>
                       </a:r>
                     </a:p>
                   </a:txBody>
@@ -4636,7 +4636,7 @@
                           </a:solidFill>
                           <a:latin typeface="Calibri"/>
                         </a:rPr>
-                        <a:t>-24.5%</a:t>
+                        <a:t>-26.9%</a:t>
                       </a:r>
                     </a:p>
                   </a:txBody>
@@ -4659,7 +4659,7 @@
                           </a:solidFill>
                           <a:latin typeface="Calibri"/>
                         </a:rPr>
-                        <a:t>23%</a:t>
+                        <a:t>24%</a:t>
                       </a:r>
                     </a:p>
                   </a:txBody>
@@ -4682,7 +4682,7 @@
                           </a:solidFill>
                           <a:latin typeface="Calibri"/>
                         </a:rPr>
-                        <a:t>21.7</a:t>
+                        <a:t>21.0</a:t>
                       </a:r>
                     </a:p>
                   </a:txBody>
@@ -4730,7 +4730,7 @@
                           </a:solidFill>
                           <a:latin typeface="Calibri"/>
                         </a:rPr>
-                        <a:t>2,497</a:t>
+                        <a:t>2,460</a:t>
                       </a:r>
                     </a:p>
                   </a:txBody>
@@ -4753,7 +4753,7 @@
                           </a:solidFill>
                           <a:latin typeface="Calibri"/>
                         </a:rPr>
-                        <a:t>-1.50%</a:t>
+                        <a:t>-1.48%</a:t>
                       </a:r>
                     </a:p>
                   </a:txBody>
@@ -4772,11 +4772,34 @@
                       <a:r>
                         <a:rPr sz="1000" b="0">
                           <a:solidFill>
+                            <a:srgbClr val="B3261E"/>
+                          </a:solidFill>
+                          <a:latin typeface="Calibri"/>
+                        </a:rPr>
+                        <a:t>-2.73%</a:t>
+                      </a:r>
+                    </a:p>
+                  </a:txBody>
+                  <a:tcPr>
+                    <a:solidFill>
+                      <a:srgbClr val="FFFFFF"/>
+                    </a:solidFill>
+                  </a:tcPr>
+                </a:tc>
+                <a:tc>
+                  <a:txBody>
+                    <a:bodyPr/>
+                    <a:lstStyle/>
+                    <a:p>
+                      <a:pPr algn="r"/>
+                      <a:r>
+                        <a:rPr sz="1000" b="0">
+                          <a:solidFill>
                             <a:srgbClr val="0B7A3B"/>
                           </a:solidFill>
                           <a:latin typeface="Calibri"/>
                         </a:rPr>
-                        <a:t>+1.46%</a:t>
+                        <a:t>+19.43%</a:t>
                       </a:r>
                     </a:p>
                   </a:txBody>
@@ -4795,11 +4818,11 @@
                       <a:r>
                         <a:rPr sz="1000" b="0">
                           <a:solidFill>
-                            <a:srgbClr val="0B7A3B"/>
-                          </a:solidFill>
-                          <a:latin typeface="Calibri"/>
-                        </a:rPr>
-                        <a:t>+20.57%</a:t>
+                            <a:srgbClr val="1F2A37"/>
+                          </a:solidFill>
+                          <a:latin typeface="Calibri"/>
+                        </a:rPr>
+                        <a:t>-22.8%</a:t>
                       </a:r>
                     </a:p>
                   </a:txBody>
@@ -4822,7 +4845,7 @@
                           </a:solidFill>
                           <a:latin typeface="Calibri"/>
                         </a:rPr>
-                        <a:t>-21.7%</a:t>
+                        <a:t>35%</a:t>
                       </a:r>
                     </a:p>
                   </a:txBody>
@@ -4845,30 +4868,7 @@
                           </a:solidFill>
                           <a:latin typeface="Calibri"/>
                         </a:rPr>
-                        <a:t>34%</a:t>
-                      </a:r>
-                    </a:p>
-                  </a:txBody>
-                  <a:tcPr>
-                    <a:solidFill>
-                      <a:srgbClr val="FFFFFF"/>
-                    </a:solidFill>
-                  </a:tcPr>
-                </a:tc>
-                <a:tc>
-                  <a:txBody>
-                    <a:bodyPr/>
-                    <a:lstStyle/>
-                    <a:p>
-                      <a:pPr algn="r"/>
-                      <a:r>
-                        <a:rPr sz="1000" b="0">
-                          <a:solidFill>
-                            <a:srgbClr val="1F2A37"/>
-                          </a:solidFill>
-                          <a:latin typeface="Calibri"/>
-                        </a:rPr>
-                        <a:t>17.5</a:t>
+                        <a:t>17.2</a:t>
                       </a:r>
                     </a:p>
                   </a:txBody>
@@ -4952,7 +4952,7 @@
                 </a:solidFill>
                 <a:latin typeface="Calibri"/>
               </a:rPr>
-              <a:t>Breadth was risk-off: 1 of 8 names advanced on the day.</a:t>
+              <a:t>Breadth was risk-off: 2 of 8 names advanced on the day.</a:t>
             </a:r>
           </a:p>
           <a:p>
@@ -4968,7 +4968,7 @@
                 </a:solidFill>
                 <a:latin typeface="Calibri"/>
               </a:rPr>
-              <a:t>•  Best performer on the day: BHARTIARTL.NS at +3.20%.</a:t>
+              <a:t>•  Best performer on the day: LT.NS at +3.72%.</a:t>
             </a:r>
           </a:p>
           <a:p>
@@ -4984,7 +4984,7 @@
                 </a:solidFill>
                 <a:latin typeface="Calibri"/>
               </a:rPr>
-              <a:t>•  Weakest on the day: TCS.NS at -1.50%.</a:t>
+              <a:t>•  Weakest on the day: INFY.NS at -3.43%.</a:t>
             </a:r>
           </a:p>
           <a:p>
@@ -5000,7 +5000,7 @@
                 </a:solidFill>
                 <a:latin typeface="Calibri"/>
               </a:rPr>
-              <a:t>•  Median one-day move across the watchlist: -0.44%.</a:t>
+              <a:t>•  Median one-day move across the watchlist: -1.07%.</a:t>
             </a:r>
           </a:p>
           <a:p>
@@ -5016,7 +5016,7 @@
                 </a:solidFill>
                 <a:latin typeface="Calibri"/>
               </a:rPr>
-              <a:t>•  ITC.NS sits furthest below its 52-week high, at -35.3%.</a:t>
+              <a:t>•  ITC.NS sits furthest below its 52-week high, at -35.4%.</a:t>
             </a:r>
           </a:p>
           <a:p>
@@ -5048,7 +5048,7 @@
                 </a:solidFill>
                 <a:latin typeface="Calibri"/>
               </a:rPr>
-              <a:t>•  Highest 30-day realised volatility: TCS.NS at 34.3% annualised.</a:t>
+              <a:t>•  Highest 30-day realised volatility: TCS.NS at 34.5% annualised.</a:t>
             </a:r>
           </a:p>
           <a:p>
@@ -5064,7 +5064,7 @@
                 </a:solidFill>
                 <a:latin typeface="Calibri"/>
               </a:rPr>
-              <a:t>•  60 headlines collected, 4 tagged to a watchlist name by substring match (unverified).</a:t>
+              <a:t>•  60 headlines collected, 6 tagged to a watchlist name by substring match (unverified).</a:t>
             </a:r>
           </a:p>
           <a:p>

--- a/public/deskbrief.pptx
+++ b/public/deskbrief.pptx
@@ -3128,7 +3128,7 @@
                 </a:solidFill>
                 <a:latin typeface="Calibri"/>
               </a:rPr>
-              <a:t>8 names  |  generated 28 Oct 2026 18:25  |  source: Yahoo Finance via yfinance, Indian financial RSS</a:t>
+              <a:t>8 names  |  generated 29 Oct 2026 18:35  |  source: Yahoo Finance via yfinance, Indian financial RSS</a:t>
             </a:r>
           </a:p>
         </p:txBody>
@@ -3566,7 +3566,7 @@
                           </a:solidFill>
                           <a:latin typeface="Calibri"/>
                         </a:rPr>
-                        <a:t>40.7</a:t>
+                        <a:t>41.2</a:t>
                       </a:r>
                     </a:p>
                   </a:txBody>
@@ -3752,7 +3752,7 @@
                           </a:solidFill>
                           <a:latin typeface="Calibri"/>
                         </a:rPr>
-                        <a:t>15.0</a:t>
+                        <a:t>14.9</a:t>
                       </a:r>
                     </a:p>
                   </a:txBody>
@@ -3938,7 +3938,7 @@
                           </a:solidFill>
                           <a:latin typeface="Calibri"/>
                         </a:rPr>
-                        <a:t>16.9</a:t>
+                        <a:t>17.0</a:t>
                       </a:r>
                     </a:p>
                   </a:txBody>
@@ -4124,7 +4124,7 @@
                           </a:solidFill>
                           <a:latin typeface="Calibri"/>
                         </a:rPr>
-                        <a:t>15.0</a:t>
+                        <a:t>15.3</a:t>
                       </a:r>
                     </a:p>
                   </a:txBody>
@@ -4310,7 +4310,7 @@
                           </a:solidFill>
                           <a:latin typeface="Calibri"/>
                         </a:rPr>
-                        <a:t>16.4</a:t>
+                        <a:t>16.7</a:t>
                       </a:r>
                     </a:p>
                   </a:txBody>
@@ -4496,7 +4496,7 @@
                           </a:solidFill>
                           <a:latin typeface="Calibri"/>
                         </a:rPr>
-                        <a:t>29.3</a:t>
+                        <a:t>29.6</a:t>
                       </a:r>
                     </a:p>
                   </a:txBody>
@@ -4682,7 +4682,7 @@
                           </a:solidFill>
                           <a:latin typeface="Calibri"/>
                         </a:rPr>
-                        <a:t>21.0</a:t>
+                        <a:t>21.1</a:t>
                       </a:r>
                     </a:p>
                   </a:txBody>
@@ -4868,7 +4868,7 @@
                           </a:solidFill>
                           <a:latin typeface="Calibri"/>
                         </a:rPr>
-                        <a:t>17.2</a:t>
+                        <a:t>17.4</a:t>
                       </a:r>
                     </a:p>
                   </a:txBody>
@@ -5064,7 +5064,7 @@
                 </a:solidFill>
                 <a:latin typeface="Calibri"/>
               </a:rPr>
-              <a:t>•  60 headlines collected, 6 tagged to a watchlist name by substring match (unverified).</a:t>
+              <a:t>•  60 headlines collected, 2 tagged to a watchlist name by substring match (unverified).</a:t>
             </a:r>
           </a:p>
           <a:p>

--- a/public/deskbrief.pptx
+++ b/public/deskbrief.pptx
@@ -3128,7 +3128,7 @@
                 </a:solidFill>
                 <a:latin typeface="Calibri"/>
               </a:rPr>
-              <a:t>8 names  |  generated 29 Oct 2026 18:35  |  source: Yahoo Finance via yfinance, Indian financial RSS</a:t>
+              <a:t>8 names  |  generated 30 Oct 2026 18:07  |  source: Yahoo Finance via yfinance, Indian financial RSS</a:t>
             </a:r>
           </a:p>
         </p:txBody>
@@ -3428,7 +3428,7 @@
                           </a:solidFill>
                           <a:latin typeface="Calibri"/>
                         </a:rPr>
-                        <a:t>1,948</a:t>
+                        <a:t>1,974</a:t>
                       </a:r>
                     </a:p>
                   </a:txBody>
@@ -3447,11 +3447,11 @@
                       <a:r>
                         <a:rPr sz="1000" b="0">
                           <a:solidFill>
-                            <a:srgbClr val="B3261E"/>
-                          </a:solidFill>
-                          <a:latin typeface="Calibri"/>
-                        </a:rPr>
-                        <a:t>-1.55%</a:t>
+                            <a:srgbClr val="0B7A3B"/>
+                          </a:solidFill>
+                          <a:latin typeface="Calibri"/>
+                        </a:rPr>
+                        <a:t>+0.08%</a:t>
                       </a:r>
                     </a:p>
                   </a:txBody>
@@ -3474,7 +3474,7 @@
                           </a:solidFill>
                           <a:latin typeface="Calibri"/>
                         </a:rPr>
-                        <a:t>+2.98%</a:t>
+                        <a:t>+4.31%</a:t>
                       </a:r>
                     </a:p>
                   </a:txBody>
@@ -3497,7 +3497,7 @@
                           </a:solidFill>
                           <a:latin typeface="Calibri"/>
                         </a:rPr>
-                        <a:t>+9.98%</a:t>
+                        <a:t>+12.33%</a:t>
                       </a:r>
                     </a:p>
                   </a:txBody>
@@ -3520,7 +3520,7 @@
                           </a:solidFill>
                           <a:latin typeface="Calibri"/>
                         </a:rPr>
-                        <a:t>-8.8%</a:t>
+                        <a:t>-7.6%</a:t>
                       </a:r>
                     </a:p>
                   </a:txBody>
@@ -3543,7 +3543,7 @@
                           </a:solidFill>
                           <a:latin typeface="Calibri"/>
                         </a:rPr>
-                        <a:t>26%</a:t>
+                        <a:t>27%</a:t>
                       </a:r>
                     </a:p>
                   </a:txBody>
@@ -3566,7 +3566,7 @@
                           </a:solidFill>
                           <a:latin typeface="Calibri"/>
                         </a:rPr>
-                        <a:t>41.2</a:t>
+                        <a:t>41.3</a:t>
                       </a:r>
                     </a:p>
                   </a:txBody>
@@ -3614,7 +3614,7 @@
                           </a:solidFill>
                           <a:latin typeface="Calibri"/>
                         </a:rPr>
-                        <a:t>685</a:t>
+                        <a:t>693</a:t>
                       </a:r>
                     </a:p>
                   </a:txBody>
@@ -3637,7 +3637,7 @@
                           </a:solidFill>
                           <a:latin typeface="Calibri"/>
                         </a:rPr>
-                        <a:t>+0.75%</a:t>
+                        <a:t>+1.39%</a:t>
                       </a:r>
                     </a:p>
                   </a:txBody>
@@ -3656,11 +3656,34 @@
                       <a:r>
                         <a:rPr sz="1000" b="0">
                           <a:solidFill>
+                            <a:srgbClr val="1F2A37"/>
+                          </a:solidFill>
+                          <a:latin typeface="Calibri"/>
+                        </a:rPr>
+                        <a:t>+0.00%</a:t>
+                      </a:r>
+                    </a:p>
+                  </a:txBody>
+                  <a:tcPr>
+                    <a:solidFill>
+                      <a:srgbClr val="FFFFFF"/>
+                    </a:solidFill>
+                  </a:tcPr>
+                </a:tc>
+                <a:tc>
+                  <a:txBody>
+                    <a:bodyPr/>
+                    <a:lstStyle/>
+                    <a:p>
+                      <a:pPr algn="r"/>
+                      <a:r>
+                        <a:rPr sz="1000" b="0">
+                          <a:solidFill>
                             <a:srgbClr val="B3261E"/>
                           </a:solidFill>
                           <a:latin typeface="Calibri"/>
                         </a:rPr>
-                        <a:t>-3.06%</a:t>
+                        <a:t>-2.24%</a:t>
                       </a:r>
                     </a:p>
                   </a:txBody>
@@ -3679,11 +3702,11 @@
                       <a:r>
                         <a:rPr sz="1000" b="0">
                           <a:solidFill>
-                            <a:srgbClr val="B3261E"/>
-                          </a:solidFill>
-                          <a:latin typeface="Calibri"/>
-                        </a:rPr>
-                        <a:t>-4.69%</a:t>
+                            <a:srgbClr val="1F2A37"/>
+                          </a:solidFill>
+                          <a:latin typeface="Calibri"/>
+                        </a:rPr>
+                        <a:t>-30.2%</a:t>
                       </a:r>
                     </a:p>
                   </a:txBody>
@@ -3706,7 +3729,7 @@
                           </a:solidFill>
                           <a:latin typeface="Calibri"/>
                         </a:rPr>
-                        <a:t>-31.0%</a:t>
+                        <a:t>22%</a:t>
                       </a:r>
                     </a:p>
                   </a:txBody>
@@ -3729,30 +3752,7 @@
                           </a:solidFill>
                           <a:latin typeface="Calibri"/>
                         </a:rPr>
-                        <a:t>22%</a:t>
-                      </a:r>
-                    </a:p>
-                  </a:txBody>
-                  <a:tcPr>
-                    <a:solidFill>
-                      <a:srgbClr val="FFFFFF"/>
-                    </a:solidFill>
-                  </a:tcPr>
-                </a:tc>
-                <a:tc>
-                  <a:txBody>
-                    <a:bodyPr/>
-                    <a:lstStyle/>
-                    <a:p>
-                      <a:pPr algn="r"/>
-                      <a:r>
-                        <a:rPr sz="1000" b="0">
-                          <a:solidFill>
-                            <a:srgbClr val="1F2A37"/>
-                          </a:solidFill>
-                          <a:latin typeface="Calibri"/>
-                        </a:rPr>
-                        <a:t>14.9</a:t>
+                        <a:t>15.1</a:t>
                       </a:r>
                     </a:p>
                   </a:txBody>
@@ -3800,7 +3800,7 @@
                           </a:solidFill>
                           <a:latin typeface="Calibri"/>
                         </a:rPr>
-                        <a:t>1,378</a:t>
+                        <a:t>1,398</a:t>
                       </a:r>
                     </a:p>
                   </a:txBody>
@@ -3819,11 +3819,11 @@
                       <a:r>
                         <a:rPr sz="1000" b="0">
                           <a:solidFill>
-                            <a:srgbClr val="B3261E"/>
-                          </a:solidFill>
-                          <a:latin typeface="Calibri"/>
-                        </a:rPr>
-                        <a:t>-0.67%</a:t>
+                            <a:srgbClr val="0B7A3B"/>
+                          </a:solidFill>
+                          <a:latin typeface="Calibri"/>
+                        </a:rPr>
+                        <a:t>+0.82%</a:t>
                       </a:r>
                     </a:p>
                   </a:txBody>
@@ -3842,11 +3842,11 @@
                       <a:r>
                         <a:rPr sz="1000" b="0">
                           <a:solidFill>
-                            <a:srgbClr val="B3261E"/>
-                          </a:solidFill>
-                          <a:latin typeface="Calibri"/>
-                        </a:rPr>
-                        <a:t>-0.53%</a:t>
+                            <a:srgbClr val="0B7A3B"/>
+                          </a:solidFill>
+                          <a:latin typeface="Calibri"/>
+                        </a:rPr>
+                        <a:t>+0.27%</a:t>
                       </a:r>
                     </a:p>
                   </a:txBody>
@@ -3869,7 +3869,7 @@
                           </a:solidFill>
                           <a:latin typeface="Calibri"/>
                         </a:rPr>
-                        <a:t>+5.81%</a:t>
+                        <a:t>+5.77%</a:t>
                       </a:r>
                     </a:p>
                   </a:txBody>
@@ -3892,7 +3892,7 @@
                           </a:solidFill>
                           <a:latin typeface="Calibri"/>
                         </a:rPr>
-                        <a:t>-5.6%</a:t>
+                        <a:t>-4.2%</a:t>
                       </a:r>
                     </a:p>
                   </a:txBody>
@@ -3938,7 +3938,7 @@
                           </a:solidFill>
                           <a:latin typeface="Calibri"/>
                         </a:rPr>
-                        <a:t>17.0</a:t>
+                        <a:t>17.2</a:t>
                       </a:r>
                     </a:p>
                   </a:txBody>
@@ -3986,7 +3986,7 @@
                           </a:solidFill>
                           <a:latin typeface="Calibri"/>
                         </a:rPr>
-                        <a:t>1,123</a:t>
+                        <a:t>1,185</a:t>
                       </a:r>
                     </a:p>
                   </a:txBody>
@@ -4005,11 +4005,11 @@
                       <a:r>
                         <a:rPr sz="1000" b="0">
                           <a:solidFill>
-                            <a:srgbClr val="B3261E"/>
-                          </a:solidFill>
-                          <a:latin typeface="Calibri"/>
-                        </a:rPr>
-                        <a:t>-3.43%</a:t>
+                            <a:srgbClr val="0B7A3B"/>
+                          </a:solidFill>
+                          <a:latin typeface="Calibri"/>
+                        </a:rPr>
+                        <a:t>+3.36%</a:t>
                       </a:r>
                     </a:p>
                   </a:txBody>
@@ -4028,11 +4028,11 @@
                       <a:r>
                         <a:rPr sz="1000" b="0">
                           <a:solidFill>
-                            <a:srgbClr val="B3261E"/>
-                          </a:solidFill>
-                          <a:latin typeface="Calibri"/>
-                        </a:rPr>
-                        <a:t>-3.84%</a:t>
+                            <a:srgbClr val="0B7A3B"/>
+                          </a:solidFill>
+                          <a:latin typeface="Calibri"/>
+                        </a:rPr>
+                        <a:t>+2.70%</a:t>
                       </a:r>
                     </a:p>
                   </a:txBody>
@@ -4055,7 +4055,7 @@
                           </a:solidFill>
                           <a:latin typeface="Calibri"/>
                         </a:rPr>
-                        <a:t>+11.96%</a:t>
+                        <a:t>+19.20%</a:t>
                       </a:r>
                     </a:p>
                   </a:txBody>
@@ -4078,7 +4078,7 @@
                           </a:solidFill>
                           <a:latin typeface="Calibri"/>
                         </a:rPr>
-                        <a:t>-32.1%</a:t>
+                        <a:t>-28.4%</a:t>
                       </a:r>
                     </a:p>
                   </a:txBody>
@@ -4101,7 +4101,7 @@
                           </a:solidFill>
                           <a:latin typeface="Calibri"/>
                         </a:rPr>
-                        <a:t>33%</a:t>
+                        <a:t>34%</a:t>
                       </a:r>
                     </a:p>
                   </a:txBody>
@@ -4124,7 +4124,7 @@
                           </a:solidFill>
                           <a:latin typeface="Calibri"/>
                         </a:rPr>
-                        <a:t>15.3</a:t>
+                        <a:t>15.8</a:t>
                       </a:r>
                     </a:p>
                   </a:txBody>
@@ -4172,7 +4172,7 @@
                           </a:solidFill>
                           <a:latin typeface="Calibri"/>
                         </a:rPr>
-                        <a:t>260</a:t>
+                        <a:t>266</a:t>
                       </a:r>
                     </a:p>
                   </a:txBody>
@@ -4191,11 +4191,11 @@
                       <a:r>
                         <a:rPr sz="1000" b="0">
                           <a:solidFill>
-                            <a:srgbClr val="B3261E"/>
-                          </a:solidFill>
-                          <a:latin typeface="Calibri"/>
-                        </a:rPr>
-                        <a:t>-0.19%</a:t>
+                            <a:srgbClr val="0B7A3B"/>
+                          </a:solidFill>
+                          <a:latin typeface="Calibri"/>
+                        </a:rPr>
+                        <a:t>+0.23%</a:t>
                       </a:r>
                     </a:p>
                   </a:txBody>
@@ -4214,11 +4214,11 @@
                       <a:r>
                         <a:rPr sz="1000" b="0">
                           <a:solidFill>
-                            <a:srgbClr val="B3261E"/>
-                          </a:solidFill>
-                          <a:latin typeface="Calibri"/>
-                        </a:rPr>
-                        <a:t>-0.95%</a:t>
+                            <a:srgbClr val="0B7A3B"/>
+                          </a:solidFill>
+                          <a:latin typeface="Calibri"/>
+                        </a:rPr>
+                        <a:t>+2.99%</a:t>
                       </a:r>
                     </a:p>
                   </a:txBody>
@@ -4237,11 +4237,11 @@
                       <a:r>
                         <a:rPr sz="1000" b="0">
                           <a:solidFill>
-                            <a:srgbClr val="B3261E"/>
-                          </a:solidFill>
-                          <a:latin typeface="Calibri"/>
-                        </a:rPr>
-                        <a:t>-2.15%</a:t>
+                            <a:srgbClr val="0B7A3B"/>
+                          </a:solidFill>
+                          <a:latin typeface="Calibri"/>
+                        </a:rPr>
+                        <a:t>+1.08%</a:t>
                       </a:r>
                     </a:p>
                   </a:txBody>
@@ -4264,7 +4264,7 @@
                           </a:solidFill>
                           <a:latin typeface="Calibri"/>
                         </a:rPr>
-                        <a:t>-35.4%</a:t>
+                        <a:t>-33.7%</a:t>
                       </a:r>
                     </a:p>
                   </a:txBody>
@@ -4287,7 +4287,7 @@
                           </a:solidFill>
                           <a:latin typeface="Calibri"/>
                         </a:rPr>
-                        <a:t>30%</a:t>
+                        <a:t>29%</a:t>
                       </a:r>
                     </a:p>
                   </a:txBody>
@@ -4310,7 +4310,7 @@
                           </a:solidFill>
                           <a:latin typeface="Calibri"/>
                         </a:rPr>
-                        <a:t>16.7</a:t>
+                        <a:t>16.8</a:t>
                       </a:r>
                     </a:p>
                   </a:txBody>
@@ -4358,7 +4358,7 @@
                           </a:solidFill>
                           <a:latin typeface="Calibri"/>
                         </a:rPr>
-                        <a:t>3,801</a:t>
+                        <a:t>3,872</a:t>
                       </a:r>
                     </a:p>
                   </a:txBody>
@@ -4381,7 +4381,7 @@
                           </a:solidFill>
                           <a:latin typeface="Calibri"/>
                         </a:rPr>
-                        <a:t>+3.72%</a:t>
+                        <a:t>+0.90%</a:t>
                       </a:r>
                     </a:p>
                   </a:txBody>
@@ -4404,7 +4404,7 @@
                           </a:solidFill>
                           <a:latin typeface="Calibri"/>
                         </a:rPr>
-                        <a:t>+4.55%</a:t>
+                        <a:t>+6.16%</a:t>
                       </a:r>
                     </a:p>
                   </a:txBody>
@@ -4427,7 +4427,7 @@
                           </a:solidFill>
                           <a:latin typeface="Calibri"/>
                         </a:rPr>
-                        <a:t>+0.93%</a:t>
+                        <a:t>+2.97%</a:t>
                       </a:r>
                     </a:p>
                   </a:txBody>
@@ -4450,7 +4450,7 @@
                           </a:solidFill>
                           <a:latin typeface="Calibri"/>
                         </a:rPr>
-                        <a:t>-13.1%</a:t>
+                        <a:t>-11.5%</a:t>
                       </a:r>
                     </a:p>
                   </a:txBody>
@@ -4496,7 +4496,7 @@
                           </a:solidFill>
                           <a:latin typeface="Calibri"/>
                         </a:rPr>
-                        <a:t>29.6</a:t>
+                        <a:t>29.8</a:t>
                       </a:r>
                     </a:p>
                   </a:txBody>
@@ -4544,7 +4544,7 @@
                           </a:solidFill>
                           <a:latin typeface="Calibri"/>
                         </a:rPr>
-                        <a:t>1,158</a:t>
+                        <a:t>1,165</a:t>
                       </a:r>
                     </a:p>
                   </a:txBody>
@@ -4567,7 +4567,7 @@
                           </a:solidFill>
                           <a:latin typeface="Calibri"/>
                         </a:rPr>
-                        <a:t>-3.19%</a:t>
+                        <a:t>-0.21%</a:t>
                       </a:r>
                     </a:p>
                   </a:txBody>
@@ -4590,7 +4590,7 @@
                           </a:solidFill>
                           <a:latin typeface="Calibri"/>
                         </a:rPr>
-                        <a:t>-4.22%</a:t>
+                        <a:t>-2.11%</a:t>
                       </a:r>
                     </a:p>
                   </a:txBody>
@@ -4613,7 +4613,7 @@
                           </a:solidFill>
                           <a:latin typeface="Calibri"/>
                         </a:rPr>
-                        <a:t>-3.31%</a:t>
+                        <a:t>-1.86%</a:t>
                       </a:r>
                     </a:p>
                   </a:txBody>
@@ -4636,7 +4636,7 @@
                           </a:solidFill>
                           <a:latin typeface="Calibri"/>
                         </a:rPr>
-                        <a:t>-26.9%</a:t>
+                        <a:t>-26.5%</a:t>
                       </a:r>
                     </a:p>
                   </a:txBody>
@@ -4730,7 +4730,7 @@
                           </a:solidFill>
                           <a:latin typeface="Calibri"/>
                         </a:rPr>
-                        <a:t>2,460</a:t>
+                        <a:t>2,503</a:t>
                       </a:r>
                     </a:p>
                   </a:txBody>
@@ -4749,11 +4749,34 @@
                       <a:r>
                         <a:rPr sz="1000" b="0">
                           <a:solidFill>
+                            <a:srgbClr val="0B7A3B"/>
+                          </a:solidFill>
+                          <a:latin typeface="Calibri"/>
+                        </a:rPr>
+                        <a:t>+0.99%</a:t>
+                      </a:r>
+                    </a:p>
+                  </a:txBody>
+                  <a:tcPr>
+                    <a:solidFill>
+                      <a:srgbClr val="FFFFFF"/>
+                    </a:solidFill>
+                  </a:tcPr>
+                </a:tc>
+                <a:tc>
+                  <a:txBody>
+                    <a:bodyPr/>
+                    <a:lstStyle/>
+                    <a:p>
+                      <a:pPr algn="r"/>
+                      <a:r>
+                        <a:rPr sz="1000" b="0">
+                          <a:solidFill>
                             <a:srgbClr val="B3261E"/>
                           </a:solidFill>
                           <a:latin typeface="Calibri"/>
                         </a:rPr>
-                        <a:t>-1.48%</a:t>
+                        <a:t>-1.08%</a:t>
                       </a:r>
                     </a:p>
                   </a:txBody>
@@ -4772,11 +4795,11 @@
                       <a:r>
                         <a:rPr sz="1000" b="0">
                           <a:solidFill>
-                            <a:srgbClr val="B3261E"/>
-                          </a:solidFill>
-                          <a:latin typeface="Calibri"/>
-                        </a:rPr>
-                        <a:t>-2.73%</a:t>
+                            <a:srgbClr val="0B7A3B"/>
+                          </a:solidFill>
+                          <a:latin typeface="Calibri"/>
+                        </a:rPr>
+                        <a:t>+22.69%</a:t>
                       </a:r>
                     </a:p>
                   </a:txBody>
@@ -4795,11 +4818,11 @@
                       <a:r>
                         <a:rPr sz="1000" b="0">
                           <a:solidFill>
-                            <a:srgbClr val="0B7A3B"/>
-                          </a:solidFill>
-                          <a:latin typeface="Calibri"/>
-                        </a:rPr>
-                        <a:t>+19.43%</a:t>
+                            <a:srgbClr val="1F2A37"/>
+                          </a:solidFill>
+                          <a:latin typeface="Calibri"/>
+                        </a:rPr>
+                        <a:t>-21.5%</a:t>
                       </a:r>
                     </a:p>
                   </a:txBody>
@@ -4822,7 +4845,7 @@
                           </a:solidFill>
                           <a:latin typeface="Calibri"/>
                         </a:rPr>
-                        <a:t>-22.8%</a:t>
+                        <a:t>33%</a:t>
                       </a:r>
                     </a:p>
                   </a:txBody>
@@ -4845,30 +4868,7 @@
                           </a:solidFill>
                           <a:latin typeface="Calibri"/>
                         </a:rPr>
-                        <a:t>35%</a:t>
-                      </a:r>
-                    </a:p>
-                  </a:txBody>
-                  <a:tcPr>
-                    <a:solidFill>
-                      <a:srgbClr val="FFFFFF"/>
-                    </a:solidFill>
-                  </a:tcPr>
-                </a:tc>
-                <a:tc>
-                  <a:txBody>
-                    <a:bodyPr/>
-                    <a:lstStyle/>
-                    <a:p>
-                      <a:pPr algn="r"/>
-                      <a:r>
-                        <a:rPr sz="1000" b="0">
-                          <a:solidFill>
-                            <a:srgbClr val="1F2A37"/>
-                          </a:solidFill>
-                          <a:latin typeface="Calibri"/>
-                        </a:rPr>
-                        <a:t>17.4</a:t>
+                        <a:t>17.5</a:t>
                       </a:r>
                     </a:p>
                   </a:txBody>
@@ -4952,7 +4952,7 @@
                 </a:solidFill>
                 <a:latin typeface="Calibri"/>
               </a:rPr>
-              <a:t>Breadth was risk-off: 2 of 8 names advanced on the day.</a:t>
+              <a:t>Breadth was risk-on: 7 of 8 names advanced on the day.</a:t>
             </a:r>
           </a:p>
           <a:p>
@@ -4968,7 +4968,7 @@
                 </a:solidFill>
                 <a:latin typeface="Calibri"/>
               </a:rPr>
-              <a:t>•  Best performer on the day: LT.NS at +3.72%.</a:t>
+              <a:t>•  Best performer on the day: INFY.NS at +3.36%.</a:t>
             </a:r>
           </a:p>
           <a:p>
@@ -4984,7 +4984,7 @@
                 </a:solidFill>
                 <a:latin typeface="Calibri"/>
               </a:rPr>
-              <a:t>•  Weakest on the day: INFY.NS at -3.43%.</a:t>
+              <a:t>•  Weakest on the day: RELIANCE.NS at -0.21%.</a:t>
             </a:r>
           </a:p>
           <a:p>
@@ -5000,7 +5000,7 @@
                 </a:solidFill>
                 <a:latin typeface="Calibri"/>
               </a:rPr>
-              <a:t>•  Median one-day move across the watchlist: -1.07%.</a:t>
+              <a:t>•  Median one-day move across the watchlist: +0.86%.</a:t>
             </a:r>
           </a:p>
           <a:p>
@@ -5016,7 +5016,23 @@
                 </a:solidFill>
                 <a:latin typeface="Calibri"/>
               </a:rPr>
-              <a:t>•  ITC.NS sits furthest below its 52-week high, at -35.4%.</a:t>
+              <a:t>•  ITC.NS sits furthest below its 52-week high, at -33.7%.</a:t>
+            </a:r>
+          </a:p>
+          <a:p>
+            <a:pPr>
+              <a:spcBef>
+                <a:spcPts val="500"/>
+              </a:spcBef>
+            </a:pPr>
+            <a:r>
+              <a:rPr sz="1000" b="0">
+                <a:solidFill>
+                  <a:srgbClr val="1F2A37"/>
+                </a:solidFill>
+                <a:latin typeface="Calibri"/>
+              </a:rPr>
+              <a:t>•  1 name(s) within 5% of the 52-week high: ICICIBANK.NS.</a:t>
             </a:r>
           </a:p>
           <a:p>
@@ -5048,7 +5064,7 @@
                 </a:solidFill>
                 <a:latin typeface="Calibri"/>
               </a:rPr>
-              <a:t>•  Highest 30-day realised volatility: TCS.NS at 34.5% annualised.</a:t>
+              <a:t>•  Highest 30-day realised volatility: INFY.NS at 33.9% annualised.</a:t>
             </a:r>
           </a:p>
           <a:p>
@@ -5064,7 +5080,7 @@
                 </a:solidFill>
                 <a:latin typeface="Calibri"/>
               </a:rPr>
-              <a:t>•  60 headlines collected, 2 tagged to a watchlist name by substring match (unverified).</a:t>
+              <a:t>•  60 headlines collected, 5 tagged to a watchlist name by substring match (unverified).</a:t>
             </a:r>
           </a:p>
           <a:p>
